--- a/presentations/0526_Stablecoin_Exorbitant_Privilege.pptx
+++ b/presentations/0526_Stablecoin_Exorbitant_Privilege.pptx
@@ -1213,7 +1213,7 @@
           <a:p>
             <a:fld id="{5BCAD085-E8A6-8845-BD4E-CB4CCA059FC4}" type="datetimeFigureOut">
               <a:rPr lang="en-US" smtClean="0"/>
-              <a:t>5/21/26</a:t>
+              <a:t>5/22/26</a:t>
             </a:fld>
             <a:endParaRPr lang="en-US"/>
           </a:p>
@@ -1381,7 +1381,7 @@
           <a:p>
             <a:fld id="{5BCAD085-E8A6-8845-BD4E-CB4CCA059FC4}" type="datetimeFigureOut">
               <a:rPr lang="en-US" smtClean="0"/>
-              <a:t>5/21/26</a:t>
+              <a:t>5/22/26</a:t>
             </a:fld>
             <a:endParaRPr lang="en-US"/>
           </a:p>
@@ -1559,7 +1559,7 @@
           <a:p>
             <a:fld id="{5BCAD085-E8A6-8845-BD4E-CB4CCA059FC4}" type="datetimeFigureOut">
               <a:rPr lang="en-US" smtClean="0"/>
-              <a:t>5/21/26</a:t>
+              <a:t>5/22/26</a:t>
             </a:fld>
             <a:endParaRPr lang="en-US"/>
           </a:p>
@@ -1727,7 +1727,7 @@
           <a:p>
             <a:fld id="{5BCAD085-E8A6-8845-BD4E-CB4CCA059FC4}" type="datetimeFigureOut">
               <a:rPr lang="en-US" smtClean="0"/>
-              <a:t>5/21/26</a:t>
+              <a:t>5/22/26</a:t>
             </a:fld>
             <a:endParaRPr lang="en-US"/>
           </a:p>
@@ -1972,7 +1972,7 @@
           <a:p>
             <a:fld id="{5BCAD085-E8A6-8845-BD4E-CB4CCA059FC4}" type="datetimeFigureOut">
               <a:rPr lang="en-US" smtClean="0"/>
-              <a:t>5/21/26</a:t>
+              <a:t>5/22/26</a:t>
             </a:fld>
             <a:endParaRPr lang="en-US"/>
           </a:p>
@@ -2257,7 +2257,7 @@
           <a:p>
             <a:fld id="{5BCAD085-E8A6-8845-BD4E-CB4CCA059FC4}" type="datetimeFigureOut">
               <a:rPr lang="en-US" smtClean="0"/>
-              <a:t>5/21/26</a:t>
+              <a:t>5/22/26</a:t>
             </a:fld>
             <a:endParaRPr lang="en-US"/>
           </a:p>
@@ -2676,7 +2676,7 @@
           <a:p>
             <a:fld id="{5BCAD085-E8A6-8845-BD4E-CB4CCA059FC4}" type="datetimeFigureOut">
               <a:rPr lang="en-US" smtClean="0"/>
-              <a:t>5/21/26</a:t>
+              <a:t>5/22/26</a:t>
             </a:fld>
             <a:endParaRPr lang="en-US"/>
           </a:p>
@@ -2793,7 +2793,7 @@
           <a:p>
             <a:fld id="{5BCAD085-E8A6-8845-BD4E-CB4CCA059FC4}" type="datetimeFigureOut">
               <a:rPr lang="en-US" smtClean="0"/>
-              <a:t>5/21/26</a:t>
+              <a:t>5/22/26</a:t>
             </a:fld>
             <a:endParaRPr lang="en-US"/>
           </a:p>
@@ -2888,7 +2888,7 @@
           <a:p>
             <a:fld id="{5BCAD085-E8A6-8845-BD4E-CB4CCA059FC4}" type="datetimeFigureOut">
               <a:rPr lang="en-US" smtClean="0"/>
-              <a:t>5/21/26</a:t>
+              <a:t>5/22/26</a:t>
             </a:fld>
             <a:endParaRPr lang="en-US"/>
           </a:p>
@@ -3163,7 +3163,7 @@
           <a:p>
             <a:fld id="{5BCAD085-E8A6-8845-BD4E-CB4CCA059FC4}" type="datetimeFigureOut">
               <a:rPr lang="en-US" smtClean="0"/>
-              <a:t>5/21/26</a:t>
+              <a:t>5/22/26</a:t>
             </a:fld>
             <a:endParaRPr lang="en-US"/>
           </a:p>
@@ -3415,7 +3415,7 @@
           <a:p>
             <a:fld id="{5BCAD085-E8A6-8845-BD4E-CB4CCA059FC4}" type="datetimeFigureOut">
               <a:rPr lang="en-US" smtClean="0"/>
-              <a:t>5/21/26</a:t>
+              <a:t>5/22/26</a:t>
             </a:fld>
             <a:endParaRPr lang="en-US"/>
           </a:p>
@@ -3626,7 +3626,7 @@
           <a:p>
             <a:fld id="{5BCAD085-E8A6-8845-BD4E-CB4CCA059FC4}" type="datetimeFigureOut">
               <a:rPr lang="en-US" smtClean="0"/>
-              <a:t>5/21/26</a:t>
+              <a:t>5/22/26</a:t>
             </a:fld>
             <a:endParaRPr lang="en-US"/>
           </a:p>
@@ -4858,13 +4858,31 @@
           <a:p>
             <a:pPr algn="l"/>
             <a:r>
-              <a:rPr sz="1200" b="0" i="0">
+              <a:rPr sz="1200" b="0" i="0" dirty="0">
                 <a:solidFill>
                   <a:srgbClr val="1A1A2E"/>
                 </a:solidFill>
                 <a:latin typeface="Calibri"/>
               </a:rPr>
-              <a:t>✓  Extended Maggiori (2017) with stablecoin supply S, treasury exposure θ, and liquid buffer L</a:t>
+              <a:t>✓  Extended Maggiori (2017) with stablecoin supply S, treasury exposure </a:t>
+            </a:r>
+            <a:r>
+              <a:rPr sz="1200" b="0" i="0" dirty="0" err="1">
+                <a:solidFill>
+                  <a:srgbClr val="1A1A2E"/>
+                </a:solidFill>
+                <a:latin typeface="Calibri"/>
+              </a:rPr>
+              <a:t>θ</a:t>
+            </a:r>
+            <a:r>
+              <a:rPr sz="1200" b="0" i="0" dirty="0">
+                <a:solidFill>
+                  <a:srgbClr val="1A1A2E"/>
+                </a:solidFill>
+                <a:latin typeface="Calibri"/>
+              </a:rPr>
+              <a:t>, and liquid buffer L</a:t>
             </a:r>
           </a:p>
         </p:txBody>
@@ -5016,7 +5034,7 @@
           <a:p>
             <a:pPr algn="l"/>
             <a:r>
-              <a:rPr sz="1200" b="0" i="0">
+              <a:rPr sz="1200" b="0" i="0" dirty="0">
                 <a:solidFill>
                   <a:srgbClr val="1A1A2E"/>
                 </a:solidFill>
@@ -5174,7 +5192,7 @@
           <a:p>
             <a:pPr algn="l"/>
             <a:r>
-              <a:rPr sz="1200" b="0" i="0">
+              <a:rPr sz="1200" b="0" i="0" dirty="0">
                 <a:solidFill>
                   <a:srgbClr val="1A1A2E"/>
                 </a:solidFill>
@@ -5332,13 +5350,31 @@
           <a:p>
             <a:pPr algn="l"/>
             <a:r>
-              <a:rPr sz="1200" b="0" i="0">
+              <a:rPr sz="1200" b="0" i="0" dirty="0">
                 <a:solidFill>
                   <a:srgbClr val="1A1A2E"/>
                 </a:solidFill>
                 <a:latin typeface="Calibri"/>
               </a:rPr>
-              <a:t>✓  3 stress episodes (LUNA, USDT depeg, SVB) — 27 pp CAR swing between low/high buffer regimes</a:t>
+              <a:t>✓  3 stress episodes (LUNA, USDT </a:t>
+            </a:r>
+            <a:r>
+              <a:rPr sz="1200" b="0" i="0" dirty="0" err="1">
+                <a:solidFill>
+                  <a:srgbClr val="1A1A2E"/>
+                </a:solidFill>
+                <a:latin typeface="Calibri"/>
+              </a:rPr>
+              <a:t>depeg</a:t>
+            </a:r>
+            <a:r>
+              <a:rPr sz="1200" b="0" i="0" dirty="0">
+                <a:solidFill>
+                  <a:srgbClr val="1A1A2E"/>
+                </a:solidFill>
+                <a:latin typeface="Calibri"/>
+              </a:rPr>
+              <a:t>, SVB) — 27 pp CAR swing between low/high buffer regimes</a:t>
             </a:r>
           </a:p>
         </p:txBody>
@@ -5809,7 +5845,7 @@
                 <a:spcPts val="0"/>
               </a:spcBef>
             </a:pPr>
-            <a:endParaRPr/>
+            <a:endParaRPr dirty="0"/>
           </a:p>
           <a:p>
             <a:pPr algn="l">
@@ -5818,7 +5854,7 @@
               </a:spcBef>
             </a:pPr>
             <a:r>
-              <a:rPr sz="1600" b="1" i="0">
+              <a:rPr sz="1600" b="1" i="0" dirty="0">
                 <a:solidFill>
                   <a:srgbClr val="D4632A"/>
                 </a:solidFill>
@@ -5834,7 +5870,7 @@
               </a:spcBef>
             </a:pPr>
             <a:r>
-              <a:rPr sz="1300" b="0" i="0">
+              <a:rPr sz="1300" b="0" i="0" dirty="0">
                 <a:solidFill>
                   <a:srgbClr val="1A1A2E"/>
                 </a:solidFill>
@@ -5850,7 +5886,7 @@
               </a:spcBef>
             </a:pPr>
             <a:r>
-              <a:rPr sz="1200" b="0" i="0">
+              <a:rPr sz="1200" b="0" i="0" dirty="0">
                 <a:solidFill>
                   <a:srgbClr val="1A1A2E"/>
                 </a:solidFill>
@@ -5866,7 +5902,7 @@
               </a:spcBef>
             </a:pPr>
             <a:r>
-              <a:rPr sz="1200" b="0" i="0">
+              <a:rPr sz="1200" b="0" i="0" dirty="0">
                 <a:solidFill>
                   <a:srgbClr val="1A1A2E"/>
                 </a:solidFill>
@@ -5882,7 +5918,7 @@
               </a:spcBef>
             </a:pPr>
             <a:r>
-              <a:rPr sz="1200" b="0" i="0">
+              <a:rPr sz="1200" b="0" i="0" dirty="0">
                 <a:solidFill>
                   <a:srgbClr val="1A1A2E"/>
                 </a:solidFill>
@@ -5898,7 +5934,7 @@
               </a:spcBef>
             </a:pPr>
             <a:r>
-              <a:rPr sz="600" b="0" i="0">
+              <a:rPr sz="600" b="0" i="0" dirty="0">
                 <a:solidFill>
                   <a:srgbClr val="1A1A2E"/>
                 </a:solidFill>
@@ -5914,7 +5950,7 @@
               </a:spcBef>
             </a:pPr>
             <a:r>
-              <a:rPr sz="1400" b="1" i="0">
+              <a:rPr sz="1400" b="1" i="0" dirty="0">
                 <a:solidFill>
                   <a:srgbClr val="1B3A72"/>
                 </a:solidFill>
@@ -5930,7 +5966,7 @@
               </a:spcBef>
             </a:pPr>
             <a:r>
-              <a:rPr sz="1300" b="0" i="0">
+              <a:rPr sz="1300" b="0" i="0" dirty="0">
                 <a:solidFill>
                   <a:srgbClr val="1A1A2E"/>
                 </a:solidFill>
@@ -5946,7 +5982,7 @@
               </a:spcBef>
             </a:pPr>
             <a:r>
-              <a:rPr sz="600" b="0" i="0">
+              <a:rPr sz="600" b="0" i="0" dirty="0">
                 <a:solidFill>
                   <a:srgbClr val="1A1A2E"/>
                 </a:solidFill>
@@ -5962,7 +5998,7 @@
               </a:spcBef>
             </a:pPr>
             <a:r>
-              <a:rPr sz="1200" b="1" i="1">
+              <a:rPr sz="1200" b="1" i="1" dirty="0">
                 <a:solidFill>
                   <a:srgbClr val="D4632A"/>
                 </a:solidFill>
@@ -6420,7 +6456,7 @@
                 <a:spcPts val="0"/>
               </a:spcBef>
             </a:pPr>
-            <a:endParaRPr/>
+            <a:endParaRPr dirty="0"/>
           </a:p>
           <a:p>
             <a:pPr algn="l">
@@ -6429,7 +6465,7 @@
               </a:spcBef>
             </a:pPr>
             <a:r>
-              <a:rPr sz="1300" b="0" i="0">
+              <a:rPr sz="1300" b="0" i="0" dirty="0">
                 <a:solidFill>
                   <a:srgbClr val="1A1A2E"/>
                 </a:solidFill>
@@ -6445,7 +6481,7 @@
               </a:spcBef>
             </a:pPr>
             <a:r>
-              <a:rPr sz="1300" b="0" i="0">
+              <a:rPr sz="1300" b="0" i="0" dirty="0">
                 <a:solidFill>
                   <a:srgbClr val="1A1A2E"/>
                 </a:solidFill>
@@ -6461,7 +6497,7 @@
               </a:spcBef>
             </a:pPr>
             <a:r>
-              <a:rPr sz="1300" b="0" i="0">
+              <a:rPr sz="1300" b="0" i="0" dirty="0">
                 <a:solidFill>
                   <a:srgbClr val="1A1A2E"/>
                 </a:solidFill>
@@ -6477,7 +6513,7 @@
               </a:spcBef>
             </a:pPr>
             <a:r>
-              <a:rPr sz="1300" b="0" i="0">
+              <a:rPr sz="1300" b="0" i="0" dirty="0">
                 <a:solidFill>
                   <a:srgbClr val="1A1A2E"/>
                 </a:solidFill>
@@ -6673,7 +6709,7 @@
                 <a:spcPts val="0"/>
               </a:spcBef>
             </a:pPr>
-            <a:endParaRPr/>
+            <a:endParaRPr dirty="0"/>
           </a:p>
           <a:p>
             <a:pPr algn="l">
@@ -6682,7 +6718,7 @@
               </a:spcBef>
             </a:pPr>
             <a:r>
-              <a:rPr sz="1300" b="0" i="0">
+              <a:rPr sz="1300" b="0" i="0" dirty="0">
                 <a:solidFill>
                   <a:srgbClr val="1A1A2E"/>
                 </a:solidFill>
@@ -6698,7 +6734,7 @@
               </a:spcBef>
             </a:pPr>
             <a:r>
-              <a:rPr sz="1300" b="0" i="0">
+              <a:rPr sz="1300" b="0" i="0" dirty="0">
                 <a:solidFill>
                   <a:srgbClr val="1A1A2E"/>
                 </a:solidFill>
@@ -6714,7 +6750,7 @@
               </a:spcBef>
             </a:pPr>
             <a:r>
-              <a:rPr sz="1300" b="0" i="0">
+              <a:rPr sz="1300" b="0" i="0" dirty="0">
                 <a:solidFill>
                   <a:srgbClr val="1A1A2E"/>
                 </a:solidFill>
@@ -6730,7 +6766,7 @@
               </a:spcBef>
             </a:pPr>
             <a:r>
-              <a:rPr sz="1300" b="0" i="0">
+              <a:rPr sz="1300" b="0" i="0" dirty="0">
                 <a:solidFill>
                   <a:srgbClr val="1A1A2E"/>
                 </a:solidFill>
@@ -6926,7 +6962,7 @@
                 <a:spcPts val="0"/>
               </a:spcBef>
             </a:pPr>
-            <a:endParaRPr/>
+            <a:endParaRPr dirty="0"/>
           </a:p>
           <a:p>
             <a:pPr algn="l">
@@ -6935,7 +6971,7 @@
               </a:spcBef>
             </a:pPr>
             <a:r>
-              <a:rPr sz="1300" b="0" i="0">
+              <a:rPr sz="1300" b="0" i="0" dirty="0">
                 <a:solidFill>
                   <a:srgbClr val="1A1A2E"/>
                 </a:solidFill>
@@ -6951,7 +6987,7 @@
               </a:spcBef>
             </a:pPr>
             <a:r>
-              <a:rPr sz="1300" b="0" i="0">
+              <a:rPr sz="1300" b="0" i="0" dirty="0">
                 <a:solidFill>
                   <a:srgbClr val="1A1A2E"/>
                 </a:solidFill>
@@ -6967,7 +7003,7 @@
               </a:spcBef>
             </a:pPr>
             <a:r>
-              <a:rPr sz="1300" b="0" i="0">
+              <a:rPr sz="1300" b="0" i="0" dirty="0">
                 <a:solidFill>
                   <a:srgbClr val="1A1A2E"/>
                 </a:solidFill>
@@ -6983,7 +7019,7 @@
               </a:spcBef>
             </a:pPr>
             <a:r>
-              <a:rPr sz="1300" b="0" i="0">
+              <a:rPr sz="1300" b="0" i="0" dirty="0">
                 <a:solidFill>
                   <a:srgbClr val="1A1A2E"/>
                 </a:solidFill>
@@ -7177,7 +7213,7 @@
           <a:p>
             <a:pPr algn="l"/>
             <a:r>
-              <a:rPr sz="1100" b="0" i="0">
+              <a:rPr sz="1100" b="0" i="0" dirty="0">
                 <a:solidFill>
                   <a:srgbClr val="1A1A2E"/>
                 </a:solidFill>
@@ -7291,7 +7327,7 @@
           <a:p>
             <a:pPr algn="l"/>
             <a:r>
-              <a:rPr sz="1100" b="0" i="0">
+              <a:rPr sz="1100" b="0" i="0" dirty="0">
                 <a:solidFill>
                   <a:srgbClr val="1A1A2E"/>
                 </a:solidFill>
@@ -7406,7 +7442,7 @@
           <a:p>
             <a:pPr algn="l"/>
             <a:r>
-              <a:rPr sz="1100" b="0" i="0">
+              <a:rPr sz="1100" b="0" i="0" dirty="0">
                 <a:solidFill>
                   <a:srgbClr val="1A1A2E"/>
                 </a:solidFill>
@@ -7425,8 +7461,8 @@
         </p:nvSpPr>
         <p:spPr>
           <a:xfrm>
-            <a:off x="0" y="5596128"/>
-            <a:ext cx="12188952" cy="1097280"/>
+            <a:off x="0" y="5843016"/>
+            <a:ext cx="12188952" cy="850392"/>
           </a:xfrm>
           <a:prstGeom prst="rect">
             <a:avLst/>
@@ -7469,7 +7505,7 @@
         </p:nvSpPr>
         <p:spPr>
           <a:xfrm>
-            <a:off x="548640" y="5760720"/>
+            <a:off x="566928" y="6007608"/>
             <a:ext cx="11274552" cy="804672"/>
           </a:xfrm>
           <a:prstGeom prst="rect">
@@ -7767,7 +7803,7 @@
         <p:spPr>
           <a:xfrm>
             <a:off x="502920" y="1325880"/>
-            <a:ext cx="11064240" cy="384048"/>
+            <a:ext cx="11064240" cy="369332"/>
           </a:xfrm>
           <a:prstGeom prst="rect">
             <a:avLst/>
@@ -7782,13 +7818,34 @@
           <a:p>
             <a:pPr algn="ctr"/>
             <a:r>
-              <a:rPr sz="1800" b="1" i="0">
+              <a:rPr sz="1800" b="1" i="0" dirty="0">
                 <a:solidFill>
                   <a:srgbClr val="FFFFFF"/>
                 </a:solidFill>
-                <a:latin typeface="Courier New"/>
-              </a:rPr>
-              <a:t>L  =  Liquid Buffer  =  Cash &amp; Cash-Equivalent Reserves  ÷  Total Stablecoin Supply</a:t>
+                <a:latin typeface="AppleGothic" pitchFamily="2" charset="-127"/>
+                <a:ea typeface="AppleGothic" pitchFamily="2" charset="-127"/>
+              </a:rPr>
+              <a:t>L  =  Liquid Buffer  =  Cash </a:t>
+            </a:r>
+            <a:r>
+              <a:rPr lang="en-US" sz="1800" b="1" i="0" dirty="0">
+                <a:solidFill>
+                  <a:srgbClr val="FFFFFF"/>
+                </a:solidFill>
+                <a:latin typeface="AppleGothic" pitchFamily="2" charset="-127"/>
+                <a:ea typeface="AppleGothic" pitchFamily="2" charset="-127"/>
+              </a:rPr>
+              <a:t>&amp;</a:t>
+            </a:r>
+            <a:r>
+              <a:rPr sz="1800" b="1" i="0" dirty="0">
+                <a:solidFill>
+                  <a:srgbClr val="FFFFFF"/>
+                </a:solidFill>
+                <a:latin typeface="AppleGothic" pitchFamily="2" charset="-127"/>
+                <a:ea typeface="AppleGothic" pitchFamily="2" charset="-127"/>
+              </a:rPr>
+              <a:t> Cash-Equivalent Reserves  ÷  Total Stablecoin Supply</a:t>
             </a:r>
           </a:p>
         </p:txBody>
@@ -7801,8 +7858,8 @@
         </p:nvSpPr>
         <p:spPr>
           <a:xfrm>
-            <a:off x="502920" y="1737360"/>
-            <a:ext cx="11064240" cy="347472"/>
+            <a:off x="502920" y="1860804"/>
+            <a:ext cx="11064240" cy="292388"/>
           </a:xfrm>
           <a:prstGeom prst="rect">
             <a:avLst/>
@@ -7817,13 +7874,13 @@
           <a:p>
             <a:pPr algn="ctr"/>
             <a:r>
-              <a:rPr sz="1300" b="0" i="1">
+              <a:rPr sz="1300" b="0" i="1" dirty="0">
                 <a:solidFill>
                   <a:srgbClr val="AAC4E8"/>
                 </a:solidFill>
                 <a:latin typeface="Calibri"/>
               </a:rPr>
-              <a:t>Estimated threshold from Hansen (2000) threshold regression:   L*  =  13%  of supply</a:t>
+              <a:t>Estimated from Hansen (2000) threshold regression:   L*  =  13%  of supply</a:t>
             </a:r>
           </a:p>
         </p:txBody>
@@ -7931,7 +7988,7 @@
           <a:p>
             <a:pPr algn="ctr"/>
             <a:r>
-              <a:rPr sz="1100" b="0" i="1">
+              <a:rPr sz="1100" b="0" i="1" dirty="0">
                 <a:solidFill>
                   <a:srgbClr val="555566"/>
                 </a:solidFill>
@@ -8013,7 +8070,7 @@
                 <a:spcPts val="0"/>
               </a:spcBef>
             </a:pPr>
-            <a:endParaRPr/>
+            <a:endParaRPr dirty="0"/>
           </a:p>
           <a:p>
             <a:pPr algn="l">
@@ -8022,7 +8079,7 @@
               </a:spcBef>
             </a:pPr>
             <a:r>
-              <a:rPr sz="1300" b="0" i="0">
+              <a:rPr sz="1300" b="0" i="0" dirty="0">
                 <a:solidFill>
                   <a:srgbClr val="1A1A2E"/>
                 </a:solidFill>
@@ -8038,7 +8095,7 @@
               </a:spcBef>
             </a:pPr>
             <a:r>
-              <a:rPr sz="1300" b="0" i="0">
+              <a:rPr sz="1300" b="0" i="0" dirty="0">
                 <a:solidFill>
                   <a:srgbClr val="1A1A2E"/>
                 </a:solidFill>
@@ -8054,7 +8111,7 @@
               </a:spcBef>
             </a:pPr>
             <a:r>
-              <a:rPr sz="1300" b="0" i="0">
+              <a:rPr sz="1300" b="0" i="0" dirty="0">
                 <a:solidFill>
                   <a:srgbClr val="1A1A2E"/>
                 </a:solidFill>
@@ -8070,7 +8127,7 @@
               </a:spcBef>
             </a:pPr>
             <a:r>
-              <a:rPr sz="1300" b="0" i="0">
+              <a:rPr sz="1300" b="0" i="0" dirty="0">
                 <a:solidFill>
                   <a:srgbClr val="1A1A2E"/>
                 </a:solidFill>
@@ -8086,7 +8143,7 @@
               </a:spcBef>
             </a:pPr>
             <a:r>
-              <a:rPr sz="1300" b="0" i="0">
+              <a:rPr sz="1300" b="0" i="0" dirty="0">
                 <a:solidFill>
                   <a:srgbClr val="1A1A2E"/>
                 </a:solidFill>
@@ -8361,7 +8418,7 @@
                 <a:spcPts val="0"/>
               </a:spcBef>
             </a:pPr>
-            <a:endParaRPr/>
+            <a:endParaRPr dirty="0"/>
           </a:p>
           <a:p>
             <a:pPr algn="l">
@@ -8370,7 +8427,7 @@
               </a:spcBef>
             </a:pPr>
             <a:r>
-              <a:rPr sz="1300" b="0" i="0">
+              <a:rPr sz="1300" b="0" i="0" dirty="0">
                 <a:solidFill>
                   <a:srgbClr val="1A1A2E"/>
                 </a:solidFill>
@@ -8386,7 +8443,7 @@
               </a:spcBef>
             </a:pPr>
             <a:r>
-              <a:rPr sz="1300" b="0" i="0">
+              <a:rPr sz="1300" b="0" i="0" dirty="0">
                 <a:solidFill>
                   <a:srgbClr val="1A1A2E"/>
                 </a:solidFill>
@@ -8402,7 +8459,7 @@
               </a:spcBef>
             </a:pPr>
             <a:r>
-              <a:rPr sz="1300" b="0" i="0">
+              <a:rPr sz="1300" b="0" i="0" dirty="0">
                 <a:solidFill>
                   <a:srgbClr val="1A1A2E"/>
                 </a:solidFill>
@@ -8418,7 +8475,7 @@
               </a:spcBef>
             </a:pPr>
             <a:r>
-              <a:rPr sz="1300" b="0" i="0">
+              <a:rPr sz="1300" b="0" i="0" dirty="0">
                 <a:solidFill>
                   <a:srgbClr val="1A1A2E"/>
                 </a:solidFill>
@@ -8434,7 +8491,7 @@
               </a:spcBef>
             </a:pPr>
             <a:r>
-              <a:rPr sz="1300" b="0" i="0">
+              <a:rPr sz="1300" b="0" i="0" dirty="0">
                 <a:solidFill>
                   <a:srgbClr val="1A1A2E"/>
                 </a:solidFill>

--- a/presentations/0526_Stablecoin_Exorbitant_Privilege.pptx
+++ b/presentations/0526_Stablecoin_Exorbitant_Privilege.pptx
@@ -5,7 +5,7 @@
     <p:sldMasterId id="2147483648" r:id="rId1"/>
   </p:sldMasterIdLst>
   <p:notesMasterIdLst>
-    <p:notesMasterId r:id="rId12"/>
+    <p:notesMasterId r:id="rId13"/>
   </p:notesMasterIdLst>
   <p:sldIdLst>
     <p:sldId id="266" r:id="rId2"/>
@@ -17,7 +17,8 @@
     <p:sldId id="262" r:id="rId8"/>
     <p:sldId id="263" r:id="rId9"/>
     <p:sldId id="264" r:id="rId10"/>
-    <p:sldId id="267" r:id="rId11"/>
+    <p:sldId id="268" r:id="rId11"/>
+    <p:sldId id="267" r:id="rId12"/>
   </p:sldIdLst>
   <p:sldSz cx="12188825" cy="6858000"/>
   <p:notesSz cx="6858000" cy="9144000"/>
@@ -323,7 +324,7 @@
             </a:pPr>
             <a:r>
               <a:rPr lang="en-US" altLang="ko-KR" dirty="0"/>
-              <a:t>Good afternoon, everyone. Our paper is called Stablecoins and the Exorbitant Privilege. The central argument is that large stablecoin issuers like Tether and Circle have become significant buyers of U.S. Treasury bills — which amplifies America's safe-asset privilege in normal times, but can sharply reverse that benefit during a run if their cash reserves are too thin. Today we want to address some of the methodological questions that came up last time and walk you through our three key findings clearly.</a:t>
+              <a:t>Good afternoon, everyone. We will be talking about Stablecoins and the Exorbitant Privilege. The central argument is that large stablecoin issuers like Tether and Circle have become significant buyers of U.S. Treasury bills — which amplifies America's safe-asset privilege in normal times, but can sharply reverse that benefit during a run if their cash reserves are too thin. Today we want to address some of the methodological questions that came up last time and walk you through our three key findings clearly.</a:t>
             </a:r>
           </a:p>
           <a:p>
@@ -352,6 +353,126 @@
 </file>
 
 <file path=ppt/notesSlides/notesSlide10.xml><?xml version="1.0" encoding="utf-8"?>
+<p:notes xmlns:a="http://schemas.openxmlformats.org/drawingml/2006/main" xmlns:r="http://schemas.openxmlformats.org/officeDocument/2006/relationships" xmlns:p="http://schemas.openxmlformats.org/presentationml/2006/main">
+  <p:cSld>
+    <p:spTree>
+      <p:nvGrpSpPr>
+        <p:cNvPr id="1" name="">
+          <a:extLst>
+            <a:ext uri="{FF2B5EF4-FFF2-40B4-BE49-F238E27FC236}">
+              <a16:creationId xmlns:a16="http://schemas.microsoft.com/office/drawing/2014/main" id="{EAA49F8E-9BBD-27AA-BEEF-D089808BB2BB}"/>
+            </a:ext>
+          </a:extLst>
+        </p:cNvPr>
+        <p:cNvGrpSpPr/>
+        <p:nvPr/>
+      </p:nvGrpSpPr>
+      <p:grpSpPr>
+        <a:xfrm>
+          <a:off x="0" y="0"/>
+          <a:ext cx="0" cy="0"/>
+          <a:chOff x="0" y="0"/>
+          <a:chExt cx="0" cy="0"/>
+        </a:xfrm>
+      </p:grpSpPr>
+      <p:sp>
+        <p:nvSpPr>
+          <p:cNvPr id="2" name="Slide Image Placeholder 1">
+            <a:extLst>
+              <a:ext uri="{FF2B5EF4-FFF2-40B4-BE49-F238E27FC236}">
+                <a16:creationId xmlns:a16="http://schemas.microsoft.com/office/drawing/2014/main" id="{84FE41A2-D3E5-F478-5AA3-F6236697C3EC}"/>
+              </a:ext>
+            </a:extLst>
+          </p:cNvPr>
+          <p:cNvSpPr>
+            <a:spLocks noGrp="1" noRot="1" noChangeAspect="1"/>
+          </p:cNvSpPr>
+          <p:nvPr>
+            <p:ph type="sldImg" idx="2"/>
+          </p:nvPr>
+        </p:nvSpPr>
+        <p:spPr/>
+      </p:sp>
+      <p:sp>
+        <p:nvSpPr>
+          <p:cNvPr id="3" name="Notes Placeholder 2">
+            <a:extLst>
+              <a:ext uri="{FF2B5EF4-FFF2-40B4-BE49-F238E27FC236}">
+                <a16:creationId xmlns:a16="http://schemas.microsoft.com/office/drawing/2014/main" id="{65D42733-54B7-9A03-EA7F-F155A45FCA96}"/>
+              </a:ext>
+            </a:extLst>
+          </p:cNvPr>
+          <p:cNvSpPr>
+            <a:spLocks noGrp="1"/>
+          </p:cNvSpPr>
+          <p:nvPr>
+            <p:ph type="body" sz="quarter" idx="3"/>
+          </p:nvPr>
+        </p:nvSpPr>
+        <p:spPr/>
+        <p:txBody>
+          <a:bodyPr/>
+          <a:lstStyle/>
+          <a:p>
+            <a:r>
+              <a:rPr dirty="0"/>
+              <a:t>On the right is what we are planning for next week. We are running a placebo test — </a:t>
+            </a:r>
+            <a:r>
+              <a:rPr b="1" dirty="0"/>
+              <a:t>we take three ordinary, uneventful days with the same buffer conditions as our real events, run the exact same methodology</a:t>
+            </a:r>
+            <a:r>
+              <a:rPr lang="en-US" b="1" dirty="0"/>
+              <a:t>.</a:t>
+            </a:r>
+            <a:r>
+              <a:rPr b="1" dirty="0"/>
+              <a:t>. </a:t>
+            </a:r>
+            <a:r>
+              <a:rPr dirty="0"/>
+              <a:t>Our preliminary result already shows the placebo CARs are less than one basis point, compared to nine to eighteen basis points in the actual events. That is a 22 times difference, which strongly supports that our results are real and not just </a:t>
+            </a:r>
+            <a:r>
+              <a:t>noise.</a:t>
+            </a:r>
+            <a:endParaRPr dirty="0"/>
+          </a:p>
+        </p:txBody>
+      </p:sp>
+      <p:sp>
+        <p:nvSpPr>
+          <p:cNvPr id="4" name="Slide Number Placeholder 3">
+            <a:extLst>
+              <a:ext uri="{FF2B5EF4-FFF2-40B4-BE49-F238E27FC236}">
+                <a16:creationId xmlns:a16="http://schemas.microsoft.com/office/drawing/2014/main" id="{F21A83D7-45A9-A24F-0E49-7C44D4017AD0}"/>
+              </a:ext>
+            </a:extLst>
+          </p:cNvPr>
+          <p:cNvSpPr>
+            <a:spLocks noGrp="1"/>
+          </p:cNvSpPr>
+          <p:nvPr>
+            <p:ph type="sldNum" sz="quarter" idx="5"/>
+          </p:nvPr>
+        </p:nvSpPr>
+        <p:spPr/>
+      </p:sp>
+    </p:spTree>
+    <p:extLst>
+      <p:ext uri="{BB962C8B-B14F-4D97-AF65-F5344CB8AC3E}">
+        <p14:creationId xmlns:p14="http://schemas.microsoft.com/office/powerpoint/2010/main" val="1070238734"/>
+      </p:ext>
+    </p:extLst>
+  </p:cSld>
+  <p:clrMapOvr>
+    <a:masterClrMapping/>
+  </p:clrMapOvr>
+</p:notes>
+</file>
+
+<file path=ppt/notesSlides/notesSlide11.xml><?xml version="1.0" encoding="utf-8"?>
 <p:notes xmlns:a="http://schemas.openxmlformats.org/drawingml/2006/main" xmlns:r="http://schemas.openxmlformats.org/officeDocument/2006/relationships" xmlns:p="http://schemas.openxmlformats.org/presentationml/2006/main">
   <p:cSld>
     <p:spTree>
@@ -500,7 +621,7 @@
           <a:p>
             <a:r>
               <a:rPr dirty="0"/>
-              <a:t>Let me quickly walk you through what we have done and what is coming. On the left, you can see everything we have completed: the theoretical framework, the main regression, the threshold test, the event study across three crises, and several robustness checks. This deck specifically addresses the clarification questions from last session — why we use the OIS spread, what the buffer condition is, and how to read the event study graphs. On the right is what we are planning for next week. We are running a placebo test — we take three ordinary, uneventful days with the same buffer conditions as our real events, run the exact same methodology, and show that nothing unusual happens. Our preliminary result already shows the placebo CARs are less than one basis point, compared to nine to eighteen basis points in the actual events. That is a 22 times difference, which strongly supports that our results are real and not just noise.</a:t>
+              <a:t>Let me quickly walk you through what we have done and what is coming. On the left, you can see everything we have completed: the theoretical framework, the main regression, the threshold test, the event study across three crises, and several robustness checks. This deck specifically addresses the clarification questions from last session — why we use the OIS spread, what the buffer condition is, and how to read the event study graphs. </a:t>
             </a:r>
           </a:p>
         </p:txBody>
@@ -571,7 +692,63 @@
           <a:p>
             <a:r>
               <a:rPr dirty="0"/>
-              <a:t>A question came up about why we use the OIS-Treasury spread instead of just Treasury yields. Here is the intuition. A raw T-bill yield moves for two completely different reasons at the same time: one is the Fed raising or cutting interest rates, and the other is investors specifically wanting to hold safe U.S. Treasury bills. We only care about the second one — the safe-asset demand. The OIS rate, which stands for Overnight Index Swap, tracks market expectations of the Fed Funds rate. So when we subtract it from the T-bill yield, we cancel out the monetary policy part and are left with just the premium that investors pay to hold Treasuries specifically. That premium is exactly what stablecoin issuers affect when they buy T-bills. This approach is standard in the literature — Krishnamurthy and Vissing-Jorgensen in 2012, and Nagel in 2016, both use this same spread as their measure of safe-asset convenience yield. The practical implication: if we had used raw yields, a Fed rate cut and a Tether buying surge would look identical in our data. The spread separates them cleanly.</a:t>
+              <a:t>A question came up about why we use the OIS-Treasury spread instead of just Treasury yields. Here is the intuition. A raw T-bill yield</a:t>
+            </a:r>
+            <a:r>
+              <a:rPr lang="en-US" dirty="0"/>
+              <a:t> (red)</a:t>
+            </a:r>
+            <a:r>
+              <a:rPr dirty="0"/>
+              <a:t> moves for two completely different reasons at the same time: one is the Fed raising or cutting </a:t>
+            </a:r>
+            <a:r>
+              <a:rPr lang="en-US" dirty="0"/>
+              <a:t>the </a:t>
+            </a:r>
+            <a:r>
+              <a:rPr dirty="0"/>
+              <a:t>interest rates, and the other is investors specifically wanting to hold safe U.S. Treasury bills. </a:t>
+            </a:r>
+            <a:r>
+              <a:rPr b="1" dirty="0"/>
+              <a:t>We only care about the second one — the safe-asset demand. </a:t>
+            </a:r>
+            <a:endParaRPr lang="en-US" b="1" dirty="0"/>
+          </a:p>
+          <a:p>
+            <a:endParaRPr lang="en-US" b="1" dirty="0"/>
+          </a:p>
+          <a:p>
+            <a:r>
+              <a:rPr dirty="0"/>
+              <a:t>The OIS rate</a:t>
+            </a:r>
+            <a:r>
+              <a:rPr lang="en-US" dirty="0"/>
+              <a:t> (blue)</a:t>
+            </a:r>
+            <a:r>
+              <a:rPr dirty="0"/>
+              <a:t>, which stands for Overnight Index Swap, tracks market expectations of the Fed Funds rate. So when we subtract it from the T-bill yield, we cancel out the monetary policy part and are left with just the premium that investors pay to hold Treasuries specifically. That premium is exactly what stablecoin issuers affect when they buy T-bills. </a:t>
+            </a:r>
+            <a:endParaRPr lang="en-US" dirty="0"/>
+          </a:p>
+          <a:p>
+            <a:endParaRPr lang="en-US" dirty="0"/>
+          </a:p>
+          <a:p>
+            <a:r>
+              <a:rPr dirty="0"/>
+              <a:t>This approach is standard in the literature — Krishnamurthy and Vissing-Jorgensen in 2012, and Nagel in 2016, both use this same spread as their measure of safe-asset convenience yield. The practical implication: </a:t>
+            </a:r>
+            <a:r>
+              <a:rPr b="1" dirty="0"/>
+              <a:t>if we had used raw yields, a Fed rate cut and a Tether buying surge would look identical in our data. </a:t>
+            </a:r>
+            <a:r>
+              <a:rPr dirty="0"/>
+              <a:t>The spread separates them cleanly.</a:t>
             </a:r>
           </a:p>
         </p:txBody>
@@ -641,7 +818,16 @@
           <a:lstStyle/>
           <a:p>
             <a:r>
-              <a:t>The buffer condition is the central variable in our paper, so let me explain it precisely. L is the liquid buffer — it is the share of an issuer's reserves held in cash or cash equivalents, divided by the total stablecoin supply outstanding. Our Hansen threshold regression estimates a critical cutoff of 13 percent. Here is why it matters. When investors want to redeem their stablecoins for dollars, the issuer has to pay them back. If the issuer holds enough cash — above 13 percent — they simply pay from that cash and their Treasury bill holdings are untouched. The T-bill market does not feel anything. But if the cash buffer is below 13 percent, the issuer cannot cover redemptions from cash alone. They have to sell Treasury bills quickly to raise the dollars. That sudden selling pushes T-bill yields up relative to OIS — the spread spikes. So the buffer condition is essentially asking: does this issuer have enough cash to absorb a redemption shock without being forced to liquidate their T-bill portfolio? In May 2022, the answer was no. In March 2023, the answer was yes.</a:t>
+              <a:rPr dirty="0"/>
+              <a:t>The buffer condition is the central variable in our paper, so let me explain it precisely. L is the liquid buffer — it is the share of an issuer's reserves held in cash or cash equivalents, divided by the total stablecoin supply outstanding. Our Hansen threshold regression estimates a critical cutoff of 13 percent. Here is why it matters. When investors want to redeem their stablecoins for dollars, the issuer has to pay them back. If the issuer holds enough cash — above 13 percent — they simply pay from that cash and their Treasury bill holdings are untouched. The T-bill market does not feel anything. But if the cash buffer is below 13 percent, the issuer cannot cover redemptions from cash alone. They have to sell Treasury bills quickly to raise the dollars. That sudden selling pushes T-bill yields up relative to OIS — the spread spikes. So the buffer condition is essentially asking: does this issuer have enough cash to absorb a redemption shock without being forced to liquidate their T-bill portfolio? In May 2022, the answer </a:t>
+            </a:r>
+            <a:r>
+              <a:rPr lang="en-US" dirty="0"/>
+              <a:t>to holding enough cash </a:t>
+            </a:r>
+            <a:r>
+              <a:rPr dirty="0"/>
+              <a:t>was no. In March 2023, the answer was yes.</a:t>
             </a:r>
           </a:p>
         </p:txBody>
@@ -711,8 +897,1697 @@
           <a:lstStyle/>
           <a:p>
             <a:r>
-              <a:t>CAR stands for Cumulative Abnormal Return — but in our context it is the cumulative abnormal spread, not a stock return. Let me explain what that means in plain terms. Before each crisis event, we estimate how the OIS-Treasury spread normally behaves using data from about six months prior. We build a simple model that says: given today's VIX level and global equity returns, what would we expect the spread to be? The abnormal spread on any given day is just the actual spread minus that prediction. If nothing unusual is happening, this should be close to zero. CAR is simply the running total of those daily abnormal spreads from five days before the event through twenty days after. So the y-axis is in percentage points of spread deviation accumulated over time. A CAR of plus 8.9 means that by day twenty, the spread had built up 8.9 percentage points more than we would normally expect — that is a large and persistent deviation. A CAR of minus 18 means the spread was 18 percentage points below normal — which happened because investors were rushing into T-bills for safety, compressing yields. A flat line at zero would mean the event had no measurable effect on Treasury markets.</a:t>
-            </a:r>
+              <a:rPr dirty="0"/>
+              <a:t>CAR stands for Cumulative Abnormal Return — but in our context it is the cumulative abnormal spread, not a stock return. Let me explain what that means in plain terms. Before each crisis event, we estimate how the OIS-Treasury spread normally behaves using data from about six months prior. We build a simple model that says: </a:t>
+            </a:r>
+            <a:r>
+              <a:rPr b="1" dirty="0"/>
+              <a:t>given today's VIX</a:t>
+            </a:r>
+            <a:r>
+              <a:rPr lang="en-US" b="1" dirty="0"/>
+              <a:t> (Volatility index)</a:t>
+            </a:r>
+            <a:r>
+              <a:rPr b="1" dirty="0"/>
+              <a:t> level and global equity returns, what would we expect the spread to be? </a:t>
+            </a:r>
+            <a:endParaRPr lang="en-US" b="1" dirty="0"/>
+          </a:p>
+          <a:p>
+            <a:endParaRPr lang="en-US" b="1" dirty="0"/>
+          </a:p>
+          <a:p>
+            <a:r>
+              <a:rPr dirty="0"/>
+              <a:t>The abnormal spread on any given day is just the actual spread minus that prediction. If nothing unusual is happening, this should be close to zero. CAR is simply the running total of those daily abnormal spreads from five days before the event through twenty days after. </a:t>
+            </a:r>
+            <a:r>
+              <a:rPr b="1" dirty="0"/>
+              <a:t>So the y-axis is in percentage points of spread deviation accumulated over time. </a:t>
+            </a:r>
+            <a:endParaRPr lang="en-US" b="1" dirty="0"/>
+          </a:p>
+          <a:p>
+            <a:endParaRPr lang="en-US" dirty="0"/>
+          </a:p>
+          <a:p>
+            <a:r>
+              <a:rPr dirty="0"/>
+              <a:t>A CAR of plus 8.9 means that by day twenty, </a:t>
+            </a:r>
+            <a:r>
+              <a:rPr b="1" dirty="0"/>
+              <a:t>the spread had built up 8.9 percentage points more than we would normally expect — that is a large and persistent deviation.</a:t>
+            </a:r>
+            <a:r>
+              <a:rPr dirty="0"/>
+              <a:t> A CAR of minus 18 means the spread was 18 percentage points below normal — which happened because investors were rushing into T-bills for safety, compressing yields. A flat line at zero would mean the event had no measurable effect on Treasury markets.</a:t>
+            </a:r>
+            <a:endParaRPr lang="en-US" dirty="0"/>
+          </a:p>
+          <a:p>
+            <a:endParaRPr lang="en-US" dirty="0"/>
+          </a:p>
+          <a:p>
+            <a:r>
+              <a:rPr lang="en-US" dirty="0"/>
+              <a:t>We will go through each event. </a:t>
+            </a:r>
+          </a:p>
+          <a:p>
+            <a:endParaRPr lang="en-US" dirty="0"/>
+          </a:p>
+          <a:p>
+            <a:r>
+              <a:rPr lang="en-US" dirty="0"/>
+              <a:t>Note: </a:t>
+            </a:r>
+            <a:r>
+              <a:rPr lang="ko-KR" altLang="ko-KR" sz="1200" b="0" i="0" kern="1200" dirty="0">
+                <a:solidFill>
+                  <a:schemeClr val="tx1"/>
+                </a:solidFill>
+                <a:effectLst/>
+                <a:latin typeface="+mn-lt"/>
+                <a:ea typeface="+mn-ea"/>
+                <a:cs typeface="+mn-cs"/>
+              </a:rPr>
+              <a:t>VIX </a:t>
+            </a:r>
+            <a:r>
+              <a:rPr lang="ko-KR" altLang="ko-KR" sz="1200" b="0" i="0" kern="1200" dirty="0" err="1">
+                <a:solidFill>
+                  <a:schemeClr val="tx1"/>
+                </a:solidFill>
+                <a:effectLst/>
+                <a:latin typeface="+mn-lt"/>
+                <a:ea typeface="+mn-ea"/>
+                <a:cs typeface="+mn-cs"/>
+              </a:rPr>
+              <a:t>is</a:t>
+            </a:r>
+            <a:r>
+              <a:rPr lang="ko-KR" altLang="ko-KR" sz="1200" b="0" i="0" kern="1200" dirty="0">
+                <a:solidFill>
+                  <a:schemeClr val="tx1"/>
+                </a:solidFill>
+                <a:effectLst/>
+                <a:latin typeface="+mn-lt"/>
+                <a:ea typeface="+mn-ea"/>
+                <a:cs typeface="+mn-cs"/>
+              </a:rPr>
+              <a:t> </a:t>
+            </a:r>
+            <a:r>
+              <a:rPr lang="ko-KR" altLang="ko-KR" sz="1200" b="0" i="0" kern="1200" dirty="0" err="1">
+                <a:solidFill>
+                  <a:schemeClr val="tx1"/>
+                </a:solidFill>
+                <a:effectLst/>
+                <a:latin typeface="+mn-lt"/>
+                <a:ea typeface="+mn-ea"/>
+                <a:cs typeface="+mn-cs"/>
+              </a:rPr>
+              <a:t>a</a:t>
+            </a:r>
+            <a:r>
+              <a:rPr lang="ko-KR" altLang="ko-KR" sz="1200" b="0" i="0" kern="1200" dirty="0">
+                <a:solidFill>
+                  <a:schemeClr val="tx1"/>
+                </a:solidFill>
+                <a:effectLst/>
+                <a:latin typeface="+mn-lt"/>
+                <a:ea typeface="+mn-ea"/>
+                <a:cs typeface="+mn-cs"/>
+              </a:rPr>
+              <a:t> </a:t>
+            </a:r>
+            <a:r>
+              <a:rPr lang="ko-KR" altLang="ko-KR" sz="1200" b="1" i="0" kern="1200" dirty="0" err="1">
+                <a:solidFill>
+                  <a:schemeClr val="tx1"/>
+                </a:solidFill>
+                <a:effectLst/>
+                <a:latin typeface="+mn-lt"/>
+                <a:ea typeface="+mn-ea"/>
+                <a:cs typeface="+mn-cs"/>
+              </a:rPr>
+              <a:t>control</a:t>
+            </a:r>
+            <a:r>
+              <a:rPr lang="ko-KR" altLang="ko-KR" sz="1200" b="1" i="0" kern="1200" dirty="0">
+                <a:solidFill>
+                  <a:schemeClr val="tx1"/>
+                </a:solidFill>
+                <a:effectLst/>
+                <a:latin typeface="+mn-lt"/>
+                <a:ea typeface="+mn-ea"/>
+                <a:cs typeface="+mn-cs"/>
+              </a:rPr>
+              <a:t> </a:t>
+            </a:r>
+            <a:r>
+              <a:rPr lang="ko-KR" altLang="ko-KR" sz="1200" b="1" i="0" kern="1200" dirty="0" err="1">
+                <a:solidFill>
+                  <a:schemeClr val="tx1"/>
+                </a:solidFill>
+                <a:effectLst/>
+                <a:latin typeface="+mn-lt"/>
+                <a:ea typeface="+mn-ea"/>
+                <a:cs typeface="+mn-cs"/>
+              </a:rPr>
+              <a:t>variable</a:t>
+            </a:r>
+            <a:r>
+              <a:rPr lang="ko-KR" altLang="ko-KR" sz="1200" b="0" i="0" kern="1200" dirty="0">
+                <a:solidFill>
+                  <a:schemeClr val="tx1"/>
+                </a:solidFill>
+                <a:effectLst/>
+                <a:latin typeface="+mn-lt"/>
+                <a:ea typeface="+mn-ea"/>
+                <a:cs typeface="+mn-cs"/>
+              </a:rPr>
+              <a:t> — </a:t>
+            </a:r>
+            <a:r>
+              <a:rPr lang="ko-KR" altLang="ko-KR" sz="1200" b="0" i="0" kern="1200" dirty="0" err="1">
+                <a:solidFill>
+                  <a:schemeClr val="tx1"/>
+                </a:solidFill>
+                <a:effectLst/>
+                <a:latin typeface="+mn-lt"/>
+                <a:ea typeface="+mn-ea"/>
+                <a:cs typeface="+mn-cs"/>
+              </a:rPr>
+              <a:t>it</a:t>
+            </a:r>
+            <a:r>
+              <a:rPr lang="ko-KR" altLang="ko-KR" sz="1200" b="0" i="0" kern="1200" dirty="0">
+                <a:solidFill>
+                  <a:schemeClr val="tx1"/>
+                </a:solidFill>
+                <a:effectLst/>
+                <a:latin typeface="+mn-lt"/>
+                <a:ea typeface="+mn-ea"/>
+                <a:cs typeface="+mn-cs"/>
+              </a:rPr>
+              <a:t> </a:t>
+            </a:r>
+            <a:r>
+              <a:rPr lang="ko-KR" altLang="ko-KR" sz="1200" b="0" i="0" kern="1200" dirty="0" err="1">
+                <a:solidFill>
+                  <a:schemeClr val="tx1"/>
+                </a:solidFill>
+                <a:effectLst/>
+                <a:latin typeface="+mn-lt"/>
+                <a:ea typeface="+mn-ea"/>
+                <a:cs typeface="+mn-cs"/>
+              </a:rPr>
+              <a:t>absorbs</a:t>
+            </a:r>
+            <a:r>
+              <a:rPr lang="ko-KR" altLang="ko-KR" sz="1200" b="0" i="0" kern="1200" dirty="0">
+                <a:solidFill>
+                  <a:schemeClr val="tx1"/>
+                </a:solidFill>
+                <a:effectLst/>
+                <a:latin typeface="+mn-lt"/>
+                <a:ea typeface="+mn-ea"/>
+                <a:cs typeface="+mn-cs"/>
+              </a:rPr>
+              <a:t> </a:t>
+            </a:r>
+            <a:r>
+              <a:rPr lang="ko-KR" altLang="ko-KR" sz="1200" b="0" i="0" kern="1200" dirty="0" err="1">
+                <a:solidFill>
+                  <a:schemeClr val="tx1"/>
+                </a:solidFill>
+                <a:effectLst/>
+                <a:latin typeface="+mn-lt"/>
+                <a:ea typeface="+mn-ea"/>
+                <a:cs typeface="+mn-cs"/>
+              </a:rPr>
+              <a:t>general</a:t>
+            </a:r>
+            <a:r>
+              <a:rPr lang="ko-KR" altLang="ko-KR" sz="1200" b="0" i="0" kern="1200" dirty="0">
+                <a:solidFill>
+                  <a:schemeClr val="tx1"/>
+                </a:solidFill>
+                <a:effectLst/>
+                <a:latin typeface="+mn-lt"/>
+                <a:ea typeface="+mn-ea"/>
+                <a:cs typeface="+mn-cs"/>
+              </a:rPr>
+              <a:t> </a:t>
+            </a:r>
+            <a:r>
+              <a:rPr lang="ko-KR" altLang="ko-KR" sz="1200" b="0" i="0" kern="1200" dirty="0" err="1">
+                <a:solidFill>
+                  <a:schemeClr val="tx1"/>
+                </a:solidFill>
+                <a:effectLst/>
+                <a:latin typeface="+mn-lt"/>
+                <a:ea typeface="+mn-ea"/>
+                <a:cs typeface="+mn-cs"/>
+              </a:rPr>
+              <a:t>market</a:t>
+            </a:r>
+            <a:r>
+              <a:rPr lang="ko-KR" altLang="ko-KR" sz="1200" b="0" i="0" kern="1200" dirty="0">
+                <a:solidFill>
+                  <a:schemeClr val="tx1"/>
+                </a:solidFill>
+                <a:effectLst/>
+                <a:latin typeface="+mn-lt"/>
+                <a:ea typeface="+mn-ea"/>
+                <a:cs typeface="+mn-cs"/>
+              </a:rPr>
+              <a:t> </a:t>
+            </a:r>
+            <a:r>
+              <a:rPr lang="ko-KR" altLang="ko-KR" sz="1200" b="0" i="0" kern="1200" dirty="0" err="1">
+                <a:solidFill>
+                  <a:schemeClr val="tx1"/>
+                </a:solidFill>
+                <a:effectLst/>
+                <a:latin typeface="+mn-lt"/>
+                <a:ea typeface="+mn-ea"/>
+                <a:cs typeface="+mn-cs"/>
+              </a:rPr>
+              <a:t>fear</a:t>
+            </a:r>
+            <a:r>
+              <a:rPr lang="ko-KR" altLang="ko-KR" sz="1200" b="0" i="0" kern="1200" dirty="0">
+                <a:solidFill>
+                  <a:schemeClr val="tx1"/>
+                </a:solidFill>
+                <a:effectLst/>
+                <a:latin typeface="+mn-lt"/>
+                <a:ea typeface="+mn-ea"/>
+                <a:cs typeface="+mn-cs"/>
+              </a:rPr>
+              <a:t> </a:t>
+            </a:r>
+            <a:r>
+              <a:rPr lang="ko-KR" altLang="ko-KR" sz="1200" b="0" i="0" kern="1200" dirty="0" err="1">
+                <a:solidFill>
+                  <a:schemeClr val="tx1"/>
+                </a:solidFill>
+                <a:effectLst/>
+                <a:latin typeface="+mn-lt"/>
+                <a:ea typeface="+mn-ea"/>
+                <a:cs typeface="+mn-cs"/>
+              </a:rPr>
+              <a:t>that</a:t>
+            </a:r>
+            <a:r>
+              <a:rPr lang="ko-KR" altLang="ko-KR" sz="1200" b="0" i="0" kern="1200" dirty="0">
+                <a:solidFill>
+                  <a:schemeClr val="tx1"/>
+                </a:solidFill>
+                <a:effectLst/>
+                <a:latin typeface="+mn-lt"/>
+                <a:ea typeface="+mn-ea"/>
+                <a:cs typeface="+mn-cs"/>
+              </a:rPr>
+              <a:t> </a:t>
+            </a:r>
+            <a:r>
+              <a:rPr lang="ko-KR" altLang="ko-KR" sz="1200" b="0" i="0" kern="1200" dirty="0" err="1">
+                <a:solidFill>
+                  <a:schemeClr val="tx1"/>
+                </a:solidFill>
+                <a:effectLst/>
+                <a:latin typeface="+mn-lt"/>
+                <a:ea typeface="+mn-ea"/>
+                <a:cs typeface="+mn-cs"/>
+              </a:rPr>
+              <a:t>would</a:t>
+            </a:r>
+            <a:r>
+              <a:rPr lang="ko-KR" altLang="ko-KR" sz="1200" b="0" i="0" kern="1200" dirty="0">
+                <a:solidFill>
+                  <a:schemeClr val="tx1"/>
+                </a:solidFill>
+                <a:effectLst/>
+                <a:latin typeface="+mn-lt"/>
+                <a:ea typeface="+mn-ea"/>
+                <a:cs typeface="+mn-cs"/>
+              </a:rPr>
+              <a:t> </a:t>
+            </a:r>
+            <a:r>
+              <a:rPr lang="ko-KR" altLang="ko-KR" sz="1200" b="0" i="0" kern="1200" dirty="0" err="1">
+                <a:solidFill>
+                  <a:schemeClr val="tx1"/>
+                </a:solidFill>
+                <a:effectLst/>
+                <a:latin typeface="+mn-lt"/>
+                <a:ea typeface="+mn-ea"/>
+                <a:cs typeface="+mn-cs"/>
+              </a:rPr>
+              <a:t>affect</a:t>
+            </a:r>
+            <a:r>
+              <a:rPr lang="ko-KR" altLang="ko-KR" sz="1200" b="0" i="0" kern="1200" dirty="0">
+                <a:solidFill>
+                  <a:schemeClr val="tx1"/>
+                </a:solidFill>
+                <a:effectLst/>
+                <a:latin typeface="+mn-lt"/>
+                <a:ea typeface="+mn-ea"/>
+                <a:cs typeface="+mn-cs"/>
+              </a:rPr>
+              <a:t> </a:t>
+            </a:r>
+            <a:r>
+              <a:rPr lang="ko-KR" altLang="ko-KR" sz="1200" b="0" i="0" kern="1200" dirty="0" err="1">
+                <a:solidFill>
+                  <a:schemeClr val="tx1"/>
+                </a:solidFill>
+                <a:effectLst/>
+                <a:latin typeface="+mn-lt"/>
+                <a:ea typeface="+mn-ea"/>
+                <a:cs typeface="+mn-cs"/>
+              </a:rPr>
+              <a:t>Treasury</a:t>
+            </a:r>
+            <a:r>
+              <a:rPr lang="ko-KR" altLang="ko-KR" sz="1200" b="0" i="0" kern="1200" dirty="0">
+                <a:solidFill>
+                  <a:schemeClr val="tx1"/>
+                </a:solidFill>
+                <a:effectLst/>
+                <a:latin typeface="+mn-lt"/>
+                <a:ea typeface="+mn-ea"/>
+                <a:cs typeface="+mn-cs"/>
+              </a:rPr>
+              <a:t> </a:t>
+            </a:r>
+            <a:r>
+              <a:rPr lang="ko-KR" altLang="ko-KR" sz="1200" b="0" i="0" kern="1200" dirty="0" err="1">
+                <a:solidFill>
+                  <a:schemeClr val="tx1"/>
+                </a:solidFill>
+                <a:effectLst/>
+                <a:latin typeface="+mn-lt"/>
+                <a:ea typeface="+mn-ea"/>
+                <a:cs typeface="+mn-cs"/>
+              </a:rPr>
+              <a:t>spreads</a:t>
+            </a:r>
+            <a:r>
+              <a:rPr lang="ko-KR" altLang="ko-KR" sz="1200" b="0" i="0" kern="1200" dirty="0">
+                <a:solidFill>
+                  <a:schemeClr val="tx1"/>
+                </a:solidFill>
+                <a:effectLst/>
+                <a:latin typeface="+mn-lt"/>
+                <a:ea typeface="+mn-ea"/>
+                <a:cs typeface="+mn-cs"/>
+              </a:rPr>
+              <a:t> </a:t>
+            </a:r>
+            <a:r>
+              <a:rPr lang="ko-KR" altLang="ko-KR" sz="1200" b="0" i="0" kern="1200" dirty="0" err="1">
+                <a:solidFill>
+                  <a:schemeClr val="tx1"/>
+                </a:solidFill>
+                <a:effectLst/>
+                <a:latin typeface="+mn-lt"/>
+                <a:ea typeface="+mn-ea"/>
+                <a:cs typeface="+mn-cs"/>
+              </a:rPr>
+              <a:t>regardless</a:t>
+            </a:r>
+            <a:r>
+              <a:rPr lang="ko-KR" altLang="ko-KR" sz="1200" b="0" i="0" kern="1200" dirty="0">
+                <a:solidFill>
+                  <a:schemeClr val="tx1"/>
+                </a:solidFill>
+                <a:effectLst/>
+                <a:latin typeface="+mn-lt"/>
+                <a:ea typeface="+mn-ea"/>
+                <a:cs typeface="+mn-cs"/>
+              </a:rPr>
+              <a:t> of </a:t>
+            </a:r>
+            <a:r>
+              <a:rPr lang="ko-KR" altLang="ko-KR" sz="1200" b="0" i="0" kern="1200" dirty="0" err="1">
+                <a:solidFill>
+                  <a:schemeClr val="tx1"/>
+                </a:solidFill>
+                <a:effectLst/>
+                <a:latin typeface="+mn-lt"/>
+                <a:ea typeface="+mn-ea"/>
+                <a:cs typeface="+mn-cs"/>
+              </a:rPr>
+              <a:t>stablecoins</a:t>
+            </a:r>
+            <a:r>
+              <a:rPr lang="ko-KR" altLang="ko-KR" sz="1200" b="0" i="0" kern="1200" dirty="0">
+                <a:solidFill>
+                  <a:schemeClr val="tx1"/>
+                </a:solidFill>
+                <a:effectLst/>
+                <a:latin typeface="+mn-lt"/>
+                <a:ea typeface="+mn-ea"/>
+                <a:cs typeface="+mn-cs"/>
+              </a:rPr>
+              <a:t>. </a:t>
+            </a:r>
+            <a:r>
+              <a:rPr lang="ko-KR" altLang="ko-KR" sz="1200" b="0" i="0" kern="1200" dirty="0" err="1">
+                <a:solidFill>
+                  <a:schemeClr val="tx1"/>
+                </a:solidFill>
+                <a:effectLst/>
+                <a:latin typeface="+mn-lt"/>
+                <a:ea typeface="+mn-ea"/>
+                <a:cs typeface="+mn-cs"/>
+              </a:rPr>
+              <a:t>During</a:t>
+            </a:r>
+            <a:r>
+              <a:rPr lang="ko-KR" altLang="ko-KR" sz="1200" b="0" i="0" kern="1200" dirty="0">
+                <a:solidFill>
+                  <a:schemeClr val="tx1"/>
+                </a:solidFill>
+                <a:effectLst/>
+                <a:latin typeface="+mn-lt"/>
+                <a:ea typeface="+mn-ea"/>
+                <a:cs typeface="+mn-cs"/>
+              </a:rPr>
+              <a:t> </a:t>
+            </a:r>
+            <a:r>
+              <a:rPr lang="ko-KR" altLang="ko-KR" sz="1200" b="0" i="0" kern="1200" dirty="0" err="1">
+                <a:solidFill>
+                  <a:schemeClr val="tx1"/>
+                </a:solidFill>
+                <a:effectLst/>
+                <a:latin typeface="+mn-lt"/>
+                <a:ea typeface="+mn-ea"/>
+                <a:cs typeface="+mn-cs"/>
+              </a:rPr>
+              <a:t>any</a:t>
+            </a:r>
+            <a:r>
+              <a:rPr lang="ko-KR" altLang="ko-KR" sz="1200" b="0" i="0" kern="1200" dirty="0">
+                <a:solidFill>
+                  <a:schemeClr val="tx1"/>
+                </a:solidFill>
+                <a:effectLst/>
+                <a:latin typeface="+mn-lt"/>
+                <a:ea typeface="+mn-ea"/>
+                <a:cs typeface="+mn-cs"/>
+              </a:rPr>
+              <a:t> </a:t>
+            </a:r>
+            <a:r>
+              <a:rPr lang="ko-KR" altLang="ko-KR" sz="1200" b="0" i="0" kern="1200" dirty="0" err="1">
+                <a:solidFill>
+                  <a:schemeClr val="tx1"/>
+                </a:solidFill>
+                <a:effectLst/>
+                <a:latin typeface="+mn-lt"/>
+                <a:ea typeface="+mn-ea"/>
+                <a:cs typeface="+mn-cs"/>
+              </a:rPr>
+              <a:t>crisis</a:t>
+            </a:r>
+            <a:r>
+              <a:rPr lang="ko-KR" altLang="ko-KR" sz="1200" b="0" i="0" kern="1200" dirty="0">
+                <a:solidFill>
+                  <a:schemeClr val="tx1"/>
+                </a:solidFill>
+                <a:effectLst/>
+                <a:latin typeface="+mn-lt"/>
+                <a:ea typeface="+mn-ea"/>
+                <a:cs typeface="+mn-cs"/>
+              </a:rPr>
+              <a:t>, </a:t>
+            </a:r>
+            <a:r>
+              <a:rPr lang="ko-KR" altLang="ko-KR" sz="1200" b="0" i="0" kern="1200" dirty="0" err="1">
+                <a:solidFill>
+                  <a:schemeClr val="tx1"/>
+                </a:solidFill>
+                <a:effectLst/>
+                <a:latin typeface="+mn-lt"/>
+                <a:ea typeface="+mn-ea"/>
+                <a:cs typeface="+mn-cs"/>
+              </a:rPr>
+              <a:t>investors</a:t>
+            </a:r>
+            <a:r>
+              <a:rPr lang="ko-KR" altLang="ko-KR" sz="1200" b="0" i="0" kern="1200" dirty="0">
+                <a:solidFill>
+                  <a:schemeClr val="tx1"/>
+                </a:solidFill>
+                <a:effectLst/>
+                <a:latin typeface="+mn-lt"/>
+                <a:ea typeface="+mn-ea"/>
+                <a:cs typeface="+mn-cs"/>
+              </a:rPr>
+              <a:t> </a:t>
+            </a:r>
+            <a:r>
+              <a:rPr lang="ko-KR" altLang="ko-KR" sz="1200" b="0" i="0" kern="1200" dirty="0" err="1">
+                <a:solidFill>
+                  <a:schemeClr val="tx1"/>
+                </a:solidFill>
+                <a:effectLst/>
+                <a:latin typeface="+mn-lt"/>
+                <a:ea typeface="+mn-ea"/>
+                <a:cs typeface="+mn-cs"/>
+              </a:rPr>
+              <a:t>flee</a:t>
+            </a:r>
+            <a:r>
+              <a:rPr lang="ko-KR" altLang="ko-KR" sz="1200" b="0" i="0" kern="1200" dirty="0">
+                <a:solidFill>
+                  <a:schemeClr val="tx1"/>
+                </a:solidFill>
+                <a:effectLst/>
+                <a:latin typeface="+mn-lt"/>
+                <a:ea typeface="+mn-ea"/>
+                <a:cs typeface="+mn-cs"/>
+              </a:rPr>
+              <a:t> </a:t>
+            </a:r>
+            <a:r>
+              <a:rPr lang="ko-KR" altLang="ko-KR" sz="1200" b="0" i="0" kern="1200" dirty="0" err="1">
+                <a:solidFill>
+                  <a:schemeClr val="tx1"/>
+                </a:solidFill>
+                <a:effectLst/>
+                <a:latin typeface="+mn-lt"/>
+                <a:ea typeface="+mn-ea"/>
+                <a:cs typeface="+mn-cs"/>
+              </a:rPr>
+              <a:t>to</a:t>
+            </a:r>
+            <a:r>
+              <a:rPr lang="ko-KR" altLang="ko-KR" sz="1200" b="0" i="0" kern="1200" dirty="0">
+                <a:solidFill>
+                  <a:schemeClr val="tx1"/>
+                </a:solidFill>
+                <a:effectLst/>
+                <a:latin typeface="+mn-lt"/>
+                <a:ea typeface="+mn-ea"/>
+                <a:cs typeface="+mn-cs"/>
+              </a:rPr>
+              <a:t> </a:t>
+            </a:r>
+            <a:r>
+              <a:rPr lang="ko-KR" altLang="ko-KR" sz="1200" b="0" i="0" kern="1200" dirty="0" err="1">
+                <a:solidFill>
+                  <a:schemeClr val="tx1"/>
+                </a:solidFill>
+                <a:effectLst/>
+                <a:latin typeface="+mn-lt"/>
+                <a:ea typeface="+mn-ea"/>
+                <a:cs typeface="+mn-cs"/>
+              </a:rPr>
+              <a:t>safety</a:t>
+            </a:r>
+            <a:r>
+              <a:rPr lang="ko-KR" altLang="ko-KR" sz="1200" b="0" i="0" kern="1200" dirty="0">
+                <a:solidFill>
+                  <a:schemeClr val="tx1"/>
+                </a:solidFill>
+                <a:effectLst/>
+                <a:latin typeface="+mn-lt"/>
+                <a:ea typeface="+mn-ea"/>
+                <a:cs typeface="+mn-cs"/>
+              </a:rPr>
+              <a:t> and </a:t>
+            </a:r>
+            <a:r>
+              <a:rPr lang="ko-KR" altLang="ko-KR" sz="1200" b="0" i="0" kern="1200" dirty="0" err="1">
+                <a:solidFill>
+                  <a:schemeClr val="tx1"/>
+                </a:solidFill>
+                <a:effectLst/>
+                <a:latin typeface="+mn-lt"/>
+                <a:ea typeface="+mn-ea"/>
+                <a:cs typeface="+mn-cs"/>
+              </a:rPr>
+              <a:t>buy</a:t>
+            </a:r>
+            <a:r>
+              <a:rPr lang="ko-KR" altLang="ko-KR" sz="1200" b="0" i="0" kern="1200" dirty="0">
+                <a:solidFill>
+                  <a:schemeClr val="tx1"/>
+                </a:solidFill>
+                <a:effectLst/>
+                <a:latin typeface="+mn-lt"/>
+                <a:ea typeface="+mn-ea"/>
+                <a:cs typeface="+mn-cs"/>
+              </a:rPr>
+              <a:t> </a:t>
+            </a:r>
+            <a:r>
+              <a:rPr lang="ko-KR" altLang="ko-KR" sz="1200" b="0" i="0" kern="1200" dirty="0" err="1">
+                <a:solidFill>
+                  <a:schemeClr val="tx1"/>
+                </a:solidFill>
+                <a:effectLst/>
+                <a:latin typeface="+mn-lt"/>
+                <a:ea typeface="+mn-ea"/>
+                <a:cs typeface="+mn-cs"/>
+              </a:rPr>
+              <a:t>T-bills</a:t>
+            </a:r>
+            <a:r>
+              <a:rPr lang="ko-KR" altLang="ko-KR" sz="1200" b="0" i="0" kern="1200" dirty="0">
+                <a:solidFill>
+                  <a:schemeClr val="tx1"/>
+                </a:solidFill>
+                <a:effectLst/>
+                <a:latin typeface="+mn-lt"/>
+                <a:ea typeface="+mn-ea"/>
+                <a:cs typeface="+mn-cs"/>
+              </a:rPr>
+              <a:t>, </a:t>
+            </a:r>
+            <a:r>
+              <a:rPr lang="ko-KR" altLang="ko-KR" sz="1200" b="0" i="0" kern="1200" dirty="0" err="1">
+                <a:solidFill>
+                  <a:schemeClr val="tx1"/>
+                </a:solidFill>
+                <a:effectLst/>
+                <a:latin typeface="+mn-lt"/>
+                <a:ea typeface="+mn-ea"/>
+                <a:cs typeface="+mn-cs"/>
+              </a:rPr>
+              <a:t>which</a:t>
+            </a:r>
+            <a:r>
+              <a:rPr lang="ko-KR" altLang="ko-KR" sz="1200" b="0" i="0" kern="1200" dirty="0">
+                <a:solidFill>
+                  <a:schemeClr val="tx1"/>
+                </a:solidFill>
+                <a:effectLst/>
+                <a:latin typeface="+mn-lt"/>
+                <a:ea typeface="+mn-ea"/>
+                <a:cs typeface="+mn-cs"/>
+              </a:rPr>
+              <a:t> </a:t>
+            </a:r>
+            <a:r>
+              <a:rPr lang="ko-KR" altLang="ko-KR" sz="1200" b="0" i="0" kern="1200" dirty="0" err="1">
+                <a:solidFill>
+                  <a:schemeClr val="tx1"/>
+                </a:solidFill>
+                <a:effectLst/>
+                <a:latin typeface="+mn-lt"/>
+                <a:ea typeface="+mn-ea"/>
+                <a:cs typeface="+mn-cs"/>
+              </a:rPr>
+              <a:t>compresses</a:t>
+            </a:r>
+            <a:r>
+              <a:rPr lang="ko-KR" altLang="ko-KR" sz="1200" b="0" i="0" kern="1200" dirty="0">
+                <a:solidFill>
+                  <a:schemeClr val="tx1"/>
+                </a:solidFill>
+                <a:effectLst/>
+                <a:latin typeface="+mn-lt"/>
+                <a:ea typeface="+mn-ea"/>
+                <a:cs typeface="+mn-cs"/>
+              </a:rPr>
+              <a:t> </a:t>
+            </a:r>
+            <a:r>
+              <a:rPr lang="ko-KR" altLang="ko-KR" sz="1200" b="0" i="0" kern="1200" dirty="0" err="1">
+                <a:solidFill>
+                  <a:schemeClr val="tx1"/>
+                </a:solidFill>
+                <a:effectLst/>
+                <a:latin typeface="+mn-lt"/>
+                <a:ea typeface="+mn-ea"/>
+                <a:cs typeface="+mn-cs"/>
+              </a:rPr>
+              <a:t>the</a:t>
+            </a:r>
+            <a:r>
+              <a:rPr lang="ko-KR" altLang="ko-KR" sz="1200" b="0" i="0" kern="1200" dirty="0">
+                <a:solidFill>
+                  <a:schemeClr val="tx1"/>
+                </a:solidFill>
+                <a:effectLst/>
+                <a:latin typeface="+mn-lt"/>
+                <a:ea typeface="+mn-ea"/>
+                <a:cs typeface="+mn-cs"/>
+              </a:rPr>
+              <a:t> </a:t>
+            </a:r>
+            <a:r>
+              <a:rPr lang="ko-KR" altLang="ko-KR" sz="1200" b="0" i="0" kern="1200" dirty="0" err="1">
+                <a:solidFill>
+                  <a:schemeClr val="tx1"/>
+                </a:solidFill>
+                <a:effectLst/>
+                <a:latin typeface="+mn-lt"/>
+                <a:ea typeface="+mn-ea"/>
+                <a:cs typeface="+mn-cs"/>
+              </a:rPr>
+              <a:t>spread</a:t>
+            </a:r>
+            <a:r>
+              <a:rPr lang="ko-KR" altLang="ko-KR" sz="1200" b="0" i="0" kern="1200" dirty="0">
+                <a:solidFill>
+                  <a:schemeClr val="tx1"/>
+                </a:solidFill>
+                <a:effectLst/>
+                <a:latin typeface="+mn-lt"/>
+                <a:ea typeface="+mn-ea"/>
+                <a:cs typeface="+mn-cs"/>
+              </a:rPr>
+              <a:t>. </a:t>
+            </a:r>
+            <a:r>
+              <a:rPr lang="ko-KR" altLang="ko-KR" sz="1200" b="0" i="0" kern="1200" dirty="0" err="1">
+                <a:solidFill>
+                  <a:schemeClr val="tx1"/>
+                </a:solidFill>
+                <a:effectLst/>
+                <a:latin typeface="+mn-lt"/>
+                <a:ea typeface="+mn-ea"/>
+                <a:cs typeface="+mn-cs"/>
+              </a:rPr>
+              <a:t>Without</a:t>
+            </a:r>
+            <a:r>
+              <a:rPr lang="ko-KR" altLang="ko-KR" sz="1200" b="0" i="0" kern="1200" dirty="0">
+                <a:solidFill>
+                  <a:schemeClr val="tx1"/>
+                </a:solidFill>
+                <a:effectLst/>
+                <a:latin typeface="+mn-lt"/>
+                <a:ea typeface="+mn-ea"/>
+                <a:cs typeface="+mn-cs"/>
+              </a:rPr>
+              <a:t> VIX </a:t>
+            </a:r>
+            <a:r>
+              <a:rPr lang="ko-KR" altLang="ko-KR" sz="1200" b="0" i="0" kern="1200" dirty="0" err="1">
+                <a:solidFill>
+                  <a:schemeClr val="tx1"/>
+                </a:solidFill>
+                <a:effectLst/>
+                <a:latin typeface="+mn-lt"/>
+                <a:ea typeface="+mn-ea"/>
+                <a:cs typeface="+mn-cs"/>
+              </a:rPr>
+              <a:t>in</a:t>
+            </a:r>
+            <a:r>
+              <a:rPr lang="ko-KR" altLang="ko-KR" sz="1200" b="0" i="0" kern="1200" dirty="0">
+                <a:solidFill>
+                  <a:schemeClr val="tx1"/>
+                </a:solidFill>
+                <a:effectLst/>
+                <a:latin typeface="+mn-lt"/>
+                <a:ea typeface="+mn-ea"/>
+                <a:cs typeface="+mn-cs"/>
+              </a:rPr>
+              <a:t> </a:t>
+            </a:r>
+            <a:r>
+              <a:rPr lang="ko-KR" altLang="ko-KR" sz="1200" b="0" i="0" kern="1200" dirty="0" err="1">
+                <a:solidFill>
+                  <a:schemeClr val="tx1"/>
+                </a:solidFill>
+                <a:effectLst/>
+                <a:latin typeface="+mn-lt"/>
+                <a:ea typeface="+mn-ea"/>
+                <a:cs typeface="+mn-cs"/>
+              </a:rPr>
+              <a:t>the</a:t>
+            </a:r>
+            <a:r>
+              <a:rPr lang="ko-KR" altLang="ko-KR" sz="1200" b="0" i="0" kern="1200" dirty="0">
+                <a:solidFill>
+                  <a:schemeClr val="tx1"/>
+                </a:solidFill>
+                <a:effectLst/>
+                <a:latin typeface="+mn-lt"/>
+                <a:ea typeface="+mn-ea"/>
+                <a:cs typeface="+mn-cs"/>
+              </a:rPr>
+              <a:t> </a:t>
+            </a:r>
+            <a:r>
+              <a:rPr lang="ko-KR" altLang="ko-KR" sz="1200" b="0" i="0" kern="1200" dirty="0" err="1">
+                <a:solidFill>
+                  <a:schemeClr val="tx1"/>
+                </a:solidFill>
+                <a:effectLst/>
+                <a:latin typeface="+mn-lt"/>
+                <a:ea typeface="+mn-ea"/>
+                <a:cs typeface="+mn-cs"/>
+              </a:rPr>
+              <a:t>model</a:t>
+            </a:r>
+            <a:r>
+              <a:rPr lang="ko-KR" altLang="ko-KR" sz="1200" b="0" i="0" kern="1200" dirty="0">
+                <a:solidFill>
+                  <a:schemeClr val="tx1"/>
+                </a:solidFill>
+                <a:effectLst/>
+                <a:latin typeface="+mn-lt"/>
+                <a:ea typeface="+mn-ea"/>
+                <a:cs typeface="+mn-cs"/>
+              </a:rPr>
+              <a:t>, </a:t>
+            </a:r>
+            <a:r>
+              <a:rPr lang="ko-KR" altLang="ko-KR" sz="1200" b="0" i="0" kern="1200" dirty="0" err="1">
+                <a:solidFill>
+                  <a:schemeClr val="tx1"/>
+                </a:solidFill>
+                <a:effectLst/>
+                <a:latin typeface="+mn-lt"/>
+                <a:ea typeface="+mn-ea"/>
+                <a:cs typeface="+mn-cs"/>
+              </a:rPr>
+              <a:t>your</a:t>
+            </a:r>
+            <a:r>
+              <a:rPr lang="ko-KR" altLang="ko-KR" sz="1200" b="0" i="0" kern="1200" dirty="0">
+                <a:solidFill>
+                  <a:schemeClr val="tx1"/>
+                </a:solidFill>
+                <a:effectLst/>
+                <a:latin typeface="+mn-lt"/>
+                <a:ea typeface="+mn-ea"/>
+                <a:cs typeface="+mn-cs"/>
+              </a:rPr>
+              <a:t> </a:t>
+            </a:r>
+            <a:r>
+              <a:rPr lang="ko-KR" altLang="ko-KR" sz="1200" b="0" i="0" kern="1200" dirty="0" err="1">
+                <a:solidFill>
+                  <a:schemeClr val="tx1"/>
+                </a:solidFill>
+                <a:effectLst/>
+                <a:latin typeface="+mn-lt"/>
+                <a:ea typeface="+mn-ea"/>
+                <a:cs typeface="+mn-cs"/>
+              </a:rPr>
+              <a:t>regression</a:t>
+            </a:r>
+            <a:r>
+              <a:rPr lang="ko-KR" altLang="ko-KR" sz="1200" b="0" i="0" kern="1200" dirty="0">
+                <a:solidFill>
+                  <a:schemeClr val="tx1"/>
+                </a:solidFill>
+                <a:effectLst/>
+                <a:latin typeface="+mn-lt"/>
+                <a:ea typeface="+mn-ea"/>
+                <a:cs typeface="+mn-cs"/>
+              </a:rPr>
+              <a:t> </a:t>
+            </a:r>
+            <a:r>
+              <a:rPr lang="ko-KR" altLang="ko-KR" sz="1200" b="0" i="0" kern="1200" dirty="0" err="1">
+                <a:solidFill>
+                  <a:schemeClr val="tx1"/>
+                </a:solidFill>
+                <a:effectLst/>
+                <a:latin typeface="+mn-lt"/>
+                <a:ea typeface="+mn-ea"/>
+                <a:cs typeface="+mn-cs"/>
+              </a:rPr>
+              <a:t>might</a:t>
+            </a:r>
+            <a:r>
+              <a:rPr lang="ko-KR" altLang="ko-KR" sz="1200" b="0" i="0" kern="1200" dirty="0">
+                <a:solidFill>
+                  <a:schemeClr val="tx1"/>
+                </a:solidFill>
+                <a:effectLst/>
+                <a:latin typeface="+mn-lt"/>
+                <a:ea typeface="+mn-ea"/>
+                <a:cs typeface="+mn-cs"/>
+              </a:rPr>
+              <a:t> </a:t>
+            </a:r>
+            <a:r>
+              <a:rPr lang="ko-KR" altLang="ko-KR" sz="1200" b="0" i="0" kern="1200" dirty="0" err="1">
+                <a:solidFill>
+                  <a:schemeClr val="tx1"/>
+                </a:solidFill>
+                <a:effectLst/>
+                <a:latin typeface="+mn-lt"/>
+                <a:ea typeface="+mn-ea"/>
+                <a:cs typeface="+mn-cs"/>
+              </a:rPr>
+              <a:t>incorrectly</a:t>
+            </a:r>
+            <a:r>
+              <a:rPr lang="ko-KR" altLang="ko-KR" sz="1200" b="0" i="0" kern="1200" dirty="0">
+                <a:solidFill>
+                  <a:schemeClr val="tx1"/>
+                </a:solidFill>
+                <a:effectLst/>
+                <a:latin typeface="+mn-lt"/>
+                <a:ea typeface="+mn-ea"/>
+                <a:cs typeface="+mn-cs"/>
+              </a:rPr>
+              <a:t> </a:t>
+            </a:r>
+            <a:r>
+              <a:rPr lang="ko-KR" altLang="ko-KR" sz="1200" b="0" i="0" kern="1200" dirty="0" err="1">
+                <a:solidFill>
+                  <a:schemeClr val="tx1"/>
+                </a:solidFill>
+                <a:effectLst/>
+                <a:latin typeface="+mn-lt"/>
+                <a:ea typeface="+mn-ea"/>
+                <a:cs typeface="+mn-cs"/>
+              </a:rPr>
+              <a:t>attribute</a:t>
+            </a:r>
+            <a:r>
+              <a:rPr lang="ko-KR" altLang="ko-KR" sz="1200" b="0" i="0" kern="1200" dirty="0">
+                <a:solidFill>
+                  <a:schemeClr val="tx1"/>
+                </a:solidFill>
+                <a:effectLst/>
+                <a:latin typeface="+mn-lt"/>
+                <a:ea typeface="+mn-ea"/>
+                <a:cs typeface="+mn-cs"/>
+              </a:rPr>
+              <a:t> </a:t>
+            </a:r>
+            <a:r>
+              <a:rPr lang="ko-KR" altLang="ko-KR" sz="1200" b="0" i="0" kern="1200" dirty="0" err="1">
+                <a:solidFill>
+                  <a:schemeClr val="tx1"/>
+                </a:solidFill>
+                <a:effectLst/>
+                <a:latin typeface="+mn-lt"/>
+                <a:ea typeface="+mn-ea"/>
+                <a:cs typeface="+mn-cs"/>
+              </a:rPr>
+              <a:t>that</a:t>
+            </a:r>
+            <a:r>
+              <a:rPr lang="ko-KR" altLang="ko-KR" sz="1200" b="0" i="0" kern="1200" dirty="0">
+                <a:solidFill>
+                  <a:schemeClr val="tx1"/>
+                </a:solidFill>
+                <a:effectLst/>
+                <a:latin typeface="+mn-lt"/>
+                <a:ea typeface="+mn-ea"/>
+                <a:cs typeface="+mn-cs"/>
+              </a:rPr>
+              <a:t> </a:t>
+            </a:r>
+            <a:r>
+              <a:rPr lang="ko-KR" altLang="ko-KR" sz="1200" b="0" i="0" kern="1200" dirty="0" err="1">
+                <a:solidFill>
+                  <a:schemeClr val="tx1"/>
+                </a:solidFill>
+                <a:effectLst/>
+                <a:latin typeface="+mn-lt"/>
+                <a:ea typeface="+mn-ea"/>
+                <a:cs typeface="+mn-cs"/>
+              </a:rPr>
+              <a:t>flight-to-safety</a:t>
+            </a:r>
+            <a:r>
+              <a:rPr lang="ko-KR" altLang="ko-KR" sz="1200" b="0" i="0" kern="1200" dirty="0">
+                <a:solidFill>
+                  <a:schemeClr val="tx1"/>
+                </a:solidFill>
+                <a:effectLst/>
+                <a:latin typeface="+mn-lt"/>
+                <a:ea typeface="+mn-ea"/>
+                <a:cs typeface="+mn-cs"/>
+              </a:rPr>
+              <a:t> </a:t>
+            </a:r>
+            <a:r>
+              <a:rPr lang="ko-KR" altLang="ko-KR" sz="1200" b="0" i="0" kern="1200" dirty="0" err="1">
+                <a:solidFill>
+                  <a:schemeClr val="tx1"/>
+                </a:solidFill>
+                <a:effectLst/>
+                <a:latin typeface="+mn-lt"/>
+                <a:ea typeface="+mn-ea"/>
+                <a:cs typeface="+mn-cs"/>
+              </a:rPr>
+              <a:t>to</a:t>
+            </a:r>
+            <a:r>
+              <a:rPr lang="ko-KR" altLang="ko-KR" sz="1200" b="0" i="0" kern="1200" dirty="0">
+                <a:solidFill>
+                  <a:schemeClr val="tx1"/>
+                </a:solidFill>
+                <a:effectLst/>
+                <a:latin typeface="+mn-lt"/>
+                <a:ea typeface="+mn-ea"/>
+                <a:cs typeface="+mn-cs"/>
+              </a:rPr>
+              <a:t> </a:t>
+            </a:r>
+            <a:r>
+              <a:rPr lang="ko-KR" altLang="ko-KR" sz="1200" b="0" i="0" kern="1200" dirty="0" err="1">
+                <a:solidFill>
+                  <a:schemeClr val="tx1"/>
+                </a:solidFill>
+                <a:effectLst/>
+                <a:latin typeface="+mn-lt"/>
+                <a:ea typeface="+mn-ea"/>
+                <a:cs typeface="+mn-cs"/>
+              </a:rPr>
+              <a:t>stablecoin</a:t>
+            </a:r>
+            <a:r>
+              <a:rPr lang="ko-KR" altLang="ko-KR" sz="1200" b="0" i="0" kern="1200" dirty="0">
+                <a:solidFill>
+                  <a:schemeClr val="tx1"/>
+                </a:solidFill>
+                <a:effectLst/>
+                <a:latin typeface="+mn-lt"/>
+                <a:ea typeface="+mn-ea"/>
+                <a:cs typeface="+mn-cs"/>
+              </a:rPr>
+              <a:t> </a:t>
+            </a:r>
+            <a:r>
+              <a:rPr lang="ko-KR" altLang="ko-KR" sz="1200" b="0" i="0" kern="1200" dirty="0" err="1">
+                <a:solidFill>
+                  <a:schemeClr val="tx1"/>
+                </a:solidFill>
+                <a:effectLst/>
+                <a:latin typeface="+mn-lt"/>
+                <a:ea typeface="+mn-ea"/>
+                <a:cs typeface="+mn-cs"/>
+              </a:rPr>
+              <a:t>behavior</a:t>
+            </a:r>
+            <a:r>
+              <a:rPr lang="ko-KR" altLang="ko-KR" sz="1200" b="0" i="0" kern="1200" dirty="0">
+                <a:solidFill>
+                  <a:schemeClr val="tx1"/>
+                </a:solidFill>
+                <a:effectLst/>
+                <a:latin typeface="+mn-lt"/>
+                <a:ea typeface="+mn-ea"/>
+                <a:cs typeface="+mn-cs"/>
+              </a:rPr>
+              <a:t>.</a:t>
+            </a:r>
+          </a:p>
+          <a:p>
+            <a:r>
+              <a:rPr lang="ko-KR" altLang="ko-KR" sz="1200" b="0" i="0" kern="1200" dirty="0" err="1">
+                <a:solidFill>
+                  <a:schemeClr val="tx1"/>
+                </a:solidFill>
+                <a:effectLst/>
+                <a:latin typeface="+mn-lt"/>
+                <a:ea typeface="+mn-ea"/>
+                <a:cs typeface="+mn-cs"/>
+              </a:rPr>
+              <a:t>In</a:t>
+            </a:r>
+            <a:r>
+              <a:rPr lang="ko-KR" altLang="ko-KR" sz="1200" b="0" i="0" kern="1200" dirty="0">
+                <a:solidFill>
+                  <a:schemeClr val="tx1"/>
+                </a:solidFill>
+                <a:effectLst/>
+                <a:latin typeface="+mn-lt"/>
+                <a:ea typeface="+mn-ea"/>
+                <a:cs typeface="+mn-cs"/>
+              </a:rPr>
+              <a:t> </a:t>
+            </a:r>
+            <a:r>
+              <a:rPr lang="ko-KR" altLang="ko-KR" sz="1200" b="0" i="0" kern="1200" dirty="0" err="1">
+                <a:solidFill>
+                  <a:schemeClr val="tx1"/>
+                </a:solidFill>
+                <a:effectLst/>
+                <a:latin typeface="+mn-lt"/>
+                <a:ea typeface="+mn-ea"/>
+                <a:cs typeface="+mn-cs"/>
+              </a:rPr>
+              <a:t>plain</a:t>
+            </a:r>
+            <a:r>
+              <a:rPr lang="ko-KR" altLang="ko-KR" sz="1200" b="0" i="0" kern="1200" dirty="0">
+                <a:solidFill>
+                  <a:schemeClr val="tx1"/>
+                </a:solidFill>
+                <a:effectLst/>
+                <a:latin typeface="+mn-lt"/>
+                <a:ea typeface="+mn-ea"/>
+                <a:cs typeface="+mn-cs"/>
+              </a:rPr>
+              <a:t> </a:t>
+            </a:r>
+            <a:r>
+              <a:rPr lang="ko-KR" altLang="ko-KR" sz="1200" b="0" i="0" kern="1200" dirty="0" err="1">
+                <a:solidFill>
+                  <a:schemeClr val="tx1"/>
+                </a:solidFill>
+                <a:effectLst/>
+                <a:latin typeface="+mn-lt"/>
+                <a:ea typeface="+mn-ea"/>
+                <a:cs typeface="+mn-cs"/>
+              </a:rPr>
+              <a:t>terms</a:t>
+            </a:r>
+            <a:r>
+              <a:rPr lang="ko-KR" altLang="ko-KR" sz="1200" b="0" i="0" kern="1200" dirty="0">
+                <a:solidFill>
+                  <a:schemeClr val="tx1"/>
+                </a:solidFill>
+                <a:effectLst/>
+                <a:latin typeface="+mn-lt"/>
+                <a:ea typeface="+mn-ea"/>
+                <a:cs typeface="+mn-cs"/>
+              </a:rPr>
+              <a:t>: </a:t>
+            </a:r>
+            <a:r>
+              <a:rPr lang="ko-KR" altLang="ko-KR" sz="1200" b="0" i="0" kern="1200" dirty="0" err="1">
+                <a:solidFill>
+                  <a:schemeClr val="tx1"/>
+                </a:solidFill>
+                <a:effectLst/>
+                <a:latin typeface="+mn-lt"/>
+                <a:ea typeface="+mn-ea"/>
+                <a:cs typeface="+mn-cs"/>
+              </a:rPr>
+              <a:t>you</a:t>
+            </a:r>
+            <a:r>
+              <a:rPr lang="ko-KR" altLang="ko-KR" sz="1200" b="0" i="0" kern="1200" dirty="0">
+                <a:solidFill>
+                  <a:schemeClr val="tx1"/>
+                </a:solidFill>
+                <a:effectLst/>
+                <a:latin typeface="+mn-lt"/>
+                <a:ea typeface="+mn-ea"/>
+                <a:cs typeface="+mn-cs"/>
+              </a:rPr>
+              <a:t> </a:t>
+            </a:r>
+            <a:r>
+              <a:rPr lang="ko-KR" altLang="ko-KR" sz="1200" b="0" i="0" kern="1200" dirty="0" err="1">
+                <a:solidFill>
+                  <a:schemeClr val="tx1"/>
+                </a:solidFill>
+                <a:effectLst/>
+                <a:latin typeface="+mn-lt"/>
+                <a:ea typeface="+mn-ea"/>
+                <a:cs typeface="+mn-cs"/>
+              </a:rPr>
+              <a:t>are</a:t>
+            </a:r>
+            <a:r>
+              <a:rPr lang="ko-KR" altLang="ko-KR" sz="1200" b="0" i="0" kern="1200" dirty="0">
+                <a:solidFill>
+                  <a:schemeClr val="tx1"/>
+                </a:solidFill>
+                <a:effectLst/>
+                <a:latin typeface="+mn-lt"/>
+                <a:ea typeface="+mn-ea"/>
+                <a:cs typeface="+mn-cs"/>
+              </a:rPr>
+              <a:t> </a:t>
+            </a:r>
+            <a:r>
+              <a:rPr lang="ko-KR" altLang="ko-KR" sz="1200" b="0" i="0" kern="1200" dirty="0" err="1">
+                <a:solidFill>
+                  <a:schemeClr val="tx1"/>
+                </a:solidFill>
+                <a:effectLst/>
+                <a:latin typeface="+mn-lt"/>
+                <a:ea typeface="+mn-ea"/>
+                <a:cs typeface="+mn-cs"/>
+              </a:rPr>
+              <a:t>telling</a:t>
+            </a:r>
+            <a:r>
+              <a:rPr lang="ko-KR" altLang="ko-KR" sz="1200" b="0" i="0" kern="1200" dirty="0">
+                <a:solidFill>
+                  <a:schemeClr val="tx1"/>
+                </a:solidFill>
+                <a:effectLst/>
+                <a:latin typeface="+mn-lt"/>
+                <a:ea typeface="+mn-ea"/>
+                <a:cs typeface="+mn-cs"/>
+              </a:rPr>
+              <a:t> </a:t>
+            </a:r>
+            <a:r>
+              <a:rPr lang="ko-KR" altLang="ko-KR" sz="1200" b="0" i="0" kern="1200" dirty="0" err="1">
+                <a:solidFill>
+                  <a:schemeClr val="tx1"/>
+                </a:solidFill>
+                <a:effectLst/>
+                <a:latin typeface="+mn-lt"/>
+                <a:ea typeface="+mn-ea"/>
+                <a:cs typeface="+mn-cs"/>
+              </a:rPr>
+              <a:t>the</a:t>
+            </a:r>
+            <a:r>
+              <a:rPr lang="ko-KR" altLang="ko-KR" sz="1200" b="0" i="0" kern="1200" dirty="0">
+                <a:solidFill>
+                  <a:schemeClr val="tx1"/>
+                </a:solidFill>
+                <a:effectLst/>
+                <a:latin typeface="+mn-lt"/>
+                <a:ea typeface="+mn-ea"/>
+                <a:cs typeface="+mn-cs"/>
+              </a:rPr>
+              <a:t> </a:t>
+            </a:r>
+            <a:r>
+              <a:rPr lang="ko-KR" altLang="ko-KR" sz="1200" b="0" i="0" kern="1200" dirty="0" err="1">
+                <a:solidFill>
+                  <a:schemeClr val="tx1"/>
+                </a:solidFill>
+                <a:effectLst/>
+                <a:latin typeface="+mn-lt"/>
+                <a:ea typeface="+mn-ea"/>
+                <a:cs typeface="+mn-cs"/>
+              </a:rPr>
+              <a:t>regression</a:t>
+            </a:r>
+            <a:r>
+              <a:rPr lang="ko-KR" altLang="ko-KR" sz="1200" b="0" i="0" kern="1200" dirty="0">
+                <a:solidFill>
+                  <a:schemeClr val="tx1"/>
+                </a:solidFill>
+                <a:effectLst/>
+                <a:latin typeface="+mn-lt"/>
+                <a:ea typeface="+mn-ea"/>
+                <a:cs typeface="+mn-cs"/>
+              </a:rPr>
+              <a:t> </a:t>
+            </a:r>
+            <a:r>
+              <a:rPr lang="ko-KR" altLang="ko-KR" sz="1200" b="0" i="1" kern="1200" dirty="0">
+                <a:solidFill>
+                  <a:schemeClr val="tx1"/>
+                </a:solidFill>
+                <a:effectLst/>
+                <a:latin typeface="+mn-lt"/>
+                <a:ea typeface="+mn-ea"/>
+                <a:cs typeface="+mn-cs"/>
+              </a:rPr>
+              <a:t>"</a:t>
+            </a:r>
+            <a:r>
+              <a:rPr lang="ko-KR" altLang="ko-KR" sz="1200" b="0" i="1" kern="1200" dirty="0" err="1">
+                <a:solidFill>
+                  <a:schemeClr val="tx1"/>
+                </a:solidFill>
+                <a:effectLst/>
+                <a:latin typeface="+mn-lt"/>
+                <a:ea typeface="+mn-ea"/>
+                <a:cs typeface="+mn-cs"/>
+              </a:rPr>
+              <a:t>account</a:t>
+            </a:r>
+            <a:r>
+              <a:rPr lang="ko-KR" altLang="ko-KR" sz="1200" b="0" i="1" kern="1200" dirty="0">
+                <a:solidFill>
+                  <a:schemeClr val="tx1"/>
+                </a:solidFill>
+                <a:effectLst/>
+                <a:latin typeface="+mn-lt"/>
+                <a:ea typeface="+mn-ea"/>
+                <a:cs typeface="+mn-cs"/>
+              </a:rPr>
+              <a:t> </a:t>
+            </a:r>
+            <a:r>
+              <a:rPr lang="ko-KR" altLang="ko-KR" sz="1200" b="0" i="1" kern="1200" dirty="0" err="1">
+                <a:solidFill>
+                  <a:schemeClr val="tx1"/>
+                </a:solidFill>
+                <a:effectLst/>
+                <a:latin typeface="+mn-lt"/>
+                <a:ea typeface="+mn-ea"/>
+                <a:cs typeface="+mn-cs"/>
+              </a:rPr>
+              <a:t>for</a:t>
+            </a:r>
+            <a:r>
+              <a:rPr lang="ko-KR" altLang="ko-KR" sz="1200" b="0" i="1" kern="1200" dirty="0">
+                <a:solidFill>
+                  <a:schemeClr val="tx1"/>
+                </a:solidFill>
+                <a:effectLst/>
+                <a:latin typeface="+mn-lt"/>
+                <a:ea typeface="+mn-ea"/>
+                <a:cs typeface="+mn-cs"/>
+              </a:rPr>
+              <a:t> </a:t>
+            </a:r>
+            <a:r>
+              <a:rPr lang="ko-KR" altLang="ko-KR" sz="1200" b="0" i="1" kern="1200" dirty="0" err="1">
+                <a:solidFill>
+                  <a:schemeClr val="tx1"/>
+                </a:solidFill>
+                <a:effectLst/>
+                <a:latin typeface="+mn-lt"/>
+                <a:ea typeface="+mn-ea"/>
+                <a:cs typeface="+mn-cs"/>
+              </a:rPr>
+              <a:t>how</a:t>
+            </a:r>
+            <a:r>
+              <a:rPr lang="ko-KR" altLang="ko-KR" sz="1200" b="0" i="1" kern="1200" dirty="0">
+                <a:solidFill>
+                  <a:schemeClr val="tx1"/>
+                </a:solidFill>
+                <a:effectLst/>
+                <a:latin typeface="+mn-lt"/>
+                <a:ea typeface="+mn-ea"/>
+                <a:cs typeface="+mn-cs"/>
+              </a:rPr>
+              <a:t> </a:t>
+            </a:r>
+            <a:r>
+              <a:rPr lang="ko-KR" altLang="ko-KR" sz="1200" b="0" i="1" kern="1200" dirty="0" err="1">
+                <a:solidFill>
+                  <a:schemeClr val="tx1"/>
+                </a:solidFill>
+                <a:effectLst/>
+                <a:latin typeface="+mn-lt"/>
+                <a:ea typeface="+mn-ea"/>
+                <a:cs typeface="+mn-cs"/>
+              </a:rPr>
+              <a:t>scared</a:t>
+            </a:r>
+            <a:r>
+              <a:rPr lang="ko-KR" altLang="ko-KR" sz="1200" b="0" i="1" kern="1200" dirty="0">
+                <a:solidFill>
+                  <a:schemeClr val="tx1"/>
+                </a:solidFill>
+                <a:effectLst/>
+                <a:latin typeface="+mn-lt"/>
+                <a:ea typeface="+mn-ea"/>
+                <a:cs typeface="+mn-cs"/>
+              </a:rPr>
+              <a:t> </a:t>
+            </a:r>
+            <a:r>
+              <a:rPr lang="ko-KR" altLang="ko-KR" sz="1200" b="0" i="1" kern="1200" dirty="0" err="1">
+                <a:solidFill>
+                  <a:schemeClr val="tx1"/>
+                </a:solidFill>
+                <a:effectLst/>
+                <a:latin typeface="+mn-lt"/>
+                <a:ea typeface="+mn-ea"/>
+                <a:cs typeface="+mn-cs"/>
+              </a:rPr>
+              <a:t>the</a:t>
+            </a:r>
+            <a:r>
+              <a:rPr lang="ko-KR" altLang="ko-KR" sz="1200" b="0" i="1" kern="1200" dirty="0">
+                <a:solidFill>
+                  <a:schemeClr val="tx1"/>
+                </a:solidFill>
+                <a:effectLst/>
+                <a:latin typeface="+mn-lt"/>
+                <a:ea typeface="+mn-ea"/>
+                <a:cs typeface="+mn-cs"/>
+              </a:rPr>
+              <a:t> </a:t>
+            </a:r>
+            <a:r>
+              <a:rPr lang="ko-KR" altLang="ko-KR" sz="1200" b="0" i="1" kern="1200" dirty="0" err="1">
+                <a:solidFill>
+                  <a:schemeClr val="tx1"/>
+                </a:solidFill>
+                <a:effectLst/>
+                <a:latin typeface="+mn-lt"/>
+                <a:ea typeface="+mn-ea"/>
+                <a:cs typeface="+mn-cs"/>
+              </a:rPr>
+              <a:t>market</a:t>
+            </a:r>
+            <a:r>
+              <a:rPr lang="ko-KR" altLang="ko-KR" sz="1200" b="0" i="1" kern="1200" dirty="0">
+                <a:solidFill>
+                  <a:schemeClr val="tx1"/>
+                </a:solidFill>
+                <a:effectLst/>
+                <a:latin typeface="+mn-lt"/>
+                <a:ea typeface="+mn-ea"/>
+                <a:cs typeface="+mn-cs"/>
+              </a:rPr>
+              <a:t> </a:t>
+            </a:r>
+            <a:r>
+              <a:rPr lang="ko-KR" altLang="ko-KR" sz="1200" b="0" i="1" kern="1200" dirty="0" err="1">
+                <a:solidFill>
+                  <a:schemeClr val="tx1"/>
+                </a:solidFill>
+                <a:effectLst/>
+                <a:latin typeface="+mn-lt"/>
+                <a:ea typeface="+mn-ea"/>
+                <a:cs typeface="+mn-cs"/>
+              </a:rPr>
+              <a:t>already</a:t>
+            </a:r>
+            <a:r>
+              <a:rPr lang="ko-KR" altLang="ko-KR" sz="1200" b="0" i="1" kern="1200" dirty="0">
+                <a:solidFill>
+                  <a:schemeClr val="tx1"/>
+                </a:solidFill>
+                <a:effectLst/>
+                <a:latin typeface="+mn-lt"/>
+                <a:ea typeface="+mn-ea"/>
+                <a:cs typeface="+mn-cs"/>
+              </a:rPr>
+              <a:t> </a:t>
+            </a:r>
+            <a:r>
+              <a:rPr lang="ko-KR" altLang="ko-KR" sz="1200" b="0" i="1" kern="1200" dirty="0" err="1">
+                <a:solidFill>
+                  <a:schemeClr val="tx1"/>
+                </a:solidFill>
+                <a:effectLst/>
+                <a:latin typeface="+mn-lt"/>
+                <a:ea typeface="+mn-ea"/>
+                <a:cs typeface="+mn-cs"/>
+              </a:rPr>
+              <a:t>is</a:t>
+            </a:r>
+            <a:r>
+              <a:rPr lang="ko-KR" altLang="ko-KR" sz="1200" b="0" i="1" kern="1200" dirty="0">
+                <a:solidFill>
+                  <a:schemeClr val="tx1"/>
+                </a:solidFill>
+                <a:effectLst/>
+                <a:latin typeface="+mn-lt"/>
+                <a:ea typeface="+mn-ea"/>
+                <a:cs typeface="+mn-cs"/>
+              </a:rPr>
+              <a:t> </a:t>
+            </a:r>
+            <a:r>
+              <a:rPr lang="ko-KR" altLang="ko-KR" sz="1200" b="0" i="1" kern="1200" dirty="0" err="1">
+                <a:solidFill>
+                  <a:schemeClr val="tx1"/>
+                </a:solidFill>
+                <a:effectLst/>
+                <a:latin typeface="+mn-lt"/>
+                <a:ea typeface="+mn-ea"/>
+                <a:cs typeface="+mn-cs"/>
+              </a:rPr>
+              <a:t>before</a:t>
+            </a:r>
+            <a:r>
+              <a:rPr lang="ko-KR" altLang="ko-KR" sz="1200" b="0" i="1" kern="1200" dirty="0">
+                <a:solidFill>
+                  <a:schemeClr val="tx1"/>
+                </a:solidFill>
+                <a:effectLst/>
+                <a:latin typeface="+mn-lt"/>
+                <a:ea typeface="+mn-ea"/>
+                <a:cs typeface="+mn-cs"/>
+              </a:rPr>
+              <a:t> </a:t>
+            </a:r>
+            <a:r>
+              <a:rPr lang="ko-KR" altLang="ko-KR" sz="1200" b="0" i="1" kern="1200" dirty="0" err="1">
+                <a:solidFill>
+                  <a:schemeClr val="tx1"/>
+                </a:solidFill>
+                <a:effectLst/>
+                <a:latin typeface="+mn-lt"/>
+                <a:ea typeface="+mn-ea"/>
+                <a:cs typeface="+mn-cs"/>
+              </a:rPr>
+              <a:t>crediting</a:t>
+            </a:r>
+            <a:r>
+              <a:rPr lang="ko-KR" altLang="ko-KR" sz="1200" b="0" i="1" kern="1200" dirty="0">
+                <a:solidFill>
+                  <a:schemeClr val="tx1"/>
+                </a:solidFill>
+                <a:effectLst/>
+                <a:latin typeface="+mn-lt"/>
+                <a:ea typeface="+mn-ea"/>
+                <a:cs typeface="+mn-cs"/>
+              </a:rPr>
+              <a:t> </a:t>
+            </a:r>
+            <a:r>
+              <a:rPr lang="ko-KR" altLang="ko-KR" sz="1200" b="0" i="1" kern="1200" dirty="0" err="1">
+                <a:solidFill>
+                  <a:schemeClr val="tx1"/>
+                </a:solidFill>
+                <a:effectLst/>
+                <a:latin typeface="+mn-lt"/>
+                <a:ea typeface="+mn-ea"/>
+                <a:cs typeface="+mn-cs"/>
+              </a:rPr>
+              <a:t>anything</a:t>
+            </a:r>
+            <a:r>
+              <a:rPr lang="ko-KR" altLang="ko-KR" sz="1200" b="0" i="1" kern="1200" dirty="0">
+                <a:solidFill>
+                  <a:schemeClr val="tx1"/>
+                </a:solidFill>
+                <a:effectLst/>
+                <a:latin typeface="+mn-lt"/>
+                <a:ea typeface="+mn-ea"/>
+                <a:cs typeface="+mn-cs"/>
+              </a:rPr>
+              <a:t> </a:t>
+            </a:r>
+            <a:r>
+              <a:rPr lang="ko-KR" altLang="ko-KR" sz="1200" b="0" i="1" kern="1200" dirty="0" err="1">
+                <a:solidFill>
+                  <a:schemeClr val="tx1"/>
+                </a:solidFill>
+                <a:effectLst/>
+                <a:latin typeface="+mn-lt"/>
+                <a:ea typeface="+mn-ea"/>
+                <a:cs typeface="+mn-cs"/>
+              </a:rPr>
+              <a:t>to</a:t>
+            </a:r>
+            <a:r>
+              <a:rPr lang="ko-KR" altLang="ko-KR" sz="1200" b="0" i="1" kern="1200" dirty="0">
+                <a:solidFill>
+                  <a:schemeClr val="tx1"/>
+                </a:solidFill>
+                <a:effectLst/>
+                <a:latin typeface="+mn-lt"/>
+                <a:ea typeface="+mn-ea"/>
+                <a:cs typeface="+mn-cs"/>
+              </a:rPr>
+              <a:t> </a:t>
+            </a:r>
+            <a:r>
+              <a:rPr lang="ko-KR" altLang="ko-KR" sz="1200" b="0" i="1" kern="1200" dirty="0" err="1">
+                <a:solidFill>
+                  <a:schemeClr val="tx1"/>
+                </a:solidFill>
+                <a:effectLst/>
+                <a:latin typeface="+mn-lt"/>
+                <a:ea typeface="+mn-ea"/>
+                <a:cs typeface="+mn-cs"/>
+              </a:rPr>
+              <a:t>stablecoin</a:t>
+            </a:r>
+            <a:r>
+              <a:rPr lang="ko-KR" altLang="ko-KR" sz="1200" b="0" i="1" kern="1200" dirty="0">
+                <a:solidFill>
+                  <a:schemeClr val="tx1"/>
+                </a:solidFill>
+                <a:effectLst/>
+                <a:latin typeface="+mn-lt"/>
+                <a:ea typeface="+mn-ea"/>
+                <a:cs typeface="+mn-cs"/>
+              </a:rPr>
+              <a:t> </a:t>
+            </a:r>
+            <a:r>
+              <a:rPr lang="ko-KR" altLang="ko-KR" sz="1200" b="0" i="1" kern="1200" dirty="0" err="1">
+                <a:solidFill>
+                  <a:schemeClr val="tx1"/>
+                </a:solidFill>
+                <a:effectLst/>
+                <a:latin typeface="+mn-lt"/>
+                <a:ea typeface="+mn-ea"/>
+                <a:cs typeface="+mn-cs"/>
+              </a:rPr>
+              <a:t>supply</a:t>
+            </a:r>
+            <a:r>
+              <a:rPr lang="ko-KR" altLang="ko-KR" sz="1200" b="0" i="1" kern="1200" dirty="0">
+                <a:solidFill>
+                  <a:schemeClr val="tx1"/>
+                </a:solidFill>
+                <a:effectLst/>
+                <a:latin typeface="+mn-lt"/>
+                <a:ea typeface="+mn-ea"/>
+                <a:cs typeface="+mn-cs"/>
+              </a:rPr>
+              <a:t> </a:t>
+            </a:r>
+            <a:r>
+              <a:rPr lang="ko-KR" altLang="ko-KR" sz="1200" b="0" i="1" kern="1200" dirty="0" err="1">
+                <a:solidFill>
+                  <a:schemeClr val="tx1"/>
+                </a:solidFill>
+                <a:effectLst/>
+                <a:latin typeface="+mn-lt"/>
+                <a:ea typeface="+mn-ea"/>
+                <a:cs typeface="+mn-cs"/>
+              </a:rPr>
+              <a:t>changes</a:t>
+            </a:r>
+            <a:r>
+              <a:rPr lang="ko-KR" altLang="ko-KR" sz="1200" b="0" i="1" kern="1200" dirty="0">
+                <a:solidFill>
+                  <a:schemeClr val="tx1"/>
+                </a:solidFill>
+                <a:effectLst/>
+                <a:latin typeface="+mn-lt"/>
+                <a:ea typeface="+mn-ea"/>
+                <a:cs typeface="+mn-cs"/>
+              </a:rPr>
+              <a:t>."</a:t>
+            </a:r>
+            <a:endParaRPr lang="ko-KR" altLang="ko-KR" sz="1200" b="0" i="0" kern="1200" dirty="0">
+              <a:solidFill>
+                <a:schemeClr val="tx1"/>
+              </a:solidFill>
+              <a:effectLst/>
+              <a:latin typeface="+mn-lt"/>
+              <a:ea typeface="+mn-ea"/>
+              <a:cs typeface="+mn-cs"/>
+            </a:endParaRPr>
+          </a:p>
+          <a:p>
+            <a:br>
+              <a:rPr lang="ko-KR" altLang="ko-KR" dirty="0"/>
+            </a:br>
+            <a:endParaRPr dirty="0"/>
           </a:p>
         </p:txBody>
       </p:sp>
@@ -781,8 +2656,1532 @@
           <a:lstStyle/>
           <a:p>
             <a:r>
-              <a:t>Our first event is the LUNA and UST collapse in May 2022. To understand why this affected Tether and Circle, you first need to understand what Terra was. UST was an algorithmic stablecoin — it did not hold real dollars or Treasury bills. Instead, its one-dollar peg was maintained by a mathematical relationship with its sister token, LUNA. When a large coordinated sell-off drained UST's liquidity on May 7th, the peg broke, a death spiral began, and roughly 40 billion dollars in market value was destroyed within days. Now, Tether and Circle had nothing to do with Terra. Their reserves are real assets. But markets panicked — investors began asking: what if all stablecoins are fragile? This caused a wave of redemptions across the industry, hitting Tether especially hard. Here is where our buffer condition becomes decisive. At the time, Tether held only about 5 to 8 percent of its reserves in liquid cash. The rest was in Treasury bills. So when redemptions came in, Tether had to sell T-bills to pay out. That forced selling pushed Treasury yields above OIS, and the spread spiked. Our event study shows a CAR of plus 8.9 percentage points over the following 20 days — a large, sustained, and statistically highly significant increase in the spread.</a:t>
-            </a:r>
+              <a:rPr dirty="0"/>
+              <a:t>Our first event is the LUNA and UST collapse in May 2022. To understand why this affected Tether and Circle, you first need to understand what Terra was. UST was an algorithmic stablecoin — it did not hold real dollars or Treasury bills. Instead, its one-dollar peg was maintained by a mathematical relationship with its sister token, LUNA. When a large coordinated sell-off drained UST's liquidity on May 7th, the peg broke, a death spiral began, and roughly 40 billion dollars in market value was destroyed within days. </a:t>
+            </a:r>
+            <a:endParaRPr lang="en-US" dirty="0"/>
+          </a:p>
+          <a:p>
+            <a:endParaRPr lang="en-US" dirty="0"/>
+          </a:p>
+          <a:p>
+            <a:r>
+              <a:rPr dirty="0"/>
+              <a:t>Now, Tether and Circle had nothing to do with Terra. Their reserves are real assets. But markets panicked — investors began asking: what if all stablecoins are fragile? This caused a wave of redemptions across the industry, hitting Tether especially hard. Here is where our buffer condition becomes decisive. At the time, Tether held only about 5 to 8 percent of its reserves in liquid cash. The rest was in Treasury bills. So when redemptions came in, Tether had to sell T-bills to pay out. That forced selling pushed Treasury yields above OIS, and the spread spiked. </a:t>
+            </a:r>
+            <a:endParaRPr lang="en-US" dirty="0"/>
+          </a:p>
+          <a:p>
+            <a:endParaRPr lang="en-US" dirty="0"/>
+          </a:p>
+          <a:p>
+            <a:r>
+              <a:rPr b="1" dirty="0"/>
+              <a:t>Our event study shows a CAR of plus 8.9 percentage points over the following 20 days — a large, sustained, and statistically highly significant increase in the spread.</a:t>
+            </a:r>
+            <a:endParaRPr lang="en-US" b="1" dirty="0"/>
+          </a:p>
+          <a:p>
+            <a:endParaRPr lang="en-US" dirty="0"/>
+          </a:p>
+          <a:p>
+            <a:r>
+              <a:rPr lang="en-US" dirty="0"/>
+              <a:t>Note: </a:t>
+            </a:r>
+            <a:r>
+              <a:rPr lang="ko-KR" altLang="ko-KR" sz="1200" b="1" i="0" kern="1200" dirty="0">
+                <a:solidFill>
+                  <a:schemeClr val="tx1"/>
+                </a:solidFill>
+                <a:effectLst/>
+                <a:latin typeface="+mn-lt"/>
+                <a:ea typeface="+mn-ea"/>
+                <a:cs typeface="+mn-cs"/>
+              </a:rPr>
+              <a:t>UST (</a:t>
+            </a:r>
+            <a:r>
+              <a:rPr lang="ko-KR" altLang="ko-KR" sz="1200" b="1" i="0" kern="1200" dirty="0" err="1">
+                <a:solidFill>
+                  <a:schemeClr val="tx1"/>
+                </a:solidFill>
+                <a:effectLst/>
+                <a:latin typeface="+mn-lt"/>
+                <a:ea typeface="+mn-ea"/>
+                <a:cs typeface="+mn-cs"/>
+              </a:rPr>
+              <a:t>TerraUSD</a:t>
+            </a:r>
+            <a:r>
+              <a:rPr lang="ko-KR" altLang="ko-KR" sz="1200" b="1" i="0" kern="1200" dirty="0">
+                <a:solidFill>
+                  <a:schemeClr val="tx1"/>
+                </a:solidFill>
+                <a:effectLst/>
+                <a:latin typeface="+mn-lt"/>
+                <a:ea typeface="+mn-ea"/>
+                <a:cs typeface="+mn-cs"/>
+              </a:rPr>
+              <a:t>):</a:t>
+            </a:r>
+            <a:r>
+              <a:rPr lang="ko-KR" altLang="ko-KR" sz="1200" b="0" i="0" kern="1200" dirty="0">
+                <a:solidFill>
+                  <a:schemeClr val="tx1"/>
+                </a:solidFill>
+                <a:effectLst/>
+                <a:latin typeface="+mn-lt"/>
+                <a:ea typeface="+mn-ea"/>
+                <a:cs typeface="+mn-cs"/>
+              </a:rPr>
+              <a:t> </a:t>
+            </a:r>
+            <a:r>
+              <a:rPr lang="ko-KR" altLang="ko-KR" sz="1200" b="0" i="0" kern="1200" dirty="0" err="1">
+                <a:solidFill>
+                  <a:schemeClr val="tx1"/>
+                </a:solidFill>
+                <a:effectLst/>
+                <a:latin typeface="+mn-lt"/>
+                <a:ea typeface="+mn-ea"/>
+                <a:cs typeface="+mn-cs"/>
+              </a:rPr>
+              <a:t>Unlike</a:t>
+            </a:r>
+            <a:r>
+              <a:rPr lang="ko-KR" altLang="ko-KR" sz="1200" b="0" i="0" kern="1200" dirty="0">
+                <a:solidFill>
+                  <a:schemeClr val="tx1"/>
+                </a:solidFill>
+                <a:effectLst/>
+                <a:latin typeface="+mn-lt"/>
+                <a:ea typeface="+mn-ea"/>
+                <a:cs typeface="+mn-cs"/>
+              </a:rPr>
+              <a:t> </a:t>
+            </a:r>
+            <a:r>
+              <a:rPr lang="ko-KR" altLang="ko-KR" sz="1200" b="0" i="0" kern="1200" dirty="0" err="1">
+                <a:solidFill>
+                  <a:schemeClr val="tx1"/>
+                </a:solidFill>
+                <a:effectLst/>
+                <a:latin typeface="+mn-lt"/>
+                <a:ea typeface="+mn-ea"/>
+                <a:cs typeface="+mn-cs"/>
+              </a:rPr>
+              <a:t>traditional</a:t>
+            </a:r>
+            <a:r>
+              <a:rPr lang="ko-KR" altLang="ko-KR" sz="1200" b="0" i="0" kern="1200" dirty="0">
+                <a:solidFill>
+                  <a:schemeClr val="tx1"/>
+                </a:solidFill>
+                <a:effectLst/>
+                <a:latin typeface="+mn-lt"/>
+                <a:ea typeface="+mn-ea"/>
+                <a:cs typeface="+mn-cs"/>
+              </a:rPr>
+              <a:t> </a:t>
+            </a:r>
+            <a:r>
+              <a:rPr lang="ko-KR" altLang="ko-KR" sz="1200" b="0" i="0" kern="1200" dirty="0" err="1">
+                <a:solidFill>
+                  <a:schemeClr val="tx1"/>
+                </a:solidFill>
+                <a:effectLst/>
+                <a:latin typeface="+mn-lt"/>
+                <a:ea typeface="+mn-ea"/>
+                <a:cs typeface="+mn-cs"/>
+              </a:rPr>
+              <a:t>stablecoins</a:t>
+            </a:r>
+            <a:r>
+              <a:rPr lang="ko-KR" altLang="ko-KR" sz="1200" b="0" i="0" kern="1200" dirty="0">
+                <a:solidFill>
+                  <a:schemeClr val="tx1"/>
+                </a:solidFill>
+                <a:effectLst/>
+                <a:latin typeface="+mn-lt"/>
+                <a:ea typeface="+mn-ea"/>
+                <a:cs typeface="+mn-cs"/>
+              </a:rPr>
+              <a:t> </a:t>
+            </a:r>
+            <a:r>
+              <a:rPr lang="ko-KR" altLang="ko-KR" sz="1200" b="0" i="0" kern="1200" dirty="0" err="1">
+                <a:solidFill>
+                  <a:schemeClr val="tx1"/>
+                </a:solidFill>
+                <a:effectLst/>
+                <a:latin typeface="+mn-lt"/>
+                <a:ea typeface="+mn-ea"/>
+                <a:cs typeface="+mn-cs"/>
+              </a:rPr>
+              <a:t>backed</a:t>
+            </a:r>
+            <a:r>
+              <a:rPr lang="ko-KR" altLang="ko-KR" sz="1200" b="0" i="0" kern="1200" dirty="0">
+                <a:solidFill>
+                  <a:schemeClr val="tx1"/>
+                </a:solidFill>
+                <a:effectLst/>
+                <a:latin typeface="+mn-lt"/>
+                <a:ea typeface="+mn-ea"/>
+                <a:cs typeface="+mn-cs"/>
+              </a:rPr>
+              <a:t> </a:t>
+            </a:r>
+            <a:r>
+              <a:rPr lang="ko-KR" altLang="ko-KR" sz="1200" b="0" i="0" kern="1200" dirty="0" err="1">
+                <a:solidFill>
+                  <a:schemeClr val="tx1"/>
+                </a:solidFill>
+                <a:effectLst/>
+                <a:latin typeface="+mn-lt"/>
+                <a:ea typeface="+mn-ea"/>
+                <a:cs typeface="+mn-cs"/>
+              </a:rPr>
+              <a:t>by</a:t>
+            </a:r>
+            <a:r>
+              <a:rPr lang="ko-KR" altLang="ko-KR" sz="1200" b="0" i="0" kern="1200" dirty="0">
+                <a:solidFill>
+                  <a:schemeClr val="tx1"/>
+                </a:solidFill>
+                <a:effectLst/>
+                <a:latin typeface="+mn-lt"/>
+                <a:ea typeface="+mn-ea"/>
+                <a:cs typeface="+mn-cs"/>
+              </a:rPr>
+              <a:t> </a:t>
+            </a:r>
+            <a:r>
+              <a:rPr lang="ko-KR" altLang="ko-KR" sz="1200" b="0" i="0" kern="1200" dirty="0" err="1">
+                <a:solidFill>
+                  <a:schemeClr val="tx1"/>
+                </a:solidFill>
+                <a:effectLst/>
+                <a:latin typeface="+mn-lt"/>
+                <a:ea typeface="+mn-ea"/>
+                <a:cs typeface="+mn-cs"/>
+              </a:rPr>
+              <a:t>fiat</a:t>
+            </a:r>
+            <a:r>
+              <a:rPr lang="ko-KR" altLang="ko-KR" sz="1200" b="0" i="0" kern="1200" dirty="0">
+                <a:solidFill>
+                  <a:schemeClr val="tx1"/>
+                </a:solidFill>
+                <a:effectLst/>
+                <a:latin typeface="+mn-lt"/>
+                <a:ea typeface="+mn-ea"/>
+                <a:cs typeface="+mn-cs"/>
+              </a:rPr>
+              <a:t> </a:t>
+            </a:r>
+            <a:r>
+              <a:rPr lang="ko-KR" altLang="ko-KR" sz="1200" b="0" i="0" kern="1200" dirty="0" err="1">
+                <a:solidFill>
+                  <a:schemeClr val="tx1"/>
+                </a:solidFill>
+                <a:effectLst/>
+                <a:latin typeface="+mn-lt"/>
+                <a:ea typeface="+mn-ea"/>
+                <a:cs typeface="+mn-cs"/>
+              </a:rPr>
+              <a:t>reserves</a:t>
+            </a:r>
+            <a:r>
+              <a:rPr lang="ko-KR" altLang="ko-KR" sz="1200" b="0" i="0" kern="1200" dirty="0">
+                <a:solidFill>
+                  <a:schemeClr val="tx1"/>
+                </a:solidFill>
+                <a:effectLst/>
+                <a:latin typeface="+mn-lt"/>
+                <a:ea typeface="+mn-ea"/>
+                <a:cs typeface="+mn-cs"/>
+              </a:rPr>
+              <a:t> (</a:t>
+            </a:r>
+            <a:r>
+              <a:rPr lang="ko-KR" altLang="ko-KR" sz="1200" b="0" i="0" kern="1200" dirty="0" err="1">
+                <a:solidFill>
+                  <a:schemeClr val="tx1"/>
+                </a:solidFill>
+                <a:effectLst/>
+                <a:latin typeface="+mn-lt"/>
+                <a:ea typeface="+mn-ea"/>
+                <a:cs typeface="+mn-cs"/>
+              </a:rPr>
+              <a:t>such</a:t>
+            </a:r>
+            <a:r>
+              <a:rPr lang="ko-KR" altLang="ko-KR" sz="1200" b="0" i="0" kern="1200" dirty="0">
+                <a:solidFill>
+                  <a:schemeClr val="tx1"/>
+                </a:solidFill>
+                <a:effectLst/>
+                <a:latin typeface="+mn-lt"/>
+                <a:ea typeface="+mn-ea"/>
+                <a:cs typeface="+mn-cs"/>
+              </a:rPr>
+              <a:t> </a:t>
+            </a:r>
+            <a:r>
+              <a:rPr lang="ko-KR" altLang="ko-KR" sz="1200" b="0" i="0" kern="1200" dirty="0" err="1">
+                <a:solidFill>
+                  <a:schemeClr val="tx1"/>
+                </a:solidFill>
+                <a:effectLst/>
+                <a:latin typeface="+mn-lt"/>
+                <a:ea typeface="+mn-ea"/>
+                <a:cs typeface="+mn-cs"/>
+              </a:rPr>
+              <a:t>as</a:t>
+            </a:r>
+            <a:r>
+              <a:rPr lang="ko-KR" altLang="ko-KR" sz="1200" b="0" i="0" kern="1200" dirty="0">
+                <a:solidFill>
+                  <a:schemeClr val="tx1"/>
+                </a:solidFill>
+                <a:effectLst/>
+                <a:latin typeface="+mn-lt"/>
+                <a:ea typeface="+mn-ea"/>
+                <a:cs typeface="+mn-cs"/>
+              </a:rPr>
+              <a:t> USDC), UST </a:t>
+            </a:r>
+            <a:r>
+              <a:rPr lang="ko-KR" altLang="ko-KR" sz="1200" b="0" i="0" kern="1200" dirty="0" err="1">
+                <a:solidFill>
+                  <a:schemeClr val="tx1"/>
+                </a:solidFill>
+                <a:effectLst/>
+                <a:latin typeface="+mn-lt"/>
+                <a:ea typeface="+mn-ea"/>
+                <a:cs typeface="+mn-cs"/>
+              </a:rPr>
+              <a:t>was</a:t>
+            </a:r>
+            <a:r>
+              <a:rPr lang="ko-KR" altLang="ko-KR" sz="1200" b="0" i="0" kern="1200" dirty="0">
+                <a:solidFill>
+                  <a:schemeClr val="tx1"/>
+                </a:solidFill>
+                <a:effectLst/>
+                <a:latin typeface="+mn-lt"/>
+                <a:ea typeface="+mn-ea"/>
+                <a:cs typeface="+mn-cs"/>
+              </a:rPr>
+              <a:t> </a:t>
+            </a:r>
+            <a:r>
+              <a:rPr lang="ko-KR" altLang="ko-KR" sz="1200" b="0" i="0" kern="1200" dirty="0" err="1">
+                <a:solidFill>
+                  <a:schemeClr val="tx1"/>
+                </a:solidFill>
+                <a:effectLst/>
+                <a:latin typeface="+mn-lt"/>
+                <a:ea typeface="+mn-ea"/>
+                <a:cs typeface="+mn-cs"/>
+              </a:rPr>
+              <a:t>unbacked</a:t>
+            </a:r>
+            <a:r>
+              <a:rPr lang="ko-KR" altLang="ko-KR" sz="1200" b="0" i="0" kern="1200" dirty="0">
+                <a:solidFill>
+                  <a:schemeClr val="tx1"/>
+                </a:solidFill>
+                <a:effectLst/>
+                <a:latin typeface="+mn-lt"/>
+                <a:ea typeface="+mn-ea"/>
+                <a:cs typeface="+mn-cs"/>
+              </a:rPr>
+              <a:t>. </a:t>
+            </a:r>
+            <a:r>
+              <a:rPr lang="ko-KR" altLang="ko-KR" sz="1200" b="0" i="0" kern="1200" dirty="0" err="1">
+                <a:solidFill>
+                  <a:schemeClr val="tx1"/>
+                </a:solidFill>
+                <a:effectLst/>
+                <a:latin typeface="+mn-lt"/>
+                <a:ea typeface="+mn-ea"/>
+                <a:cs typeface="+mn-cs"/>
+              </a:rPr>
+              <a:t>Its</a:t>
+            </a:r>
+            <a:r>
+              <a:rPr lang="ko-KR" altLang="ko-KR" sz="1200" b="0" i="0" kern="1200" dirty="0">
+                <a:solidFill>
+                  <a:schemeClr val="tx1"/>
+                </a:solidFill>
+                <a:effectLst/>
+                <a:latin typeface="+mn-lt"/>
+                <a:ea typeface="+mn-ea"/>
+                <a:cs typeface="+mn-cs"/>
+              </a:rPr>
+              <a:t> </a:t>
+            </a:r>
+            <a:r>
+              <a:rPr lang="ko-KR" altLang="ko-KR" sz="1200" b="0" i="0" kern="1200" dirty="0" err="1">
+                <a:solidFill>
+                  <a:schemeClr val="tx1"/>
+                </a:solidFill>
+                <a:effectLst/>
+                <a:latin typeface="+mn-lt"/>
+                <a:ea typeface="+mn-ea"/>
+                <a:cs typeface="+mn-cs"/>
+              </a:rPr>
+              <a:t>peg</a:t>
+            </a:r>
+            <a:r>
+              <a:rPr lang="ko-KR" altLang="ko-KR" sz="1200" b="0" i="0" kern="1200" dirty="0">
+                <a:solidFill>
+                  <a:schemeClr val="tx1"/>
+                </a:solidFill>
+                <a:effectLst/>
+                <a:latin typeface="+mn-lt"/>
+                <a:ea typeface="+mn-ea"/>
+                <a:cs typeface="+mn-cs"/>
+              </a:rPr>
+              <a:t> </a:t>
+            </a:r>
+            <a:r>
+              <a:rPr lang="ko-KR" altLang="ko-KR" sz="1200" b="0" i="0" kern="1200" dirty="0" err="1">
+                <a:solidFill>
+                  <a:schemeClr val="tx1"/>
+                </a:solidFill>
+                <a:effectLst/>
+                <a:latin typeface="+mn-lt"/>
+                <a:ea typeface="+mn-ea"/>
+                <a:cs typeface="+mn-cs"/>
+              </a:rPr>
+              <a:t>relied</a:t>
+            </a:r>
+            <a:r>
+              <a:rPr lang="ko-KR" altLang="ko-KR" sz="1200" b="0" i="0" kern="1200" dirty="0">
+                <a:solidFill>
+                  <a:schemeClr val="tx1"/>
+                </a:solidFill>
+                <a:effectLst/>
+                <a:latin typeface="+mn-lt"/>
+                <a:ea typeface="+mn-ea"/>
+                <a:cs typeface="+mn-cs"/>
+              </a:rPr>
+              <a:t> </a:t>
+            </a:r>
+            <a:r>
+              <a:rPr lang="ko-KR" altLang="ko-KR" sz="1200" b="0" i="0" kern="1200" dirty="0" err="1">
+                <a:solidFill>
+                  <a:schemeClr val="tx1"/>
+                </a:solidFill>
+                <a:effectLst/>
+                <a:latin typeface="+mn-lt"/>
+                <a:ea typeface="+mn-ea"/>
+                <a:cs typeface="+mn-cs"/>
+              </a:rPr>
+              <a:t>entirely</a:t>
+            </a:r>
+            <a:r>
+              <a:rPr lang="ko-KR" altLang="ko-KR" sz="1200" b="0" i="0" kern="1200" dirty="0">
+                <a:solidFill>
+                  <a:schemeClr val="tx1"/>
+                </a:solidFill>
+                <a:effectLst/>
+                <a:latin typeface="+mn-lt"/>
+                <a:ea typeface="+mn-ea"/>
+                <a:cs typeface="+mn-cs"/>
+              </a:rPr>
+              <a:t> </a:t>
+            </a:r>
+            <a:r>
+              <a:rPr lang="ko-KR" altLang="ko-KR" sz="1200" b="0" i="0" kern="1200" dirty="0" err="1">
+                <a:solidFill>
+                  <a:schemeClr val="tx1"/>
+                </a:solidFill>
+                <a:effectLst/>
+                <a:latin typeface="+mn-lt"/>
+                <a:ea typeface="+mn-ea"/>
+                <a:cs typeface="+mn-cs"/>
+              </a:rPr>
+              <a:t>on</a:t>
+            </a:r>
+            <a:r>
+              <a:rPr lang="ko-KR" altLang="ko-KR" sz="1200" b="0" i="0" kern="1200" dirty="0">
+                <a:solidFill>
+                  <a:schemeClr val="tx1"/>
+                </a:solidFill>
+                <a:effectLst/>
+                <a:latin typeface="+mn-lt"/>
+                <a:ea typeface="+mn-ea"/>
+                <a:cs typeface="+mn-cs"/>
+              </a:rPr>
+              <a:t> </a:t>
+            </a:r>
+            <a:r>
+              <a:rPr lang="ko-KR" altLang="ko-KR" sz="1200" b="0" i="0" kern="1200" dirty="0" err="1">
+                <a:solidFill>
+                  <a:schemeClr val="tx1"/>
+                </a:solidFill>
+                <a:effectLst/>
+                <a:latin typeface="+mn-lt"/>
+                <a:ea typeface="+mn-ea"/>
+                <a:cs typeface="+mn-cs"/>
+              </a:rPr>
+              <a:t>a</a:t>
+            </a:r>
+            <a:r>
+              <a:rPr lang="ko-KR" altLang="ko-KR" sz="1200" b="0" i="0" kern="1200" dirty="0">
+                <a:solidFill>
+                  <a:schemeClr val="tx1"/>
+                </a:solidFill>
+                <a:effectLst/>
+                <a:latin typeface="+mn-lt"/>
+                <a:ea typeface="+mn-ea"/>
+                <a:cs typeface="+mn-cs"/>
+              </a:rPr>
+              <a:t> </a:t>
+            </a:r>
+            <a:r>
+              <a:rPr lang="ko-KR" altLang="ko-KR" sz="1200" b="0" i="0" kern="1200" dirty="0" err="1">
+                <a:solidFill>
+                  <a:schemeClr val="tx1"/>
+                </a:solidFill>
+                <a:effectLst/>
+                <a:latin typeface="+mn-lt"/>
+                <a:ea typeface="+mn-ea"/>
+                <a:cs typeface="+mn-cs"/>
+              </a:rPr>
+              <a:t>smart</a:t>
+            </a:r>
+            <a:r>
+              <a:rPr lang="ko-KR" altLang="ko-KR" sz="1200" b="0" i="0" kern="1200" dirty="0">
+                <a:solidFill>
+                  <a:schemeClr val="tx1"/>
+                </a:solidFill>
+                <a:effectLst/>
+                <a:latin typeface="+mn-lt"/>
+                <a:ea typeface="+mn-ea"/>
+                <a:cs typeface="+mn-cs"/>
+              </a:rPr>
+              <a:t> </a:t>
+            </a:r>
+            <a:r>
+              <a:rPr lang="ko-KR" altLang="ko-KR" sz="1200" b="0" i="0" kern="1200" dirty="0" err="1">
+                <a:solidFill>
+                  <a:schemeClr val="tx1"/>
+                </a:solidFill>
+                <a:effectLst/>
+                <a:latin typeface="+mn-lt"/>
+                <a:ea typeface="+mn-ea"/>
+                <a:cs typeface="+mn-cs"/>
+              </a:rPr>
+              <a:t>contract</a:t>
+            </a:r>
+            <a:r>
+              <a:rPr lang="ko-KR" altLang="ko-KR" sz="1200" b="0" i="0" kern="1200" dirty="0">
+                <a:solidFill>
+                  <a:schemeClr val="tx1"/>
+                </a:solidFill>
+                <a:effectLst/>
+                <a:latin typeface="+mn-lt"/>
+                <a:ea typeface="+mn-ea"/>
+                <a:cs typeface="+mn-cs"/>
+              </a:rPr>
+              <a:t> "</a:t>
+            </a:r>
+            <a:r>
+              <a:rPr lang="ko-KR" altLang="ko-KR" sz="1200" b="0" i="0" kern="1200" dirty="0" err="1">
+                <a:solidFill>
+                  <a:schemeClr val="tx1"/>
+                </a:solidFill>
+                <a:effectLst/>
+                <a:latin typeface="+mn-lt"/>
+                <a:ea typeface="+mn-ea"/>
+                <a:cs typeface="+mn-cs"/>
+              </a:rPr>
+              <a:t>mint</a:t>
+            </a:r>
+            <a:r>
+              <a:rPr lang="ko-KR" altLang="ko-KR" sz="1200" b="0" i="0" kern="1200" dirty="0">
+                <a:solidFill>
+                  <a:schemeClr val="tx1"/>
+                </a:solidFill>
+                <a:effectLst/>
+                <a:latin typeface="+mn-lt"/>
+                <a:ea typeface="+mn-ea"/>
+                <a:cs typeface="+mn-cs"/>
+              </a:rPr>
+              <a:t>-and-</a:t>
+            </a:r>
+            <a:r>
+              <a:rPr lang="ko-KR" altLang="ko-KR" sz="1200" b="0" i="0" kern="1200" dirty="0" err="1">
+                <a:solidFill>
+                  <a:schemeClr val="tx1"/>
+                </a:solidFill>
+                <a:effectLst/>
+                <a:latin typeface="+mn-lt"/>
+                <a:ea typeface="+mn-ea"/>
+                <a:cs typeface="+mn-cs"/>
+              </a:rPr>
+              <a:t>burn</a:t>
+            </a:r>
+            <a:r>
+              <a:rPr lang="ko-KR" altLang="ko-KR" sz="1200" b="0" i="0" kern="1200" dirty="0">
+                <a:solidFill>
+                  <a:schemeClr val="tx1"/>
+                </a:solidFill>
+                <a:effectLst/>
+                <a:latin typeface="+mn-lt"/>
+                <a:ea typeface="+mn-ea"/>
+                <a:cs typeface="+mn-cs"/>
+              </a:rPr>
+              <a:t>" </a:t>
+            </a:r>
+            <a:r>
+              <a:rPr lang="ko-KR" altLang="ko-KR" sz="1200" b="0" i="0" kern="1200" dirty="0" err="1">
+                <a:solidFill>
+                  <a:schemeClr val="tx1"/>
+                </a:solidFill>
+                <a:effectLst/>
+                <a:latin typeface="+mn-lt"/>
+                <a:ea typeface="+mn-ea"/>
+                <a:cs typeface="+mn-cs"/>
+              </a:rPr>
+              <a:t>mechanism</a:t>
+            </a:r>
+            <a:r>
+              <a:rPr lang="ko-KR" altLang="ko-KR" sz="1200" b="0" i="0" kern="1200" dirty="0">
+                <a:solidFill>
+                  <a:schemeClr val="tx1"/>
+                </a:solidFill>
+                <a:effectLst/>
+                <a:latin typeface="+mn-lt"/>
+                <a:ea typeface="+mn-ea"/>
+                <a:cs typeface="+mn-cs"/>
+              </a:rPr>
+              <a:t> </a:t>
+            </a:r>
+            <a:r>
+              <a:rPr lang="ko-KR" altLang="ko-KR" sz="1200" b="0" i="0" kern="1200" dirty="0" err="1">
+                <a:solidFill>
+                  <a:schemeClr val="tx1"/>
+                </a:solidFill>
+                <a:effectLst/>
+                <a:latin typeface="+mn-lt"/>
+                <a:ea typeface="+mn-ea"/>
+                <a:cs typeface="+mn-cs"/>
+              </a:rPr>
+              <a:t>tied</a:t>
+            </a:r>
+            <a:r>
+              <a:rPr lang="ko-KR" altLang="ko-KR" sz="1200" b="0" i="0" kern="1200" dirty="0">
+                <a:solidFill>
+                  <a:schemeClr val="tx1"/>
+                </a:solidFill>
+                <a:effectLst/>
+                <a:latin typeface="+mn-lt"/>
+                <a:ea typeface="+mn-ea"/>
+                <a:cs typeface="+mn-cs"/>
+              </a:rPr>
+              <a:t> </a:t>
+            </a:r>
+            <a:r>
+              <a:rPr lang="ko-KR" altLang="ko-KR" sz="1200" b="0" i="0" kern="1200" dirty="0" err="1">
+                <a:solidFill>
+                  <a:schemeClr val="tx1"/>
+                </a:solidFill>
+                <a:effectLst/>
+                <a:latin typeface="+mn-lt"/>
+                <a:ea typeface="+mn-ea"/>
+                <a:cs typeface="+mn-cs"/>
+              </a:rPr>
+              <a:t>to</a:t>
+            </a:r>
+            <a:r>
+              <a:rPr lang="ko-KR" altLang="ko-KR" sz="1200" b="0" i="0" kern="1200" dirty="0">
+                <a:solidFill>
+                  <a:schemeClr val="tx1"/>
+                </a:solidFill>
+                <a:effectLst/>
+                <a:latin typeface="+mn-lt"/>
+                <a:ea typeface="+mn-ea"/>
+                <a:cs typeface="+mn-cs"/>
+              </a:rPr>
+              <a:t> LUNA.</a:t>
+            </a:r>
+          </a:p>
+          <a:p>
+            <a:r>
+              <a:rPr lang="ko-KR" altLang="ko-KR" sz="1200" b="1" i="0" kern="1200" dirty="0">
+                <a:solidFill>
+                  <a:schemeClr val="tx1"/>
+                </a:solidFill>
+                <a:effectLst/>
+                <a:latin typeface="+mn-lt"/>
+                <a:ea typeface="+mn-ea"/>
+                <a:cs typeface="+mn-cs"/>
+              </a:rPr>
+              <a:t>LUNA:</a:t>
+            </a:r>
+            <a:r>
+              <a:rPr lang="ko-KR" altLang="ko-KR" sz="1200" b="0" i="0" kern="1200" dirty="0">
+                <a:solidFill>
+                  <a:schemeClr val="tx1"/>
+                </a:solidFill>
+                <a:effectLst/>
+                <a:latin typeface="+mn-lt"/>
+                <a:ea typeface="+mn-ea"/>
+                <a:cs typeface="+mn-cs"/>
+              </a:rPr>
+              <a:t> </a:t>
+            </a:r>
+            <a:r>
+              <a:rPr lang="ko-KR" altLang="ko-KR" sz="1200" b="0" i="0" kern="1200" dirty="0" err="1">
+                <a:solidFill>
+                  <a:schemeClr val="tx1"/>
+                </a:solidFill>
+                <a:effectLst/>
+                <a:latin typeface="+mn-lt"/>
+                <a:ea typeface="+mn-ea"/>
+                <a:cs typeface="+mn-cs"/>
+              </a:rPr>
+              <a:t>When</a:t>
+            </a:r>
+            <a:r>
+              <a:rPr lang="ko-KR" altLang="ko-KR" sz="1200" b="0" i="0" kern="1200" dirty="0">
+                <a:solidFill>
+                  <a:schemeClr val="tx1"/>
+                </a:solidFill>
+                <a:effectLst/>
+                <a:latin typeface="+mn-lt"/>
+                <a:ea typeface="+mn-ea"/>
+                <a:cs typeface="+mn-cs"/>
+              </a:rPr>
+              <a:t> </a:t>
+            </a:r>
+            <a:r>
+              <a:rPr lang="ko-KR" altLang="ko-KR" sz="1200" b="0" i="0" kern="1200" dirty="0" err="1">
+                <a:solidFill>
+                  <a:schemeClr val="tx1"/>
+                </a:solidFill>
+                <a:effectLst/>
+                <a:latin typeface="+mn-lt"/>
+                <a:ea typeface="+mn-ea"/>
+                <a:cs typeface="+mn-cs"/>
+              </a:rPr>
+              <a:t>the</a:t>
+            </a:r>
+            <a:r>
+              <a:rPr lang="ko-KR" altLang="ko-KR" sz="1200" b="0" i="0" kern="1200" dirty="0">
+                <a:solidFill>
+                  <a:schemeClr val="tx1"/>
+                </a:solidFill>
+                <a:effectLst/>
+                <a:latin typeface="+mn-lt"/>
+                <a:ea typeface="+mn-ea"/>
+                <a:cs typeface="+mn-cs"/>
+              </a:rPr>
+              <a:t> </a:t>
+            </a:r>
+            <a:r>
+              <a:rPr lang="ko-KR" altLang="ko-KR" sz="1200" b="0" i="0" kern="1200" dirty="0" err="1">
+                <a:solidFill>
+                  <a:schemeClr val="tx1"/>
+                </a:solidFill>
+                <a:effectLst/>
+                <a:latin typeface="+mn-lt"/>
+                <a:ea typeface="+mn-ea"/>
+                <a:cs typeface="+mn-cs"/>
+              </a:rPr>
+              <a:t>price</a:t>
+            </a:r>
+            <a:r>
+              <a:rPr lang="ko-KR" altLang="ko-KR" sz="1200" b="0" i="0" kern="1200" dirty="0">
+                <a:solidFill>
+                  <a:schemeClr val="tx1"/>
+                </a:solidFill>
+                <a:effectLst/>
+                <a:latin typeface="+mn-lt"/>
+                <a:ea typeface="+mn-ea"/>
+                <a:cs typeface="+mn-cs"/>
+              </a:rPr>
+              <a:t> of UST </a:t>
+            </a:r>
+            <a:r>
+              <a:rPr lang="ko-KR" altLang="ko-KR" sz="1200" b="0" i="0" kern="1200" dirty="0" err="1">
+                <a:solidFill>
+                  <a:schemeClr val="tx1"/>
+                </a:solidFill>
+                <a:effectLst/>
+                <a:latin typeface="+mn-lt"/>
+                <a:ea typeface="+mn-ea"/>
+                <a:cs typeface="+mn-cs"/>
+              </a:rPr>
+              <a:t>rose</a:t>
+            </a:r>
+            <a:r>
+              <a:rPr lang="ko-KR" altLang="ko-KR" sz="1200" b="0" i="0" kern="1200" dirty="0">
+                <a:solidFill>
+                  <a:schemeClr val="tx1"/>
+                </a:solidFill>
+                <a:effectLst/>
+                <a:latin typeface="+mn-lt"/>
+                <a:ea typeface="+mn-ea"/>
+                <a:cs typeface="+mn-cs"/>
+              </a:rPr>
+              <a:t> </a:t>
+            </a:r>
+            <a:r>
+              <a:rPr lang="ko-KR" altLang="ko-KR" sz="1200" b="0" i="0" kern="1200" dirty="0" err="1">
+                <a:solidFill>
+                  <a:schemeClr val="tx1"/>
+                </a:solidFill>
+                <a:effectLst/>
+                <a:latin typeface="+mn-lt"/>
+                <a:ea typeface="+mn-ea"/>
+                <a:cs typeface="+mn-cs"/>
+              </a:rPr>
+              <a:t>above</a:t>
+            </a:r>
+            <a:r>
+              <a:rPr lang="ko-KR" altLang="ko-KR" sz="1200" b="0" i="0" kern="1200" dirty="0">
+                <a:solidFill>
+                  <a:schemeClr val="tx1"/>
+                </a:solidFill>
+                <a:effectLst/>
+                <a:latin typeface="+mn-lt"/>
+                <a:ea typeface="+mn-ea"/>
+                <a:cs typeface="+mn-cs"/>
+              </a:rPr>
+              <a:t> $1, </a:t>
+            </a:r>
+            <a:r>
+              <a:rPr lang="ko-KR" altLang="ko-KR" sz="1200" b="0" i="0" kern="1200" dirty="0" err="1">
+                <a:solidFill>
+                  <a:schemeClr val="tx1"/>
+                </a:solidFill>
+                <a:effectLst/>
+                <a:latin typeface="+mn-lt"/>
+                <a:ea typeface="+mn-ea"/>
+                <a:cs typeface="+mn-cs"/>
+              </a:rPr>
+              <a:t>users</a:t>
+            </a:r>
+            <a:r>
+              <a:rPr lang="ko-KR" altLang="ko-KR" sz="1200" b="0" i="0" kern="1200" dirty="0">
+                <a:solidFill>
+                  <a:schemeClr val="tx1"/>
+                </a:solidFill>
+                <a:effectLst/>
+                <a:latin typeface="+mn-lt"/>
+                <a:ea typeface="+mn-ea"/>
+                <a:cs typeface="+mn-cs"/>
+              </a:rPr>
+              <a:t> </a:t>
+            </a:r>
+            <a:r>
+              <a:rPr lang="ko-KR" altLang="ko-KR" sz="1200" b="0" i="0" kern="1200" dirty="0" err="1">
+                <a:solidFill>
+                  <a:schemeClr val="tx1"/>
+                </a:solidFill>
+                <a:effectLst/>
+                <a:latin typeface="+mn-lt"/>
+                <a:ea typeface="+mn-ea"/>
+                <a:cs typeface="+mn-cs"/>
+              </a:rPr>
+              <a:t>could</a:t>
+            </a:r>
+            <a:r>
+              <a:rPr lang="ko-KR" altLang="ko-KR" sz="1200" b="0" i="0" kern="1200" dirty="0">
+                <a:solidFill>
+                  <a:schemeClr val="tx1"/>
+                </a:solidFill>
+                <a:effectLst/>
+                <a:latin typeface="+mn-lt"/>
+                <a:ea typeface="+mn-ea"/>
+                <a:cs typeface="+mn-cs"/>
+              </a:rPr>
+              <a:t> </a:t>
+            </a:r>
+            <a:r>
+              <a:rPr lang="ko-KR" altLang="ko-KR" sz="1200" b="0" i="0" kern="1200" dirty="0" err="1">
+                <a:solidFill>
+                  <a:schemeClr val="tx1"/>
+                </a:solidFill>
+                <a:effectLst/>
+                <a:latin typeface="+mn-lt"/>
+                <a:ea typeface="+mn-ea"/>
+                <a:cs typeface="+mn-cs"/>
+              </a:rPr>
+              <a:t>burn</a:t>
+            </a:r>
+            <a:r>
+              <a:rPr lang="ko-KR" altLang="ko-KR" sz="1200" b="0" i="0" kern="1200" dirty="0">
+                <a:solidFill>
+                  <a:schemeClr val="tx1"/>
+                </a:solidFill>
+                <a:effectLst/>
+                <a:latin typeface="+mn-lt"/>
+                <a:ea typeface="+mn-ea"/>
+                <a:cs typeface="+mn-cs"/>
+              </a:rPr>
+              <a:t> $1 of LUNA </a:t>
+            </a:r>
+            <a:r>
+              <a:rPr lang="ko-KR" altLang="ko-KR" sz="1200" b="0" i="0" kern="1200" dirty="0" err="1">
+                <a:solidFill>
+                  <a:schemeClr val="tx1"/>
+                </a:solidFill>
+                <a:effectLst/>
+                <a:latin typeface="+mn-lt"/>
+                <a:ea typeface="+mn-ea"/>
+                <a:cs typeface="+mn-cs"/>
+              </a:rPr>
+              <a:t>to</a:t>
+            </a:r>
+            <a:r>
+              <a:rPr lang="ko-KR" altLang="ko-KR" sz="1200" b="0" i="0" kern="1200" dirty="0">
+                <a:solidFill>
+                  <a:schemeClr val="tx1"/>
+                </a:solidFill>
+                <a:effectLst/>
+                <a:latin typeface="+mn-lt"/>
+                <a:ea typeface="+mn-ea"/>
+                <a:cs typeface="+mn-cs"/>
+              </a:rPr>
+              <a:t> </a:t>
+            </a:r>
+            <a:r>
+              <a:rPr lang="ko-KR" altLang="ko-KR" sz="1200" b="0" i="0" kern="1200" dirty="0" err="1">
+                <a:solidFill>
+                  <a:schemeClr val="tx1"/>
+                </a:solidFill>
+                <a:effectLst/>
+                <a:latin typeface="+mn-lt"/>
+                <a:ea typeface="+mn-ea"/>
+                <a:cs typeface="+mn-cs"/>
+              </a:rPr>
+              <a:t>mint</a:t>
+            </a:r>
+            <a:r>
+              <a:rPr lang="ko-KR" altLang="ko-KR" sz="1200" b="0" i="0" kern="1200" dirty="0">
+                <a:solidFill>
+                  <a:schemeClr val="tx1"/>
+                </a:solidFill>
+                <a:effectLst/>
+                <a:latin typeface="+mn-lt"/>
+                <a:ea typeface="+mn-ea"/>
+                <a:cs typeface="+mn-cs"/>
+              </a:rPr>
+              <a:t> 1 </a:t>
+            </a:r>
+            <a:r>
+              <a:rPr lang="ko-KR" altLang="ko-KR" sz="1200" b="0" i="0" kern="1200" dirty="0" err="1">
+                <a:solidFill>
+                  <a:schemeClr val="tx1"/>
+                </a:solidFill>
+                <a:effectLst/>
+                <a:latin typeface="+mn-lt"/>
+                <a:ea typeface="+mn-ea"/>
+                <a:cs typeface="+mn-cs"/>
+              </a:rPr>
+              <a:t>new</a:t>
+            </a:r>
+            <a:r>
+              <a:rPr lang="ko-KR" altLang="ko-KR" sz="1200" b="0" i="0" kern="1200" dirty="0">
+                <a:solidFill>
+                  <a:schemeClr val="tx1"/>
+                </a:solidFill>
+                <a:effectLst/>
+                <a:latin typeface="+mn-lt"/>
+                <a:ea typeface="+mn-ea"/>
+                <a:cs typeface="+mn-cs"/>
+              </a:rPr>
+              <a:t> UST (</a:t>
+            </a:r>
+            <a:r>
+              <a:rPr lang="ko-KR" altLang="ko-KR" sz="1200" b="0" i="0" kern="1200" dirty="0" err="1">
+                <a:solidFill>
+                  <a:schemeClr val="tx1"/>
+                </a:solidFill>
+                <a:effectLst/>
+                <a:latin typeface="+mn-lt"/>
+                <a:ea typeface="+mn-ea"/>
+                <a:cs typeface="+mn-cs"/>
+              </a:rPr>
+              <a:t>increasing</a:t>
+            </a:r>
+            <a:r>
+              <a:rPr lang="ko-KR" altLang="ko-KR" sz="1200" b="0" i="0" kern="1200" dirty="0">
+                <a:solidFill>
+                  <a:schemeClr val="tx1"/>
+                </a:solidFill>
+                <a:effectLst/>
+                <a:latin typeface="+mn-lt"/>
+                <a:ea typeface="+mn-ea"/>
+                <a:cs typeface="+mn-cs"/>
+              </a:rPr>
+              <a:t> </a:t>
+            </a:r>
+            <a:r>
+              <a:rPr lang="ko-KR" altLang="ko-KR" sz="1200" b="0" i="0" kern="1200" dirty="0" err="1">
+                <a:solidFill>
+                  <a:schemeClr val="tx1"/>
+                </a:solidFill>
+                <a:effectLst/>
+                <a:latin typeface="+mn-lt"/>
+                <a:ea typeface="+mn-ea"/>
+                <a:cs typeface="+mn-cs"/>
+              </a:rPr>
+              <a:t>supply</a:t>
+            </a:r>
+            <a:r>
+              <a:rPr lang="ko-KR" altLang="ko-KR" sz="1200" b="0" i="0" kern="1200" dirty="0">
+                <a:solidFill>
+                  <a:schemeClr val="tx1"/>
+                </a:solidFill>
+                <a:effectLst/>
+                <a:latin typeface="+mn-lt"/>
+                <a:ea typeface="+mn-ea"/>
+                <a:cs typeface="+mn-cs"/>
+              </a:rPr>
+              <a:t> and </a:t>
+            </a:r>
+            <a:r>
+              <a:rPr lang="ko-KR" altLang="ko-KR" sz="1200" b="0" i="0" kern="1200" dirty="0" err="1">
+                <a:solidFill>
+                  <a:schemeClr val="tx1"/>
+                </a:solidFill>
+                <a:effectLst/>
+                <a:latin typeface="+mn-lt"/>
+                <a:ea typeface="+mn-ea"/>
+                <a:cs typeface="+mn-cs"/>
+              </a:rPr>
+              <a:t>bringing</a:t>
+            </a:r>
+            <a:r>
+              <a:rPr lang="ko-KR" altLang="ko-KR" sz="1200" b="0" i="0" kern="1200" dirty="0">
+                <a:solidFill>
+                  <a:schemeClr val="tx1"/>
+                </a:solidFill>
+                <a:effectLst/>
+                <a:latin typeface="+mn-lt"/>
+                <a:ea typeface="+mn-ea"/>
+                <a:cs typeface="+mn-cs"/>
+              </a:rPr>
+              <a:t> </a:t>
+            </a:r>
+            <a:r>
+              <a:rPr lang="ko-KR" altLang="ko-KR" sz="1200" b="0" i="0" kern="1200" dirty="0" err="1">
+                <a:solidFill>
+                  <a:schemeClr val="tx1"/>
+                </a:solidFill>
+                <a:effectLst/>
+                <a:latin typeface="+mn-lt"/>
+                <a:ea typeface="+mn-ea"/>
+                <a:cs typeface="+mn-cs"/>
+              </a:rPr>
+              <a:t>the</a:t>
+            </a:r>
+            <a:r>
+              <a:rPr lang="ko-KR" altLang="ko-KR" sz="1200" b="0" i="0" kern="1200" dirty="0">
+                <a:solidFill>
+                  <a:schemeClr val="tx1"/>
+                </a:solidFill>
+                <a:effectLst/>
+                <a:latin typeface="+mn-lt"/>
+                <a:ea typeface="+mn-ea"/>
+                <a:cs typeface="+mn-cs"/>
+              </a:rPr>
+              <a:t> </a:t>
+            </a:r>
+            <a:r>
+              <a:rPr lang="ko-KR" altLang="ko-KR" sz="1200" b="0" i="0" kern="1200" dirty="0" err="1">
+                <a:solidFill>
+                  <a:schemeClr val="tx1"/>
+                </a:solidFill>
+                <a:effectLst/>
+                <a:latin typeface="+mn-lt"/>
+                <a:ea typeface="+mn-ea"/>
+                <a:cs typeface="+mn-cs"/>
+              </a:rPr>
+              <a:t>price</a:t>
+            </a:r>
+            <a:r>
+              <a:rPr lang="ko-KR" altLang="ko-KR" sz="1200" b="0" i="0" kern="1200" dirty="0">
+                <a:solidFill>
+                  <a:schemeClr val="tx1"/>
+                </a:solidFill>
+                <a:effectLst/>
+                <a:latin typeface="+mn-lt"/>
+                <a:ea typeface="+mn-ea"/>
+                <a:cs typeface="+mn-cs"/>
+              </a:rPr>
+              <a:t> </a:t>
+            </a:r>
+            <a:r>
+              <a:rPr lang="ko-KR" altLang="ko-KR" sz="1200" b="0" i="0" kern="1200" dirty="0" err="1">
+                <a:solidFill>
+                  <a:schemeClr val="tx1"/>
+                </a:solidFill>
+                <a:effectLst/>
+                <a:latin typeface="+mn-lt"/>
+                <a:ea typeface="+mn-ea"/>
+                <a:cs typeface="+mn-cs"/>
+              </a:rPr>
+              <a:t>back</a:t>
+            </a:r>
+            <a:r>
+              <a:rPr lang="ko-KR" altLang="ko-KR" sz="1200" b="0" i="0" kern="1200" dirty="0">
+                <a:solidFill>
+                  <a:schemeClr val="tx1"/>
+                </a:solidFill>
+                <a:effectLst/>
+                <a:latin typeface="+mn-lt"/>
+                <a:ea typeface="+mn-ea"/>
+                <a:cs typeface="+mn-cs"/>
+              </a:rPr>
+              <a:t> </a:t>
+            </a:r>
+            <a:r>
+              <a:rPr lang="ko-KR" altLang="ko-KR" sz="1200" b="0" i="0" kern="1200" dirty="0" err="1">
+                <a:solidFill>
+                  <a:schemeClr val="tx1"/>
+                </a:solidFill>
+                <a:effectLst/>
+                <a:latin typeface="+mn-lt"/>
+                <a:ea typeface="+mn-ea"/>
+                <a:cs typeface="+mn-cs"/>
+              </a:rPr>
+              <a:t>down</a:t>
+            </a:r>
+            <a:r>
+              <a:rPr lang="ko-KR" altLang="ko-KR" sz="1200" b="0" i="0" kern="1200" dirty="0">
+                <a:solidFill>
+                  <a:schemeClr val="tx1"/>
+                </a:solidFill>
+                <a:effectLst/>
+                <a:latin typeface="+mn-lt"/>
+                <a:ea typeface="+mn-ea"/>
+                <a:cs typeface="+mn-cs"/>
+              </a:rPr>
+              <a:t>). </a:t>
+            </a:r>
+            <a:r>
+              <a:rPr lang="ko-KR" altLang="ko-KR" sz="1200" b="0" i="0" kern="1200" dirty="0" err="1">
+                <a:solidFill>
+                  <a:schemeClr val="tx1"/>
+                </a:solidFill>
+                <a:effectLst/>
+                <a:latin typeface="+mn-lt"/>
+                <a:ea typeface="+mn-ea"/>
+                <a:cs typeface="+mn-cs"/>
+              </a:rPr>
+              <a:t>When</a:t>
+            </a:r>
+            <a:r>
+              <a:rPr lang="ko-KR" altLang="ko-KR" sz="1200" b="0" i="0" kern="1200" dirty="0">
+                <a:solidFill>
+                  <a:schemeClr val="tx1"/>
+                </a:solidFill>
+                <a:effectLst/>
+                <a:latin typeface="+mn-lt"/>
+                <a:ea typeface="+mn-ea"/>
+                <a:cs typeface="+mn-cs"/>
+              </a:rPr>
+              <a:t> UST </a:t>
+            </a:r>
+            <a:r>
+              <a:rPr lang="ko-KR" altLang="ko-KR" sz="1200" b="0" i="0" kern="1200" dirty="0" err="1">
+                <a:solidFill>
+                  <a:schemeClr val="tx1"/>
+                </a:solidFill>
+                <a:effectLst/>
+                <a:latin typeface="+mn-lt"/>
+                <a:ea typeface="+mn-ea"/>
+                <a:cs typeface="+mn-cs"/>
+              </a:rPr>
+              <a:t>dropped</a:t>
+            </a:r>
+            <a:r>
+              <a:rPr lang="ko-KR" altLang="ko-KR" sz="1200" b="0" i="0" kern="1200" dirty="0">
+                <a:solidFill>
+                  <a:schemeClr val="tx1"/>
+                </a:solidFill>
+                <a:effectLst/>
+                <a:latin typeface="+mn-lt"/>
+                <a:ea typeface="+mn-ea"/>
+                <a:cs typeface="+mn-cs"/>
+              </a:rPr>
+              <a:t> </a:t>
+            </a:r>
+            <a:r>
+              <a:rPr lang="ko-KR" altLang="ko-KR" sz="1200" b="0" i="0" kern="1200" dirty="0" err="1">
+                <a:solidFill>
+                  <a:schemeClr val="tx1"/>
+                </a:solidFill>
+                <a:effectLst/>
+                <a:latin typeface="+mn-lt"/>
+                <a:ea typeface="+mn-ea"/>
+                <a:cs typeface="+mn-cs"/>
+              </a:rPr>
+              <a:t>below</a:t>
+            </a:r>
+            <a:r>
+              <a:rPr lang="ko-KR" altLang="ko-KR" sz="1200" b="0" i="0" kern="1200" dirty="0">
+                <a:solidFill>
+                  <a:schemeClr val="tx1"/>
+                </a:solidFill>
+                <a:effectLst/>
+                <a:latin typeface="+mn-lt"/>
+                <a:ea typeface="+mn-ea"/>
+                <a:cs typeface="+mn-cs"/>
+              </a:rPr>
+              <a:t> $1, </a:t>
+            </a:r>
+            <a:r>
+              <a:rPr lang="ko-KR" altLang="ko-KR" sz="1200" b="0" i="0" kern="1200" dirty="0" err="1">
+                <a:solidFill>
+                  <a:schemeClr val="tx1"/>
+                </a:solidFill>
+                <a:effectLst/>
+                <a:latin typeface="+mn-lt"/>
+                <a:ea typeface="+mn-ea"/>
+                <a:cs typeface="+mn-cs"/>
+              </a:rPr>
+              <a:t>users</a:t>
+            </a:r>
+            <a:r>
+              <a:rPr lang="ko-KR" altLang="ko-KR" sz="1200" b="0" i="0" kern="1200" dirty="0">
+                <a:solidFill>
+                  <a:schemeClr val="tx1"/>
+                </a:solidFill>
+                <a:effectLst/>
+                <a:latin typeface="+mn-lt"/>
+                <a:ea typeface="+mn-ea"/>
+                <a:cs typeface="+mn-cs"/>
+              </a:rPr>
+              <a:t> </a:t>
+            </a:r>
+            <a:r>
+              <a:rPr lang="ko-KR" altLang="ko-KR" sz="1200" b="0" i="0" kern="1200" dirty="0" err="1">
+                <a:solidFill>
+                  <a:schemeClr val="tx1"/>
+                </a:solidFill>
+                <a:effectLst/>
+                <a:latin typeface="+mn-lt"/>
+                <a:ea typeface="+mn-ea"/>
+                <a:cs typeface="+mn-cs"/>
+              </a:rPr>
+              <a:t>could</a:t>
+            </a:r>
+            <a:r>
+              <a:rPr lang="ko-KR" altLang="ko-KR" sz="1200" b="0" i="0" kern="1200" dirty="0">
+                <a:solidFill>
+                  <a:schemeClr val="tx1"/>
+                </a:solidFill>
+                <a:effectLst/>
+                <a:latin typeface="+mn-lt"/>
+                <a:ea typeface="+mn-ea"/>
+                <a:cs typeface="+mn-cs"/>
+              </a:rPr>
+              <a:t> </a:t>
+            </a:r>
+            <a:r>
+              <a:rPr lang="ko-KR" altLang="ko-KR" sz="1200" b="0" i="0" kern="1200" dirty="0" err="1">
+                <a:solidFill>
+                  <a:schemeClr val="tx1"/>
+                </a:solidFill>
+                <a:effectLst/>
+                <a:latin typeface="+mn-lt"/>
+                <a:ea typeface="+mn-ea"/>
+                <a:cs typeface="+mn-cs"/>
+              </a:rPr>
+              <a:t>burn</a:t>
+            </a:r>
+            <a:r>
+              <a:rPr lang="ko-KR" altLang="ko-KR" sz="1200" b="0" i="0" kern="1200" dirty="0">
+                <a:solidFill>
+                  <a:schemeClr val="tx1"/>
+                </a:solidFill>
+                <a:effectLst/>
+                <a:latin typeface="+mn-lt"/>
+                <a:ea typeface="+mn-ea"/>
+                <a:cs typeface="+mn-cs"/>
+              </a:rPr>
+              <a:t> 1 UST </a:t>
+            </a:r>
+            <a:r>
+              <a:rPr lang="ko-KR" altLang="ko-KR" sz="1200" b="0" i="0" kern="1200" dirty="0" err="1">
+                <a:solidFill>
+                  <a:schemeClr val="tx1"/>
+                </a:solidFill>
+                <a:effectLst/>
+                <a:latin typeface="+mn-lt"/>
+                <a:ea typeface="+mn-ea"/>
+                <a:cs typeface="+mn-cs"/>
+              </a:rPr>
+              <a:t>to</a:t>
+            </a:r>
+            <a:r>
+              <a:rPr lang="ko-KR" altLang="ko-KR" sz="1200" b="0" i="0" kern="1200" dirty="0">
+                <a:solidFill>
+                  <a:schemeClr val="tx1"/>
+                </a:solidFill>
+                <a:effectLst/>
+                <a:latin typeface="+mn-lt"/>
+                <a:ea typeface="+mn-ea"/>
+                <a:cs typeface="+mn-cs"/>
+              </a:rPr>
+              <a:t> </a:t>
+            </a:r>
+            <a:r>
+              <a:rPr lang="ko-KR" altLang="ko-KR" sz="1200" b="0" i="0" kern="1200" dirty="0" err="1">
+                <a:solidFill>
+                  <a:schemeClr val="tx1"/>
+                </a:solidFill>
+                <a:effectLst/>
+                <a:latin typeface="+mn-lt"/>
+                <a:ea typeface="+mn-ea"/>
+                <a:cs typeface="+mn-cs"/>
+              </a:rPr>
+              <a:t>receive</a:t>
+            </a:r>
+            <a:r>
+              <a:rPr lang="ko-KR" altLang="ko-KR" sz="1200" b="0" i="0" kern="1200" dirty="0">
+                <a:solidFill>
+                  <a:schemeClr val="tx1"/>
+                </a:solidFill>
+                <a:effectLst/>
+                <a:latin typeface="+mn-lt"/>
+                <a:ea typeface="+mn-ea"/>
+                <a:cs typeface="+mn-cs"/>
+              </a:rPr>
+              <a:t> $1 </a:t>
+            </a:r>
+            <a:r>
+              <a:rPr lang="ko-KR" altLang="ko-KR" sz="1200" b="0" i="0" kern="1200" dirty="0" err="1">
+                <a:solidFill>
+                  <a:schemeClr val="tx1"/>
+                </a:solidFill>
+                <a:effectLst/>
+                <a:latin typeface="+mn-lt"/>
+                <a:ea typeface="+mn-ea"/>
+                <a:cs typeface="+mn-cs"/>
+              </a:rPr>
+              <a:t>worth</a:t>
+            </a:r>
+            <a:r>
+              <a:rPr lang="ko-KR" altLang="ko-KR" sz="1200" b="0" i="0" kern="1200" dirty="0">
+                <a:solidFill>
+                  <a:schemeClr val="tx1"/>
+                </a:solidFill>
+                <a:effectLst/>
+                <a:latin typeface="+mn-lt"/>
+                <a:ea typeface="+mn-ea"/>
+                <a:cs typeface="+mn-cs"/>
+              </a:rPr>
+              <a:t> of LUNA (</a:t>
+            </a:r>
+            <a:r>
+              <a:rPr lang="ko-KR" altLang="ko-KR" sz="1200" b="0" i="0" kern="1200" dirty="0" err="1">
+                <a:solidFill>
+                  <a:schemeClr val="tx1"/>
+                </a:solidFill>
+                <a:effectLst/>
+                <a:latin typeface="+mn-lt"/>
+                <a:ea typeface="+mn-ea"/>
+                <a:cs typeface="+mn-cs"/>
+              </a:rPr>
+              <a:t>reducing</a:t>
+            </a:r>
+            <a:r>
+              <a:rPr lang="ko-KR" altLang="ko-KR" sz="1200" b="0" i="0" kern="1200" dirty="0">
+                <a:solidFill>
+                  <a:schemeClr val="tx1"/>
+                </a:solidFill>
+                <a:effectLst/>
+                <a:latin typeface="+mn-lt"/>
+                <a:ea typeface="+mn-ea"/>
+                <a:cs typeface="+mn-cs"/>
+              </a:rPr>
+              <a:t> </a:t>
+            </a:r>
+            <a:r>
+              <a:rPr lang="ko-KR" altLang="ko-KR" sz="1200" b="0" i="0" kern="1200" dirty="0" err="1">
+                <a:solidFill>
+                  <a:schemeClr val="tx1"/>
+                </a:solidFill>
+                <a:effectLst/>
+                <a:latin typeface="+mn-lt"/>
+                <a:ea typeface="+mn-ea"/>
+                <a:cs typeface="+mn-cs"/>
+              </a:rPr>
+              <a:t>supply</a:t>
+            </a:r>
+            <a:r>
+              <a:rPr lang="ko-KR" altLang="ko-KR" sz="1200" b="0" i="0" kern="1200" dirty="0">
+                <a:solidFill>
+                  <a:schemeClr val="tx1"/>
+                </a:solidFill>
+                <a:effectLst/>
+                <a:latin typeface="+mn-lt"/>
+                <a:ea typeface="+mn-ea"/>
+                <a:cs typeface="+mn-cs"/>
+              </a:rPr>
+              <a:t> </a:t>
+            </a:r>
+            <a:r>
+              <a:rPr lang="ko-KR" altLang="ko-KR" sz="1200" b="0" i="0" kern="1200" dirty="0" err="1">
+                <a:solidFill>
+                  <a:schemeClr val="tx1"/>
+                </a:solidFill>
+                <a:effectLst/>
+                <a:latin typeface="+mn-lt"/>
+                <a:ea typeface="+mn-ea"/>
+                <a:cs typeface="+mn-cs"/>
+              </a:rPr>
+              <a:t>to</a:t>
+            </a:r>
+            <a:r>
+              <a:rPr lang="ko-KR" altLang="ko-KR" sz="1200" b="0" i="0" kern="1200" dirty="0">
+                <a:solidFill>
+                  <a:schemeClr val="tx1"/>
+                </a:solidFill>
+                <a:effectLst/>
+                <a:latin typeface="+mn-lt"/>
+                <a:ea typeface="+mn-ea"/>
+                <a:cs typeface="+mn-cs"/>
+              </a:rPr>
+              <a:t> </a:t>
+            </a:r>
+            <a:r>
+              <a:rPr lang="ko-KR" altLang="ko-KR" sz="1200" b="0" i="0" kern="1200" dirty="0" err="1">
+                <a:solidFill>
+                  <a:schemeClr val="tx1"/>
+                </a:solidFill>
+                <a:effectLst/>
+                <a:latin typeface="+mn-lt"/>
+                <a:ea typeface="+mn-ea"/>
+                <a:cs typeface="+mn-cs"/>
+              </a:rPr>
+              <a:t>drive</a:t>
+            </a:r>
+            <a:r>
+              <a:rPr lang="ko-KR" altLang="ko-KR" sz="1200" b="0" i="0" kern="1200" dirty="0">
+                <a:solidFill>
+                  <a:schemeClr val="tx1"/>
+                </a:solidFill>
+                <a:effectLst/>
+                <a:latin typeface="+mn-lt"/>
+                <a:ea typeface="+mn-ea"/>
+                <a:cs typeface="+mn-cs"/>
+              </a:rPr>
+              <a:t> </a:t>
+            </a:r>
+            <a:r>
+              <a:rPr lang="ko-KR" altLang="ko-KR" sz="1200" b="0" i="0" kern="1200" dirty="0" err="1">
+                <a:solidFill>
+                  <a:schemeClr val="tx1"/>
+                </a:solidFill>
+                <a:effectLst/>
+                <a:latin typeface="+mn-lt"/>
+                <a:ea typeface="+mn-ea"/>
+                <a:cs typeface="+mn-cs"/>
+              </a:rPr>
+              <a:t>the</a:t>
+            </a:r>
+            <a:r>
+              <a:rPr lang="ko-KR" altLang="ko-KR" sz="1200" b="0" i="0" kern="1200" dirty="0">
+                <a:solidFill>
+                  <a:schemeClr val="tx1"/>
+                </a:solidFill>
+                <a:effectLst/>
+                <a:latin typeface="+mn-lt"/>
+                <a:ea typeface="+mn-ea"/>
+                <a:cs typeface="+mn-cs"/>
+              </a:rPr>
+              <a:t> </a:t>
+            </a:r>
+            <a:r>
+              <a:rPr lang="ko-KR" altLang="ko-KR" sz="1200" b="0" i="0" kern="1200" dirty="0" err="1">
+                <a:solidFill>
+                  <a:schemeClr val="tx1"/>
+                </a:solidFill>
+                <a:effectLst/>
+                <a:latin typeface="+mn-lt"/>
+                <a:ea typeface="+mn-ea"/>
+                <a:cs typeface="+mn-cs"/>
+              </a:rPr>
+              <a:t>price</a:t>
+            </a:r>
+            <a:r>
+              <a:rPr lang="ko-KR" altLang="ko-KR" sz="1200" b="0" i="0" kern="1200" dirty="0">
+                <a:solidFill>
+                  <a:schemeClr val="tx1"/>
+                </a:solidFill>
+                <a:effectLst/>
+                <a:latin typeface="+mn-lt"/>
+                <a:ea typeface="+mn-ea"/>
+                <a:cs typeface="+mn-cs"/>
+              </a:rPr>
+              <a:t> </a:t>
+            </a:r>
+            <a:r>
+              <a:rPr lang="ko-KR" altLang="ko-KR" sz="1200" b="0" i="0" kern="1200" dirty="0" err="1">
+                <a:solidFill>
+                  <a:schemeClr val="tx1"/>
+                </a:solidFill>
+                <a:effectLst/>
+                <a:latin typeface="+mn-lt"/>
+                <a:ea typeface="+mn-ea"/>
+                <a:cs typeface="+mn-cs"/>
+              </a:rPr>
+              <a:t>back</a:t>
+            </a:r>
+            <a:r>
+              <a:rPr lang="ko-KR" altLang="ko-KR" sz="1200" b="0" i="0" kern="1200" dirty="0">
+                <a:solidFill>
+                  <a:schemeClr val="tx1"/>
+                </a:solidFill>
+                <a:effectLst/>
+                <a:latin typeface="+mn-lt"/>
+                <a:ea typeface="+mn-ea"/>
+                <a:cs typeface="+mn-cs"/>
+              </a:rPr>
+              <a:t> </a:t>
+            </a:r>
+            <a:r>
+              <a:rPr lang="ko-KR" altLang="ko-KR" sz="1200" b="0" i="0" kern="1200" dirty="0" err="1">
+                <a:solidFill>
+                  <a:schemeClr val="tx1"/>
+                </a:solidFill>
+                <a:effectLst/>
+                <a:latin typeface="+mn-lt"/>
+                <a:ea typeface="+mn-ea"/>
+                <a:cs typeface="+mn-cs"/>
+              </a:rPr>
+              <a:t>up</a:t>
+            </a:r>
+            <a:r>
+              <a:rPr lang="ko-KR" altLang="ko-KR" sz="1200" b="0" i="0" kern="1200" dirty="0">
+                <a:solidFill>
+                  <a:schemeClr val="tx1"/>
+                </a:solidFill>
+                <a:effectLst/>
+                <a:latin typeface="+mn-lt"/>
+                <a:ea typeface="+mn-ea"/>
+                <a:cs typeface="+mn-cs"/>
+              </a:rPr>
+              <a:t>).</a:t>
+            </a:r>
+          </a:p>
+          <a:p>
+            <a:endParaRPr dirty="0"/>
           </a:p>
         </p:txBody>
       </p:sp>
@@ -851,7 +4250,47 @@
           <a:lstStyle/>
           <a:p>
             <a:r>
-              <a:t>Three days after the LUNA collapse, markets turned their attention directly to Tether itself. On May 12th, USDT briefly fell to 95 cents — a 5 percent depeg — on major exchanges. This was not contagion from an unrelated token. This was a direct bank-run-style attack on Tether's credibility. Investors were essentially asking: does Tether actually have the reserves it claims? In a single day, over 7 billion dollars of USDT was redeemed — the largest single-day redemption in Tether's history. Tether managed to maintain the peg and return to one dollar within days, which actually validated their reserves. But during those days of uncertainty, the forced selling mechanism activated again: same low buffer of around 5 to 8 percent, same constraint, same outcome. The CAR came in at plus 8.85 percentage points — essentially identical to the LUNA event three days earlier. We want to highlight that this near-identical magnitude is not a coincidence. It tells us that what drove the market impact was not the specific trigger — LUNA contagion versus direct Tether run — but rather the underlying constraint: Tether did not have enough cash to absorb redemptions without selling T-bills. The buffer level determined the outcome, not the nature of the shock.</a:t>
+              <a:rPr dirty="0"/>
+              <a:t>Three days after the LUNA collapse, markets turned their attention directly to Tether itself. On May 12th, USDT briefly fell to 95 cents — a 5 percent </a:t>
+            </a:r>
+            <a:r>
+              <a:rPr dirty="0" err="1"/>
+              <a:t>depeg</a:t>
+            </a:r>
+            <a:r>
+              <a:rPr dirty="0"/>
+              <a:t> — on major exchanges. This was not contagion from an unrelated token. This was a direct bank-run-style attack on Tether's credibility. Investors were essentially asking: does Tether actually have the reserves it claims? In a single day, over 7 billion dollars of USDT was redeemed — the largest single-day redemption in Tether's history. </a:t>
+            </a:r>
+            <a:endParaRPr lang="en-US" dirty="0"/>
+          </a:p>
+          <a:p>
+            <a:r>
+              <a:rPr lang="en-US" dirty="0"/>
+              <a:t>		</a:t>
+            </a:r>
+          </a:p>
+          <a:p>
+            <a:r>
+              <a:rPr b="1" dirty="0"/>
+              <a:t>Tether managed to maintain the peg and return to one dollar within days, which actually validated their reserves. But during those days of uncertainty, the forced selling mechanism activated again: same low buffer of around 5 to 8 percent, same constraint, same outcome. </a:t>
+            </a:r>
+            <a:r>
+              <a:rPr dirty="0"/>
+              <a:t>The CAR came in at plus 8.85 percentage points — essentially identical to the LUNA event three days earlier. We want to highlight that this </a:t>
+            </a:r>
+            <a:r>
+              <a:rPr b="1" dirty="0"/>
+              <a:t>near-identical magnitude is not a coincidence. It tells us that what drove the market impact was not the specific trigger — LUNA contagion versus direct Tether run — but rather the underlying constraint: </a:t>
+            </a:r>
+            <a:endParaRPr lang="en-US" b="1" dirty="0"/>
+          </a:p>
+          <a:p>
+            <a:endParaRPr lang="en-US" dirty="0"/>
+          </a:p>
+          <a:p>
+            <a:r>
+              <a:rPr dirty="0"/>
+              <a:t>Tether did not have enough cash to absorb redemptions without selling T-bills. The buffer level determined the outcome, not the nature of the shock.</a:t>
             </a:r>
           </a:p>
         </p:txBody>
@@ -922,7 +4361,25 @@
           <a:p>
             <a:r>
               <a:rPr dirty="0"/>
-              <a:t>Our third event is the Silicon Valley Bank failure in March 2023, and this one needs careful explanation because the graph looks counterintuitive. SVB collapsed on March 10th — the second largest U.S. bank failure in history. Circle, which issues USDC, disclosed that 3.3 billion dollars of its reserves were held at SVB and temporarily inaccessible. USDC </a:t>
+              <a:t>Our third event is the Silicon Valley Bank failure in March 2023, and this one needs careful explanation because the graph </a:t>
+            </a:r>
+            <a:r>
+              <a:rPr b="1" dirty="0"/>
+              <a:t>looks counterintuitive</a:t>
+            </a:r>
+            <a:r>
+              <a:rPr dirty="0"/>
+              <a:t>. SVB collapsed on March 10th — the second largest U.S. bank failure in history. Circle, which issues USDC, disclosed that 3.3 billion dollars of its reserves were held at SVB and temporarily inaccessible. </a:t>
+            </a:r>
+            <a:endParaRPr lang="en-US" dirty="0"/>
+          </a:p>
+          <a:p>
+            <a:endParaRPr lang="en-US" dirty="0"/>
+          </a:p>
+          <a:p>
+            <a:r>
+              <a:rPr dirty="0"/>
+              <a:t>USDC </a:t>
             </a:r>
             <a:r>
               <a:rPr dirty="0" err="1"/>
@@ -938,7 +4395,37 @@
             </a:r>
             <a:r>
               <a:rPr dirty="0"/>
-              <a:t> than Tether in 2022. So why does the CAR go to minus 18 instead of spiking upward like the 2022 events? The answer is the buffer condition. By early 2023, Circle had rebuilt its cash reserves to around 18 to 22 percent — well above our 13 percent threshold. When redemptions came in, Circle paid from cash. It did not need to sell a single Treasury bill. So there was no forced selling pressure on the T-bill market from Circle's side. But here is what actually happened: SVB's collapse triggered a massive market-wide flight to safety. Investors across the entire financial system rushed to buy U.S. Treasury bills — the safest short-term asset available. That buying pressure pushed T-bill yields sharply below OIS, compressing the spread far below what our normal model would predict. That is why the CAR is minus 18 and not flat. The high buffer prevented the forced-selling story. But it could not prevent the flight-to-safety buying story. What we observe in the SVB event is the pure flight-to-safety effect, completely uncontaminated by any issuer-side selling pressure.</a:t>
+              <a:t> than Tether in 2022. So why does the CAR go to minus 18 instead of spiking upward like the 2022 events? </a:t>
+            </a:r>
+            <a:r>
+              <a:rPr b="1" dirty="0"/>
+              <a:t>The answer is the buffer condition. By early 2023, Circle had rebuilt its cash reserves to around 18 to 22 percent — well above our 13 percent threshold. When redemptions came in, Circle paid from cash. It did not need to sell a single Treasury bill. So there was no forced selling pressure on the T-bill market from Circle's side. </a:t>
+            </a:r>
+            <a:endParaRPr lang="en-US" b="1" dirty="0"/>
+          </a:p>
+          <a:p>
+            <a:endParaRPr lang="en-US" dirty="0"/>
+          </a:p>
+          <a:p>
+            <a:r>
+              <a:rPr dirty="0"/>
+              <a:t>But here is what actually happened: SVB's collapse triggered a massive market-wide flight to safety. </a:t>
+            </a:r>
+            <a:r>
+              <a:rPr b="1" dirty="0"/>
+              <a:t>Investors across the entire financial system rushed to buy U.S. Treasury bills — the safest short-term asset available. </a:t>
+            </a:r>
+            <a:r>
+              <a:rPr dirty="0"/>
+              <a:t>That buying pressure pushed T-bill yields sharply below OIS, compressing the spread far below what our normal model would predict. That is why the CAR is minus 18 and not flat. </a:t>
+            </a:r>
+            <a:r>
+              <a:rPr b="1" dirty="0"/>
+              <a:t>The high buffer prevented the forced-selling story. But it could not prevent the flight-to-safety buying story. </a:t>
+            </a:r>
+            <a:r>
+              <a:rPr dirty="0"/>
+              <a:t>What we observe in the SVB event is the pure flight-to-safety effect, completely uncontaminated by any issuer-side selling pressure.</a:t>
             </a:r>
           </a:p>
         </p:txBody>
@@ -1009,7 +4496,35 @@
           <a:p>
             <a:r>
               <a:rPr dirty="0"/>
-              <a:t>This slide brings all three events together and shows why we call this a natural experiment. Look at what is the same across all three events: stablecoin issuers, U.S. Treasury bills, a sudden confidence shock, and mass redemptions. The only systematic difference is the liquid buffer level. In 2022, the buffer was low — around 5 to 8 percent — and both events produced a CAR of about plus 9 percentage points. In 2023, the buffer was high — around 18 to 22 percent — and the event produced a CAR of minus 18 percentage points. That is a swing of 27 percentage points driven entirely by the buffer condition. The Welch t-statistic comparing the two groups is 15.22 with a p-value below 0.001, meaning this difference is not remotely explained by chance. This is the core empirical finding of our paper: the liquid cash buffer is what determines whether a stablecoin issuer amplifies or absorbs a shock to the Treasury market. And next week, the placebo test will confirm that these large CARs only appear on real crisis days — not on ordinary days with the same buffer conditions.</a:t>
+              <a:t>This slide brings all three events together and shows why we call this a natural experiment. Look at what is the same across all three events: stablecoin issuers, U.S. Treasury bills, a sudden confidence shock, and mass redemptions. </a:t>
+            </a:r>
+            <a:r>
+              <a:rPr b="1" dirty="0"/>
+              <a:t>The only systematic difference is the liquid buffer level.</a:t>
+            </a:r>
+            <a:r>
+              <a:rPr dirty="0"/>
+              <a:t> In 2022, the buffer was low — around 5 to 8 percent — and both events produced a CAR of about plus 9 percentage points. </a:t>
+            </a:r>
+            <a:endParaRPr lang="en-US" dirty="0"/>
+          </a:p>
+          <a:p>
+            <a:endParaRPr lang="en-US" dirty="0"/>
+          </a:p>
+          <a:p>
+            <a:r>
+              <a:rPr dirty="0"/>
+              <a:t>In 2023, the buffer was high — around 18 to 22 percent — and the event produced a CAR of minus 18 percentage points. That is a swing of 27 percentage points driven entirely by the buffer condition. The Welch t-statistic comparing the two groups is 15.22 with a p-value below 0.001, meaning this difference is not remotely explained by chance. </a:t>
+            </a:r>
+            <a:endParaRPr lang="en-US" dirty="0"/>
+          </a:p>
+          <a:p>
+            <a:endParaRPr lang="en-US" dirty="0"/>
+          </a:p>
+          <a:p>
+            <a:r>
+              <a:rPr dirty="0"/>
+              <a:t>This is the core empirical finding of our paper: the liquid cash buffer is what determines whether a stablecoin issuer amplifies or absorbs a shock to the Treasury market. And next week, the placebo test will confirm that these large CARs only appear on real crisis days — not on ordinary days with the same buffer conditions.</a:t>
             </a:r>
           </a:p>
         </p:txBody>
@@ -1213,7 +4728,7 @@
           <a:p>
             <a:fld id="{5BCAD085-E8A6-8845-BD4E-CB4CCA059FC4}" type="datetimeFigureOut">
               <a:rPr lang="en-US" smtClean="0"/>
-              <a:t>5/22/26</a:t>
+              <a:t>5/23/26</a:t>
             </a:fld>
             <a:endParaRPr lang="en-US"/>
           </a:p>
@@ -1381,7 +4896,7 @@
           <a:p>
             <a:fld id="{5BCAD085-E8A6-8845-BD4E-CB4CCA059FC4}" type="datetimeFigureOut">
               <a:rPr lang="en-US" smtClean="0"/>
-              <a:t>5/22/26</a:t>
+              <a:t>5/23/26</a:t>
             </a:fld>
             <a:endParaRPr lang="en-US"/>
           </a:p>
@@ -1559,7 +5074,7 @@
           <a:p>
             <a:fld id="{5BCAD085-E8A6-8845-BD4E-CB4CCA059FC4}" type="datetimeFigureOut">
               <a:rPr lang="en-US" smtClean="0"/>
-              <a:t>5/22/26</a:t>
+              <a:t>5/23/26</a:t>
             </a:fld>
             <a:endParaRPr lang="en-US"/>
           </a:p>
@@ -1727,7 +5242,7 @@
           <a:p>
             <a:fld id="{5BCAD085-E8A6-8845-BD4E-CB4CCA059FC4}" type="datetimeFigureOut">
               <a:rPr lang="en-US" smtClean="0"/>
-              <a:t>5/22/26</a:t>
+              <a:t>5/23/26</a:t>
             </a:fld>
             <a:endParaRPr lang="en-US"/>
           </a:p>
@@ -1972,7 +5487,7 @@
           <a:p>
             <a:fld id="{5BCAD085-E8A6-8845-BD4E-CB4CCA059FC4}" type="datetimeFigureOut">
               <a:rPr lang="en-US" smtClean="0"/>
-              <a:t>5/22/26</a:t>
+              <a:t>5/23/26</a:t>
             </a:fld>
             <a:endParaRPr lang="en-US"/>
           </a:p>
@@ -2257,7 +5772,7 @@
           <a:p>
             <a:fld id="{5BCAD085-E8A6-8845-BD4E-CB4CCA059FC4}" type="datetimeFigureOut">
               <a:rPr lang="en-US" smtClean="0"/>
-              <a:t>5/22/26</a:t>
+              <a:t>5/23/26</a:t>
             </a:fld>
             <a:endParaRPr lang="en-US"/>
           </a:p>
@@ -2676,7 +6191,7 @@
           <a:p>
             <a:fld id="{5BCAD085-E8A6-8845-BD4E-CB4CCA059FC4}" type="datetimeFigureOut">
               <a:rPr lang="en-US" smtClean="0"/>
-              <a:t>5/22/26</a:t>
+              <a:t>5/23/26</a:t>
             </a:fld>
             <a:endParaRPr lang="en-US"/>
           </a:p>
@@ -2793,7 +6308,7 @@
           <a:p>
             <a:fld id="{5BCAD085-E8A6-8845-BD4E-CB4CCA059FC4}" type="datetimeFigureOut">
               <a:rPr lang="en-US" smtClean="0"/>
-              <a:t>5/22/26</a:t>
+              <a:t>5/23/26</a:t>
             </a:fld>
             <a:endParaRPr lang="en-US"/>
           </a:p>
@@ -2888,7 +6403,7 @@
           <a:p>
             <a:fld id="{5BCAD085-E8A6-8845-BD4E-CB4CCA059FC4}" type="datetimeFigureOut">
               <a:rPr lang="en-US" smtClean="0"/>
-              <a:t>5/22/26</a:t>
+              <a:t>5/23/26</a:t>
             </a:fld>
             <a:endParaRPr lang="en-US"/>
           </a:p>
@@ -3163,7 +6678,7 @@
           <a:p>
             <a:fld id="{5BCAD085-E8A6-8845-BD4E-CB4CCA059FC4}" type="datetimeFigureOut">
               <a:rPr lang="en-US" smtClean="0"/>
-              <a:t>5/22/26</a:t>
+              <a:t>5/23/26</a:t>
             </a:fld>
             <a:endParaRPr lang="en-US"/>
           </a:p>
@@ -3415,7 +6930,7 @@
           <a:p>
             <a:fld id="{5BCAD085-E8A6-8845-BD4E-CB4CCA059FC4}" type="datetimeFigureOut">
               <a:rPr lang="en-US" smtClean="0"/>
-              <a:t>5/22/26</a:t>
+              <a:t>5/23/26</a:t>
             </a:fld>
             <a:endParaRPr lang="en-US"/>
           </a:p>
@@ -3626,7 +7141,7 @@
           <a:p>
             <a:fld id="{5BCAD085-E8A6-8845-BD4E-CB4CCA059FC4}" type="datetimeFigureOut">
               <a:rPr lang="en-US" smtClean="0"/>
-              <a:t>5/22/26</a:t>
+              <a:t>5/23/26</a:t>
             </a:fld>
             <a:endParaRPr lang="en-US"/>
           </a:p>
@@ -4209,6 +7724,1828 @@
 <file path=ppt/slides/slide10.xml><?xml version="1.0" encoding="utf-8"?>
 <p:sld xmlns:a="http://schemas.openxmlformats.org/drawingml/2006/main" xmlns:r="http://schemas.openxmlformats.org/officeDocument/2006/relationships" xmlns:p="http://schemas.openxmlformats.org/presentationml/2006/main">
   <p:cSld>
+    <p:spTree>
+      <p:nvGrpSpPr>
+        <p:cNvPr id="1" name="">
+          <a:extLst>
+            <a:ext uri="{FF2B5EF4-FFF2-40B4-BE49-F238E27FC236}">
+              <a16:creationId xmlns:a16="http://schemas.microsoft.com/office/drawing/2014/main" id="{2F800E61-2C05-C316-6DDE-943461C36EB6}"/>
+            </a:ext>
+          </a:extLst>
+        </p:cNvPr>
+        <p:cNvGrpSpPr/>
+        <p:nvPr/>
+      </p:nvGrpSpPr>
+      <p:grpSpPr>
+        <a:xfrm>
+          <a:off x="0" y="0"/>
+          <a:ext cx="0" cy="0"/>
+          <a:chOff x="0" y="0"/>
+          <a:chExt cx="0" cy="0"/>
+        </a:xfrm>
+      </p:grpSpPr>
+      <p:sp>
+        <p:nvSpPr>
+          <p:cNvPr id="2" name="Rectangle 1">
+            <a:extLst>
+              <a:ext uri="{FF2B5EF4-FFF2-40B4-BE49-F238E27FC236}">
+                <a16:creationId xmlns:a16="http://schemas.microsoft.com/office/drawing/2014/main" id="{2D5F70E2-F928-F2E5-CC17-B7AD1698CA93}"/>
+              </a:ext>
+            </a:extLst>
+          </p:cNvPr>
+          <p:cNvSpPr/>
+          <p:nvPr/>
+        </p:nvSpPr>
+        <p:spPr>
+          <a:xfrm>
+            <a:off x="0" y="0"/>
+            <a:ext cx="12188952" cy="6858000"/>
+          </a:xfrm>
+          <a:prstGeom prst="rect">
+            <a:avLst/>
+          </a:prstGeom>
+          <a:solidFill>
+            <a:srgbClr val="FFFFFF"/>
+          </a:solidFill>
+          <a:ln>
+            <a:noFill/>
+          </a:ln>
+        </p:spPr>
+        <p:style>
+          <a:lnRef idx="1">
+            <a:schemeClr val="accent1"/>
+          </a:lnRef>
+          <a:fillRef idx="3">
+            <a:schemeClr val="accent1"/>
+          </a:fillRef>
+          <a:effectRef idx="2">
+            <a:schemeClr val="accent1"/>
+          </a:effectRef>
+          <a:fontRef idx="minor">
+            <a:schemeClr val="lt1"/>
+          </a:fontRef>
+        </p:style>
+        <p:txBody>
+          <a:bodyPr rtlCol="0" anchor="ctr"/>
+          <a:lstStyle/>
+          <a:p>
+            <a:pPr algn="ctr"/>
+            <a:endParaRPr/>
+          </a:p>
+        </p:txBody>
+      </p:sp>
+      <p:sp>
+        <p:nvSpPr>
+          <p:cNvPr id="3" name="Rectangle 2">
+            <a:extLst>
+              <a:ext uri="{FF2B5EF4-FFF2-40B4-BE49-F238E27FC236}">
+                <a16:creationId xmlns:a16="http://schemas.microsoft.com/office/drawing/2014/main" id="{928FEC6A-0D93-893C-E851-68B37DC9961D}"/>
+              </a:ext>
+            </a:extLst>
+          </p:cNvPr>
+          <p:cNvSpPr/>
+          <p:nvPr/>
+        </p:nvSpPr>
+        <p:spPr>
+          <a:xfrm>
+            <a:off x="0" y="0"/>
+            <a:ext cx="12188952" cy="868680"/>
+          </a:xfrm>
+          <a:prstGeom prst="rect">
+            <a:avLst/>
+          </a:prstGeom>
+          <a:solidFill>
+            <a:srgbClr val="1B3A72"/>
+          </a:solidFill>
+          <a:ln>
+            <a:noFill/>
+          </a:ln>
+        </p:spPr>
+        <p:style>
+          <a:lnRef idx="1">
+            <a:schemeClr val="accent1"/>
+          </a:lnRef>
+          <a:fillRef idx="3">
+            <a:schemeClr val="accent1"/>
+          </a:fillRef>
+          <a:effectRef idx="2">
+            <a:schemeClr val="accent1"/>
+          </a:effectRef>
+          <a:fontRef idx="minor">
+            <a:schemeClr val="lt1"/>
+          </a:fontRef>
+        </p:style>
+        <p:txBody>
+          <a:bodyPr rtlCol="0" anchor="ctr"/>
+          <a:lstStyle/>
+          <a:p>
+            <a:pPr algn="ctr"/>
+            <a:endParaRPr/>
+          </a:p>
+        </p:txBody>
+      </p:sp>
+      <p:sp>
+        <p:nvSpPr>
+          <p:cNvPr id="4" name="TextBox 3">
+            <a:extLst>
+              <a:ext uri="{FF2B5EF4-FFF2-40B4-BE49-F238E27FC236}">
+                <a16:creationId xmlns:a16="http://schemas.microsoft.com/office/drawing/2014/main" id="{CB672A76-4F1E-9534-0F36-8C2A00D5367C}"/>
+              </a:ext>
+            </a:extLst>
+          </p:cNvPr>
+          <p:cNvSpPr txBox="1"/>
+          <p:nvPr/>
+        </p:nvSpPr>
+        <p:spPr>
+          <a:xfrm>
+            <a:off x="274320" y="91440"/>
+            <a:ext cx="7006374" cy="492443"/>
+          </a:xfrm>
+          <a:prstGeom prst="rect">
+            <a:avLst/>
+          </a:prstGeom>
+          <a:noFill/>
+        </p:spPr>
+        <p:txBody>
+          <a:bodyPr wrap="square">
+            <a:spAutoFit/>
+          </a:bodyPr>
+          <a:lstStyle/>
+          <a:p>
+            <a:pPr algn="l"/>
+            <a:r>
+              <a:rPr sz="2600" b="0" i="0" dirty="0">
+                <a:solidFill>
+                  <a:srgbClr val="FFFFFF"/>
+                </a:solidFill>
+                <a:latin typeface="Calibri"/>
+              </a:rPr>
+              <a:t>Roadmap</a:t>
+            </a:r>
+          </a:p>
+        </p:txBody>
+      </p:sp>
+      <p:sp>
+        <p:nvSpPr>
+          <p:cNvPr id="5" name="TextBox 4">
+            <a:extLst>
+              <a:ext uri="{FF2B5EF4-FFF2-40B4-BE49-F238E27FC236}">
+                <a16:creationId xmlns:a16="http://schemas.microsoft.com/office/drawing/2014/main" id="{2AB3DF11-446E-7552-A614-ECCAEA719B92}"/>
+              </a:ext>
+            </a:extLst>
+          </p:cNvPr>
+          <p:cNvSpPr txBox="1"/>
+          <p:nvPr/>
+        </p:nvSpPr>
+        <p:spPr>
+          <a:xfrm>
+            <a:off x="11686032" y="6473952"/>
+            <a:ext cx="411480" cy="320040"/>
+          </a:xfrm>
+          <a:prstGeom prst="rect">
+            <a:avLst/>
+          </a:prstGeom>
+          <a:noFill/>
+        </p:spPr>
+        <p:txBody>
+          <a:bodyPr wrap="square">
+            <a:spAutoFit/>
+          </a:bodyPr>
+          <a:lstStyle/>
+          <a:p>
+            <a:pPr algn="r"/>
+            <a:r>
+              <a:rPr sz="1300" b="0" i="0">
+                <a:solidFill>
+                  <a:srgbClr val="555566"/>
+                </a:solidFill>
+                <a:latin typeface="Calibri"/>
+              </a:rPr>
+              <a:t>2</a:t>
+            </a:r>
+          </a:p>
+        </p:txBody>
+      </p:sp>
+      <p:sp>
+        <p:nvSpPr>
+          <p:cNvPr id="6" name="Rectangle 5">
+            <a:extLst>
+              <a:ext uri="{FF2B5EF4-FFF2-40B4-BE49-F238E27FC236}">
+                <a16:creationId xmlns:a16="http://schemas.microsoft.com/office/drawing/2014/main" id="{662CBD09-30D2-DF23-819C-B683716407B4}"/>
+              </a:ext>
+            </a:extLst>
+          </p:cNvPr>
+          <p:cNvSpPr/>
+          <p:nvPr/>
+        </p:nvSpPr>
+        <p:spPr>
+          <a:xfrm>
+            <a:off x="320040" y="960120"/>
+            <a:ext cx="5577840" cy="384048"/>
+          </a:xfrm>
+          <a:prstGeom prst="rect">
+            <a:avLst/>
+          </a:prstGeom>
+          <a:solidFill>
+            <a:srgbClr val="1B3A72"/>
+          </a:solidFill>
+          <a:ln>
+            <a:noFill/>
+          </a:ln>
+        </p:spPr>
+        <p:style>
+          <a:lnRef idx="1">
+            <a:schemeClr val="accent1"/>
+          </a:lnRef>
+          <a:fillRef idx="3">
+            <a:schemeClr val="accent1"/>
+          </a:fillRef>
+          <a:effectRef idx="2">
+            <a:schemeClr val="accent1"/>
+          </a:effectRef>
+          <a:fontRef idx="minor">
+            <a:schemeClr val="lt1"/>
+          </a:fontRef>
+        </p:style>
+        <p:txBody>
+          <a:bodyPr rtlCol="0" anchor="ctr"/>
+          <a:lstStyle/>
+          <a:p>
+            <a:pPr algn="ctr"/>
+            <a:endParaRPr/>
+          </a:p>
+        </p:txBody>
+      </p:sp>
+      <p:sp>
+        <p:nvSpPr>
+          <p:cNvPr id="7" name="TextBox 6">
+            <a:extLst>
+              <a:ext uri="{FF2B5EF4-FFF2-40B4-BE49-F238E27FC236}">
+                <a16:creationId xmlns:a16="http://schemas.microsoft.com/office/drawing/2014/main" id="{8B09BF85-C091-0100-3782-A22E4BEB1047}"/>
+              </a:ext>
+            </a:extLst>
+          </p:cNvPr>
+          <p:cNvSpPr txBox="1"/>
+          <p:nvPr/>
+        </p:nvSpPr>
+        <p:spPr>
+          <a:xfrm>
+            <a:off x="457200" y="987552"/>
+            <a:ext cx="5394960" cy="310896"/>
+          </a:xfrm>
+          <a:prstGeom prst="rect">
+            <a:avLst/>
+          </a:prstGeom>
+          <a:noFill/>
+        </p:spPr>
+        <p:txBody>
+          <a:bodyPr wrap="square">
+            <a:spAutoFit/>
+          </a:bodyPr>
+          <a:lstStyle/>
+          <a:p>
+            <a:pPr algn="l"/>
+            <a:r>
+              <a:rPr sz="1500" b="1" i="0">
+                <a:solidFill>
+                  <a:srgbClr val="FFFFFF"/>
+                </a:solidFill>
+                <a:latin typeface="Calibri"/>
+              </a:rPr>
+              <a:t>What we have done</a:t>
+            </a:r>
+          </a:p>
+        </p:txBody>
+      </p:sp>
+      <p:sp>
+        <p:nvSpPr>
+          <p:cNvPr id="8" name="Rectangle 7">
+            <a:extLst>
+              <a:ext uri="{FF2B5EF4-FFF2-40B4-BE49-F238E27FC236}">
+                <a16:creationId xmlns:a16="http://schemas.microsoft.com/office/drawing/2014/main" id="{98C8FFD7-10AA-AF17-3A00-EB786FE38F8F}"/>
+              </a:ext>
+            </a:extLst>
+          </p:cNvPr>
+          <p:cNvSpPr/>
+          <p:nvPr/>
+        </p:nvSpPr>
+        <p:spPr>
+          <a:xfrm>
+            <a:off x="320040" y="1417320"/>
+            <a:ext cx="1097280" cy="694944"/>
+          </a:xfrm>
+          <a:prstGeom prst="rect">
+            <a:avLst/>
+          </a:prstGeom>
+          <a:solidFill>
+            <a:srgbClr val="1B3A72"/>
+          </a:solidFill>
+          <a:ln>
+            <a:noFill/>
+          </a:ln>
+        </p:spPr>
+        <p:style>
+          <a:lnRef idx="1">
+            <a:schemeClr val="accent1"/>
+          </a:lnRef>
+          <a:fillRef idx="3">
+            <a:schemeClr val="accent1"/>
+          </a:fillRef>
+          <a:effectRef idx="2">
+            <a:schemeClr val="accent1"/>
+          </a:effectRef>
+          <a:fontRef idx="minor">
+            <a:schemeClr val="lt1"/>
+          </a:fontRef>
+        </p:style>
+        <p:txBody>
+          <a:bodyPr rtlCol="0" anchor="ctr"/>
+          <a:lstStyle/>
+          <a:p>
+            <a:pPr algn="ctr"/>
+            <a:endParaRPr/>
+          </a:p>
+        </p:txBody>
+      </p:sp>
+      <p:sp>
+        <p:nvSpPr>
+          <p:cNvPr id="9" name="TextBox 8">
+            <a:extLst>
+              <a:ext uri="{FF2B5EF4-FFF2-40B4-BE49-F238E27FC236}">
+                <a16:creationId xmlns:a16="http://schemas.microsoft.com/office/drawing/2014/main" id="{B21A32C3-D282-8768-9388-0B05B0841F53}"/>
+              </a:ext>
+            </a:extLst>
+          </p:cNvPr>
+          <p:cNvSpPr txBox="1"/>
+          <p:nvPr/>
+        </p:nvSpPr>
+        <p:spPr>
+          <a:xfrm>
+            <a:off x="347472" y="1600200"/>
+            <a:ext cx="1042415" cy="347472"/>
+          </a:xfrm>
+          <a:prstGeom prst="rect">
+            <a:avLst/>
+          </a:prstGeom>
+          <a:noFill/>
+        </p:spPr>
+        <p:txBody>
+          <a:bodyPr wrap="square">
+            <a:spAutoFit/>
+          </a:bodyPr>
+          <a:lstStyle/>
+          <a:p>
+            <a:pPr algn="ctr"/>
+            <a:r>
+              <a:rPr sz="1100" b="1" i="0">
+                <a:solidFill>
+                  <a:srgbClr val="FFFFFF"/>
+                </a:solidFill>
+                <a:latin typeface="Calibri"/>
+              </a:rPr>
+              <a:t>Theory</a:t>
+            </a:r>
+          </a:p>
+        </p:txBody>
+      </p:sp>
+      <p:sp>
+        <p:nvSpPr>
+          <p:cNvPr id="10" name="Rectangle 9">
+            <a:extLst>
+              <a:ext uri="{FF2B5EF4-FFF2-40B4-BE49-F238E27FC236}">
+                <a16:creationId xmlns:a16="http://schemas.microsoft.com/office/drawing/2014/main" id="{BEFC650D-690C-7990-7BD8-CFA285A25E58}"/>
+              </a:ext>
+            </a:extLst>
+          </p:cNvPr>
+          <p:cNvSpPr/>
+          <p:nvPr/>
+        </p:nvSpPr>
+        <p:spPr>
+          <a:xfrm>
+            <a:off x="1417320" y="1417320"/>
+            <a:ext cx="4480560" cy="694944"/>
+          </a:xfrm>
+          <a:prstGeom prst="rect">
+            <a:avLst/>
+          </a:prstGeom>
+          <a:solidFill>
+            <a:srgbClr val="F0F4F8"/>
+          </a:solidFill>
+          <a:ln>
+            <a:noFill/>
+          </a:ln>
+        </p:spPr>
+        <p:style>
+          <a:lnRef idx="1">
+            <a:schemeClr val="accent1"/>
+          </a:lnRef>
+          <a:fillRef idx="3">
+            <a:schemeClr val="accent1"/>
+          </a:fillRef>
+          <a:effectRef idx="2">
+            <a:schemeClr val="accent1"/>
+          </a:effectRef>
+          <a:fontRef idx="minor">
+            <a:schemeClr val="lt1"/>
+          </a:fontRef>
+        </p:style>
+        <p:txBody>
+          <a:bodyPr rtlCol="0" anchor="ctr"/>
+          <a:lstStyle/>
+          <a:p>
+            <a:pPr algn="ctr"/>
+            <a:endParaRPr/>
+          </a:p>
+        </p:txBody>
+      </p:sp>
+      <p:sp>
+        <p:nvSpPr>
+          <p:cNvPr id="11" name="TextBox 10">
+            <a:extLst>
+              <a:ext uri="{FF2B5EF4-FFF2-40B4-BE49-F238E27FC236}">
+                <a16:creationId xmlns:a16="http://schemas.microsoft.com/office/drawing/2014/main" id="{F2C5529B-51C5-EB52-5500-866002466EC5}"/>
+              </a:ext>
+            </a:extLst>
+          </p:cNvPr>
+          <p:cNvSpPr txBox="1"/>
+          <p:nvPr/>
+        </p:nvSpPr>
+        <p:spPr>
+          <a:xfrm>
+            <a:off x="1536192" y="1581912"/>
+            <a:ext cx="4297680" cy="457200"/>
+          </a:xfrm>
+          <a:prstGeom prst="rect">
+            <a:avLst/>
+          </a:prstGeom>
+          <a:noFill/>
+        </p:spPr>
+        <p:txBody>
+          <a:bodyPr wrap="square">
+            <a:spAutoFit/>
+          </a:bodyPr>
+          <a:lstStyle/>
+          <a:p>
+            <a:pPr algn="l"/>
+            <a:r>
+              <a:rPr sz="1200" b="0" i="0" dirty="0">
+                <a:solidFill>
+                  <a:srgbClr val="1A1A2E"/>
+                </a:solidFill>
+                <a:latin typeface="Calibri"/>
+              </a:rPr>
+              <a:t>✓  Extended Maggiori (2017) with stablecoin supply S, treasury exposure </a:t>
+            </a:r>
+            <a:r>
+              <a:rPr sz="1200" b="0" i="0" dirty="0" err="1">
+                <a:solidFill>
+                  <a:srgbClr val="1A1A2E"/>
+                </a:solidFill>
+                <a:latin typeface="Calibri"/>
+              </a:rPr>
+              <a:t>θ</a:t>
+            </a:r>
+            <a:r>
+              <a:rPr sz="1200" b="0" i="0" dirty="0">
+                <a:solidFill>
+                  <a:srgbClr val="1A1A2E"/>
+                </a:solidFill>
+                <a:latin typeface="Calibri"/>
+              </a:rPr>
+              <a:t>, and liquid buffer L</a:t>
+            </a:r>
+          </a:p>
+        </p:txBody>
+      </p:sp>
+      <p:sp>
+        <p:nvSpPr>
+          <p:cNvPr id="12" name="Rectangle 11">
+            <a:extLst>
+              <a:ext uri="{FF2B5EF4-FFF2-40B4-BE49-F238E27FC236}">
+                <a16:creationId xmlns:a16="http://schemas.microsoft.com/office/drawing/2014/main" id="{9C415062-1BAB-EA9C-144B-DCF7195D9406}"/>
+              </a:ext>
+            </a:extLst>
+          </p:cNvPr>
+          <p:cNvSpPr/>
+          <p:nvPr/>
+        </p:nvSpPr>
+        <p:spPr>
+          <a:xfrm>
+            <a:off x="320040" y="2176272"/>
+            <a:ext cx="1097280" cy="694944"/>
+          </a:xfrm>
+          <a:prstGeom prst="rect">
+            <a:avLst/>
+          </a:prstGeom>
+          <a:solidFill>
+            <a:srgbClr val="1B3A72"/>
+          </a:solidFill>
+          <a:ln>
+            <a:noFill/>
+          </a:ln>
+        </p:spPr>
+        <p:style>
+          <a:lnRef idx="1">
+            <a:schemeClr val="accent1"/>
+          </a:lnRef>
+          <a:fillRef idx="3">
+            <a:schemeClr val="accent1"/>
+          </a:fillRef>
+          <a:effectRef idx="2">
+            <a:schemeClr val="accent1"/>
+          </a:effectRef>
+          <a:fontRef idx="minor">
+            <a:schemeClr val="lt1"/>
+          </a:fontRef>
+        </p:style>
+        <p:txBody>
+          <a:bodyPr rtlCol="0" anchor="ctr"/>
+          <a:lstStyle/>
+          <a:p>
+            <a:pPr algn="ctr"/>
+            <a:endParaRPr/>
+          </a:p>
+        </p:txBody>
+      </p:sp>
+      <p:sp>
+        <p:nvSpPr>
+          <p:cNvPr id="13" name="TextBox 12">
+            <a:extLst>
+              <a:ext uri="{FF2B5EF4-FFF2-40B4-BE49-F238E27FC236}">
+                <a16:creationId xmlns:a16="http://schemas.microsoft.com/office/drawing/2014/main" id="{D8369B51-CF26-C225-BCA9-CA55313FDEA6}"/>
+              </a:ext>
+            </a:extLst>
+          </p:cNvPr>
+          <p:cNvSpPr txBox="1"/>
+          <p:nvPr/>
+        </p:nvSpPr>
+        <p:spPr>
+          <a:xfrm>
+            <a:off x="347472" y="2359152"/>
+            <a:ext cx="1042415" cy="347472"/>
+          </a:xfrm>
+          <a:prstGeom prst="rect">
+            <a:avLst/>
+          </a:prstGeom>
+          <a:noFill/>
+        </p:spPr>
+        <p:txBody>
+          <a:bodyPr wrap="square">
+            <a:spAutoFit/>
+          </a:bodyPr>
+          <a:lstStyle/>
+          <a:p>
+            <a:pPr algn="ctr"/>
+            <a:r>
+              <a:rPr sz="1100" b="1" i="0">
+                <a:solidFill>
+                  <a:srgbClr val="FFFFFF"/>
+                </a:solidFill>
+                <a:latin typeface="Calibri"/>
+              </a:rPr>
+              <a:t>Regression</a:t>
+            </a:r>
+          </a:p>
+        </p:txBody>
+      </p:sp>
+      <p:sp>
+        <p:nvSpPr>
+          <p:cNvPr id="14" name="Rectangle 13">
+            <a:extLst>
+              <a:ext uri="{FF2B5EF4-FFF2-40B4-BE49-F238E27FC236}">
+                <a16:creationId xmlns:a16="http://schemas.microsoft.com/office/drawing/2014/main" id="{78D2A042-3976-B71E-9C75-60672E36CBD6}"/>
+              </a:ext>
+            </a:extLst>
+          </p:cNvPr>
+          <p:cNvSpPr/>
+          <p:nvPr/>
+        </p:nvSpPr>
+        <p:spPr>
+          <a:xfrm>
+            <a:off x="1417320" y="2176272"/>
+            <a:ext cx="4480560" cy="694944"/>
+          </a:xfrm>
+          <a:prstGeom prst="rect">
+            <a:avLst/>
+          </a:prstGeom>
+          <a:solidFill>
+            <a:srgbClr val="FFFFFF"/>
+          </a:solidFill>
+          <a:ln>
+            <a:noFill/>
+          </a:ln>
+        </p:spPr>
+        <p:style>
+          <a:lnRef idx="1">
+            <a:schemeClr val="accent1"/>
+          </a:lnRef>
+          <a:fillRef idx="3">
+            <a:schemeClr val="accent1"/>
+          </a:fillRef>
+          <a:effectRef idx="2">
+            <a:schemeClr val="accent1"/>
+          </a:effectRef>
+          <a:fontRef idx="minor">
+            <a:schemeClr val="lt1"/>
+          </a:fontRef>
+        </p:style>
+        <p:txBody>
+          <a:bodyPr rtlCol="0" anchor="ctr"/>
+          <a:lstStyle/>
+          <a:p>
+            <a:pPr algn="ctr"/>
+            <a:endParaRPr/>
+          </a:p>
+        </p:txBody>
+      </p:sp>
+      <p:sp>
+        <p:nvSpPr>
+          <p:cNvPr id="15" name="TextBox 14">
+            <a:extLst>
+              <a:ext uri="{FF2B5EF4-FFF2-40B4-BE49-F238E27FC236}">
+                <a16:creationId xmlns:a16="http://schemas.microsoft.com/office/drawing/2014/main" id="{392D2179-8C5E-524C-F702-53A0BF204D1B}"/>
+              </a:ext>
+            </a:extLst>
+          </p:cNvPr>
+          <p:cNvSpPr txBox="1"/>
+          <p:nvPr/>
+        </p:nvSpPr>
+        <p:spPr>
+          <a:xfrm>
+            <a:off x="1536192" y="2340864"/>
+            <a:ext cx="4297680" cy="457200"/>
+          </a:xfrm>
+          <a:prstGeom prst="rect">
+            <a:avLst/>
+          </a:prstGeom>
+          <a:noFill/>
+        </p:spPr>
+        <p:txBody>
+          <a:bodyPr wrap="square">
+            <a:spAutoFit/>
+          </a:bodyPr>
+          <a:lstStyle/>
+          <a:p>
+            <a:pPr algn="l"/>
+            <a:r>
+              <a:rPr sz="1200" b="0" i="0" dirty="0">
+                <a:solidFill>
+                  <a:srgbClr val="1A1A2E"/>
+                </a:solidFill>
+                <a:latin typeface="Calibri"/>
+              </a:rPr>
+              <a:t>✓  β₁ = −6.02** — stablecoin growth compresses OIS–Treasury spreads (privilege amplification)</a:t>
+            </a:r>
+          </a:p>
+        </p:txBody>
+      </p:sp>
+      <p:sp>
+        <p:nvSpPr>
+          <p:cNvPr id="16" name="Rectangle 15">
+            <a:extLst>
+              <a:ext uri="{FF2B5EF4-FFF2-40B4-BE49-F238E27FC236}">
+                <a16:creationId xmlns:a16="http://schemas.microsoft.com/office/drawing/2014/main" id="{EFE68269-F4D2-F9DA-1D5F-F985D92827AF}"/>
+              </a:ext>
+            </a:extLst>
+          </p:cNvPr>
+          <p:cNvSpPr/>
+          <p:nvPr/>
+        </p:nvSpPr>
+        <p:spPr>
+          <a:xfrm>
+            <a:off x="320040" y="2935224"/>
+            <a:ext cx="1097280" cy="694944"/>
+          </a:xfrm>
+          <a:prstGeom prst="rect">
+            <a:avLst/>
+          </a:prstGeom>
+          <a:solidFill>
+            <a:srgbClr val="1B3A72"/>
+          </a:solidFill>
+          <a:ln>
+            <a:noFill/>
+          </a:ln>
+        </p:spPr>
+        <p:style>
+          <a:lnRef idx="1">
+            <a:schemeClr val="accent1"/>
+          </a:lnRef>
+          <a:fillRef idx="3">
+            <a:schemeClr val="accent1"/>
+          </a:fillRef>
+          <a:effectRef idx="2">
+            <a:schemeClr val="accent1"/>
+          </a:effectRef>
+          <a:fontRef idx="minor">
+            <a:schemeClr val="lt1"/>
+          </a:fontRef>
+        </p:style>
+        <p:txBody>
+          <a:bodyPr rtlCol="0" anchor="ctr"/>
+          <a:lstStyle/>
+          <a:p>
+            <a:pPr algn="ctr"/>
+            <a:endParaRPr/>
+          </a:p>
+        </p:txBody>
+      </p:sp>
+      <p:sp>
+        <p:nvSpPr>
+          <p:cNvPr id="17" name="TextBox 16">
+            <a:extLst>
+              <a:ext uri="{FF2B5EF4-FFF2-40B4-BE49-F238E27FC236}">
+                <a16:creationId xmlns:a16="http://schemas.microsoft.com/office/drawing/2014/main" id="{354FF1FB-8A88-017D-F38F-ECDEC1B99F10}"/>
+              </a:ext>
+            </a:extLst>
+          </p:cNvPr>
+          <p:cNvSpPr txBox="1"/>
+          <p:nvPr/>
+        </p:nvSpPr>
+        <p:spPr>
+          <a:xfrm>
+            <a:off x="347472" y="3118104"/>
+            <a:ext cx="1042415" cy="347472"/>
+          </a:xfrm>
+          <a:prstGeom prst="rect">
+            <a:avLst/>
+          </a:prstGeom>
+          <a:noFill/>
+        </p:spPr>
+        <p:txBody>
+          <a:bodyPr wrap="square">
+            <a:spAutoFit/>
+          </a:bodyPr>
+          <a:lstStyle/>
+          <a:p>
+            <a:pPr algn="ctr"/>
+            <a:r>
+              <a:rPr sz="1100" b="1" i="0">
+                <a:solidFill>
+                  <a:srgbClr val="FFFFFF"/>
+                </a:solidFill>
+                <a:latin typeface="Calibri"/>
+              </a:rPr>
+              <a:t>Threshold</a:t>
+            </a:r>
+          </a:p>
+        </p:txBody>
+      </p:sp>
+      <p:sp>
+        <p:nvSpPr>
+          <p:cNvPr id="18" name="Rectangle 17">
+            <a:extLst>
+              <a:ext uri="{FF2B5EF4-FFF2-40B4-BE49-F238E27FC236}">
+                <a16:creationId xmlns:a16="http://schemas.microsoft.com/office/drawing/2014/main" id="{AA69227D-5090-85A9-A2AF-105CFAAC65A9}"/>
+              </a:ext>
+            </a:extLst>
+          </p:cNvPr>
+          <p:cNvSpPr/>
+          <p:nvPr/>
+        </p:nvSpPr>
+        <p:spPr>
+          <a:xfrm>
+            <a:off x="1417320" y="2935224"/>
+            <a:ext cx="4480560" cy="694944"/>
+          </a:xfrm>
+          <a:prstGeom prst="rect">
+            <a:avLst/>
+          </a:prstGeom>
+          <a:solidFill>
+            <a:srgbClr val="F0F4F8"/>
+          </a:solidFill>
+          <a:ln>
+            <a:noFill/>
+          </a:ln>
+        </p:spPr>
+        <p:style>
+          <a:lnRef idx="1">
+            <a:schemeClr val="accent1"/>
+          </a:lnRef>
+          <a:fillRef idx="3">
+            <a:schemeClr val="accent1"/>
+          </a:fillRef>
+          <a:effectRef idx="2">
+            <a:schemeClr val="accent1"/>
+          </a:effectRef>
+          <a:fontRef idx="minor">
+            <a:schemeClr val="lt1"/>
+          </a:fontRef>
+        </p:style>
+        <p:txBody>
+          <a:bodyPr rtlCol="0" anchor="ctr"/>
+          <a:lstStyle/>
+          <a:p>
+            <a:pPr algn="ctr"/>
+            <a:endParaRPr/>
+          </a:p>
+        </p:txBody>
+      </p:sp>
+      <p:sp>
+        <p:nvSpPr>
+          <p:cNvPr id="19" name="TextBox 18">
+            <a:extLst>
+              <a:ext uri="{FF2B5EF4-FFF2-40B4-BE49-F238E27FC236}">
+                <a16:creationId xmlns:a16="http://schemas.microsoft.com/office/drawing/2014/main" id="{C78A5375-C650-B151-4BBB-4516D52683E0}"/>
+              </a:ext>
+            </a:extLst>
+          </p:cNvPr>
+          <p:cNvSpPr txBox="1"/>
+          <p:nvPr/>
+        </p:nvSpPr>
+        <p:spPr>
+          <a:xfrm>
+            <a:off x="1536192" y="3099816"/>
+            <a:ext cx="4297680" cy="457200"/>
+          </a:xfrm>
+          <a:prstGeom prst="rect">
+            <a:avLst/>
+          </a:prstGeom>
+          <a:noFill/>
+        </p:spPr>
+        <p:txBody>
+          <a:bodyPr wrap="square">
+            <a:spAutoFit/>
+          </a:bodyPr>
+          <a:lstStyle/>
+          <a:p>
+            <a:pPr algn="l"/>
+            <a:r>
+              <a:rPr sz="1200" b="0" i="0" dirty="0">
+                <a:solidFill>
+                  <a:srgbClr val="1A1A2E"/>
+                </a:solidFill>
+                <a:latin typeface="Calibri"/>
+              </a:rPr>
+              <a:t>✓  Hansen (2000) threshold at q* = 13% liquid cash — separates safe from fragile regime</a:t>
+            </a:r>
+          </a:p>
+        </p:txBody>
+      </p:sp>
+      <p:sp>
+        <p:nvSpPr>
+          <p:cNvPr id="20" name="Rectangle 19">
+            <a:extLst>
+              <a:ext uri="{FF2B5EF4-FFF2-40B4-BE49-F238E27FC236}">
+                <a16:creationId xmlns:a16="http://schemas.microsoft.com/office/drawing/2014/main" id="{44C3D27D-D3B2-A50F-07F1-51DB83236984}"/>
+              </a:ext>
+            </a:extLst>
+          </p:cNvPr>
+          <p:cNvSpPr/>
+          <p:nvPr/>
+        </p:nvSpPr>
+        <p:spPr>
+          <a:xfrm>
+            <a:off x="320040" y="3694176"/>
+            <a:ext cx="1097280" cy="694944"/>
+          </a:xfrm>
+          <a:prstGeom prst="rect">
+            <a:avLst/>
+          </a:prstGeom>
+          <a:solidFill>
+            <a:srgbClr val="1B3A72"/>
+          </a:solidFill>
+          <a:ln>
+            <a:noFill/>
+          </a:ln>
+        </p:spPr>
+        <p:style>
+          <a:lnRef idx="1">
+            <a:schemeClr val="accent1"/>
+          </a:lnRef>
+          <a:fillRef idx="3">
+            <a:schemeClr val="accent1"/>
+          </a:fillRef>
+          <a:effectRef idx="2">
+            <a:schemeClr val="accent1"/>
+          </a:effectRef>
+          <a:fontRef idx="minor">
+            <a:schemeClr val="lt1"/>
+          </a:fontRef>
+        </p:style>
+        <p:txBody>
+          <a:bodyPr rtlCol="0" anchor="ctr"/>
+          <a:lstStyle/>
+          <a:p>
+            <a:pPr algn="ctr"/>
+            <a:endParaRPr/>
+          </a:p>
+        </p:txBody>
+      </p:sp>
+      <p:sp>
+        <p:nvSpPr>
+          <p:cNvPr id="21" name="TextBox 20">
+            <a:extLst>
+              <a:ext uri="{FF2B5EF4-FFF2-40B4-BE49-F238E27FC236}">
+                <a16:creationId xmlns:a16="http://schemas.microsoft.com/office/drawing/2014/main" id="{5670E915-483D-DD5C-8C48-CBAC950D18DC}"/>
+              </a:ext>
+            </a:extLst>
+          </p:cNvPr>
+          <p:cNvSpPr txBox="1"/>
+          <p:nvPr/>
+        </p:nvSpPr>
+        <p:spPr>
+          <a:xfrm>
+            <a:off x="347472" y="3877056"/>
+            <a:ext cx="1042415" cy="347472"/>
+          </a:xfrm>
+          <a:prstGeom prst="rect">
+            <a:avLst/>
+          </a:prstGeom>
+          <a:noFill/>
+        </p:spPr>
+        <p:txBody>
+          <a:bodyPr wrap="square">
+            <a:spAutoFit/>
+          </a:bodyPr>
+          <a:lstStyle/>
+          <a:p>
+            <a:pPr algn="ctr"/>
+            <a:r>
+              <a:rPr sz="1100" b="1" i="0">
+                <a:solidFill>
+                  <a:srgbClr val="FFFFFF"/>
+                </a:solidFill>
+                <a:latin typeface="Calibri"/>
+              </a:rPr>
+              <a:t>Event Study</a:t>
+            </a:r>
+          </a:p>
+        </p:txBody>
+      </p:sp>
+      <p:sp>
+        <p:nvSpPr>
+          <p:cNvPr id="22" name="Rectangle 21">
+            <a:extLst>
+              <a:ext uri="{FF2B5EF4-FFF2-40B4-BE49-F238E27FC236}">
+                <a16:creationId xmlns:a16="http://schemas.microsoft.com/office/drawing/2014/main" id="{740BA7AD-7EC4-138A-7954-93BC9E039B7C}"/>
+              </a:ext>
+            </a:extLst>
+          </p:cNvPr>
+          <p:cNvSpPr/>
+          <p:nvPr/>
+        </p:nvSpPr>
+        <p:spPr>
+          <a:xfrm>
+            <a:off x="1417320" y="3694176"/>
+            <a:ext cx="4480560" cy="694944"/>
+          </a:xfrm>
+          <a:prstGeom prst="rect">
+            <a:avLst/>
+          </a:prstGeom>
+          <a:solidFill>
+            <a:srgbClr val="FFFFFF"/>
+          </a:solidFill>
+          <a:ln>
+            <a:noFill/>
+          </a:ln>
+        </p:spPr>
+        <p:style>
+          <a:lnRef idx="1">
+            <a:schemeClr val="accent1"/>
+          </a:lnRef>
+          <a:fillRef idx="3">
+            <a:schemeClr val="accent1"/>
+          </a:fillRef>
+          <a:effectRef idx="2">
+            <a:schemeClr val="accent1"/>
+          </a:effectRef>
+          <a:fontRef idx="minor">
+            <a:schemeClr val="lt1"/>
+          </a:fontRef>
+        </p:style>
+        <p:txBody>
+          <a:bodyPr rtlCol="0" anchor="ctr"/>
+          <a:lstStyle/>
+          <a:p>
+            <a:pPr algn="ctr"/>
+            <a:endParaRPr/>
+          </a:p>
+        </p:txBody>
+      </p:sp>
+      <p:sp>
+        <p:nvSpPr>
+          <p:cNvPr id="23" name="TextBox 22">
+            <a:extLst>
+              <a:ext uri="{FF2B5EF4-FFF2-40B4-BE49-F238E27FC236}">
+                <a16:creationId xmlns:a16="http://schemas.microsoft.com/office/drawing/2014/main" id="{4D533996-16BA-7DA3-3B94-0F7583C74B11}"/>
+              </a:ext>
+            </a:extLst>
+          </p:cNvPr>
+          <p:cNvSpPr txBox="1"/>
+          <p:nvPr/>
+        </p:nvSpPr>
+        <p:spPr>
+          <a:xfrm>
+            <a:off x="1536192" y="3858768"/>
+            <a:ext cx="4297680" cy="457200"/>
+          </a:xfrm>
+          <a:prstGeom prst="rect">
+            <a:avLst/>
+          </a:prstGeom>
+          <a:noFill/>
+        </p:spPr>
+        <p:txBody>
+          <a:bodyPr wrap="square">
+            <a:spAutoFit/>
+          </a:bodyPr>
+          <a:lstStyle/>
+          <a:p>
+            <a:pPr algn="l"/>
+            <a:r>
+              <a:rPr sz="1200" b="0" i="0" dirty="0">
+                <a:solidFill>
+                  <a:srgbClr val="1A1A2E"/>
+                </a:solidFill>
+                <a:latin typeface="Calibri"/>
+              </a:rPr>
+              <a:t>✓  3 stress episodes (LUNA, USDT </a:t>
+            </a:r>
+            <a:r>
+              <a:rPr sz="1200" b="0" i="0" dirty="0" err="1">
+                <a:solidFill>
+                  <a:srgbClr val="1A1A2E"/>
+                </a:solidFill>
+                <a:latin typeface="Calibri"/>
+              </a:rPr>
+              <a:t>depeg</a:t>
+            </a:r>
+            <a:r>
+              <a:rPr sz="1200" b="0" i="0" dirty="0">
+                <a:solidFill>
+                  <a:srgbClr val="1A1A2E"/>
+                </a:solidFill>
+                <a:latin typeface="Calibri"/>
+              </a:rPr>
+              <a:t>, SVB) — 27 pp CAR swing between low/high buffer regimes</a:t>
+            </a:r>
+          </a:p>
+        </p:txBody>
+      </p:sp>
+      <p:sp>
+        <p:nvSpPr>
+          <p:cNvPr id="24" name="Rectangle 23">
+            <a:extLst>
+              <a:ext uri="{FF2B5EF4-FFF2-40B4-BE49-F238E27FC236}">
+                <a16:creationId xmlns:a16="http://schemas.microsoft.com/office/drawing/2014/main" id="{A4666C9F-087A-E802-3B11-21C8A78148FC}"/>
+              </a:ext>
+            </a:extLst>
+          </p:cNvPr>
+          <p:cNvSpPr/>
+          <p:nvPr/>
+        </p:nvSpPr>
+        <p:spPr>
+          <a:xfrm>
+            <a:off x="320040" y="4453128"/>
+            <a:ext cx="1097280" cy="694944"/>
+          </a:xfrm>
+          <a:prstGeom prst="rect">
+            <a:avLst/>
+          </a:prstGeom>
+          <a:solidFill>
+            <a:srgbClr val="1B3A72"/>
+          </a:solidFill>
+          <a:ln>
+            <a:noFill/>
+          </a:ln>
+        </p:spPr>
+        <p:style>
+          <a:lnRef idx="1">
+            <a:schemeClr val="accent1"/>
+          </a:lnRef>
+          <a:fillRef idx="3">
+            <a:schemeClr val="accent1"/>
+          </a:fillRef>
+          <a:effectRef idx="2">
+            <a:schemeClr val="accent1"/>
+          </a:effectRef>
+          <a:fontRef idx="minor">
+            <a:schemeClr val="lt1"/>
+          </a:fontRef>
+        </p:style>
+        <p:txBody>
+          <a:bodyPr rtlCol="0" anchor="ctr"/>
+          <a:lstStyle/>
+          <a:p>
+            <a:pPr algn="ctr"/>
+            <a:endParaRPr/>
+          </a:p>
+        </p:txBody>
+      </p:sp>
+      <p:sp>
+        <p:nvSpPr>
+          <p:cNvPr id="25" name="TextBox 24">
+            <a:extLst>
+              <a:ext uri="{FF2B5EF4-FFF2-40B4-BE49-F238E27FC236}">
+                <a16:creationId xmlns:a16="http://schemas.microsoft.com/office/drawing/2014/main" id="{7EF79A4B-CD27-335D-2EB3-6D137CA95E0E}"/>
+              </a:ext>
+            </a:extLst>
+          </p:cNvPr>
+          <p:cNvSpPr txBox="1"/>
+          <p:nvPr/>
+        </p:nvSpPr>
+        <p:spPr>
+          <a:xfrm>
+            <a:off x="347472" y="4636008"/>
+            <a:ext cx="1042415" cy="347472"/>
+          </a:xfrm>
+          <a:prstGeom prst="rect">
+            <a:avLst/>
+          </a:prstGeom>
+          <a:noFill/>
+        </p:spPr>
+        <p:txBody>
+          <a:bodyPr wrap="square">
+            <a:spAutoFit/>
+          </a:bodyPr>
+          <a:lstStyle/>
+          <a:p>
+            <a:pPr algn="ctr"/>
+            <a:r>
+              <a:rPr sz="1100" b="1" i="0">
+                <a:solidFill>
+                  <a:srgbClr val="FFFFFF"/>
+                </a:solidFill>
+                <a:latin typeface="Calibri"/>
+              </a:rPr>
+              <a:t>Robustness</a:t>
+            </a:r>
+          </a:p>
+        </p:txBody>
+      </p:sp>
+      <p:sp>
+        <p:nvSpPr>
+          <p:cNvPr id="26" name="Rectangle 25">
+            <a:extLst>
+              <a:ext uri="{FF2B5EF4-FFF2-40B4-BE49-F238E27FC236}">
+                <a16:creationId xmlns:a16="http://schemas.microsoft.com/office/drawing/2014/main" id="{8A5964E2-ABA4-1904-5F3E-DF8A82BFB851}"/>
+              </a:ext>
+            </a:extLst>
+          </p:cNvPr>
+          <p:cNvSpPr/>
+          <p:nvPr/>
+        </p:nvSpPr>
+        <p:spPr>
+          <a:xfrm>
+            <a:off x="1417320" y="4453128"/>
+            <a:ext cx="4480560" cy="694944"/>
+          </a:xfrm>
+          <a:prstGeom prst="rect">
+            <a:avLst/>
+          </a:prstGeom>
+          <a:solidFill>
+            <a:srgbClr val="F0F4F8"/>
+          </a:solidFill>
+          <a:ln>
+            <a:noFill/>
+          </a:ln>
+        </p:spPr>
+        <p:style>
+          <a:lnRef idx="1">
+            <a:schemeClr val="accent1"/>
+          </a:lnRef>
+          <a:fillRef idx="3">
+            <a:schemeClr val="accent1"/>
+          </a:fillRef>
+          <a:effectRef idx="2">
+            <a:schemeClr val="accent1"/>
+          </a:effectRef>
+          <a:fontRef idx="minor">
+            <a:schemeClr val="lt1"/>
+          </a:fontRef>
+        </p:style>
+        <p:txBody>
+          <a:bodyPr rtlCol="0" anchor="ctr"/>
+          <a:lstStyle/>
+          <a:p>
+            <a:pPr algn="ctr"/>
+            <a:endParaRPr/>
+          </a:p>
+        </p:txBody>
+      </p:sp>
+      <p:sp>
+        <p:nvSpPr>
+          <p:cNvPr id="27" name="TextBox 26">
+            <a:extLst>
+              <a:ext uri="{FF2B5EF4-FFF2-40B4-BE49-F238E27FC236}">
+                <a16:creationId xmlns:a16="http://schemas.microsoft.com/office/drawing/2014/main" id="{69646754-F439-D72D-77BB-0BCDDFECAD8D}"/>
+              </a:ext>
+            </a:extLst>
+          </p:cNvPr>
+          <p:cNvSpPr txBox="1"/>
+          <p:nvPr/>
+        </p:nvSpPr>
+        <p:spPr>
+          <a:xfrm>
+            <a:off x="1536192" y="4617720"/>
+            <a:ext cx="4297680" cy="457200"/>
+          </a:xfrm>
+          <a:prstGeom prst="rect">
+            <a:avLst/>
+          </a:prstGeom>
+          <a:noFill/>
+        </p:spPr>
+        <p:txBody>
+          <a:bodyPr wrap="square">
+            <a:spAutoFit/>
+          </a:bodyPr>
+          <a:lstStyle/>
+          <a:p>
+            <a:pPr algn="l"/>
+            <a:r>
+              <a:rPr sz="1200" b="0" i="0">
+                <a:solidFill>
+                  <a:srgbClr val="1A1A2E"/>
+                </a:solidFill>
+                <a:latin typeface="Calibri"/>
+              </a:rPr>
+              <a:t>✓  Mean-centering (VIF), Engle-Granger cointegration, first-differenced spec, post-2023 subsample</a:t>
+            </a:r>
+          </a:p>
+        </p:txBody>
+      </p:sp>
+      <p:sp>
+        <p:nvSpPr>
+          <p:cNvPr id="28" name="Rectangle 27">
+            <a:extLst>
+              <a:ext uri="{FF2B5EF4-FFF2-40B4-BE49-F238E27FC236}">
+                <a16:creationId xmlns:a16="http://schemas.microsoft.com/office/drawing/2014/main" id="{9F098DFC-4428-929B-F698-5E263E9EB740}"/>
+              </a:ext>
+            </a:extLst>
+          </p:cNvPr>
+          <p:cNvSpPr/>
+          <p:nvPr/>
+        </p:nvSpPr>
+        <p:spPr>
+          <a:xfrm>
+            <a:off x="320040" y="5212080"/>
+            <a:ext cx="1097280" cy="694944"/>
+          </a:xfrm>
+          <a:prstGeom prst="rect">
+            <a:avLst/>
+          </a:prstGeom>
+          <a:solidFill>
+            <a:srgbClr val="1B3A72"/>
+          </a:solidFill>
+          <a:ln>
+            <a:noFill/>
+          </a:ln>
+        </p:spPr>
+        <p:style>
+          <a:lnRef idx="1">
+            <a:schemeClr val="accent1"/>
+          </a:lnRef>
+          <a:fillRef idx="3">
+            <a:schemeClr val="accent1"/>
+          </a:fillRef>
+          <a:effectRef idx="2">
+            <a:schemeClr val="accent1"/>
+          </a:effectRef>
+          <a:fontRef idx="minor">
+            <a:schemeClr val="lt1"/>
+          </a:fontRef>
+        </p:style>
+        <p:txBody>
+          <a:bodyPr rtlCol="0" anchor="ctr"/>
+          <a:lstStyle/>
+          <a:p>
+            <a:pPr algn="ctr"/>
+            <a:endParaRPr/>
+          </a:p>
+        </p:txBody>
+      </p:sp>
+      <p:sp>
+        <p:nvSpPr>
+          <p:cNvPr id="29" name="TextBox 28">
+            <a:extLst>
+              <a:ext uri="{FF2B5EF4-FFF2-40B4-BE49-F238E27FC236}">
+                <a16:creationId xmlns:a16="http://schemas.microsoft.com/office/drawing/2014/main" id="{EEFA1D90-F5F0-B60B-43CA-C6B332B185B5}"/>
+              </a:ext>
+            </a:extLst>
+          </p:cNvPr>
+          <p:cNvSpPr txBox="1"/>
+          <p:nvPr/>
+        </p:nvSpPr>
+        <p:spPr>
+          <a:xfrm>
+            <a:off x="347472" y="5394960"/>
+            <a:ext cx="1042415" cy="347472"/>
+          </a:xfrm>
+          <a:prstGeom prst="rect">
+            <a:avLst/>
+          </a:prstGeom>
+          <a:noFill/>
+        </p:spPr>
+        <p:txBody>
+          <a:bodyPr wrap="square">
+            <a:spAutoFit/>
+          </a:bodyPr>
+          <a:lstStyle/>
+          <a:p>
+            <a:pPr algn="ctr"/>
+            <a:r>
+              <a:rPr sz="1100" b="1" i="0">
+                <a:solidFill>
+                  <a:srgbClr val="FFFFFF"/>
+                </a:solidFill>
+                <a:latin typeface="Calibri"/>
+              </a:rPr>
+              <a:t>This deck</a:t>
+            </a:r>
+          </a:p>
+        </p:txBody>
+      </p:sp>
+      <p:sp>
+        <p:nvSpPr>
+          <p:cNvPr id="30" name="Rectangle 29">
+            <a:extLst>
+              <a:ext uri="{FF2B5EF4-FFF2-40B4-BE49-F238E27FC236}">
+                <a16:creationId xmlns:a16="http://schemas.microsoft.com/office/drawing/2014/main" id="{1ED0541B-39CA-1711-6665-7E53BCD9251B}"/>
+              </a:ext>
+            </a:extLst>
+          </p:cNvPr>
+          <p:cNvSpPr/>
+          <p:nvPr/>
+        </p:nvSpPr>
+        <p:spPr>
+          <a:xfrm>
+            <a:off x="1417320" y="5212080"/>
+            <a:ext cx="4480560" cy="694944"/>
+          </a:xfrm>
+          <a:prstGeom prst="rect">
+            <a:avLst/>
+          </a:prstGeom>
+          <a:solidFill>
+            <a:srgbClr val="FFFFFF"/>
+          </a:solidFill>
+          <a:ln>
+            <a:noFill/>
+          </a:ln>
+        </p:spPr>
+        <p:style>
+          <a:lnRef idx="1">
+            <a:schemeClr val="accent1"/>
+          </a:lnRef>
+          <a:fillRef idx="3">
+            <a:schemeClr val="accent1"/>
+          </a:fillRef>
+          <a:effectRef idx="2">
+            <a:schemeClr val="accent1"/>
+          </a:effectRef>
+          <a:fontRef idx="minor">
+            <a:schemeClr val="lt1"/>
+          </a:fontRef>
+        </p:style>
+        <p:txBody>
+          <a:bodyPr rtlCol="0" anchor="ctr"/>
+          <a:lstStyle/>
+          <a:p>
+            <a:pPr algn="ctr"/>
+            <a:endParaRPr/>
+          </a:p>
+        </p:txBody>
+      </p:sp>
+      <p:sp>
+        <p:nvSpPr>
+          <p:cNvPr id="31" name="TextBox 30">
+            <a:extLst>
+              <a:ext uri="{FF2B5EF4-FFF2-40B4-BE49-F238E27FC236}">
+                <a16:creationId xmlns:a16="http://schemas.microsoft.com/office/drawing/2014/main" id="{1D400DCD-F429-1700-C66A-E662810D6759}"/>
+              </a:ext>
+            </a:extLst>
+          </p:cNvPr>
+          <p:cNvSpPr txBox="1"/>
+          <p:nvPr/>
+        </p:nvSpPr>
+        <p:spPr>
+          <a:xfrm>
+            <a:off x="1536192" y="5376672"/>
+            <a:ext cx="4297680" cy="457200"/>
+          </a:xfrm>
+          <a:prstGeom prst="rect">
+            <a:avLst/>
+          </a:prstGeom>
+          <a:noFill/>
+        </p:spPr>
+        <p:txBody>
+          <a:bodyPr wrap="square">
+            <a:spAutoFit/>
+          </a:bodyPr>
+          <a:lstStyle/>
+          <a:p>
+            <a:pPr algn="l"/>
+            <a:r>
+              <a:rPr sz="1200" b="0" i="0">
+                <a:solidFill>
+                  <a:srgbClr val="1A1A2E"/>
+                </a:solidFill>
+                <a:latin typeface="Calibri"/>
+              </a:rPr>
+              <a:t>✓  Clarified: why OIS spread, what the buffer condition means, how to read CAR, what each event was</a:t>
+            </a:r>
+          </a:p>
+        </p:txBody>
+      </p:sp>
+      <p:sp>
+        <p:nvSpPr>
+          <p:cNvPr id="32" name="Rectangle 31">
+            <a:extLst>
+              <a:ext uri="{FF2B5EF4-FFF2-40B4-BE49-F238E27FC236}">
+                <a16:creationId xmlns:a16="http://schemas.microsoft.com/office/drawing/2014/main" id="{1AB24893-124C-1F02-B6F4-97C7ED8C4A6B}"/>
+              </a:ext>
+            </a:extLst>
+          </p:cNvPr>
+          <p:cNvSpPr/>
+          <p:nvPr/>
+        </p:nvSpPr>
+        <p:spPr>
+          <a:xfrm>
+            <a:off x="6217920" y="960120"/>
+            <a:ext cx="5623560" cy="384048"/>
+          </a:xfrm>
+          <a:prstGeom prst="rect">
+            <a:avLst/>
+          </a:prstGeom>
+          <a:solidFill>
+            <a:srgbClr val="D4632A"/>
+          </a:solidFill>
+          <a:ln>
+            <a:noFill/>
+          </a:ln>
+        </p:spPr>
+        <p:style>
+          <a:lnRef idx="1">
+            <a:schemeClr val="accent1"/>
+          </a:lnRef>
+          <a:fillRef idx="3">
+            <a:schemeClr val="accent1"/>
+          </a:fillRef>
+          <a:effectRef idx="2">
+            <a:schemeClr val="accent1"/>
+          </a:effectRef>
+          <a:fontRef idx="minor">
+            <a:schemeClr val="lt1"/>
+          </a:fontRef>
+        </p:style>
+        <p:txBody>
+          <a:bodyPr rtlCol="0" anchor="ctr"/>
+          <a:lstStyle/>
+          <a:p>
+            <a:pPr algn="ctr"/>
+            <a:endParaRPr/>
+          </a:p>
+        </p:txBody>
+      </p:sp>
+      <p:sp>
+        <p:nvSpPr>
+          <p:cNvPr id="33" name="TextBox 32">
+            <a:extLst>
+              <a:ext uri="{FF2B5EF4-FFF2-40B4-BE49-F238E27FC236}">
+                <a16:creationId xmlns:a16="http://schemas.microsoft.com/office/drawing/2014/main" id="{89D1BD36-E717-E0B7-7A09-70A56422998D}"/>
+              </a:ext>
+            </a:extLst>
+          </p:cNvPr>
+          <p:cNvSpPr txBox="1"/>
+          <p:nvPr/>
+        </p:nvSpPr>
+        <p:spPr>
+          <a:xfrm>
+            <a:off x="6355080" y="987552"/>
+            <a:ext cx="5440680" cy="310896"/>
+          </a:xfrm>
+          <a:prstGeom prst="rect">
+            <a:avLst/>
+          </a:prstGeom>
+          <a:noFill/>
+        </p:spPr>
+        <p:txBody>
+          <a:bodyPr wrap="square">
+            <a:spAutoFit/>
+          </a:bodyPr>
+          <a:lstStyle/>
+          <a:p>
+            <a:pPr algn="l"/>
+            <a:r>
+              <a:rPr sz="1500" b="1" i="0" dirty="0">
+                <a:solidFill>
+                  <a:srgbClr val="FFFFFF"/>
+                </a:solidFill>
+                <a:latin typeface="Calibri"/>
+              </a:rPr>
+              <a:t>Planned for next week</a:t>
+            </a:r>
+          </a:p>
+        </p:txBody>
+      </p:sp>
+      <p:sp>
+        <p:nvSpPr>
+          <p:cNvPr id="34" name="Rectangle 33">
+            <a:extLst>
+              <a:ext uri="{FF2B5EF4-FFF2-40B4-BE49-F238E27FC236}">
+                <a16:creationId xmlns:a16="http://schemas.microsoft.com/office/drawing/2014/main" id="{0CAC7A80-E691-845E-4726-3B39B0D75CB1}"/>
+              </a:ext>
+            </a:extLst>
+          </p:cNvPr>
+          <p:cNvSpPr/>
+          <p:nvPr/>
+        </p:nvSpPr>
+        <p:spPr>
+          <a:xfrm>
+            <a:off x="6217920" y="1417320"/>
+            <a:ext cx="5623560" cy="5212080"/>
+          </a:xfrm>
+          <a:prstGeom prst="rect">
+            <a:avLst/>
+          </a:prstGeom>
+          <a:solidFill>
+            <a:srgbClr val="FFF5EE"/>
+          </a:solidFill>
+          <a:ln>
+            <a:noFill/>
+          </a:ln>
+        </p:spPr>
+        <p:style>
+          <a:lnRef idx="1">
+            <a:schemeClr val="accent1"/>
+          </a:lnRef>
+          <a:fillRef idx="3">
+            <a:schemeClr val="accent1"/>
+          </a:fillRef>
+          <a:effectRef idx="2">
+            <a:schemeClr val="accent1"/>
+          </a:effectRef>
+          <a:fontRef idx="minor">
+            <a:schemeClr val="lt1"/>
+          </a:fontRef>
+        </p:style>
+        <p:txBody>
+          <a:bodyPr rtlCol="0" anchor="ctr"/>
+          <a:lstStyle/>
+          <a:p>
+            <a:pPr algn="ctr"/>
+            <a:endParaRPr/>
+          </a:p>
+        </p:txBody>
+      </p:sp>
+      <p:sp>
+        <p:nvSpPr>
+          <p:cNvPr id="35" name="TextBox 34">
+            <a:extLst>
+              <a:ext uri="{FF2B5EF4-FFF2-40B4-BE49-F238E27FC236}">
+                <a16:creationId xmlns:a16="http://schemas.microsoft.com/office/drawing/2014/main" id="{E9E2A259-69CC-C0C8-857E-888457410998}"/>
+              </a:ext>
+            </a:extLst>
+          </p:cNvPr>
+          <p:cNvSpPr txBox="1"/>
+          <p:nvPr/>
+        </p:nvSpPr>
+        <p:spPr>
+          <a:xfrm>
+            <a:off x="6400800" y="1508760"/>
+            <a:ext cx="5303520" cy="5029200"/>
+          </a:xfrm>
+          <a:prstGeom prst="rect">
+            <a:avLst/>
+          </a:prstGeom>
+          <a:noFill/>
+        </p:spPr>
+        <p:txBody>
+          <a:bodyPr wrap="square">
+            <a:spAutoFit/>
+          </a:bodyPr>
+          <a:lstStyle/>
+          <a:p>
+            <a:pPr>
+              <a:spcBef>
+                <a:spcPts val="0"/>
+              </a:spcBef>
+            </a:pPr>
+            <a:endParaRPr dirty="0"/>
+          </a:p>
+          <a:p>
+            <a:pPr algn="l">
+              <a:spcBef>
+                <a:spcPts val="400"/>
+              </a:spcBef>
+            </a:pPr>
+            <a:r>
+              <a:rPr sz="1600" b="1" i="0" dirty="0">
+                <a:solidFill>
+                  <a:srgbClr val="D4632A"/>
+                </a:solidFill>
+                <a:latin typeface="Calibri"/>
+              </a:rPr>
+              <a:t>Placebo Test</a:t>
+            </a:r>
+          </a:p>
+          <a:p>
+            <a:pPr algn="l">
+              <a:spcBef>
+                <a:spcPts val="800"/>
+              </a:spcBef>
+            </a:pPr>
+            <a:r>
+              <a:rPr sz="1300" b="0" i="0" dirty="0">
+                <a:solidFill>
+                  <a:srgbClr val="1A1A2E"/>
+                </a:solidFill>
+                <a:latin typeface="Calibri"/>
+              </a:rPr>
+              <a:t>Run the same event study methodology on 3 ordinary days with no known stablecoin stress event:</a:t>
+            </a:r>
+          </a:p>
+          <a:p>
+            <a:pPr algn="l">
+              <a:spcBef>
+                <a:spcPts val="700"/>
+              </a:spcBef>
+            </a:pPr>
+            <a:r>
+              <a:rPr sz="1200" b="0" i="0" dirty="0">
+                <a:solidFill>
+                  <a:srgbClr val="1A1A2E"/>
+                </a:solidFill>
+                <a:latin typeface="Calibri"/>
+              </a:rPr>
+              <a:t>❖  Jun 15, 2021  (Low buffer)  —  Quiet summer — no redemption pressure</a:t>
+            </a:r>
+          </a:p>
+          <a:p>
+            <a:pPr algn="l">
+              <a:spcBef>
+                <a:spcPts val="700"/>
+              </a:spcBef>
+            </a:pPr>
+            <a:r>
+              <a:rPr sz="1200" b="0" i="0" dirty="0">
+                <a:solidFill>
+                  <a:srgbClr val="1A1A2E"/>
+                </a:solidFill>
+                <a:latin typeface="Calibri"/>
+              </a:rPr>
+              <a:t>❖  Oct 12, 2021  (Low buffer)  —  Pre-LUNA, no crypto-specific stress</a:t>
+            </a:r>
+          </a:p>
+          <a:p>
+            <a:pPr algn="l">
+              <a:spcBef>
+                <a:spcPts val="700"/>
+              </a:spcBef>
+            </a:pPr>
+            <a:r>
+              <a:rPr sz="1200" b="0" i="0" dirty="0">
+                <a:solidFill>
+                  <a:srgbClr val="1A1A2E"/>
+                </a:solidFill>
+                <a:latin typeface="Calibri"/>
+              </a:rPr>
+              <a:t>❖  Jul 15, 2025  (High buffer)  —  Post-SVB recovery, stable spread period</a:t>
+            </a:r>
+          </a:p>
+          <a:p>
+            <a:pPr algn="l">
+              <a:spcBef>
+                <a:spcPts val="200"/>
+              </a:spcBef>
+            </a:pPr>
+            <a:r>
+              <a:rPr sz="600" b="0" i="0" dirty="0">
+                <a:solidFill>
+                  <a:srgbClr val="1A1A2E"/>
+                </a:solidFill>
+                <a:latin typeface="Calibri"/>
+              </a:rPr>
+              <a:t> </a:t>
+            </a:r>
+          </a:p>
+          <a:p>
+            <a:pPr algn="l">
+              <a:spcBef>
+                <a:spcPts val="400"/>
+              </a:spcBef>
+            </a:pPr>
+            <a:r>
+              <a:rPr sz="1400" b="1" i="0" dirty="0">
+                <a:solidFill>
+                  <a:srgbClr val="1B3A72"/>
+                </a:solidFill>
+                <a:latin typeface="Calibri"/>
+              </a:rPr>
+              <a:t>What we expect to show:</a:t>
+            </a:r>
+          </a:p>
+          <a:p>
+            <a:pPr algn="l">
+              <a:spcBef>
+                <a:spcPts val="600"/>
+              </a:spcBef>
+            </a:pPr>
+            <a:r>
+              <a:rPr sz="1300" b="0" i="0" dirty="0">
+                <a:solidFill>
+                  <a:srgbClr val="1A1A2E"/>
+                </a:solidFill>
+                <a:latin typeface="Calibri"/>
+              </a:rPr>
+              <a:t>CARs on placebo days should be near 0 pp — confirming that the 9–18 pp swings in actual events are caused by the crisis itself, not by random market drift.</a:t>
+            </a:r>
+          </a:p>
+          <a:p>
+            <a:pPr algn="l">
+              <a:spcBef>
+                <a:spcPts val="200"/>
+              </a:spcBef>
+            </a:pPr>
+            <a:r>
+              <a:rPr sz="600" b="0" i="0" dirty="0">
+                <a:solidFill>
+                  <a:srgbClr val="1A1A2E"/>
+                </a:solidFill>
+                <a:latin typeface="Calibri"/>
+              </a:rPr>
+              <a:t> </a:t>
+            </a:r>
+          </a:p>
+          <a:p>
+            <a:pPr algn="l">
+              <a:spcBef>
+                <a:spcPts val="400"/>
+              </a:spcBef>
+            </a:pPr>
+            <a:r>
+              <a:rPr sz="1200" b="1" i="1" dirty="0">
+                <a:solidFill>
+                  <a:srgbClr val="D4632A"/>
+                </a:solidFill>
+                <a:latin typeface="Calibri"/>
+              </a:rPr>
+              <a:t>Preliminary result: placebo mean |CAR| = 0.55 pp vs. actual mean |CAR| = 11.92 pp  →  21.7× difference</a:t>
+            </a:r>
+          </a:p>
+        </p:txBody>
+      </p:sp>
+      <p:sp>
+        <p:nvSpPr>
+          <p:cNvPr id="36" name="TextBox 35">
+            <a:extLst>
+              <a:ext uri="{FF2B5EF4-FFF2-40B4-BE49-F238E27FC236}">
+                <a16:creationId xmlns:a16="http://schemas.microsoft.com/office/drawing/2014/main" id="{FAABCA31-CFD3-24DB-80BB-D92CF92A8099}"/>
+              </a:ext>
+            </a:extLst>
+          </p:cNvPr>
+          <p:cNvSpPr txBox="1"/>
+          <p:nvPr/>
+        </p:nvSpPr>
+        <p:spPr>
+          <a:xfrm>
+            <a:off x="10265434" y="320040"/>
+            <a:ext cx="1576046" cy="323165"/>
+          </a:xfrm>
+          <a:prstGeom prst="rect">
+            <a:avLst/>
+          </a:prstGeom>
+          <a:noFill/>
+        </p:spPr>
+        <p:txBody>
+          <a:bodyPr wrap="square">
+            <a:spAutoFit/>
+          </a:bodyPr>
+          <a:lstStyle/>
+          <a:p>
+            <a:pPr algn="l"/>
+            <a:r>
+              <a:rPr lang="en-US" sz="1500" b="1" i="0" dirty="0">
+                <a:solidFill>
+                  <a:srgbClr val="FFFFFF"/>
+                </a:solidFill>
+                <a:latin typeface="Calibri"/>
+              </a:rPr>
+              <a:t>Mimi – Page 10</a:t>
+            </a:r>
+            <a:endParaRPr sz="1500" b="1" i="0" dirty="0">
+              <a:solidFill>
+                <a:srgbClr val="FFFFFF"/>
+              </a:solidFill>
+              <a:latin typeface="Calibri"/>
+            </a:endParaRPr>
+          </a:p>
+        </p:txBody>
+      </p:sp>
+    </p:spTree>
+    <p:extLst>
+      <p:ext uri="{BB962C8B-B14F-4D97-AF65-F5344CB8AC3E}">
+        <p14:creationId xmlns:p14="http://schemas.microsoft.com/office/powerpoint/2010/main" val="814266914"/>
+      </p:ext>
+    </p:extLst>
+  </p:cSld>
+  <p:clrMapOvr>
+    <a:masterClrMapping/>
+  </p:clrMapOvr>
+</p:sld>
+</file>
+
+<file path=ppt/slides/slide11.xml><?xml version="1.0" encoding="utf-8"?>
+<p:sld xmlns:a="http://schemas.openxmlformats.org/drawingml/2006/main" xmlns:r="http://schemas.openxmlformats.org/officeDocument/2006/relationships" xmlns:p="http://schemas.openxmlformats.org/presentationml/2006/main">
+  <p:cSld>
     <p:bg>
       <p:bgPr>
         <a:solidFill>
@@ -4476,14 +9813,462 @@
       </p:grpSpPr>
       <p:sp>
         <p:nvSpPr>
-          <p:cNvPr id="2" name="Rectangle 1"/>
+          <p:cNvPr id="3" name="Rectangle 2"/>
           <p:cNvSpPr/>
           <p:nvPr/>
         </p:nvSpPr>
         <p:spPr>
           <a:xfrm>
             <a:off x="0" y="0"/>
-            <a:ext cx="12188952" cy="6858000"/>
+            <a:ext cx="12188952" cy="868680"/>
+          </a:xfrm>
+          <a:prstGeom prst="rect">
+            <a:avLst/>
+          </a:prstGeom>
+          <a:solidFill>
+            <a:srgbClr val="1B3A72"/>
+          </a:solidFill>
+          <a:ln>
+            <a:noFill/>
+          </a:ln>
+        </p:spPr>
+        <p:style>
+          <a:lnRef idx="1">
+            <a:schemeClr val="accent1"/>
+          </a:lnRef>
+          <a:fillRef idx="3">
+            <a:schemeClr val="accent1"/>
+          </a:fillRef>
+          <a:effectRef idx="2">
+            <a:schemeClr val="accent1"/>
+          </a:effectRef>
+          <a:fontRef idx="minor">
+            <a:schemeClr val="lt1"/>
+          </a:fontRef>
+        </p:style>
+        <p:txBody>
+          <a:bodyPr rtlCol="0" anchor="ctr"/>
+          <a:lstStyle/>
+          <a:p>
+            <a:pPr algn="ctr"/>
+            <a:endParaRPr/>
+          </a:p>
+        </p:txBody>
+      </p:sp>
+      <p:sp>
+        <p:nvSpPr>
+          <p:cNvPr id="4" name="TextBox 3"/>
+          <p:cNvSpPr txBox="1"/>
+          <p:nvPr/>
+        </p:nvSpPr>
+        <p:spPr>
+          <a:xfrm>
+            <a:off x="274320" y="91440"/>
+            <a:ext cx="7006374" cy="492443"/>
+          </a:xfrm>
+          <a:prstGeom prst="rect">
+            <a:avLst/>
+          </a:prstGeom>
+          <a:noFill/>
+        </p:spPr>
+        <p:txBody>
+          <a:bodyPr wrap="square">
+            <a:spAutoFit/>
+          </a:bodyPr>
+          <a:lstStyle/>
+          <a:p>
+            <a:pPr algn="l"/>
+            <a:r>
+              <a:rPr sz="2600" b="0" i="0" dirty="0">
+                <a:solidFill>
+                  <a:srgbClr val="FFFFFF"/>
+                </a:solidFill>
+                <a:latin typeface="Calibri"/>
+              </a:rPr>
+              <a:t>Roadmap</a:t>
+            </a:r>
+          </a:p>
+        </p:txBody>
+      </p:sp>
+      <p:sp>
+        <p:nvSpPr>
+          <p:cNvPr id="5" name="TextBox 4"/>
+          <p:cNvSpPr txBox="1"/>
+          <p:nvPr/>
+        </p:nvSpPr>
+        <p:spPr>
+          <a:xfrm>
+            <a:off x="11686032" y="6473952"/>
+            <a:ext cx="411480" cy="320040"/>
+          </a:xfrm>
+          <a:prstGeom prst="rect">
+            <a:avLst/>
+          </a:prstGeom>
+          <a:noFill/>
+        </p:spPr>
+        <p:txBody>
+          <a:bodyPr wrap="square">
+            <a:spAutoFit/>
+          </a:bodyPr>
+          <a:lstStyle/>
+          <a:p>
+            <a:pPr algn="r"/>
+            <a:r>
+              <a:rPr sz="1300" b="0" i="0">
+                <a:solidFill>
+                  <a:srgbClr val="555566"/>
+                </a:solidFill>
+                <a:latin typeface="Calibri"/>
+              </a:rPr>
+              <a:t>2</a:t>
+            </a:r>
+          </a:p>
+        </p:txBody>
+      </p:sp>
+      <p:sp>
+        <p:nvSpPr>
+          <p:cNvPr id="6" name="Rectangle 5"/>
+          <p:cNvSpPr/>
+          <p:nvPr/>
+        </p:nvSpPr>
+        <p:spPr>
+          <a:xfrm>
+            <a:off x="320040" y="960120"/>
+            <a:ext cx="5577840" cy="384048"/>
+          </a:xfrm>
+          <a:prstGeom prst="rect">
+            <a:avLst/>
+          </a:prstGeom>
+          <a:solidFill>
+            <a:srgbClr val="1B3A72"/>
+          </a:solidFill>
+          <a:ln>
+            <a:noFill/>
+          </a:ln>
+        </p:spPr>
+        <p:style>
+          <a:lnRef idx="1">
+            <a:schemeClr val="accent1"/>
+          </a:lnRef>
+          <a:fillRef idx="3">
+            <a:schemeClr val="accent1"/>
+          </a:fillRef>
+          <a:effectRef idx="2">
+            <a:schemeClr val="accent1"/>
+          </a:effectRef>
+          <a:fontRef idx="minor">
+            <a:schemeClr val="lt1"/>
+          </a:fontRef>
+        </p:style>
+        <p:txBody>
+          <a:bodyPr rtlCol="0" anchor="ctr"/>
+          <a:lstStyle/>
+          <a:p>
+            <a:pPr algn="ctr"/>
+            <a:endParaRPr/>
+          </a:p>
+        </p:txBody>
+      </p:sp>
+      <p:sp>
+        <p:nvSpPr>
+          <p:cNvPr id="7" name="TextBox 6"/>
+          <p:cNvSpPr txBox="1"/>
+          <p:nvPr/>
+        </p:nvSpPr>
+        <p:spPr>
+          <a:xfrm>
+            <a:off x="457200" y="987552"/>
+            <a:ext cx="5394960" cy="310896"/>
+          </a:xfrm>
+          <a:prstGeom prst="rect">
+            <a:avLst/>
+          </a:prstGeom>
+          <a:noFill/>
+        </p:spPr>
+        <p:txBody>
+          <a:bodyPr wrap="square">
+            <a:spAutoFit/>
+          </a:bodyPr>
+          <a:lstStyle/>
+          <a:p>
+            <a:pPr algn="l"/>
+            <a:r>
+              <a:rPr sz="1500" b="1" i="0">
+                <a:solidFill>
+                  <a:srgbClr val="FFFFFF"/>
+                </a:solidFill>
+                <a:latin typeface="Calibri"/>
+              </a:rPr>
+              <a:t>What we have done</a:t>
+            </a:r>
+          </a:p>
+        </p:txBody>
+      </p:sp>
+      <p:sp>
+        <p:nvSpPr>
+          <p:cNvPr id="8" name="Rectangle 7"/>
+          <p:cNvSpPr/>
+          <p:nvPr/>
+        </p:nvSpPr>
+        <p:spPr>
+          <a:xfrm>
+            <a:off x="320040" y="1417320"/>
+            <a:ext cx="1097280" cy="694944"/>
+          </a:xfrm>
+          <a:prstGeom prst="rect">
+            <a:avLst/>
+          </a:prstGeom>
+          <a:solidFill>
+            <a:srgbClr val="1B3A72"/>
+          </a:solidFill>
+          <a:ln>
+            <a:noFill/>
+          </a:ln>
+        </p:spPr>
+        <p:style>
+          <a:lnRef idx="1">
+            <a:schemeClr val="accent1"/>
+          </a:lnRef>
+          <a:fillRef idx="3">
+            <a:schemeClr val="accent1"/>
+          </a:fillRef>
+          <a:effectRef idx="2">
+            <a:schemeClr val="accent1"/>
+          </a:effectRef>
+          <a:fontRef idx="minor">
+            <a:schemeClr val="lt1"/>
+          </a:fontRef>
+        </p:style>
+        <p:txBody>
+          <a:bodyPr rtlCol="0" anchor="ctr"/>
+          <a:lstStyle/>
+          <a:p>
+            <a:pPr algn="ctr"/>
+            <a:endParaRPr/>
+          </a:p>
+        </p:txBody>
+      </p:sp>
+      <p:sp>
+        <p:nvSpPr>
+          <p:cNvPr id="9" name="TextBox 8"/>
+          <p:cNvSpPr txBox="1"/>
+          <p:nvPr/>
+        </p:nvSpPr>
+        <p:spPr>
+          <a:xfrm>
+            <a:off x="347472" y="1600200"/>
+            <a:ext cx="1042415" cy="347472"/>
+          </a:xfrm>
+          <a:prstGeom prst="rect">
+            <a:avLst/>
+          </a:prstGeom>
+          <a:noFill/>
+        </p:spPr>
+        <p:txBody>
+          <a:bodyPr wrap="square">
+            <a:spAutoFit/>
+          </a:bodyPr>
+          <a:lstStyle/>
+          <a:p>
+            <a:pPr algn="ctr"/>
+            <a:r>
+              <a:rPr sz="1100" b="1" i="0">
+                <a:solidFill>
+                  <a:srgbClr val="FFFFFF"/>
+                </a:solidFill>
+                <a:latin typeface="Calibri"/>
+              </a:rPr>
+              <a:t>Theory</a:t>
+            </a:r>
+          </a:p>
+        </p:txBody>
+      </p:sp>
+      <p:sp>
+        <p:nvSpPr>
+          <p:cNvPr id="10" name="Rectangle 9"/>
+          <p:cNvSpPr/>
+          <p:nvPr/>
+        </p:nvSpPr>
+        <p:spPr>
+          <a:xfrm>
+            <a:off x="1417320" y="1417320"/>
+            <a:ext cx="4480560" cy="694944"/>
+          </a:xfrm>
+          <a:prstGeom prst="rect">
+            <a:avLst/>
+          </a:prstGeom>
+          <a:solidFill>
+            <a:srgbClr val="F0F4F8"/>
+          </a:solidFill>
+          <a:ln>
+            <a:noFill/>
+          </a:ln>
+        </p:spPr>
+        <p:style>
+          <a:lnRef idx="1">
+            <a:schemeClr val="accent1"/>
+          </a:lnRef>
+          <a:fillRef idx="3">
+            <a:schemeClr val="accent1"/>
+          </a:fillRef>
+          <a:effectRef idx="2">
+            <a:schemeClr val="accent1"/>
+          </a:effectRef>
+          <a:fontRef idx="minor">
+            <a:schemeClr val="lt1"/>
+          </a:fontRef>
+        </p:style>
+        <p:txBody>
+          <a:bodyPr rtlCol="0" anchor="ctr"/>
+          <a:lstStyle/>
+          <a:p>
+            <a:pPr algn="ctr"/>
+            <a:endParaRPr/>
+          </a:p>
+        </p:txBody>
+      </p:sp>
+      <p:sp>
+        <p:nvSpPr>
+          <p:cNvPr id="11" name="TextBox 10"/>
+          <p:cNvSpPr txBox="1"/>
+          <p:nvPr/>
+        </p:nvSpPr>
+        <p:spPr>
+          <a:xfrm>
+            <a:off x="1536192" y="1581912"/>
+            <a:ext cx="4297680" cy="457200"/>
+          </a:xfrm>
+          <a:prstGeom prst="rect">
+            <a:avLst/>
+          </a:prstGeom>
+          <a:noFill/>
+        </p:spPr>
+        <p:txBody>
+          <a:bodyPr wrap="square">
+            <a:spAutoFit/>
+          </a:bodyPr>
+          <a:lstStyle/>
+          <a:p>
+            <a:pPr algn="l"/>
+            <a:r>
+              <a:rPr sz="1200" b="0" i="0" dirty="0">
+                <a:solidFill>
+                  <a:srgbClr val="1A1A2E"/>
+                </a:solidFill>
+                <a:latin typeface="Calibri"/>
+              </a:rPr>
+              <a:t>✓  Extended Maggiori (2017) with stablecoin supply S, treasury exposure </a:t>
+            </a:r>
+            <a:r>
+              <a:rPr sz="1200" b="0" i="0" dirty="0" err="1">
+                <a:solidFill>
+                  <a:srgbClr val="1A1A2E"/>
+                </a:solidFill>
+                <a:latin typeface="Calibri"/>
+              </a:rPr>
+              <a:t>θ</a:t>
+            </a:r>
+            <a:r>
+              <a:rPr sz="1200" b="0" i="0" dirty="0">
+                <a:solidFill>
+                  <a:srgbClr val="1A1A2E"/>
+                </a:solidFill>
+                <a:latin typeface="Calibri"/>
+              </a:rPr>
+              <a:t>, and liquid buffer L</a:t>
+            </a:r>
+          </a:p>
+        </p:txBody>
+      </p:sp>
+      <p:sp>
+        <p:nvSpPr>
+          <p:cNvPr id="12" name="Rectangle 11"/>
+          <p:cNvSpPr/>
+          <p:nvPr/>
+        </p:nvSpPr>
+        <p:spPr>
+          <a:xfrm>
+            <a:off x="320040" y="2176272"/>
+            <a:ext cx="1097280" cy="694944"/>
+          </a:xfrm>
+          <a:prstGeom prst="rect">
+            <a:avLst/>
+          </a:prstGeom>
+          <a:solidFill>
+            <a:srgbClr val="1B3A72"/>
+          </a:solidFill>
+          <a:ln>
+            <a:noFill/>
+          </a:ln>
+        </p:spPr>
+        <p:style>
+          <a:lnRef idx="1">
+            <a:schemeClr val="accent1"/>
+          </a:lnRef>
+          <a:fillRef idx="3">
+            <a:schemeClr val="accent1"/>
+          </a:fillRef>
+          <a:effectRef idx="2">
+            <a:schemeClr val="accent1"/>
+          </a:effectRef>
+          <a:fontRef idx="minor">
+            <a:schemeClr val="lt1"/>
+          </a:fontRef>
+        </p:style>
+        <p:txBody>
+          <a:bodyPr rtlCol="0" anchor="ctr"/>
+          <a:lstStyle/>
+          <a:p>
+            <a:pPr algn="ctr"/>
+            <a:endParaRPr/>
+          </a:p>
+        </p:txBody>
+      </p:sp>
+      <p:sp>
+        <p:nvSpPr>
+          <p:cNvPr id="13" name="TextBox 12"/>
+          <p:cNvSpPr txBox="1"/>
+          <p:nvPr/>
+        </p:nvSpPr>
+        <p:spPr>
+          <a:xfrm>
+            <a:off x="347472" y="2359152"/>
+            <a:ext cx="1042415" cy="347472"/>
+          </a:xfrm>
+          <a:prstGeom prst="rect">
+            <a:avLst/>
+          </a:prstGeom>
+          <a:noFill/>
+        </p:spPr>
+        <p:txBody>
+          <a:bodyPr wrap="square">
+            <a:spAutoFit/>
+          </a:bodyPr>
+          <a:lstStyle/>
+          <a:p>
+            <a:pPr algn="ctr"/>
+            <a:r>
+              <a:rPr sz="1100" b="1" i="0">
+                <a:solidFill>
+                  <a:srgbClr val="FFFFFF"/>
+                </a:solidFill>
+                <a:latin typeface="Calibri"/>
+              </a:rPr>
+              <a:t>Regression</a:t>
+            </a:r>
+          </a:p>
+        </p:txBody>
+      </p:sp>
+      <p:sp>
+        <p:nvSpPr>
+          <p:cNvPr id="14" name="Rectangle 13"/>
+          <p:cNvSpPr/>
+          <p:nvPr/>
+        </p:nvSpPr>
+        <p:spPr>
+          <a:xfrm>
+            <a:off x="1417320" y="2176272"/>
+            <a:ext cx="4480560" cy="694944"/>
           </a:xfrm>
           <a:prstGeom prst="rect">
             <a:avLst/>
@@ -4520,14 +10305,49 @@
       </p:sp>
       <p:sp>
         <p:nvSpPr>
-          <p:cNvPr id="3" name="Rectangle 2"/>
+          <p:cNvPr id="15" name="TextBox 14"/>
+          <p:cNvSpPr txBox="1"/>
+          <p:nvPr/>
+        </p:nvSpPr>
+        <p:spPr>
+          <a:xfrm>
+            <a:off x="1536192" y="2340864"/>
+            <a:ext cx="4297680" cy="457200"/>
+          </a:xfrm>
+          <a:prstGeom prst="rect">
+            <a:avLst/>
+          </a:prstGeom>
+          <a:noFill/>
+        </p:spPr>
+        <p:txBody>
+          <a:bodyPr wrap="square">
+            <a:spAutoFit/>
+          </a:bodyPr>
+          <a:lstStyle/>
+          <a:p>
+            <a:pPr algn="l"/>
+            <a:r>
+              <a:rPr sz="1200" b="0" i="0" dirty="0">
+                <a:solidFill>
+                  <a:srgbClr val="1A1A2E"/>
+                </a:solidFill>
+                <a:latin typeface="Calibri"/>
+              </a:rPr>
+              <a:t>✓  β₁ = −6.02** — stablecoin growth compresses OIS–Treasury spreads (privilege amplification)</a:t>
+            </a:r>
+          </a:p>
+        </p:txBody>
+      </p:sp>
+      <p:sp>
+        <p:nvSpPr>
+          <p:cNvPr id="16" name="Rectangle 15"/>
           <p:cNvSpPr/>
           <p:nvPr/>
         </p:nvSpPr>
         <p:spPr>
           <a:xfrm>
-            <a:off x="0" y="0"/>
-            <a:ext cx="12188952" cy="868680"/>
+            <a:off x="320040" y="2935224"/>
+            <a:ext cx="1097280" cy="694944"/>
           </a:xfrm>
           <a:prstGeom prst="rect">
             <a:avLst/>
@@ -4564,14 +10384,14 @@
       </p:sp>
       <p:sp>
         <p:nvSpPr>
-          <p:cNvPr id="4" name="TextBox 3"/>
+          <p:cNvPr id="17" name="TextBox 16"/>
           <p:cNvSpPr txBox="1"/>
           <p:nvPr/>
         </p:nvSpPr>
         <p:spPr>
           <a:xfrm>
-            <a:off x="274320" y="91440"/>
-            <a:ext cx="10515600" cy="713232"/>
+            <a:off x="347472" y="3118104"/>
+            <a:ext cx="1042415" cy="347472"/>
           </a:xfrm>
           <a:prstGeom prst="rect">
             <a:avLst/>
@@ -4584,29 +10404,73 @@
           </a:bodyPr>
           <a:lstStyle/>
           <a:p>
-            <a:pPr algn="l"/>
-            <a:r>
-              <a:rPr sz="2600" b="0" i="0">
+            <a:pPr algn="ctr"/>
+            <a:r>
+              <a:rPr sz="1100" b="1" i="0">
                 <a:solidFill>
                   <a:srgbClr val="FFFFFF"/>
                 </a:solidFill>
                 <a:latin typeface="Calibri"/>
               </a:rPr>
-              <a:t>Roadmap</a:t>
-            </a:r>
-          </a:p>
-        </p:txBody>
-      </p:sp>
-      <p:sp>
-        <p:nvSpPr>
-          <p:cNvPr id="5" name="TextBox 4"/>
+              <a:t>Threshold</a:t>
+            </a:r>
+          </a:p>
+        </p:txBody>
+      </p:sp>
+      <p:sp>
+        <p:nvSpPr>
+          <p:cNvPr id="18" name="Rectangle 17"/>
+          <p:cNvSpPr/>
+          <p:nvPr/>
+        </p:nvSpPr>
+        <p:spPr>
+          <a:xfrm>
+            <a:off x="1417320" y="2935224"/>
+            <a:ext cx="4480560" cy="694944"/>
+          </a:xfrm>
+          <a:prstGeom prst="rect">
+            <a:avLst/>
+          </a:prstGeom>
+          <a:solidFill>
+            <a:srgbClr val="F0F4F8"/>
+          </a:solidFill>
+          <a:ln>
+            <a:noFill/>
+          </a:ln>
+        </p:spPr>
+        <p:style>
+          <a:lnRef idx="1">
+            <a:schemeClr val="accent1"/>
+          </a:lnRef>
+          <a:fillRef idx="3">
+            <a:schemeClr val="accent1"/>
+          </a:fillRef>
+          <a:effectRef idx="2">
+            <a:schemeClr val="accent1"/>
+          </a:effectRef>
+          <a:fontRef idx="minor">
+            <a:schemeClr val="lt1"/>
+          </a:fontRef>
+        </p:style>
+        <p:txBody>
+          <a:bodyPr rtlCol="0" anchor="ctr"/>
+          <a:lstStyle/>
+          <a:p>
+            <a:pPr algn="ctr"/>
+            <a:endParaRPr/>
+          </a:p>
+        </p:txBody>
+      </p:sp>
+      <p:sp>
+        <p:nvSpPr>
+          <p:cNvPr id="19" name="TextBox 18"/>
           <p:cNvSpPr txBox="1"/>
           <p:nvPr/>
         </p:nvSpPr>
         <p:spPr>
           <a:xfrm>
-            <a:off x="11686032" y="6473952"/>
-            <a:ext cx="411480" cy="320040"/>
+            <a:off x="1536192" y="3099816"/>
+            <a:ext cx="4297680" cy="457200"/>
           </a:xfrm>
           <a:prstGeom prst="rect">
             <a:avLst/>
@@ -4619,29 +10483,29 @@
           </a:bodyPr>
           <a:lstStyle/>
           <a:p>
-            <a:pPr algn="r"/>
-            <a:r>
-              <a:rPr sz="1300" b="0" i="0">
-                <a:solidFill>
-                  <a:srgbClr val="555566"/>
-                </a:solidFill>
-                <a:latin typeface="Calibri"/>
-              </a:rPr>
-              <a:t>2</a:t>
-            </a:r>
-          </a:p>
-        </p:txBody>
-      </p:sp>
-      <p:sp>
-        <p:nvSpPr>
-          <p:cNvPr id="6" name="Rectangle 5"/>
+            <a:pPr algn="l"/>
+            <a:r>
+              <a:rPr sz="1200" b="0" i="0" dirty="0">
+                <a:solidFill>
+                  <a:srgbClr val="1A1A2E"/>
+                </a:solidFill>
+                <a:latin typeface="Calibri"/>
+              </a:rPr>
+              <a:t>✓  Hansen (2000) threshold at q* = 13% liquid cash — separates safe from fragile regime</a:t>
+            </a:r>
+          </a:p>
+        </p:txBody>
+      </p:sp>
+      <p:sp>
+        <p:nvSpPr>
+          <p:cNvPr id="20" name="Rectangle 19"/>
           <p:cNvSpPr/>
           <p:nvPr/>
         </p:nvSpPr>
         <p:spPr>
           <a:xfrm>
-            <a:off x="320040" y="960120"/>
-            <a:ext cx="5577840" cy="384048"/>
+            <a:off x="320040" y="3694176"/>
+            <a:ext cx="1097280" cy="694944"/>
           </a:xfrm>
           <a:prstGeom prst="rect">
             <a:avLst/>
@@ -4678,14 +10542,14 @@
       </p:sp>
       <p:sp>
         <p:nvSpPr>
-          <p:cNvPr id="7" name="TextBox 6"/>
+          <p:cNvPr id="21" name="TextBox 20"/>
           <p:cNvSpPr txBox="1"/>
           <p:nvPr/>
         </p:nvSpPr>
         <p:spPr>
           <a:xfrm>
-            <a:off x="457200" y="987552"/>
-            <a:ext cx="5394960" cy="310896"/>
+            <a:off x="347472" y="3877056"/>
+            <a:ext cx="1042415" cy="347472"/>
           </a:xfrm>
           <a:prstGeom prst="rect">
             <a:avLst/>
@@ -4698,28 +10562,125 @@
           </a:bodyPr>
           <a:lstStyle/>
           <a:p>
+            <a:pPr algn="ctr"/>
+            <a:r>
+              <a:rPr sz="1100" b="1" i="0">
+                <a:solidFill>
+                  <a:srgbClr val="FFFFFF"/>
+                </a:solidFill>
+                <a:latin typeface="Calibri"/>
+              </a:rPr>
+              <a:t>Event Study</a:t>
+            </a:r>
+          </a:p>
+        </p:txBody>
+      </p:sp>
+      <p:sp>
+        <p:nvSpPr>
+          <p:cNvPr id="22" name="Rectangle 21"/>
+          <p:cNvSpPr/>
+          <p:nvPr/>
+        </p:nvSpPr>
+        <p:spPr>
+          <a:xfrm>
+            <a:off x="1417320" y="3694176"/>
+            <a:ext cx="4480560" cy="694944"/>
+          </a:xfrm>
+          <a:prstGeom prst="rect">
+            <a:avLst/>
+          </a:prstGeom>
+          <a:solidFill>
+            <a:srgbClr val="FFFFFF"/>
+          </a:solidFill>
+          <a:ln>
+            <a:noFill/>
+          </a:ln>
+        </p:spPr>
+        <p:style>
+          <a:lnRef idx="1">
+            <a:schemeClr val="accent1"/>
+          </a:lnRef>
+          <a:fillRef idx="3">
+            <a:schemeClr val="accent1"/>
+          </a:fillRef>
+          <a:effectRef idx="2">
+            <a:schemeClr val="accent1"/>
+          </a:effectRef>
+          <a:fontRef idx="minor">
+            <a:schemeClr val="lt1"/>
+          </a:fontRef>
+        </p:style>
+        <p:txBody>
+          <a:bodyPr rtlCol="0" anchor="ctr"/>
+          <a:lstStyle/>
+          <a:p>
+            <a:pPr algn="ctr"/>
+            <a:endParaRPr/>
+          </a:p>
+        </p:txBody>
+      </p:sp>
+      <p:sp>
+        <p:nvSpPr>
+          <p:cNvPr id="23" name="TextBox 22"/>
+          <p:cNvSpPr txBox="1"/>
+          <p:nvPr/>
+        </p:nvSpPr>
+        <p:spPr>
+          <a:xfrm>
+            <a:off x="1536192" y="3858768"/>
+            <a:ext cx="4297680" cy="457200"/>
+          </a:xfrm>
+          <a:prstGeom prst="rect">
+            <a:avLst/>
+          </a:prstGeom>
+          <a:noFill/>
+        </p:spPr>
+        <p:txBody>
+          <a:bodyPr wrap="square">
+            <a:spAutoFit/>
+          </a:bodyPr>
+          <a:lstStyle/>
+          <a:p>
             <a:pPr algn="l"/>
             <a:r>
-              <a:rPr sz="1500" b="1" i="0">
-                <a:solidFill>
-                  <a:srgbClr val="FFFFFF"/>
-                </a:solidFill>
-                <a:latin typeface="Calibri"/>
-              </a:rPr>
-              <a:t>What we have done</a:t>
-            </a:r>
-          </a:p>
-        </p:txBody>
-      </p:sp>
-      <p:sp>
-        <p:nvSpPr>
-          <p:cNvPr id="8" name="Rectangle 7"/>
+              <a:rPr sz="1200" b="0" i="0" dirty="0">
+                <a:solidFill>
+                  <a:srgbClr val="1A1A2E"/>
+                </a:solidFill>
+                <a:latin typeface="Calibri"/>
+              </a:rPr>
+              <a:t>✓  3 stress episodes (LUNA, USDT </a:t>
+            </a:r>
+            <a:r>
+              <a:rPr sz="1200" b="0" i="0" dirty="0" err="1">
+                <a:solidFill>
+                  <a:srgbClr val="1A1A2E"/>
+                </a:solidFill>
+                <a:latin typeface="Calibri"/>
+              </a:rPr>
+              <a:t>depeg</a:t>
+            </a:r>
+            <a:r>
+              <a:rPr sz="1200" b="0" i="0" dirty="0">
+                <a:solidFill>
+                  <a:srgbClr val="1A1A2E"/>
+                </a:solidFill>
+                <a:latin typeface="Calibri"/>
+              </a:rPr>
+              <a:t>, SVB) — 27 pp CAR swing between low/high buffer regimes</a:t>
+            </a:r>
+          </a:p>
+        </p:txBody>
+      </p:sp>
+      <p:sp>
+        <p:nvSpPr>
+          <p:cNvPr id="24" name="Rectangle 23"/>
           <p:cNvSpPr/>
           <p:nvPr/>
         </p:nvSpPr>
         <p:spPr>
           <a:xfrm>
-            <a:off x="320040" y="1417320"/>
+            <a:off x="320040" y="4453128"/>
             <a:ext cx="1097280" cy="694944"/>
           </a:xfrm>
           <a:prstGeom prst="rect">
@@ -4757,13 +10718,13 @@
       </p:sp>
       <p:sp>
         <p:nvSpPr>
-          <p:cNvPr id="9" name="TextBox 8"/>
+          <p:cNvPr id="25" name="TextBox 24"/>
           <p:cNvSpPr txBox="1"/>
           <p:nvPr/>
         </p:nvSpPr>
         <p:spPr>
           <a:xfrm>
-            <a:off x="347472" y="1600200"/>
+            <a:off x="347472" y="4636008"/>
             <a:ext cx="1042415" cy="347472"/>
           </a:xfrm>
           <a:prstGeom prst="rect">
@@ -4785,20 +10746,20 @@
                 </a:solidFill>
                 <a:latin typeface="Calibri"/>
               </a:rPr>
-              <a:t>Theory</a:t>
-            </a:r>
-          </a:p>
-        </p:txBody>
-      </p:sp>
-      <p:sp>
-        <p:nvSpPr>
-          <p:cNvPr id="10" name="Rectangle 9"/>
+              <a:t>Robustness</a:t>
+            </a:r>
+          </a:p>
+        </p:txBody>
+      </p:sp>
+      <p:sp>
+        <p:nvSpPr>
+          <p:cNvPr id="26" name="Rectangle 25"/>
           <p:cNvSpPr/>
           <p:nvPr/>
         </p:nvSpPr>
         <p:spPr>
           <a:xfrm>
-            <a:off x="1417320" y="1417320"/>
+            <a:off x="1417320" y="4453128"/>
             <a:ext cx="4480560" cy="694944"/>
           </a:xfrm>
           <a:prstGeom prst="rect">
@@ -4836,13 +10797,13 @@
       </p:sp>
       <p:sp>
         <p:nvSpPr>
-          <p:cNvPr id="11" name="TextBox 10"/>
+          <p:cNvPr id="27" name="TextBox 26"/>
           <p:cNvSpPr txBox="1"/>
           <p:nvPr/>
         </p:nvSpPr>
         <p:spPr>
           <a:xfrm>
-            <a:off x="1536192" y="1581912"/>
+            <a:off x="1536192" y="4617720"/>
             <a:ext cx="4297680" cy="457200"/>
           </a:xfrm>
           <a:prstGeom prst="rect">
@@ -4864,45 +10825,29 @@
                 </a:solidFill>
                 <a:latin typeface="Calibri"/>
               </a:rPr>
-              <a:t>✓  Extended Maggiori (2017) with stablecoin supply S, treasury exposure </a:t>
-            </a:r>
-            <a:r>
-              <a:rPr sz="1200" b="0" i="0" dirty="0" err="1">
-                <a:solidFill>
-                  <a:srgbClr val="1A1A2E"/>
-                </a:solidFill>
-                <a:latin typeface="Calibri"/>
-              </a:rPr>
-              <a:t>θ</a:t>
-            </a:r>
-            <a:r>
-              <a:rPr sz="1200" b="0" i="0" dirty="0">
-                <a:solidFill>
-                  <a:srgbClr val="1A1A2E"/>
-                </a:solidFill>
-                <a:latin typeface="Calibri"/>
-              </a:rPr>
-              <a:t>, and liquid buffer L</a:t>
-            </a:r>
-          </a:p>
-        </p:txBody>
-      </p:sp>
-      <p:sp>
-        <p:nvSpPr>
-          <p:cNvPr id="12" name="Rectangle 11"/>
+              <a:t>✓  Mean-centering (VIF), Engle-Granger cointegration, first-differenced spec, post-2023 subsample</a:t>
+            </a:r>
+          </a:p>
+        </p:txBody>
+      </p:sp>
+      <p:sp>
+        <p:nvSpPr>
+          <p:cNvPr id="28" name="Rectangle 27"/>
           <p:cNvSpPr/>
           <p:nvPr/>
         </p:nvSpPr>
         <p:spPr>
           <a:xfrm>
-            <a:off x="320040" y="2176272"/>
+            <a:off x="320040" y="5212080"/>
             <a:ext cx="1097280" cy="694944"/>
           </a:xfrm>
           <a:prstGeom prst="rect">
             <a:avLst/>
           </a:prstGeom>
           <a:solidFill>
-            <a:srgbClr val="1B3A72"/>
+            <a:schemeClr val="accent3">
+              <a:lumMod val="50000"/>
+            </a:schemeClr>
           </a:solidFill>
           <a:ln>
             <a:noFill/>
@@ -4933,13 +10878,13 @@
       </p:sp>
       <p:sp>
         <p:nvSpPr>
-          <p:cNvPr id="13" name="TextBox 12"/>
+          <p:cNvPr id="29" name="TextBox 28"/>
           <p:cNvSpPr txBox="1"/>
           <p:nvPr/>
         </p:nvSpPr>
         <p:spPr>
           <a:xfrm>
-            <a:off x="347472" y="2359152"/>
+            <a:off x="347472" y="5394960"/>
             <a:ext cx="1042415" cy="347472"/>
           </a:xfrm>
           <a:prstGeom prst="rect">
@@ -4955,26 +10900,26 @@
           <a:p>
             <a:pPr algn="ctr"/>
             <a:r>
-              <a:rPr sz="1100" b="1" i="0">
+              <a:rPr sz="1100" b="1" i="0" dirty="0">
                 <a:solidFill>
                   <a:srgbClr val="FFFFFF"/>
                 </a:solidFill>
                 <a:latin typeface="Calibri"/>
               </a:rPr>
-              <a:t>Regression</a:t>
-            </a:r>
-          </a:p>
-        </p:txBody>
-      </p:sp>
-      <p:sp>
-        <p:nvSpPr>
-          <p:cNvPr id="14" name="Rectangle 13"/>
+              <a:t>This deck</a:t>
+            </a:r>
+          </a:p>
+        </p:txBody>
+      </p:sp>
+      <p:sp>
+        <p:nvSpPr>
+          <p:cNvPr id="30" name="Rectangle 29"/>
           <p:cNvSpPr/>
           <p:nvPr/>
         </p:nvSpPr>
         <p:spPr>
           <a:xfrm>
-            <a:off x="1417320" y="2176272"/>
+            <a:off x="1417320" y="5212080"/>
             <a:ext cx="4480560" cy="694944"/>
           </a:xfrm>
           <a:prstGeom prst="rect">
@@ -5012,13 +10957,13 @@
       </p:sp>
       <p:sp>
         <p:nvSpPr>
-          <p:cNvPr id="15" name="TextBox 14"/>
+          <p:cNvPr id="31" name="TextBox 30"/>
           <p:cNvSpPr txBox="1"/>
           <p:nvPr/>
         </p:nvSpPr>
         <p:spPr>
           <a:xfrm>
-            <a:off x="1536192" y="2340864"/>
+            <a:off x="1536192" y="5376672"/>
             <a:ext cx="4297680" cy="457200"/>
           </a:xfrm>
           <a:prstGeom prst="rect">
@@ -5040,65 +10985,27 @@
                 </a:solidFill>
                 <a:latin typeface="Calibri"/>
               </a:rPr>
-              <a:t>✓  β₁ = −6.02** — stablecoin growth compresses OIS–Treasury spreads (privilege amplification)</a:t>
-            </a:r>
-          </a:p>
-        </p:txBody>
-      </p:sp>
-      <p:sp>
-        <p:nvSpPr>
-          <p:cNvPr id="16" name="Rectangle 15"/>
-          <p:cNvSpPr/>
-          <p:nvPr/>
-        </p:nvSpPr>
-        <p:spPr>
-          <a:xfrm>
-            <a:off x="320040" y="2935224"/>
-            <a:ext cx="1097280" cy="694944"/>
-          </a:xfrm>
-          <a:prstGeom prst="rect">
-            <a:avLst/>
-          </a:prstGeom>
-          <a:solidFill>
-            <a:srgbClr val="1B3A72"/>
-          </a:solidFill>
-          <a:ln>
-            <a:noFill/>
-          </a:ln>
-        </p:spPr>
-        <p:style>
-          <a:lnRef idx="1">
-            <a:schemeClr val="accent1"/>
-          </a:lnRef>
-          <a:fillRef idx="3">
-            <a:schemeClr val="accent1"/>
-          </a:fillRef>
-          <a:effectRef idx="2">
-            <a:schemeClr val="accent1"/>
-          </a:effectRef>
-          <a:fontRef idx="minor">
-            <a:schemeClr val="lt1"/>
-          </a:fontRef>
-        </p:style>
-        <p:txBody>
-          <a:bodyPr rtlCol="0" anchor="ctr"/>
-          <a:lstStyle/>
-          <a:p>
-            <a:pPr algn="ctr"/>
-            <a:endParaRPr/>
-          </a:p>
-        </p:txBody>
-      </p:sp>
-      <p:sp>
-        <p:nvSpPr>
-          <p:cNvPr id="17" name="TextBox 16"/>
+              <a:t>✓  Clarified: why OIS spread, what the buffer condition means, how to read CAR, what each event was</a:t>
+            </a:r>
+          </a:p>
+        </p:txBody>
+      </p:sp>
+      <p:sp>
+        <p:nvSpPr>
+          <p:cNvPr id="36" name="TextBox 35">
+            <a:extLst>
+              <a:ext uri="{FF2B5EF4-FFF2-40B4-BE49-F238E27FC236}">
+                <a16:creationId xmlns:a16="http://schemas.microsoft.com/office/drawing/2014/main" id="{852AE728-87E7-E37C-DFB0-EA501EEBFB43}"/>
+              </a:ext>
+            </a:extLst>
+          </p:cNvPr>
           <p:cNvSpPr txBox="1"/>
           <p:nvPr/>
         </p:nvSpPr>
         <p:spPr>
           <a:xfrm>
-            <a:off x="347472" y="3118104"/>
-            <a:ext cx="1042415" cy="347472"/>
+            <a:off x="10265434" y="320040"/>
+            <a:ext cx="1576046" cy="323165"/>
           </a:xfrm>
           <a:prstGeom prst="rect">
             <a:avLst/>
@@ -5111,901 +11018,22 @@
           </a:bodyPr>
           <a:lstStyle/>
           <a:p>
-            <a:pPr algn="ctr"/>
-            <a:r>
-              <a:rPr sz="1100" b="1" i="0">
+            <a:pPr algn="l"/>
+            <a:r>
+              <a:rPr lang="en-US" sz="1500" b="1" i="0" dirty="0">
                 <a:solidFill>
                   <a:srgbClr val="FFFFFF"/>
                 </a:solidFill>
                 <a:latin typeface="Calibri"/>
               </a:rPr>
-              <a:t>Threshold</a:t>
-            </a:r>
-          </a:p>
-        </p:txBody>
-      </p:sp>
-      <p:sp>
-        <p:nvSpPr>
-          <p:cNvPr id="18" name="Rectangle 17"/>
-          <p:cNvSpPr/>
-          <p:nvPr/>
-        </p:nvSpPr>
-        <p:spPr>
-          <a:xfrm>
-            <a:off x="1417320" y="2935224"/>
-            <a:ext cx="4480560" cy="694944"/>
-          </a:xfrm>
-          <a:prstGeom prst="rect">
-            <a:avLst/>
-          </a:prstGeom>
-          <a:solidFill>
-            <a:srgbClr val="F0F4F8"/>
-          </a:solidFill>
-          <a:ln>
-            <a:noFill/>
-          </a:ln>
-        </p:spPr>
-        <p:style>
-          <a:lnRef idx="1">
-            <a:schemeClr val="accent1"/>
-          </a:lnRef>
-          <a:fillRef idx="3">
-            <a:schemeClr val="accent1"/>
-          </a:fillRef>
-          <a:effectRef idx="2">
-            <a:schemeClr val="accent1"/>
-          </a:effectRef>
-          <a:fontRef idx="minor">
-            <a:schemeClr val="lt1"/>
-          </a:fontRef>
-        </p:style>
-        <p:txBody>
-          <a:bodyPr rtlCol="0" anchor="ctr"/>
-          <a:lstStyle/>
-          <a:p>
-            <a:pPr algn="ctr"/>
-            <a:endParaRPr/>
-          </a:p>
-        </p:txBody>
-      </p:sp>
-      <p:sp>
-        <p:nvSpPr>
-          <p:cNvPr id="19" name="TextBox 18"/>
-          <p:cNvSpPr txBox="1"/>
-          <p:nvPr/>
-        </p:nvSpPr>
-        <p:spPr>
-          <a:xfrm>
-            <a:off x="1536192" y="3099816"/>
-            <a:ext cx="4297680" cy="457200"/>
-          </a:xfrm>
-          <a:prstGeom prst="rect">
-            <a:avLst/>
-          </a:prstGeom>
-          <a:noFill/>
-        </p:spPr>
-        <p:txBody>
-          <a:bodyPr wrap="square">
-            <a:spAutoFit/>
-          </a:bodyPr>
-          <a:lstStyle/>
-          <a:p>
-            <a:pPr algn="l"/>
-            <a:r>
-              <a:rPr sz="1200" b="0" i="0" dirty="0">
-                <a:solidFill>
-                  <a:srgbClr val="1A1A2E"/>
-                </a:solidFill>
-                <a:latin typeface="Calibri"/>
-              </a:rPr>
-              <a:t>✓  Hansen (2000) threshold at q* = 13% liquid cash — separates safe from fragile regime</a:t>
-            </a:r>
-          </a:p>
-        </p:txBody>
-      </p:sp>
-      <p:sp>
-        <p:nvSpPr>
-          <p:cNvPr id="20" name="Rectangle 19"/>
-          <p:cNvSpPr/>
-          <p:nvPr/>
-        </p:nvSpPr>
-        <p:spPr>
-          <a:xfrm>
-            <a:off x="320040" y="3694176"/>
-            <a:ext cx="1097280" cy="694944"/>
-          </a:xfrm>
-          <a:prstGeom prst="rect">
-            <a:avLst/>
-          </a:prstGeom>
-          <a:solidFill>
-            <a:srgbClr val="1B3A72"/>
-          </a:solidFill>
-          <a:ln>
-            <a:noFill/>
-          </a:ln>
-        </p:spPr>
-        <p:style>
-          <a:lnRef idx="1">
-            <a:schemeClr val="accent1"/>
-          </a:lnRef>
-          <a:fillRef idx="3">
-            <a:schemeClr val="accent1"/>
-          </a:fillRef>
-          <a:effectRef idx="2">
-            <a:schemeClr val="accent1"/>
-          </a:effectRef>
-          <a:fontRef idx="minor">
-            <a:schemeClr val="lt1"/>
-          </a:fontRef>
-        </p:style>
-        <p:txBody>
-          <a:bodyPr rtlCol="0" anchor="ctr"/>
-          <a:lstStyle/>
-          <a:p>
-            <a:pPr algn="ctr"/>
-            <a:endParaRPr/>
-          </a:p>
-        </p:txBody>
-      </p:sp>
-      <p:sp>
-        <p:nvSpPr>
-          <p:cNvPr id="21" name="TextBox 20"/>
-          <p:cNvSpPr txBox="1"/>
-          <p:nvPr/>
-        </p:nvSpPr>
-        <p:spPr>
-          <a:xfrm>
-            <a:off x="347472" y="3877056"/>
-            <a:ext cx="1042415" cy="347472"/>
-          </a:xfrm>
-          <a:prstGeom prst="rect">
-            <a:avLst/>
-          </a:prstGeom>
-          <a:noFill/>
-        </p:spPr>
-        <p:txBody>
-          <a:bodyPr wrap="square">
-            <a:spAutoFit/>
-          </a:bodyPr>
-          <a:lstStyle/>
-          <a:p>
-            <a:pPr algn="ctr"/>
-            <a:r>
-              <a:rPr sz="1100" b="1" i="0">
-                <a:solidFill>
-                  <a:srgbClr val="FFFFFF"/>
-                </a:solidFill>
-                <a:latin typeface="Calibri"/>
-              </a:rPr>
-              <a:t>Event Study</a:t>
-            </a:r>
-          </a:p>
-        </p:txBody>
-      </p:sp>
-      <p:sp>
-        <p:nvSpPr>
-          <p:cNvPr id="22" name="Rectangle 21"/>
-          <p:cNvSpPr/>
-          <p:nvPr/>
-        </p:nvSpPr>
-        <p:spPr>
-          <a:xfrm>
-            <a:off x="1417320" y="3694176"/>
-            <a:ext cx="4480560" cy="694944"/>
-          </a:xfrm>
-          <a:prstGeom prst="rect">
-            <a:avLst/>
-          </a:prstGeom>
-          <a:solidFill>
-            <a:srgbClr val="FFFFFF"/>
-          </a:solidFill>
-          <a:ln>
-            <a:noFill/>
-          </a:ln>
-        </p:spPr>
-        <p:style>
-          <a:lnRef idx="1">
-            <a:schemeClr val="accent1"/>
-          </a:lnRef>
-          <a:fillRef idx="3">
-            <a:schemeClr val="accent1"/>
-          </a:fillRef>
-          <a:effectRef idx="2">
-            <a:schemeClr val="accent1"/>
-          </a:effectRef>
-          <a:fontRef idx="minor">
-            <a:schemeClr val="lt1"/>
-          </a:fontRef>
-        </p:style>
-        <p:txBody>
-          <a:bodyPr rtlCol="0" anchor="ctr"/>
-          <a:lstStyle/>
-          <a:p>
-            <a:pPr algn="ctr"/>
-            <a:endParaRPr/>
-          </a:p>
-        </p:txBody>
-      </p:sp>
-      <p:sp>
-        <p:nvSpPr>
-          <p:cNvPr id="23" name="TextBox 22"/>
-          <p:cNvSpPr txBox="1"/>
-          <p:nvPr/>
-        </p:nvSpPr>
-        <p:spPr>
-          <a:xfrm>
-            <a:off x="1536192" y="3858768"/>
-            <a:ext cx="4297680" cy="457200"/>
-          </a:xfrm>
-          <a:prstGeom prst="rect">
-            <a:avLst/>
-          </a:prstGeom>
-          <a:noFill/>
-        </p:spPr>
-        <p:txBody>
-          <a:bodyPr wrap="square">
-            <a:spAutoFit/>
-          </a:bodyPr>
-          <a:lstStyle/>
-          <a:p>
-            <a:pPr algn="l"/>
-            <a:r>
-              <a:rPr sz="1200" b="0" i="0" dirty="0">
-                <a:solidFill>
-                  <a:srgbClr val="1A1A2E"/>
-                </a:solidFill>
-                <a:latin typeface="Calibri"/>
-              </a:rPr>
-              <a:t>✓  3 stress episodes (LUNA, USDT </a:t>
-            </a:r>
-            <a:r>
-              <a:rPr sz="1200" b="0" i="0" dirty="0" err="1">
-                <a:solidFill>
-                  <a:srgbClr val="1A1A2E"/>
-                </a:solidFill>
-                <a:latin typeface="Calibri"/>
-              </a:rPr>
-              <a:t>depeg</a:t>
-            </a:r>
-            <a:r>
-              <a:rPr sz="1200" b="0" i="0" dirty="0">
-                <a:solidFill>
-                  <a:srgbClr val="1A1A2E"/>
-                </a:solidFill>
-                <a:latin typeface="Calibri"/>
-              </a:rPr>
-              <a:t>, SVB) — 27 pp CAR swing between low/high buffer regimes</a:t>
-            </a:r>
-          </a:p>
-        </p:txBody>
-      </p:sp>
-      <p:sp>
-        <p:nvSpPr>
-          <p:cNvPr id="24" name="Rectangle 23"/>
-          <p:cNvSpPr/>
-          <p:nvPr/>
-        </p:nvSpPr>
-        <p:spPr>
-          <a:xfrm>
-            <a:off x="320040" y="4453128"/>
-            <a:ext cx="1097280" cy="694944"/>
-          </a:xfrm>
-          <a:prstGeom prst="rect">
-            <a:avLst/>
-          </a:prstGeom>
-          <a:solidFill>
-            <a:srgbClr val="1B3A72"/>
-          </a:solidFill>
-          <a:ln>
-            <a:noFill/>
-          </a:ln>
-        </p:spPr>
-        <p:style>
-          <a:lnRef idx="1">
-            <a:schemeClr val="accent1"/>
-          </a:lnRef>
-          <a:fillRef idx="3">
-            <a:schemeClr val="accent1"/>
-          </a:fillRef>
-          <a:effectRef idx="2">
-            <a:schemeClr val="accent1"/>
-          </a:effectRef>
-          <a:fontRef idx="minor">
-            <a:schemeClr val="lt1"/>
-          </a:fontRef>
-        </p:style>
-        <p:txBody>
-          <a:bodyPr rtlCol="0" anchor="ctr"/>
-          <a:lstStyle/>
-          <a:p>
-            <a:pPr algn="ctr"/>
-            <a:endParaRPr/>
-          </a:p>
-        </p:txBody>
-      </p:sp>
-      <p:sp>
-        <p:nvSpPr>
-          <p:cNvPr id="25" name="TextBox 24"/>
-          <p:cNvSpPr txBox="1"/>
-          <p:nvPr/>
-        </p:nvSpPr>
-        <p:spPr>
-          <a:xfrm>
-            <a:off x="347472" y="4636008"/>
-            <a:ext cx="1042415" cy="347472"/>
-          </a:xfrm>
-          <a:prstGeom prst="rect">
-            <a:avLst/>
-          </a:prstGeom>
-          <a:noFill/>
-        </p:spPr>
-        <p:txBody>
-          <a:bodyPr wrap="square">
-            <a:spAutoFit/>
-          </a:bodyPr>
-          <a:lstStyle/>
-          <a:p>
-            <a:pPr algn="ctr"/>
-            <a:r>
-              <a:rPr sz="1100" b="1" i="0">
-                <a:solidFill>
-                  <a:srgbClr val="FFFFFF"/>
-                </a:solidFill>
-                <a:latin typeface="Calibri"/>
-              </a:rPr>
-              <a:t>Robustness</a:t>
-            </a:r>
-          </a:p>
-        </p:txBody>
-      </p:sp>
-      <p:sp>
-        <p:nvSpPr>
-          <p:cNvPr id="26" name="Rectangle 25"/>
-          <p:cNvSpPr/>
-          <p:nvPr/>
-        </p:nvSpPr>
-        <p:spPr>
-          <a:xfrm>
-            <a:off x="1417320" y="4453128"/>
-            <a:ext cx="4480560" cy="694944"/>
-          </a:xfrm>
-          <a:prstGeom prst="rect">
-            <a:avLst/>
-          </a:prstGeom>
-          <a:solidFill>
-            <a:srgbClr val="F0F4F8"/>
-          </a:solidFill>
-          <a:ln>
-            <a:noFill/>
-          </a:ln>
-        </p:spPr>
-        <p:style>
-          <a:lnRef idx="1">
-            <a:schemeClr val="accent1"/>
-          </a:lnRef>
-          <a:fillRef idx="3">
-            <a:schemeClr val="accent1"/>
-          </a:fillRef>
-          <a:effectRef idx="2">
-            <a:schemeClr val="accent1"/>
-          </a:effectRef>
-          <a:fontRef idx="minor">
-            <a:schemeClr val="lt1"/>
-          </a:fontRef>
-        </p:style>
-        <p:txBody>
-          <a:bodyPr rtlCol="0" anchor="ctr"/>
-          <a:lstStyle/>
-          <a:p>
-            <a:pPr algn="ctr"/>
-            <a:endParaRPr/>
-          </a:p>
-        </p:txBody>
-      </p:sp>
-      <p:sp>
-        <p:nvSpPr>
-          <p:cNvPr id="27" name="TextBox 26"/>
-          <p:cNvSpPr txBox="1"/>
-          <p:nvPr/>
-        </p:nvSpPr>
-        <p:spPr>
-          <a:xfrm>
-            <a:off x="1536192" y="4617720"/>
-            <a:ext cx="4297680" cy="457200"/>
-          </a:xfrm>
-          <a:prstGeom prst="rect">
-            <a:avLst/>
-          </a:prstGeom>
-          <a:noFill/>
-        </p:spPr>
-        <p:txBody>
-          <a:bodyPr wrap="square">
-            <a:spAutoFit/>
-          </a:bodyPr>
-          <a:lstStyle/>
-          <a:p>
-            <a:pPr algn="l"/>
-            <a:r>
-              <a:rPr sz="1200" b="0" i="0">
-                <a:solidFill>
-                  <a:srgbClr val="1A1A2E"/>
-                </a:solidFill>
-                <a:latin typeface="Calibri"/>
-              </a:rPr>
-              <a:t>✓  Mean-centering (VIF), Engle-Granger cointegration, first-differenced spec, post-2023 subsample</a:t>
-            </a:r>
-          </a:p>
-        </p:txBody>
-      </p:sp>
-      <p:sp>
-        <p:nvSpPr>
-          <p:cNvPr id="28" name="Rectangle 27"/>
-          <p:cNvSpPr/>
-          <p:nvPr/>
-        </p:nvSpPr>
-        <p:spPr>
-          <a:xfrm>
-            <a:off x="320040" y="5212080"/>
-            <a:ext cx="1097280" cy="694944"/>
-          </a:xfrm>
-          <a:prstGeom prst="rect">
-            <a:avLst/>
-          </a:prstGeom>
-          <a:solidFill>
-            <a:srgbClr val="1B3A72"/>
-          </a:solidFill>
-          <a:ln>
-            <a:noFill/>
-          </a:ln>
-        </p:spPr>
-        <p:style>
-          <a:lnRef idx="1">
-            <a:schemeClr val="accent1"/>
-          </a:lnRef>
-          <a:fillRef idx="3">
-            <a:schemeClr val="accent1"/>
-          </a:fillRef>
-          <a:effectRef idx="2">
-            <a:schemeClr val="accent1"/>
-          </a:effectRef>
-          <a:fontRef idx="minor">
-            <a:schemeClr val="lt1"/>
-          </a:fontRef>
-        </p:style>
-        <p:txBody>
-          <a:bodyPr rtlCol="0" anchor="ctr"/>
-          <a:lstStyle/>
-          <a:p>
-            <a:pPr algn="ctr"/>
-            <a:endParaRPr/>
-          </a:p>
-        </p:txBody>
-      </p:sp>
-      <p:sp>
-        <p:nvSpPr>
-          <p:cNvPr id="29" name="TextBox 28"/>
-          <p:cNvSpPr txBox="1"/>
-          <p:nvPr/>
-        </p:nvSpPr>
-        <p:spPr>
-          <a:xfrm>
-            <a:off x="347472" y="5394960"/>
-            <a:ext cx="1042415" cy="347472"/>
-          </a:xfrm>
-          <a:prstGeom prst="rect">
-            <a:avLst/>
-          </a:prstGeom>
-          <a:noFill/>
-        </p:spPr>
-        <p:txBody>
-          <a:bodyPr wrap="square">
-            <a:spAutoFit/>
-          </a:bodyPr>
-          <a:lstStyle/>
-          <a:p>
-            <a:pPr algn="ctr"/>
-            <a:r>
-              <a:rPr sz="1100" b="1" i="0">
-                <a:solidFill>
-                  <a:srgbClr val="FFFFFF"/>
-                </a:solidFill>
-                <a:latin typeface="Calibri"/>
-              </a:rPr>
-              <a:t>This deck</a:t>
-            </a:r>
-          </a:p>
-        </p:txBody>
-      </p:sp>
-      <p:sp>
-        <p:nvSpPr>
-          <p:cNvPr id="30" name="Rectangle 29"/>
-          <p:cNvSpPr/>
-          <p:nvPr/>
-        </p:nvSpPr>
-        <p:spPr>
-          <a:xfrm>
-            <a:off x="1417320" y="5212080"/>
-            <a:ext cx="4480560" cy="694944"/>
-          </a:xfrm>
-          <a:prstGeom prst="rect">
-            <a:avLst/>
-          </a:prstGeom>
-          <a:solidFill>
-            <a:srgbClr val="FFFFFF"/>
-          </a:solidFill>
-          <a:ln>
-            <a:noFill/>
-          </a:ln>
-        </p:spPr>
-        <p:style>
-          <a:lnRef idx="1">
-            <a:schemeClr val="accent1"/>
-          </a:lnRef>
-          <a:fillRef idx="3">
-            <a:schemeClr val="accent1"/>
-          </a:fillRef>
-          <a:effectRef idx="2">
-            <a:schemeClr val="accent1"/>
-          </a:effectRef>
-          <a:fontRef idx="minor">
-            <a:schemeClr val="lt1"/>
-          </a:fontRef>
-        </p:style>
-        <p:txBody>
-          <a:bodyPr rtlCol="0" anchor="ctr"/>
-          <a:lstStyle/>
-          <a:p>
-            <a:pPr algn="ctr"/>
-            <a:endParaRPr/>
-          </a:p>
-        </p:txBody>
-      </p:sp>
-      <p:sp>
-        <p:nvSpPr>
-          <p:cNvPr id="31" name="TextBox 30"/>
-          <p:cNvSpPr txBox="1"/>
-          <p:nvPr/>
-        </p:nvSpPr>
-        <p:spPr>
-          <a:xfrm>
-            <a:off x="1536192" y="5376672"/>
-            <a:ext cx="4297680" cy="457200"/>
-          </a:xfrm>
-          <a:prstGeom prst="rect">
-            <a:avLst/>
-          </a:prstGeom>
-          <a:noFill/>
-        </p:spPr>
-        <p:txBody>
-          <a:bodyPr wrap="square">
-            <a:spAutoFit/>
-          </a:bodyPr>
-          <a:lstStyle/>
-          <a:p>
-            <a:pPr algn="l"/>
-            <a:r>
-              <a:rPr sz="1200" b="0" i="0">
-                <a:solidFill>
-                  <a:srgbClr val="1A1A2E"/>
-                </a:solidFill>
-                <a:latin typeface="Calibri"/>
-              </a:rPr>
-              <a:t>✓  Clarified: why OIS spread, what the buffer condition means, how to read CAR, what each event was</a:t>
-            </a:r>
-          </a:p>
-        </p:txBody>
-      </p:sp>
-      <p:sp>
-        <p:nvSpPr>
-          <p:cNvPr id="32" name="Rectangle 31"/>
-          <p:cNvSpPr/>
-          <p:nvPr/>
-        </p:nvSpPr>
-        <p:spPr>
-          <a:xfrm>
-            <a:off x="6217920" y="960120"/>
-            <a:ext cx="5623560" cy="384048"/>
-          </a:xfrm>
-          <a:prstGeom prst="rect">
-            <a:avLst/>
-          </a:prstGeom>
-          <a:solidFill>
-            <a:srgbClr val="D4632A"/>
-          </a:solidFill>
-          <a:ln>
-            <a:noFill/>
-          </a:ln>
-        </p:spPr>
-        <p:style>
-          <a:lnRef idx="1">
-            <a:schemeClr val="accent1"/>
-          </a:lnRef>
-          <a:fillRef idx="3">
-            <a:schemeClr val="accent1"/>
-          </a:fillRef>
-          <a:effectRef idx="2">
-            <a:schemeClr val="accent1"/>
-          </a:effectRef>
-          <a:fontRef idx="minor">
-            <a:schemeClr val="lt1"/>
-          </a:fontRef>
-        </p:style>
-        <p:txBody>
-          <a:bodyPr rtlCol="0" anchor="ctr"/>
-          <a:lstStyle/>
-          <a:p>
-            <a:pPr algn="ctr"/>
-            <a:endParaRPr/>
-          </a:p>
-        </p:txBody>
-      </p:sp>
-      <p:sp>
-        <p:nvSpPr>
-          <p:cNvPr id="33" name="TextBox 32"/>
-          <p:cNvSpPr txBox="1"/>
-          <p:nvPr/>
-        </p:nvSpPr>
-        <p:spPr>
-          <a:xfrm>
-            <a:off x="6355080" y="987552"/>
-            <a:ext cx="5440680" cy="310896"/>
-          </a:xfrm>
-          <a:prstGeom prst="rect">
-            <a:avLst/>
-          </a:prstGeom>
-          <a:noFill/>
-        </p:spPr>
-        <p:txBody>
-          <a:bodyPr wrap="square">
-            <a:spAutoFit/>
-          </a:bodyPr>
-          <a:lstStyle/>
-          <a:p>
-            <a:pPr algn="l"/>
-            <a:r>
-              <a:rPr sz="1500" b="1" i="0">
-                <a:solidFill>
-                  <a:srgbClr val="FFFFFF"/>
-                </a:solidFill>
-                <a:latin typeface="Calibri"/>
-              </a:rPr>
-              <a:t>Planned for next week</a:t>
-            </a:r>
-          </a:p>
-        </p:txBody>
-      </p:sp>
-      <p:sp>
-        <p:nvSpPr>
-          <p:cNvPr id="34" name="Rectangle 33"/>
-          <p:cNvSpPr/>
-          <p:nvPr/>
-        </p:nvSpPr>
-        <p:spPr>
-          <a:xfrm>
-            <a:off x="6217920" y="1417320"/>
-            <a:ext cx="5623560" cy="5212080"/>
-          </a:xfrm>
-          <a:prstGeom prst="rect">
-            <a:avLst/>
-          </a:prstGeom>
-          <a:solidFill>
-            <a:srgbClr val="FFF5EE"/>
-          </a:solidFill>
-          <a:ln>
-            <a:noFill/>
-          </a:ln>
-        </p:spPr>
-        <p:style>
-          <a:lnRef idx="1">
-            <a:schemeClr val="accent1"/>
-          </a:lnRef>
-          <a:fillRef idx="3">
-            <a:schemeClr val="accent1"/>
-          </a:fillRef>
-          <a:effectRef idx="2">
-            <a:schemeClr val="accent1"/>
-          </a:effectRef>
-          <a:fontRef idx="minor">
-            <a:schemeClr val="lt1"/>
-          </a:fontRef>
-        </p:style>
-        <p:txBody>
-          <a:bodyPr rtlCol="0" anchor="ctr"/>
-          <a:lstStyle/>
-          <a:p>
-            <a:pPr algn="ctr"/>
-            <a:endParaRPr/>
-          </a:p>
-        </p:txBody>
-      </p:sp>
-      <p:sp>
-        <p:nvSpPr>
-          <p:cNvPr id="35" name="TextBox 34"/>
-          <p:cNvSpPr txBox="1"/>
-          <p:nvPr/>
-        </p:nvSpPr>
-        <p:spPr>
-          <a:xfrm>
-            <a:off x="6400800" y="1508760"/>
-            <a:ext cx="5303520" cy="5029200"/>
-          </a:xfrm>
-          <a:prstGeom prst="rect">
-            <a:avLst/>
-          </a:prstGeom>
-          <a:noFill/>
-        </p:spPr>
-        <p:txBody>
-          <a:bodyPr wrap="square">
-            <a:spAutoFit/>
-          </a:bodyPr>
-          <a:lstStyle/>
-          <a:p>
-            <a:pPr>
-              <a:spcBef>
-                <a:spcPts val="0"/>
-              </a:spcBef>
-            </a:pPr>
-            <a:endParaRPr dirty="0"/>
-          </a:p>
-          <a:p>
-            <a:pPr algn="l">
-              <a:spcBef>
-                <a:spcPts val="400"/>
-              </a:spcBef>
-            </a:pPr>
-            <a:r>
-              <a:rPr sz="1600" b="1" i="0" dirty="0">
-                <a:solidFill>
-                  <a:srgbClr val="D4632A"/>
-                </a:solidFill>
-                <a:latin typeface="Calibri"/>
-              </a:rPr>
-              <a:t>Placebo Test</a:t>
-            </a:r>
-          </a:p>
-          <a:p>
-            <a:pPr algn="l">
-              <a:spcBef>
-                <a:spcPts val="800"/>
-              </a:spcBef>
-            </a:pPr>
-            <a:r>
-              <a:rPr sz="1300" b="0" i="0" dirty="0">
-                <a:solidFill>
-                  <a:srgbClr val="1A1A2E"/>
-                </a:solidFill>
-                <a:latin typeface="Calibri"/>
-              </a:rPr>
-              <a:t>Run the same event study methodology on 3 ordinary days with no known stablecoin stress event:</a:t>
-            </a:r>
-          </a:p>
-          <a:p>
-            <a:pPr algn="l">
-              <a:spcBef>
-                <a:spcPts val="700"/>
-              </a:spcBef>
-            </a:pPr>
-            <a:r>
-              <a:rPr sz="1200" b="0" i="0" dirty="0">
-                <a:solidFill>
-                  <a:srgbClr val="1A1A2E"/>
-                </a:solidFill>
-                <a:latin typeface="Calibri"/>
-              </a:rPr>
-              <a:t>❖  Jun 15, 2021  (Low buffer)  —  Quiet summer — no redemption pressure</a:t>
-            </a:r>
-          </a:p>
-          <a:p>
-            <a:pPr algn="l">
-              <a:spcBef>
-                <a:spcPts val="700"/>
-              </a:spcBef>
-            </a:pPr>
-            <a:r>
-              <a:rPr sz="1200" b="0" i="0" dirty="0">
-                <a:solidFill>
-                  <a:srgbClr val="1A1A2E"/>
-                </a:solidFill>
-                <a:latin typeface="Calibri"/>
-              </a:rPr>
-              <a:t>❖  Oct 12, 2021  (Low buffer)  —  Pre-LUNA, no crypto-specific stress</a:t>
-            </a:r>
-          </a:p>
-          <a:p>
-            <a:pPr algn="l">
-              <a:spcBef>
-                <a:spcPts val="700"/>
-              </a:spcBef>
-            </a:pPr>
-            <a:r>
-              <a:rPr sz="1200" b="0" i="0" dirty="0">
-                <a:solidFill>
-                  <a:srgbClr val="1A1A2E"/>
-                </a:solidFill>
-                <a:latin typeface="Calibri"/>
-              </a:rPr>
-              <a:t>❖  Jul 15, 2025  (High buffer)  —  Post-SVB recovery, stable spread period</a:t>
-            </a:r>
-          </a:p>
-          <a:p>
-            <a:pPr algn="l">
-              <a:spcBef>
-                <a:spcPts val="200"/>
-              </a:spcBef>
-            </a:pPr>
-            <a:r>
-              <a:rPr sz="600" b="0" i="0" dirty="0">
-                <a:solidFill>
-                  <a:srgbClr val="1A1A2E"/>
-                </a:solidFill>
-                <a:latin typeface="Calibri"/>
-              </a:rPr>
-              <a:t> </a:t>
-            </a:r>
-          </a:p>
-          <a:p>
-            <a:pPr algn="l">
-              <a:spcBef>
-                <a:spcPts val="400"/>
-              </a:spcBef>
-            </a:pPr>
-            <a:r>
-              <a:rPr sz="1400" b="1" i="0" dirty="0">
-                <a:solidFill>
-                  <a:srgbClr val="1B3A72"/>
-                </a:solidFill>
-                <a:latin typeface="Calibri"/>
-              </a:rPr>
-              <a:t>What we expect to show:</a:t>
-            </a:r>
-          </a:p>
-          <a:p>
-            <a:pPr algn="l">
-              <a:spcBef>
-                <a:spcPts val="600"/>
-              </a:spcBef>
-            </a:pPr>
-            <a:r>
-              <a:rPr sz="1300" b="0" i="0" dirty="0">
-                <a:solidFill>
-                  <a:srgbClr val="1A1A2E"/>
-                </a:solidFill>
-                <a:latin typeface="Calibri"/>
-              </a:rPr>
-              <a:t>CARs on placebo days should be near 0 pp — confirming that the 9–18 pp swings in actual events are caused by the crisis itself, not by random market drift.</a:t>
-            </a:r>
-          </a:p>
-          <a:p>
-            <a:pPr algn="l">
-              <a:spcBef>
-                <a:spcPts val="200"/>
-              </a:spcBef>
-            </a:pPr>
-            <a:r>
-              <a:rPr sz="600" b="0" i="0" dirty="0">
-                <a:solidFill>
-                  <a:srgbClr val="1A1A2E"/>
-                </a:solidFill>
-                <a:latin typeface="Calibri"/>
-              </a:rPr>
-              <a:t> </a:t>
-            </a:r>
-          </a:p>
-          <a:p>
-            <a:pPr algn="l">
-              <a:spcBef>
-                <a:spcPts val="400"/>
-              </a:spcBef>
-            </a:pPr>
-            <a:r>
-              <a:rPr sz="1200" b="1" i="1" dirty="0">
-                <a:solidFill>
-                  <a:srgbClr val="D4632A"/>
-                </a:solidFill>
-                <a:latin typeface="Calibri"/>
-              </a:rPr>
-              <a:t>Preliminary result: placebo mean |CAR| = 0.55 pp vs. actual mean |CAR| = 11.92 pp  →  21.7× difference</a:t>
-            </a:r>
+              <a:t>Baptiste– Page 2</a:t>
+            </a:r>
+            <a:endParaRPr sz="1500" b="1" i="0" dirty="0">
+              <a:solidFill>
+                <a:srgbClr val="FFFFFF"/>
+              </a:solidFill>
+              <a:latin typeface="Calibri"/>
+            </a:endParaRPr>
           </a:p>
         </p:txBody>
       </p:sp>
@@ -6358,7 +11386,7 @@
         </p:nvSpPr>
         <p:spPr>
           <a:xfrm>
-            <a:off x="393192" y="1764792"/>
+            <a:off x="1581912" y="1559200"/>
             <a:ext cx="3611880" cy="201168"/>
           </a:xfrm>
           <a:prstGeom prst="rect">
@@ -6374,7 +11402,7 @@
           <a:p>
             <a:pPr algn="l"/>
             <a:r>
-              <a:rPr sz="1100" b="0" i="1">
+              <a:rPr sz="1100" b="0" i="1" dirty="0">
                 <a:solidFill>
                   <a:srgbClr val="FFFFFF"/>
                 </a:solidFill>
@@ -6611,7 +11639,7 @@
         </p:nvSpPr>
         <p:spPr>
           <a:xfrm>
-            <a:off x="4325112" y="1764792"/>
+            <a:off x="5193792" y="1543861"/>
             <a:ext cx="3611880" cy="201168"/>
           </a:xfrm>
           <a:prstGeom prst="rect">
@@ -6627,7 +11655,7 @@
           <a:p>
             <a:pPr algn="l"/>
             <a:r>
-              <a:rPr sz="1100" b="0" i="1">
+              <a:rPr sz="1100" b="0" i="1" dirty="0">
                 <a:solidFill>
                   <a:srgbClr val="FFFFFF"/>
                 </a:solidFill>
@@ -6864,7 +11892,7 @@
         </p:nvSpPr>
         <p:spPr>
           <a:xfrm>
-            <a:off x="8257032" y="1764792"/>
+            <a:off x="9761220" y="1555070"/>
             <a:ext cx="3611880" cy="201168"/>
           </a:xfrm>
           <a:prstGeom prst="rect">
@@ -6880,7 +11908,7 @@
           <a:p>
             <a:pPr algn="l"/>
             <a:r>
-              <a:rPr sz="1100" b="0" i="1">
+              <a:rPr sz="1100" b="0" i="1" dirty="0">
                 <a:solidFill>
                   <a:srgbClr val="FFFFFF"/>
                 </a:solidFill>
@@ -7038,8 +12066,8 @@
         </p:nvSpPr>
         <p:spPr>
           <a:xfrm>
-            <a:off x="320040" y="4160520"/>
-            <a:ext cx="11521440" cy="347472"/>
+            <a:off x="320039" y="4187952"/>
+            <a:ext cx="11612879" cy="320040"/>
           </a:xfrm>
           <a:prstGeom prst="rect">
             <a:avLst/>
@@ -7198,7 +12226,7 @@
         <p:spPr>
           <a:xfrm>
             <a:off x="429768" y="5010912"/>
-            <a:ext cx="3547872" cy="804672"/>
+            <a:ext cx="3547872" cy="430887"/>
           </a:xfrm>
           <a:prstGeom prst="rect">
             <a:avLst/>
@@ -7219,7 +12247,16 @@
                 </a:solidFill>
                 <a:latin typeface="Calibri"/>
               </a:rPr>
-              <a:t>JF — use T-bill spread to measure how much investors pay for Treasuries' safety and liquidity</a:t>
+              <a:t>JF — use T-bill spread to measure how much investors pay for Treasuries' </a:t>
+            </a:r>
+            <a:r>
+              <a:rPr sz="1100" b="1" i="0" dirty="0">
+                <a:solidFill>
+                  <a:srgbClr val="1A1A2E"/>
+                </a:solidFill>
+                <a:latin typeface="Calibri"/>
+              </a:rPr>
+              <a:t>safety and liquidity</a:t>
             </a:r>
           </a:p>
         </p:txBody>
@@ -7312,7 +12349,7 @@
         <p:spPr>
           <a:xfrm>
             <a:off x="4361688" y="5010912"/>
-            <a:ext cx="3547872" cy="804672"/>
+            <a:ext cx="3547872" cy="430887"/>
           </a:xfrm>
           <a:prstGeom prst="rect">
             <a:avLst/>
@@ -7333,7 +12370,25 @@
                 </a:solidFill>
                 <a:latin typeface="Calibri"/>
               </a:rPr>
-              <a:t>RFS — defines OIS–T-bill spread as the 'convenience yield' of near-money assets</a:t>
+              <a:t>RFS — defines OIS–T-bill spread as the </a:t>
+            </a:r>
+            <a:r>
+              <a:rPr sz="1100" b="1" i="0" dirty="0">
+                <a:solidFill>
+                  <a:srgbClr val="1A1A2E"/>
+                </a:solidFill>
+                <a:latin typeface="Calibri"/>
+              </a:rPr>
+              <a:t>'convenience yield' </a:t>
+            </a:r>
+            <a:r>
+              <a:rPr sz="1100" b="0" i="0" dirty="0">
+                <a:solidFill>
+                  <a:srgbClr val="1A1A2E"/>
+                </a:solidFill>
+                <a:latin typeface="Calibri"/>
+              </a:rPr>
+              <a:t>of near-money assets</a:t>
             </a:r>
           </a:p>
         </p:txBody>
@@ -7427,7 +12482,7 @@
         <p:spPr>
           <a:xfrm>
             <a:off x="8293608" y="5010912"/>
-            <a:ext cx="3547872" cy="804672"/>
+            <a:ext cx="3547872" cy="430887"/>
           </a:xfrm>
           <a:prstGeom prst="rect">
             <a:avLst/>
@@ -7448,7 +12503,16 @@
                 </a:solidFill>
                 <a:latin typeface="Calibri"/>
               </a:rPr>
-              <a:t>QJE — show T-bill spread captures special demand that is insensitive to monetary policy</a:t>
+              <a:t>QJE — show T-bill spread captures special demand that is </a:t>
+            </a:r>
+            <a:r>
+              <a:rPr sz="1100" b="1" i="0" dirty="0">
+                <a:solidFill>
+                  <a:srgbClr val="1A1A2E"/>
+                </a:solidFill>
+                <a:latin typeface="Calibri"/>
+              </a:rPr>
+              <a:t>insensitive to monetary policy</a:t>
             </a:r>
           </a:p>
         </p:txBody>
@@ -7529,6 +12593,53 @@
               </a:rPr>
               <a:t>When stablecoin issuers buy T-bills, T-bill yields fall but OIS does not move. Only the spread captures this demand shock. Raw yields would conflate it with Fed policy.</a:t>
             </a:r>
+          </a:p>
+        </p:txBody>
+      </p:sp>
+      <p:sp>
+        <p:nvSpPr>
+          <p:cNvPr id="36" name="TextBox 35">
+            <a:extLst>
+              <a:ext uri="{FF2B5EF4-FFF2-40B4-BE49-F238E27FC236}">
+                <a16:creationId xmlns:a16="http://schemas.microsoft.com/office/drawing/2014/main" id="{3DD24CF3-D03E-C15E-83E5-938335DB5079}"/>
+              </a:ext>
+            </a:extLst>
+          </p:cNvPr>
+          <p:cNvSpPr txBox="1"/>
+          <p:nvPr/>
+        </p:nvSpPr>
+        <p:spPr>
+          <a:xfrm>
+            <a:off x="10265434" y="320040"/>
+            <a:ext cx="1576046" cy="323165"/>
+          </a:xfrm>
+          <a:prstGeom prst="rect">
+            <a:avLst/>
+          </a:prstGeom>
+          <a:noFill/>
+        </p:spPr>
+        <p:txBody>
+          <a:bodyPr wrap="square">
+            <a:spAutoFit/>
+          </a:bodyPr>
+          <a:lstStyle/>
+          <a:p>
+            <a:pPr algn="l"/>
+            <a:r>
+              <a:rPr lang="en-US" sz="1500" b="1" i="0" dirty="0">
+                <a:solidFill>
+                  <a:srgbClr val="FFFFFF"/>
+                </a:solidFill>
+                <a:latin typeface="Calibri"/>
+              </a:rPr>
+              <a:t>Sara – Page 3</a:t>
+            </a:r>
+            <a:endParaRPr sz="1500" b="1" i="0" dirty="0">
+              <a:solidFill>
+                <a:srgbClr val="FFFFFF"/>
+              </a:solidFill>
+              <a:latin typeface="Calibri"/>
+            </a:endParaRPr>
           </a:p>
         </p:txBody>
       </p:sp>
@@ -8678,6 +13789,53 @@
           </a:p>
         </p:txBody>
       </p:sp>
+      <p:sp>
+        <p:nvSpPr>
+          <p:cNvPr id="26" name="TextBox 25">
+            <a:extLst>
+              <a:ext uri="{FF2B5EF4-FFF2-40B4-BE49-F238E27FC236}">
+                <a16:creationId xmlns:a16="http://schemas.microsoft.com/office/drawing/2014/main" id="{86242C36-8506-8BD3-9376-FFBAC7A88AE0}"/>
+              </a:ext>
+            </a:extLst>
+          </p:cNvPr>
+          <p:cNvSpPr txBox="1"/>
+          <p:nvPr/>
+        </p:nvSpPr>
+        <p:spPr>
+          <a:xfrm>
+            <a:off x="10265434" y="320040"/>
+            <a:ext cx="1576046" cy="323165"/>
+          </a:xfrm>
+          <a:prstGeom prst="rect">
+            <a:avLst/>
+          </a:prstGeom>
+          <a:noFill/>
+        </p:spPr>
+        <p:txBody>
+          <a:bodyPr wrap="square">
+            <a:spAutoFit/>
+          </a:bodyPr>
+          <a:lstStyle/>
+          <a:p>
+            <a:pPr algn="l"/>
+            <a:r>
+              <a:rPr lang="en-US" sz="1500" b="1" i="0" dirty="0">
+                <a:solidFill>
+                  <a:srgbClr val="FFFFFF"/>
+                </a:solidFill>
+                <a:latin typeface="Calibri"/>
+              </a:rPr>
+              <a:t>Sara – Page 4</a:t>
+            </a:r>
+            <a:endParaRPr sz="1500" b="1" i="0" dirty="0">
+              <a:solidFill>
+                <a:srgbClr val="FFFFFF"/>
+              </a:solidFill>
+              <a:latin typeface="Calibri"/>
+            </a:endParaRPr>
+          </a:p>
+        </p:txBody>
+      </p:sp>
     </p:spTree>
   </p:cSld>
   <p:clrMapOvr>
@@ -8815,7 +13973,7 @@
           <a:p>
             <a:pPr algn="l"/>
             <a:r>
-              <a:rPr sz="2600" b="0" i="0">
+              <a:rPr sz="2600" b="0" i="0" dirty="0">
                 <a:solidFill>
                   <a:srgbClr val="FFFFFF"/>
                 </a:solidFill>
@@ -9122,14 +14280,32 @@
           <a:p>
             <a:pPr algn="l"/>
             <a:r>
-              <a:rPr sz="1200" b="0" i="0">
+              <a:rPr sz="1200" b="0" i="0" dirty="0">
                 <a:solidFill>
                   <a:srgbClr val="1A1A2E"/>
                 </a:solidFill>
                 <a:latin typeface="Calibri"/>
               </a:rPr>
               <a:t>Using data from 120 to 6 trading days BEFORE the event, we run a regression:
-Spread = f(VIX, ΔlnN*)   →   this captures how the spread normally responds to market conditions.</a:t>
+Spread = f(VIX, </a:t>
+            </a:r>
+            <a:r>
+              <a:rPr sz="1200" b="0" i="0" dirty="0" err="1">
+                <a:solidFill>
+                  <a:srgbClr val="1A1A2E"/>
+                </a:solidFill>
+                <a:latin typeface="Calibri"/>
+              </a:rPr>
+              <a:t>ΔlnN</a:t>
+            </a:r>
+            <a:r>
+              <a:rPr sz="1200" b="0" i="0" dirty="0">
+                <a:solidFill>
+                  <a:srgbClr val="1A1A2E"/>
+                </a:solidFill>
+                <a:latin typeface="Calibri"/>
+              </a:rPr>
+              <a:t>*)   →   this captures how the spread normally responds to market conditions.</a:t>
             </a:r>
           </a:p>
         </p:txBody>
@@ -9941,6 +15117,71 @@
               </a:rPr>
               <a:t>Would mean the event had no effect — spread behaved exactly as the normal model predicted</a:t>
             </a:r>
+          </a:p>
+        </p:txBody>
+      </p:sp>
+      <p:sp>
+        <p:nvSpPr>
+          <p:cNvPr id="34" name="TextBox 33">
+            <a:extLst>
+              <a:ext uri="{FF2B5EF4-FFF2-40B4-BE49-F238E27FC236}">
+                <a16:creationId xmlns:a16="http://schemas.microsoft.com/office/drawing/2014/main" id="{4C8B6CFF-A31E-98B4-36BE-D0B969B98427}"/>
+              </a:ext>
+            </a:extLst>
+          </p:cNvPr>
+          <p:cNvSpPr txBox="1"/>
+          <p:nvPr/>
+        </p:nvSpPr>
+        <p:spPr>
+          <a:xfrm>
+            <a:off x="10265434" y="320040"/>
+            <a:ext cx="1576046" cy="323165"/>
+          </a:xfrm>
+          <a:prstGeom prst="rect">
+            <a:avLst/>
+          </a:prstGeom>
+          <a:noFill/>
+        </p:spPr>
+        <p:txBody>
+          <a:bodyPr wrap="square">
+            <a:spAutoFit/>
+          </a:bodyPr>
+          <a:lstStyle/>
+          <a:p>
+            <a:pPr algn="l"/>
+            <a:r>
+              <a:rPr lang="en-US" sz="1500" b="1" dirty="0">
+                <a:solidFill>
+                  <a:srgbClr val="FFFFFF"/>
+                </a:solidFill>
+                <a:latin typeface="Calibri"/>
+              </a:rPr>
+              <a:t>Oybek</a:t>
+            </a:r>
+            <a:r>
+              <a:rPr lang="en-US" sz="1500" b="1" i="0" dirty="0">
+                <a:solidFill>
+                  <a:srgbClr val="FFFFFF"/>
+                </a:solidFill>
+                <a:latin typeface="Calibri"/>
+              </a:rPr>
+              <a:t> – Page </a:t>
+            </a:r>
+            <a:r>
+              <a:rPr lang="en-US" sz="1500" b="1" dirty="0">
+                <a:solidFill>
+                  <a:srgbClr val="FFFFFF"/>
+                </a:solidFill>
+                <a:latin typeface="Calibri"/>
+              </a:rPr>
+              <a:t>5</a:t>
+            </a:r>
+            <a:endParaRPr sz="1500" b="1" i="0" dirty="0">
+              <a:solidFill>
+                <a:srgbClr val="FFFFFF"/>
+              </a:solidFill>
+              <a:latin typeface="Calibri"/>
+            </a:endParaRPr>
           </a:p>
         </p:txBody>
       </p:sp>
@@ -10312,7 +15553,7 @@
                 <a:spcPts val="0"/>
               </a:spcBef>
             </a:pPr>
-            <a:endParaRPr/>
+            <a:endParaRPr dirty="0"/>
           </a:p>
           <a:p>
             <a:pPr algn="l">
@@ -10321,7 +15562,7 @@
               </a:spcBef>
             </a:pPr>
             <a:r>
-              <a:rPr sz="1200" b="0" i="0">
+              <a:rPr sz="1200" b="0" i="0" dirty="0">
                 <a:solidFill>
                   <a:srgbClr val="1A1A2E"/>
                 </a:solidFill>
@@ -10337,7 +15578,7 @@
               </a:spcBef>
             </a:pPr>
             <a:r>
-              <a:rPr sz="1200" b="0" i="0">
+              <a:rPr sz="1200" b="0" i="0" dirty="0">
                 <a:solidFill>
                   <a:srgbClr val="1A1A2E"/>
                 </a:solidFill>
@@ -10353,7 +15594,7 @@
               </a:spcBef>
             </a:pPr>
             <a:r>
-              <a:rPr sz="1200" b="0" i="0">
+              <a:rPr sz="1200" b="0" i="0" dirty="0">
                 <a:solidFill>
                   <a:srgbClr val="1A1A2E"/>
                 </a:solidFill>
@@ -10369,7 +15610,7 @@
               </a:spcBef>
             </a:pPr>
             <a:r>
-              <a:rPr sz="1200" b="0" i="0">
+              <a:rPr sz="1200" b="0" i="0" dirty="0">
                 <a:solidFill>
                   <a:srgbClr val="1A1A2E"/>
                 </a:solidFill>
@@ -10385,7 +15626,7 @@
               </a:spcBef>
             </a:pPr>
             <a:r>
-              <a:rPr sz="1200" b="0" i="0">
+              <a:rPr sz="1200" b="0" i="0" dirty="0">
                 <a:solidFill>
                   <a:srgbClr val="1A1A2E"/>
                 </a:solidFill>
@@ -10401,7 +15642,7 @@
               </a:spcBef>
             </a:pPr>
             <a:r>
-              <a:rPr sz="1200" b="0" i="0">
+              <a:rPr sz="1200" b="0" i="0" dirty="0">
                 <a:solidFill>
                   <a:srgbClr val="1A1A2E"/>
                 </a:solidFill>
@@ -10518,7 +15759,7 @@
                 <a:spcPts val="0"/>
               </a:spcBef>
             </a:pPr>
-            <a:endParaRPr/>
+            <a:endParaRPr dirty="0"/>
           </a:p>
           <a:p>
             <a:pPr algn="l">
@@ -10527,7 +15768,7 @@
               </a:spcBef>
             </a:pPr>
             <a:r>
-              <a:rPr sz="1200" b="0" i="0">
+              <a:rPr sz="1200" b="0" i="0" dirty="0">
                 <a:solidFill>
                   <a:srgbClr val="AAC4E8"/>
                 </a:solidFill>
@@ -10543,7 +15784,7 @@
               </a:spcBef>
             </a:pPr>
             <a:r>
-              <a:rPr sz="1200" b="0" i="0">
+              <a:rPr sz="1200" b="0" i="0" dirty="0">
                 <a:solidFill>
                   <a:srgbClr val="AAC4E8"/>
                 </a:solidFill>
@@ -10559,7 +15800,7 @@
               </a:spcBef>
             </a:pPr>
             <a:r>
-              <a:rPr sz="1200" b="0" i="0">
+              <a:rPr sz="1200" b="0" i="0" dirty="0">
                 <a:solidFill>
                   <a:srgbClr val="AAC4E8"/>
                 </a:solidFill>
@@ -10575,7 +15816,7 @@
               </a:spcBef>
             </a:pPr>
             <a:r>
-              <a:rPr sz="1200" b="0" i="0">
+              <a:rPr sz="1200" b="0" i="0" dirty="0">
                 <a:solidFill>
                   <a:srgbClr val="FFD700"/>
                 </a:solidFill>
@@ -10591,7 +15832,7 @@
               </a:spcBef>
             </a:pPr>
             <a:r>
-              <a:rPr sz="1200" b="0" i="0">
+              <a:rPr sz="1200" b="0" i="0" dirty="0">
                 <a:solidFill>
                   <a:srgbClr val="FFD700"/>
                 </a:solidFill>
@@ -10607,7 +15848,7 @@
               </a:spcBef>
             </a:pPr>
             <a:r>
-              <a:rPr sz="1200" b="0" i="0">
+              <a:rPr sz="1200" b="0" i="0" dirty="0">
                 <a:solidFill>
                   <a:srgbClr val="FFD700"/>
                 </a:solidFill>
@@ -10694,6 +15935,53 @@
               </a:rPr>
               <a:t>This event confirms the forced-selling channel: Low buffer + redemption pressure = T-bill liquidation = spread spike.</a:t>
             </a:r>
+          </a:p>
+        </p:txBody>
+      </p:sp>
+      <p:sp>
+        <p:nvSpPr>
+          <p:cNvPr id="16" name="TextBox 15">
+            <a:extLst>
+              <a:ext uri="{FF2B5EF4-FFF2-40B4-BE49-F238E27FC236}">
+                <a16:creationId xmlns:a16="http://schemas.microsoft.com/office/drawing/2014/main" id="{B567729D-E6F6-59E5-374F-621FEDB0AD1E}"/>
+              </a:ext>
+            </a:extLst>
+          </p:cNvPr>
+          <p:cNvSpPr txBox="1"/>
+          <p:nvPr/>
+        </p:nvSpPr>
+        <p:spPr>
+          <a:xfrm>
+            <a:off x="10265434" y="320040"/>
+            <a:ext cx="1576046" cy="323165"/>
+          </a:xfrm>
+          <a:prstGeom prst="rect">
+            <a:avLst/>
+          </a:prstGeom>
+          <a:noFill/>
+        </p:spPr>
+        <p:txBody>
+          <a:bodyPr wrap="square">
+            <a:spAutoFit/>
+          </a:bodyPr>
+          <a:lstStyle/>
+          <a:p>
+            <a:pPr algn="l"/>
+            <a:r>
+              <a:rPr lang="en-US" sz="1500" b="1" i="0" dirty="0">
+                <a:solidFill>
+                  <a:srgbClr val="FFFFFF"/>
+                </a:solidFill>
+                <a:latin typeface="Calibri"/>
+              </a:rPr>
+              <a:t>Oybek – Page 6</a:t>
+            </a:r>
+            <a:endParaRPr sz="1500" b="1" i="0" dirty="0">
+              <a:solidFill>
+                <a:srgbClr val="FFFFFF"/>
+              </a:solidFill>
+              <a:latin typeface="Calibri"/>
+            </a:endParaRPr>
           </a:p>
         </p:txBody>
       </p:sp>
@@ -11450,6 +16738,62 @@
           </a:p>
         </p:txBody>
       </p:sp>
+      <p:sp>
+        <p:nvSpPr>
+          <p:cNvPr id="16" name="TextBox 15">
+            <a:extLst>
+              <a:ext uri="{FF2B5EF4-FFF2-40B4-BE49-F238E27FC236}">
+                <a16:creationId xmlns:a16="http://schemas.microsoft.com/office/drawing/2014/main" id="{7B1ED7BB-9D7B-A034-3539-C10A5562B5D4}"/>
+              </a:ext>
+            </a:extLst>
+          </p:cNvPr>
+          <p:cNvSpPr txBox="1"/>
+          <p:nvPr/>
+        </p:nvSpPr>
+        <p:spPr>
+          <a:xfrm>
+            <a:off x="10265434" y="320040"/>
+            <a:ext cx="1576046" cy="323165"/>
+          </a:xfrm>
+          <a:prstGeom prst="rect">
+            <a:avLst/>
+          </a:prstGeom>
+          <a:noFill/>
+        </p:spPr>
+        <p:txBody>
+          <a:bodyPr wrap="square">
+            <a:spAutoFit/>
+          </a:bodyPr>
+          <a:lstStyle/>
+          <a:p>
+            <a:pPr algn="l"/>
+            <a:r>
+              <a:rPr lang="en-US" sz="1500" b="1" dirty="0">
+                <a:solidFill>
+                  <a:srgbClr val="FFFFFF"/>
+                </a:solidFill>
+                <a:latin typeface="Calibri"/>
+              </a:rPr>
+              <a:t>Mimi</a:t>
+            </a:r>
+            <a:r>
+              <a:rPr lang="en-US" sz="1500" b="1" i="0" dirty="0">
+                <a:solidFill>
+                  <a:srgbClr val="FFFFFF"/>
+                </a:solidFill>
+                <a:latin typeface="Calibri"/>
+              </a:rPr>
+              <a:t> – Page 7</a:t>
+            </a:r>
+            <a:endParaRPr sz="1500" b="1" i="0" dirty="0">
+              <a:solidFill>
+                <a:srgbClr val="FFFFFF"/>
+              </a:solidFill>
+              <a:latin typeface="Calibri"/>
+            </a:endParaRPr>
+          </a:p>
+        </p:txBody>
+      </p:sp>
     </p:spTree>
   </p:cSld>
   <p:clrMapOvr>
@@ -11989,7 +17333,7 @@
           <a:p>
             <a:pPr algn="l"/>
             <a:r>
-              <a:rPr sz="1200" b="0" i="1">
+              <a:rPr sz="1200" b="0" i="1" dirty="0">
                 <a:solidFill>
                   <a:srgbClr val="FFFFFF"/>
                 </a:solidFill>
@@ -12592,6 +17936,53 @@
               </a:rPr>
               <a:t>High buffer → no forced selling → the flight-to-safety buying dominates → CAR goes deeply negative. This is the OPPOSITE of a crisis, not the absence of one.</a:t>
             </a:r>
+          </a:p>
+        </p:txBody>
+      </p:sp>
+      <p:sp>
+        <p:nvSpPr>
+          <p:cNvPr id="26" name="TextBox 25">
+            <a:extLst>
+              <a:ext uri="{FF2B5EF4-FFF2-40B4-BE49-F238E27FC236}">
+                <a16:creationId xmlns:a16="http://schemas.microsoft.com/office/drawing/2014/main" id="{8F1F35D9-667B-2077-D49B-68F8FA649CF8}"/>
+              </a:ext>
+            </a:extLst>
+          </p:cNvPr>
+          <p:cNvSpPr txBox="1"/>
+          <p:nvPr/>
+        </p:nvSpPr>
+        <p:spPr>
+          <a:xfrm>
+            <a:off x="10265434" y="320040"/>
+            <a:ext cx="1576046" cy="323165"/>
+          </a:xfrm>
+          <a:prstGeom prst="rect">
+            <a:avLst/>
+          </a:prstGeom>
+          <a:noFill/>
+        </p:spPr>
+        <p:txBody>
+          <a:bodyPr wrap="square">
+            <a:spAutoFit/>
+          </a:bodyPr>
+          <a:lstStyle/>
+          <a:p>
+            <a:pPr algn="l"/>
+            <a:r>
+              <a:rPr lang="en-US" sz="1500" b="1" i="0" dirty="0">
+                <a:solidFill>
+                  <a:srgbClr val="FFFFFF"/>
+                </a:solidFill>
+                <a:latin typeface="Calibri"/>
+              </a:rPr>
+              <a:t>Mimi – Page 8</a:t>
+            </a:r>
+            <a:endParaRPr sz="1500" b="1" i="0" dirty="0">
+              <a:solidFill>
+                <a:srgbClr val="FFFFFF"/>
+              </a:solidFill>
+              <a:latin typeface="Calibri"/>
+            </a:endParaRPr>
           </a:p>
         </p:txBody>
       </p:sp>
@@ -13049,7 +18440,7 @@
         </p:nvSpPr>
         <p:spPr>
           <a:xfrm>
-            <a:off x="411480" y="3200400"/>
+            <a:off x="411480" y="3007620"/>
             <a:ext cx="3566160" cy="658368"/>
           </a:xfrm>
           <a:prstGeom prst="rect">
@@ -13065,7 +18456,7 @@
           <a:p>
             <a:pPr algn="ctr"/>
             <a:r>
-              <a:rPr sz="1200" b="0" i="0">
+              <a:rPr sz="1200" b="0" i="0" dirty="0">
                 <a:solidFill>
                   <a:srgbClr val="1A1A2E"/>
                 </a:solidFill>
@@ -13313,7 +18704,7 @@
         </p:nvSpPr>
         <p:spPr>
           <a:xfrm>
-            <a:off x="4343400" y="3200400"/>
+            <a:off x="4343400" y="3007620"/>
             <a:ext cx="3566160" cy="658368"/>
           </a:xfrm>
           <a:prstGeom prst="rect">
@@ -13577,7 +18968,7 @@
         </p:nvSpPr>
         <p:spPr>
           <a:xfrm>
-            <a:off x="8275320" y="3200400"/>
+            <a:off x="8275320" y="2996429"/>
             <a:ext cx="3566160" cy="658368"/>
           </a:xfrm>
           <a:prstGeom prst="rect">
@@ -13593,7 +18984,7 @@
           <a:p>
             <a:pPr algn="ctr"/>
             <a:r>
-              <a:rPr sz="1200" b="0" i="0">
+              <a:rPr sz="1200" b="0" i="0" dirty="0">
                 <a:solidFill>
                   <a:srgbClr val="1A1A2E"/>
                 </a:solidFill>
@@ -13621,7 +19012,7 @@
         </p:blipFill>
         <p:spPr>
           <a:xfrm>
-            <a:off x="320040" y="3291840"/>
+            <a:off x="388619" y="3586724"/>
             <a:ext cx="7498079" cy="1990314"/>
           </a:xfrm>
           <a:prstGeom prst="rect">
@@ -13637,7 +19028,7 @@
         </p:nvSpPr>
         <p:spPr>
           <a:xfrm>
-            <a:off x="7955279" y="3291840"/>
+            <a:off x="7955279" y="3553181"/>
             <a:ext cx="3931920" cy="2057400"/>
           </a:xfrm>
           <a:prstGeom prst="rect">
@@ -13681,7 +19072,7 @@
         </p:nvSpPr>
         <p:spPr>
           <a:xfrm>
-            <a:off x="8092440" y="3355848"/>
+            <a:off x="8092440" y="3617189"/>
             <a:ext cx="3657600" cy="320040"/>
           </a:xfrm>
           <a:prstGeom prst="rect">
@@ -13697,7 +19088,7 @@
           <a:p>
             <a:pPr algn="l"/>
             <a:r>
-              <a:rPr sz="1300" b="1" i="0">
+              <a:rPr sz="1300" b="1" i="0" dirty="0">
                 <a:solidFill>
                   <a:srgbClr val="FFFFFF"/>
                 </a:solidFill>
@@ -13716,8 +19107,8 @@
         </p:nvSpPr>
         <p:spPr>
           <a:xfrm>
-            <a:off x="8092440" y="3730752"/>
-            <a:ext cx="3657600" cy="1508760"/>
+            <a:off x="8092439" y="3770572"/>
+            <a:ext cx="3657600" cy="1728678"/>
           </a:xfrm>
           <a:prstGeom prst="rect">
             <a:avLst/>
@@ -13735,7 +19126,7 @@
                 <a:spcPts val="0"/>
               </a:spcBef>
             </a:pPr>
-            <a:endParaRPr/>
+            <a:endParaRPr lang="ko-KR" altLang="en-US" dirty="0"/>
           </a:p>
           <a:p>
             <a:pPr algn="l">
@@ -13744,7 +19135,7 @@
               </a:spcBef>
             </a:pPr>
             <a:r>
-              <a:rPr sz="1300" b="1" i="0">
+              <a:rPr sz="1300" b="1" i="0" dirty="0">
                 <a:solidFill>
                   <a:srgbClr val="FFD700"/>
                 </a:solidFill>
@@ -13760,7 +19151,7 @@
               </a:spcBef>
             </a:pPr>
             <a:r>
-              <a:rPr sz="1300" b="1" i="0">
+              <a:rPr sz="1300" b="1" i="0" dirty="0">
                 <a:solidFill>
                   <a:srgbClr val="FFD700"/>
                 </a:solidFill>
@@ -13776,7 +19167,7 @@
               </a:spcBef>
             </a:pPr>
             <a:r>
-              <a:rPr sz="1500" b="1" i="0">
+              <a:rPr sz="1500" b="1" i="0" dirty="0">
                 <a:solidFill>
                   <a:srgbClr val="FFFFFF"/>
                 </a:solidFill>
@@ -13792,7 +19183,7 @@
               </a:spcBef>
             </a:pPr>
             <a:r>
-              <a:rPr sz="1200" b="0" i="0">
+              <a:rPr sz="1200" b="0" i="0" dirty="0">
                 <a:solidFill>
                   <a:srgbClr val="AAC4E8"/>
                 </a:solidFill>
@@ -13812,8 +19203,8 @@
         </p:nvSpPr>
         <p:spPr>
           <a:xfrm>
-            <a:off x="0" y="5596128"/>
-            <a:ext cx="12188952" cy="1097280"/>
+            <a:off x="0" y="5824726"/>
+            <a:ext cx="12188952" cy="868681"/>
           </a:xfrm>
           <a:prstGeom prst="rect">
             <a:avLst/>
@@ -13856,7 +19247,7 @@
         </p:nvSpPr>
         <p:spPr>
           <a:xfrm>
-            <a:off x="548640" y="5760720"/>
+            <a:off x="475487" y="5961888"/>
             <a:ext cx="11274552" cy="804672"/>
           </a:xfrm>
           <a:prstGeom prst="rect">
@@ -13872,7 +19263,7 @@
           <a:p>
             <a:pPr algn="ctr"/>
             <a:r>
-              <a:rPr sz="1700" b="1" i="0">
+              <a:rPr sz="1700" b="1" i="0" dirty="0">
                 <a:solidFill>
                   <a:srgbClr val="FFFFFF"/>
                 </a:solidFill>
@@ -13880,6 +19271,53 @@
               </a:rPr>
               <a:t>Same type of shock, same asset class. The buffer condition alone explains a 27 pp swing in Treasury market impact. This is the core finding of the paper.</a:t>
             </a:r>
+          </a:p>
+        </p:txBody>
+      </p:sp>
+      <p:sp>
+        <p:nvSpPr>
+          <p:cNvPr id="36" name="TextBox 35">
+            <a:extLst>
+              <a:ext uri="{FF2B5EF4-FFF2-40B4-BE49-F238E27FC236}">
+                <a16:creationId xmlns:a16="http://schemas.microsoft.com/office/drawing/2014/main" id="{EFB35B99-B633-1484-432B-121FFB79E645}"/>
+              </a:ext>
+            </a:extLst>
+          </p:cNvPr>
+          <p:cNvSpPr txBox="1"/>
+          <p:nvPr/>
+        </p:nvSpPr>
+        <p:spPr>
+          <a:xfrm>
+            <a:off x="10265434" y="320040"/>
+            <a:ext cx="1576046" cy="323165"/>
+          </a:xfrm>
+          <a:prstGeom prst="rect">
+            <a:avLst/>
+          </a:prstGeom>
+          <a:noFill/>
+        </p:spPr>
+        <p:txBody>
+          <a:bodyPr wrap="square">
+            <a:spAutoFit/>
+          </a:bodyPr>
+          <a:lstStyle/>
+          <a:p>
+            <a:pPr algn="l"/>
+            <a:r>
+              <a:rPr lang="en-US" sz="1500" b="1" i="0" dirty="0">
+                <a:solidFill>
+                  <a:srgbClr val="FFFFFF"/>
+                </a:solidFill>
+                <a:latin typeface="Calibri"/>
+              </a:rPr>
+              <a:t>Mimi – Page 9</a:t>
+            </a:r>
+            <a:endParaRPr sz="1500" b="1" i="0" dirty="0">
+              <a:solidFill>
+                <a:srgbClr val="FFFFFF"/>
+              </a:solidFill>
+              <a:latin typeface="Calibri"/>
+            </a:endParaRPr>
           </a:p>
         </p:txBody>
       </p:sp>

--- a/presentations/0526_Stablecoin_Exorbitant_Privilege.pptx
+++ b/presentations/0526_Stablecoin_Exorbitant_Privilege.pptx
@@ -710,7 +710,7 @@
           <a:p>
             <a:r>
               <a:rPr lang="en-US" altLang="en-US" dirty="0"/>
-              <a:t>"Then during the event window — five days before to twenty days after the crisis — for each trading day, we subtract the predicted spread from the actual spread. That difference is the abnormal spread. A positive abnormal spread or rising line means something beyond normal market conditions is pushing T-bill yields above the risk-free rate - forced selling pressure. A negative abnormal spread or falling line means something is compressing them below normal- flight-to-safety buying."</a:t>
+              <a:t>"Then during the event window — five days before to twenty days after the crisis — for each trading day, we subtract the predicted spread from the actual spread. That difference is the abnormal spread. A positive abnormal spread or rising line means something beyond normal market conditions is pushing T-bill yields above the risk-free rate - suggesting forced selling pressure. A negative abnormal spread or falling line means something is compressing them below normal- suggesting flight-to-safety buying."</a:t>
             </a:r>
             <a:endParaRPr lang="en-US" altLang="en-US" dirty="0"/>
           </a:p>
@@ -5408,47 +5408,6 @@
       </p:sp>
       <p:sp>
         <p:nvSpPr>
-          <p:cNvPr id="5" name="TextBox 4"/>
-          <p:cNvSpPr txBox="1"/>
-          <p:nvPr/>
-        </p:nvSpPr>
-        <p:spPr>
-          <a:xfrm>
-            <a:off x="11686032" y="6473952"/>
-            <a:ext cx="411480" cy="320040"/>
-          </a:xfrm>
-          <a:prstGeom prst="rect">
-            <a:avLst/>
-          </a:prstGeom>
-          <a:noFill/>
-        </p:spPr>
-        <p:txBody>
-          <a:bodyPr wrap="square">
-            <a:spAutoFit/>
-          </a:bodyPr>
-          <a:lstStyle/>
-          <a:p>
-            <a:pPr algn="r"/>
-            <a:r>
-              <a:rPr sz="1300" b="0" i="0">
-                <a:solidFill>
-                  <a:srgbClr val="555566"/>
-                </a:solidFill>
-                <a:latin typeface="Calibri"/>
-              </a:rPr>
-              <a:t>2</a:t>
-            </a:r>
-            <a:endParaRPr sz="1300" b="0" i="0">
-              <a:solidFill>
-                <a:srgbClr val="555566"/>
-              </a:solidFill>
-              <a:latin typeface="Calibri"/>
-            </a:endParaRPr>
-          </a:p>
-        </p:txBody>
-      </p:sp>
-      <p:sp>
-        <p:nvSpPr>
           <p:cNvPr id="6" name="Rectangle 5"/>
           <p:cNvSpPr/>
           <p:nvPr/>
@@ -6585,8 +6544,8 @@
         </p:nvSpPr>
         <p:spPr>
           <a:xfrm>
-            <a:off x="10265434" y="320040"/>
-            <a:ext cx="1576046" cy="323165"/>
+            <a:off x="10064750" y="320040"/>
+            <a:ext cx="1776730" cy="321945"/>
           </a:xfrm>
           <a:prstGeom prst="rect">
             <a:avLst/>
@@ -9752,47 +9711,33 @@
           <a:bodyPr rtlCol="0" anchor="ctr"/>
           <a:lstStyle/>
           <a:p>
-            <a:pPr algn="ctr"/>
-          </a:p>
-        </p:txBody>
-      </p:sp>
-      <p:sp>
-        <p:nvSpPr>
-          <p:cNvPr id="4" name="TextBox 3"/>
-          <p:cNvSpPr txBox="1"/>
-          <p:nvPr/>
-        </p:nvSpPr>
-        <p:spPr>
-          <a:xfrm>
-            <a:off x="274320" y="91440"/>
-            <a:ext cx="10515600" cy="491490"/>
-          </a:xfrm>
-          <a:prstGeom prst="rect">
-            <a:avLst/>
-          </a:prstGeom>
-          <a:noFill/>
-        </p:spPr>
-        <p:txBody>
-          <a:bodyPr wrap="square">
-            <a:spAutoFit/>
-          </a:bodyPr>
-          <a:lstStyle/>
-          <a:p>
             <a:pPr algn="l"/>
             <a:r>
-              <a:rPr sz="2600" b="0" i="0" dirty="0">
+              <a:rPr sz="2400" dirty="0">
                 <a:solidFill>
                   <a:srgbClr val="FFFFFF"/>
                 </a:solidFill>
                 <a:latin typeface="Calibri"/>
-              </a:rPr>
-              <a:t>What is CAR? </a:t>
-            </a:r>
-            <a:endParaRPr lang="en-US" sz="2600" b="0" i="0" dirty="0">
+                <a:sym typeface="+mn-ea"/>
+              </a:rPr>
+              <a:t>CAR</a:t>
+            </a:r>
+            <a:r>
+              <a:rPr lang="en-US" sz="2400" dirty="0">
+                <a:solidFill>
+                  <a:srgbClr val="FFFFFF"/>
+                </a:solidFill>
+                <a:latin typeface="Calibri"/>
+                <a:sym typeface="+mn-ea"/>
+              </a:rPr>
+              <a:t> and Conditioned Event Study</a:t>
+            </a:r>
+            <a:endParaRPr lang="en-US" sz="2400" dirty="0">
               <a:solidFill>
                 <a:srgbClr val="FFFFFF"/>
               </a:solidFill>
               <a:latin typeface="Calibri"/>
+              <a:sym typeface="+mn-ea"/>
             </a:endParaRPr>
           </a:p>
         </p:txBody>
@@ -9847,6 +9792,13 @@
               </a:rPr>
               <a:t>CAR = Cumulative Abnormal Return on the OIS–Treasury Spread</a:t>
             </a:r>
+            <a:endParaRPr b="1">
+              <a:solidFill>
+                <a:srgbClr val="FFFFFF"/>
+              </a:solidFill>
+              <a:latin typeface="Calibri"/>
+              <a:sym typeface="+mn-ea"/>
+            </a:endParaRPr>
           </a:p>
         </p:txBody>
       </p:sp>
@@ -10308,6 +10260,318 @@
   <p:clrMapOvr>
     <a:masterClrMapping/>
   </p:clrMapOvr>
+  <p:timing>
+    <p:tnLst>
+      <p:par>
+        <p:cTn id="1" dur="indefinite" restart="never" nodeType="tmRoot">
+          <p:childTnLst>
+            <p:seq concurrent="1" nextAc="seek">
+              <p:cTn id="2" dur="indefinite" nodeType="mainSeq">
+                <p:childTnLst>
+                  <p:par>
+                    <p:cTn id="3" fill="hold">
+                      <p:stCondLst>
+                        <p:cond delay="indefinite"/>
+                      </p:stCondLst>
+                      <p:childTnLst>
+                        <p:par>
+                          <p:cTn id="4" fill="hold">
+                            <p:stCondLst>
+                              <p:cond delay="0"/>
+                            </p:stCondLst>
+                            <p:childTnLst>
+                              <p:par>
+                                <p:cTn id="5" presetID="1" presetClass="entr" presetSubtype="0" fill="hold" grpId="0" nodeType="clickEffect">
+                                  <p:stCondLst>
+                                    <p:cond delay="0"/>
+                                  </p:stCondLst>
+                                  <p:childTnLst>
+                                    <p:set>
+                                      <p:cBhvr>
+                                        <p:cTn id="6" dur="1" fill="hold">
+                                          <p:stCondLst>
+                                            <p:cond delay="0"/>
+                                          </p:stCondLst>
+                                        </p:cTn>
+                                        <p:tgtEl>
+                                          <p:spTgt spid="3"/>
+                                        </p:tgtEl>
+                                        <p:attrNameLst>
+                                          <p:attrName>style.visibility</p:attrName>
+                                        </p:attrNameLst>
+                                      </p:cBhvr>
+                                      <p:to>
+                                        <p:strVal val="visible"/>
+                                      </p:to>
+                                    </p:set>
+                                  </p:childTnLst>
+                                </p:cTn>
+                              </p:par>
+                            </p:childTnLst>
+                          </p:cTn>
+                        </p:par>
+                      </p:childTnLst>
+                    </p:cTn>
+                  </p:par>
+                  <p:par>
+                    <p:cTn id="7" fill="hold">
+                      <p:stCondLst>
+                        <p:cond delay="indefinite"/>
+                      </p:stCondLst>
+                      <p:childTnLst>
+                        <p:par>
+                          <p:cTn id="8" fill="hold">
+                            <p:stCondLst>
+                              <p:cond delay="0"/>
+                            </p:stCondLst>
+                            <p:childTnLst>
+                              <p:par>
+                                <p:cTn id="9" presetID="1" presetClass="entr" presetSubtype="0" fill="hold" grpId="0" nodeType="clickEffect">
+                                  <p:stCondLst>
+                                    <p:cond delay="0"/>
+                                  </p:stCondLst>
+                                  <p:childTnLst>
+                                    <p:set>
+                                      <p:cBhvr>
+                                        <p:cTn id="10" dur="1" fill="hold">
+                                          <p:stCondLst>
+                                            <p:cond delay="0"/>
+                                          </p:stCondLst>
+                                        </p:cTn>
+                                        <p:tgtEl>
+                                          <p:spTgt spid="6"/>
+                                        </p:tgtEl>
+                                        <p:attrNameLst>
+                                          <p:attrName>style.visibility</p:attrName>
+                                        </p:attrNameLst>
+                                      </p:cBhvr>
+                                      <p:to>
+                                        <p:strVal val="visible"/>
+                                      </p:to>
+                                    </p:set>
+                                  </p:childTnLst>
+                                </p:cTn>
+                              </p:par>
+                            </p:childTnLst>
+                          </p:cTn>
+                        </p:par>
+                      </p:childTnLst>
+                    </p:cTn>
+                  </p:par>
+                  <p:par>
+                    <p:cTn id="11" fill="hold">
+                      <p:stCondLst>
+                        <p:cond delay="indefinite"/>
+                      </p:stCondLst>
+                      <p:childTnLst>
+                        <p:par>
+                          <p:cTn id="12" fill="hold">
+                            <p:stCondLst>
+                              <p:cond delay="0"/>
+                            </p:stCondLst>
+                            <p:childTnLst>
+                              <p:par>
+                                <p:cTn id="13" presetID="1" presetClass="entr" presetSubtype="0" fill="hold" grpId="0" nodeType="clickEffect">
+                                  <p:stCondLst>
+                                    <p:cond delay="0"/>
+                                  </p:stCondLst>
+                                  <p:childTnLst>
+                                    <p:set>
+                                      <p:cBhvr>
+                                        <p:cTn id="14" dur="1" fill="hold">
+                                          <p:stCondLst>
+                                            <p:cond delay="0"/>
+                                          </p:stCondLst>
+                                        </p:cTn>
+                                        <p:tgtEl>
+                                          <p:spTgt spid="10"/>
+                                        </p:tgtEl>
+                                        <p:attrNameLst>
+                                          <p:attrName>style.visibility</p:attrName>
+                                        </p:attrNameLst>
+                                      </p:cBhvr>
+                                      <p:to>
+                                        <p:strVal val="visible"/>
+                                      </p:to>
+                                    </p:set>
+                                  </p:childTnLst>
+                                </p:cTn>
+                              </p:par>
+                            </p:childTnLst>
+                          </p:cTn>
+                        </p:par>
+                      </p:childTnLst>
+                    </p:cTn>
+                  </p:par>
+                  <p:par>
+                    <p:cTn id="15" fill="hold">
+                      <p:stCondLst>
+                        <p:cond delay="indefinite"/>
+                      </p:stCondLst>
+                      <p:childTnLst>
+                        <p:par>
+                          <p:cTn id="16" fill="hold">
+                            <p:stCondLst>
+                              <p:cond delay="0"/>
+                            </p:stCondLst>
+                            <p:childTnLst>
+                              <p:par>
+                                <p:cTn id="17" presetID="1" presetClass="entr" presetSubtype="0" fill="hold" grpId="0" nodeType="clickEffect">
+                                  <p:stCondLst>
+                                    <p:cond delay="0"/>
+                                  </p:stCondLst>
+                                  <p:childTnLst>
+                                    <p:set>
+                                      <p:cBhvr>
+                                        <p:cTn id="18" dur="1" fill="hold">
+                                          <p:stCondLst>
+                                            <p:cond delay="0"/>
+                                          </p:stCondLst>
+                                        </p:cTn>
+                                        <p:tgtEl>
+                                          <p:spTgt spid="38"/>
+                                        </p:tgtEl>
+                                        <p:attrNameLst>
+                                          <p:attrName>style.visibility</p:attrName>
+                                        </p:attrNameLst>
+                                      </p:cBhvr>
+                                      <p:to>
+                                        <p:strVal val="visible"/>
+                                      </p:to>
+                                    </p:set>
+                                  </p:childTnLst>
+                                </p:cTn>
+                              </p:par>
+                            </p:childTnLst>
+                          </p:cTn>
+                        </p:par>
+                      </p:childTnLst>
+                    </p:cTn>
+                  </p:par>
+                  <p:par>
+                    <p:cTn id="19" fill="hold">
+                      <p:stCondLst>
+                        <p:cond delay="indefinite"/>
+                      </p:stCondLst>
+                      <p:childTnLst>
+                        <p:par>
+                          <p:cTn id="20" fill="hold">
+                            <p:stCondLst>
+                              <p:cond delay="0"/>
+                            </p:stCondLst>
+                            <p:childTnLst>
+                              <p:par>
+                                <p:cTn id="21" presetID="1" presetClass="entr" presetSubtype="0" fill="hold" nodeType="clickEffect">
+                                  <p:stCondLst>
+                                    <p:cond delay="0"/>
+                                  </p:stCondLst>
+                                  <p:childTnLst>
+                                    <p:set>
+                                      <p:cBhvr>
+                                        <p:cTn id="22" dur="1" fill="hold">
+                                          <p:stCondLst>
+                                            <p:cond delay="0"/>
+                                          </p:stCondLst>
+                                        </p:cTn>
+                                        <p:tgtEl>
+                                          <p:spTgt spid="41"/>
+                                        </p:tgtEl>
+                                        <p:attrNameLst>
+                                          <p:attrName>style.visibility</p:attrName>
+                                        </p:attrNameLst>
+                                      </p:cBhvr>
+                                      <p:to>
+                                        <p:strVal val="visible"/>
+                                      </p:to>
+                                    </p:set>
+                                  </p:childTnLst>
+                                </p:cTn>
+                              </p:par>
+                            </p:childTnLst>
+                          </p:cTn>
+                        </p:par>
+                      </p:childTnLst>
+                    </p:cTn>
+                  </p:par>
+                  <p:par>
+                    <p:cTn id="23" fill="hold">
+                      <p:stCondLst>
+                        <p:cond delay="indefinite"/>
+                      </p:stCondLst>
+                      <p:childTnLst>
+                        <p:par>
+                          <p:cTn id="24" fill="hold">
+                            <p:stCondLst>
+                              <p:cond delay="0"/>
+                            </p:stCondLst>
+                            <p:childTnLst>
+                              <p:par>
+                                <p:cTn id="25" presetID="1" presetClass="entr" presetSubtype="0" fill="hold" grpId="0" nodeType="clickEffect">
+                                  <p:stCondLst>
+                                    <p:cond delay="0"/>
+                                  </p:stCondLst>
+                                  <p:childTnLst>
+                                    <p:set>
+                                      <p:cBhvr>
+                                        <p:cTn id="26" dur="1" fill="hold">
+                                          <p:stCondLst>
+                                            <p:cond delay="0"/>
+                                          </p:stCondLst>
+                                        </p:cTn>
+                                        <p:tgtEl>
+                                          <p:spTgt spid="39"/>
+                                        </p:tgtEl>
+                                        <p:attrNameLst>
+                                          <p:attrName>style.visibility</p:attrName>
+                                        </p:attrNameLst>
+                                      </p:cBhvr>
+                                      <p:to>
+                                        <p:strVal val="visible"/>
+                                      </p:to>
+                                    </p:set>
+                                  </p:childTnLst>
+                                </p:cTn>
+                              </p:par>
+                            </p:childTnLst>
+                          </p:cTn>
+                        </p:par>
+                      </p:childTnLst>
+                    </p:cTn>
+                  </p:par>
+                </p:childTnLst>
+              </p:cTn>
+              <p:prevCondLst>
+                <p:cond evt="onPrev" delay="0">
+                  <p:tgtEl>
+                    <p:sldTgt/>
+                  </p:tgtEl>
+                </p:cond>
+              </p:prevCondLst>
+              <p:nextCondLst>
+                <p:cond evt="onNext" delay="0">
+                  <p:tgtEl>
+                    <p:sldTgt/>
+                  </p:tgtEl>
+                </p:cond>
+              </p:nextCondLst>
+            </p:seq>
+          </p:childTnLst>
+        </p:cTn>
+      </p:par>
+    </p:tnLst>
+    <p:bldLst>
+      <p:bldP spid="3" grpId="0" animBg="1"/>
+      <p:bldP spid="3" grpId="1" animBg="1"/>
+      <p:bldP spid="6" grpId="0" animBg="1"/>
+      <p:bldP spid="6" grpId="1" animBg="1"/>
+      <p:bldP spid="10" grpId="0" animBg="1"/>
+      <p:bldP spid="10" grpId="1" animBg="1"/>
+      <p:bldP spid="38" grpId="0" animBg="1"/>
+      <p:bldP spid="38" grpId="1" animBg="1"/>
+      <p:bldP spid="39" grpId="0" animBg="1"/>
+      <p:bldP spid="39" grpId="1" animBg="1"/>
+    </p:bldLst>
+  </p:timing>
 </p:sld>
 </file>
 
@@ -11154,7 +11418,7 @@
         <p:spPr>
           <a:xfrm>
             <a:off x="10265434" y="320040"/>
-            <a:ext cx="1576046" cy="323165"/>
+            <a:ext cx="1576046" cy="321945"/>
           </a:xfrm>
           <a:prstGeom prst="rect">
             <a:avLst/>
@@ -11175,7 +11439,7 @@
                 </a:solidFill>
                 <a:latin typeface="Calibri"/>
               </a:rPr>
-              <a:t>Mimi – Page 8</a:t>
+              <a:t>Mimi – Page 6</a:t>
             </a:r>
             <a:endParaRPr sz="1500" b="1" i="0" dirty="0">
               <a:solidFill>
@@ -11326,6 +11590,13 @@
   <p:clrMapOvr>
     <a:masterClrMapping/>
   </p:clrMapOvr>
+  <p:timing>
+    <p:tnLst>
+      <p:par>
+        <p:cTn id="1" dur="indefinite" restart="never" nodeType="tmRoot"/>
+      </p:par>
+    </p:tnLst>
+  </p:timing>
 </p:sld>
 </file>
 
@@ -11467,47 +11738,6 @@
             <a:endParaRPr sz="2600" b="0" i="0" dirty="0">
               <a:solidFill>
                 <a:srgbClr val="FFFFFF"/>
-              </a:solidFill>
-              <a:latin typeface="Calibri"/>
-            </a:endParaRPr>
-          </a:p>
-        </p:txBody>
-      </p:sp>
-      <p:sp>
-        <p:nvSpPr>
-          <p:cNvPr id="5" name="TextBox 4"/>
-          <p:cNvSpPr txBox="1"/>
-          <p:nvPr/>
-        </p:nvSpPr>
-        <p:spPr>
-          <a:xfrm>
-            <a:off x="11686032" y="6473952"/>
-            <a:ext cx="411480" cy="320040"/>
-          </a:xfrm>
-          <a:prstGeom prst="rect">
-            <a:avLst/>
-          </a:prstGeom>
-          <a:noFill/>
-        </p:spPr>
-        <p:txBody>
-          <a:bodyPr wrap="square">
-            <a:spAutoFit/>
-          </a:bodyPr>
-          <a:lstStyle/>
-          <a:p>
-            <a:pPr algn="r"/>
-            <a:r>
-              <a:rPr sz="1300" b="0" i="0">
-                <a:solidFill>
-                  <a:srgbClr val="555566"/>
-                </a:solidFill>
-                <a:latin typeface="Calibri"/>
-              </a:rPr>
-              <a:t>2</a:t>
-            </a:r>
-            <a:endParaRPr sz="1300" b="0" i="0">
-              <a:solidFill>
-                <a:srgbClr val="555566"/>
               </a:solidFill>
               <a:latin typeface="Calibri"/>
             </a:endParaRPr>

--- a/presentations/0526_Stablecoin_Exorbitant_Privilege.pptx
+++ b/presentations/0526_Stablecoin_Exorbitant_Privilege.pptx
@@ -5,17 +5,17 @@
     <p:sldMasterId id="2147483648" r:id="rId1"/>
   </p:sldMasterIdLst>
   <p:notesMasterIdLst>
-    <p:notesMasterId r:id="rId4"/>
+    <p:notesMasterId r:id="rId10"/>
   </p:notesMasterIdLst>
   <p:sldIdLst>
-    <p:sldId id="266" r:id="rId3"/>
-    <p:sldId id="257" r:id="rId5"/>
-    <p:sldId id="258" r:id="rId6"/>
-    <p:sldId id="259" r:id="rId7"/>
-    <p:sldId id="260" r:id="rId8"/>
-    <p:sldId id="263" r:id="rId9"/>
-    <p:sldId id="268" r:id="rId10"/>
-    <p:sldId id="267" r:id="rId11"/>
+    <p:sldId id="266" r:id="rId2"/>
+    <p:sldId id="257" r:id="rId3"/>
+    <p:sldId id="258" r:id="rId4"/>
+    <p:sldId id="259" r:id="rId5"/>
+    <p:sldId id="260" r:id="rId6"/>
+    <p:sldId id="263" r:id="rId7"/>
+    <p:sldId id="268" r:id="rId8"/>
+    <p:sldId id="267" r:id="rId9"/>
   </p:sldIdLst>
   <p:sldSz cx="12188825" cy="6858000"/>
   <p:notesSz cx="6858000" cy="9144000"/>
@@ -317,7 +317,6 @@
               <a:rPr lang="en-US" altLang="ko-KR" dirty="0"/>
               <a:t>Good afternoon, everyone. We will be talking about Stablecoins and the Exorbitant Privilege. The central argument is that large stablecoin issuers like Tether and Circle have become significant buyers of U.S. Treasury bills — which amplifies America's safe-asset privilege in normal times, but can sharply reverse that benefit during a run if their cash reserves are too thin. Today we want to address some of the methodological questions that came up last time and walk you through our three key findings clearly.</a:t>
             </a:r>
-            <a:endParaRPr lang="en-US" altLang="ko-KR" dirty="0"/>
           </a:p>
           <a:p>
             <a:endParaRPr dirty="0"/>
@@ -392,7 +391,6 @@
               <a:rPr dirty="0"/>
               <a:t>Let me quickly walk you through what we have done and what is coming. On the left, you can see everything we have completed: the theoretical framework, the main regression, the threshold test, the event study across three crises, and several robustness checks. This deck specifically addresses the clarification questions from last session — why we use the OIS spread, what the buffer condition is, and how to read the event study graphs. </a:t>
             </a:r>
-            <a:endParaRPr dirty="0"/>
           </a:p>
         </p:txBody>
       </p:sp>
@@ -520,7 +518,6 @@
               <a:rPr dirty="0"/>
               <a:t>The spread separates them cleanly.</a:t>
             </a:r>
-            <a:endParaRPr dirty="0"/>
           </a:p>
         </p:txBody>
       </p:sp>
@@ -600,7 +597,6 @@
               <a:rPr dirty="0"/>
               <a:t>was no. In March 2023, the answer was yes.</a:t>
             </a:r>
-            <a:endParaRPr dirty="0"/>
           </a:p>
         </p:txBody>
       </p:sp>
@@ -672,7 +668,6 @@
               <a:rPr lang="en-US" altLang="en-US" dirty="0"/>
               <a:t>"Before I show you the results, I need to explain what you are looking at — because without understanding the model, the graphs are just lines."</a:t>
             </a:r>
-            <a:endParaRPr lang="en-US" altLang="en-US" dirty="0"/>
           </a:p>
           <a:p>
             <a:endParaRPr lang="en-US" altLang="en-US" dirty="0"/>
@@ -682,7 +677,6 @@
               <a:rPr lang="en-US" altLang="en-US" dirty="0"/>
               <a:t>[Point to Step 1]</a:t>
             </a:r>
-            <a:endParaRPr lang="en-US" altLang="en-US" dirty="0"/>
           </a:p>
           <a:p>
             <a:endParaRPr lang="en-US" altLang="en-US" dirty="0"/>
@@ -692,7 +686,6 @@
               <a:rPr lang="en-US" altLang="en-US" dirty="0"/>
               <a:t>"Before each crisis event, we take data from 120 to 6 trading days prior to the event — roughly six months of pre-crisis data — and we run a regression. We ask: given the VIX level and global equity returns on any given day, what would we expect the OIS-Treasury spread to be? This gives us our normal model. It tells us what the spread looks like when nothing unusual is happening."</a:t>
             </a:r>
-            <a:endParaRPr lang="en-US" altLang="en-US" dirty="0"/>
           </a:p>
           <a:p>
             <a:endParaRPr lang="en-US" altLang="en-US" dirty="0"/>
@@ -702,7 +695,6 @@
               <a:rPr lang="en-US" altLang="en-US" dirty="0"/>
               <a:t>[Point to Step 2]</a:t>
             </a:r>
-            <a:endParaRPr lang="en-US" altLang="en-US" dirty="0"/>
           </a:p>
           <a:p>
             <a:endParaRPr lang="en-US" altLang="en-US" dirty="0"/>
@@ -712,7 +704,6 @@
               <a:rPr lang="en-US" altLang="en-US" dirty="0"/>
               <a:t>"Then during the event window — five days before to twenty days after the crisis — for each trading day, we subtract the predicted spread from the actual spread. That difference is the abnormal spread. A positive abnormal spread or rising line means something beyond normal market conditions is pushing T-bill yields above the risk-free rate - suggesting forced selling pressure. A negative abnormal spread or falling line means something is compressing them below normal- suggesting flight-to-safety buying."</a:t>
             </a:r>
-            <a:endParaRPr lang="en-US" altLang="en-US" dirty="0"/>
           </a:p>
           <a:p>
             <a:endParaRPr lang="en-US" altLang="en-US" dirty="0"/>
@@ -722,7 +713,6 @@
               <a:rPr lang="en-US" altLang="en-US" dirty="0"/>
               <a:t>[Point to Step 3]</a:t>
             </a:r>
-            <a:endParaRPr lang="en-US" altLang="en-US" dirty="0"/>
           </a:p>
           <a:p>
             <a:endParaRPr lang="en-US" altLang="en-US" dirty="0"/>
@@ -732,7 +722,6 @@
               <a:rPr lang="en-US" altLang="en-US" dirty="0"/>
               <a:t>"We then add up all those daily abnormal values. That running total — from day minus five to day plus twenty — is the CAR. The Y-axis shows percentage points of accumulated deviation. The X-axis shows trading days. Day zero is the crisis date itself."</a:t>
             </a:r>
-            <a:endParaRPr lang="en-US" altLang="en-US" dirty="0"/>
           </a:p>
           <a:p>
             <a:endParaRPr lang="en-US" altLang="en-US" dirty="0"/>
@@ -742,7 +731,6 @@
               <a:rPr lang="en-US" altLang="en-US" dirty="0"/>
               <a:t>[Click — LUNA graph appears on the right]</a:t>
             </a:r>
-            <a:endParaRPr lang="en-US" altLang="en-US" dirty="0"/>
           </a:p>
           <a:p>
             <a:endParaRPr lang="en-US" altLang="en-US" dirty="0"/>
@@ -752,7 +740,6 @@
               <a:rPr lang="en-US" altLang="en-US" dirty="0"/>
               <a:t>"This is Event 1. Day zero is May 9th 2022 — the LUNA collapse. UST was an algorithmic stablecoin. It had no real dollar reserves. Its one-dollar peg was maintained by minting and burning LUNA tokens. When confidence broke, the mechanism failed instantly. Forty billion dollars wiped out in 72 hours."</a:t>
             </a:r>
-            <a:endParaRPr lang="en-US" altLang="en-US" dirty="0"/>
           </a:p>
           <a:p>
             <a:endParaRPr lang="en-US" altLang="en-US" dirty="0"/>
@@ -762,7 +749,6 @@
               <a:rPr lang="en-US" altLang="en-US" dirty="0"/>
               <a:t>"Look at the graph. The line starts near zero before the event and rises steadily. By day plus 20, the CAR has accumulated to plus 8.9 percentage points. That means the OIS-Treasury spread accumulated 8.9 percentage points above what normal market conditions predicted — sustained, persistent T-bill selling pressure over twenty trading days. Exactly what our theory predicts for a low-buffer issuer."</a:t>
             </a:r>
-            <a:endParaRPr lang="en-US" altLang="en-US" dirty="0"/>
           </a:p>
           <a:p>
             <a:endParaRPr lang="en-US" altLang="en-US" dirty="0"/>
@@ -812,7 +798,6 @@
               <a:rPr lang="en-US" altLang="en-US" dirty="0"/>
               <a:t>Different trigger, different mechanism — but the same buffer level of 5 to 8 percent, and the same result: CAR of plus 8.85 — nearly identical. The buffer determined the outcome. Not the nature of the shock."</a:t>
             </a:r>
-            <a:endParaRPr lang="en-US" altLang="en-US" dirty="0"/>
           </a:p>
           <a:p>
             <a:endParaRPr lang="en-US" altLang="en-US" dirty="0"/>
@@ -822,7 +807,6 @@
               <a:rPr lang="en-US" altLang="en-US" dirty="0"/>
               <a:t>[Hand to Mimi]</a:t>
             </a:r>
-            <a:endParaRPr lang="en-US" altLang="en-US" dirty="0"/>
           </a:p>
           <a:p>
             <a:endParaRPr lang="en-US" altLang="en-US" dirty="0"/>
@@ -1838,7 +1822,15 @@
             </a:r>
             <a:r>
               <a:rPr dirty="0"/>
-              <a:t>. SVB collapsed on March 10th — the second largest U.S. bank failure in history. Circle, which issues USDC, disclosed that 3.3 billion dollars of its reserves were held at SVB and temporarily inaccessible. </a:t>
+              <a:t>. SVB collapsed on March 10th — the second largest U.S. bank failure in history</a:t>
+            </a:r>
+            <a:r>
+              <a:rPr lang="en-US" dirty="0"/>
+              <a:t> since 2008</a:t>
+            </a:r>
+            <a:r>
+              <a:rPr dirty="0"/>
+              <a:t>. Circle, which issues USDC, disclosed that 3.3 billion dollars of its reserves were held at SVB and temporarily inaccessible. </a:t>
             </a:r>
             <a:endParaRPr lang="en-US" dirty="0"/>
           </a:p>
@@ -2039,12 +2031,8 @@
             </a:r>
             <a:r>
               <a:rPr dirty="0"/>
-              <a:t>Our preliminary result already shows the placebo CARs are less than one basis point, compared to nine to eighteen basis points in the actual events. That is a 22 times difference, which strongly supports that our results are real and not just </a:t>
-            </a:r>
-            <a:r>
-              <a:t>noise.</a:t>
-            </a:r>
-            <a:endParaRPr dirty="0"/>
+              <a:t>Our preliminary result already shows the placebo CARs are less than one basis point, compared to nine to eighteen basis points in the actual events. That is a 22 times difference, which strongly supports that our results are real and not just noise.</a:t>
+            </a:r>
           </a:p>
         </p:txBody>
       </p:sp>
@@ -2116,7 +2104,6 @@
               <a:rPr lang="en-US" altLang="ko-KR" dirty="0"/>
               <a:t>Thank you for listening. To summarize in two sentences: stablecoin issuers have become structurally important buyers of U.S. Treasury bills, which deepens America's safe-asset privilege in normal times. But when their liquid cash buffers fall below roughly 13 percent of supply, a run forces them to liquidate T-bills — turning a privilege amplifier into a systemic disruptor. We are happy to take any questions.</a:t>
             </a:r>
-            <a:endParaRPr lang="en-US" altLang="ko-KR" dirty="0"/>
           </a:p>
           <a:p>
             <a:endParaRPr dirty="0"/>
@@ -2184,7 +2171,6 @@
               <a:rPr lang="en-US"/>
               <a:t>Click to edit Master title style</a:t>
             </a:r>
-            <a:endParaRPr lang="en-US"/>
           </a:p>
         </p:txBody>
       </p:sp>
@@ -2303,7 +2289,6 @@
               <a:rPr lang="en-US"/>
               <a:t>Click to edit Master subtitle style</a:t>
             </a:r>
-            <a:endParaRPr lang="en-US"/>
           </a:p>
         </p:txBody>
       </p:sp>
@@ -2324,6 +2309,7 @@
           <a:p>
             <a:fld id="{5BCAD085-E8A6-8845-BD4E-CB4CCA059FC4}" type="datetimeFigureOut">
               <a:rPr lang="en-US" smtClean="0"/>
+              <a:t>5/26/26</a:t>
             </a:fld>
             <a:endParaRPr lang="en-US"/>
           </a:p>
@@ -2365,6 +2351,7 @@
           <a:p>
             <a:fld id="{C1FF6DA9-008F-8B48-92A6-B652298478BF}" type="slidenum">
               <a:rPr lang="en-US" smtClean="0"/>
+              <a:t>‹#›</a:t>
             </a:fld>
             <a:endParaRPr lang="en-US"/>
           </a:p>
@@ -2414,7 +2401,6 @@
               <a:rPr lang="en-US"/>
               <a:t>Click to edit Master title style</a:t>
             </a:r>
-            <a:endParaRPr lang="en-US"/>
           </a:p>
         </p:txBody>
       </p:sp>
@@ -2438,7 +2424,6 @@
               <a:rPr lang="en-US"/>
               <a:t>Click to edit Master text styles</a:t>
             </a:r>
-            <a:endParaRPr lang="en-US"/>
           </a:p>
           <a:p>
             <a:pPr lvl="1"/>
@@ -2446,7 +2431,6 @@
               <a:rPr lang="en-US"/>
               <a:t>Second level</a:t>
             </a:r>
-            <a:endParaRPr lang="en-US"/>
           </a:p>
           <a:p>
             <a:pPr lvl="2"/>
@@ -2454,7 +2438,6 @@
               <a:rPr lang="en-US"/>
               <a:t>Third level</a:t>
             </a:r>
-            <a:endParaRPr lang="en-US"/>
           </a:p>
           <a:p>
             <a:pPr lvl="3"/>
@@ -2462,7 +2445,6 @@
               <a:rPr lang="en-US"/>
               <a:t>Fourth level</a:t>
             </a:r>
-            <a:endParaRPr lang="en-US"/>
           </a:p>
           <a:p>
             <a:pPr lvl="4"/>
@@ -2470,7 +2452,6 @@
               <a:rPr lang="en-US"/>
               <a:t>Fifth level</a:t>
             </a:r>
-            <a:endParaRPr lang="en-US"/>
           </a:p>
         </p:txBody>
       </p:sp>
@@ -2491,6 +2472,7 @@
           <a:p>
             <a:fld id="{5BCAD085-E8A6-8845-BD4E-CB4CCA059FC4}" type="datetimeFigureOut">
               <a:rPr lang="en-US" smtClean="0"/>
+              <a:t>5/26/26</a:t>
             </a:fld>
             <a:endParaRPr lang="en-US"/>
           </a:p>
@@ -2532,6 +2514,7 @@
           <a:p>
             <a:fld id="{C1FF6DA9-008F-8B48-92A6-B652298478BF}" type="slidenum">
               <a:rPr lang="en-US" smtClean="0"/>
+              <a:t>‹#›</a:t>
             </a:fld>
             <a:endParaRPr lang="en-US"/>
           </a:p>
@@ -2586,7 +2569,6 @@
               <a:rPr lang="en-US"/>
               <a:t>Click to edit Master title style</a:t>
             </a:r>
-            <a:endParaRPr lang="en-US"/>
           </a:p>
         </p:txBody>
       </p:sp>
@@ -2615,7 +2597,6 @@
               <a:rPr lang="en-US"/>
               <a:t>Click to edit Master text styles</a:t>
             </a:r>
-            <a:endParaRPr lang="en-US"/>
           </a:p>
           <a:p>
             <a:pPr lvl="1"/>
@@ -2623,7 +2604,6 @@
               <a:rPr lang="en-US"/>
               <a:t>Second level</a:t>
             </a:r>
-            <a:endParaRPr lang="en-US"/>
           </a:p>
           <a:p>
             <a:pPr lvl="2"/>
@@ -2631,7 +2611,6 @@
               <a:rPr lang="en-US"/>
               <a:t>Third level</a:t>
             </a:r>
-            <a:endParaRPr lang="en-US"/>
           </a:p>
           <a:p>
             <a:pPr lvl="3"/>
@@ -2639,7 +2618,6 @@
               <a:rPr lang="en-US"/>
               <a:t>Fourth level</a:t>
             </a:r>
-            <a:endParaRPr lang="en-US"/>
           </a:p>
           <a:p>
             <a:pPr lvl="4"/>
@@ -2647,7 +2625,6 @@
               <a:rPr lang="en-US"/>
               <a:t>Fifth level</a:t>
             </a:r>
-            <a:endParaRPr lang="en-US"/>
           </a:p>
         </p:txBody>
       </p:sp>
@@ -2668,6 +2645,7 @@
           <a:p>
             <a:fld id="{5BCAD085-E8A6-8845-BD4E-CB4CCA059FC4}" type="datetimeFigureOut">
               <a:rPr lang="en-US" smtClean="0"/>
+              <a:t>5/26/26</a:t>
             </a:fld>
             <a:endParaRPr lang="en-US"/>
           </a:p>
@@ -2709,6 +2687,7 @@
           <a:p>
             <a:fld id="{C1FF6DA9-008F-8B48-92A6-B652298478BF}" type="slidenum">
               <a:rPr lang="en-US" smtClean="0"/>
+              <a:t>‹#›</a:t>
             </a:fld>
             <a:endParaRPr lang="en-US"/>
           </a:p>
@@ -2758,7 +2737,6 @@
               <a:rPr lang="en-US"/>
               <a:t>Click to edit Master title style</a:t>
             </a:r>
-            <a:endParaRPr lang="en-US"/>
           </a:p>
         </p:txBody>
       </p:sp>
@@ -2782,7 +2760,6 @@
               <a:rPr lang="en-US"/>
               <a:t>Click to edit Master text styles</a:t>
             </a:r>
-            <a:endParaRPr lang="en-US"/>
           </a:p>
           <a:p>
             <a:pPr lvl="1"/>
@@ -2790,7 +2767,6 @@
               <a:rPr lang="en-US"/>
               <a:t>Second level</a:t>
             </a:r>
-            <a:endParaRPr lang="en-US"/>
           </a:p>
           <a:p>
             <a:pPr lvl="2"/>
@@ -2798,7 +2774,6 @@
               <a:rPr lang="en-US"/>
               <a:t>Third level</a:t>
             </a:r>
-            <a:endParaRPr lang="en-US"/>
           </a:p>
           <a:p>
             <a:pPr lvl="3"/>
@@ -2806,7 +2781,6 @@
               <a:rPr lang="en-US"/>
               <a:t>Fourth level</a:t>
             </a:r>
-            <a:endParaRPr lang="en-US"/>
           </a:p>
           <a:p>
             <a:pPr lvl="4"/>
@@ -2814,7 +2788,6 @@
               <a:rPr lang="en-US"/>
               <a:t>Fifth level</a:t>
             </a:r>
-            <a:endParaRPr lang="en-US"/>
           </a:p>
         </p:txBody>
       </p:sp>
@@ -2835,6 +2808,7 @@
           <a:p>
             <a:fld id="{5BCAD085-E8A6-8845-BD4E-CB4CCA059FC4}" type="datetimeFigureOut">
               <a:rPr lang="en-US" smtClean="0"/>
+              <a:t>5/26/26</a:t>
             </a:fld>
             <a:endParaRPr lang="en-US"/>
           </a:p>
@@ -2876,6 +2850,7 @@
           <a:p>
             <a:fld id="{C1FF6DA9-008F-8B48-92A6-B652298478BF}" type="slidenum">
               <a:rPr lang="en-US" smtClean="0"/>
+              <a:t>‹#›</a:t>
             </a:fld>
             <a:endParaRPr lang="en-US"/>
           </a:p>
@@ -2934,7 +2909,6 @@
               <a:rPr lang="en-US"/>
               <a:t>Click to edit Master title style</a:t>
             </a:r>
-            <a:endParaRPr lang="en-US"/>
           </a:p>
         </p:txBody>
       </p:sp>
@@ -3054,7 +3028,6 @@
               <a:rPr lang="en-US"/>
               <a:t>Click to edit Master text styles</a:t>
             </a:r>
-            <a:endParaRPr lang="en-US"/>
           </a:p>
         </p:txBody>
       </p:sp>
@@ -3075,6 +3048,7 @@
           <a:p>
             <a:fld id="{5BCAD085-E8A6-8845-BD4E-CB4CCA059FC4}" type="datetimeFigureOut">
               <a:rPr lang="en-US" smtClean="0"/>
+              <a:t>5/26/26</a:t>
             </a:fld>
             <a:endParaRPr lang="en-US"/>
           </a:p>
@@ -3116,6 +3090,7 @@
           <a:p>
             <a:fld id="{C1FF6DA9-008F-8B48-92A6-B652298478BF}" type="slidenum">
               <a:rPr lang="en-US" smtClean="0"/>
+              <a:t>‹#›</a:t>
             </a:fld>
             <a:endParaRPr lang="en-US"/>
           </a:p>
@@ -3165,7 +3140,6 @@
               <a:rPr lang="en-US"/>
               <a:t>Click to edit Master title style</a:t>
             </a:r>
-            <a:endParaRPr lang="en-US"/>
           </a:p>
         </p:txBody>
       </p:sp>
@@ -3222,7 +3196,6 @@
               <a:rPr lang="en-US"/>
               <a:t>Click to edit Master text styles</a:t>
             </a:r>
-            <a:endParaRPr lang="en-US"/>
           </a:p>
           <a:p>
             <a:pPr lvl="1"/>
@@ -3230,7 +3203,6 @@
               <a:rPr lang="en-US"/>
               <a:t>Second level</a:t>
             </a:r>
-            <a:endParaRPr lang="en-US"/>
           </a:p>
           <a:p>
             <a:pPr lvl="2"/>
@@ -3238,7 +3210,6 @@
               <a:rPr lang="en-US"/>
               <a:t>Third level</a:t>
             </a:r>
-            <a:endParaRPr lang="en-US"/>
           </a:p>
           <a:p>
             <a:pPr lvl="3"/>
@@ -3246,7 +3217,6 @@
               <a:rPr lang="en-US"/>
               <a:t>Fourth level</a:t>
             </a:r>
-            <a:endParaRPr lang="en-US"/>
           </a:p>
           <a:p>
             <a:pPr lvl="4"/>
@@ -3254,7 +3224,6 @@
               <a:rPr lang="en-US"/>
               <a:t>Fifth level</a:t>
             </a:r>
-            <a:endParaRPr lang="en-US"/>
           </a:p>
         </p:txBody>
       </p:sp>
@@ -3311,7 +3280,6 @@
               <a:rPr lang="en-US"/>
               <a:t>Click to edit Master text styles</a:t>
             </a:r>
-            <a:endParaRPr lang="en-US"/>
           </a:p>
           <a:p>
             <a:pPr lvl="1"/>
@@ -3319,7 +3287,6 @@
               <a:rPr lang="en-US"/>
               <a:t>Second level</a:t>
             </a:r>
-            <a:endParaRPr lang="en-US"/>
           </a:p>
           <a:p>
             <a:pPr lvl="2"/>
@@ -3327,7 +3294,6 @@
               <a:rPr lang="en-US"/>
               <a:t>Third level</a:t>
             </a:r>
-            <a:endParaRPr lang="en-US"/>
           </a:p>
           <a:p>
             <a:pPr lvl="3"/>
@@ -3335,7 +3301,6 @@
               <a:rPr lang="en-US"/>
               <a:t>Fourth level</a:t>
             </a:r>
-            <a:endParaRPr lang="en-US"/>
           </a:p>
           <a:p>
             <a:pPr lvl="4"/>
@@ -3343,7 +3308,6 @@
               <a:rPr lang="en-US"/>
               <a:t>Fifth level</a:t>
             </a:r>
-            <a:endParaRPr lang="en-US"/>
           </a:p>
         </p:txBody>
       </p:sp>
@@ -3364,6 +3328,7 @@
           <a:p>
             <a:fld id="{5BCAD085-E8A6-8845-BD4E-CB4CCA059FC4}" type="datetimeFigureOut">
               <a:rPr lang="en-US" smtClean="0"/>
+              <a:t>5/26/26</a:t>
             </a:fld>
             <a:endParaRPr lang="en-US"/>
           </a:p>
@@ -3405,6 +3370,7 @@
           <a:p>
             <a:fld id="{C1FF6DA9-008F-8B48-92A6-B652298478BF}" type="slidenum">
               <a:rPr lang="en-US" smtClean="0"/>
+              <a:t>‹#›</a:t>
             </a:fld>
             <a:endParaRPr lang="en-US"/>
           </a:p>
@@ -3458,7 +3424,6 @@
               <a:rPr lang="en-US"/>
               <a:t>Click to edit Master title style</a:t>
             </a:r>
-            <a:endParaRPr lang="en-US"/>
           </a:p>
         </p:txBody>
       </p:sp>
@@ -3524,7 +3489,6 @@
               <a:rPr lang="en-US"/>
               <a:t>Click to edit Master text styles</a:t>
             </a:r>
-            <a:endParaRPr lang="en-US"/>
           </a:p>
         </p:txBody>
       </p:sp>
@@ -3581,7 +3545,6 @@
               <a:rPr lang="en-US"/>
               <a:t>Click to edit Master text styles</a:t>
             </a:r>
-            <a:endParaRPr lang="en-US"/>
           </a:p>
           <a:p>
             <a:pPr lvl="1"/>
@@ -3589,7 +3552,6 @@
               <a:rPr lang="en-US"/>
               <a:t>Second level</a:t>
             </a:r>
-            <a:endParaRPr lang="en-US"/>
           </a:p>
           <a:p>
             <a:pPr lvl="2"/>
@@ -3597,7 +3559,6 @@
               <a:rPr lang="en-US"/>
               <a:t>Third level</a:t>
             </a:r>
-            <a:endParaRPr lang="en-US"/>
           </a:p>
           <a:p>
             <a:pPr lvl="3"/>
@@ -3605,7 +3566,6 @@
               <a:rPr lang="en-US"/>
               <a:t>Fourth level</a:t>
             </a:r>
-            <a:endParaRPr lang="en-US"/>
           </a:p>
           <a:p>
             <a:pPr lvl="4"/>
@@ -3613,7 +3573,6 @@
               <a:rPr lang="en-US"/>
               <a:t>Fifth level</a:t>
             </a:r>
-            <a:endParaRPr lang="en-US"/>
           </a:p>
         </p:txBody>
       </p:sp>
@@ -3679,7 +3638,6 @@
               <a:rPr lang="en-US"/>
               <a:t>Click to edit Master text styles</a:t>
             </a:r>
-            <a:endParaRPr lang="en-US"/>
           </a:p>
         </p:txBody>
       </p:sp>
@@ -3736,7 +3694,6 @@
               <a:rPr lang="en-US"/>
               <a:t>Click to edit Master text styles</a:t>
             </a:r>
-            <a:endParaRPr lang="en-US"/>
           </a:p>
           <a:p>
             <a:pPr lvl="1"/>
@@ -3744,7 +3701,6 @@
               <a:rPr lang="en-US"/>
               <a:t>Second level</a:t>
             </a:r>
-            <a:endParaRPr lang="en-US"/>
           </a:p>
           <a:p>
             <a:pPr lvl="2"/>
@@ -3752,7 +3708,6 @@
               <a:rPr lang="en-US"/>
               <a:t>Third level</a:t>
             </a:r>
-            <a:endParaRPr lang="en-US"/>
           </a:p>
           <a:p>
             <a:pPr lvl="3"/>
@@ -3760,7 +3715,6 @@
               <a:rPr lang="en-US"/>
               <a:t>Fourth level</a:t>
             </a:r>
-            <a:endParaRPr lang="en-US"/>
           </a:p>
           <a:p>
             <a:pPr lvl="4"/>
@@ -3768,7 +3722,6 @@
               <a:rPr lang="en-US"/>
               <a:t>Fifth level</a:t>
             </a:r>
-            <a:endParaRPr lang="en-US"/>
           </a:p>
         </p:txBody>
       </p:sp>
@@ -3789,6 +3742,7 @@
           <a:p>
             <a:fld id="{5BCAD085-E8A6-8845-BD4E-CB4CCA059FC4}" type="datetimeFigureOut">
               <a:rPr lang="en-US" smtClean="0"/>
+              <a:t>5/26/26</a:t>
             </a:fld>
             <a:endParaRPr lang="en-US"/>
           </a:p>
@@ -3830,6 +3784,7 @@
           <a:p>
             <a:fld id="{C1FF6DA9-008F-8B48-92A6-B652298478BF}" type="slidenum">
               <a:rPr lang="en-US" smtClean="0"/>
+              <a:t>‹#›</a:t>
             </a:fld>
             <a:endParaRPr lang="en-US"/>
           </a:p>
@@ -3879,7 +3834,6 @@
               <a:rPr lang="en-US"/>
               <a:t>Click to edit Master title style</a:t>
             </a:r>
-            <a:endParaRPr lang="en-US"/>
           </a:p>
         </p:txBody>
       </p:sp>
@@ -3900,6 +3854,7 @@
           <a:p>
             <a:fld id="{5BCAD085-E8A6-8845-BD4E-CB4CCA059FC4}" type="datetimeFigureOut">
               <a:rPr lang="en-US" smtClean="0"/>
+              <a:t>5/26/26</a:t>
             </a:fld>
             <a:endParaRPr lang="en-US"/>
           </a:p>
@@ -3941,6 +3896,7 @@
           <a:p>
             <a:fld id="{C1FF6DA9-008F-8B48-92A6-B652298478BF}" type="slidenum">
               <a:rPr lang="en-US" smtClean="0"/>
+              <a:t>‹#›</a:t>
             </a:fld>
             <a:endParaRPr lang="en-US"/>
           </a:p>
@@ -3988,6 +3944,7 @@
           <a:p>
             <a:fld id="{5BCAD085-E8A6-8845-BD4E-CB4CCA059FC4}" type="datetimeFigureOut">
               <a:rPr lang="en-US" smtClean="0"/>
+              <a:t>5/26/26</a:t>
             </a:fld>
             <a:endParaRPr lang="en-US"/>
           </a:p>
@@ -4029,6 +3986,7 @@
           <a:p>
             <a:fld id="{C1FF6DA9-008F-8B48-92A6-B652298478BF}" type="slidenum">
               <a:rPr lang="en-US" smtClean="0"/>
+              <a:t>‹#›</a:t>
             </a:fld>
             <a:endParaRPr lang="en-US"/>
           </a:p>
@@ -4087,7 +4045,6 @@
               <a:rPr lang="en-US"/>
               <a:t>Click to edit Master title style</a:t>
             </a:r>
-            <a:endParaRPr lang="en-US"/>
           </a:p>
         </p:txBody>
       </p:sp>
@@ -4144,7 +4101,6 @@
               <a:rPr lang="en-US"/>
               <a:t>Click to edit Master text styles</a:t>
             </a:r>
-            <a:endParaRPr lang="en-US"/>
           </a:p>
           <a:p>
             <a:pPr lvl="1"/>
@@ -4152,7 +4108,6 @@
               <a:rPr lang="en-US"/>
               <a:t>Second level</a:t>
             </a:r>
-            <a:endParaRPr lang="en-US"/>
           </a:p>
           <a:p>
             <a:pPr lvl="2"/>
@@ -4160,7 +4115,6 @@
               <a:rPr lang="en-US"/>
               <a:t>Third level</a:t>
             </a:r>
-            <a:endParaRPr lang="en-US"/>
           </a:p>
           <a:p>
             <a:pPr lvl="3"/>
@@ -4168,7 +4122,6 @@
               <a:rPr lang="en-US"/>
               <a:t>Fourth level</a:t>
             </a:r>
-            <a:endParaRPr lang="en-US"/>
           </a:p>
           <a:p>
             <a:pPr lvl="4"/>
@@ -4176,7 +4129,6 @@
               <a:rPr lang="en-US"/>
               <a:t>Fifth level</a:t>
             </a:r>
-            <a:endParaRPr lang="en-US"/>
           </a:p>
         </p:txBody>
       </p:sp>
@@ -4242,7 +4194,6 @@
               <a:rPr lang="en-US"/>
               <a:t>Click to edit Master text styles</a:t>
             </a:r>
-            <a:endParaRPr lang="en-US"/>
           </a:p>
         </p:txBody>
       </p:sp>
@@ -4263,6 +4214,7 @@
           <a:p>
             <a:fld id="{5BCAD085-E8A6-8845-BD4E-CB4CCA059FC4}" type="datetimeFigureOut">
               <a:rPr lang="en-US" smtClean="0"/>
+              <a:t>5/26/26</a:t>
             </a:fld>
             <a:endParaRPr lang="en-US"/>
           </a:p>
@@ -4304,6 +4256,7 @@
           <a:p>
             <a:fld id="{C1FF6DA9-008F-8B48-92A6-B652298478BF}" type="slidenum">
               <a:rPr lang="en-US" smtClean="0"/>
+              <a:t>‹#›</a:t>
             </a:fld>
             <a:endParaRPr lang="en-US"/>
           </a:p>
@@ -4362,7 +4315,6 @@
               <a:rPr lang="en-US"/>
               <a:t>Click to edit Master title style</a:t>
             </a:r>
-            <a:endParaRPr lang="en-US"/>
           </a:p>
         </p:txBody>
       </p:sp>
@@ -4489,7 +4441,6 @@
               <a:rPr lang="en-US"/>
               <a:t>Click to edit Master text styles</a:t>
             </a:r>
-            <a:endParaRPr lang="en-US"/>
           </a:p>
         </p:txBody>
       </p:sp>
@@ -4510,6 +4461,7 @@
           <a:p>
             <a:fld id="{5BCAD085-E8A6-8845-BD4E-CB4CCA059FC4}" type="datetimeFigureOut">
               <a:rPr lang="en-US" smtClean="0"/>
+              <a:t>5/26/26</a:t>
             </a:fld>
             <a:endParaRPr lang="en-US"/>
           </a:p>
@@ -4551,6 +4503,7 @@
           <a:p>
             <a:fld id="{C1FF6DA9-008F-8B48-92A6-B652298478BF}" type="slidenum">
               <a:rPr lang="en-US" smtClean="0"/>
+              <a:t>‹#›</a:t>
             </a:fld>
             <a:endParaRPr lang="en-US"/>
           </a:p>
@@ -4615,7 +4568,6 @@
               <a:rPr lang="en-US"/>
               <a:t>Click to edit Master title style</a:t>
             </a:r>
-            <a:endParaRPr lang="en-US"/>
           </a:p>
         </p:txBody>
       </p:sp>
@@ -4649,7 +4601,6 @@
               <a:rPr lang="en-US"/>
               <a:t>Click to edit Master text styles</a:t>
             </a:r>
-            <a:endParaRPr lang="en-US"/>
           </a:p>
           <a:p>
             <a:pPr lvl="1"/>
@@ -4657,7 +4608,6 @@
               <a:rPr lang="en-US"/>
               <a:t>Second level</a:t>
             </a:r>
-            <a:endParaRPr lang="en-US"/>
           </a:p>
           <a:p>
             <a:pPr lvl="2"/>
@@ -4665,7 +4615,6 @@
               <a:rPr lang="en-US"/>
               <a:t>Third level</a:t>
             </a:r>
-            <a:endParaRPr lang="en-US"/>
           </a:p>
           <a:p>
             <a:pPr lvl="3"/>
@@ -4673,7 +4622,6 @@
               <a:rPr lang="en-US"/>
               <a:t>Fourth level</a:t>
             </a:r>
-            <a:endParaRPr lang="en-US"/>
           </a:p>
           <a:p>
             <a:pPr lvl="4"/>
@@ -4681,7 +4629,6 @@
               <a:rPr lang="en-US"/>
               <a:t>Fifth level</a:t>
             </a:r>
-            <a:endParaRPr lang="en-US"/>
           </a:p>
         </p:txBody>
       </p:sp>
@@ -4720,6 +4667,7 @@
           <a:p>
             <a:fld id="{5BCAD085-E8A6-8845-BD4E-CB4CCA059FC4}" type="datetimeFigureOut">
               <a:rPr lang="en-US" smtClean="0"/>
+              <a:t>5/26/26</a:t>
             </a:fld>
             <a:endParaRPr lang="en-US"/>
           </a:p>
@@ -4797,6 +4745,7 @@
           <a:p>
             <a:fld id="{C1FF6DA9-008F-8B48-92A6-B652298478BF}" type="slidenum">
               <a:rPr lang="en-US" smtClean="0"/>
+              <a:t>‹#›</a:t>
             </a:fld>
             <a:endParaRPr lang="en-US"/>
           </a:p>
@@ -5105,14 +5054,14 @@
           <p:nvPr/>
         </p:nvPicPr>
         <p:blipFill>
-          <a:blip r:embed="rId1">
+          <a:blip r:embed="rId3">
             <a:lum bright="70000" contrast="-70000"/>
             <a:extLst>
               <a:ext uri="{BEBA8EAE-BF5A-486C-A8C5-ECC9F3942E4B}">
                 <a14:imgProps xmlns:a14="http://schemas.microsoft.com/office/drawing/2010/main">
-                  <a14:imgLayer r:embed="rId2">
+                  <a14:imgLayer r:embed="rId4">
                     <a14:imgEffect>
-                      <a14:artisticPhotocopy trans="30000" detail="2"/>
+                      <a14:artisticPhotocopy detail="2"/>
                     </a14:imgEffect>
                   </a14:imgLayer>
                 </a14:imgProps>
@@ -5192,13 +5141,6 @@
               </a:rPr>
               <a:t>STABLECOINS AND THE EXORBITANT PRIVILEGE</a:t>
             </a:r>
-            <a:endParaRPr lang="en-US" altLang="ko-KR" sz="2400" dirty="0">
-              <a:solidFill>
-                <a:prstClr val="white"/>
-              </a:solidFill>
-              <a:latin typeface="Hiragino Kaku Gothic Std W8" panose="020B0800000000000000" pitchFamily="34" charset="-128"/>
-              <a:ea typeface="Hiragino Kaku Gothic Std W8" panose="020B0800000000000000" pitchFamily="34" charset="-128"/>
-            </a:endParaRPr>
           </a:p>
           <a:p>
             <a:pPr algn="ctr" defTabSz="914400" latinLnBrk="1">
@@ -5244,11 +5186,6 @@
               </a:rPr>
               <a:t>Yonsei GSIS 2026-1 </a:t>
             </a:r>
-            <a:endParaRPr lang="en-US" altLang="ko-KR" sz="1800" b="1" dirty="0">
-              <a:solidFill>
-                <a:schemeClr val="bg1"/>
-              </a:solidFill>
-            </a:endParaRPr>
           </a:p>
           <a:p>
             <a:r>
@@ -5362,6 +5299,7 @@
           <a:lstStyle/>
           <a:p>
             <a:pPr algn="ctr"/>
+            <a:endParaRPr/>
           </a:p>
         </p:txBody>
       </p:sp>
@@ -5397,12 +5335,6 @@
               </a:rPr>
               <a:t>Roadmap</a:t>
             </a:r>
-            <a:endParaRPr sz="2600" b="0" i="0" dirty="0">
-              <a:solidFill>
-                <a:srgbClr val="FFFFFF"/>
-              </a:solidFill>
-              <a:latin typeface="Calibri"/>
-            </a:endParaRPr>
           </a:p>
         </p:txBody>
       </p:sp>
@@ -5446,6 +5378,7 @@
           <a:lstStyle/>
           <a:p>
             <a:pPr algn="ctr"/>
+            <a:endParaRPr/>
           </a:p>
         </p:txBody>
       </p:sp>
@@ -5481,12 +5414,6 @@
               </a:rPr>
               <a:t>What we have done</a:t>
             </a:r>
-            <a:endParaRPr sz="1500" b="1" i="0">
-              <a:solidFill>
-                <a:srgbClr val="FFFFFF"/>
-              </a:solidFill>
-              <a:latin typeface="Calibri"/>
-            </a:endParaRPr>
           </a:p>
         </p:txBody>
       </p:sp>
@@ -5530,6 +5457,7 @@
           <a:lstStyle/>
           <a:p>
             <a:pPr algn="ctr"/>
+            <a:endParaRPr/>
           </a:p>
         </p:txBody>
       </p:sp>
@@ -5565,12 +5493,6 @@
               </a:rPr>
               <a:t>Theory</a:t>
             </a:r>
-            <a:endParaRPr sz="1100" b="1" i="0">
-              <a:solidFill>
-                <a:srgbClr val="FFFFFF"/>
-              </a:solidFill>
-              <a:latin typeface="Calibri"/>
-            </a:endParaRPr>
           </a:p>
         </p:txBody>
       </p:sp>
@@ -5614,6 +5536,7 @@
           <a:lstStyle/>
           <a:p>
             <a:pPr algn="ctr"/>
+            <a:endParaRPr/>
           </a:p>
         </p:txBody>
       </p:sp>
@@ -5667,12 +5590,6 @@
               </a:rPr>
               <a:t>, and liquid buffer L</a:t>
             </a:r>
-            <a:endParaRPr sz="1200" b="0" i="0" dirty="0">
-              <a:solidFill>
-                <a:srgbClr val="1A1A2E"/>
-              </a:solidFill>
-              <a:latin typeface="Calibri"/>
-            </a:endParaRPr>
           </a:p>
         </p:txBody>
       </p:sp>
@@ -5716,6 +5633,7 @@
           <a:lstStyle/>
           <a:p>
             <a:pPr algn="ctr"/>
+            <a:endParaRPr/>
           </a:p>
         </p:txBody>
       </p:sp>
@@ -5751,12 +5669,6 @@
               </a:rPr>
               <a:t>Regression</a:t>
             </a:r>
-            <a:endParaRPr sz="1100" b="1" i="0">
-              <a:solidFill>
-                <a:srgbClr val="FFFFFF"/>
-              </a:solidFill>
-              <a:latin typeface="Calibri"/>
-            </a:endParaRPr>
           </a:p>
         </p:txBody>
       </p:sp>
@@ -5800,6 +5712,7 @@
           <a:lstStyle/>
           <a:p>
             <a:pPr algn="ctr"/>
+            <a:endParaRPr/>
           </a:p>
         </p:txBody>
       </p:sp>
@@ -5835,12 +5748,6 @@
               </a:rPr>
               <a:t>✓  β₁ = −6.02** — stablecoin growth compresses OIS–Treasury spreads (privilege amplification)</a:t>
             </a:r>
-            <a:endParaRPr sz="1200" b="0" i="0" dirty="0">
-              <a:solidFill>
-                <a:srgbClr val="1A1A2E"/>
-              </a:solidFill>
-              <a:latin typeface="Calibri"/>
-            </a:endParaRPr>
           </a:p>
         </p:txBody>
       </p:sp>
@@ -5884,6 +5791,7 @@
           <a:lstStyle/>
           <a:p>
             <a:pPr algn="ctr"/>
+            <a:endParaRPr/>
           </a:p>
         </p:txBody>
       </p:sp>
@@ -5919,12 +5827,6 @@
               </a:rPr>
               <a:t>Threshold</a:t>
             </a:r>
-            <a:endParaRPr sz="1100" b="1" i="0">
-              <a:solidFill>
-                <a:srgbClr val="FFFFFF"/>
-              </a:solidFill>
-              <a:latin typeface="Calibri"/>
-            </a:endParaRPr>
           </a:p>
         </p:txBody>
       </p:sp>
@@ -5968,6 +5870,7 @@
           <a:lstStyle/>
           <a:p>
             <a:pPr algn="ctr"/>
+            <a:endParaRPr/>
           </a:p>
         </p:txBody>
       </p:sp>
@@ -6003,12 +5906,6 @@
               </a:rPr>
               <a:t>✓  Hansen (2000) threshold at q* = 13% liquid cash — separates safe from fragile regime</a:t>
             </a:r>
-            <a:endParaRPr sz="1200" b="0" i="0" dirty="0">
-              <a:solidFill>
-                <a:srgbClr val="1A1A2E"/>
-              </a:solidFill>
-              <a:latin typeface="Calibri"/>
-            </a:endParaRPr>
           </a:p>
         </p:txBody>
       </p:sp>
@@ -6052,6 +5949,7 @@
           <a:lstStyle/>
           <a:p>
             <a:pPr algn="ctr"/>
+            <a:endParaRPr/>
           </a:p>
         </p:txBody>
       </p:sp>
@@ -6087,12 +5985,6 @@
               </a:rPr>
               <a:t>Event Study</a:t>
             </a:r>
-            <a:endParaRPr sz="1100" b="1" i="0">
-              <a:solidFill>
-                <a:srgbClr val="FFFFFF"/>
-              </a:solidFill>
-              <a:latin typeface="Calibri"/>
-            </a:endParaRPr>
           </a:p>
         </p:txBody>
       </p:sp>
@@ -6136,6 +6028,7 @@
           <a:lstStyle/>
           <a:p>
             <a:pPr algn="ctr"/>
+            <a:endParaRPr/>
           </a:p>
         </p:txBody>
       </p:sp>
@@ -6189,12 +6082,6 @@
               </a:rPr>
               <a:t>, SVB) — 27 pp CAR swing between low/high buffer regimes</a:t>
             </a:r>
-            <a:endParaRPr sz="1200" b="0" i="0" dirty="0">
-              <a:solidFill>
-                <a:srgbClr val="1A1A2E"/>
-              </a:solidFill>
-              <a:latin typeface="Calibri"/>
-            </a:endParaRPr>
           </a:p>
         </p:txBody>
       </p:sp>
@@ -6238,6 +6125,7 @@
           <a:lstStyle/>
           <a:p>
             <a:pPr algn="ctr"/>
+            <a:endParaRPr/>
           </a:p>
         </p:txBody>
       </p:sp>
@@ -6273,12 +6161,6 @@
               </a:rPr>
               <a:t>Robustness</a:t>
             </a:r>
-            <a:endParaRPr sz="1100" b="1" i="0">
-              <a:solidFill>
-                <a:srgbClr val="FFFFFF"/>
-              </a:solidFill>
-              <a:latin typeface="Calibri"/>
-            </a:endParaRPr>
           </a:p>
         </p:txBody>
       </p:sp>
@@ -6322,6 +6204,7 @@
           <a:lstStyle/>
           <a:p>
             <a:pPr algn="ctr"/>
+            <a:endParaRPr/>
           </a:p>
         </p:txBody>
       </p:sp>
@@ -6357,12 +6240,6 @@
               </a:rPr>
               <a:t>✓  Mean-centering (VIF), Engle-Granger cointegration, first-differenced spec, post-2023 subsample</a:t>
             </a:r>
-            <a:endParaRPr sz="1200" b="0" i="0" dirty="0">
-              <a:solidFill>
-                <a:srgbClr val="1A1A2E"/>
-              </a:solidFill>
-              <a:latin typeface="Calibri"/>
-            </a:endParaRPr>
           </a:p>
         </p:txBody>
       </p:sp>
@@ -6408,6 +6285,7 @@
           <a:lstStyle/>
           <a:p>
             <a:pPr algn="ctr"/>
+            <a:endParaRPr/>
           </a:p>
         </p:txBody>
       </p:sp>
@@ -6443,12 +6321,6 @@
               </a:rPr>
               <a:t>This deck</a:t>
             </a:r>
-            <a:endParaRPr sz="1100" b="1" i="0" dirty="0">
-              <a:solidFill>
-                <a:srgbClr val="FFFFFF"/>
-              </a:solidFill>
-              <a:latin typeface="Calibri"/>
-            </a:endParaRPr>
           </a:p>
         </p:txBody>
       </p:sp>
@@ -6492,6 +6364,7 @@
           <a:lstStyle/>
           <a:p>
             <a:pPr algn="ctr"/>
+            <a:endParaRPr/>
           </a:p>
         </p:txBody>
       </p:sp>
@@ -6527,12 +6400,6 @@
               </a:rPr>
               <a:t>✓  Clarified: why OIS spread, what the buffer condition means, how to read CAR, what each event was</a:t>
             </a:r>
-            <a:endParaRPr sz="1200" b="0" i="0" dirty="0">
-              <a:solidFill>
-                <a:srgbClr val="1A1A2E"/>
-              </a:solidFill>
-              <a:latin typeface="Calibri"/>
-            </a:endParaRPr>
           </a:p>
         </p:txBody>
       </p:sp>
@@ -6642,6 +6509,7 @@
           <a:lstStyle/>
           <a:p>
             <a:pPr algn="ctr"/>
+            <a:endParaRPr/>
           </a:p>
         </p:txBody>
       </p:sp>
@@ -6685,6 +6553,7 @@
           <a:lstStyle/>
           <a:p>
             <a:pPr algn="ctr"/>
+            <a:endParaRPr/>
           </a:p>
         </p:txBody>
       </p:sp>
@@ -6720,12 +6589,6 @@
               </a:rPr>
               <a:t>Why OIS–Treasury Spread, Not Raw Yields?</a:t>
             </a:r>
-            <a:endParaRPr sz="2600" b="0" i="0">
-              <a:solidFill>
-                <a:srgbClr val="FFFFFF"/>
-              </a:solidFill>
-              <a:latin typeface="Calibri"/>
-            </a:endParaRPr>
           </a:p>
         </p:txBody>
       </p:sp>
@@ -6761,12 +6624,6 @@
               </a:rPr>
               <a:t>3</a:t>
             </a:r>
-            <a:endParaRPr sz="1300" b="0" i="0">
-              <a:solidFill>
-                <a:srgbClr val="555566"/>
-              </a:solidFill>
-              <a:latin typeface="Calibri"/>
-            </a:endParaRPr>
           </a:p>
         </p:txBody>
       </p:sp>
@@ -6810,6 +6667,7 @@
           <a:lstStyle/>
           <a:p>
             <a:pPr algn="ctr"/>
+            <a:endParaRPr/>
           </a:p>
         </p:txBody>
       </p:sp>
@@ -6845,12 +6703,6 @@
               </a:rPr>
               <a:t>A T-bill yield moves for two reasons simultaneously. We need to separate them.</a:t>
             </a:r>
-            <a:endParaRPr sz="1400" b="0" i="1">
-              <a:solidFill>
-                <a:srgbClr val="1B3A72"/>
-              </a:solidFill>
-              <a:latin typeface="Calibri"/>
-            </a:endParaRPr>
           </a:p>
         </p:txBody>
       </p:sp>
@@ -6894,6 +6746,7 @@
           <a:lstStyle/>
           <a:p>
             <a:pPr algn="ctr"/>
+            <a:endParaRPr/>
           </a:p>
         </p:txBody>
       </p:sp>
@@ -6929,12 +6782,6 @@
               </a:rPr>
               <a:t>Raw T-bill Yield</a:t>
             </a:r>
-            <a:endParaRPr sz="1300" b="1" i="0">
-              <a:solidFill>
-                <a:srgbClr val="FFFFFF"/>
-              </a:solidFill>
-              <a:latin typeface="Calibri"/>
-            </a:endParaRPr>
           </a:p>
         </p:txBody>
       </p:sp>
@@ -6970,12 +6817,6 @@
               </a:rPr>
               <a:t>(what we did NOT use)</a:t>
             </a:r>
-            <a:endParaRPr sz="1100" b="0" i="1" dirty="0">
-              <a:solidFill>
-                <a:srgbClr val="FFFFFF"/>
-              </a:solidFill>
-              <a:latin typeface="Calibri"/>
-            </a:endParaRPr>
           </a:p>
         </p:txBody>
       </p:sp>
@@ -7019,6 +6860,7 @@
           <a:lstStyle/>
           <a:p>
             <a:pPr algn="ctr"/>
+            <a:endParaRPr/>
           </a:p>
         </p:txBody>
       </p:sp>
@@ -7066,12 +6908,6 @@
               </a:rPr>
               <a:t>•  Driven by Fed rate expectations</a:t>
             </a:r>
-            <a:endParaRPr sz="1300" b="0" i="0" dirty="0">
-              <a:solidFill>
-                <a:srgbClr val="1A1A2E"/>
-              </a:solidFill>
-              <a:latin typeface="Calibri"/>
-            </a:endParaRPr>
           </a:p>
           <a:p>
             <a:pPr algn="l">
@@ -7088,12 +6924,6 @@
               </a:rPr>
               <a:t>•  Driven by inflation expectations</a:t>
             </a:r>
-            <a:endParaRPr sz="1300" b="0" i="0" dirty="0">
-              <a:solidFill>
-                <a:srgbClr val="1A1A2E"/>
-              </a:solidFill>
-              <a:latin typeface="Calibri"/>
-            </a:endParaRPr>
           </a:p>
           <a:p>
             <a:pPr algn="l">
@@ -7110,12 +6940,6 @@
               </a:rPr>
               <a:t>•  Driven by safe-asset demand</a:t>
             </a:r>
-            <a:endParaRPr sz="1300" b="0" i="0" dirty="0">
-              <a:solidFill>
-                <a:srgbClr val="1A1A2E"/>
-              </a:solidFill>
-              <a:latin typeface="Calibri"/>
-            </a:endParaRPr>
           </a:p>
           <a:p>
             <a:pPr algn="l">
@@ -7132,12 +6956,6 @@
               </a:rPr>
               <a:t>•  Cannot distinguish these three forces</a:t>
             </a:r>
-            <a:endParaRPr sz="1300" b="0" i="0" dirty="0">
-              <a:solidFill>
-                <a:srgbClr val="1A1A2E"/>
-              </a:solidFill>
-              <a:latin typeface="Calibri"/>
-            </a:endParaRPr>
           </a:p>
         </p:txBody>
       </p:sp>
@@ -7181,6 +6999,7 @@
           <a:lstStyle/>
           <a:p>
             <a:pPr algn="ctr"/>
+            <a:endParaRPr/>
           </a:p>
         </p:txBody>
       </p:sp>
@@ -7216,12 +7035,6 @@
               </a:rPr>
               <a:t>OIS Rate</a:t>
             </a:r>
-            <a:endParaRPr sz="1300" b="1" i="0">
-              <a:solidFill>
-                <a:srgbClr val="FFFFFF"/>
-              </a:solidFill>
-              <a:latin typeface="Calibri"/>
-            </a:endParaRPr>
           </a:p>
         </p:txBody>
       </p:sp>
@@ -7257,12 +7070,6 @@
               </a:rPr>
               <a:t>(the subtracted benchmark)</a:t>
             </a:r>
-            <a:endParaRPr sz="1100" b="0" i="1" dirty="0">
-              <a:solidFill>
-                <a:srgbClr val="FFFFFF"/>
-              </a:solidFill>
-              <a:latin typeface="Calibri"/>
-            </a:endParaRPr>
           </a:p>
         </p:txBody>
       </p:sp>
@@ -7306,6 +7113,7 @@
           <a:lstStyle/>
           <a:p>
             <a:pPr algn="ctr"/>
+            <a:endParaRPr/>
           </a:p>
         </p:txBody>
       </p:sp>
@@ -7353,12 +7161,6 @@
               </a:rPr>
               <a:t>•  Reflects expected Fed Funds path</a:t>
             </a:r>
-            <a:endParaRPr sz="1300" b="0" i="0" dirty="0">
-              <a:solidFill>
-                <a:srgbClr val="1A1A2E"/>
-              </a:solidFill>
-              <a:latin typeface="Calibri"/>
-            </a:endParaRPr>
           </a:p>
           <a:p>
             <a:pPr algn="l">
@@ -7375,12 +7177,6 @@
               </a:rPr>
               <a:t>•  Pure monetary policy expectations</a:t>
             </a:r>
-            <a:endParaRPr sz="1300" b="0" i="0" dirty="0">
-              <a:solidFill>
-                <a:srgbClr val="1A1A2E"/>
-              </a:solidFill>
-              <a:latin typeface="Calibri"/>
-            </a:endParaRPr>
           </a:p>
           <a:p>
             <a:pPr algn="l">
@@ -7397,12 +7193,6 @@
               </a:rPr>
               <a:t>•  No T-bill specific demand embedded</a:t>
             </a:r>
-            <a:endParaRPr sz="1300" b="0" i="0" dirty="0">
-              <a:solidFill>
-                <a:srgbClr val="1A1A2E"/>
-              </a:solidFill>
-              <a:latin typeface="Calibri"/>
-            </a:endParaRPr>
           </a:p>
           <a:p>
             <a:pPr algn="l">
@@ -7419,12 +7209,6 @@
               </a:rPr>
               <a:t>•  Moves with macro, not stablecoin flows</a:t>
             </a:r>
-            <a:endParaRPr sz="1300" b="0" i="0" dirty="0">
-              <a:solidFill>
-                <a:srgbClr val="1A1A2E"/>
-              </a:solidFill>
-              <a:latin typeface="Calibri"/>
-            </a:endParaRPr>
           </a:p>
         </p:txBody>
       </p:sp>
@@ -7468,6 +7252,7 @@
           <a:lstStyle/>
           <a:p>
             <a:pPr algn="ctr"/>
+            <a:endParaRPr/>
           </a:p>
         </p:txBody>
       </p:sp>
@@ -7503,12 +7288,6 @@
               </a:rPr>
               <a:t>OIS–Treasury Spread</a:t>
             </a:r>
-            <a:endParaRPr sz="1300" b="1" i="0">
-              <a:solidFill>
-                <a:srgbClr val="FFFFFF"/>
-              </a:solidFill>
-              <a:latin typeface="Calibri"/>
-            </a:endParaRPr>
           </a:p>
         </p:txBody>
       </p:sp>
@@ -7544,12 +7323,6 @@
               </a:rPr>
               <a:t>(our dependent variable)</a:t>
             </a:r>
-            <a:endParaRPr sz="1100" b="0" i="1" dirty="0">
-              <a:solidFill>
-                <a:srgbClr val="FFFFFF"/>
-              </a:solidFill>
-              <a:latin typeface="Calibri"/>
-            </a:endParaRPr>
           </a:p>
         </p:txBody>
       </p:sp>
@@ -7593,6 +7366,7 @@
           <a:lstStyle/>
           <a:p>
             <a:pPr algn="ctr"/>
+            <a:endParaRPr/>
           </a:p>
         </p:txBody>
       </p:sp>
@@ -7640,12 +7414,6 @@
               </a:rPr>
               <a:t>❖  = T-bill yield  −  OIS rate</a:t>
             </a:r>
-            <a:endParaRPr sz="1300" b="0" i="0" dirty="0">
-              <a:solidFill>
-                <a:srgbClr val="1A1A2E"/>
-              </a:solidFill>
-              <a:latin typeface="Calibri"/>
-            </a:endParaRPr>
           </a:p>
           <a:p>
             <a:pPr algn="l">
@@ -7662,12 +7430,6 @@
               </a:rPr>
               <a:t>❖  Cancels out monetary policy</a:t>
             </a:r>
-            <a:endParaRPr sz="1300" b="0" i="0" dirty="0">
-              <a:solidFill>
-                <a:srgbClr val="1A1A2E"/>
-              </a:solidFill>
-              <a:latin typeface="Calibri"/>
-            </a:endParaRPr>
           </a:p>
           <a:p>
             <a:pPr algn="l">
@@ -7684,12 +7446,6 @@
               </a:rPr>
               <a:t>❖  Isolates convenience / safety premium</a:t>
             </a:r>
-            <a:endParaRPr sz="1300" b="0" i="0" dirty="0">
-              <a:solidFill>
-                <a:srgbClr val="1A1A2E"/>
-              </a:solidFill>
-              <a:latin typeface="Calibri"/>
-            </a:endParaRPr>
           </a:p>
           <a:p>
             <a:pPr algn="l">
@@ -7706,12 +7462,6 @@
               </a:rPr>
               <a:t>❖  Only moves when T-bill demand shifts</a:t>
             </a:r>
-            <a:endParaRPr sz="1300" b="0" i="0" dirty="0">
-              <a:solidFill>
-                <a:srgbClr val="1A1A2E"/>
-              </a:solidFill>
-              <a:latin typeface="Calibri"/>
-            </a:endParaRPr>
           </a:p>
         </p:txBody>
       </p:sp>
@@ -7755,6 +7505,7 @@
           <a:lstStyle/>
           <a:p>
             <a:pPr algn="ctr"/>
+            <a:endParaRPr/>
           </a:p>
         </p:txBody>
       </p:sp>
@@ -7790,12 +7541,6 @@
               </a:rPr>
               <a:t>Literature precedent for using this spread as the convenience yield:</a:t>
             </a:r>
-            <a:endParaRPr sz="1300" b="1" i="0">
-              <a:solidFill>
-                <a:srgbClr val="FFFFFF"/>
-              </a:solidFill>
-              <a:latin typeface="Calibri"/>
-            </a:endParaRPr>
           </a:p>
         </p:txBody>
       </p:sp>
@@ -7839,6 +7584,7 @@
           <a:lstStyle/>
           <a:p>
             <a:pPr algn="ctr"/>
+            <a:endParaRPr/>
           </a:p>
         </p:txBody>
       </p:sp>
@@ -7875,12 +7621,6 @@
               <a:t>Krishnamurthy &amp;
 Vissing-Jorgensen (2012)</a:t>
             </a:r>
-            <a:endParaRPr sz="1200" b="1" i="0">
-              <a:solidFill>
-                <a:srgbClr val="1B3A72"/>
-              </a:solidFill>
-              <a:latin typeface="Calibri"/>
-            </a:endParaRPr>
           </a:p>
         </p:txBody>
       </p:sp>
@@ -7925,12 +7665,6 @@
               </a:rPr>
               <a:t>safety and liquidity</a:t>
             </a:r>
-            <a:endParaRPr sz="1100" b="1" i="0" dirty="0">
-              <a:solidFill>
-                <a:srgbClr val="1A1A2E"/>
-              </a:solidFill>
-              <a:latin typeface="Calibri"/>
-            </a:endParaRPr>
           </a:p>
         </p:txBody>
       </p:sp>
@@ -7974,6 +7708,7 @@
           <a:lstStyle/>
           <a:p>
             <a:pPr algn="ctr"/>
+            <a:endParaRPr/>
           </a:p>
         </p:txBody>
       </p:sp>
@@ -8009,12 +7744,6 @@
               </a:rPr>
               <a:t>Nagel (2016)</a:t>
             </a:r>
-            <a:endParaRPr sz="1200" b="1" i="0">
-              <a:solidFill>
-                <a:srgbClr val="1B3A72"/>
-              </a:solidFill>
-              <a:latin typeface="Calibri"/>
-            </a:endParaRPr>
           </a:p>
         </p:txBody>
       </p:sp>
@@ -8068,12 +7797,6 @@
               </a:rPr>
               <a:t>of near-money assets</a:t>
             </a:r>
-            <a:endParaRPr sz="1100" b="0" i="0" dirty="0">
-              <a:solidFill>
-                <a:srgbClr val="1A1A2E"/>
-              </a:solidFill>
-              <a:latin typeface="Calibri"/>
-            </a:endParaRPr>
           </a:p>
         </p:txBody>
       </p:sp>
@@ -8117,6 +7840,7 @@
           <a:lstStyle/>
           <a:p>
             <a:pPr algn="ctr"/>
+            <a:endParaRPr/>
           </a:p>
         </p:txBody>
       </p:sp>
@@ -8153,12 +7877,6 @@
               <a:t>Greenwood, Hanson
 &amp; Stein (2015)</a:t>
             </a:r>
-            <a:endParaRPr sz="1200" b="1" i="0">
-              <a:solidFill>
-                <a:srgbClr val="1B3A72"/>
-              </a:solidFill>
-              <a:latin typeface="Calibri"/>
-            </a:endParaRPr>
           </a:p>
         </p:txBody>
       </p:sp>
@@ -8203,12 +7921,6 @@
               </a:rPr>
               <a:t>insensitive to monetary policy</a:t>
             </a:r>
-            <a:endParaRPr sz="1100" b="1" i="0" dirty="0">
-              <a:solidFill>
-                <a:srgbClr val="1A1A2E"/>
-              </a:solidFill>
-              <a:latin typeface="Calibri"/>
-            </a:endParaRPr>
           </a:p>
         </p:txBody>
       </p:sp>
@@ -8252,6 +7964,7 @@
           <a:lstStyle/>
           <a:p>
             <a:pPr algn="ctr"/>
+            <a:endParaRPr/>
           </a:p>
         </p:txBody>
       </p:sp>
@@ -8287,12 +8000,6 @@
               </a:rPr>
               <a:t>When stablecoin issuers buy T-bills, T-bill yields fall but OIS does not move. Only the spread captures this demand shock. Raw yields would conflate it with Fed policy.</a:t>
             </a:r>
-            <a:endParaRPr sz="1700" b="1" i="0">
-              <a:solidFill>
-                <a:srgbClr val="FFFFFF"/>
-              </a:solidFill>
-              <a:latin typeface="Calibri"/>
-            </a:endParaRPr>
           </a:p>
         </p:txBody>
       </p:sp>
@@ -8402,6 +8109,7 @@
           <a:lstStyle/>
           <a:p>
             <a:pPr algn="ctr"/>
+            <a:endParaRPr/>
           </a:p>
         </p:txBody>
       </p:sp>
@@ -8445,6 +8153,7 @@
           <a:lstStyle/>
           <a:p>
             <a:pPr algn="ctr"/>
+            <a:endParaRPr/>
           </a:p>
         </p:txBody>
       </p:sp>
@@ -8480,12 +8189,6 @@
               </a:rPr>
               <a:t>What is the Buffer Condition?</a:t>
             </a:r>
-            <a:endParaRPr sz="2600" b="0" i="0">
-              <a:solidFill>
-                <a:srgbClr val="FFFFFF"/>
-              </a:solidFill>
-              <a:latin typeface="Calibri"/>
-            </a:endParaRPr>
           </a:p>
         </p:txBody>
       </p:sp>
@@ -8521,12 +8224,6 @@
               </a:rPr>
               <a:t>4</a:t>
             </a:r>
-            <a:endParaRPr sz="1300" b="0" i="0">
-              <a:solidFill>
-                <a:srgbClr val="555566"/>
-              </a:solidFill>
-              <a:latin typeface="Calibri"/>
-            </a:endParaRPr>
           </a:p>
         </p:txBody>
       </p:sp>
@@ -8570,6 +8267,7 @@
           <a:lstStyle/>
           <a:p>
             <a:pPr algn="ctr"/>
+            <a:endParaRPr/>
           </a:p>
         </p:txBody>
       </p:sp>
@@ -8605,12 +8303,6 @@
               </a:rPr>
               <a:t>Definition:</a:t>
             </a:r>
-            <a:endParaRPr sz="1400" b="1" i="0">
-              <a:solidFill>
-                <a:srgbClr val="AAC4E8"/>
-              </a:solidFill>
-              <a:latin typeface="Calibri"/>
-            </a:endParaRPr>
           </a:p>
         </p:txBody>
       </p:sp>
@@ -8667,13 +8359,6 @@
               </a:rPr>
               <a:t> Cash-Equivalent Reserves  ÷  Total Stablecoin Supply</a:t>
             </a:r>
-            <a:endParaRPr sz="1800" b="1" i="0" dirty="0">
-              <a:solidFill>
-                <a:srgbClr val="FFFFFF"/>
-              </a:solidFill>
-              <a:latin typeface="AppleGothic" pitchFamily="2" charset="-127"/>
-              <a:ea typeface="AppleGothic" pitchFamily="2" charset="-127"/>
-            </a:endParaRPr>
           </a:p>
         </p:txBody>
       </p:sp>
@@ -8709,12 +8394,6 @@
               </a:rPr>
               <a:t>Estimated from Hansen (2000) threshold regression:   L*  =  13%  of supply</a:t>
             </a:r>
-            <a:endParaRPr sz="1300" b="0" i="1" dirty="0">
-              <a:solidFill>
-                <a:srgbClr val="AAC4E8"/>
-              </a:solidFill>
-              <a:latin typeface="Calibri"/>
-            </a:endParaRPr>
           </a:p>
         </p:txBody>
       </p:sp>
@@ -8758,6 +8437,7 @@
           <a:lstStyle/>
           <a:p>
             <a:pPr algn="ctr"/>
+            <a:endParaRPr/>
           </a:p>
         </p:txBody>
       </p:sp>
@@ -8793,12 +8473,6 @@
               </a:rPr>
               <a:t>LOW BUFFER  (L &lt; 13%)</a:t>
             </a:r>
-            <a:endParaRPr sz="1400" b="1" i="0">
-              <a:solidFill>
-                <a:srgbClr val="FFFFFF"/>
-              </a:solidFill>
-              <a:latin typeface="Calibri"/>
-            </a:endParaRPr>
           </a:p>
         </p:txBody>
       </p:sp>
@@ -8834,12 +8508,6 @@
               </a:rPr>
               <a:t>e.g. Tether in May 2022: ~5–8% cash</a:t>
             </a:r>
-            <a:endParaRPr sz="1100" b="0" i="1" dirty="0">
-              <a:solidFill>
-                <a:srgbClr val="555566"/>
-              </a:solidFill>
-              <a:latin typeface="Calibri"/>
-            </a:endParaRPr>
           </a:p>
         </p:txBody>
       </p:sp>
@@ -8883,6 +8551,7 @@
           <a:lstStyle/>
           <a:p>
             <a:pPr algn="ctr"/>
+            <a:endParaRPr/>
           </a:p>
         </p:txBody>
       </p:sp>
@@ -8930,12 +8599,6 @@
               </a:rPr>
               <a:t>❖  Issuer holds mostly T-bills, very little cash</a:t>
             </a:r>
-            <a:endParaRPr sz="1300" b="0" i="0" dirty="0">
-              <a:solidFill>
-                <a:srgbClr val="1A1A2E"/>
-              </a:solidFill>
-              <a:latin typeface="Calibri"/>
-            </a:endParaRPr>
           </a:p>
           <a:p>
             <a:pPr algn="l">
@@ -8952,12 +8615,6 @@
               </a:rPr>
               <a:t>→  When investors redeem stablecoins for dollars...</a:t>
             </a:r>
-            <a:endParaRPr sz="1300" b="0" i="0" dirty="0">
-              <a:solidFill>
-                <a:srgbClr val="1A1A2E"/>
-              </a:solidFill>
-              <a:latin typeface="Calibri"/>
-            </a:endParaRPr>
           </a:p>
           <a:p>
             <a:pPr algn="l">
@@ -8974,12 +8631,6 @@
               </a:rPr>
               <a:t>→  Issuer MUST sell T-bills to raise the cash</a:t>
             </a:r>
-            <a:endParaRPr sz="1300" b="0" i="0" dirty="0">
-              <a:solidFill>
-                <a:srgbClr val="1A1A2E"/>
-              </a:solidFill>
-              <a:latin typeface="Calibri"/>
-            </a:endParaRPr>
           </a:p>
           <a:p>
             <a:pPr algn="l">
@@ -8996,12 +8647,6 @@
               </a:rPr>
               <a:t>→  This selling pushes T-bill yields UP</a:t>
             </a:r>
-            <a:endParaRPr sz="1300" b="0" i="0" dirty="0">
-              <a:solidFill>
-                <a:srgbClr val="1A1A2E"/>
-              </a:solidFill>
-              <a:latin typeface="Calibri"/>
-            </a:endParaRPr>
           </a:p>
           <a:p>
             <a:pPr algn="l">
@@ -9018,12 +8663,6 @@
               </a:rPr>
               <a:t>→  OIS-Treasury spread SPIKES (CAR is positive)</a:t>
             </a:r>
-            <a:endParaRPr sz="1300" b="0" i="0" dirty="0">
-              <a:solidFill>
-                <a:srgbClr val="1A1A2E"/>
-              </a:solidFill>
-              <a:latin typeface="Calibri"/>
-            </a:endParaRPr>
           </a:p>
         </p:txBody>
       </p:sp>
@@ -9067,6 +8706,7 @@
           <a:lstStyle/>
           <a:p>
             <a:pPr algn="ctr"/>
+            <a:endParaRPr/>
           </a:p>
         </p:txBody>
       </p:sp>
@@ -9102,12 +8742,6 @@
               </a:rPr>
               <a:t>The issuer becomes a forced seller into an already-stressed market.</a:t>
             </a:r>
-            <a:endParaRPr sz="1200" b="1" i="0">
-              <a:solidFill>
-                <a:srgbClr val="FFFFFF"/>
-              </a:solidFill>
-              <a:latin typeface="Calibri"/>
-            </a:endParaRPr>
           </a:p>
         </p:txBody>
       </p:sp>
@@ -9151,6 +8785,7 @@
           <a:lstStyle/>
           <a:p>
             <a:pPr algn="ctr"/>
+            <a:endParaRPr/>
           </a:p>
         </p:txBody>
       </p:sp>
@@ -9186,12 +8821,6 @@
               </a:rPr>
               <a:t>HIGH BUFFER  (L ≥ 13%)</a:t>
             </a:r>
-            <a:endParaRPr sz="1400" b="1" i="0">
-              <a:solidFill>
-                <a:srgbClr val="FFFFFF"/>
-              </a:solidFill>
-              <a:latin typeface="Calibri"/>
-            </a:endParaRPr>
           </a:p>
         </p:txBody>
       </p:sp>
@@ -9227,12 +8856,6 @@
               </a:rPr>
               <a:t>e.g. Circle in March 2023: ~18–22% cash</a:t>
             </a:r>
-            <a:endParaRPr sz="1100" b="0" i="1">
-              <a:solidFill>
-                <a:srgbClr val="555566"/>
-              </a:solidFill>
-              <a:latin typeface="Calibri"/>
-            </a:endParaRPr>
           </a:p>
         </p:txBody>
       </p:sp>
@@ -9276,6 +8899,7 @@
           <a:lstStyle/>
           <a:p>
             <a:pPr algn="ctr"/>
+            <a:endParaRPr/>
           </a:p>
         </p:txBody>
       </p:sp>
@@ -9323,12 +8947,6 @@
               </a:rPr>
               <a:t>❖  Issuer holds substantial cash reserves</a:t>
             </a:r>
-            <a:endParaRPr sz="1300" b="0" i="0" dirty="0">
-              <a:solidFill>
-                <a:srgbClr val="1A1A2E"/>
-              </a:solidFill>
-              <a:latin typeface="Calibri"/>
-            </a:endParaRPr>
           </a:p>
           <a:p>
             <a:pPr algn="l">
@@ -9345,12 +8963,6 @@
               </a:rPr>
               <a:t>→  When investors redeem stablecoins for dollars...</a:t>
             </a:r>
-            <a:endParaRPr sz="1300" b="0" i="0" dirty="0">
-              <a:solidFill>
-                <a:srgbClr val="1A1A2E"/>
-              </a:solidFill>
-              <a:latin typeface="Calibri"/>
-            </a:endParaRPr>
           </a:p>
           <a:p>
             <a:pPr algn="l">
@@ -9367,12 +8979,6 @@
               </a:rPr>
               <a:t>→  Issuer pays out from cash — T-bills untouched</a:t>
             </a:r>
-            <a:endParaRPr sz="1300" b="0" i="0" dirty="0">
-              <a:solidFill>
-                <a:srgbClr val="1A1A2E"/>
-              </a:solidFill>
-              <a:latin typeface="Calibri"/>
-            </a:endParaRPr>
           </a:p>
           <a:p>
             <a:pPr algn="l">
@@ -9389,12 +8995,6 @@
               </a:rPr>
               <a:t>→  No forced selling, no T-bill yield pressure</a:t>
             </a:r>
-            <a:endParaRPr sz="1300" b="0" i="0" dirty="0">
-              <a:solidFill>
-                <a:srgbClr val="1A1A2E"/>
-              </a:solidFill>
-              <a:latin typeface="Calibri"/>
-            </a:endParaRPr>
           </a:p>
           <a:p>
             <a:pPr algn="l">
@@ -9411,12 +9011,6 @@
               </a:rPr>
               <a:t>→  Spread does NOT spike from issuer behavior</a:t>
             </a:r>
-            <a:endParaRPr sz="1300" b="0" i="0" dirty="0">
-              <a:solidFill>
-                <a:srgbClr val="1A1A2E"/>
-              </a:solidFill>
-              <a:latin typeface="Calibri"/>
-            </a:endParaRPr>
           </a:p>
         </p:txBody>
       </p:sp>
@@ -9460,6 +9054,7 @@
           <a:lstStyle/>
           <a:p>
             <a:pPr algn="ctr"/>
+            <a:endParaRPr/>
           </a:p>
         </p:txBody>
       </p:sp>
@@ -9495,12 +9090,6 @@
               </a:rPr>
               <a:t>The cash buffer absorbs the redemption shock. T-bill market is insulated.</a:t>
             </a:r>
-            <a:endParaRPr sz="1200" b="1" i="0">
-              <a:solidFill>
-                <a:srgbClr val="FFFFFF"/>
-              </a:solidFill>
-              <a:latin typeface="Calibri"/>
-            </a:endParaRPr>
           </a:p>
         </p:txBody>
       </p:sp>
@@ -9544,6 +9133,7 @@
           <a:lstStyle/>
           <a:p>
             <a:pPr algn="ctr"/>
+            <a:endParaRPr/>
           </a:p>
         </p:txBody>
       </p:sp>
@@ -9597,12 +9187,6 @@
               </a:rPr>
               <a:t> Treasury markets from one that disrupts them.</a:t>
             </a:r>
-            <a:endParaRPr sz="1700" b="1" i="0" dirty="0">
-              <a:solidFill>
-                <a:srgbClr val="FFFFFF"/>
-              </a:solidFill>
-              <a:latin typeface="Calibri"/>
-            </a:endParaRPr>
           </a:p>
         </p:txBody>
       </p:sp>
@@ -9732,13 +9316,6 @@
               </a:rPr>
               <a:t> and Conditioned Event Study</a:t>
             </a:r>
-            <a:endParaRPr lang="en-US" sz="2400" dirty="0">
-              <a:solidFill>
-                <a:srgbClr val="FFFFFF"/>
-              </a:solidFill>
-              <a:latin typeface="Calibri"/>
-              <a:sym typeface="+mn-ea"/>
-            </a:endParaRPr>
           </a:p>
         </p:txBody>
       </p:sp>
@@ -9792,13 +9369,6 @@
               </a:rPr>
               <a:t>CAR = Cumulative Abnormal Return on the OIS–Treasury Spread</a:t>
             </a:r>
-            <a:endParaRPr b="1">
-              <a:solidFill>
-                <a:srgbClr val="FFFFFF"/>
-              </a:solidFill>
-              <a:latin typeface="Calibri"/>
-              <a:sym typeface="+mn-ea"/>
-            </a:endParaRPr>
           </a:p>
         </p:txBody>
       </p:sp>
@@ -10024,13 +9594,6 @@
               </a:rPr>
               <a:t>X-axis: trading days relative to event (day 0 = crisis date)</a:t>
             </a:r>
-            <a:endParaRPr lang="en-US" altLang="en-US">
-              <a:solidFill>
-                <a:srgbClr val="1A1A2E"/>
-              </a:solidFill>
-              <a:latin typeface="Calibri"/>
-              <a:sym typeface="+mn-ea"/>
-            </a:endParaRPr>
           </a:p>
           <a:p>
             <a:pPr algn="l"/>
@@ -10173,13 +9736,6 @@
               </a:rPr>
               <a:t>Cumulative Abnormal OIS–Treasury Spread</a:t>
             </a:r>
-            <a:endParaRPr b="1">
-              <a:solidFill>
-                <a:srgbClr val="FFFFFF"/>
-              </a:solidFill>
-              <a:latin typeface="Calibri"/>
-              <a:sym typeface="+mn-ea"/>
-            </a:endParaRPr>
           </a:p>
         </p:txBody>
       </p:sp>
@@ -10227,7 +9783,6 @@
               <a:rPr lang="en-US" altLang="en-US" sz="1400"/>
               <a:t>Event 2: USDT partial depeg — May 12, 2022 (3 days later) | Buffer: LOW (~5–8%) | CAR = +8.85 pp*** | Unlike UST (algorithmic, no real reserves), USDT was fiat-backed — a direct confidence run on real reserves. Same buffer. Same CAR. Different trigger. Same outcome.</a:t>
             </a:r>
-            <a:endParaRPr lang="en-US" altLang="en-US" sz="1400"/>
           </a:p>
         </p:txBody>
       </p:sp>
@@ -10240,7 +9795,7 @@
           <p:nvPr/>
         </p:nvPicPr>
         <p:blipFill>
-          <a:blip r:embed="rId1"/>
+          <a:blip r:embed="rId3"/>
           <a:stretch>
             <a:fillRect/>
           </a:stretch>
@@ -10632,6 +10187,7 @@
           <a:lstStyle/>
           <a:p>
             <a:pPr algn="ctr"/>
+            <a:endParaRPr/>
           </a:p>
         </p:txBody>
       </p:sp>
@@ -10675,6 +10231,7 @@
           <a:lstStyle/>
           <a:p>
             <a:pPr algn="ctr"/>
+            <a:endParaRPr/>
           </a:p>
         </p:txBody>
       </p:sp>
@@ -10687,7 +10244,7 @@
         <p:spPr>
           <a:xfrm>
             <a:off x="274320" y="91440"/>
-            <a:ext cx="10515600" cy="713232"/>
+            <a:ext cx="10515600" cy="492443"/>
           </a:xfrm>
           <a:prstGeom prst="rect">
             <a:avLst/>
@@ -10702,20 +10259,50 @@
           <a:p>
             <a:pPr algn="l"/>
             <a:r>
-              <a:rPr sz="2600" b="0" i="0">
+              <a:rPr sz="2600" b="0" i="0" dirty="0">
                 <a:solidFill>
                   <a:srgbClr val="FFFFFF"/>
                 </a:solidFill>
                 <a:latin typeface="Calibri"/>
               </a:rPr>
-              <a:t>Event 3: USDC / SVB Failure — March 11, 2023</a:t>
-            </a:r>
-            <a:endParaRPr sz="2600" b="0" i="0">
-              <a:solidFill>
-                <a:srgbClr val="FFFFFF"/>
-              </a:solidFill>
-              <a:latin typeface="Calibri"/>
-            </a:endParaRPr>
+              <a:t>Event 3: USDC / S</a:t>
+            </a:r>
+            <a:r>
+              <a:rPr lang="en-US" sz="2600" b="0" i="0" dirty="0">
+                <a:solidFill>
+                  <a:srgbClr val="FFFFFF"/>
+                </a:solidFill>
+                <a:latin typeface="Calibri"/>
+              </a:rPr>
+              <a:t>ilicon Valley Bank</a:t>
+            </a:r>
+            <a:r>
+              <a:rPr sz="2600" b="0" i="0" dirty="0">
+                <a:solidFill>
+                  <a:srgbClr val="FFFFFF"/>
+                </a:solidFill>
+                <a:latin typeface="Calibri"/>
+              </a:rPr>
+              <a:t> Failure — March 1</a:t>
+            </a:r>
+            <a:r>
+              <a:rPr lang="en-US" sz="2600" b="0" i="0" dirty="0">
+                <a:solidFill>
+                  <a:srgbClr val="FFFFFF"/>
+                </a:solidFill>
+                <a:latin typeface="Calibri"/>
+              </a:rPr>
+              <a:t>0</a:t>
+            </a:r>
+            <a:r>
+              <a:rPr sz="2600" b="0" i="0" dirty="0">
+                <a:solidFill>
+                  <a:srgbClr val="FFFFFF"/>
+                </a:solidFill>
+                <a:latin typeface="Calibri"/>
+              </a:rPr>
+              <a:t>, 2023</a:t>
+            </a:r>
           </a:p>
         </p:txBody>
       </p:sp>
@@ -10759,6 +10346,7 @@
           <a:lstStyle/>
           <a:p>
             <a:pPr algn="ctr"/>
+            <a:endParaRPr/>
           </a:p>
         </p:txBody>
       </p:sp>
@@ -10794,12 +10382,6 @@
               </a:rPr>
               <a:t>Buffer Condition: HIGH   |   L ≈ 18–22% cash   |   CAR = −18.01 pp***   |   t-stat &gt; 30</a:t>
             </a:r>
-            <a:endParaRPr sz="1300" b="1" i="0">
-              <a:solidFill>
-                <a:srgbClr val="FFFFFF"/>
-              </a:solidFill>
-              <a:latin typeface="Calibri"/>
-            </a:endParaRPr>
           </a:p>
         </p:txBody>
       </p:sp>
@@ -10843,6 +10425,7 @@
           <a:lstStyle/>
           <a:p>
             <a:pPr algn="ctr"/>
+            <a:endParaRPr/>
           </a:p>
         </p:txBody>
       </p:sp>
@@ -10878,12 +10461,6 @@
               </a:rPr>
               <a:t>What happened</a:t>
             </a:r>
-            <a:endParaRPr sz="1400" b="1" i="0">
-              <a:solidFill>
-                <a:srgbClr val="1B3A72"/>
-              </a:solidFill>
-              <a:latin typeface="Calibri"/>
-            </a:endParaRPr>
           </a:p>
         </p:txBody>
       </p:sp>
@@ -10915,7 +10492,7 @@
               </a:spcBef>
             </a:pPr>
             <a:r>
-              <a:rPr sz="1200" b="0" i="0">
+              <a:rPr sz="1200" b="0" i="0" dirty="0">
                 <a:solidFill>
                   <a:srgbClr val="1A1A2E"/>
                 </a:solidFill>
@@ -10923,12 +10500,6 @@
               </a:rPr>
               <a:t>❖  SVB failed on March 10, 2023 — the second-largest US bank failure in history</a:t>
             </a:r>
-            <a:endParaRPr sz="1200" b="0" i="0">
-              <a:solidFill>
-                <a:srgbClr val="1A1A2E"/>
-              </a:solidFill>
-              <a:latin typeface="Calibri"/>
-            </a:endParaRPr>
           </a:p>
           <a:p>
             <a:pPr algn="l">
@@ -10937,7 +10508,7 @@
               </a:spcBef>
             </a:pPr>
             <a:r>
-              <a:rPr sz="1200" b="0" i="0">
+              <a:rPr sz="1200" b="0" i="0" dirty="0">
                 <a:solidFill>
                   <a:srgbClr val="1A1A2E"/>
                 </a:solidFill>
@@ -10945,12 +10516,6 @@
               </a:rPr>
               <a:t>❖  Circle disclosed: $3.3 billion of USDC reserves were held at SVB — temporarily inaccessible</a:t>
             </a:r>
-            <a:endParaRPr sz="1200" b="0" i="0">
-              <a:solidFill>
-                <a:srgbClr val="1A1A2E"/>
-              </a:solidFill>
-              <a:latin typeface="Calibri"/>
-            </a:endParaRPr>
           </a:p>
           <a:p>
             <a:pPr algn="l">
@@ -10959,20 +10524,50 @@
               </a:spcBef>
             </a:pPr>
             <a:r>
-              <a:rPr sz="1200" b="0" i="0">
+              <a:rPr sz="1200" b="0" i="0" dirty="0">
                 <a:solidFill>
                   <a:srgbClr val="1A1A2E"/>
                 </a:solidFill>
                 <a:latin typeface="Calibri"/>
               </a:rPr>
-              <a:t>❖  USDC depegged to ~$0.87 on March 11 — a larger nominal depeg than USDT in 2022</a:t>
-            </a:r>
-            <a:endParaRPr sz="1200" b="0" i="0">
-              <a:solidFill>
-                <a:srgbClr val="1A1A2E"/>
-              </a:solidFill>
-              <a:latin typeface="Calibri"/>
-            </a:endParaRPr>
+              <a:t>❖  USDC </a:t>
+            </a:r>
+            <a:r>
+              <a:rPr sz="1200" b="0" i="0" dirty="0" err="1">
+                <a:solidFill>
+                  <a:srgbClr val="1A1A2E"/>
+                </a:solidFill>
+                <a:latin typeface="Calibri"/>
+              </a:rPr>
+              <a:t>depegged</a:t>
+            </a:r>
+            <a:r>
+              <a:rPr sz="1200" b="0" i="0" dirty="0">
+                <a:solidFill>
+                  <a:srgbClr val="1A1A2E"/>
+                </a:solidFill>
+                <a:latin typeface="Calibri"/>
+              </a:rPr>
+              <a:t> to ~$0.87 on March 11 — a larger nominal </a:t>
+            </a:r>
+            <a:r>
+              <a:rPr sz="1200" b="0" i="0" dirty="0" err="1">
+                <a:solidFill>
+                  <a:srgbClr val="1A1A2E"/>
+                </a:solidFill>
+                <a:latin typeface="Calibri"/>
+              </a:rPr>
+              <a:t>depeg</a:t>
+            </a:r>
+            <a:r>
+              <a:rPr sz="1200" b="0" i="0" dirty="0">
+                <a:solidFill>
+                  <a:srgbClr val="1A1A2E"/>
+                </a:solidFill>
+                <a:latin typeface="Calibri"/>
+              </a:rPr>
+              <a:t> than USDT in 2022</a:t>
+            </a:r>
           </a:p>
           <a:p>
             <a:pPr algn="l">
@@ -10981,7 +10576,7 @@
               </a:spcBef>
             </a:pPr>
             <a:r>
-              <a:rPr sz="1200" b="0" i="0">
+              <a:rPr sz="1200" b="0" i="0" dirty="0">
                 <a:solidFill>
                   <a:srgbClr val="1A1A2E"/>
                 </a:solidFill>
@@ -10989,12 +10584,6 @@
               </a:rPr>
               <a:t>❖  But by March 13, after the US government guaranteed SVB deposits, USDC returned to $1.00</a:t>
             </a:r>
-            <a:endParaRPr sz="1200" b="0" i="0">
-              <a:solidFill>
-                <a:srgbClr val="1A1A2E"/>
-              </a:solidFill>
-              <a:latin typeface="Calibri"/>
-            </a:endParaRPr>
           </a:p>
         </p:txBody>
       </p:sp>
@@ -11115,13 +10704,6 @@
               </a:rPr>
               <a:t>→ This is what a flat CAR would look like IF nothing else happened</a:t>
             </a:r>
-            <a:endParaRPr sz="1000" b="1">
-              <a:solidFill>
-                <a:srgbClr val="1A7A4A"/>
-              </a:solidFill>
-              <a:latin typeface="Calibri"/>
-              <a:sym typeface="+mn-ea"/>
-            </a:endParaRPr>
           </a:p>
         </p:txBody>
       </p:sp>
@@ -11459,7 +11041,7 @@
           <p:nvPr/>
         </p:nvPicPr>
         <p:blipFill>
-          <a:blip r:embed="rId1"/>
+          <a:blip r:embed="rId3"/>
           <a:srcRect l="65879"/>
           <a:stretch>
             <a:fillRect/>
@@ -11576,12 +11158,6 @@
               </a:rPr>
               <a:t>Welch t = 15.22*** | p &lt; 0.001</a:t>
             </a:r>
-            <a:endParaRPr lang="en-US" altLang="en-US" b="1" i="0" dirty="0">
-              <a:solidFill>
-                <a:schemeClr val="tx1"/>
-              </a:solidFill>
-              <a:latin typeface="Calibri"/>
-            </a:endParaRPr>
           </a:p>
         </p:txBody>
       </p:sp>
@@ -11590,13 +11166,6 @@
   <p:clrMapOvr>
     <a:masterClrMapping/>
   </p:clrMapOvr>
-  <p:timing>
-    <p:tnLst>
-      <p:par>
-        <p:cTn id="1" dur="indefinite" restart="never" nodeType="tmRoot"/>
-      </p:par>
-    </p:tnLst>
-  </p:timing>
 </p:sld>
 </file>
 
@@ -11657,6 +11226,7 @@
           <a:lstStyle/>
           <a:p>
             <a:pPr algn="ctr"/>
+            <a:endParaRPr/>
           </a:p>
         </p:txBody>
       </p:sp>
@@ -11700,6 +11270,7 @@
           <a:lstStyle/>
           <a:p>
             <a:pPr algn="ctr"/>
+            <a:endParaRPr/>
           </a:p>
         </p:txBody>
       </p:sp>
@@ -11735,12 +11306,6 @@
               </a:rPr>
               <a:t>Roadmap</a:t>
             </a:r>
-            <a:endParaRPr sz="2600" b="0" i="0" dirty="0">
-              <a:solidFill>
-                <a:srgbClr val="FFFFFF"/>
-              </a:solidFill>
-              <a:latin typeface="Calibri"/>
-            </a:endParaRPr>
           </a:p>
         </p:txBody>
       </p:sp>
@@ -11784,6 +11349,7 @@
           <a:lstStyle/>
           <a:p>
             <a:pPr algn="ctr"/>
+            <a:endParaRPr/>
           </a:p>
         </p:txBody>
       </p:sp>
@@ -11819,12 +11385,6 @@
               </a:rPr>
               <a:t>What we have done</a:t>
             </a:r>
-            <a:endParaRPr sz="1500" b="1" i="0">
-              <a:solidFill>
-                <a:srgbClr val="FFFFFF"/>
-              </a:solidFill>
-              <a:latin typeface="Calibri"/>
-            </a:endParaRPr>
           </a:p>
         </p:txBody>
       </p:sp>
@@ -11868,6 +11428,7 @@
           <a:lstStyle/>
           <a:p>
             <a:pPr algn="ctr"/>
+            <a:endParaRPr/>
           </a:p>
         </p:txBody>
       </p:sp>
@@ -11903,12 +11464,6 @@
               </a:rPr>
               <a:t>Theory</a:t>
             </a:r>
-            <a:endParaRPr sz="1100" b="1" i="0">
-              <a:solidFill>
-                <a:srgbClr val="FFFFFF"/>
-              </a:solidFill>
-              <a:latin typeface="Calibri"/>
-            </a:endParaRPr>
           </a:p>
         </p:txBody>
       </p:sp>
@@ -11952,6 +11507,7 @@
           <a:lstStyle/>
           <a:p>
             <a:pPr algn="ctr"/>
+            <a:endParaRPr/>
           </a:p>
         </p:txBody>
       </p:sp>
@@ -12005,12 +11561,6 @@
               </a:rPr>
               <a:t>, and liquid buffer L</a:t>
             </a:r>
-            <a:endParaRPr sz="1200" b="0" i="0" dirty="0">
-              <a:solidFill>
-                <a:srgbClr val="1A1A2E"/>
-              </a:solidFill>
-              <a:latin typeface="Calibri"/>
-            </a:endParaRPr>
           </a:p>
         </p:txBody>
       </p:sp>
@@ -12054,6 +11604,7 @@
           <a:lstStyle/>
           <a:p>
             <a:pPr algn="ctr"/>
+            <a:endParaRPr/>
           </a:p>
         </p:txBody>
       </p:sp>
@@ -12089,12 +11640,6 @@
               </a:rPr>
               <a:t>Regression</a:t>
             </a:r>
-            <a:endParaRPr sz="1100" b="1" i="0">
-              <a:solidFill>
-                <a:srgbClr val="FFFFFF"/>
-              </a:solidFill>
-              <a:latin typeface="Calibri"/>
-            </a:endParaRPr>
           </a:p>
         </p:txBody>
       </p:sp>
@@ -12138,6 +11683,7 @@
           <a:lstStyle/>
           <a:p>
             <a:pPr algn="ctr"/>
+            <a:endParaRPr/>
           </a:p>
         </p:txBody>
       </p:sp>
@@ -12173,12 +11719,6 @@
               </a:rPr>
               <a:t>✓  β₁ = −6.02** — stablecoin growth compresses OIS–Treasury spreads (privilege amplification)</a:t>
             </a:r>
-            <a:endParaRPr sz="1200" b="0" i="0" dirty="0">
-              <a:solidFill>
-                <a:srgbClr val="1A1A2E"/>
-              </a:solidFill>
-              <a:latin typeface="Calibri"/>
-            </a:endParaRPr>
           </a:p>
         </p:txBody>
       </p:sp>
@@ -12222,6 +11762,7 @@
           <a:lstStyle/>
           <a:p>
             <a:pPr algn="ctr"/>
+            <a:endParaRPr/>
           </a:p>
         </p:txBody>
       </p:sp>
@@ -12257,12 +11798,6 @@
               </a:rPr>
               <a:t>Threshold</a:t>
             </a:r>
-            <a:endParaRPr sz="1100" b="1" i="0">
-              <a:solidFill>
-                <a:srgbClr val="FFFFFF"/>
-              </a:solidFill>
-              <a:latin typeface="Calibri"/>
-            </a:endParaRPr>
           </a:p>
         </p:txBody>
       </p:sp>
@@ -12306,6 +11841,7 @@
           <a:lstStyle/>
           <a:p>
             <a:pPr algn="ctr"/>
+            <a:endParaRPr/>
           </a:p>
         </p:txBody>
       </p:sp>
@@ -12341,12 +11877,6 @@
               </a:rPr>
               <a:t>✓  Hansen (2000) threshold at q* = 13% liquid cash — separates safe from fragile regime</a:t>
             </a:r>
-            <a:endParaRPr sz="1200" b="0" i="0" dirty="0">
-              <a:solidFill>
-                <a:srgbClr val="1A1A2E"/>
-              </a:solidFill>
-              <a:latin typeface="Calibri"/>
-            </a:endParaRPr>
           </a:p>
         </p:txBody>
       </p:sp>
@@ -12390,6 +11920,7 @@
           <a:lstStyle/>
           <a:p>
             <a:pPr algn="ctr"/>
+            <a:endParaRPr/>
           </a:p>
         </p:txBody>
       </p:sp>
@@ -12425,12 +11956,6 @@
               </a:rPr>
               <a:t>Event Study</a:t>
             </a:r>
-            <a:endParaRPr sz="1100" b="1" i="0">
-              <a:solidFill>
-                <a:srgbClr val="FFFFFF"/>
-              </a:solidFill>
-              <a:latin typeface="Calibri"/>
-            </a:endParaRPr>
           </a:p>
         </p:txBody>
       </p:sp>
@@ -12474,6 +11999,7 @@
           <a:lstStyle/>
           <a:p>
             <a:pPr algn="ctr"/>
+            <a:endParaRPr/>
           </a:p>
         </p:txBody>
       </p:sp>
@@ -12527,12 +12053,6 @@
               </a:rPr>
               <a:t>, SVB) — 27 pp CAR swing between low/high buffer regimes</a:t>
             </a:r>
-            <a:endParaRPr sz="1200" b="0" i="0" dirty="0">
-              <a:solidFill>
-                <a:srgbClr val="1A1A2E"/>
-              </a:solidFill>
-              <a:latin typeface="Calibri"/>
-            </a:endParaRPr>
           </a:p>
         </p:txBody>
       </p:sp>
@@ -12576,6 +12096,7 @@
           <a:lstStyle/>
           <a:p>
             <a:pPr algn="ctr"/>
+            <a:endParaRPr/>
           </a:p>
         </p:txBody>
       </p:sp>
@@ -12611,12 +12132,6 @@
               </a:rPr>
               <a:t>Robustness</a:t>
             </a:r>
-            <a:endParaRPr sz="1100" b="1" i="0">
-              <a:solidFill>
-                <a:srgbClr val="FFFFFF"/>
-              </a:solidFill>
-              <a:latin typeface="Calibri"/>
-            </a:endParaRPr>
           </a:p>
         </p:txBody>
       </p:sp>
@@ -12660,6 +12175,7 @@
           <a:lstStyle/>
           <a:p>
             <a:pPr algn="ctr"/>
+            <a:endParaRPr/>
           </a:p>
         </p:txBody>
       </p:sp>
@@ -12695,12 +12211,6 @@
               </a:rPr>
               <a:t>✓  Mean-centering (VIF), Engle-Granger cointegration, first-differenced spec, post-2023 subsample</a:t>
             </a:r>
-            <a:endParaRPr sz="1200" b="0" i="0">
-              <a:solidFill>
-                <a:srgbClr val="1A1A2E"/>
-              </a:solidFill>
-              <a:latin typeface="Calibri"/>
-            </a:endParaRPr>
           </a:p>
         </p:txBody>
       </p:sp>
@@ -12744,6 +12254,7 @@
           <a:lstStyle/>
           <a:p>
             <a:pPr algn="ctr"/>
+            <a:endParaRPr/>
           </a:p>
         </p:txBody>
       </p:sp>
@@ -12779,12 +12290,6 @@
               </a:rPr>
               <a:t>This deck</a:t>
             </a:r>
-            <a:endParaRPr sz="1100" b="1" i="0">
-              <a:solidFill>
-                <a:srgbClr val="FFFFFF"/>
-              </a:solidFill>
-              <a:latin typeface="Calibri"/>
-            </a:endParaRPr>
           </a:p>
         </p:txBody>
       </p:sp>
@@ -12828,6 +12333,7 @@
           <a:lstStyle/>
           <a:p>
             <a:pPr algn="ctr"/>
+            <a:endParaRPr/>
           </a:p>
         </p:txBody>
       </p:sp>
@@ -12863,12 +12369,6 @@
               </a:rPr>
               <a:t>✓  Clarified: why OIS spread, what the buffer condition means, how to read CAR, what each event was</a:t>
             </a:r>
-            <a:endParaRPr sz="1200" b="0" i="0">
-              <a:solidFill>
-                <a:srgbClr val="1A1A2E"/>
-              </a:solidFill>
-              <a:latin typeface="Calibri"/>
-            </a:endParaRPr>
           </a:p>
         </p:txBody>
       </p:sp>
@@ -12912,6 +12412,7 @@
           <a:lstStyle/>
           <a:p>
             <a:pPr algn="ctr"/>
+            <a:endParaRPr/>
           </a:p>
         </p:txBody>
       </p:sp>
@@ -12947,12 +12448,6 @@
               </a:rPr>
               <a:t>Planned for next week</a:t>
             </a:r>
-            <a:endParaRPr sz="1500" b="1" i="0" dirty="0">
-              <a:solidFill>
-                <a:srgbClr val="FFFFFF"/>
-              </a:solidFill>
-              <a:latin typeface="Calibri"/>
-            </a:endParaRPr>
           </a:p>
         </p:txBody>
       </p:sp>
@@ -12996,6 +12491,7 @@
           <a:lstStyle/>
           <a:p>
             <a:pPr algn="ctr"/>
+            <a:endParaRPr/>
           </a:p>
         </p:txBody>
       </p:sp>
@@ -13043,12 +12539,6 @@
               </a:rPr>
               <a:t>Placebo Test</a:t>
             </a:r>
-            <a:endParaRPr sz="1600" b="1" i="0" dirty="0">
-              <a:solidFill>
-                <a:srgbClr val="D4632A"/>
-              </a:solidFill>
-              <a:latin typeface="Calibri"/>
-            </a:endParaRPr>
           </a:p>
           <a:p>
             <a:pPr algn="l">
@@ -13065,12 +12555,6 @@
               </a:rPr>
               <a:t>Run the same event study methodology on 3 ordinary days with no known stablecoin stress event:</a:t>
             </a:r>
-            <a:endParaRPr sz="1300" b="0" i="0" dirty="0">
-              <a:solidFill>
-                <a:srgbClr val="1A1A2E"/>
-              </a:solidFill>
-              <a:latin typeface="Calibri"/>
-            </a:endParaRPr>
           </a:p>
           <a:p>
             <a:pPr algn="l">
@@ -13087,12 +12571,6 @@
               </a:rPr>
               <a:t>❖  Jun 15, 2021  (Low buffer)  —  Quiet summer — no redemption pressure</a:t>
             </a:r>
-            <a:endParaRPr sz="1200" b="0" i="0" dirty="0">
-              <a:solidFill>
-                <a:srgbClr val="1A1A2E"/>
-              </a:solidFill>
-              <a:latin typeface="Calibri"/>
-            </a:endParaRPr>
           </a:p>
           <a:p>
             <a:pPr algn="l">
@@ -13109,12 +12587,6 @@
               </a:rPr>
               <a:t>❖  Oct 12, 2021  (Low buffer)  —  Pre-LUNA, no crypto-specific stress</a:t>
             </a:r>
-            <a:endParaRPr sz="1200" b="0" i="0" dirty="0">
-              <a:solidFill>
-                <a:srgbClr val="1A1A2E"/>
-              </a:solidFill>
-              <a:latin typeface="Calibri"/>
-            </a:endParaRPr>
           </a:p>
           <a:p>
             <a:pPr algn="l">
@@ -13131,12 +12603,6 @@
               </a:rPr>
               <a:t>❖  Jul 15, 2025  (High buffer)  —  Post-SVB recovery, stable spread period</a:t>
             </a:r>
-            <a:endParaRPr sz="1200" b="0" i="0" dirty="0">
-              <a:solidFill>
-                <a:srgbClr val="1A1A2E"/>
-              </a:solidFill>
-              <a:latin typeface="Calibri"/>
-            </a:endParaRPr>
           </a:p>
           <a:p>
             <a:pPr algn="l">
@@ -13153,12 +12619,6 @@
               </a:rPr>
               <a:t> </a:t>
             </a:r>
-            <a:endParaRPr sz="600" b="0" i="0" dirty="0">
-              <a:solidFill>
-                <a:srgbClr val="1A1A2E"/>
-              </a:solidFill>
-              <a:latin typeface="Calibri"/>
-            </a:endParaRPr>
           </a:p>
           <a:p>
             <a:pPr algn="l">
@@ -13175,12 +12635,6 @@
               </a:rPr>
               <a:t>What we expect to show:</a:t>
             </a:r>
-            <a:endParaRPr sz="1400" b="1" i="0" dirty="0">
-              <a:solidFill>
-                <a:srgbClr val="1B3A72"/>
-              </a:solidFill>
-              <a:latin typeface="Calibri"/>
-            </a:endParaRPr>
           </a:p>
           <a:p>
             <a:pPr algn="l">
@@ -13197,12 +12651,6 @@
               </a:rPr>
               <a:t>CARs on placebo days should be near 0 pp — confirming that the 9–18 pp swings in actual events are caused by the crisis itself, not by random market drift.</a:t>
             </a:r>
-            <a:endParaRPr sz="1300" b="0" i="0" dirty="0">
-              <a:solidFill>
-                <a:srgbClr val="1A1A2E"/>
-              </a:solidFill>
-              <a:latin typeface="Calibri"/>
-            </a:endParaRPr>
           </a:p>
           <a:p>
             <a:pPr algn="l">
@@ -13219,12 +12667,6 @@
               </a:rPr>
               <a:t> </a:t>
             </a:r>
-            <a:endParaRPr sz="600" b="0" i="0" dirty="0">
-              <a:solidFill>
-                <a:srgbClr val="1A1A2E"/>
-              </a:solidFill>
-              <a:latin typeface="Calibri"/>
-            </a:endParaRPr>
           </a:p>
           <a:p>
             <a:pPr algn="l">
@@ -13241,12 +12683,6 @@
               </a:rPr>
               <a:t>Preliminary result: placebo mean |CAR| = 0.55 pp vs. actual mean |CAR| = 11.92 pp  →  21.7× difference</a:t>
             </a:r>
-            <a:endParaRPr sz="1200" b="1" i="1" dirty="0">
-              <a:solidFill>
-                <a:srgbClr val="D4632A"/>
-              </a:solidFill>
-              <a:latin typeface="Calibri"/>
-            </a:endParaRPr>
           </a:p>
         </p:txBody>
       </p:sp>
@@ -13280,7 +12716,7 @@
                 </a:solidFill>
                 <a:latin typeface="Calibri"/>
               </a:rPr>
-              <a:t>Mimi – Page 10</a:t>
+              <a:t>Mimi – Page 7</a:t>
             </a:r>
             <a:endParaRPr sz="1500" b="1" i="0" dirty="0">
               <a:solidFill>
@@ -13333,14 +12769,14 @@
           <p:nvPr/>
         </p:nvPicPr>
         <p:blipFill>
-          <a:blip r:embed="rId1">
+          <a:blip r:embed="rId3">
             <a:lum bright="70000" contrast="-70000"/>
             <a:extLst>
               <a:ext uri="{BEBA8EAE-BF5A-486C-A8C5-ECC9F3942E4B}">
                 <a14:imgProps xmlns:a14="http://schemas.microsoft.com/office/drawing/2010/main">
-                  <a14:imgLayer r:embed="rId2">
+                  <a14:imgLayer r:embed="rId4">
                     <a14:imgEffect>
-                      <a14:artisticPhotocopy trans="30000" detail="2"/>
+                      <a14:artisticPhotocopy detail="2"/>
                     </a14:imgEffect>
                   </a14:imgLayer>
                 </a14:imgProps>
@@ -13420,13 +12856,6 @@
               </a:rPr>
               <a:t>Thank You</a:t>
             </a:r>
-            <a:endParaRPr lang="en-US" altLang="ko-KR" sz="2400" dirty="0">
-              <a:solidFill>
-                <a:prstClr val="white"/>
-              </a:solidFill>
-              <a:latin typeface="Hiragino Kaku Gothic Std W8" panose="020B0800000000000000" pitchFamily="34" charset="-128"/>
-              <a:ea typeface="Hiragino Kaku Gothic Std W8" panose="020B0800000000000000" pitchFamily="34" charset="-128"/>
-            </a:endParaRPr>
           </a:p>
           <a:p>
             <a:pPr algn="ctr" defTabSz="914400" latinLnBrk="1">
@@ -13472,11 +12901,6 @@
               </a:rPr>
               <a:t>Yonsei GSIS 2026-1 </a:t>
             </a:r>
-            <a:endParaRPr lang="en-US" altLang="ko-KR" sz="1800" b="1" dirty="0">
-              <a:solidFill>
-                <a:schemeClr val="bg1"/>
-              </a:solidFill>
-            </a:endParaRPr>
           </a:p>
           <a:p>
             <a:r>
@@ -13849,6 +13273,7 @@
       </a:style>
     </a:lnDef>
   </a:objectDefaults>
+  <a:extraClrSchemeLst/>
   <a:extLst>
     <a:ext uri="{05A4C25C-085E-4340-85A3-A5531E510DB2}">
       <thm15:themeFamily xmlns:thm15="http://schemas.microsoft.com/office/thememl/2012/main" name="Office Theme" id="{62F939B6-93AF-4DB8-9C6B-D6C7DFDC589F}" vid="{4A3C46E8-61CC-4603-A589-7422A47A8E4A}"/>
@@ -14129,6 +13554,7 @@
       </a:style>
     </a:lnDef>
   </a:objectDefaults>
+  <a:extraClrSchemeLst/>
   <a:extLst>
     <a:ext uri="{05A4C25C-085E-4340-85A3-A5531E510DB2}">
       <thm15:themeFamily xmlns:thm15="http://schemas.microsoft.com/office/thememl/2012/main" name="Office Theme" id="{62F939B6-93AF-4DB8-9C6B-D6C7DFDC589F}" vid="{4A3C46E8-61CC-4603-A589-7422A47A8E4A}"/>

--- a/presentations/0526_Stablecoin_Exorbitant_Privilege.pptx
+++ b/presentations/0526_Stablecoin_Exorbitant_Privilege.pptx
@@ -297,29 +297,9 @@
           <a:bodyPr/>
           <a:lstStyle/>
           <a:p>
-            <a:pPr marL="0" marR="0" lvl="0" indent="0" algn="l" defTabSz="914400" rtl="0" eaLnBrk="1" fontAlgn="auto" latinLnBrk="1" hangingPunct="1">
-              <a:lnSpc>
-                <a:spcPct val="100000"/>
-              </a:lnSpc>
-              <a:spcBef>
-                <a:spcPts val="0"/>
-              </a:spcBef>
-              <a:spcAft>
-                <a:spcPts val="0"/>
-              </a:spcAft>
-              <a:buClrTx/>
-              <a:buSzTx/>
-              <a:buFontTx/>
-              <a:buNone/>
-              <a:defRPr/>
-            </a:pPr>
-            <a:r>
-              <a:rPr lang="en-US" altLang="ko-KR" dirty="0"/>
-              <a:t>Good afternoon, everyone. We will be talking about Stablecoins and the Exorbitant Privilege. The central argument is that large stablecoin issuers like Tether and Circle have become significant buyers of U.S. Treasury bills — which amplifies America's safe-asset privilege in normal times, but can sharply reverse that benefit during a run if their cash reserves are too thin. Today we want to address some of the methodological questions that came up last time and walk you through our three key findings clearly.</a:t>
-            </a:r>
-          </a:p>
-          <a:p>
-            <a:endParaRPr dirty="0"/>
+            <a:r>
+              <a:t>Good afternoon everyone. Our paper is called Stablecoins and the Exorbitant Privilege. The central argument is that large USD-pegged stablecoin issuers — mainly Tether and Circle — have become significant buyers of U.S. Treasury bills. In normal times, that deepens demand for safe assets and amplifies America's borrowing advantage. But when a run hits and their cash reserves are too thin, they are forced to liquidate T-bills, which rapidly reverses that benefit. Today we want to address some methodological questions from last session and walk clearly through our three stress events.</a:t>
+            </a:r>
           </a:p>
         </p:txBody>
       </p:sp>
@@ -388,8 +368,7 @@
           <a:lstStyle/>
           <a:p>
             <a:r>
-              <a:rPr dirty="0"/>
-              <a:t>Let me quickly walk you through what we have done and what is coming. On the left, you can see everything we have completed: the theoretical framework, the main regression, the threshold test, the event study across three crises, and several robustness checks. This deck specifically addresses the clarification questions from last session — why we use the OIS spread, what the buffer condition is, and how to read the event study graphs. </a:t>
+              <a:t>Let me quickly orient everyone. On the left is everything we have completed. We extended Maggiori's 2017 model to incorporate stablecoin supply, treasury exposure, and the liquid buffer. Our main regression finds that a one standard deviation increase in stablecoin supply compresses the OIS-Treasury spread by roughly 6 basis points — that is the privilege amplification result. We also estimated a safety threshold using Hansen's 2000 threshold regression: issuers need to hold at least 13 percent of supply in liquid cash to stay outside the fragility zone. And we ran a buffer-conditioned event study across three stress episodes, which produced a 27 percentage point swing between the low and high buffer regimes. This deck specifically addresses the clarification questions from last time — why we use the OIS spread, what the buffer condition actually means, and how to read the CAR graphs. Baptiste will walk us through this slide, then hand over to Sara.</a:t>
             </a:r>
           </a:p>
         </p:txBody>
@@ -459,64 +438,7 @@
           <a:lstStyle/>
           <a:p>
             <a:r>
-              <a:rPr dirty="0"/>
-              <a:t>A question came up about why we use the OIS-Treasury spread instead of just Treasury yields. Here is the intuition. A raw T-bill yield</a:t>
-            </a:r>
-            <a:r>
-              <a:rPr lang="en-US" dirty="0"/>
-              <a:t> (red)</a:t>
-            </a:r>
-            <a:r>
-              <a:rPr dirty="0"/>
-              <a:t> moves for two completely different reasons at the same time: one is the Fed raising or cutting </a:t>
-            </a:r>
-            <a:r>
-              <a:rPr lang="en-US" dirty="0"/>
-              <a:t>the </a:t>
-            </a:r>
-            <a:r>
-              <a:rPr dirty="0"/>
-              <a:t>interest rates, and the other is investors specifically wanting to hold safe U.S. Treasury bills. </a:t>
-            </a:r>
-            <a:r>
-              <a:rPr b="1" dirty="0"/>
-              <a:t>We only care about the second one — the safe-asset demand. </a:t>
-            </a:r>
-            <a:endParaRPr lang="en-US" b="1" dirty="0"/>
-          </a:p>
-          <a:p>
-            <a:endParaRPr lang="en-US" b="1" dirty="0"/>
-          </a:p>
-          <a:p>
-            <a:r>
-              <a:rPr dirty="0"/>
-              <a:t>The OIS rate</a:t>
-            </a:r>
-            <a:r>
-              <a:rPr lang="en-US" dirty="0"/>
-              <a:t> (blue)</a:t>
-            </a:r>
-            <a:r>
-              <a:rPr dirty="0"/>
-              <a:t>, which stands for Overnight Index Swap, tracks market expectations of the Fed Funds rate. So when we subtract it from the T-bill yield, we cancel out the monetary policy part and are left with just the premium that investors pay to hold Treasuries specifically. That premium is exactly what stablecoin issuers affect when they buy T-bills. </a:t>
-            </a:r>
-            <a:endParaRPr lang="en-US" dirty="0"/>
-          </a:p>
-          <a:p>
-            <a:endParaRPr lang="en-US" dirty="0"/>
-          </a:p>
-          <a:p>
-            <a:r>
-              <a:rPr dirty="0"/>
-              <a:t>This approach is standard in the literature — Krishnamurthy and Vissing-Jorgensen in 2012, and Nagel in 2016, both use this same spread as their measure of safe-asset convenience yield. The practical implication: </a:t>
-            </a:r>
-            <a:r>
-              <a:rPr b="1" dirty="0"/>
-              <a:t>if we had used raw yields, a Fed rate cut and a Tether buying surge would look identical in our data. </a:t>
-            </a:r>
-            <a:r>
-              <a:rPr dirty="0"/>
-              <a:t>The spread separates them cleanly.</a:t>
+              <a:t>A question came up about why we use the OIS-Treasury spread instead of just Treasury yields. Here is the intuition. A raw T-bill yield moves for two completely different reasons at the same time — the Fed raising or cutting rates, and investors specifically wanting to hold safe Treasuries. We only care about the second one. The OIS rate tracks market expectations of the Fed Funds path — it is pure monetary policy. So when we subtract it from the T-bill yield, we cancel out the monetary policy component and are left with just the premium investors pay to hold Treasuries specifically. That premium is exactly what stablecoin issuers affect when they buy T-bills. This approach is well established in the literature. Krishnamurthy and Vissing-Jorgensen in 2012 use this same spread to measure safe-asset demand. Nagel in 2016 calls it the convenience yield of near-money assets. Greenwood, Hanson and Stein in 2015 show it captures demand that is insensitive to monetary policy. The practical point is this: if we had used raw yields, a Fed rate cut and a Tether buying surge would look identical in our data. The spread cleanly separates them.</a:t>
             </a:r>
           </a:p>
         </p:txBody>
@@ -586,16 +508,7 @@
           <a:lstStyle/>
           <a:p>
             <a:r>
-              <a:rPr dirty="0"/>
-              <a:t>The buffer condition is the central variable in our paper, so let me explain it precisely. L is the liquid buffer — it is the share of an issuer's reserves held in cash or cash equivalents, divided by the total stablecoin supply outstanding. Our Hansen threshold regression estimates a critical cutoff of 13 percent. Here is why it matters. When investors want to redeem their stablecoins for dollars, the issuer has to pay them back. If the issuer holds enough cash — above 13 percent — they simply pay from that cash and their Treasury bill holdings are untouched. The T-bill market does not feel anything. But if the cash buffer is below 13 percent, the issuer cannot cover redemptions from cash alone. They have to sell Treasury bills quickly to raise the dollars. That sudden selling pushes T-bill yields up relative to OIS — the spread spikes. So the buffer condition is essentially asking: does this issuer have enough cash to absorb a redemption shock without being forced to liquidate their T-bill portfolio? In May 2022, the answer </a:t>
-            </a:r>
-            <a:r>
-              <a:rPr lang="en-US" dirty="0"/>
-              <a:t>to holding enough cash </a:t>
-            </a:r>
-            <a:r>
-              <a:rPr dirty="0"/>
-              <a:t>was no. In March 2023, the answer was yes.</a:t>
+              <a:t>Now let me explain precisely what the buffer condition is, because it is the central variable in our paper. L is the liquid buffer — the share of an issuer's reserves held in cash or cash equivalents, divided by total stablecoin supply. Our Hansen threshold regression estimates a critical cutoff at 13 percent. Here is why it matters. When investors redeem stablecoins for dollars, the issuer has to pay them back. If they hold enough cash — above 13 percent — they pay from cash and T-bill holdings are untouched. The Treasury market feels nothing. But if the cash buffer is below 13 percent, the issuer cannot cover redemptions from cash alone. They have to sell Treasury bills quickly to raise the dollars. That sudden selling pushes T-bill yields up relative to OIS — the spread spikes. In May 2022, Tether had only around 5 to 8 percent in liquid cash — below the threshold. That is why both the LUNA contagion and the direct Tether depeg produced large positive CARs. The buffer condition is what separates an issuer that stabilises Treasury markets from one that disrupts them.</a:t>
             </a:r>
           </a:p>
         </p:txBody>
@@ -665,1082 +578,8 @@
           <a:lstStyle/>
           <a:p>
             <a:r>
-              <a:rPr lang="en-US" altLang="en-US" dirty="0"/>
-              <a:t>"Before I show you the results, I need to explain what you are looking at — because without understanding the model, the graphs are just lines."</a:t>
-            </a:r>
-          </a:p>
-          <a:p>
-            <a:endParaRPr lang="en-US" altLang="en-US" dirty="0"/>
-          </a:p>
-          <a:p>
-            <a:r>
-              <a:rPr lang="en-US" altLang="en-US" dirty="0"/>
-              <a:t>[Point to Step 1]</a:t>
-            </a:r>
-          </a:p>
-          <a:p>
-            <a:endParaRPr lang="en-US" altLang="en-US" dirty="0"/>
-          </a:p>
-          <a:p>
-            <a:r>
-              <a:rPr lang="en-US" altLang="en-US" dirty="0"/>
-              <a:t>"Before each crisis event, we take data from 120 to 6 trading days prior to the event — roughly six months of pre-crisis data — and we run a regression. We ask: given the VIX level and global equity returns on any given day, what would we expect the OIS-Treasury spread to be? This gives us our normal model. It tells us what the spread looks like when nothing unusual is happening."</a:t>
-            </a:r>
-          </a:p>
-          <a:p>
-            <a:endParaRPr lang="en-US" altLang="en-US" dirty="0"/>
-          </a:p>
-          <a:p>
-            <a:r>
-              <a:rPr lang="en-US" altLang="en-US" dirty="0"/>
-              <a:t>[Point to Step 2]</a:t>
-            </a:r>
-          </a:p>
-          <a:p>
-            <a:endParaRPr lang="en-US" altLang="en-US" dirty="0"/>
-          </a:p>
-          <a:p>
-            <a:r>
-              <a:rPr lang="en-US" altLang="en-US" dirty="0"/>
-              <a:t>"Then during the event window — five days before to twenty days after the crisis — for each trading day, we subtract the predicted spread from the actual spread. That difference is the abnormal spread. A positive abnormal spread or rising line means something beyond normal market conditions is pushing T-bill yields above the risk-free rate - suggesting forced selling pressure. A negative abnormal spread or falling line means something is compressing them below normal- suggesting flight-to-safety buying."</a:t>
-            </a:r>
-          </a:p>
-          <a:p>
-            <a:endParaRPr lang="en-US" altLang="en-US" dirty="0"/>
-          </a:p>
-          <a:p>
-            <a:r>
-              <a:rPr lang="en-US" altLang="en-US" dirty="0"/>
-              <a:t>[Point to Step 3]</a:t>
-            </a:r>
-          </a:p>
-          <a:p>
-            <a:endParaRPr lang="en-US" altLang="en-US" dirty="0"/>
-          </a:p>
-          <a:p>
-            <a:r>
-              <a:rPr lang="en-US" altLang="en-US" dirty="0"/>
-              <a:t>"We then add up all those daily abnormal values. That running total — from day minus five to day plus twenty — is the CAR. The Y-axis shows percentage points of accumulated deviation. The X-axis shows trading days. Day zero is the crisis date itself."</a:t>
-            </a:r>
-          </a:p>
-          <a:p>
-            <a:endParaRPr lang="en-US" altLang="en-US" dirty="0"/>
-          </a:p>
-          <a:p>
-            <a:r>
-              <a:rPr lang="en-US" altLang="en-US" dirty="0"/>
-              <a:t>[Click — LUNA graph appears on the right]</a:t>
-            </a:r>
-          </a:p>
-          <a:p>
-            <a:endParaRPr lang="en-US" altLang="en-US" dirty="0"/>
-          </a:p>
-          <a:p>
-            <a:r>
-              <a:rPr lang="en-US" altLang="en-US" dirty="0"/>
-              <a:t>"This is Event 1. Day zero is May 9th 2022 — the LUNA collapse. UST was an algorithmic stablecoin. It had no real dollar reserves. Its one-dollar peg was maintained by minting and burning LUNA tokens. When confidence broke, the mechanism failed instantly. Forty billion dollars wiped out in 72 hours."</a:t>
-            </a:r>
-          </a:p>
-          <a:p>
-            <a:endParaRPr lang="en-US" altLang="en-US" dirty="0"/>
-          </a:p>
-          <a:p>
-            <a:r>
-              <a:rPr lang="en-US" altLang="en-US" dirty="0"/>
-              <a:t>"Look at the graph. The line starts near zero before the event and rises steadily. By day plus 20, the CAR has accumulated to plus 8.9 percentage points. That means the OIS-Treasury spread accumulated 8.9 percentage points above what normal market conditions predicted — sustained, persistent T-bill selling pressure over twenty trading days. Exactly what our theory predicts for a low-buffer issuer."</a:t>
-            </a:r>
-          </a:p>
-          <a:p>
-            <a:endParaRPr lang="en-US" altLang="en-US" dirty="0"/>
-          </a:p>
-          <a:p>
-            <a:r>
-              <a:rPr lang="en-US" altLang="en-US" dirty="0">
-                <a:sym typeface="+mn-ea"/>
-              </a:rPr>
-              <a:t>"The panic spread to Tether — a completely different issuer, fiat-backed with real reserves. But Tether had a critical vulnerability: its liquid cash buffer was only 5 to 8 percent of outstanding supply. When investors demanded their dollars back, Tether had no choice — it had to sell T-bills immediately to raise cash."</a:t>
-            </a:r>
-            <a:endParaRPr lang="en-US" altLang="en-US" dirty="0"/>
-          </a:p>
-          <a:p>
-            <a:endParaRPr lang="en-US" altLang="en-US" dirty="0"/>
-          </a:p>
-          <a:p>
-            <a:r>
-              <a:rPr lang="en-US" altLang="en-US" dirty="0"/>
-              <a:t>"Three days later — Event 2 — USDT itself partially depegged to 95 cents. This time the run was directly on Tether, not on an algorithmic stablecoin. </a:t>
-            </a:r>
-            <a:r>
-              <a:rPr dirty="0">
-                <a:sym typeface="+mn-ea"/>
-              </a:rPr>
-              <a:t>In a single day, over 7 billion dollars of USDT was redeemed — the largest single-day redemption in Tether's history. </a:t>
-            </a:r>
-            <a:r>
-              <a:rPr lang="en-US" dirty="0">
-                <a:sym typeface="+mn-ea"/>
-              </a:rPr>
-              <a:t> </a:t>
-            </a:r>
-            <a:r>
-              <a:rPr b="1" dirty="0">
-                <a:sym typeface="+mn-ea"/>
-              </a:rPr>
-              <a:t>Tether managed to maintain the peg and return to one dollar within days, which actually validated their reserves. But during those days of uncertainty, the forced selling mechanism activated again:</a:t>
-            </a:r>
-            <a:r>
-              <a:rPr lang="en-US" b="1" dirty="0">
-                <a:sym typeface="+mn-ea"/>
-              </a:rPr>
-              <a:t> </a:t>
-            </a:r>
-            <a:r>
-              <a:rPr lang="en-US" altLang="en-US" dirty="0"/>
-              <a:t>Different trigger, different mechanism — but the same buffer level of 5 to 8 percent, and the same result: CAR of plus 8.85 — nearly identical. The buffer determined the outcome. Not the nature of the shock."</a:t>
-            </a:r>
-          </a:p>
-          <a:p>
-            <a:endParaRPr lang="en-US" altLang="en-US" dirty="0"/>
-          </a:p>
-          <a:p>
-            <a:r>
-              <a:rPr lang="en-US" altLang="en-US" dirty="0"/>
-              <a:t>[Hand to Mimi]</a:t>
-            </a:r>
-          </a:p>
-          <a:p>
-            <a:endParaRPr lang="en-US" altLang="en-US" dirty="0"/>
-          </a:p>
-          <a:p>
-            <a:r>
-              <a:rPr lang="en-US" altLang="en-US" dirty="0"/>
-              <a:t>"Mimi will now show you what happens when the same type of stress hits a high-buffer issuer — and why the outcome is completely different."</a:t>
-            </a:r>
-            <a:br>
-              <a:rPr lang="en-US" altLang="en-US" dirty="0"/>
-            </a:br>
-            <a:br>
-              <a:rPr lang="en-US" altLang="en-US" dirty="0"/>
-            </a:br>
-            <a:r>
-              <a:rPr dirty="0">
-                <a:sym typeface="+mn-ea"/>
-              </a:rPr>
-              <a:t>UST was an algorithmic stablecoin — it did not hold real dollars or Treasury bills. Instead, its one-dollar peg was maintained by a mathematical relationship with its sister token, LUNA. When a large coordinated sell-off drained UST's liquidity on May 7th, the peg broke, a death spiral began, and roughly 40 billion dollars in market value was destroyed within days. </a:t>
-            </a:r>
-            <a:br>
-              <a:rPr dirty="0">
-                <a:sym typeface="+mn-ea"/>
-              </a:rPr>
-            </a:br>
-            <a:br>
-              <a:rPr dirty="0">
-                <a:sym typeface="+mn-ea"/>
-              </a:rPr>
-            </a:br>
-            <a:r>
-              <a:rPr lang="en-US" dirty="0">
-                <a:sym typeface="+mn-ea"/>
-              </a:rPr>
-              <a:t>Note: </a:t>
-            </a:r>
-            <a:r>
-              <a:rPr lang="ko-KR" altLang="ko-KR" b="1" dirty="0">
-                <a:effectLst/>
-                <a:sym typeface="+mn-ea"/>
-              </a:rPr>
-              <a:t>UST (</a:t>
-            </a:r>
-            <a:r>
-              <a:rPr lang="ko-KR" altLang="ko-KR" b="1" dirty="0" err="1">
-                <a:effectLst/>
-                <a:sym typeface="+mn-ea"/>
-              </a:rPr>
-              <a:t>TerraUSD</a:t>
-            </a:r>
-            <a:r>
-              <a:rPr lang="ko-KR" altLang="ko-KR" b="1" dirty="0">
-                <a:effectLst/>
-                <a:sym typeface="+mn-ea"/>
-              </a:rPr>
-              <a:t>):</a:t>
-            </a:r>
-            <a:r>
-              <a:rPr lang="ko-KR" altLang="ko-KR" dirty="0">
-                <a:effectLst/>
-                <a:sym typeface="+mn-ea"/>
-              </a:rPr>
-              <a:t> </a:t>
-            </a:r>
-            <a:r>
-              <a:rPr lang="ko-KR" altLang="ko-KR" dirty="0" err="1">
-                <a:effectLst/>
-                <a:sym typeface="+mn-ea"/>
-              </a:rPr>
-              <a:t>Unlike</a:t>
-            </a:r>
-            <a:r>
-              <a:rPr lang="ko-KR" altLang="ko-KR" dirty="0">
-                <a:effectLst/>
-                <a:sym typeface="+mn-ea"/>
-              </a:rPr>
-              <a:t> </a:t>
-            </a:r>
-            <a:r>
-              <a:rPr lang="ko-KR" altLang="ko-KR" dirty="0" err="1">
-                <a:effectLst/>
-                <a:sym typeface="+mn-ea"/>
-              </a:rPr>
-              <a:t>traditional</a:t>
-            </a:r>
-            <a:r>
-              <a:rPr lang="ko-KR" altLang="ko-KR" dirty="0">
-                <a:effectLst/>
-                <a:sym typeface="+mn-ea"/>
-              </a:rPr>
-              <a:t> </a:t>
-            </a:r>
-            <a:r>
-              <a:rPr lang="ko-KR" altLang="ko-KR" dirty="0" err="1">
-                <a:effectLst/>
-                <a:sym typeface="+mn-ea"/>
-              </a:rPr>
-              <a:t>stablecoins</a:t>
-            </a:r>
-            <a:r>
-              <a:rPr lang="ko-KR" altLang="ko-KR" dirty="0">
-                <a:effectLst/>
-                <a:sym typeface="+mn-ea"/>
-              </a:rPr>
-              <a:t> </a:t>
-            </a:r>
-            <a:r>
-              <a:rPr lang="ko-KR" altLang="ko-KR" dirty="0" err="1">
-                <a:effectLst/>
-                <a:sym typeface="+mn-ea"/>
-              </a:rPr>
-              <a:t>backed</a:t>
-            </a:r>
-            <a:r>
-              <a:rPr lang="ko-KR" altLang="ko-KR" dirty="0">
-                <a:effectLst/>
-                <a:sym typeface="+mn-ea"/>
-              </a:rPr>
-              <a:t> </a:t>
-            </a:r>
-            <a:r>
-              <a:rPr lang="ko-KR" altLang="ko-KR" dirty="0" err="1">
-                <a:effectLst/>
-                <a:sym typeface="+mn-ea"/>
-              </a:rPr>
-              <a:t>by</a:t>
-            </a:r>
-            <a:r>
-              <a:rPr lang="ko-KR" altLang="ko-KR" dirty="0">
-                <a:effectLst/>
-                <a:sym typeface="+mn-ea"/>
-              </a:rPr>
-              <a:t> </a:t>
-            </a:r>
-            <a:r>
-              <a:rPr lang="ko-KR" altLang="ko-KR" dirty="0" err="1">
-                <a:effectLst/>
-                <a:sym typeface="+mn-ea"/>
-              </a:rPr>
-              <a:t>fiat</a:t>
-            </a:r>
-            <a:r>
-              <a:rPr lang="ko-KR" altLang="ko-KR" dirty="0">
-                <a:effectLst/>
-                <a:sym typeface="+mn-ea"/>
-              </a:rPr>
-              <a:t> </a:t>
-            </a:r>
-            <a:r>
-              <a:rPr lang="ko-KR" altLang="ko-KR" dirty="0" err="1">
-                <a:effectLst/>
-                <a:sym typeface="+mn-ea"/>
-              </a:rPr>
-              <a:t>reserves</a:t>
-            </a:r>
-            <a:r>
-              <a:rPr lang="ko-KR" altLang="ko-KR" dirty="0">
-                <a:effectLst/>
-                <a:sym typeface="+mn-ea"/>
-              </a:rPr>
-              <a:t> (</a:t>
-            </a:r>
-            <a:r>
-              <a:rPr lang="ko-KR" altLang="ko-KR" dirty="0" err="1">
-                <a:effectLst/>
-                <a:sym typeface="+mn-ea"/>
-              </a:rPr>
-              <a:t>such</a:t>
-            </a:r>
-            <a:r>
-              <a:rPr lang="ko-KR" altLang="ko-KR" dirty="0">
-                <a:effectLst/>
-                <a:sym typeface="+mn-ea"/>
-              </a:rPr>
-              <a:t> </a:t>
-            </a:r>
-            <a:r>
-              <a:rPr lang="ko-KR" altLang="ko-KR" dirty="0" err="1">
-                <a:effectLst/>
-                <a:sym typeface="+mn-ea"/>
-              </a:rPr>
-              <a:t>as</a:t>
-            </a:r>
-            <a:r>
-              <a:rPr lang="ko-KR" altLang="ko-KR" dirty="0">
-                <a:effectLst/>
-                <a:sym typeface="+mn-ea"/>
-              </a:rPr>
-              <a:t> USDC), UST </a:t>
-            </a:r>
-            <a:r>
-              <a:rPr lang="ko-KR" altLang="ko-KR" dirty="0" err="1">
-                <a:effectLst/>
-                <a:sym typeface="+mn-ea"/>
-              </a:rPr>
-              <a:t>was</a:t>
-            </a:r>
-            <a:r>
-              <a:rPr lang="ko-KR" altLang="ko-KR" dirty="0">
-                <a:effectLst/>
-                <a:sym typeface="+mn-ea"/>
-              </a:rPr>
-              <a:t> </a:t>
-            </a:r>
-            <a:r>
-              <a:rPr lang="ko-KR" altLang="ko-KR" dirty="0" err="1">
-                <a:effectLst/>
-                <a:sym typeface="+mn-ea"/>
-              </a:rPr>
-              <a:t>unbacked</a:t>
-            </a:r>
-            <a:r>
-              <a:rPr lang="ko-KR" altLang="ko-KR" dirty="0">
-                <a:effectLst/>
-                <a:sym typeface="+mn-ea"/>
-              </a:rPr>
-              <a:t>. </a:t>
-            </a:r>
-            <a:r>
-              <a:rPr lang="ko-KR" altLang="ko-KR" dirty="0" err="1">
-                <a:effectLst/>
-                <a:sym typeface="+mn-ea"/>
-              </a:rPr>
-              <a:t>Its</a:t>
-            </a:r>
-            <a:r>
-              <a:rPr lang="ko-KR" altLang="ko-KR" dirty="0">
-                <a:effectLst/>
-                <a:sym typeface="+mn-ea"/>
-              </a:rPr>
-              <a:t> </a:t>
-            </a:r>
-            <a:r>
-              <a:rPr lang="ko-KR" altLang="ko-KR" dirty="0" err="1">
-                <a:effectLst/>
-                <a:sym typeface="+mn-ea"/>
-              </a:rPr>
-              <a:t>peg</a:t>
-            </a:r>
-            <a:r>
-              <a:rPr lang="ko-KR" altLang="ko-KR" dirty="0">
-                <a:effectLst/>
-                <a:sym typeface="+mn-ea"/>
-              </a:rPr>
-              <a:t> </a:t>
-            </a:r>
-            <a:r>
-              <a:rPr lang="ko-KR" altLang="ko-KR" dirty="0" err="1">
-                <a:effectLst/>
-                <a:sym typeface="+mn-ea"/>
-              </a:rPr>
-              <a:t>relied</a:t>
-            </a:r>
-            <a:r>
-              <a:rPr lang="ko-KR" altLang="ko-KR" dirty="0">
-                <a:effectLst/>
-                <a:sym typeface="+mn-ea"/>
-              </a:rPr>
-              <a:t> </a:t>
-            </a:r>
-            <a:r>
-              <a:rPr lang="ko-KR" altLang="ko-KR" dirty="0" err="1">
-                <a:effectLst/>
-                <a:sym typeface="+mn-ea"/>
-              </a:rPr>
-              <a:t>entirely</a:t>
-            </a:r>
-            <a:r>
-              <a:rPr lang="ko-KR" altLang="ko-KR" dirty="0">
-                <a:effectLst/>
-                <a:sym typeface="+mn-ea"/>
-              </a:rPr>
-              <a:t> </a:t>
-            </a:r>
-            <a:r>
-              <a:rPr lang="ko-KR" altLang="ko-KR" dirty="0" err="1">
-                <a:effectLst/>
-                <a:sym typeface="+mn-ea"/>
-              </a:rPr>
-              <a:t>on</a:t>
-            </a:r>
-            <a:r>
-              <a:rPr lang="ko-KR" altLang="ko-KR" dirty="0">
-                <a:effectLst/>
-                <a:sym typeface="+mn-ea"/>
-              </a:rPr>
-              <a:t> </a:t>
-            </a:r>
-            <a:r>
-              <a:rPr lang="ko-KR" altLang="ko-KR" dirty="0" err="1">
-                <a:effectLst/>
-                <a:sym typeface="+mn-ea"/>
-              </a:rPr>
-              <a:t>a</a:t>
-            </a:r>
-            <a:r>
-              <a:rPr lang="ko-KR" altLang="ko-KR" dirty="0">
-                <a:effectLst/>
-                <a:sym typeface="+mn-ea"/>
-              </a:rPr>
-              <a:t> </a:t>
-            </a:r>
-            <a:r>
-              <a:rPr lang="ko-KR" altLang="ko-KR" dirty="0" err="1">
-                <a:effectLst/>
-                <a:sym typeface="+mn-ea"/>
-              </a:rPr>
-              <a:t>smart</a:t>
-            </a:r>
-            <a:r>
-              <a:rPr lang="ko-KR" altLang="ko-KR" dirty="0">
-                <a:effectLst/>
-                <a:sym typeface="+mn-ea"/>
-              </a:rPr>
-              <a:t> </a:t>
-            </a:r>
-            <a:r>
-              <a:rPr lang="ko-KR" altLang="ko-KR" dirty="0" err="1">
-                <a:effectLst/>
-                <a:sym typeface="+mn-ea"/>
-              </a:rPr>
-              <a:t>contract</a:t>
-            </a:r>
-            <a:r>
-              <a:rPr lang="ko-KR" altLang="ko-KR" dirty="0">
-                <a:effectLst/>
-                <a:sym typeface="+mn-ea"/>
-              </a:rPr>
-              <a:t> "</a:t>
-            </a:r>
-            <a:r>
-              <a:rPr lang="ko-KR" altLang="ko-KR" dirty="0" err="1">
-                <a:effectLst/>
-                <a:sym typeface="+mn-ea"/>
-              </a:rPr>
-              <a:t>mint</a:t>
-            </a:r>
-            <a:r>
-              <a:rPr lang="ko-KR" altLang="ko-KR" dirty="0">
-                <a:effectLst/>
-                <a:sym typeface="+mn-ea"/>
-              </a:rPr>
-              <a:t>-and-</a:t>
-            </a:r>
-            <a:r>
-              <a:rPr lang="ko-KR" altLang="ko-KR" dirty="0" err="1">
-                <a:effectLst/>
-                <a:sym typeface="+mn-ea"/>
-              </a:rPr>
-              <a:t>burn</a:t>
-            </a:r>
-            <a:r>
-              <a:rPr lang="ko-KR" altLang="ko-KR" dirty="0">
-                <a:effectLst/>
-                <a:sym typeface="+mn-ea"/>
-              </a:rPr>
-              <a:t>" </a:t>
-            </a:r>
-            <a:r>
-              <a:rPr lang="ko-KR" altLang="ko-KR" dirty="0" err="1">
-                <a:effectLst/>
-                <a:sym typeface="+mn-ea"/>
-              </a:rPr>
-              <a:t>mechanism</a:t>
-            </a:r>
-            <a:r>
-              <a:rPr lang="ko-KR" altLang="ko-KR" dirty="0">
-                <a:effectLst/>
-                <a:sym typeface="+mn-ea"/>
-              </a:rPr>
-              <a:t> </a:t>
-            </a:r>
-            <a:r>
-              <a:rPr lang="ko-KR" altLang="ko-KR" dirty="0" err="1">
-                <a:effectLst/>
-                <a:sym typeface="+mn-ea"/>
-              </a:rPr>
-              <a:t>tied</a:t>
-            </a:r>
-            <a:r>
-              <a:rPr lang="ko-KR" altLang="ko-KR" dirty="0">
-                <a:effectLst/>
-                <a:sym typeface="+mn-ea"/>
-              </a:rPr>
-              <a:t> </a:t>
-            </a:r>
-            <a:r>
-              <a:rPr lang="ko-KR" altLang="ko-KR" dirty="0" err="1">
-                <a:effectLst/>
-                <a:sym typeface="+mn-ea"/>
-              </a:rPr>
-              <a:t>to</a:t>
-            </a:r>
-            <a:r>
-              <a:rPr lang="ko-KR" altLang="ko-KR" dirty="0">
-                <a:effectLst/>
-                <a:sym typeface="+mn-ea"/>
-              </a:rPr>
-              <a:t> LUNA.</a:t>
-            </a:r>
-            <a:endParaRPr lang="ko-KR" altLang="ko-KR" b="0" i="0" kern="1200" dirty="0">
-              <a:solidFill>
-                <a:schemeClr val="tx1"/>
-              </a:solidFill>
-              <a:effectLst/>
-              <a:latin typeface="+mn-lt"/>
-              <a:ea typeface="+mn-ea"/>
-              <a:cs typeface="+mn-cs"/>
-            </a:endParaRPr>
-          </a:p>
-          <a:p>
-            <a:r>
-              <a:rPr lang="ko-KR" altLang="ko-KR" b="1" dirty="0">
-                <a:effectLst/>
-                <a:sym typeface="+mn-ea"/>
-              </a:rPr>
-              <a:t>LUNA:</a:t>
-            </a:r>
-            <a:r>
-              <a:rPr lang="ko-KR" altLang="ko-KR" dirty="0">
-                <a:effectLst/>
-                <a:sym typeface="+mn-ea"/>
-              </a:rPr>
-              <a:t> </a:t>
-            </a:r>
-            <a:r>
-              <a:rPr lang="ko-KR" altLang="ko-KR" dirty="0" err="1">
-                <a:effectLst/>
-                <a:sym typeface="+mn-ea"/>
-              </a:rPr>
-              <a:t>When</a:t>
-            </a:r>
-            <a:r>
-              <a:rPr lang="ko-KR" altLang="ko-KR" dirty="0">
-                <a:effectLst/>
-                <a:sym typeface="+mn-ea"/>
-              </a:rPr>
-              <a:t> </a:t>
-            </a:r>
-            <a:r>
-              <a:rPr lang="ko-KR" altLang="ko-KR" dirty="0" err="1">
-                <a:effectLst/>
-                <a:sym typeface="+mn-ea"/>
-              </a:rPr>
-              <a:t>the</a:t>
-            </a:r>
-            <a:r>
-              <a:rPr lang="ko-KR" altLang="ko-KR" dirty="0">
-                <a:effectLst/>
-                <a:sym typeface="+mn-ea"/>
-              </a:rPr>
-              <a:t> </a:t>
-            </a:r>
-            <a:r>
-              <a:rPr lang="ko-KR" altLang="ko-KR" dirty="0" err="1">
-                <a:effectLst/>
-                <a:sym typeface="+mn-ea"/>
-              </a:rPr>
-              <a:t>price</a:t>
-            </a:r>
-            <a:r>
-              <a:rPr lang="ko-KR" altLang="ko-KR" dirty="0">
-                <a:effectLst/>
-                <a:sym typeface="+mn-ea"/>
-              </a:rPr>
-              <a:t> of UST </a:t>
-            </a:r>
-            <a:r>
-              <a:rPr lang="ko-KR" altLang="ko-KR" dirty="0" err="1">
-                <a:effectLst/>
-                <a:sym typeface="+mn-ea"/>
-              </a:rPr>
-              <a:t>rose</a:t>
-            </a:r>
-            <a:r>
-              <a:rPr lang="ko-KR" altLang="ko-KR" dirty="0">
-                <a:effectLst/>
-                <a:sym typeface="+mn-ea"/>
-              </a:rPr>
-              <a:t> </a:t>
-            </a:r>
-            <a:r>
-              <a:rPr lang="ko-KR" altLang="ko-KR" dirty="0" err="1">
-                <a:effectLst/>
-                <a:sym typeface="+mn-ea"/>
-              </a:rPr>
-              <a:t>above</a:t>
-            </a:r>
-            <a:r>
-              <a:rPr lang="ko-KR" altLang="ko-KR" dirty="0">
-                <a:effectLst/>
-                <a:sym typeface="+mn-ea"/>
-              </a:rPr>
-              <a:t> $1, </a:t>
-            </a:r>
-            <a:r>
-              <a:rPr lang="ko-KR" altLang="ko-KR" dirty="0" err="1">
-                <a:effectLst/>
-                <a:sym typeface="+mn-ea"/>
-              </a:rPr>
-              <a:t>users</a:t>
-            </a:r>
-            <a:r>
-              <a:rPr lang="ko-KR" altLang="ko-KR" dirty="0">
-                <a:effectLst/>
-                <a:sym typeface="+mn-ea"/>
-              </a:rPr>
-              <a:t> </a:t>
-            </a:r>
-            <a:r>
-              <a:rPr lang="ko-KR" altLang="ko-KR" dirty="0" err="1">
-                <a:effectLst/>
-                <a:sym typeface="+mn-ea"/>
-              </a:rPr>
-              <a:t>could</a:t>
-            </a:r>
-            <a:r>
-              <a:rPr lang="ko-KR" altLang="ko-KR" dirty="0">
-                <a:effectLst/>
-                <a:sym typeface="+mn-ea"/>
-              </a:rPr>
-              <a:t> </a:t>
-            </a:r>
-            <a:r>
-              <a:rPr lang="ko-KR" altLang="ko-KR" dirty="0" err="1">
-                <a:effectLst/>
-                <a:sym typeface="+mn-ea"/>
-              </a:rPr>
-              <a:t>burn</a:t>
-            </a:r>
-            <a:r>
-              <a:rPr lang="ko-KR" altLang="ko-KR" dirty="0">
-                <a:effectLst/>
-                <a:sym typeface="+mn-ea"/>
-              </a:rPr>
-              <a:t> $1 of LUNA </a:t>
-            </a:r>
-            <a:r>
-              <a:rPr lang="ko-KR" altLang="ko-KR" dirty="0" err="1">
-                <a:effectLst/>
-                <a:sym typeface="+mn-ea"/>
-              </a:rPr>
-              <a:t>to</a:t>
-            </a:r>
-            <a:r>
-              <a:rPr lang="ko-KR" altLang="ko-KR" dirty="0">
-                <a:effectLst/>
-                <a:sym typeface="+mn-ea"/>
-              </a:rPr>
-              <a:t> </a:t>
-            </a:r>
-            <a:r>
-              <a:rPr lang="ko-KR" altLang="ko-KR" dirty="0" err="1">
-                <a:effectLst/>
-                <a:sym typeface="+mn-ea"/>
-              </a:rPr>
-              <a:t>mint</a:t>
-            </a:r>
-            <a:r>
-              <a:rPr lang="ko-KR" altLang="ko-KR" dirty="0">
-                <a:effectLst/>
-                <a:sym typeface="+mn-ea"/>
-              </a:rPr>
-              <a:t> 1 </a:t>
-            </a:r>
-            <a:r>
-              <a:rPr lang="ko-KR" altLang="ko-KR" dirty="0" err="1">
-                <a:effectLst/>
-                <a:sym typeface="+mn-ea"/>
-              </a:rPr>
-              <a:t>new</a:t>
-            </a:r>
-            <a:r>
-              <a:rPr lang="ko-KR" altLang="ko-KR" dirty="0">
-                <a:effectLst/>
-                <a:sym typeface="+mn-ea"/>
-              </a:rPr>
-              <a:t> UST (</a:t>
-            </a:r>
-            <a:r>
-              <a:rPr lang="ko-KR" altLang="ko-KR" dirty="0" err="1">
-                <a:effectLst/>
-                <a:sym typeface="+mn-ea"/>
-              </a:rPr>
-              <a:t>increasing</a:t>
-            </a:r>
-            <a:r>
-              <a:rPr lang="ko-KR" altLang="ko-KR" dirty="0">
-                <a:effectLst/>
-                <a:sym typeface="+mn-ea"/>
-              </a:rPr>
-              <a:t> </a:t>
-            </a:r>
-            <a:r>
-              <a:rPr lang="ko-KR" altLang="ko-KR" dirty="0" err="1">
-                <a:effectLst/>
-                <a:sym typeface="+mn-ea"/>
-              </a:rPr>
-              <a:t>supply</a:t>
-            </a:r>
-            <a:r>
-              <a:rPr lang="ko-KR" altLang="ko-KR" dirty="0">
-                <a:effectLst/>
-                <a:sym typeface="+mn-ea"/>
-              </a:rPr>
-              <a:t> and </a:t>
-            </a:r>
-            <a:r>
-              <a:rPr lang="ko-KR" altLang="ko-KR" dirty="0" err="1">
-                <a:effectLst/>
-                <a:sym typeface="+mn-ea"/>
-              </a:rPr>
-              <a:t>bringing</a:t>
-            </a:r>
-            <a:r>
-              <a:rPr lang="ko-KR" altLang="ko-KR" dirty="0">
-                <a:effectLst/>
-                <a:sym typeface="+mn-ea"/>
-              </a:rPr>
-              <a:t> </a:t>
-            </a:r>
-            <a:r>
-              <a:rPr lang="ko-KR" altLang="ko-KR" dirty="0" err="1">
-                <a:effectLst/>
-                <a:sym typeface="+mn-ea"/>
-              </a:rPr>
-              <a:t>the</a:t>
-            </a:r>
-            <a:r>
-              <a:rPr lang="ko-KR" altLang="ko-KR" dirty="0">
-                <a:effectLst/>
-                <a:sym typeface="+mn-ea"/>
-              </a:rPr>
-              <a:t> </a:t>
-            </a:r>
-            <a:r>
-              <a:rPr lang="ko-KR" altLang="ko-KR" dirty="0" err="1">
-                <a:effectLst/>
-                <a:sym typeface="+mn-ea"/>
-              </a:rPr>
-              <a:t>price</a:t>
-            </a:r>
-            <a:r>
-              <a:rPr lang="ko-KR" altLang="ko-KR" dirty="0">
-                <a:effectLst/>
-                <a:sym typeface="+mn-ea"/>
-              </a:rPr>
-              <a:t> </a:t>
-            </a:r>
-            <a:r>
-              <a:rPr lang="ko-KR" altLang="ko-KR" dirty="0" err="1">
-                <a:effectLst/>
-                <a:sym typeface="+mn-ea"/>
-              </a:rPr>
-              <a:t>back</a:t>
-            </a:r>
-            <a:r>
-              <a:rPr lang="ko-KR" altLang="ko-KR" dirty="0">
-                <a:effectLst/>
-                <a:sym typeface="+mn-ea"/>
-              </a:rPr>
-              <a:t> </a:t>
-            </a:r>
-            <a:r>
-              <a:rPr lang="ko-KR" altLang="ko-KR" dirty="0" err="1">
-                <a:effectLst/>
-                <a:sym typeface="+mn-ea"/>
-              </a:rPr>
-              <a:t>down</a:t>
-            </a:r>
-            <a:r>
-              <a:rPr lang="ko-KR" altLang="ko-KR" dirty="0">
-                <a:effectLst/>
-                <a:sym typeface="+mn-ea"/>
-              </a:rPr>
-              <a:t>). </a:t>
-            </a:r>
-            <a:r>
-              <a:rPr lang="ko-KR" altLang="ko-KR" dirty="0" err="1">
-                <a:effectLst/>
-                <a:sym typeface="+mn-ea"/>
-              </a:rPr>
-              <a:t>When</a:t>
-            </a:r>
-            <a:r>
-              <a:rPr lang="ko-KR" altLang="ko-KR" dirty="0">
-                <a:effectLst/>
-                <a:sym typeface="+mn-ea"/>
-              </a:rPr>
-              <a:t> UST </a:t>
-            </a:r>
-            <a:r>
-              <a:rPr lang="ko-KR" altLang="ko-KR" dirty="0" err="1">
-                <a:effectLst/>
-                <a:sym typeface="+mn-ea"/>
-              </a:rPr>
-              <a:t>dropped</a:t>
-            </a:r>
-            <a:r>
-              <a:rPr lang="ko-KR" altLang="ko-KR" dirty="0">
-                <a:effectLst/>
-                <a:sym typeface="+mn-ea"/>
-              </a:rPr>
-              <a:t> </a:t>
-            </a:r>
-            <a:r>
-              <a:rPr lang="ko-KR" altLang="ko-KR" dirty="0" err="1">
-                <a:effectLst/>
-                <a:sym typeface="+mn-ea"/>
-              </a:rPr>
-              <a:t>below</a:t>
-            </a:r>
-            <a:r>
-              <a:rPr lang="ko-KR" altLang="ko-KR" dirty="0">
-                <a:effectLst/>
-                <a:sym typeface="+mn-ea"/>
-              </a:rPr>
-              <a:t> $1, </a:t>
-            </a:r>
-            <a:r>
-              <a:rPr lang="ko-KR" altLang="ko-KR" dirty="0" err="1">
-                <a:effectLst/>
-                <a:sym typeface="+mn-ea"/>
-              </a:rPr>
-              <a:t>users</a:t>
-            </a:r>
-            <a:r>
-              <a:rPr lang="ko-KR" altLang="ko-KR" dirty="0">
-                <a:effectLst/>
-                <a:sym typeface="+mn-ea"/>
-              </a:rPr>
-              <a:t> </a:t>
-            </a:r>
-            <a:r>
-              <a:rPr lang="ko-KR" altLang="ko-KR" dirty="0" err="1">
-                <a:effectLst/>
-                <a:sym typeface="+mn-ea"/>
-              </a:rPr>
-              <a:t>could</a:t>
-            </a:r>
-            <a:r>
-              <a:rPr lang="ko-KR" altLang="ko-KR" dirty="0">
-                <a:effectLst/>
-                <a:sym typeface="+mn-ea"/>
-              </a:rPr>
-              <a:t> </a:t>
-            </a:r>
-            <a:r>
-              <a:rPr lang="ko-KR" altLang="ko-KR" dirty="0" err="1">
-                <a:effectLst/>
-                <a:sym typeface="+mn-ea"/>
-              </a:rPr>
-              <a:t>burn</a:t>
-            </a:r>
-            <a:r>
-              <a:rPr lang="ko-KR" altLang="ko-KR" dirty="0">
-                <a:effectLst/>
-                <a:sym typeface="+mn-ea"/>
-              </a:rPr>
-              <a:t> 1 UST </a:t>
-            </a:r>
-            <a:r>
-              <a:rPr lang="ko-KR" altLang="ko-KR" dirty="0" err="1">
-                <a:effectLst/>
-                <a:sym typeface="+mn-ea"/>
-              </a:rPr>
-              <a:t>to</a:t>
-            </a:r>
-            <a:r>
-              <a:rPr lang="ko-KR" altLang="ko-KR" dirty="0">
-                <a:effectLst/>
-                <a:sym typeface="+mn-ea"/>
-              </a:rPr>
-              <a:t> </a:t>
-            </a:r>
-            <a:r>
-              <a:rPr lang="ko-KR" altLang="ko-KR" dirty="0" err="1">
-                <a:effectLst/>
-                <a:sym typeface="+mn-ea"/>
-              </a:rPr>
-              <a:t>receive</a:t>
-            </a:r>
-            <a:r>
-              <a:rPr lang="ko-KR" altLang="ko-KR" dirty="0">
-                <a:effectLst/>
-                <a:sym typeface="+mn-ea"/>
-              </a:rPr>
-              <a:t> $1 </a:t>
-            </a:r>
-            <a:r>
-              <a:rPr lang="ko-KR" altLang="ko-KR" dirty="0" err="1">
-                <a:effectLst/>
-                <a:sym typeface="+mn-ea"/>
-              </a:rPr>
-              <a:t>worth</a:t>
-            </a:r>
-            <a:r>
-              <a:rPr lang="ko-KR" altLang="ko-KR" dirty="0">
-                <a:effectLst/>
-                <a:sym typeface="+mn-ea"/>
-              </a:rPr>
-              <a:t> of LUNA (</a:t>
-            </a:r>
-            <a:r>
-              <a:rPr lang="ko-KR" altLang="ko-KR" dirty="0" err="1">
-                <a:effectLst/>
-                <a:sym typeface="+mn-ea"/>
-              </a:rPr>
-              <a:t>reducing</a:t>
-            </a:r>
-            <a:r>
-              <a:rPr lang="ko-KR" altLang="ko-KR" dirty="0">
-                <a:effectLst/>
-                <a:sym typeface="+mn-ea"/>
-              </a:rPr>
-              <a:t> </a:t>
-            </a:r>
-            <a:r>
-              <a:rPr lang="ko-KR" altLang="ko-KR" dirty="0" err="1">
-                <a:effectLst/>
-                <a:sym typeface="+mn-ea"/>
-              </a:rPr>
-              <a:t>supply</a:t>
-            </a:r>
-            <a:r>
-              <a:rPr lang="ko-KR" altLang="ko-KR" dirty="0">
-                <a:effectLst/>
-                <a:sym typeface="+mn-ea"/>
-              </a:rPr>
-              <a:t> </a:t>
-            </a:r>
-            <a:r>
-              <a:rPr lang="ko-KR" altLang="ko-KR" dirty="0" err="1">
-                <a:effectLst/>
-                <a:sym typeface="+mn-ea"/>
-              </a:rPr>
-              <a:t>to</a:t>
-            </a:r>
-            <a:r>
-              <a:rPr lang="ko-KR" altLang="ko-KR" dirty="0">
-                <a:effectLst/>
-                <a:sym typeface="+mn-ea"/>
-              </a:rPr>
-              <a:t> </a:t>
-            </a:r>
-            <a:r>
-              <a:rPr lang="ko-KR" altLang="ko-KR" dirty="0" err="1">
-                <a:effectLst/>
-                <a:sym typeface="+mn-ea"/>
-              </a:rPr>
-              <a:t>drive</a:t>
-            </a:r>
-            <a:r>
-              <a:rPr lang="ko-KR" altLang="ko-KR" dirty="0">
-                <a:effectLst/>
-                <a:sym typeface="+mn-ea"/>
-              </a:rPr>
-              <a:t> </a:t>
-            </a:r>
-            <a:r>
-              <a:rPr lang="ko-KR" altLang="ko-KR" dirty="0" err="1">
-                <a:effectLst/>
-                <a:sym typeface="+mn-ea"/>
-              </a:rPr>
-              <a:t>the</a:t>
-            </a:r>
-            <a:r>
-              <a:rPr lang="ko-KR" altLang="ko-KR" dirty="0">
-                <a:effectLst/>
-                <a:sym typeface="+mn-ea"/>
-              </a:rPr>
-              <a:t> </a:t>
-            </a:r>
-            <a:r>
-              <a:rPr lang="ko-KR" altLang="ko-KR" dirty="0" err="1">
-                <a:effectLst/>
-                <a:sym typeface="+mn-ea"/>
-              </a:rPr>
-              <a:t>price</a:t>
-            </a:r>
-            <a:r>
-              <a:rPr lang="ko-KR" altLang="ko-KR" dirty="0">
-                <a:effectLst/>
-                <a:sym typeface="+mn-ea"/>
-              </a:rPr>
-              <a:t> </a:t>
-            </a:r>
-            <a:r>
-              <a:rPr lang="ko-KR" altLang="ko-KR" dirty="0" err="1">
-                <a:effectLst/>
-                <a:sym typeface="+mn-ea"/>
-              </a:rPr>
-              <a:t>back</a:t>
-            </a:r>
-            <a:r>
-              <a:rPr lang="ko-KR" altLang="ko-KR" dirty="0">
-                <a:effectLst/>
-                <a:sym typeface="+mn-ea"/>
-              </a:rPr>
-              <a:t> </a:t>
-            </a:r>
-            <a:r>
-              <a:rPr lang="ko-KR" altLang="ko-KR" dirty="0" err="1">
-                <a:effectLst/>
-                <a:sym typeface="+mn-ea"/>
-              </a:rPr>
-              <a:t>up</a:t>
-            </a:r>
-            <a:r>
-              <a:rPr lang="ko-KR" altLang="ko-KR" dirty="0">
-                <a:effectLst/>
-                <a:sym typeface="+mn-ea"/>
-              </a:rPr>
-              <a:t>).</a:t>
-            </a:r>
-            <a:endParaRPr lang="ko-KR" altLang="ko-KR" b="0" i="0" kern="1200" dirty="0">
-              <a:solidFill>
-                <a:schemeClr val="tx1"/>
-              </a:solidFill>
-              <a:effectLst/>
-              <a:latin typeface="+mn-lt"/>
-              <a:ea typeface="+mn-ea"/>
-              <a:cs typeface="+mn-cs"/>
-            </a:endParaRPr>
-          </a:p>
-          <a:p>
-            <a:endParaRPr dirty="0"/>
-          </a:p>
-          <a:p>
-            <a:endParaRPr lang="en-US" dirty="0"/>
-          </a:p>
-          <a:p>
-            <a:endParaRPr lang="en-US" altLang="en-US" dirty="0"/>
+              <a:t>CAR stands for Cumulative Abnormal Return — but in our context it measures the cumulative abnormal spread, not a stock return. Let me explain what the y-axis actually means. Before each crisis, we estimate how the OIS-Treasury spread normally behaves using data from around six months prior. We build a model that says: given today's VIX level and global equity returns, what would we expect the spread to be? The abnormal spread on any given day is the actual spread minus that prediction. CAR is the running total of those daily abnormal spreads from five days before the event onward. A positive CAR means the spread has been persistently higher than expected — T-bill selling pressure. A negative CAR means it has been persistently lower than expected — flight-to-safety buying. A flat line at zero would mean the event had no effect on Treasury markets at all. Now, the second event shown here is the USDT partial depeg on May 12th, 2022 — three days after the LUNA collapse. This was a direct bank-run on Tether itself. USDT briefly fell to 95 cents. Unlike UST, which was algorithmic with no real reserves, Tether holds actual assets. The problem was that Tether's cash was only 5 to 8 percent of its reserves — the rest was T-bills. When over 7 billion dollars of USDT was redeemed in a single day, Tether had to sell T-bills to pay out, and the spread spiked. The CAR came in at plus 8.85 percentage points — essentially identical to the LUNA event. Same buffer, same constraint, same outcome — regardless of what triggered the run.</a:t>
+            </a:r>
           </a:p>
         </p:txBody>
       </p:sp>
@@ -1809,38 +648,8 @@
           <a:lstStyle/>
           <a:p>
             <a:r>
-              <a:rPr lang="en-US" dirty="0"/>
-              <a:t>T</a:t>
-            </a:r>
-            <a:r>
               <a:rPr dirty="0"/>
-              <a:t>he Silicon Valley Bank failure in March 2023, and this one needs careful explanation because the graph </a:t>
-            </a:r>
-            <a:r>
-              <a:rPr b="1" dirty="0"/>
-              <a:t>looks counterintuitive</a:t>
-            </a:r>
-            <a:r>
-              <a:rPr dirty="0"/>
-              <a:t>. SVB collapsed on March 10th — the second largest U.S. bank failure in history</a:t>
-            </a:r>
-            <a:r>
-              <a:rPr lang="en-US" dirty="0"/>
-              <a:t> since 2008</a:t>
-            </a:r>
-            <a:r>
-              <a:rPr dirty="0"/>
-              <a:t>. Circle, which issues USDC, disclosed that 3.3 billion dollars of its reserves were held at SVB and temporarily inaccessible. </a:t>
-            </a:r>
-            <a:endParaRPr lang="en-US" dirty="0"/>
-          </a:p>
-          <a:p>
-            <a:endParaRPr lang="en-US" dirty="0"/>
-          </a:p>
-          <a:p>
-            <a:r>
-              <a:rPr dirty="0"/>
-              <a:t>USDC </a:t>
+              <a:t>Our third event is the SVB failure in March 2023, and the graph needs careful explanation because the CAR goes deeply negative instead of spiking upward like 2022. SVB collapsed on March 10th — the second largest U.S. bank failure in history. Circle disclosed that 3.3 billion dollars of USDC reserves were held at SVB and temporarily inaccessible. USDC </a:t>
             </a:r>
             <a:r>
               <a:rPr dirty="0" err="1"/>
@@ -1848,7 +657,7 @@
             </a:r>
             <a:r>
               <a:rPr dirty="0"/>
-              <a:t> to around 87 cents — actually a larger nominal </a:t>
+              <a:t> to around 87 cents — a larger nominal </a:t>
             </a:r>
             <a:r>
               <a:rPr dirty="0" err="1"/>
@@ -1856,96 +665,61 @@
             </a:r>
             <a:r>
               <a:rPr dirty="0"/>
-              <a:t> than Tether in 2022. So why does the CAR go to minus 18 instead of spiking upward like the 2022 events? </a:t>
-            </a:r>
+              <a:t> than Tether in 2022. </a:t>
+            </a:r>
+            <a:endParaRPr lang="en-US" dirty="0"/>
+          </a:p>
+          <a:p>
+            <a:endParaRPr lang="en-US" dirty="0"/>
+          </a:p>
+          <a:p>
+            <a:r>
+              <a:rPr dirty="0"/>
+              <a:t>So why does the CAR go to minus 18 instead of spiking? Two forces explain it, and both are on this slide. </a:t>
+            </a:r>
+            <a:endParaRPr lang="en-US" dirty="0"/>
+          </a:p>
+          <a:p>
             <a:r>
               <a:rPr b="1" dirty="0"/>
-              <a:t>The answer is the buffer condition. By early 2023, Circle had rebuilt its cash reserves to around 18 to 22 percent — well above our 13 percent threshold. When redemptions came in, Circle paid from cash. It did not need to sell a single Treasury bill. So there was no forced selling pressure on the T-bill market from Circle's side. </a:t>
-            </a:r>
-            <a:endParaRPr lang="en-US" b="1" dirty="0"/>
-          </a:p>
-          <a:p>
+              <a:t>Force A is about government intervention. </a:t>
+            </a:r>
+            <a:r>
+              <a:rPr dirty="0"/>
+              <a:t>U.S. regulators guaranteed all SVB deposits within 72 hours of the collapse. Because of that guarantee, Circle never needed to sell a single Treasury bill to cover the 3.3 billion that was temporarily frozen. The crisis was resolved before any forced liquidation became necessary. So unlike 2022, there </a:t>
+            </a:r>
+            <a:r>
+              <a:rPr b="1" dirty="0"/>
+              <a:t>was no issuer-side selling pressure </a:t>
+            </a:r>
+            <a:r>
+              <a:rPr dirty="0"/>
+              <a:t>on the T-bill market. If that were the whole story, the CAR would be flat — near zero. </a:t>
+            </a:r>
             <a:endParaRPr lang="en-US" dirty="0"/>
           </a:p>
           <a:p>
+            <a:endParaRPr lang="en-US" dirty="0"/>
+          </a:p>
+          <a:p>
+            <a:r>
+              <a:rPr b="1" dirty="0"/>
+              <a:t>But Force B is what actually drives the CAR negative</a:t>
+            </a:r>
             <a:r>
               <a:rPr dirty="0"/>
-              <a:t>But here is what actually happened: SVB's collapse triggered a massive market-wide flight to safety. </a:t>
-            </a:r>
-            <a:r>
-              <a:rPr b="1" dirty="0"/>
-              <a:t>Investors across the entire financial system rushed to buy U.S. Treasury bills — the safest short-term asset available. </a:t>
-            </a:r>
+              <a:t>. SVB's collapse triggered a massive market-wide flight to safety. Investors across the entire financial system rushed to buy U.S. Treasury bills — the safest short-term asset available. That buying pressure pushed T-bill yields sharply below OIS, compressing the spread far below what our normal model predicted. </a:t>
+            </a:r>
+            <a:endParaRPr lang="en-US" dirty="0"/>
+          </a:p>
+          <a:p>
+            <a:endParaRPr lang="en-US" dirty="0"/>
+          </a:p>
+          <a:p>
             <a:r>
               <a:rPr dirty="0"/>
-              <a:t>That buying pressure pushed T-bill yields sharply below OIS, compressing the spread far below what our normal model would predict. That is why the CAR is minus 18 and not flat. </a:t>
-            </a:r>
-            <a:r>
-              <a:rPr b="1" dirty="0"/>
-              <a:t>The high buffer prevented the forced-selling story. But it could not prevent the flight-to-safety buying story. </a:t>
-            </a:r>
-            <a:r>
-              <a:rPr dirty="0"/>
-              <a:t>What we observe in the SVB event is the pure flight-to-safety effect, completely uncontaminated by any issuer-side selling pressure.</a:t>
-            </a:r>
-            <a:br>
-              <a:rPr dirty="0"/>
-            </a:br>
-            <a:br>
-              <a:rPr dirty="0"/>
-            </a:br>
-            <a:r>
-              <a:rPr lang="en-US" dirty="0">
-                <a:sym typeface="+mn-ea"/>
-              </a:rPr>
-              <a:t>The bottom part</a:t>
-            </a:r>
-            <a:r>
-              <a:rPr dirty="0">
-                <a:sym typeface="+mn-ea"/>
-              </a:rPr>
-              <a:t> brings all three events together. Look at what is the same across all three events: stablecoin issuers, U.S. Treasury bills, a sudden confidence shock, and mass redemptions. </a:t>
-            </a:r>
-            <a:r>
-              <a:rPr b="1" dirty="0">
-                <a:sym typeface="+mn-ea"/>
-              </a:rPr>
-              <a:t>The only systematic difference is the liquid buffer level.</a:t>
-            </a:r>
-            <a:r>
-              <a:rPr dirty="0">
-                <a:sym typeface="+mn-ea"/>
-              </a:rPr>
-              <a:t> In 2022, the buffer was low — around 5 to 8 percent — and both events produced a CAR of about plus 9 percentage points. </a:t>
-            </a:r>
-            <a:endParaRPr lang="en-US" dirty="0"/>
-          </a:p>
-          <a:p>
-            <a:endParaRPr lang="en-US" dirty="0"/>
-          </a:p>
-          <a:p>
-            <a:r>
-              <a:rPr dirty="0">
-                <a:sym typeface="+mn-ea"/>
-              </a:rPr>
-              <a:t>In 2023, the buffer was high — around 18 to 22 percent — and the event produced a CAR of minus 18 percentage points. That is a swing of 27 percentage points driven entirely by the buffer condition. The Welch t-statistic comparing the two groups is 15.22 with a p-value below 0.001, meaning this difference is not remotely explained by chance. </a:t>
-            </a:r>
-            <a:endParaRPr lang="en-US" dirty="0"/>
-          </a:p>
-          <a:p>
-            <a:endParaRPr lang="en-US" dirty="0"/>
-          </a:p>
-          <a:p>
-            <a:r>
-              <a:rPr dirty="0">
-                <a:sym typeface="+mn-ea"/>
-              </a:rPr>
-              <a:t>This is the core empirical finding of our paper: the liquid cash buffer is what determines whether a stablecoin issuer amplifies or absorbs a shock to the Treasury market. And next week, the placebo test will confirm that these large CARs only appear on real crisis days — not on ordinary days with the same buffer conditions.</a:t>
-            </a:r>
-            <a:endParaRPr dirty="0"/>
-          </a:p>
-          <a:p>
-            <a:endParaRPr dirty="0"/>
+              <a:t>The net effect of Force A — no selling — plus Force B — active buying — is a CAR of minus 18 percentage points. The graph is negative, not flat, because the crisis still moved Treasury markets, just in the opposite direction from 2022. And the 27 percentage point swing between regimes, with a Welch t of 15.22, is the core empirical finding of our paper.</a:t>
+            </a:r>
           </a:p>
         </p:txBody>
       </p:sp>
@@ -2014,24 +788,7 @@
           <a:lstStyle/>
           <a:p>
             <a:r>
-              <a:rPr dirty="0"/>
-              <a:t>On the right is what we are planning for next week. We are running a placebo test — </a:t>
-            </a:r>
-            <a:r>
-              <a:rPr b="1" dirty="0"/>
-              <a:t>we take three ordinary, uneventful days with the same buffer conditions as our real events, run the exact same methodology</a:t>
-            </a:r>
-            <a:r>
-              <a:rPr lang="en-US" b="1" dirty="0"/>
-              <a:t>.</a:t>
-            </a:r>
-            <a:r>
-              <a:rPr b="1" dirty="0"/>
-              <a:t>. </a:t>
-            </a:r>
-            <a:r>
-              <a:rPr dirty="0"/>
-              <a:t>Our preliminary result already shows the placebo CARs are less than one basis point, compared to nine to eighteen basis points in the actual events. That is a 22 times difference, which strongly supports that our results are real and not just noise.</a:t>
+              <a:t>So where does that leave us? Everything on the left is completed and presented today. For next week, we are running a placebo test to validate our event study results. The idea is simple: if our methodology is sound, then running the same event study on three ordinary, uneventful days with the same buffer conditions should produce CARs near zero. We picked June 15th 2021 and October 12th 2021 as low-buffer placebos — quiet periods before LUNA with no stablecoin stress. And July 15th 2025 as a high-buffer placebo — a stable period well after the SVB recovery. Our preliminary result already shows the placebo mean absolute CAR is just 0.55 percentage points, compared to 11.92 for the actual events. That is a 21.7 times difference. This directly answers the question of whether our large CARs could just be random market noise — they cannot. They only appear on real crisis days.</a:t>
             </a:r>
           </a:p>
         </p:txBody>
@@ -2101,12 +858,8 @@
           <a:lstStyle/>
           <a:p>
             <a:r>
-              <a:rPr lang="en-US" altLang="ko-KR" dirty="0"/>
-              <a:t>Thank you for listening. To summarize in two sentences: stablecoin issuers have become structurally important buyers of U.S. Treasury bills, which deepens America's safe-asset privilege in normal times. But when their liquid cash buffers fall below roughly 13 percent of supply, a run forces them to liquidate T-bills — turning a privilege amplifier into a systemic disruptor. We are happy to take any questions.</a:t>
-            </a:r>
-          </a:p>
-          <a:p>
-            <a:endParaRPr dirty="0"/>
+              <a:t>Thank you for your time. To summarize in two sentences: stablecoin issuers have become structurally important buyers of U.S. Treasury bills, which deepens America's safe-asset privilege in normal times. But when their liquid cash buffers fall below roughly 13 percent of supply, a run forces them to liquidate T-bills — turning a privilege amplifier into a systemic disruptor. We are happy to take any questions.</a:t>
+            </a:r>
           </a:p>
         </p:txBody>
       </p:sp>
@@ -10155,7 +8908,7 @@
         </p:nvSpPr>
         <p:spPr>
           <a:xfrm>
-            <a:off x="0" y="267335"/>
+            <a:off x="0" y="320040"/>
             <a:ext cx="12188952" cy="6858000"/>
           </a:xfrm>
           <a:prstGeom prst="rect">
@@ -10380,7 +9133,7 @@
                 </a:solidFill>
                 <a:latin typeface="Calibri"/>
               </a:rPr>
-              <a:t>Buffer Condition: HIGH   |   L ≈ 18–22% cash   |   CAR = −18.01 pp***   |   t-stat &gt; 30</a:t>
+              <a:t>Buffer Condition: HIGH   |   $3.3B (8% of reserves) frozen at SVB   |   CAR = −18.01 pp***   |   t-stat &gt; 30</a:t>
             </a:r>
           </a:p>
         </p:txBody>
@@ -10596,7 +9349,7 @@
         <p:spPr>
           <a:xfrm>
             <a:off x="4168140" y="3188335"/>
-            <a:ext cx="7673975" cy="713105"/>
+            <a:ext cx="7673975" cy="485775"/>
           </a:xfrm>
           <a:prstGeom prst="rect">
             <a:avLst/>
@@ -10639,27 +9392,7 @@
                 <a:latin typeface="Calibri"/>
                 <a:sym typeface="+mn-ea"/>
               </a:rPr>
-              <a:t>Circle used its large cash buffer to meet redemptions</a:t>
-            </a:r>
-            <a:r>
-              <a:rPr lang="en-US" sz="1000">
-                <a:solidFill>
-                  <a:srgbClr val="1A1A2E"/>
-                </a:solidFill>
-                <a:latin typeface="Calibri"/>
-                <a:sym typeface="+mn-ea"/>
-              </a:rPr>
-              <a:t>. </a:t>
-            </a:r>
-            <a:r>
-              <a:rPr sz="1000">
-                <a:solidFill>
-                  <a:srgbClr val="1A1A2E"/>
-                </a:solidFill>
-                <a:latin typeface="Calibri"/>
-                <a:sym typeface="+mn-ea"/>
-              </a:rPr>
-              <a:t>Did NOT need to sell T-bills</a:t>
+              <a:t>U.S. regulators guaranteed ALL SVB deposits within 72 hours of collapse.</a:t>
             </a:r>
             <a:endParaRPr sz="1000" b="0" i="0">
               <a:solidFill>
@@ -10682,27 +9415,7 @@
                 <a:latin typeface="Calibri"/>
                 <a:sym typeface="+mn-ea"/>
               </a:rPr>
-              <a:t>No forced selling pressure from the issuer side</a:t>
-            </a:r>
-            <a:r>
-              <a:rPr lang="en-US" sz="1000">
-                <a:solidFill>
-                  <a:srgbClr val="1A1A2E"/>
-                </a:solidFill>
-                <a:latin typeface="Calibri"/>
-                <a:sym typeface="+mn-ea"/>
-              </a:rPr>
-              <a:t>. </a:t>
-            </a:r>
-            <a:r>
-              <a:rPr sz="1000" b="1">
-                <a:solidFill>
-                  <a:srgbClr val="1A7A4A"/>
-                </a:solidFill>
-                <a:latin typeface="Calibri"/>
-                <a:sym typeface="+mn-ea"/>
-              </a:rPr>
-              <a:t>→ This is what a flat CAR would look like IF nothing else happened</a:t>
+              <a:t>Circle did NOT need to sell T-bills — government backstop resolved the crisis before forced liquidation.</a:t>
             </a:r>
           </a:p>
         </p:txBody>
@@ -10755,7 +9468,7 @@
                 <a:latin typeface="Calibri"/>
                 <a:sym typeface="+mn-ea"/>
               </a:rPr>
-              <a:t>Force A: Circle's behavior (HIGH BUFFER)</a:t>
+              <a:t>Force A: Government backstop (SVB deposit guarantee)</a:t>
             </a:r>
             <a:endParaRPr sz="1000"/>
           </a:p>
@@ -10769,8 +9482,8 @@
         </p:nvSpPr>
         <p:spPr>
           <a:xfrm>
-            <a:off x="4168140" y="4268470"/>
-            <a:ext cx="7673975" cy="789305"/>
+            <a:off x="4153535" y="4055428"/>
+            <a:ext cx="7673975" cy="521335"/>
           </a:xfrm>
           <a:prstGeom prst="rect">
             <a:avLst/>
@@ -10806,7 +9519,7 @@
               </a:spcBef>
             </a:pPr>
             <a:r>
-              <a:rPr sz="1000">
+              <a:rPr sz="1000" dirty="0">
                 <a:solidFill>
                   <a:srgbClr val="1A1A2E"/>
                 </a:solidFill>
@@ -10816,7 +9529,7 @@
               <a:t>SVB's failure caused widespread panic — investors fled to safety</a:t>
             </a:r>
             <a:r>
-              <a:rPr lang="en-US" sz="1000">
+              <a:rPr lang="en-US" sz="1000" dirty="0">
                 <a:solidFill>
                   <a:srgbClr val="1A1A2E"/>
                 </a:solidFill>
@@ -10826,7 +9539,7 @@
               <a:t>. </a:t>
             </a:r>
             <a:r>
-              <a:rPr sz="1000">
+              <a:rPr sz="1000" dirty="0">
                 <a:solidFill>
                   <a:srgbClr val="1A1A2E"/>
                 </a:solidFill>
@@ -10835,7 +9548,7 @@
               </a:rPr>
               <a:t>Massive buying of U.S. T-bills (the safest short-term asset)</a:t>
             </a:r>
-            <a:endParaRPr sz="1000" b="0" i="0">
+            <a:endParaRPr sz="1000" b="0" i="0" dirty="0">
               <a:solidFill>
                 <a:srgbClr val="1A1A2E"/>
               </a:solidFill>
@@ -10849,7 +9562,7 @@
               </a:spcBef>
             </a:pPr>
             <a:r>
-              <a:rPr sz="1000">
+              <a:rPr sz="1000" dirty="0">
                 <a:solidFill>
                   <a:srgbClr val="1A1A2E"/>
                 </a:solidFill>
@@ -10859,7 +9572,7 @@
               <a:t>This BUYING pushed T-bill yields DOWN relative to OIS</a:t>
             </a:r>
             <a:r>
-              <a:rPr lang="en-US" sz="1000">
+              <a:rPr lang="en-US" sz="1000" dirty="0">
                 <a:solidFill>
                   <a:srgbClr val="1A1A2E"/>
                 </a:solidFill>
@@ -10869,7 +9582,7 @@
               <a:t>. </a:t>
             </a:r>
             <a:r>
-              <a:rPr sz="1000" b="1">
+              <a:rPr sz="1000" b="1" dirty="0">
                 <a:solidFill>
                   <a:srgbClr val="C0392B"/>
                 </a:solidFill>
@@ -10878,7 +9591,7 @@
               </a:rPr>
               <a:t>→ Spread compressed far BELOW what the normal model predicted</a:t>
             </a:r>
-            <a:endParaRPr sz="1000"/>
+            <a:endParaRPr sz="1000" dirty="0"/>
           </a:p>
         </p:txBody>
       </p:sp>
@@ -10890,7 +9603,7 @@
         </p:nvSpPr>
         <p:spPr>
           <a:xfrm>
-            <a:off x="4168140" y="3958590"/>
+            <a:off x="4153535" y="3745548"/>
             <a:ext cx="7673975" cy="292100"/>
           </a:xfrm>
           <a:prstGeom prst="rect">
@@ -10944,7 +9657,7 @@
         </p:nvSpPr>
         <p:spPr>
           <a:xfrm>
-            <a:off x="4168775" y="5166360"/>
+            <a:off x="4145914" y="4644708"/>
             <a:ext cx="7718425" cy="640080"/>
           </a:xfrm>
           <a:prstGeom prst="rect">
@@ -11042,15 +9755,15 @@
         </p:nvPicPr>
         <p:blipFill>
           <a:blip r:embed="rId3"/>
-          <a:srcRect l="65879"/>
+          <a:srcRect l="65880" t="8036" r="816"/>
           <a:stretch>
             <a:fillRect/>
           </a:stretch>
         </p:blipFill>
         <p:spPr>
           <a:xfrm>
-            <a:off x="320040" y="2990215"/>
-            <a:ext cx="3399790" cy="2645410"/>
+            <a:off x="681050" y="2943860"/>
+            <a:ext cx="3318381" cy="2432812"/>
           </a:xfrm>
           <a:prstGeom prst="rect">
             <a:avLst/>
@@ -11065,15 +9778,15 @@
         </p:nvSpPr>
         <p:spPr>
           <a:xfrm>
-            <a:off x="-10160" y="5915025"/>
-            <a:ext cx="12198985" cy="1113155"/>
+            <a:off x="-10160" y="5448110"/>
+            <a:ext cx="12198985" cy="1580071"/>
           </a:xfrm>
           <a:prstGeom prst="rect">
             <a:avLst/>
           </a:prstGeom>
           <a:solidFill>
-            <a:schemeClr val="bg2">
-              <a:lumMod val="50000"/>
+            <a:schemeClr val="accent6">
+              <a:lumMod val="75000"/>
             </a:schemeClr>
           </a:solidFill>
           <a:ln>
@@ -11106,57 +9819,88 @@
             <a:r>
               <a:rPr lang="en-US" b="1" dirty="0">
                 <a:solidFill>
-                  <a:schemeClr val="tx1"/>
+                  <a:schemeClr val="bg1"/>
                 </a:solidFill>
                 <a:latin typeface="Calibri"/>
                 <a:sym typeface="+mn-ea"/>
               </a:rPr>
-              <a:t>T</a:t>
-            </a:r>
-            <a:r>
-              <a:rPr b="1" dirty="0">
-                <a:solidFill>
-                  <a:schemeClr val="tx1"/>
+              <a:t>The 27 pp Swing — What Does It Mean?</a:t>
+            </a:r>
+            <a:br>
+              <a:rPr lang="en-US" b="1" dirty="0">
+                <a:solidFill>
+                  <a:schemeClr val="bg1"/>
                 </a:solidFill>
                 <a:latin typeface="Calibri"/>
                 <a:sym typeface="+mn-ea"/>
               </a:rPr>
-              <a:t>he 27 pp swing</a:t>
+            </a:br>
+            <a:r>
+              <a:rPr lang="en-US" dirty="0">
+                <a:solidFill>
+                  <a:schemeClr val="bg1"/>
+                </a:solidFill>
+                <a:latin typeface="Calibri"/>
+                <a:sym typeface="+mn-ea"/>
+              </a:rPr>
+              <a:t>2022  Low buffer (LUNA + USDT avg)  →  CAR = +8.9 pp   →  Forced T-bill selling pushed the spread UP</a:t>
             </a:r>
             <a:br>
-              <a:rPr b="1" dirty="0">
-                <a:solidFill>
-                  <a:schemeClr val="tx1"/>
+              <a:rPr lang="en-US" b="1" dirty="0">
+                <a:solidFill>
+                  <a:schemeClr val="bg1"/>
                 </a:solidFill>
                 <a:latin typeface="Calibri"/>
                 <a:sym typeface="+mn-ea"/>
               </a:rPr>
             </a:br>
             <a:r>
-              <a:rPr lang="en-US" altLang="en-US" b="1" i="0" dirty="0">
-                <a:solidFill>
-                  <a:schemeClr val="tx1"/>
-                </a:solidFill>
-                <a:latin typeface="Calibri"/>
-              </a:rPr>
-              <a:t>2022- Low buffer (LUNA + USDT avg): +8.9 pp | 2023High buffer (SVB): −18.0 pp | Swing: 26.9 pp | </a:t>
+              <a:rPr lang="en-US" dirty="0">
+                <a:solidFill>
+                  <a:schemeClr val="bg1"/>
+                </a:solidFill>
+                <a:latin typeface="Calibri"/>
+                <a:sym typeface="+mn-ea"/>
+              </a:rPr>
+              <a:t>2023  High buffer (SVB)               →  CAR = −18.0 pp  →  No forced selling + flight-to-safety buying pushed the spread DOWN</a:t>
             </a:r>
             <a:br>
-              <a:rPr lang="en-US" altLang="en-US" b="1" i="0" dirty="0">
-                <a:solidFill>
-                  <a:schemeClr val="tx1"/>
-                </a:solidFill>
-                <a:latin typeface="Calibri"/>
+              <a:rPr lang="en-US" b="1" dirty="0">
+                <a:solidFill>
+                  <a:schemeClr val="bg1"/>
+                </a:solidFill>
+                <a:latin typeface="Calibri"/>
+                <a:sym typeface="+mn-ea"/>
               </a:rPr>
             </a:br>
             <a:r>
-              <a:rPr lang="en-US" altLang="en-US" b="1" i="0" dirty="0">
-                <a:solidFill>
-                  <a:schemeClr val="tx1"/>
-                </a:solidFill>
-                <a:latin typeface="Calibri"/>
-              </a:rPr>
-              <a:t>Welch t = 15.22*** | p &lt; 0.001</a:t>
+              <a:rPr lang="en-US" dirty="0">
+                <a:solidFill>
+                  <a:schemeClr val="bg1"/>
+                </a:solidFill>
+                <a:latin typeface="Calibri"/>
+                <a:sym typeface="+mn-ea"/>
+              </a:rPr>
+              <a:t>Swing: +8.9 − (−18.0) = 26.9 pp  →  The buffer regime alone flipped both the direction and size of the Treasury market impact</a:t>
+            </a:r>
+            <a:br>
+              <a:rPr lang="en-US" b="1" dirty="0">
+                <a:solidFill>
+                  <a:schemeClr val="bg1"/>
+                </a:solidFill>
+                <a:latin typeface="Calibri"/>
+                <a:sym typeface="+mn-ea"/>
+              </a:rPr>
+            </a:br>
+            <a:r>
+              <a:rPr lang="en-US" dirty="0">
+                <a:solidFill>
+                  <a:schemeClr val="bg1"/>
+                </a:solidFill>
+                <a:latin typeface="Calibri"/>
+                <a:sym typeface="+mn-ea"/>
+              </a:rPr>
+              <a:t>Welch t = 15.22***  |  p &lt; 0.001  →  The probability this difference is random is essentially zero</a:t>
             </a:r>
           </a:p>
         </p:txBody>

--- a/presentations/0526_Stablecoin_Exorbitant_Privilege.pptx
+++ b/presentations/0526_Stablecoin_Exorbitant_Privilege.pptx
@@ -298,7 +298,8 @@
           <a:lstStyle/>
           <a:p>
             <a:r>
-              <a:t>Good afternoon everyone. Our paper is called Stablecoins and the Exorbitant Privilege. The central argument is that large USD-pegged stablecoin issuers — mainly Tether and Circle — have become significant buyers of U.S. Treasury bills. In normal times, that deepens demand for safe assets and amplifies America's borrowing advantage. But when a run hits and their cash reserves are too thin, they are forced to liquidate T-bills, which rapidly reverses that benefit. Today we want to address some methodological questions from last session and walk clearly through our three stress events.</a:t>
+              <a:rPr dirty="0"/>
+              <a:t>Good afternoon everyone. Today we want to address some methodological questions from last session and walk clearly through our three stress events.</a:t>
             </a:r>
           </a:p>
         </p:txBody>
@@ -368,7 +369,18 @@
           <a:lstStyle/>
           <a:p>
             <a:r>
-              <a:t>Let me quickly orient everyone. On the left is everything we have completed. We extended Maggiori's 2017 model to incorporate stablecoin supply, treasury exposure, and the liquid buffer. Our main regression finds that a one standard deviation increase in stablecoin supply compresses the OIS-Treasury spread by roughly 6 basis points — that is the privilege amplification result. We also estimated a safety threshold using Hansen's 2000 threshold regression: issuers need to hold at least 13 percent of supply in liquid cash to stay outside the fragility zone. And we ran a buffer-conditioned event study across three stress episodes, which produced a 27 percentage point swing between the low and high buffer regimes. This deck specifically addresses the clarification questions from last time — why we use the OIS spread, what the buffer condition actually means, and how to read the CAR graphs. Baptiste will walk us through this slide, then hand over to Sara.</a:t>
+              <a:rPr dirty="0"/>
+              <a:t>Let me quickly orient everyone. On the left is everything we have completed. We extended Maggiori's 2017 model to incorporate stablecoin supply, treasury exposure, and the liquid buffer. Our main regression finds that a one standard deviation increase in stablecoin supply compresses the OIS-Treasury spread by roughly 6 basis points — that is the privilege amplification result. We also estimated a safety threshold using Hansen's 2000 threshold regression: issuers need to hold at least 13 percent of supply in liquid cash to stay outside the fragility zone. </a:t>
+            </a:r>
+            <a:endParaRPr lang="en-US" dirty="0"/>
+          </a:p>
+          <a:p>
+            <a:endParaRPr lang="en-US" dirty="0"/>
+          </a:p>
+          <a:p>
+            <a:r>
+              <a:rPr dirty="0"/>
+              <a:t>And we ran a buffer-conditioned event study across three stress episodes, which produced a 27 percentage point swing between the low and high buffer regimes. This deck specifically addresses the clarification questions from last time — why we use the OIS spread, what the buffer condition actually means, and how to read the CAR graphs. </a:t>
             </a:r>
           </a:p>
         </p:txBody>
@@ -438,7 +450,32 @@
           <a:lstStyle/>
           <a:p>
             <a:r>
-              <a:t>A question came up about why we use the OIS-Treasury spread instead of just Treasury yields. Here is the intuition. A raw T-bill yield moves for two completely different reasons at the same time — the Fed raising or cutting rates, and investors specifically wanting to hold safe Treasuries. We only care about the second one. The OIS rate tracks market expectations of the Fed Funds path — it is pure monetary policy. So when we subtract it from the T-bill yield, we cancel out the monetary policy component and are left with just the premium investors pay to hold Treasuries specifically. That premium is exactly what stablecoin issuers affect when they buy T-bills. This approach is well established in the literature. Krishnamurthy and Vissing-Jorgensen in 2012 use this same spread to measure safe-asset demand. Nagel in 2016 calls it the convenience yield of near-money assets. Greenwood, Hanson and Stein in 2015 show it captures demand that is insensitive to monetary policy. The practical point is this: if we had used raw yields, a Fed rate cut and a Tether buying surge would look identical in our data. The spread cleanly separates them.</a:t>
+              <a:rPr dirty="0"/>
+              <a:t>A question came up about why we use the OIS-Treasury spread instead of just Treasury yields. Here is the intuition. A raw T-bill yield moves for two completely different reasons at the same time — the Fed raising or cutting rates, and investors specifically wanting to hold safe Treasuries. We only care about the second one. The OIS rate tracks market expectations of the Fed Funds path — it is pure monetary policy. So when we subtract it from the T-bill yield, we cancel out the monetary policy component and are left with just the premium investors pay to hold Treasuries specifically. That premium is exactly what stablecoin issuers affect when they buy T-bills. </a:t>
+            </a:r>
+            <a:endParaRPr lang="en-US" dirty="0"/>
+          </a:p>
+          <a:p>
+            <a:endParaRPr lang="en-US" dirty="0"/>
+          </a:p>
+          <a:p>
+            <a:r>
+              <a:rPr dirty="0"/>
+              <a:t>This approach is well established in the literature. Krishnamurthy and Vissing-Jorgensen in 2012 use this same spread to measure safe-asset demand. </a:t>
+            </a:r>
+            <a:endParaRPr lang="en-US" dirty="0"/>
+          </a:p>
+          <a:p>
+            <a:r>
+              <a:rPr dirty="0"/>
+              <a:t>Nagel in 2016 calls it the convenience yield of near-money assets. Greenwood, Hanson and Stein in 2015 show it captures demand that is insensitive to monetary policy. </a:t>
+            </a:r>
+            <a:endParaRPr lang="en-US" dirty="0"/>
+          </a:p>
+          <a:p>
+            <a:r>
+              <a:rPr dirty="0"/>
+              <a:t>The practical point is this: if we had used raw yields, a Fed rate cut and a Tether buying surge would look identical in our data. The spread cleanly separates them.</a:t>
             </a:r>
           </a:p>
         </p:txBody>
@@ -508,7 +545,41 @@
           <a:lstStyle/>
           <a:p>
             <a:r>
-              <a:t>Now let me explain precisely what the buffer condition is, because it is the central variable in our paper. L is the liquid buffer — the share of an issuer's reserves held in cash or cash equivalents, divided by total stablecoin supply. Our Hansen threshold regression estimates a critical cutoff at 13 percent. Here is why it matters. When investors redeem stablecoins for dollars, the issuer has to pay them back. If they hold enough cash — above 13 percent — they pay from cash and T-bill holdings are untouched. The Treasury market feels nothing. But if the cash buffer is below 13 percent, the issuer cannot cover redemptions from cash alone. They have to sell Treasury bills quickly to raise the dollars. That sudden selling pushes T-bill yields up relative to OIS — the spread spikes. In May 2022, Tether had only around 5 to 8 percent in liquid cash — below the threshold. That is why both the LUNA contagion and the direct Tether depeg produced large positive CARs. The buffer condition is what separates an issuer that stabilises Treasury markets from one that disrupts them.</a:t>
+              <a:rPr dirty="0"/>
+              <a:t>Now let me explain precisely what the buffer condition is, because it is the central variable in our paper. </a:t>
+            </a:r>
+            <a:endParaRPr lang="en-US" dirty="0"/>
+          </a:p>
+          <a:p>
+            <a:r>
+              <a:rPr dirty="0"/>
+              <a:t>L is the liquid buffer — the share of an issuer's reserves held in cash or cash equivalents, divided by total stablecoin supply. Our Hansen threshold regression estimates a critical cutoff at 13 percent. Here is why it matters. When investors redeem stablecoins for dollars, the issuer has to pay them back. If they hold enough cash — above 13 percent — they pay from cash and T-bill holdings are untouched. The Treasury market feels nothing. But if the cash buffer is below 13 percent, the issuer cannot cover redemptions from cash alone. They have to sell Treasury bills quickly to raise the dollars. That sudden selling pushes T-bill yields up relative to OIS — the spread spikes. </a:t>
+            </a:r>
+            <a:endParaRPr lang="en-US" dirty="0"/>
+          </a:p>
+          <a:p>
+            <a:endParaRPr lang="en-US" dirty="0"/>
+          </a:p>
+          <a:p>
+            <a:r>
+              <a:rPr dirty="0"/>
+              <a:t>In May 2022, Tether had only around 5 to 8 percent in liquid cash — below the threshold. That is why both the LUNA contagion and the direct Tether </a:t>
+            </a:r>
+            <a:r>
+              <a:rPr dirty="0" err="1"/>
+              <a:t>depeg</a:t>
+            </a:r>
+            <a:r>
+              <a:rPr dirty="0"/>
+              <a:t> produced large positive CARs. The buffer condition is what separates an issuer that </a:t>
+            </a:r>
+            <a:r>
+              <a:rPr dirty="0" err="1"/>
+              <a:t>stabilises</a:t>
+            </a:r>
+            <a:r>
+              <a:rPr dirty="0"/>
+              <a:t> Treasury markets from one that disrupts them.</a:t>
             </a:r>
           </a:p>
         </p:txBody>
@@ -578,7 +649,26 @@
           <a:lstStyle/>
           <a:p>
             <a:r>
-              <a:t>CAR stands for Cumulative Abnormal Return — but in our context it measures the cumulative abnormal spread, not a stock return. Let me explain what the y-axis actually means. Before each crisis, we estimate how the OIS-Treasury spread normally behaves using data from around six months prior. We build a model that says: given today's VIX level and global equity returns, what would we expect the spread to be? The abnormal spread on any given day is the actual spread minus that prediction. CAR is the running total of those daily abnormal spreads from five days before the event onward. A positive CAR means the spread has been persistently higher than expected — T-bill selling pressure. A negative CAR means it has been persistently lower than expected — flight-to-safety buying. A flat line at zero would mean the event had no effect on Treasury markets at all. Now, the second event shown here is the USDT partial depeg on May 12th, 2022 — three days after the LUNA collapse. This was a direct bank-run on Tether itself. USDT briefly fell to 95 cents. Unlike UST, which was algorithmic with no real reserves, Tether holds actual assets. The problem was that Tether's cash was only 5 to 8 percent of its reserves — the rest was T-bills. When over 7 billion dollars of USDT was redeemed in a single day, Tether had to sell T-bills to pay out, and the spread spiked. The CAR came in at plus 8.85 percentage points — essentially identical to the LUNA event. Same buffer, same constraint, same outcome — regardless of what triggered the run.</a:t>
+              <a:rPr dirty="0"/>
+              <a:t>CAR stands for Cumulative Abnormal Return — but in our context it measures the cumulative abnormal spread, not a stock return. Let me explain what the y-axis actually means. Before each crisis, we estimate how the OIS-Treasury spread normally behaves using data from around six months prior. We build a model that says: given today's VIX level and global equity returns, what would we expect the spread to be? The abnormal spread on any given day is the actual spread minus that prediction. CAR is the running total of those daily abnormal spreads from five days before the event onward. A positive CAR means the spread has been persistently higher than expected — T-bill selling pressure. A negative CAR means it has been persistently lower than expected — flight-to-safety buying. A flat line at zero would mean the event had no effect on Treasury markets at all. Now, the second event shown here is the USDT partial </a:t>
+            </a:r>
+            <a:r>
+              <a:rPr dirty="0" err="1"/>
+              <a:t>depeg</a:t>
+            </a:r>
+            <a:r>
+              <a:rPr dirty="0"/>
+              <a:t> on May 12th, 2022 — three days after the LUNA collapse. </a:t>
+            </a:r>
+            <a:endParaRPr lang="en-US" dirty="0"/>
+          </a:p>
+          <a:p>
+            <a:endParaRPr lang="en-US" dirty="0"/>
+          </a:p>
+          <a:p>
+            <a:r>
+              <a:rPr dirty="0"/>
+              <a:t>This was a direct bank-run on Tether itself. USDT briefly fell to 95 cents. Unlike UST, which was algorithmic with no real reserves, Tether holds actual assets. The problem was that Tether's cash was only 5 to 8 percent of its reserves — the rest was T-bills. When over 7 billion dollars of USDT was redeemed in a single day, Tether had to sell T-bills to pay out, and the spread spiked. The CAR came in at plus 8.85 percentage points — essentially identical to the LUNA event. Same buffer, same constraint, same outcome — regardless of what triggered the run.</a:t>
             </a:r>
           </a:p>
         </p:txBody>
@@ -649,7 +739,23 @@
           <a:p>
             <a:r>
               <a:rPr dirty="0"/>
-              <a:t>Our third event is the SVB failure in March 2023, and the graph needs careful explanation because the CAR goes deeply negative instead of spiking upward like 2022. SVB collapsed on March 10th — the second largest U.S. bank failure in history. Circle disclosed that 3.3 billion dollars of USDC reserves were held at SVB and temporarily inaccessible. USDC </a:t>
+              <a:t>Our third event is the SVB failure in March 2023, and t</a:t>
+            </a:r>
+            <a:r>
+              <a:rPr lang="en-US" dirty="0"/>
+              <a:t>he </a:t>
+            </a:r>
+            <a:r>
+              <a:rPr dirty="0"/>
+              <a:t>CAR goes deeply negative instead of spiking upward like 2022.</a:t>
+            </a:r>
+            <a:r>
+              <a:rPr lang="en-US" dirty="0"/>
+              <a:t> This looks very counterintuitive compared to our previous events.</a:t>
+            </a:r>
+            <a:r>
+              <a:rPr dirty="0"/>
+              <a:t> SVB collapsed on March 10th — the second largest U.S. bank failure in history. Circle disclosed that 3.3 billion dollars of USDC reserves were held at SVB and temporarily inaccessible. USDC </a:t>
             </a:r>
             <a:r>
               <a:rPr dirty="0" err="1"/>
@@ -675,7 +781,7 @@
           <a:p>
             <a:r>
               <a:rPr dirty="0"/>
-              <a:t>So why does the CAR go to minus 18 instead of spiking? Two forces explain it, and both are on this slide. </a:t>
+              <a:t>So why does the CAR go to minus 18 instead of spiking? Two forces explain it. </a:t>
             </a:r>
             <a:endParaRPr lang="en-US" dirty="0"/>
           </a:p>
@@ -686,7 +792,15 @@
             </a:r>
             <a:r>
               <a:rPr dirty="0"/>
-              <a:t>U.S. regulators guaranteed all SVB deposits within 72 hours of the collapse. Because of that guarantee, Circle never needed to sell a single Treasury bill to cover the 3.3 billion that was temporarily frozen. The crisis was resolved before any forced liquidation became necessary. So unlike 2022, there </a:t>
+              <a:t>U.S. regulators guaranteed all SVB deposits within </a:t>
+            </a:r>
+            <a:r>
+              <a:rPr b="1" dirty="0"/>
+              <a:t>72 hours of the collapse</a:t>
+            </a:r>
+            <a:r>
+              <a:rPr dirty="0"/>
+              <a:t>. Because of that guarantee, Circle never needed to sell a single Treasury bill to cover the 3.3 billion that was temporarily frozen. The crisis was resolved before any forced liquidation became necessary. So unlike 2022, there </a:t>
             </a:r>
             <a:r>
               <a:rPr b="1" dirty="0"/>
@@ -718,8 +832,7392 @@
           <a:p>
             <a:r>
               <a:rPr dirty="0"/>
-              <a:t>The net effect of Force A — no selling — plus Force B — active buying — is a CAR of minus 18 percentage points. The graph is negative, not flat, because the crisis still moved Treasury markets, just in the opposite direction from 2022. And the 27 percentage point swing between regimes, with a Welch t of 15.22, is the core empirical finding of our paper.</a:t>
-            </a:r>
+              <a:t>The net effect of Force A — no selling — plus Force B — active buying — is a CAR of minus 18 percentage points. The graph is negative, not flat, because the crisis still moved Treasury markets, just in the opposite direction from 2022. </a:t>
+            </a:r>
+            <a:endParaRPr lang="en-US" dirty="0"/>
+          </a:p>
+          <a:p>
+            <a:endParaRPr lang="en-US" dirty="0"/>
+          </a:p>
+          <a:p>
+            <a:r>
+              <a:rPr lang="ko-KR" altLang="ko-KR" sz="1200" b="0" i="1" kern="1200" dirty="0">
+                <a:solidFill>
+                  <a:schemeClr val="tx1"/>
+                </a:solidFill>
+                <a:effectLst/>
+                <a:latin typeface="+mn-lt"/>
+                <a:ea typeface="+mn-ea"/>
+                <a:cs typeface="+mn-cs"/>
+              </a:rPr>
+              <a:t>"The </a:t>
+            </a:r>
+            <a:r>
+              <a:rPr lang="ko-KR" altLang="ko-KR" sz="1200" b="0" i="1" kern="1200" dirty="0" err="1">
+                <a:solidFill>
+                  <a:schemeClr val="tx1"/>
+                </a:solidFill>
+                <a:effectLst/>
+                <a:latin typeface="+mn-lt"/>
+                <a:ea typeface="+mn-ea"/>
+                <a:cs typeface="+mn-cs"/>
+              </a:rPr>
+              <a:t>cumulative</a:t>
+            </a:r>
+            <a:r>
+              <a:rPr lang="ko-KR" altLang="ko-KR" sz="1200" b="0" i="1" kern="1200" dirty="0">
+                <a:solidFill>
+                  <a:schemeClr val="tx1"/>
+                </a:solidFill>
+                <a:effectLst/>
+                <a:latin typeface="+mn-lt"/>
+                <a:ea typeface="+mn-ea"/>
+                <a:cs typeface="+mn-cs"/>
+              </a:rPr>
+              <a:t> </a:t>
+            </a:r>
+            <a:r>
+              <a:rPr lang="ko-KR" altLang="ko-KR" sz="1200" b="0" i="1" kern="1200" dirty="0" err="1">
+                <a:solidFill>
+                  <a:schemeClr val="tx1"/>
+                </a:solidFill>
+                <a:effectLst/>
+                <a:latin typeface="+mn-lt"/>
+                <a:ea typeface="+mn-ea"/>
+                <a:cs typeface="+mn-cs"/>
+              </a:rPr>
+              <a:t>abnormal</a:t>
+            </a:r>
+            <a:r>
+              <a:rPr lang="ko-KR" altLang="ko-KR" sz="1200" b="0" i="1" kern="1200" dirty="0">
+                <a:solidFill>
+                  <a:schemeClr val="tx1"/>
+                </a:solidFill>
+                <a:effectLst/>
+                <a:latin typeface="+mn-lt"/>
+                <a:ea typeface="+mn-ea"/>
+                <a:cs typeface="+mn-cs"/>
+              </a:rPr>
+              <a:t> </a:t>
+            </a:r>
+            <a:r>
+              <a:rPr lang="ko-KR" altLang="ko-KR" sz="1200" b="0" i="1" kern="1200" dirty="0" err="1">
+                <a:solidFill>
+                  <a:schemeClr val="tx1"/>
+                </a:solidFill>
+                <a:effectLst/>
+                <a:latin typeface="+mn-lt"/>
+                <a:ea typeface="+mn-ea"/>
+                <a:cs typeface="+mn-cs"/>
+              </a:rPr>
+              <a:t>spread</a:t>
+            </a:r>
+            <a:r>
+              <a:rPr lang="ko-KR" altLang="ko-KR" sz="1200" b="0" i="1" kern="1200" dirty="0">
+                <a:solidFill>
+                  <a:schemeClr val="tx1"/>
+                </a:solidFill>
+                <a:effectLst/>
+                <a:latin typeface="+mn-lt"/>
+                <a:ea typeface="+mn-ea"/>
+                <a:cs typeface="+mn-cs"/>
+              </a:rPr>
+              <a:t> </a:t>
+            </a:r>
+            <a:r>
+              <a:rPr lang="ko-KR" altLang="ko-KR" sz="1200" b="0" i="1" kern="1200" dirty="0" err="1">
+                <a:solidFill>
+                  <a:schemeClr val="tx1"/>
+                </a:solidFill>
+                <a:effectLst/>
+                <a:latin typeface="+mn-lt"/>
+                <a:ea typeface="+mn-ea"/>
+                <a:cs typeface="+mn-cs"/>
+              </a:rPr>
+              <a:t>was</a:t>
+            </a:r>
+            <a:r>
+              <a:rPr lang="ko-KR" altLang="ko-KR" sz="1200" b="0" i="1" kern="1200" dirty="0">
+                <a:solidFill>
+                  <a:schemeClr val="tx1"/>
+                </a:solidFill>
+                <a:effectLst/>
+                <a:latin typeface="+mn-lt"/>
+                <a:ea typeface="+mn-ea"/>
+                <a:cs typeface="+mn-cs"/>
+              </a:rPr>
+              <a:t> 8.9 </a:t>
+            </a:r>
+            <a:r>
+              <a:rPr lang="ko-KR" altLang="ko-KR" sz="1200" b="0" i="1" kern="1200" dirty="0" err="1">
+                <a:solidFill>
+                  <a:schemeClr val="tx1"/>
+                </a:solidFill>
+                <a:effectLst/>
+                <a:latin typeface="+mn-lt"/>
+                <a:ea typeface="+mn-ea"/>
+                <a:cs typeface="+mn-cs"/>
+              </a:rPr>
+              <a:t>percentage</a:t>
+            </a:r>
+            <a:r>
+              <a:rPr lang="ko-KR" altLang="ko-KR" sz="1200" b="0" i="1" kern="1200" dirty="0">
+                <a:solidFill>
+                  <a:schemeClr val="tx1"/>
+                </a:solidFill>
+                <a:effectLst/>
+                <a:latin typeface="+mn-lt"/>
+                <a:ea typeface="+mn-ea"/>
+                <a:cs typeface="+mn-cs"/>
+              </a:rPr>
+              <a:t> </a:t>
+            </a:r>
+            <a:r>
+              <a:rPr lang="ko-KR" altLang="ko-KR" sz="1200" b="0" i="1" kern="1200" dirty="0" err="1">
+                <a:solidFill>
+                  <a:schemeClr val="tx1"/>
+                </a:solidFill>
+                <a:effectLst/>
+                <a:latin typeface="+mn-lt"/>
+                <a:ea typeface="+mn-ea"/>
+                <a:cs typeface="+mn-cs"/>
+              </a:rPr>
+              <a:t>points</a:t>
+            </a:r>
+            <a:r>
+              <a:rPr lang="ko-KR" altLang="ko-KR" sz="1200" b="0" i="1" kern="1200" dirty="0">
+                <a:solidFill>
+                  <a:schemeClr val="tx1"/>
+                </a:solidFill>
+                <a:effectLst/>
+                <a:latin typeface="+mn-lt"/>
+                <a:ea typeface="+mn-ea"/>
+                <a:cs typeface="+mn-cs"/>
+              </a:rPr>
+              <a:t> </a:t>
+            </a:r>
+            <a:r>
+              <a:rPr lang="ko-KR" altLang="ko-KR" sz="1200" b="0" i="1" kern="1200" dirty="0" err="1">
+                <a:solidFill>
+                  <a:schemeClr val="tx1"/>
+                </a:solidFill>
+                <a:effectLst/>
+                <a:latin typeface="+mn-lt"/>
+                <a:ea typeface="+mn-ea"/>
+                <a:cs typeface="+mn-cs"/>
+              </a:rPr>
+              <a:t>above</a:t>
+            </a:r>
+            <a:r>
+              <a:rPr lang="ko-KR" altLang="ko-KR" sz="1200" b="0" i="1" kern="1200" dirty="0">
+                <a:solidFill>
+                  <a:schemeClr val="tx1"/>
+                </a:solidFill>
+                <a:effectLst/>
+                <a:latin typeface="+mn-lt"/>
+                <a:ea typeface="+mn-ea"/>
+                <a:cs typeface="+mn-cs"/>
+              </a:rPr>
+              <a:t> </a:t>
+            </a:r>
+            <a:r>
+              <a:rPr lang="ko-KR" altLang="ko-KR" sz="1200" b="0" i="1" kern="1200" dirty="0" err="1">
+                <a:solidFill>
+                  <a:schemeClr val="tx1"/>
+                </a:solidFill>
+                <a:effectLst/>
+                <a:latin typeface="+mn-lt"/>
+                <a:ea typeface="+mn-ea"/>
+                <a:cs typeface="+mn-cs"/>
+              </a:rPr>
+              <a:t>normal</a:t>
+            </a:r>
+            <a:r>
+              <a:rPr lang="ko-KR" altLang="ko-KR" sz="1200" b="0" i="1" kern="1200" dirty="0">
+                <a:solidFill>
+                  <a:schemeClr val="tx1"/>
+                </a:solidFill>
+                <a:effectLst/>
+                <a:latin typeface="+mn-lt"/>
+                <a:ea typeface="+mn-ea"/>
+                <a:cs typeface="+mn-cs"/>
+              </a:rPr>
+              <a:t> </a:t>
+            </a:r>
+            <a:r>
+              <a:rPr lang="ko-KR" altLang="ko-KR" sz="1200" b="0" i="1" kern="1200" dirty="0" err="1">
+                <a:solidFill>
+                  <a:schemeClr val="tx1"/>
+                </a:solidFill>
+                <a:effectLst/>
+                <a:latin typeface="+mn-lt"/>
+                <a:ea typeface="+mn-ea"/>
+                <a:cs typeface="+mn-cs"/>
+              </a:rPr>
+              <a:t>in</a:t>
+            </a:r>
+            <a:r>
+              <a:rPr lang="ko-KR" altLang="ko-KR" sz="1200" b="0" i="1" kern="1200" dirty="0">
+                <a:solidFill>
+                  <a:schemeClr val="tx1"/>
+                </a:solidFill>
+                <a:effectLst/>
+                <a:latin typeface="+mn-lt"/>
+                <a:ea typeface="+mn-ea"/>
+                <a:cs typeface="+mn-cs"/>
+              </a:rPr>
+              <a:t> </a:t>
+            </a:r>
+            <a:r>
+              <a:rPr lang="ko-KR" altLang="ko-KR" sz="1200" b="0" i="1" kern="1200" dirty="0" err="1">
+                <a:solidFill>
+                  <a:schemeClr val="tx1"/>
+                </a:solidFill>
+                <a:effectLst/>
+                <a:latin typeface="+mn-lt"/>
+                <a:ea typeface="+mn-ea"/>
+                <a:cs typeface="+mn-cs"/>
+              </a:rPr>
+              <a:t>the</a:t>
+            </a:r>
+            <a:r>
+              <a:rPr lang="ko-KR" altLang="ko-KR" sz="1200" b="0" i="1" kern="1200" dirty="0">
+                <a:solidFill>
+                  <a:schemeClr val="tx1"/>
+                </a:solidFill>
+                <a:effectLst/>
+                <a:latin typeface="+mn-lt"/>
+                <a:ea typeface="+mn-ea"/>
+                <a:cs typeface="+mn-cs"/>
+              </a:rPr>
+              <a:t> </a:t>
+            </a:r>
+            <a:r>
+              <a:rPr lang="ko-KR" altLang="ko-KR" sz="1200" b="0" i="1" kern="1200" dirty="0" err="1">
+                <a:solidFill>
+                  <a:schemeClr val="tx1"/>
+                </a:solidFill>
+                <a:effectLst/>
+                <a:latin typeface="+mn-lt"/>
+                <a:ea typeface="+mn-ea"/>
+                <a:cs typeface="+mn-cs"/>
+              </a:rPr>
+              <a:t>low-buffer</a:t>
+            </a:r>
+            <a:r>
+              <a:rPr lang="ko-KR" altLang="ko-KR" sz="1200" b="0" i="1" kern="1200" dirty="0">
+                <a:solidFill>
+                  <a:schemeClr val="tx1"/>
+                </a:solidFill>
+                <a:effectLst/>
+                <a:latin typeface="+mn-lt"/>
+                <a:ea typeface="+mn-ea"/>
+                <a:cs typeface="+mn-cs"/>
+              </a:rPr>
+              <a:t> </a:t>
+            </a:r>
+            <a:r>
+              <a:rPr lang="ko-KR" altLang="ko-KR" sz="1200" b="0" i="1" kern="1200" dirty="0" err="1">
+                <a:solidFill>
+                  <a:schemeClr val="tx1"/>
+                </a:solidFill>
+                <a:effectLst/>
+                <a:latin typeface="+mn-lt"/>
+                <a:ea typeface="+mn-ea"/>
+                <a:cs typeface="+mn-cs"/>
+              </a:rPr>
+              <a:t>events</a:t>
+            </a:r>
+            <a:r>
+              <a:rPr lang="ko-KR" altLang="ko-KR" sz="1200" b="0" i="1" kern="1200" dirty="0">
+                <a:solidFill>
+                  <a:schemeClr val="tx1"/>
+                </a:solidFill>
+                <a:effectLst/>
+                <a:latin typeface="+mn-lt"/>
+                <a:ea typeface="+mn-ea"/>
+                <a:cs typeface="+mn-cs"/>
+              </a:rPr>
+              <a:t>, and 18 </a:t>
+            </a:r>
+            <a:r>
+              <a:rPr lang="ko-KR" altLang="ko-KR" sz="1200" b="0" i="1" kern="1200" dirty="0" err="1">
+                <a:solidFill>
+                  <a:schemeClr val="tx1"/>
+                </a:solidFill>
+                <a:effectLst/>
+                <a:latin typeface="+mn-lt"/>
+                <a:ea typeface="+mn-ea"/>
+                <a:cs typeface="+mn-cs"/>
+              </a:rPr>
+              <a:t>percentage</a:t>
+            </a:r>
+            <a:r>
+              <a:rPr lang="ko-KR" altLang="ko-KR" sz="1200" b="0" i="1" kern="1200" dirty="0">
+                <a:solidFill>
+                  <a:schemeClr val="tx1"/>
+                </a:solidFill>
+                <a:effectLst/>
+                <a:latin typeface="+mn-lt"/>
+                <a:ea typeface="+mn-ea"/>
+                <a:cs typeface="+mn-cs"/>
+              </a:rPr>
+              <a:t> </a:t>
+            </a:r>
+            <a:r>
+              <a:rPr lang="ko-KR" altLang="ko-KR" sz="1200" b="0" i="1" kern="1200" dirty="0" err="1">
+                <a:solidFill>
+                  <a:schemeClr val="tx1"/>
+                </a:solidFill>
+                <a:effectLst/>
+                <a:latin typeface="+mn-lt"/>
+                <a:ea typeface="+mn-ea"/>
+                <a:cs typeface="+mn-cs"/>
+              </a:rPr>
+              <a:t>points</a:t>
+            </a:r>
+            <a:r>
+              <a:rPr lang="ko-KR" altLang="ko-KR" sz="1200" b="0" i="1" kern="1200" dirty="0">
+                <a:solidFill>
+                  <a:schemeClr val="tx1"/>
+                </a:solidFill>
+                <a:effectLst/>
+                <a:latin typeface="+mn-lt"/>
+                <a:ea typeface="+mn-ea"/>
+                <a:cs typeface="+mn-cs"/>
+              </a:rPr>
+              <a:t> </a:t>
+            </a:r>
+            <a:r>
+              <a:rPr lang="ko-KR" altLang="ko-KR" sz="1200" b="0" i="1" kern="1200" dirty="0" err="1">
+                <a:solidFill>
+                  <a:schemeClr val="tx1"/>
+                </a:solidFill>
+                <a:effectLst/>
+                <a:latin typeface="+mn-lt"/>
+                <a:ea typeface="+mn-ea"/>
+                <a:cs typeface="+mn-cs"/>
+              </a:rPr>
+              <a:t>below</a:t>
+            </a:r>
+            <a:r>
+              <a:rPr lang="ko-KR" altLang="ko-KR" sz="1200" b="0" i="1" kern="1200" dirty="0">
+                <a:solidFill>
+                  <a:schemeClr val="tx1"/>
+                </a:solidFill>
+                <a:effectLst/>
+                <a:latin typeface="+mn-lt"/>
+                <a:ea typeface="+mn-ea"/>
+                <a:cs typeface="+mn-cs"/>
+              </a:rPr>
+              <a:t> </a:t>
+            </a:r>
+            <a:r>
+              <a:rPr lang="ko-KR" altLang="ko-KR" sz="1200" b="0" i="1" kern="1200" dirty="0" err="1">
+                <a:solidFill>
+                  <a:schemeClr val="tx1"/>
+                </a:solidFill>
+                <a:effectLst/>
+                <a:latin typeface="+mn-lt"/>
+                <a:ea typeface="+mn-ea"/>
+                <a:cs typeface="+mn-cs"/>
+              </a:rPr>
+              <a:t>normal</a:t>
+            </a:r>
+            <a:r>
+              <a:rPr lang="ko-KR" altLang="ko-KR" sz="1200" b="0" i="1" kern="1200" dirty="0">
+                <a:solidFill>
+                  <a:schemeClr val="tx1"/>
+                </a:solidFill>
+                <a:effectLst/>
+                <a:latin typeface="+mn-lt"/>
+                <a:ea typeface="+mn-ea"/>
+                <a:cs typeface="+mn-cs"/>
+              </a:rPr>
+              <a:t> </a:t>
+            </a:r>
+            <a:r>
+              <a:rPr lang="ko-KR" altLang="ko-KR" sz="1200" b="0" i="1" kern="1200" dirty="0" err="1">
+                <a:solidFill>
+                  <a:schemeClr val="tx1"/>
+                </a:solidFill>
+                <a:effectLst/>
+                <a:latin typeface="+mn-lt"/>
+                <a:ea typeface="+mn-ea"/>
+                <a:cs typeface="+mn-cs"/>
+              </a:rPr>
+              <a:t>in</a:t>
+            </a:r>
+            <a:r>
+              <a:rPr lang="ko-KR" altLang="ko-KR" sz="1200" b="0" i="1" kern="1200" dirty="0">
+                <a:solidFill>
+                  <a:schemeClr val="tx1"/>
+                </a:solidFill>
+                <a:effectLst/>
+                <a:latin typeface="+mn-lt"/>
+                <a:ea typeface="+mn-ea"/>
+                <a:cs typeface="+mn-cs"/>
+              </a:rPr>
+              <a:t> </a:t>
+            </a:r>
+            <a:r>
+              <a:rPr lang="ko-KR" altLang="ko-KR" sz="1200" b="0" i="1" kern="1200" dirty="0" err="1">
+                <a:solidFill>
+                  <a:schemeClr val="tx1"/>
+                </a:solidFill>
+                <a:effectLst/>
+                <a:latin typeface="+mn-lt"/>
+                <a:ea typeface="+mn-ea"/>
+                <a:cs typeface="+mn-cs"/>
+              </a:rPr>
+              <a:t>the</a:t>
+            </a:r>
+            <a:r>
+              <a:rPr lang="ko-KR" altLang="ko-KR" sz="1200" b="0" i="1" kern="1200" dirty="0">
+                <a:solidFill>
+                  <a:schemeClr val="tx1"/>
+                </a:solidFill>
+                <a:effectLst/>
+                <a:latin typeface="+mn-lt"/>
+                <a:ea typeface="+mn-ea"/>
+                <a:cs typeface="+mn-cs"/>
+              </a:rPr>
+              <a:t> </a:t>
+            </a:r>
+            <a:r>
+              <a:rPr lang="ko-KR" altLang="ko-KR" sz="1200" b="0" i="1" kern="1200" dirty="0" err="1">
+                <a:solidFill>
+                  <a:schemeClr val="tx1"/>
+                </a:solidFill>
+                <a:effectLst/>
+                <a:latin typeface="+mn-lt"/>
+                <a:ea typeface="+mn-ea"/>
+                <a:cs typeface="+mn-cs"/>
+              </a:rPr>
+              <a:t>high-buffer</a:t>
+            </a:r>
+            <a:r>
+              <a:rPr lang="ko-KR" altLang="ko-KR" sz="1200" b="0" i="1" kern="1200" dirty="0">
+                <a:solidFill>
+                  <a:schemeClr val="tx1"/>
+                </a:solidFill>
+                <a:effectLst/>
+                <a:latin typeface="+mn-lt"/>
+                <a:ea typeface="+mn-ea"/>
+                <a:cs typeface="+mn-cs"/>
+              </a:rPr>
+              <a:t> </a:t>
+            </a:r>
+            <a:r>
+              <a:rPr lang="ko-KR" altLang="ko-KR" sz="1200" b="0" i="1" kern="1200" dirty="0" err="1">
+                <a:solidFill>
+                  <a:schemeClr val="tx1"/>
+                </a:solidFill>
+                <a:effectLst/>
+                <a:latin typeface="+mn-lt"/>
+                <a:ea typeface="+mn-ea"/>
+                <a:cs typeface="+mn-cs"/>
+              </a:rPr>
+              <a:t>event</a:t>
+            </a:r>
+            <a:r>
+              <a:rPr lang="ko-KR" altLang="ko-KR" sz="1200" b="0" i="1" kern="1200" dirty="0">
+                <a:solidFill>
+                  <a:schemeClr val="tx1"/>
+                </a:solidFill>
+                <a:effectLst/>
+                <a:latin typeface="+mn-lt"/>
+                <a:ea typeface="+mn-ea"/>
+                <a:cs typeface="+mn-cs"/>
+              </a:rPr>
+              <a:t> — </a:t>
+            </a:r>
+            <a:r>
+              <a:rPr lang="ko-KR" altLang="ko-KR" sz="1200" b="0" i="1" kern="1200" dirty="0" err="1">
+                <a:solidFill>
+                  <a:schemeClr val="tx1"/>
+                </a:solidFill>
+                <a:effectLst/>
+                <a:latin typeface="+mn-lt"/>
+                <a:ea typeface="+mn-ea"/>
+                <a:cs typeface="+mn-cs"/>
+              </a:rPr>
+              <a:t>a</a:t>
+            </a:r>
+            <a:r>
+              <a:rPr lang="ko-KR" altLang="ko-KR" sz="1200" b="0" i="1" kern="1200" dirty="0">
+                <a:solidFill>
+                  <a:schemeClr val="tx1"/>
+                </a:solidFill>
+                <a:effectLst/>
+                <a:latin typeface="+mn-lt"/>
+                <a:ea typeface="+mn-ea"/>
+                <a:cs typeface="+mn-cs"/>
+              </a:rPr>
+              <a:t> </a:t>
+            </a:r>
+            <a:r>
+              <a:rPr lang="ko-KR" altLang="ko-KR" sz="1200" b="0" i="1" kern="1200" dirty="0" err="1">
+                <a:solidFill>
+                  <a:schemeClr val="tx1"/>
+                </a:solidFill>
+                <a:effectLst/>
+                <a:latin typeface="+mn-lt"/>
+                <a:ea typeface="+mn-ea"/>
+                <a:cs typeface="+mn-cs"/>
+              </a:rPr>
+              <a:t>swing</a:t>
+            </a:r>
+            <a:r>
+              <a:rPr lang="ko-KR" altLang="ko-KR" sz="1200" b="0" i="1" kern="1200" dirty="0">
+                <a:solidFill>
+                  <a:schemeClr val="tx1"/>
+                </a:solidFill>
+                <a:effectLst/>
+                <a:latin typeface="+mn-lt"/>
+                <a:ea typeface="+mn-ea"/>
+                <a:cs typeface="+mn-cs"/>
+              </a:rPr>
+              <a:t> of 27 </a:t>
+            </a:r>
+            <a:r>
+              <a:rPr lang="ko-KR" altLang="ko-KR" sz="1200" b="0" i="1" kern="1200" dirty="0" err="1">
+                <a:solidFill>
+                  <a:schemeClr val="tx1"/>
+                </a:solidFill>
+                <a:effectLst/>
+                <a:latin typeface="+mn-lt"/>
+                <a:ea typeface="+mn-ea"/>
+                <a:cs typeface="+mn-cs"/>
+              </a:rPr>
+              <a:t>percentage</a:t>
+            </a:r>
+            <a:r>
+              <a:rPr lang="ko-KR" altLang="ko-KR" sz="1200" b="0" i="1" kern="1200" dirty="0">
+                <a:solidFill>
+                  <a:schemeClr val="tx1"/>
+                </a:solidFill>
+                <a:effectLst/>
+                <a:latin typeface="+mn-lt"/>
+                <a:ea typeface="+mn-ea"/>
+                <a:cs typeface="+mn-cs"/>
+              </a:rPr>
+              <a:t> </a:t>
+            </a:r>
+            <a:r>
+              <a:rPr lang="ko-KR" altLang="ko-KR" sz="1200" b="0" i="1" kern="1200" dirty="0" err="1">
+                <a:solidFill>
+                  <a:schemeClr val="tx1"/>
+                </a:solidFill>
+                <a:effectLst/>
+                <a:latin typeface="+mn-lt"/>
+                <a:ea typeface="+mn-ea"/>
+                <a:cs typeface="+mn-cs"/>
+              </a:rPr>
+              <a:t>points</a:t>
+            </a:r>
+            <a:r>
+              <a:rPr lang="ko-KR" altLang="ko-KR" sz="1200" b="0" i="1" kern="1200" dirty="0">
+                <a:solidFill>
+                  <a:schemeClr val="tx1"/>
+                </a:solidFill>
+                <a:effectLst/>
+                <a:latin typeface="+mn-lt"/>
+                <a:ea typeface="+mn-ea"/>
+                <a:cs typeface="+mn-cs"/>
+              </a:rPr>
+              <a:t> </a:t>
+            </a:r>
+            <a:r>
+              <a:rPr lang="ko-KR" altLang="ko-KR" sz="1200" b="0" i="1" kern="1200" dirty="0" err="1">
+                <a:solidFill>
+                  <a:schemeClr val="tx1"/>
+                </a:solidFill>
+                <a:effectLst/>
+                <a:latin typeface="+mn-lt"/>
+                <a:ea typeface="+mn-ea"/>
+                <a:cs typeface="+mn-cs"/>
+              </a:rPr>
+              <a:t>between</a:t>
+            </a:r>
+            <a:r>
+              <a:rPr lang="ko-KR" altLang="ko-KR" sz="1200" b="0" i="1" kern="1200" dirty="0">
+                <a:solidFill>
+                  <a:schemeClr val="tx1"/>
+                </a:solidFill>
+                <a:effectLst/>
+                <a:latin typeface="+mn-lt"/>
+                <a:ea typeface="+mn-ea"/>
+                <a:cs typeface="+mn-cs"/>
+              </a:rPr>
+              <a:t> </a:t>
+            </a:r>
+            <a:r>
+              <a:rPr lang="ko-KR" altLang="ko-KR" sz="1200" b="0" i="1" kern="1200" dirty="0" err="1">
+                <a:solidFill>
+                  <a:schemeClr val="tx1"/>
+                </a:solidFill>
+                <a:effectLst/>
+                <a:latin typeface="+mn-lt"/>
+                <a:ea typeface="+mn-ea"/>
+                <a:cs typeface="+mn-cs"/>
+              </a:rPr>
+              <a:t>the</a:t>
+            </a:r>
+            <a:r>
+              <a:rPr lang="ko-KR" altLang="ko-KR" sz="1200" b="0" i="1" kern="1200" dirty="0">
+                <a:solidFill>
+                  <a:schemeClr val="tx1"/>
+                </a:solidFill>
+                <a:effectLst/>
+                <a:latin typeface="+mn-lt"/>
+                <a:ea typeface="+mn-ea"/>
+                <a:cs typeface="+mn-cs"/>
+              </a:rPr>
+              <a:t> </a:t>
+            </a:r>
+            <a:r>
+              <a:rPr lang="ko-KR" altLang="ko-KR" sz="1200" b="0" i="1" kern="1200" dirty="0" err="1">
+                <a:solidFill>
+                  <a:schemeClr val="tx1"/>
+                </a:solidFill>
+                <a:effectLst/>
+                <a:latin typeface="+mn-lt"/>
+                <a:ea typeface="+mn-ea"/>
+                <a:cs typeface="+mn-cs"/>
+              </a:rPr>
+              <a:t>two</a:t>
+            </a:r>
+            <a:r>
+              <a:rPr lang="ko-KR" altLang="ko-KR" sz="1200" b="0" i="1" kern="1200" dirty="0">
+                <a:solidFill>
+                  <a:schemeClr val="tx1"/>
+                </a:solidFill>
+                <a:effectLst/>
+                <a:latin typeface="+mn-lt"/>
+                <a:ea typeface="+mn-ea"/>
+                <a:cs typeface="+mn-cs"/>
+              </a:rPr>
+              <a:t> </a:t>
+            </a:r>
+            <a:r>
+              <a:rPr lang="ko-KR" altLang="ko-KR" sz="1200" b="0" i="1" kern="1200" dirty="0" err="1">
+                <a:solidFill>
+                  <a:schemeClr val="tx1"/>
+                </a:solidFill>
+                <a:effectLst/>
+                <a:latin typeface="+mn-lt"/>
+                <a:ea typeface="+mn-ea"/>
+                <a:cs typeface="+mn-cs"/>
+              </a:rPr>
+              <a:t>regimes</a:t>
+            </a:r>
+            <a:r>
+              <a:rPr lang="ko-KR" altLang="ko-KR" sz="1200" b="0" i="1" kern="1200" dirty="0">
+                <a:solidFill>
+                  <a:schemeClr val="tx1"/>
+                </a:solidFill>
+                <a:effectLst/>
+                <a:latin typeface="+mn-lt"/>
+                <a:ea typeface="+mn-ea"/>
+                <a:cs typeface="+mn-cs"/>
+              </a:rPr>
+              <a:t>.”</a:t>
+            </a:r>
+            <a:r>
+              <a:rPr lang="en-US" altLang="ko-KR" sz="1200" b="0" i="1" kern="1200" dirty="0">
+                <a:solidFill>
+                  <a:schemeClr val="tx1"/>
+                </a:solidFill>
+                <a:effectLst/>
+                <a:latin typeface="+mn-lt"/>
+                <a:ea typeface="+mn-ea"/>
+                <a:cs typeface="+mn-cs"/>
+              </a:rPr>
+              <a:t>  </a:t>
+            </a:r>
+            <a:r>
+              <a:rPr dirty="0"/>
+              <a:t>with a Welch t of 15.22, is the core empirical finding of our paper.</a:t>
+            </a:r>
+            <a:endParaRPr lang="en-US" dirty="0"/>
+          </a:p>
+          <a:p>
+            <a:endParaRPr lang="en-US" dirty="0"/>
+          </a:p>
+          <a:p>
+            <a:r>
+              <a:rPr lang="ko-KR" altLang="ko-KR" sz="1200" b="1" i="0" kern="1200" dirty="0">
+                <a:solidFill>
+                  <a:schemeClr val="tx1"/>
+                </a:solidFill>
+                <a:effectLst/>
+                <a:latin typeface="+mn-lt"/>
+                <a:ea typeface="+mn-ea"/>
+                <a:cs typeface="+mn-cs"/>
+              </a:rPr>
+              <a:t>The 27 </a:t>
+            </a:r>
+            <a:r>
+              <a:rPr lang="ko-KR" altLang="ko-KR" sz="1200" b="1" i="0" kern="1200" dirty="0" err="1">
+                <a:solidFill>
+                  <a:schemeClr val="tx1"/>
+                </a:solidFill>
+                <a:effectLst/>
+                <a:latin typeface="+mn-lt"/>
+                <a:ea typeface="+mn-ea"/>
+                <a:cs typeface="+mn-cs"/>
+              </a:rPr>
+              <a:t>pp</a:t>
+            </a:r>
+            <a:r>
+              <a:rPr lang="ko-KR" altLang="ko-KR" sz="1200" b="1" i="0" kern="1200" dirty="0">
+                <a:solidFill>
+                  <a:schemeClr val="tx1"/>
+                </a:solidFill>
+                <a:effectLst/>
+                <a:latin typeface="+mn-lt"/>
+                <a:ea typeface="+mn-ea"/>
+                <a:cs typeface="+mn-cs"/>
+              </a:rPr>
+              <a:t> </a:t>
+            </a:r>
+            <a:r>
+              <a:rPr lang="ko-KR" altLang="ko-KR" sz="1200" b="1" i="0" kern="1200" dirty="0" err="1">
+                <a:solidFill>
+                  <a:schemeClr val="tx1"/>
+                </a:solidFill>
+                <a:effectLst/>
+                <a:latin typeface="+mn-lt"/>
+                <a:ea typeface="+mn-ea"/>
+                <a:cs typeface="+mn-cs"/>
+              </a:rPr>
+              <a:t>Swing</a:t>
+            </a:r>
+            <a:endParaRPr lang="ko-KR" altLang="ko-KR" sz="1200" b="1" i="0" kern="1200" dirty="0">
+              <a:solidFill>
+                <a:schemeClr val="tx1"/>
+              </a:solidFill>
+              <a:effectLst/>
+              <a:latin typeface="+mn-lt"/>
+              <a:ea typeface="+mn-ea"/>
+              <a:cs typeface="+mn-cs"/>
+            </a:endParaRPr>
+          </a:p>
+          <a:p>
+            <a:r>
+              <a:rPr lang="ko-KR" altLang="ko-KR" sz="1200" b="0" i="0" kern="1200" dirty="0" err="1">
+                <a:solidFill>
+                  <a:schemeClr val="tx1"/>
+                </a:solidFill>
+                <a:effectLst/>
+                <a:latin typeface="+mn-lt"/>
+                <a:ea typeface="+mn-ea"/>
+                <a:cs typeface="+mn-cs"/>
+              </a:rPr>
+              <a:t>It</a:t>
+            </a:r>
+            <a:r>
+              <a:rPr lang="ko-KR" altLang="ko-KR" sz="1200" b="0" i="0" kern="1200" dirty="0">
+                <a:solidFill>
+                  <a:schemeClr val="tx1"/>
+                </a:solidFill>
+                <a:effectLst/>
+                <a:latin typeface="+mn-lt"/>
+                <a:ea typeface="+mn-ea"/>
+                <a:cs typeface="+mn-cs"/>
+              </a:rPr>
+              <a:t> </a:t>
+            </a:r>
+            <a:r>
+              <a:rPr lang="ko-KR" altLang="ko-KR" sz="1200" b="0" i="0" kern="1200" dirty="0" err="1">
+                <a:solidFill>
+                  <a:schemeClr val="tx1"/>
+                </a:solidFill>
+                <a:effectLst/>
+                <a:latin typeface="+mn-lt"/>
+                <a:ea typeface="+mn-ea"/>
+                <a:cs typeface="+mn-cs"/>
+              </a:rPr>
+              <a:t>is</a:t>
+            </a:r>
+            <a:r>
+              <a:rPr lang="ko-KR" altLang="ko-KR" sz="1200" b="0" i="0" kern="1200" dirty="0">
+                <a:solidFill>
+                  <a:schemeClr val="tx1"/>
+                </a:solidFill>
+                <a:effectLst/>
+                <a:latin typeface="+mn-lt"/>
+                <a:ea typeface="+mn-ea"/>
+                <a:cs typeface="+mn-cs"/>
+              </a:rPr>
+              <a:t> </a:t>
+            </a:r>
+            <a:r>
+              <a:rPr lang="ko-KR" altLang="ko-KR" sz="1200" b="0" i="0" kern="1200" dirty="0" err="1">
+                <a:solidFill>
+                  <a:schemeClr val="tx1"/>
+                </a:solidFill>
+                <a:effectLst/>
+                <a:latin typeface="+mn-lt"/>
+                <a:ea typeface="+mn-ea"/>
+                <a:cs typeface="+mn-cs"/>
+              </a:rPr>
+              <a:t>just</a:t>
+            </a:r>
+            <a:r>
+              <a:rPr lang="ko-KR" altLang="ko-KR" sz="1200" b="0" i="0" kern="1200" dirty="0">
+                <a:solidFill>
+                  <a:schemeClr val="tx1"/>
+                </a:solidFill>
+                <a:effectLst/>
+                <a:latin typeface="+mn-lt"/>
+                <a:ea typeface="+mn-ea"/>
+                <a:cs typeface="+mn-cs"/>
+              </a:rPr>
+              <a:t> </a:t>
+            </a:r>
+            <a:r>
+              <a:rPr lang="ko-KR" altLang="ko-KR" sz="1200" b="0" i="0" kern="1200" dirty="0" err="1">
+                <a:solidFill>
+                  <a:schemeClr val="tx1"/>
+                </a:solidFill>
+                <a:effectLst/>
+                <a:latin typeface="+mn-lt"/>
+                <a:ea typeface="+mn-ea"/>
+                <a:cs typeface="+mn-cs"/>
+              </a:rPr>
+              <a:t>subtraction</a:t>
+            </a:r>
+            <a:r>
+              <a:rPr lang="ko-KR" altLang="ko-KR" sz="1200" b="0" i="0" kern="1200" dirty="0">
+                <a:solidFill>
+                  <a:schemeClr val="tx1"/>
+                </a:solidFill>
+                <a:effectLst/>
+                <a:latin typeface="+mn-lt"/>
+                <a:ea typeface="+mn-ea"/>
+                <a:cs typeface="+mn-cs"/>
+              </a:rPr>
+              <a:t>.</a:t>
+            </a:r>
+          </a:p>
+          <a:p>
+            <a:r>
+              <a:rPr lang="ko-KR" altLang="ko-KR" sz="1200" b="0" i="0" kern="1200" dirty="0" err="1">
+                <a:solidFill>
+                  <a:schemeClr val="tx1"/>
+                </a:solidFill>
+                <a:effectLst/>
+                <a:latin typeface="+mn-lt"/>
+                <a:ea typeface="+mn-ea"/>
+                <a:cs typeface="+mn-cs"/>
+              </a:rPr>
+              <a:t>You</a:t>
+            </a:r>
+            <a:r>
+              <a:rPr lang="ko-KR" altLang="ko-KR" sz="1200" b="0" i="0" kern="1200" dirty="0">
+                <a:solidFill>
+                  <a:schemeClr val="tx1"/>
+                </a:solidFill>
+                <a:effectLst/>
+                <a:latin typeface="+mn-lt"/>
+                <a:ea typeface="+mn-ea"/>
+                <a:cs typeface="+mn-cs"/>
+              </a:rPr>
+              <a:t> </a:t>
+            </a:r>
+            <a:r>
+              <a:rPr lang="ko-KR" altLang="ko-KR" sz="1200" b="0" i="0" kern="1200" dirty="0" err="1">
+                <a:solidFill>
+                  <a:schemeClr val="tx1"/>
+                </a:solidFill>
+                <a:effectLst/>
+                <a:latin typeface="+mn-lt"/>
+                <a:ea typeface="+mn-ea"/>
+                <a:cs typeface="+mn-cs"/>
+              </a:rPr>
+              <a:t>have</a:t>
+            </a:r>
+            <a:r>
+              <a:rPr lang="ko-KR" altLang="ko-KR" sz="1200" b="0" i="0" kern="1200" dirty="0">
+                <a:solidFill>
+                  <a:schemeClr val="tx1"/>
+                </a:solidFill>
+                <a:effectLst/>
+                <a:latin typeface="+mn-lt"/>
+                <a:ea typeface="+mn-ea"/>
+                <a:cs typeface="+mn-cs"/>
+              </a:rPr>
+              <a:t> </a:t>
+            </a:r>
+            <a:r>
+              <a:rPr lang="ko-KR" altLang="ko-KR" sz="1200" b="0" i="0" kern="1200" dirty="0" err="1">
+                <a:solidFill>
+                  <a:schemeClr val="tx1"/>
+                </a:solidFill>
+                <a:effectLst/>
+                <a:latin typeface="+mn-lt"/>
+                <a:ea typeface="+mn-ea"/>
+                <a:cs typeface="+mn-cs"/>
+              </a:rPr>
+              <a:t>two</a:t>
+            </a:r>
+            <a:r>
+              <a:rPr lang="ko-KR" altLang="ko-KR" sz="1200" b="0" i="0" kern="1200" dirty="0">
+                <a:solidFill>
+                  <a:schemeClr val="tx1"/>
+                </a:solidFill>
+                <a:effectLst/>
+                <a:latin typeface="+mn-lt"/>
+                <a:ea typeface="+mn-ea"/>
+                <a:cs typeface="+mn-cs"/>
+              </a:rPr>
+              <a:t> </a:t>
+            </a:r>
+            <a:r>
+              <a:rPr lang="ko-KR" altLang="ko-KR" sz="1200" b="0" i="0" kern="1200" dirty="0" err="1">
+                <a:solidFill>
+                  <a:schemeClr val="tx1"/>
+                </a:solidFill>
+                <a:effectLst/>
+                <a:latin typeface="+mn-lt"/>
+                <a:ea typeface="+mn-ea"/>
+                <a:cs typeface="+mn-cs"/>
+              </a:rPr>
+              <a:t>groups</a:t>
+            </a:r>
+            <a:r>
+              <a:rPr lang="ko-KR" altLang="ko-KR" sz="1200" b="0" i="0" kern="1200" dirty="0">
+                <a:solidFill>
+                  <a:schemeClr val="tx1"/>
+                </a:solidFill>
+                <a:effectLst/>
+                <a:latin typeface="+mn-lt"/>
+                <a:ea typeface="+mn-ea"/>
+                <a:cs typeface="+mn-cs"/>
+              </a:rPr>
+              <a:t> of </a:t>
+            </a:r>
+            <a:r>
+              <a:rPr lang="ko-KR" altLang="ko-KR" sz="1200" b="0" i="0" kern="1200" dirty="0" err="1">
+                <a:solidFill>
+                  <a:schemeClr val="tx1"/>
+                </a:solidFill>
+                <a:effectLst/>
+                <a:latin typeface="+mn-lt"/>
+                <a:ea typeface="+mn-ea"/>
+                <a:cs typeface="+mn-cs"/>
+              </a:rPr>
+              <a:t>events</a:t>
+            </a:r>
+            <a:r>
+              <a:rPr lang="ko-KR" altLang="ko-KR" sz="1200" b="0" i="0" kern="1200" dirty="0">
+                <a:solidFill>
+                  <a:schemeClr val="tx1"/>
+                </a:solidFill>
+                <a:effectLst/>
+                <a:latin typeface="+mn-lt"/>
+                <a:ea typeface="+mn-ea"/>
+                <a:cs typeface="+mn-cs"/>
+              </a:rPr>
+              <a:t>:</a:t>
+            </a:r>
+          </a:p>
+          <a:p>
+            <a:r>
+              <a:rPr lang="ko-KR" altLang="ko-KR" sz="1200" b="1" i="0" kern="1200" dirty="0" err="1">
+                <a:solidFill>
+                  <a:schemeClr val="tx1"/>
+                </a:solidFill>
+                <a:effectLst/>
+                <a:latin typeface="+mn-lt"/>
+                <a:ea typeface="+mn-ea"/>
+                <a:cs typeface="+mn-cs"/>
+              </a:rPr>
+              <a:t>Low</a:t>
+            </a:r>
+            <a:r>
+              <a:rPr lang="ko-KR" altLang="ko-KR" sz="1200" b="1" i="0" kern="1200" dirty="0">
+                <a:solidFill>
+                  <a:schemeClr val="tx1"/>
+                </a:solidFill>
+                <a:effectLst/>
+                <a:latin typeface="+mn-lt"/>
+                <a:ea typeface="+mn-ea"/>
+                <a:cs typeface="+mn-cs"/>
+              </a:rPr>
+              <a:t> </a:t>
+            </a:r>
+            <a:r>
+              <a:rPr lang="ko-KR" altLang="ko-KR" sz="1200" b="1" i="0" kern="1200" dirty="0" err="1">
+                <a:solidFill>
+                  <a:schemeClr val="tx1"/>
+                </a:solidFill>
+                <a:effectLst/>
+                <a:latin typeface="+mn-lt"/>
+                <a:ea typeface="+mn-ea"/>
+                <a:cs typeface="+mn-cs"/>
+              </a:rPr>
+              <a:t>buffer</a:t>
+            </a:r>
+            <a:r>
+              <a:rPr lang="ko-KR" altLang="ko-KR" sz="1200" b="1" i="0" kern="1200" dirty="0">
+                <a:solidFill>
+                  <a:schemeClr val="tx1"/>
+                </a:solidFill>
+                <a:effectLst/>
+                <a:latin typeface="+mn-lt"/>
+                <a:ea typeface="+mn-ea"/>
+                <a:cs typeface="+mn-cs"/>
+              </a:rPr>
+              <a:t> </a:t>
+            </a:r>
+            <a:r>
+              <a:rPr lang="ko-KR" altLang="ko-KR" sz="1200" b="1" i="0" kern="1200" dirty="0" err="1">
+                <a:solidFill>
+                  <a:schemeClr val="tx1"/>
+                </a:solidFill>
+                <a:effectLst/>
+                <a:latin typeface="+mn-lt"/>
+                <a:ea typeface="+mn-ea"/>
+                <a:cs typeface="+mn-cs"/>
+              </a:rPr>
+              <a:t>events</a:t>
+            </a:r>
+            <a:r>
+              <a:rPr lang="ko-KR" altLang="ko-KR" sz="1200" b="0" i="0" kern="1200" dirty="0">
+                <a:solidFill>
+                  <a:schemeClr val="tx1"/>
+                </a:solidFill>
+                <a:effectLst/>
+                <a:latin typeface="+mn-lt"/>
+                <a:ea typeface="+mn-ea"/>
+                <a:cs typeface="+mn-cs"/>
+              </a:rPr>
+              <a:t> (LUNA + USDT): </a:t>
+            </a:r>
+            <a:r>
+              <a:rPr lang="ko-KR" altLang="ko-KR" sz="1200" b="0" i="0" kern="1200" dirty="0" err="1">
+                <a:solidFill>
+                  <a:schemeClr val="tx1"/>
+                </a:solidFill>
+                <a:effectLst/>
+                <a:latin typeface="+mn-lt"/>
+                <a:ea typeface="+mn-ea"/>
+                <a:cs typeface="+mn-cs"/>
+              </a:rPr>
+              <a:t>spread</a:t>
+            </a:r>
+            <a:r>
+              <a:rPr lang="ko-KR" altLang="ko-KR" sz="1200" b="0" i="0" kern="1200" dirty="0">
+                <a:solidFill>
+                  <a:schemeClr val="tx1"/>
+                </a:solidFill>
+                <a:effectLst/>
+                <a:latin typeface="+mn-lt"/>
+                <a:ea typeface="+mn-ea"/>
+                <a:cs typeface="+mn-cs"/>
+              </a:rPr>
+              <a:t> </a:t>
+            </a:r>
+            <a:r>
+              <a:rPr lang="ko-KR" altLang="ko-KR" sz="1200" b="0" i="0" kern="1200" dirty="0" err="1">
+                <a:solidFill>
+                  <a:schemeClr val="tx1"/>
+                </a:solidFill>
+                <a:effectLst/>
+                <a:latin typeface="+mn-lt"/>
+                <a:ea typeface="+mn-ea"/>
+                <a:cs typeface="+mn-cs"/>
+              </a:rPr>
+              <a:t>went</a:t>
+            </a:r>
+            <a:r>
+              <a:rPr lang="ko-KR" altLang="ko-KR" sz="1200" b="0" i="0" kern="1200" dirty="0">
+                <a:solidFill>
+                  <a:schemeClr val="tx1"/>
+                </a:solidFill>
+                <a:effectLst/>
+                <a:latin typeface="+mn-lt"/>
+                <a:ea typeface="+mn-ea"/>
+                <a:cs typeface="+mn-cs"/>
+              </a:rPr>
+              <a:t> </a:t>
+            </a:r>
+            <a:r>
+              <a:rPr lang="ko-KR" altLang="ko-KR" sz="1200" b="1" i="0" kern="1200" dirty="0">
+                <a:solidFill>
+                  <a:schemeClr val="tx1"/>
+                </a:solidFill>
+                <a:effectLst/>
+                <a:latin typeface="+mn-lt"/>
+                <a:ea typeface="+mn-ea"/>
+                <a:cs typeface="+mn-cs"/>
+              </a:rPr>
+              <a:t>+8.9 </a:t>
+            </a:r>
+            <a:r>
+              <a:rPr lang="ko-KR" altLang="ko-KR" sz="1200" b="1" i="0" kern="1200" dirty="0" err="1">
+                <a:solidFill>
+                  <a:schemeClr val="tx1"/>
+                </a:solidFill>
+                <a:effectLst/>
+                <a:latin typeface="+mn-lt"/>
+                <a:ea typeface="+mn-ea"/>
+                <a:cs typeface="+mn-cs"/>
+              </a:rPr>
+              <a:t>pp</a:t>
+            </a:r>
+            <a:r>
+              <a:rPr lang="ko-KR" altLang="ko-KR" sz="1200" b="0" i="0" kern="1200" dirty="0">
+                <a:solidFill>
+                  <a:schemeClr val="tx1"/>
+                </a:solidFill>
+                <a:effectLst/>
+                <a:latin typeface="+mn-lt"/>
+                <a:ea typeface="+mn-ea"/>
+                <a:cs typeface="+mn-cs"/>
+              </a:rPr>
+              <a:t> </a:t>
+            </a:r>
+            <a:r>
+              <a:rPr lang="ko-KR" altLang="ko-KR" sz="1200" b="0" i="0" kern="1200" dirty="0" err="1">
+                <a:solidFill>
+                  <a:schemeClr val="tx1"/>
+                </a:solidFill>
+                <a:effectLst/>
+                <a:latin typeface="+mn-lt"/>
+                <a:ea typeface="+mn-ea"/>
+                <a:cs typeface="+mn-cs"/>
+              </a:rPr>
+              <a:t>above</a:t>
+            </a:r>
+            <a:r>
+              <a:rPr lang="ko-KR" altLang="ko-KR" sz="1200" b="0" i="0" kern="1200" dirty="0">
+                <a:solidFill>
+                  <a:schemeClr val="tx1"/>
+                </a:solidFill>
+                <a:effectLst/>
+                <a:latin typeface="+mn-lt"/>
+                <a:ea typeface="+mn-ea"/>
+                <a:cs typeface="+mn-cs"/>
+              </a:rPr>
+              <a:t> </a:t>
+            </a:r>
+            <a:r>
+              <a:rPr lang="ko-KR" altLang="ko-KR" sz="1200" b="0" i="0" kern="1200" dirty="0" err="1">
+                <a:solidFill>
+                  <a:schemeClr val="tx1"/>
+                </a:solidFill>
+                <a:effectLst/>
+                <a:latin typeface="+mn-lt"/>
+                <a:ea typeface="+mn-ea"/>
+                <a:cs typeface="+mn-cs"/>
+              </a:rPr>
+              <a:t>normal</a:t>
+            </a:r>
+            <a:r>
+              <a:rPr lang="ko-KR" altLang="ko-KR" sz="1200" b="0" i="0" kern="1200" dirty="0">
+                <a:solidFill>
+                  <a:schemeClr val="tx1"/>
+                </a:solidFill>
+                <a:effectLst/>
+                <a:latin typeface="+mn-lt"/>
+                <a:ea typeface="+mn-ea"/>
+                <a:cs typeface="+mn-cs"/>
+              </a:rPr>
+              <a:t> </a:t>
+            </a:r>
+            <a:r>
+              <a:rPr lang="ko-KR" altLang="ko-KR" sz="1200" b="0" i="0" kern="1200" dirty="0" err="1">
+                <a:solidFill>
+                  <a:schemeClr val="tx1"/>
+                </a:solidFill>
+                <a:effectLst/>
+                <a:latin typeface="+mn-lt"/>
+                <a:ea typeface="+mn-ea"/>
+                <a:cs typeface="+mn-cs"/>
+              </a:rPr>
+              <a:t>on</a:t>
+            </a:r>
+            <a:r>
+              <a:rPr lang="ko-KR" altLang="ko-KR" sz="1200" b="0" i="0" kern="1200" dirty="0">
+                <a:solidFill>
+                  <a:schemeClr val="tx1"/>
+                </a:solidFill>
+                <a:effectLst/>
+                <a:latin typeface="+mn-lt"/>
+                <a:ea typeface="+mn-ea"/>
+                <a:cs typeface="+mn-cs"/>
+              </a:rPr>
+              <a:t> </a:t>
+            </a:r>
+            <a:r>
+              <a:rPr lang="ko-KR" altLang="ko-KR" sz="1200" b="0" i="0" kern="1200" dirty="0" err="1">
+                <a:solidFill>
+                  <a:schemeClr val="tx1"/>
+                </a:solidFill>
+                <a:effectLst/>
+                <a:latin typeface="+mn-lt"/>
+                <a:ea typeface="+mn-ea"/>
+                <a:cs typeface="+mn-cs"/>
+              </a:rPr>
+              <a:t>average</a:t>
+            </a:r>
+            <a:endParaRPr lang="ko-KR" altLang="ko-KR" sz="1200" b="0" i="0" kern="1200" dirty="0">
+              <a:solidFill>
+                <a:schemeClr val="tx1"/>
+              </a:solidFill>
+              <a:effectLst/>
+              <a:latin typeface="+mn-lt"/>
+              <a:ea typeface="+mn-ea"/>
+              <a:cs typeface="+mn-cs"/>
+            </a:endParaRPr>
+          </a:p>
+          <a:p>
+            <a:r>
+              <a:rPr lang="ko-KR" altLang="ko-KR" sz="1200" b="1" i="0" kern="1200" dirty="0" err="1">
+                <a:solidFill>
+                  <a:schemeClr val="tx1"/>
+                </a:solidFill>
+                <a:effectLst/>
+                <a:latin typeface="+mn-lt"/>
+                <a:ea typeface="+mn-ea"/>
+                <a:cs typeface="+mn-cs"/>
+              </a:rPr>
+              <a:t>High</a:t>
+            </a:r>
+            <a:r>
+              <a:rPr lang="ko-KR" altLang="ko-KR" sz="1200" b="1" i="0" kern="1200" dirty="0">
+                <a:solidFill>
+                  <a:schemeClr val="tx1"/>
+                </a:solidFill>
+                <a:effectLst/>
+                <a:latin typeface="+mn-lt"/>
+                <a:ea typeface="+mn-ea"/>
+                <a:cs typeface="+mn-cs"/>
+              </a:rPr>
+              <a:t> </a:t>
+            </a:r>
+            <a:r>
+              <a:rPr lang="ko-KR" altLang="ko-KR" sz="1200" b="1" i="0" kern="1200" dirty="0" err="1">
+                <a:solidFill>
+                  <a:schemeClr val="tx1"/>
+                </a:solidFill>
+                <a:effectLst/>
+                <a:latin typeface="+mn-lt"/>
+                <a:ea typeface="+mn-ea"/>
+                <a:cs typeface="+mn-cs"/>
+              </a:rPr>
+              <a:t>buffer</a:t>
+            </a:r>
+            <a:r>
+              <a:rPr lang="ko-KR" altLang="ko-KR" sz="1200" b="1" i="0" kern="1200" dirty="0">
+                <a:solidFill>
+                  <a:schemeClr val="tx1"/>
+                </a:solidFill>
+                <a:effectLst/>
+                <a:latin typeface="+mn-lt"/>
+                <a:ea typeface="+mn-ea"/>
+                <a:cs typeface="+mn-cs"/>
+              </a:rPr>
+              <a:t> </a:t>
+            </a:r>
+            <a:r>
+              <a:rPr lang="ko-KR" altLang="ko-KR" sz="1200" b="1" i="0" kern="1200" dirty="0" err="1">
+                <a:solidFill>
+                  <a:schemeClr val="tx1"/>
+                </a:solidFill>
+                <a:effectLst/>
+                <a:latin typeface="+mn-lt"/>
+                <a:ea typeface="+mn-ea"/>
+                <a:cs typeface="+mn-cs"/>
+              </a:rPr>
+              <a:t>event</a:t>
+            </a:r>
+            <a:r>
+              <a:rPr lang="ko-KR" altLang="ko-KR" sz="1200" b="0" i="0" kern="1200" dirty="0">
+                <a:solidFill>
+                  <a:schemeClr val="tx1"/>
+                </a:solidFill>
+                <a:effectLst/>
+                <a:latin typeface="+mn-lt"/>
+                <a:ea typeface="+mn-ea"/>
+                <a:cs typeface="+mn-cs"/>
+              </a:rPr>
+              <a:t> (SVB): </a:t>
+            </a:r>
+            <a:r>
+              <a:rPr lang="ko-KR" altLang="ko-KR" sz="1200" b="0" i="0" kern="1200" dirty="0" err="1">
+                <a:solidFill>
+                  <a:schemeClr val="tx1"/>
+                </a:solidFill>
+                <a:effectLst/>
+                <a:latin typeface="+mn-lt"/>
+                <a:ea typeface="+mn-ea"/>
+                <a:cs typeface="+mn-cs"/>
+              </a:rPr>
+              <a:t>spread</a:t>
+            </a:r>
+            <a:r>
+              <a:rPr lang="ko-KR" altLang="ko-KR" sz="1200" b="0" i="0" kern="1200" dirty="0">
+                <a:solidFill>
+                  <a:schemeClr val="tx1"/>
+                </a:solidFill>
+                <a:effectLst/>
+                <a:latin typeface="+mn-lt"/>
+                <a:ea typeface="+mn-ea"/>
+                <a:cs typeface="+mn-cs"/>
+              </a:rPr>
+              <a:t> </a:t>
+            </a:r>
+            <a:r>
+              <a:rPr lang="ko-KR" altLang="ko-KR" sz="1200" b="0" i="0" kern="1200" dirty="0" err="1">
+                <a:solidFill>
+                  <a:schemeClr val="tx1"/>
+                </a:solidFill>
+                <a:effectLst/>
+                <a:latin typeface="+mn-lt"/>
+                <a:ea typeface="+mn-ea"/>
+                <a:cs typeface="+mn-cs"/>
+              </a:rPr>
+              <a:t>went</a:t>
+            </a:r>
+            <a:r>
+              <a:rPr lang="ko-KR" altLang="ko-KR" sz="1200" b="0" i="0" kern="1200" dirty="0">
+                <a:solidFill>
+                  <a:schemeClr val="tx1"/>
+                </a:solidFill>
+                <a:effectLst/>
+                <a:latin typeface="+mn-lt"/>
+                <a:ea typeface="+mn-ea"/>
+                <a:cs typeface="+mn-cs"/>
+              </a:rPr>
+              <a:t> </a:t>
+            </a:r>
+            <a:r>
+              <a:rPr lang="ko-KR" altLang="ko-KR" sz="1200" b="1" i="0" kern="1200" dirty="0">
+                <a:solidFill>
+                  <a:schemeClr val="tx1"/>
+                </a:solidFill>
+                <a:effectLst/>
+                <a:latin typeface="+mn-lt"/>
+                <a:ea typeface="+mn-ea"/>
+                <a:cs typeface="+mn-cs"/>
+              </a:rPr>
+              <a:t>−18.0 </a:t>
+            </a:r>
+            <a:r>
+              <a:rPr lang="ko-KR" altLang="ko-KR" sz="1200" b="1" i="0" kern="1200" dirty="0" err="1">
+                <a:solidFill>
+                  <a:schemeClr val="tx1"/>
+                </a:solidFill>
+                <a:effectLst/>
+                <a:latin typeface="+mn-lt"/>
+                <a:ea typeface="+mn-ea"/>
+                <a:cs typeface="+mn-cs"/>
+              </a:rPr>
+              <a:t>pp</a:t>
+            </a:r>
+            <a:r>
+              <a:rPr lang="ko-KR" altLang="ko-KR" sz="1200" b="0" i="0" kern="1200" dirty="0">
+                <a:solidFill>
+                  <a:schemeClr val="tx1"/>
+                </a:solidFill>
+                <a:effectLst/>
+                <a:latin typeface="+mn-lt"/>
+                <a:ea typeface="+mn-ea"/>
+                <a:cs typeface="+mn-cs"/>
+              </a:rPr>
+              <a:t> </a:t>
+            </a:r>
+            <a:r>
+              <a:rPr lang="ko-KR" altLang="ko-KR" sz="1200" b="0" i="0" kern="1200" dirty="0" err="1">
+                <a:solidFill>
+                  <a:schemeClr val="tx1"/>
+                </a:solidFill>
+                <a:effectLst/>
+                <a:latin typeface="+mn-lt"/>
+                <a:ea typeface="+mn-ea"/>
+                <a:cs typeface="+mn-cs"/>
+              </a:rPr>
+              <a:t>below</a:t>
+            </a:r>
+            <a:r>
+              <a:rPr lang="ko-KR" altLang="ko-KR" sz="1200" b="0" i="0" kern="1200" dirty="0">
+                <a:solidFill>
+                  <a:schemeClr val="tx1"/>
+                </a:solidFill>
+                <a:effectLst/>
+                <a:latin typeface="+mn-lt"/>
+                <a:ea typeface="+mn-ea"/>
+                <a:cs typeface="+mn-cs"/>
+              </a:rPr>
+              <a:t> </a:t>
+            </a:r>
+            <a:r>
+              <a:rPr lang="ko-KR" altLang="ko-KR" sz="1200" b="0" i="0" kern="1200" dirty="0" err="1">
+                <a:solidFill>
+                  <a:schemeClr val="tx1"/>
+                </a:solidFill>
+                <a:effectLst/>
+                <a:latin typeface="+mn-lt"/>
+                <a:ea typeface="+mn-ea"/>
+                <a:cs typeface="+mn-cs"/>
+              </a:rPr>
+              <a:t>normal</a:t>
+            </a:r>
+            <a:endParaRPr lang="ko-KR" altLang="ko-KR" sz="1200" b="0" i="0" kern="1200" dirty="0">
+              <a:solidFill>
+                <a:schemeClr val="tx1"/>
+              </a:solidFill>
+              <a:effectLst/>
+              <a:latin typeface="+mn-lt"/>
+              <a:ea typeface="+mn-ea"/>
+              <a:cs typeface="+mn-cs"/>
+            </a:endParaRPr>
+          </a:p>
+          <a:p>
+            <a:r>
+              <a:rPr lang="ko-KR" altLang="ko-KR" sz="1200" b="0" i="0" kern="1200" dirty="0">
+                <a:solidFill>
+                  <a:schemeClr val="tx1"/>
+                </a:solidFill>
+                <a:effectLst/>
+                <a:latin typeface="+mn-lt"/>
+                <a:ea typeface="+mn-ea"/>
+                <a:cs typeface="+mn-cs"/>
+              </a:rPr>
+              <a:t>The </a:t>
+            </a:r>
+            <a:r>
+              <a:rPr lang="ko-KR" altLang="ko-KR" sz="1200" b="0" i="0" kern="1200" dirty="0" err="1">
+                <a:solidFill>
+                  <a:schemeClr val="tx1"/>
+                </a:solidFill>
+                <a:effectLst/>
+                <a:latin typeface="+mn-lt"/>
+                <a:ea typeface="+mn-ea"/>
+                <a:cs typeface="+mn-cs"/>
+              </a:rPr>
+              <a:t>swing</a:t>
+            </a:r>
+            <a:r>
+              <a:rPr lang="ko-KR" altLang="ko-KR" sz="1200" b="0" i="0" kern="1200" dirty="0">
+                <a:solidFill>
+                  <a:schemeClr val="tx1"/>
+                </a:solidFill>
+                <a:effectLst/>
+                <a:latin typeface="+mn-lt"/>
+                <a:ea typeface="+mn-ea"/>
+                <a:cs typeface="+mn-cs"/>
+              </a:rPr>
+              <a:t> </a:t>
+            </a:r>
+            <a:r>
+              <a:rPr lang="ko-KR" altLang="ko-KR" sz="1200" b="0" i="0" kern="1200" dirty="0" err="1">
+                <a:solidFill>
+                  <a:schemeClr val="tx1"/>
+                </a:solidFill>
+                <a:effectLst/>
+                <a:latin typeface="+mn-lt"/>
+                <a:ea typeface="+mn-ea"/>
+                <a:cs typeface="+mn-cs"/>
+              </a:rPr>
+              <a:t>is</a:t>
+            </a:r>
+            <a:r>
+              <a:rPr lang="ko-KR" altLang="ko-KR" sz="1200" b="0" i="0" kern="1200" dirty="0">
+                <a:solidFill>
+                  <a:schemeClr val="tx1"/>
+                </a:solidFill>
+                <a:effectLst/>
+                <a:latin typeface="+mn-lt"/>
+                <a:ea typeface="+mn-ea"/>
+                <a:cs typeface="+mn-cs"/>
+              </a:rPr>
+              <a:t> </a:t>
+            </a:r>
+            <a:r>
+              <a:rPr lang="ko-KR" altLang="ko-KR" sz="1200" b="0" i="0" kern="1200" dirty="0" err="1">
+                <a:solidFill>
+                  <a:schemeClr val="tx1"/>
+                </a:solidFill>
+                <a:effectLst/>
+                <a:latin typeface="+mn-lt"/>
+                <a:ea typeface="+mn-ea"/>
+                <a:cs typeface="+mn-cs"/>
+              </a:rPr>
+              <a:t>the</a:t>
+            </a:r>
+            <a:r>
+              <a:rPr lang="ko-KR" altLang="ko-KR" sz="1200" b="0" i="0" kern="1200" dirty="0">
+                <a:solidFill>
+                  <a:schemeClr val="tx1"/>
+                </a:solidFill>
+                <a:effectLst/>
+                <a:latin typeface="+mn-lt"/>
+                <a:ea typeface="+mn-ea"/>
+                <a:cs typeface="+mn-cs"/>
+              </a:rPr>
+              <a:t> </a:t>
+            </a:r>
+            <a:r>
+              <a:rPr lang="ko-KR" altLang="ko-KR" sz="1200" b="0" i="0" kern="1200" dirty="0" err="1">
+                <a:solidFill>
+                  <a:schemeClr val="tx1"/>
+                </a:solidFill>
+                <a:effectLst/>
+                <a:latin typeface="+mn-lt"/>
+                <a:ea typeface="+mn-ea"/>
+                <a:cs typeface="+mn-cs"/>
+              </a:rPr>
+              <a:t>gap</a:t>
+            </a:r>
+            <a:r>
+              <a:rPr lang="ko-KR" altLang="ko-KR" sz="1200" b="0" i="0" kern="1200" dirty="0">
+                <a:solidFill>
+                  <a:schemeClr val="tx1"/>
+                </a:solidFill>
+                <a:effectLst/>
+                <a:latin typeface="+mn-lt"/>
+                <a:ea typeface="+mn-ea"/>
+                <a:cs typeface="+mn-cs"/>
+              </a:rPr>
+              <a:t> </a:t>
+            </a:r>
+            <a:r>
+              <a:rPr lang="ko-KR" altLang="ko-KR" sz="1200" b="0" i="0" kern="1200" dirty="0" err="1">
+                <a:solidFill>
+                  <a:schemeClr val="tx1"/>
+                </a:solidFill>
+                <a:effectLst/>
+                <a:latin typeface="+mn-lt"/>
+                <a:ea typeface="+mn-ea"/>
+                <a:cs typeface="+mn-cs"/>
+              </a:rPr>
+              <a:t>between</a:t>
+            </a:r>
+            <a:r>
+              <a:rPr lang="ko-KR" altLang="ko-KR" sz="1200" b="0" i="0" kern="1200" dirty="0">
+                <a:solidFill>
+                  <a:schemeClr val="tx1"/>
+                </a:solidFill>
+                <a:effectLst/>
+                <a:latin typeface="+mn-lt"/>
+                <a:ea typeface="+mn-ea"/>
+                <a:cs typeface="+mn-cs"/>
+              </a:rPr>
+              <a:t> </a:t>
+            </a:r>
+            <a:r>
+              <a:rPr lang="ko-KR" altLang="ko-KR" sz="1200" b="0" i="0" kern="1200" dirty="0" err="1">
+                <a:solidFill>
+                  <a:schemeClr val="tx1"/>
+                </a:solidFill>
+                <a:effectLst/>
+                <a:latin typeface="+mn-lt"/>
+                <a:ea typeface="+mn-ea"/>
+                <a:cs typeface="+mn-cs"/>
+              </a:rPr>
+              <a:t>them</a:t>
+            </a:r>
+            <a:r>
+              <a:rPr lang="ko-KR" altLang="ko-KR" sz="1200" b="0" i="0" kern="1200" dirty="0">
+                <a:solidFill>
+                  <a:schemeClr val="tx1"/>
+                </a:solidFill>
+                <a:effectLst/>
+                <a:latin typeface="+mn-lt"/>
+                <a:ea typeface="+mn-ea"/>
+                <a:cs typeface="+mn-cs"/>
+              </a:rPr>
+              <a:t>:</a:t>
+            </a:r>
+          </a:p>
+          <a:p>
+            <a:r>
+              <a:rPr lang="ko-KR" altLang="ko-KR" sz="1200" b="0" i="0" kern="1200" dirty="0">
+                <a:solidFill>
+                  <a:schemeClr val="tx1"/>
+                </a:solidFill>
+                <a:effectLst/>
+                <a:latin typeface="+mn-lt"/>
+                <a:ea typeface="+mn-ea"/>
+                <a:cs typeface="+mn-cs"/>
+              </a:rPr>
+              <a:t>8.9 − (−18.0) = </a:t>
+            </a:r>
+            <a:r>
+              <a:rPr lang="ko-KR" altLang="ko-KR" sz="1200" b="1" i="0" kern="1200" dirty="0">
+                <a:solidFill>
+                  <a:schemeClr val="tx1"/>
+                </a:solidFill>
+                <a:effectLst/>
+                <a:latin typeface="+mn-lt"/>
+                <a:ea typeface="+mn-ea"/>
+                <a:cs typeface="+mn-cs"/>
+              </a:rPr>
+              <a:t>26.9 </a:t>
+            </a:r>
+            <a:r>
+              <a:rPr lang="ko-KR" altLang="ko-KR" sz="1200" b="1" i="0" kern="1200" dirty="0" err="1">
+                <a:solidFill>
+                  <a:schemeClr val="tx1"/>
+                </a:solidFill>
+                <a:effectLst/>
+                <a:latin typeface="+mn-lt"/>
+                <a:ea typeface="+mn-ea"/>
+                <a:cs typeface="+mn-cs"/>
+              </a:rPr>
+              <a:t>pp</a:t>
+            </a:r>
+            <a:endParaRPr lang="ko-KR" altLang="ko-KR" sz="1200" b="0" i="0" kern="1200" dirty="0">
+              <a:solidFill>
+                <a:schemeClr val="tx1"/>
+              </a:solidFill>
+              <a:effectLst/>
+              <a:latin typeface="+mn-lt"/>
+              <a:ea typeface="+mn-ea"/>
+              <a:cs typeface="+mn-cs"/>
+            </a:endParaRPr>
+          </a:p>
+          <a:p>
+            <a:r>
+              <a:rPr lang="ko-KR" altLang="ko-KR" sz="1200" b="0" i="0" kern="1200" dirty="0" err="1">
+                <a:solidFill>
+                  <a:schemeClr val="tx1"/>
+                </a:solidFill>
+                <a:effectLst/>
+                <a:latin typeface="+mn-lt"/>
+                <a:ea typeface="+mn-ea"/>
+                <a:cs typeface="+mn-cs"/>
+              </a:rPr>
+              <a:t>It</a:t>
+            </a:r>
+            <a:r>
+              <a:rPr lang="ko-KR" altLang="ko-KR" sz="1200" b="0" i="0" kern="1200" dirty="0">
+                <a:solidFill>
+                  <a:schemeClr val="tx1"/>
+                </a:solidFill>
+                <a:effectLst/>
+                <a:latin typeface="+mn-lt"/>
+                <a:ea typeface="+mn-ea"/>
+                <a:cs typeface="+mn-cs"/>
+              </a:rPr>
+              <a:t> </a:t>
+            </a:r>
+            <a:r>
+              <a:rPr lang="ko-KR" altLang="ko-KR" sz="1200" b="0" i="0" kern="1200" dirty="0" err="1">
+                <a:solidFill>
+                  <a:schemeClr val="tx1"/>
+                </a:solidFill>
+                <a:effectLst/>
+                <a:latin typeface="+mn-lt"/>
+                <a:ea typeface="+mn-ea"/>
+                <a:cs typeface="+mn-cs"/>
+              </a:rPr>
+              <a:t>answers</a:t>
+            </a:r>
+            <a:r>
+              <a:rPr lang="ko-KR" altLang="ko-KR" sz="1200" b="0" i="0" kern="1200" dirty="0">
+                <a:solidFill>
+                  <a:schemeClr val="tx1"/>
+                </a:solidFill>
+                <a:effectLst/>
+                <a:latin typeface="+mn-lt"/>
+                <a:ea typeface="+mn-ea"/>
+                <a:cs typeface="+mn-cs"/>
+              </a:rPr>
+              <a:t> </a:t>
+            </a:r>
+            <a:r>
+              <a:rPr lang="ko-KR" altLang="ko-KR" sz="1200" b="0" i="0" kern="1200" dirty="0" err="1">
+                <a:solidFill>
+                  <a:schemeClr val="tx1"/>
+                </a:solidFill>
+                <a:effectLst/>
+                <a:latin typeface="+mn-lt"/>
+                <a:ea typeface="+mn-ea"/>
+                <a:cs typeface="+mn-cs"/>
+              </a:rPr>
+              <a:t>the</a:t>
+            </a:r>
+            <a:r>
+              <a:rPr lang="ko-KR" altLang="ko-KR" sz="1200" b="0" i="0" kern="1200" dirty="0">
+                <a:solidFill>
+                  <a:schemeClr val="tx1"/>
+                </a:solidFill>
+                <a:effectLst/>
+                <a:latin typeface="+mn-lt"/>
+                <a:ea typeface="+mn-ea"/>
+                <a:cs typeface="+mn-cs"/>
+              </a:rPr>
+              <a:t> </a:t>
+            </a:r>
+            <a:r>
+              <a:rPr lang="ko-KR" altLang="ko-KR" sz="1200" b="0" i="0" kern="1200" dirty="0" err="1">
+                <a:solidFill>
+                  <a:schemeClr val="tx1"/>
+                </a:solidFill>
+                <a:effectLst/>
+                <a:latin typeface="+mn-lt"/>
+                <a:ea typeface="+mn-ea"/>
+                <a:cs typeface="+mn-cs"/>
+              </a:rPr>
+              <a:t>question</a:t>
+            </a:r>
+            <a:r>
+              <a:rPr lang="ko-KR" altLang="ko-KR" sz="1200" b="0" i="0" kern="1200" dirty="0">
+                <a:solidFill>
+                  <a:schemeClr val="tx1"/>
+                </a:solidFill>
+                <a:effectLst/>
+                <a:latin typeface="+mn-lt"/>
+                <a:ea typeface="+mn-ea"/>
+                <a:cs typeface="+mn-cs"/>
+              </a:rPr>
+              <a:t>: </a:t>
+            </a:r>
+            <a:r>
+              <a:rPr lang="ko-KR" altLang="ko-KR" sz="1200" b="0" i="1" kern="1200" dirty="0">
+                <a:solidFill>
+                  <a:schemeClr val="tx1"/>
+                </a:solidFill>
+                <a:effectLst/>
+                <a:latin typeface="+mn-lt"/>
+                <a:ea typeface="+mn-ea"/>
+                <a:cs typeface="+mn-cs"/>
+              </a:rPr>
+              <a:t>"</a:t>
+            </a:r>
+            <a:r>
+              <a:rPr lang="ko-KR" altLang="ko-KR" sz="1200" b="0" i="1" kern="1200" dirty="0" err="1">
+                <a:solidFill>
+                  <a:schemeClr val="tx1"/>
+                </a:solidFill>
+                <a:effectLst/>
+                <a:latin typeface="+mn-lt"/>
+                <a:ea typeface="+mn-ea"/>
+                <a:cs typeface="+mn-cs"/>
+              </a:rPr>
+              <a:t>How</a:t>
+            </a:r>
+            <a:r>
+              <a:rPr lang="ko-KR" altLang="ko-KR" sz="1200" b="0" i="1" kern="1200" dirty="0">
+                <a:solidFill>
+                  <a:schemeClr val="tx1"/>
+                </a:solidFill>
+                <a:effectLst/>
+                <a:latin typeface="+mn-lt"/>
+                <a:ea typeface="+mn-ea"/>
+                <a:cs typeface="+mn-cs"/>
+              </a:rPr>
+              <a:t> </a:t>
+            </a:r>
+            <a:r>
+              <a:rPr lang="ko-KR" altLang="ko-KR" sz="1200" b="0" i="1" kern="1200" dirty="0" err="1">
+                <a:solidFill>
+                  <a:schemeClr val="tx1"/>
+                </a:solidFill>
+                <a:effectLst/>
+                <a:latin typeface="+mn-lt"/>
+                <a:ea typeface="+mn-ea"/>
+                <a:cs typeface="+mn-cs"/>
+              </a:rPr>
+              <a:t>different</a:t>
+            </a:r>
+            <a:r>
+              <a:rPr lang="ko-KR" altLang="ko-KR" sz="1200" b="0" i="1" kern="1200" dirty="0">
+                <a:solidFill>
+                  <a:schemeClr val="tx1"/>
+                </a:solidFill>
+                <a:effectLst/>
+                <a:latin typeface="+mn-lt"/>
+                <a:ea typeface="+mn-ea"/>
+                <a:cs typeface="+mn-cs"/>
+              </a:rPr>
+              <a:t> </a:t>
+            </a:r>
+            <a:r>
+              <a:rPr lang="ko-KR" altLang="ko-KR" sz="1200" b="0" i="1" kern="1200" dirty="0" err="1">
+                <a:solidFill>
+                  <a:schemeClr val="tx1"/>
+                </a:solidFill>
+                <a:effectLst/>
+                <a:latin typeface="+mn-lt"/>
+                <a:ea typeface="+mn-ea"/>
+                <a:cs typeface="+mn-cs"/>
+              </a:rPr>
+              <a:t>is</a:t>
+            </a:r>
+            <a:r>
+              <a:rPr lang="ko-KR" altLang="ko-KR" sz="1200" b="0" i="1" kern="1200" dirty="0">
+                <a:solidFill>
+                  <a:schemeClr val="tx1"/>
+                </a:solidFill>
+                <a:effectLst/>
+                <a:latin typeface="+mn-lt"/>
+                <a:ea typeface="+mn-ea"/>
+                <a:cs typeface="+mn-cs"/>
+              </a:rPr>
+              <a:t> </a:t>
+            </a:r>
+            <a:r>
+              <a:rPr lang="ko-KR" altLang="ko-KR" sz="1200" b="0" i="1" kern="1200" dirty="0" err="1">
+                <a:solidFill>
+                  <a:schemeClr val="tx1"/>
+                </a:solidFill>
+                <a:effectLst/>
+                <a:latin typeface="+mn-lt"/>
+                <a:ea typeface="+mn-ea"/>
+                <a:cs typeface="+mn-cs"/>
+              </a:rPr>
+              <a:t>the</a:t>
+            </a:r>
+            <a:r>
+              <a:rPr lang="ko-KR" altLang="ko-KR" sz="1200" b="0" i="1" kern="1200" dirty="0">
+                <a:solidFill>
+                  <a:schemeClr val="tx1"/>
+                </a:solidFill>
+                <a:effectLst/>
+                <a:latin typeface="+mn-lt"/>
+                <a:ea typeface="+mn-ea"/>
+                <a:cs typeface="+mn-cs"/>
+              </a:rPr>
+              <a:t> </a:t>
+            </a:r>
+            <a:r>
+              <a:rPr lang="ko-KR" altLang="ko-KR" sz="1200" b="0" i="1" kern="1200" dirty="0" err="1">
+                <a:solidFill>
+                  <a:schemeClr val="tx1"/>
+                </a:solidFill>
+                <a:effectLst/>
+                <a:latin typeface="+mn-lt"/>
+                <a:ea typeface="+mn-ea"/>
+                <a:cs typeface="+mn-cs"/>
+              </a:rPr>
+              <a:t>Treasury</a:t>
+            </a:r>
+            <a:r>
+              <a:rPr lang="ko-KR" altLang="ko-KR" sz="1200" b="0" i="1" kern="1200" dirty="0">
+                <a:solidFill>
+                  <a:schemeClr val="tx1"/>
+                </a:solidFill>
+                <a:effectLst/>
+                <a:latin typeface="+mn-lt"/>
+                <a:ea typeface="+mn-ea"/>
+                <a:cs typeface="+mn-cs"/>
+              </a:rPr>
+              <a:t> </a:t>
+            </a:r>
+            <a:r>
+              <a:rPr lang="ko-KR" altLang="ko-KR" sz="1200" b="0" i="1" kern="1200" dirty="0" err="1">
+                <a:solidFill>
+                  <a:schemeClr val="tx1"/>
+                </a:solidFill>
+                <a:effectLst/>
+                <a:latin typeface="+mn-lt"/>
+                <a:ea typeface="+mn-ea"/>
+                <a:cs typeface="+mn-cs"/>
+              </a:rPr>
+              <a:t>market</a:t>
+            </a:r>
+            <a:r>
+              <a:rPr lang="ko-KR" altLang="ko-KR" sz="1200" b="0" i="1" kern="1200" dirty="0">
+                <a:solidFill>
+                  <a:schemeClr val="tx1"/>
+                </a:solidFill>
+                <a:effectLst/>
+                <a:latin typeface="+mn-lt"/>
+                <a:ea typeface="+mn-ea"/>
+                <a:cs typeface="+mn-cs"/>
+              </a:rPr>
+              <a:t> </a:t>
+            </a:r>
+            <a:r>
+              <a:rPr lang="ko-KR" altLang="ko-KR" sz="1200" b="0" i="1" kern="1200" dirty="0" err="1">
+                <a:solidFill>
+                  <a:schemeClr val="tx1"/>
+                </a:solidFill>
+                <a:effectLst/>
+                <a:latin typeface="+mn-lt"/>
+                <a:ea typeface="+mn-ea"/>
+                <a:cs typeface="+mn-cs"/>
+              </a:rPr>
+              <a:t>impact</a:t>
+            </a:r>
+            <a:r>
+              <a:rPr lang="ko-KR" altLang="ko-KR" sz="1200" b="0" i="1" kern="1200" dirty="0">
+                <a:solidFill>
+                  <a:schemeClr val="tx1"/>
+                </a:solidFill>
+                <a:effectLst/>
+                <a:latin typeface="+mn-lt"/>
+                <a:ea typeface="+mn-ea"/>
+                <a:cs typeface="+mn-cs"/>
+              </a:rPr>
+              <a:t> </a:t>
+            </a:r>
+            <a:r>
+              <a:rPr lang="ko-KR" altLang="ko-KR" sz="1200" b="0" i="1" kern="1200" dirty="0" err="1">
+                <a:solidFill>
+                  <a:schemeClr val="tx1"/>
+                </a:solidFill>
+                <a:effectLst/>
+                <a:latin typeface="+mn-lt"/>
+                <a:ea typeface="+mn-ea"/>
+                <a:cs typeface="+mn-cs"/>
+              </a:rPr>
+              <a:t>depending</a:t>
+            </a:r>
+            <a:r>
+              <a:rPr lang="ko-KR" altLang="ko-KR" sz="1200" b="0" i="1" kern="1200" dirty="0">
+                <a:solidFill>
+                  <a:schemeClr val="tx1"/>
+                </a:solidFill>
+                <a:effectLst/>
+                <a:latin typeface="+mn-lt"/>
+                <a:ea typeface="+mn-ea"/>
+                <a:cs typeface="+mn-cs"/>
+              </a:rPr>
+              <a:t> </a:t>
+            </a:r>
+            <a:r>
+              <a:rPr lang="ko-KR" altLang="ko-KR" sz="1200" b="0" i="1" kern="1200" dirty="0" err="1">
+                <a:solidFill>
+                  <a:schemeClr val="tx1"/>
+                </a:solidFill>
+                <a:effectLst/>
+                <a:latin typeface="+mn-lt"/>
+                <a:ea typeface="+mn-ea"/>
+                <a:cs typeface="+mn-cs"/>
+              </a:rPr>
+              <a:t>on</a:t>
+            </a:r>
+            <a:r>
+              <a:rPr lang="ko-KR" altLang="ko-KR" sz="1200" b="0" i="1" kern="1200" dirty="0">
+                <a:solidFill>
+                  <a:schemeClr val="tx1"/>
+                </a:solidFill>
+                <a:effectLst/>
+                <a:latin typeface="+mn-lt"/>
+                <a:ea typeface="+mn-ea"/>
+                <a:cs typeface="+mn-cs"/>
+              </a:rPr>
+              <a:t> </a:t>
+            </a:r>
+            <a:r>
+              <a:rPr lang="ko-KR" altLang="ko-KR" sz="1200" b="0" i="1" kern="1200" dirty="0" err="1">
+                <a:solidFill>
+                  <a:schemeClr val="tx1"/>
+                </a:solidFill>
+                <a:effectLst/>
+                <a:latin typeface="+mn-lt"/>
+                <a:ea typeface="+mn-ea"/>
+                <a:cs typeface="+mn-cs"/>
+              </a:rPr>
+              <a:t>whether</a:t>
+            </a:r>
+            <a:r>
+              <a:rPr lang="ko-KR" altLang="ko-KR" sz="1200" b="0" i="1" kern="1200" dirty="0">
+                <a:solidFill>
+                  <a:schemeClr val="tx1"/>
+                </a:solidFill>
+                <a:effectLst/>
+                <a:latin typeface="+mn-lt"/>
+                <a:ea typeface="+mn-ea"/>
+                <a:cs typeface="+mn-cs"/>
+              </a:rPr>
+              <a:t> </a:t>
+            </a:r>
+            <a:r>
+              <a:rPr lang="ko-KR" altLang="ko-KR" sz="1200" b="0" i="1" kern="1200" dirty="0" err="1">
+                <a:solidFill>
+                  <a:schemeClr val="tx1"/>
+                </a:solidFill>
+                <a:effectLst/>
+                <a:latin typeface="+mn-lt"/>
+                <a:ea typeface="+mn-ea"/>
+                <a:cs typeface="+mn-cs"/>
+              </a:rPr>
+              <a:t>the</a:t>
+            </a:r>
+            <a:r>
+              <a:rPr lang="ko-KR" altLang="ko-KR" sz="1200" b="0" i="1" kern="1200" dirty="0">
+                <a:solidFill>
+                  <a:schemeClr val="tx1"/>
+                </a:solidFill>
+                <a:effectLst/>
+                <a:latin typeface="+mn-lt"/>
+                <a:ea typeface="+mn-ea"/>
+                <a:cs typeface="+mn-cs"/>
+              </a:rPr>
+              <a:t> </a:t>
+            </a:r>
+            <a:r>
+              <a:rPr lang="ko-KR" altLang="ko-KR" sz="1200" b="0" i="1" kern="1200" dirty="0" err="1">
+                <a:solidFill>
+                  <a:schemeClr val="tx1"/>
+                </a:solidFill>
+                <a:effectLst/>
+                <a:latin typeface="+mn-lt"/>
+                <a:ea typeface="+mn-ea"/>
+                <a:cs typeface="+mn-cs"/>
+              </a:rPr>
+              <a:t>buffer</a:t>
+            </a:r>
+            <a:r>
+              <a:rPr lang="ko-KR" altLang="ko-KR" sz="1200" b="0" i="1" kern="1200" dirty="0">
+                <a:solidFill>
+                  <a:schemeClr val="tx1"/>
+                </a:solidFill>
+                <a:effectLst/>
+                <a:latin typeface="+mn-lt"/>
+                <a:ea typeface="+mn-ea"/>
+                <a:cs typeface="+mn-cs"/>
+              </a:rPr>
+              <a:t> </a:t>
+            </a:r>
+            <a:r>
+              <a:rPr lang="ko-KR" altLang="ko-KR" sz="1200" b="0" i="1" kern="1200" dirty="0" err="1">
+                <a:solidFill>
+                  <a:schemeClr val="tx1"/>
+                </a:solidFill>
+                <a:effectLst/>
+                <a:latin typeface="+mn-lt"/>
+                <a:ea typeface="+mn-ea"/>
+                <a:cs typeface="+mn-cs"/>
+              </a:rPr>
+              <a:t>is</a:t>
+            </a:r>
+            <a:r>
+              <a:rPr lang="ko-KR" altLang="ko-KR" sz="1200" b="0" i="1" kern="1200" dirty="0">
+                <a:solidFill>
+                  <a:schemeClr val="tx1"/>
+                </a:solidFill>
+                <a:effectLst/>
+                <a:latin typeface="+mn-lt"/>
+                <a:ea typeface="+mn-ea"/>
+                <a:cs typeface="+mn-cs"/>
+              </a:rPr>
+              <a:t> </a:t>
+            </a:r>
+            <a:r>
+              <a:rPr lang="ko-KR" altLang="ko-KR" sz="1200" b="0" i="1" kern="1200" dirty="0" err="1">
+                <a:solidFill>
+                  <a:schemeClr val="tx1"/>
+                </a:solidFill>
+                <a:effectLst/>
+                <a:latin typeface="+mn-lt"/>
+                <a:ea typeface="+mn-ea"/>
+                <a:cs typeface="+mn-cs"/>
+              </a:rPr>
+              <a:t>low</a:t>
+            </a:r>
+            <a:r>
+              <a:rPr lang="ko-KR" altLang="ko-KR" sz="1200" b="0" i="1" kern="1200" dirty="0">
+                <a:solidFill>
+                  <a:schemeClr val="tx1"/>
+                </a:solidFill>
+                <a:effectLst/>
+                <a:latin typeface="+mn-lt"/>
+                <a:ea typeface="+mn-ea"/>
+                <a:cs typeface="+mn-cs"/>
+              </a:rPr>
+              <a:t> </a:t>
+            </a:r>
+            <a:r>
+              <a:rPr lang="ko-KR" altLang="ko-KR" sz="1200" b="0" i="1" kern="1200" dirty="0" err="1">
+                <a:solidFill>
+                  <a:schemeClr val="tx1"/>
+                </a:solidFill>
+                <a:effectLst/>
+                <a:latin typeface="+mn-lt"/>
+                <a:ea typeface="+mn-ea"/>
+                <a:cs typeface="+mn-cs"/>
+              </a:rPr>
+              <a:t>or</a:t>
+            </a:r>
+            <a:r>
+              <a:rPr lang="ko-KR" altLang="ko-KR" sz="1200" b="0" i="1" kern="1200" dirty="0">
+                <a:solidFill>
+                  <a:schemeClr val="tx1"/>
+                </a:solidFill>
+                <a:effectLst/>
+                <a:latin typeface="+mn-lt"/>
+                <a:ea typeface="+mn-ea"/>
+                <a:cs typeface="+mn-cs"/>
+              </a:rPr>
+              <a:t> </a:t>
+            </a:r>
+            <a:r>
+              <a:rPr lang="ko-KR" altLang="ko-KR" sz="1200" b="0" i="1" kern="1200" dirty="0" err="1">
+                <a:solidFill>
+                  <a:schemeClr val="tx1"/>
+                </a:solidFill>
+                <a:effectLst/>
+                <a:latin typeface="+mn-lt"/>
+                <a:ea typeface="+mn-ea"/>
+                <a:cs typeface="+mn-cs"/>
+              </a:rPr>
+              <a:t>high</a:t>
+            </a:r>
+            <a:r>
+              <a:rPr lang="ko-KR" altLang="ko-KR" sz="1200" b="0" i="1" kern="1200" dirty="0">
+                <a:solidFill>
+                  <a:schemeClr val="tx1"/>
+                </a:solidFill>
+                <a:effectLst/>
+                <a:latin typeface="+mn-lt"/>
+                <a:ea typeface="+mn-ea"/>
+                <a:cs typeface="+mn-cs"/>
+              </a:rPr>
+              <a:t>?"</a:t>
+            </a:r>
+            <a:r>
+              <a:rPr lang="ko-KR" altLang="ko-KR" sz="1200" b="0" i="0" kern="1200" dirty="0">
+                <a:solidFill>
+                  <a:schemeClr val="tx1"/>
+                </a:solidFill>
+                <a:effectLst/>
+                <a:latin typeface="+mn-lt"/>
+                <a:ea typeface="+mn-ea"/>
+                <a:cs typeface="+mn-cs"/>
+              </a:rPr>
+              <a:t> The </a:t>
+            </a:r>
+            <a:r>
+              <a:rPr lang="ko-KR" altLang="ko-KR" sz="1200" b="0" i="0" kern="1200" dirty="0" err="1">
+                <a:solidFill>
+                  <a:schemeClr val="tx1"/>
+                </a:solidFill>
+                <a:effectLst/>
+                <a:latin typeface="+mn-lt"/>
+                <a:ea typeface="+mn-ea"/>
+                <a:cs typeface="+mn-cs"/>
+              </a:rPr>
+              <a:t>answer</a:t>
+            </a:r>
+            <a:r>
+              <a:rPr lang="ko-KR" altLang="ko-KR" sz="1200" b="0" i="0" kern="1200" dirty="0">
+                <a:solidFill>
+                  <a:schemeClr val="tx1"/>
+                </a:solidFill>
+                <a:effectLst/>
+                <a:latin typeface="+mn-lt"/>
+                <a:ea typeface="+mn-ea"/>
+                <a:cs typeface="+mn-cs"/>
+              </a:rPr>
+              <a:t> </a:t>
+            </a:r>
+            <a:r>
+              <a:rPr lang="ko-KR" altLang="ko-KR" sz="1200" b="0" i="0" kern="1200" dirty="0" err="1">
+                <a:solidFill>
+                  <a:schemeClr val="tx1"/>
+                </a:solidFill>
+                <a:effectLst/>
+                <a:latin typeface="+mn-lt"/>
+                <a:ea typeface="+mn-ea"/>
+                <a:cs typeface="+mn-cs"/>
+              </a:rPr>
+              <a:t>is</a:t>
+            </a:r>
+            <a:r>
+              <a:rPr lang="ko-KR" altLang="ko-KR" sz="1200" b="0" i="0" kern="1200" dirty="0">
+                <a:solidFill>
+                  <a:schemeClr val="tx1"/>
+                </a:solidFill>
+                <a:effectLst/>
+                <a:latin typeface="+mn-lt"/>
+                <a:ea typeface="+mn-ea"/>
+                <a:cs typeface="+mn-cs"/>
+              </a:rPr>
+              <a:t> 27 </a:t>
+            </a:r>
+            <a:r>
+              <a:rPr lang="ko-KR" altLang="ko-KR" sz="1200" b="0" i="0" kern="1200" dirty="0" err="1">
+                <a:solidFill>
+                  <a:schemeClr val="tx1"/>
+                </a:solidFill>
+                <a:effectLst/>
+                <a:latin typeface="+mn-lt"/>
+                <a:ea typeface="+mn-ea"/>
+                <a:cs typeface="+mn-cs"/>
+              </a:rPr>
+              <a:t>percentage</a:t>
+            </a:r>
+            <a:r>
+              <a:rPr lang="ko-KR" altLang="ko-KR" sz="1200" b="0" i="0" kern="1200" dirty="0">
+                <a:solidFill>
+                  <a:schemeClr val="tx1"/>
+                </a:solidFill>
+                <a:effectLst/>
+                <a:latin typeface="+mn-lt"/>
+                <a:ea typeface="+mn-ea"/>
+                <a:cs typeface="+mn-cs"/>
+              </a:rPr>
+              <a:t> </a:t>
+            </a:r>
+            <a:r>
+              <a:rPr lang="ko-KR" altLang="ko-KR" sz="1200" b="0" i="0" kern="1200" dirty="0" err="1">
+                <a:solidFill>
+                  <a:schemeClr val="tx1"/>
+                </a:solidFill>
+                <a:effectLst/>
+                <a:latin typeface="+mn-lt"/>
+                <a:ea typeface="+mn-ea"/>
+                <a:cs typeface="+mn-cs"/>
+              </a:rPr>
+              <a:t>points</a:t>
+            </a:r>
+            <a:r>
+              <a:rPr lang="ko-KR" altLang="ko-KR" sz="1200" b="0" i="0" kern="1200" dirty="0">
+                <a:solidFill>
+                  <a:schemeClr val="tx1"/>
+                </a:solidFill>
+                <a:effectLst/>
+                <a:latin typeface="+mn-lt"/>
+                <a:ea typeface="+mn-ea"/>
+                <a:cs typeface="+mn-cs"/>
+              </a:rPr>
+              <a:t> — </a:t>
+            </a:r>
+            <a:r>
+              <a:rPr lang="ko-KR" altLang="ko-KR" sz="1200" b="0" i="0" kern="1200" dirty="0" err="1">
+                <a:solidFill>
+                  <a:schemeClr val="tx1"/>
+                </a:solidFill>
+                <a:effectLst/>
+                <a:latin typeface="+mn-lt"/>
+                <a:ea typeface="+mn-ea"/>
+                <a:cs typeface="+mn-cs"/>
+              </a:rPr>
+              <a:t>which</a:t>
+            </a:r>
+            <a:r>
+              <a:rPr lang="ko-KR" altLang="ko-KR" sz="1200" b="0" i="0" kern="1200" dirty="0">
+                <a:solidFill>
+                  <a:schemeClr val="tx1"/>
+                </a:solidFill>
+                <a:effectLst/>
+                <a:latin typeface="+mn-lt"/>
+                <a:ea typeface="+mn-ea"/>
+                <a:cs typeface="+mn-cs"/>
+              </a:rPr>
+              <a:t> </a:t>
+            </a:r>
+            <a:r>
+              <a:rPr lang="ko-KR" altLang="ko-KR" sz="1200" b="0" i="0" kern="1200" dirty="0" err="1">
+                <a:solidFill>
+                  <a:schemeClr val="tx1"/>
+                </a:solidFill>
+                <a:effectLst/>
+                <a:latin typeface="+mn-lt"/>
+                <a:ea typeface="+mn-ea"/>
+                <a:cs typeface="+mn-cs"/>
+              </a:rPr>
+              <a:t>is</a:t>
+            </a:r>
+            <a:r>
+              <a:rPr lang="ko-KR" altLang="ko-KR" sz="1200" b="0" i="0" kern="1200" dirty="0">
+                <a:solidFill>
+                  <a:schemeClr val="tx1"/>
+                </a:solidFill>
+                <a:effectLst/>
+                <a:latin typeface="+mn-lt"/>
+                <a:ea typeface="+mn-ea"/>
+                <a:cs typeface="+mn-cs"/>
+              </a:rPr>
+              <a:t> </a:t>
+            </a:r>
+            <a:r>
+              <a:rPr lang="ko-KR" altLang="ko-KR" sz="1200" b="0" i="0" kern="1200" dirty="0" err="1">
+                <a:solidFill>
+                  <a:schemeClr val="tx1"/>
+                </a:solidFill>
+                <a:effectLst/>
+                <a:latin typeface="+mn-lt"/>
+                <a:ea typeface="+mn-ea"/>
+                <a:cs typeface="+mn-cs"/>
+              </a:rPr>
+              <a:t>a</a:t>
+            </a:r>
+            <a:r>
+              <a:rPr lang="ko-KR" altLang="ko-KR" sz="1200" b="0" i="0" kern="1200" dirty="0">
+                <a:solidFill>
+                  <a:schemeClr val="tx1"/>
+                </a:solidFill>
+                <a:effectLst/>
+                <a:latin typeface="+mn-lt"/>
+                <a:ea typeface="+mn-ea"/>
+                <a:cs typeface="+mn-cs"/>
+              </a:rPr>
+              <a:t> </a:t>
+            </a:r>
+            <a:r>
+              <a:rPr lang="ko-KR" altLang="ko-KR" sz="1200" b="0" i="0" kern="1200" dirty="0" err="1">
+                <a:solidFill>
+                  <a:schemeClr val="tx1"/>
+                </a:solidFill>
+                <a:effectLst/>
+                <a:latin typeface="+mn-lt"/>
+                <a:ea typeface="+mn-ea"/>
+                <a:cs typeface="+mn-cs"/>
+              </a:rPr>
+              <a:t>very</a:t>
+            </a:r>
+            <a:r>
+              <a:rPr lang="ko-KR" altLang="ko-KR" sz="1200" b="0" i="0" kern="1200" dirty="0">
+                <a:solidFill>
+                  <a:schemeClr val="tx1"/>
+                </a:solidFill>
+                <a:effectLst/>
+                <a:latin typeface="+mn-lt"/>
+                <a:ea typeface="+mn-ea"/>
+                <a:cs typeface="+mn-cs"/>
+              </a:rPr>
+              <a:t> </a:t>
+            </a:r>
+            <a:r>
+              <a:rPr lang="ko-KR" altLang="ko-KR" sz="1200" b="0" i="0" kern="1200" dirty="0" err="1">
+                <a:solidFill>
+                  <a:schemeClr val="tx1"/>
+                </a:solidFill>
+                <a:effectLst/>
+                <a:latin typeface="+mn-lt"/>
+                <a:ea typeface="+mn-ea"/>
+                <a:cs typeface="+mn-cs"/>
+              </a:rPr>
+              <a:t>large</a:t>
+            </a:r>
+            <a:r>
+              <a:rPr lang="ko-KR" altLang="ko-KR" sz="1200" b="0" i="0" kern="1200" dirty="0">
+                <a:solidFill>
+                  <a:schemeClr val="tx1"/>
+                </a:solidFill>
+                <a:effectLst/>
+                <a:latin typeface="+mn-lt"/>
+                <a:ea typeface="+mn-ea"/>
+                <a:cs typeface="+mn-cs"/>
+              </a:rPr>
+              <a:t> </a:t>
+            </a:r>
+            <a:r>
+              <a:rPr lang="ko-KR" altLang="ko-KR" sz="1200" b="0" i="0" kern="1200" dirty="0" err="1">
+                <a:solidFill>
+                  <a:schemeClr val="tx1"/>
+                </a:solidFill>
+                <a:effectLst/>
+                <a:latin typeface="+mn-lt"/>
+                <a:ea typeface="+mn-ea"/>
+                <a:cs typeface="+mn-cs"/>
+              </a:rPr>
+              <a:t>difference</a:t>
+            </a:r>
+            <a:r>
+              <a:rPr lang="ko-KR" altLang="ko-KR" sz="1200" b="0" i="0" kern="1200" dirty="0">
+                <a:solidFill>
+                  <a:schemeClr val="tx1"/>
+                </a:solidFill>
+                <a:effectLst/>
+                <a:latin typeface="+mn-lt"/>
+                <a:ea typeface="+mn-ea"/>
+                <a:cs typeface="+mn-cs"/>
+              </a:rPr>
+              <a:t> </a:t>
+            </a:r>
+            <a:r>
+              <a:rPr lang="ko-KR" altLang="ko-KR" sz="1200" b="0" i="0" kern="1200" dirty="0" err="1">
+                <a:solidFill>
+                  <a:schemeClr val="tx1"/>
+                </a:solidFill>
+                <a:effectLst/>
+                <a:latin typeface="+mn-lt"/>
+                <a:ea typeface="+mn-ea"/>
+                <a:cs typeface="+mn-cs"/>
+              </a:rPr>
+              <a:t>for</a:t>
+            </a:r>
+            <a:r>
+              <a:rPr lang="ko-KR" altLang="ko-KR" sz="1200" b="0" i="0" kern="1200" dirty="0">
+                <a:solidFill>
+                  <a:schemeClr val="tx1"/>
+                </a:solidFill>
+                <a:effectLst/>
+                <a:latin typeface="+mn-lt"/>
+                <a:ea typeface="+mn-ea"/>
+                <a:cs typeface="+mn-cs"/>
+              </a:rPr>
+              <a:t> </a:t>
+            </a:r>
+            <a:r>
+              <a:rPr lang="ko-KR" altLang="ko-KR" sz="1200" b="0" i="0" kern="1200" dirty="0" err="1">
+                <a:solidFill>
+                  <a:schemeClr val="tx1"/>
+                </a:solidFill>
+                <a:effectLst/>
+                <a:latin typeface="+mn-lt"/>
+                <a:ea typeface="+mn-ea"/>
+                <a:cs typeface="+mn-cs"/>
+              </a:rPr>
+              <a:t>a</a:t>
+            </a:r>
+            <a:r>
+              <a:rPr lang="ko-KR" altLang="ko-KR" sz="1200" b="0" i="0" kern="1200" dirty="0">
+                <a:solidFill>
+                  <a:schemeClr val="tx1"/>
+                </a:solidFill>
+                <a:effectLst/>
+                <a:latin typeface="+mn-lt"/>
+                <a:ea typeface="+mn-ea"/>
+                <a:cs typeface="+mn-cs"/>
+              </a:rPr>
+              <a:t> </a:t>
+            </a:r>
+            <a:r>
+              <a:rPr lang="ko-KR" altLang="ko-KR" sz="1200" b="0" i="0" kern="1200" dirty="0" err="1">
+                <a:solidFill>
+                  <a:schemeClr val="tx1"/>
+                </a:solidFill>
+                <a:effectLst/>
+                <a:latin typeface="+mn-lt"/>
+                <a:ea typeface="+mn-ea"/>
+                <a:cs typeface="+mn-cs"/>
+              </a:rPr>
+              <a:t>spread</a:t>
+            </a:r>
+            <a:r>
+              <a:rPr lang="ko-KR" altLang="ko-KR" sz="1200" b="0" i="0" kern="1200" dirty="0">
+                <a:solidFill>
+                  <a:schemeClr val="tx1"/>
+                </a:solidFill>
+                <a:effectLst/>
+                <a:latin typeface="+mn-lt"/>
+                <a:ea typeface="+mn-ea"/>
+                <a:cs typeface="+mn-cs"/>
+              </a:rPr>
+              <a:t> </a:t>
+            </a:r>
+            <a:r>
+              <a:rPr lang="ko-KR" altLang="ko-KR" sz="1200" b="0" i="0" kern="1200" dirty="0" err="1">
+                <a:solidFill>
+                  <a:schemeClr val="tx1"/>
+                </a:solidFill>
+                <a:effectLst/>
+                <a:latin typeface="+mn-lt"/>
+                <a:ea typeface="+mn-ea"/>
+                <a:cs typeface="+mn-cs"/>
+              </a:rPr>
+              <a:t>that</a:t>
+            </a:r>
+            <a:r>
+              <a:rPr lang="ko-KR" altLang="ko-KR" sz="1200" b="0" i="0" kern="1200" dirty="0">
+                <a:solidFill>
+                  <a:schemeClr val="tx1"/>
+                </a:solidFill>
+                <a:effectLst/>
+                <a:latin typeface="+mn-lt"/>
+                <a:ea typeface="+mn-ea"/>
+                <a:cs typeface="+mn-cs"/>
+              </a:rPr>
+              <a:t> </a:t>
+            </a:r>
+            <a:r>
+              <a:rPr lang="ko-KR" altLang="ko-KR" sz="1200" b="0" i="0" kern="1200" dirty="0" err="1">
+                <a:solidFill>
+                  <a:schemeClr val="tx1"/>
+                </a:solidFill>
+                <a:effectLst/>
+                <a:latin typeface="+mn-lt"/>
+                <a:ea typeface="+mn-ea"/>
+                <a:cs typeface="+mn-cs"/>
+              </a:rPr>
+              <a:t>normally</a:t>
+            </a:r>
+            <a:r>
+              <a:rPr lang="ko-KR" altLang="ko-KR" sz="1200" b="0" i="0" kern="1200" dirty="0">
+                <a:solidFill>
+                  <a:schemeClr val="tx1"/>
+                </a:solidFill>
+                <a:effectLst/>
+                <a:latin typeface="+mn-lt"/>
+                <a:ea typeface="+mn-ea"/>
+                <a:cs typeface="+mn-cs"/>
+              </a:rPr>
+              <a:t> </a:t>
+            </a:r>
+            <a:r>
+              <a:rPr lang="ko-KR" altLang="ko-KR" sz="1200" b="0" i="0" kern="1200" dirty="0" err="1">
+                <a:solidFill>
+                  <a:schemeClr val="tx1"/>
+                </a:solidFill>
+                <a:effectLst/>
+                <a:latin typeface="+mn-lt"/>
+                <a:ea typeface="+mn-ea"/>
+                <a:cs typeface="+mn-cs"/>
+              </a:rPr>
+              <a:t>moves</a:t>
+            </a:r>
+            <a:r>
+              <a:rPr lang="ko-KR" altLang="ko-KR" sz="1200" b="0" i="0" kern="1200" dirty="0">
+                <a:solidFill>
+                  <a:schemeClr val="tx1"/>
+                </a:solidFill>
+                <a:effectLst/>
+                <a:latin typeface="+mn-lt"/>
+                <a:ea typeface="+mn-ea"/>
+                <a:cs typeface="+mn-cs"/>
+              </a:rPr>
+              <a:t> </a:t>
+            </a:r>
+            <a:r>
+              <a:rPr lang="ko-KR" altLang="ko-KR" sz="1200" b="0" i="0" kern="1200" dirty="0" err="1">
+                <a:solidFill>
+                  <a:schemeClr val="tx1"/>
+                </a:solidFill>
+                <a:effectLst/>
+                <a:latin typeface="+mn-lt"/>
+                <a:ea typeface="+mn-ea"/>
+                <a:cs typeface="+mn-cs"/>
+              </a:rPr>
+              <a:t>in</a:t>
+            </a:r>
+            <a:r>
+              <a:rPr lang="ko-KR" altLang="ko-KR" sz="1200" b="0" i="0" kern="1200" dirty="0">
+                <a:solidFill>
+                  <a:schemeClr val="tx1"/>
+                </a:solidFill>
+                <a:effectLst/>
+                <a:latin typeface="+mn-lt"/>
+                <a:ea typeface="+mn-ea"/>
+                <a:cs typeface="+mn-cs"/>
+              </a:rPr>
+              <a:t> </a:t>
+            </a:r>
+            <a:r>
+              <a:rPr lang="ko-KR" altLang="ko-KR" sz="1200" b="0" i="0" kern="1200" dirty="0" err="1">
+                <a:solidFill>
+                  <a:schemeClr val="tx1"/>
+                </a:solidFill>
+                <a:effectLst/>
+                <a:latin typeface="+mn-lt"/>
+                <a:ea typeface="+mn-ea"/>
+                <a:cs typeface="+mn-cs"/>
+              </a:rPr>
+              <a:t>fractions</a:t>
+            </a:r>
+            <a:r>
+              <a:rPr lang="ko-KR" altLang="ko-KR" sz="1200" b="0" i="0" kern="1200" dirty="0">
+                <a:solidFill>
+                  <a:schemeClr val="tx1"/>
+                </a:solidFill>
+                <a:effectLst/>
+                <a:latin typeface="+mn-lt"/>
+                <a:ea typeface="+mn-ea"/>
+                <a:cs typeface="+mn-cs"/>
+              </a:rPr>
+              <a:t> of </a:t>
+            </a:r>
+            <a:r>
+              <a:rPr lang="ko-KR" altLang="ko-KR" sz="1200" b="0" i="0" kern="1200" dirty="0" err="1">
+                <a:solidFill>
+                  <a:schemeClr val="tx1"/>
+                </a:solidFill>
+                <a:effectLst/>
+                <a:latin typeface="+mn-lt"/>
+                <a:ea typeface="+mn-ea"/>
+                <a:cs typeface="+mn-cs"/>
+              </a:rPr>
+              <a:t>a</a:t>
+            </a:r>
+            <a:r>
+              <a:rPr lang="ko-KR" altLang="ko-KR" sz="1200" b="0" i="0" kern="1200" dirty="0">
+                <a:solidFill>
+                  <a:schemeClr val="tx1"/>
+                </a:solidFill>
+                <a:effectLst/>
+                <a:latin typeface="+mn-lt"/>
+                <a:ea typeface="+mn-ea"/>
+                <a:cs typeface="+mn-cs"/>
+              </a:rPr>
+              <a:t> </a:t>
+            </a:r>
+            <a:r>
+              <a:rPr lang="ko-KR" altLang="ko-KR" sz="1200" b="0" i="0" kern="1200" dirty="0" err="1">
+                <a:solidFill>
+                  <a:schemeClr val="tx1"/>
+                </a:solidFill>
+                <a:effectLst/>
+                <a:latin typeface="+mn-lt"/>
+                <a:ea typeface="+mn-ea"/>
+                <a:cs typeface="+mn-cs"/>
+              </a:rPr>
+              <a:t>basis</a:t>
+            </a:r>
+            <a:r>
+              <a:rPr lang="ko-KR" altLang="ko-KR" sz="1200" b="0" i="0" kern="1200" dirty="0">
+                <a:solidFill>
+                  <a:schemeClr val="tx1"/>
+                </a:solidFill>
+                <a:effectLst/>
+                <a:latin typeface="+mn-lt"/>
+                <a:ea typeface="+mn-ea"/>
+                <a:cs typeface="+mn-cs"/>
+              </a:rPr>
+              <a:t> </a:t>
+            </a:r>
+            <a:r>
+              <a:rPr lang="ko-KR" altLang="ko-KR" sz="1200" b="0" i="0" kern="1200" dirty="0" err="1">
+                <a:solidFill>
+                  <a:schemeClr val="tx1"/>
+                </a:solidFill>
+                <a:effectLst/>
+                <a:latin typeface="+mn-lt"/>
+                <a:ea typeface="+mn-ea"/>
+                <a:cs typeface="+mn-cs"/>
+              </a:rPr>
+              <a:t>point</a:t>
+            </a:r>
+            <a:r>
+              <a:rPr lang="ko-KR" altLang="ko-KR" sz="1200" b="0" i="0" kern="1200" dirty="0">
+                <a:solidFill>
+                  <a:schemeClr val="tx1"/>
+                </a:solidFill>
+                <a:effectLst/>
+                <a:latin typeface="+mn-lt"/>
+                <a:ea typeface="+mn-ea"/>
+                <a:cs typeface="+mn-cs"/>
+              </a:rPr>
+              <a:t>.</a:t>
+            </a:r>
+          </a:p>
+          <a:p>
+            <a:br>
+              <a:rPr lang="ko-KR" altLang="ko-KR" dirty="0"/>
+            </a:br>
+            <a:endParaRPr lang="ko-KR" altLang="ko-KR" dirty="0"/>
+          </a:p>
+          <a:p>
+            <a:r>
+              <a:rPr lang="ko-KR" altLang="ko-KR" sz="1200" b="1" i="0" kern="1200" dirty="0">
+                <a:solidFill>
+                  <a:schemeClr val="tx1"/>
+                </a:solidFill>
+                <a:effectLst/>
+                <a:latin typeface="+mn-lt"/>
+                <a:ea typeface="+mn-ea"/>
+                <a:cs typeface="+mn-cs"/>
+              </a:rPr>
+              <a:t>The </a:t>
+            </a:r>
+            <a:r>
+              <a:rPr lang="ko-KR" altLang="ko-KR" sz="1200" b="1" i="0" kern="1200" dirty="0" err="1">
+                <a:solidFill>
+                  <a:schemeClr val="tx1"/>
+                </a:solidFill>
+                <a:effectLst/>
+                <a:latin typeface="+mn-lt"/>
+                <a:ea typeface="+mn-ea"/>
+                <a:cs typeface="+mn-cs"/>
+              </a:rPr>
+              <a:t>Welch</a:t>
+            </a:r>
+            <a:r>
+              <a:rPr lang="ko-KR" altLang="ko-KR" sz="1200" b="1" i="0" kern="1200" dirty="0">
+                <a:solidFill>
+                  <a:schemeClr val="tx1"/>
+                </a:solidFill>
+                <a:effectLst/>
+                <a:latin typeface="+mn-lt"/>
+                <a:ea typeface="+mn-ea"/>
+                <a:cs typeface="+mn-cs"/>
+              </a:rPr>
+              <a:t> </a:t>
+            </a:r>
+            <a:r>
+              <a:rPr lang="ko-KR" altLang="ko-KR" sz="1200" b="1" i="0" kern="1200" dirty="0" err="1">
+                <a:solidFill>
+                  <a:schemeClr val="tx1"/>
+                </a:solidFill>
+                <a:effectLst/>
+                <a:latin typeface="+mn-lt"/>
+                <a:ea typeface="+mn-ea"/>
+                <a:cs typeface="+mn-cs"/>
+              </a:rPr>
+              <a:t>t-statistic</a:t>
+            </a:r>
+            <a:endParaRPr lang="ko-KR" altLang="ko-KR" sz="1200" b="1" i="0" kern="1200" dirty="0">
+              <a:solidFill>
+                <a:schemeClr val="tx1"/>
+              </a:solidFill>
+              <a:effectLst/>
+              <a:latin typeface="+mn-lt"/>
+              <a:ea typeface="+mn-ea"/>
+              <a:cs typeface="+mn-cs"/>
+            </a:endParaRPr>
+          </a:p>
+          <a:p>
+            <a:r>
+              <a:rPr lang="ko-KR" altLang="ko-KR" sz="1200" b="0" i="0" kern="1200" dirty="0" err="1">
+                <a:solidFill>
+                  <a:schemeClr val="tx1"/>
+                </a:solidFill>
+                <a:effectLst/>
+                <a:latin typeface="+mn-lt"/>
+                <a:ea typeface="+mn-ea"/>
+                <a:cs typeface="+mn-cs"/>
+              </a:rPr>
+              <a:t>It</a:t>
+            </a:r>
+            <a:r>
+              <a:rPr lang="ko-KR" altLang="ko-KR" sz="1200" b="0" i="0" kern="1200" dirty="0">
+                <a:solidFill>
+                  <a:schemeClr val="tx1"/>
+                </a:solidFill>
+                <a:effectLst/>
+                <a:latin typeface="+mn-lt"/>
+                <a:ea typeface="+mn-ea"/>
+                <a:cs typeface="+mn-cs"/>
+              </a:rPr>
+              <a:t> </a:t>
+            </a:r>
+            <a:r>
+              <a:rPr lang="ko-KR" altLang="ko-KR" sz="1200" b="0" i="0" kern="1200" dirty="0" err="1">
+                <a:solidFill>
+                  <a:schemeClr val="tx1"/>
+                </a:solidFill>
+                <a:effectLst/>
+                <a:latin typeface="+mn-lt"/>
+                <a:ea typeface="+mn-ea"/>
+                <a:cs typeface="+mn-cs"/>
+              </a:rPr>
+              <a:t>answers</a:t>
+            </a:r>
+            <a:r>
+              <a:rPr lang="ko-KR" altLang="ko-KR" sz="1200" b="0" i="0" kern="1200" dirty="0">
+                <a:solidFill>
+                  <a:schemeClr val="tx1"/>
+                </a:solidFill>
+                <a:effectLst/>
+                <a:latin typeface="+mn-lt"/>
+                <a:ea typeface="+mn-ea"/>
+                <a:cs typeface="+mn-cs"/>
+              </a:rPr>
+              <a:t> </a:t>
+            </a:r>
+            <a:r>
+              <a:rPr lang="ko-KR" altLang="ko-KR" sz="1200" b="0" i="0" kern="1200" dirty="0" err="1">
+                <a:solidFill>
+                  <a:schemeClr val="tx1"/>
+                </a:solidFill>
+                <a:effectLst/>
+                <a:latin typeface="+mn-lt"/>
+                <a:ea typeface="+mn-ea"/>
+                <a:cs typeface="+mn-cs"/>
+              </a:rPr>
+              <a:t>a</a:t>
+            </a:r>
+            <a:r>
+              <a:rPr lang="ko-KR" altLang="ko-KR" sz="1200" b="0" i="0" kern="1200" dirty="0">
+                <a:solidFill>
+                  <a:schemeClr val="tx1"/>
+                </a:solidFill>
+                <a:effectLst/>
+                <a:latin typeface="+mn-lt"/>
+                <a:ea typeface="+mn-ea"/>
+                <a:cs typeface="+mn-cs"/>
+              </a:rPr>
+              <a:t> </a:t>
+            </a:r>
+            <a:r>
+              <a:rPr lang="ko-KR" altLang="ko-KR" sz="1200" b="0" i="0" kern="1200" dirty="0" err="1">
+                <a:solidFill>
+                  <a:schemeClr val="tx1"/>
+                </a:solidFill>
+                <a:effectLst/>
+                <a:latin typeface="+mn-lt"/>
+                <a:ea typeface="+mn-ea"/>
+                <a:cs typeface="+mn-cs"/>
+              </a:rPr>
+              <a:t>different</a:t>
+            </a:r>
+            <a:r>
+              <a:rPr lang="ko-KR" altLang="ko-KR" sz="1200" b="0" i="0" kern="1200" dirty="0">
+                <a:solidFill>
+                  <a:schemeClr val="tx1"/>
+                </a:solidFill>
+                <a:effectLst/>
+                <a:latin typeface="+mn-lt"/>
+                <a:ea typeface="+mn-ea"/>
+                <a:cs typeface="+mn-cs"/>
+              </a:rPr>
+              <a:t> </a:t>
+            </a:r>
+            <a:r>
+              <a:rPr lang="ko-KR" altLang="ko-KR" sz="1200" b="0" i="0" kern="1200" dirty="0" err="1">
+                <a:solidFill>
+                  <a:schemeClr val="tx1"/>
+                </a:solidFill>
+                <a:effectLst/>
+                <a:latin typeface="+mn-lt"/>
+                <a:ea typeface="+mn-ea"/>
+                <a:cs typeface="+mn-cs"/>
+              </a:rPr>
+              <a:t>question</a:t>
+            </a:r>
+            <a:r>
+              <a:rPr lang="ko-KR" altLang="ko-KR" sz="1200" b="0" i="0" kern="1200" dirty="0">
+                <a:solidFill>
+                  <a:schemeClr val="tx1"/>
+                </a:solidFill>
+                <a:effectLst/>
+                <a:latin typeface="+mn-lt"/>
+                <a:ea typeface="+mn-ea"/>
+                <a:cs typeface="+mn-cs"/>
+              </a:rPr>
+              <a:t>: </a:t>
+            </a:r>
+            <a:r>
+              <a:rPr lang="ko-KR" altLang="ko-KR" sz="1200" b="0" i="1" kern="1200" dirty="0">
+                <a:solidFill>
+                  <a:schemeClr val="tx1"/>
+                </a:solidFill>
+                <a:effectLst/>
+                <a:latin typeface="+mn-lt"/>
+                <a:ea typeface="+mn-ea"/>
+                <a:cs typeface="+mn-cs"/>
+              </a:rPr>
+              <a:t>"</a:t>
+            </a:r>
+            <a:r>
+              <a:rPr lang="ko-KR" altLang="ko-KR" sz="1200" b="0" i="1" kern="1200" dirty="0" err="1">
+                <a:solidFill>
+                  <a:schemeClr val="tx1"/>
+                </a:solidFill>
+                <a:effectLst/>
+                <a:latin typeface="+mn-lt"/>
+                <a:ea typeface="+mn-ea"/>
+                <a:cs typeface="+mn-cs"/>
+              </a:rPr>
+              <a:t>Could</a:t>
+            </a:r>
+            <a:r>
+              <a:rPr lang="ko-KR" altLang="ko-KR" sz="1200" b="0" i="1" kern="1200" dirty="0">
+                <a:solidFill>
+                  <a:schemeClr val="tx1"/>
+                </a:solidFill>
+                <a:effectLst/>
+                <a:latin typeface="+mn-lt"/>
+                <a:ea typeface="+mn-ea"/>
+                <a:cs typeface="+mn-cs"/>
+              </a:rPr>
+              <a:t> </a:t>
+            </a:r>
+            <a:r>
+              <a:rPr lang="ko-KR" altLang="ko-KR" sz="1200" b="0" i="1" kern="1200" dirty="0" err="1">
+                <a:solidFill>
+                  <a:schemeClr val="tx1"/>
+                </a:solidFill>
+                <a:effectLst/>
+                <a:latin typeface="+mn-lt"/>
+                <a:ea typeface="+mn-ea"/>
+                <a:cs typeface="+mn-cs"/>
+              </a:rPr>
+              <a:t>this</a:t>
+            </a:r>
+            <a:r>
+              <a:rPr lang="ko-KR" altLang="ko-KR" sz="1200" b="0" i="1" kern="1200" dirty="0">
+                <a:solidFill>
+                  <a:schemeClr val="tx1"/>
+                </a:solidFill>
+                <a:effectLst/>
+                <a:latin typeface="+mn-lt"/>
+                <a:ea typeface="+mn-ea"/>
+                <a:cs typeface="+mn-cs"/>
+              </a:rPr>
+              <a:t> 27 </a:t>
+            </a:r>
+            <a:r>
+              <a:rPr lang="ko-KR" altLang="ko-KR" sz="1200" b="0" i="1" kern="1200" dirty="0" err="1">
+                <a:solidFill>
+                  <a:schemeClr val="tx1"/>
+                </a:solidFill>
+                <a:effectLst/>
+                <a:latin typeface="+mn-lt"/>
+                <a:ea typeface="+mn-ea"/>
+                <a:cs typeface="+mn-cs"/>
+              </a:rPr>
+              <a:t>pp</a:t>
+            </a:r>
+            <a:r>
+              <a:rPr lang="ko-KR" altLang="ko-KR" sz="1200" b="0" i="1" kern="1200" dirty="0">
+                <a:solidFill>
+                  <a:schemeClr val="tx1"/>
+                </a:solidFill>
+                <a:effectLst/>
+                <a:latin typeface="+mn-lt"/>
+                <a:ea typeface="+mn-ea"/>
+                <a:cs typeface="+mn-cs"/>
+              </a:rPr>
+              <a:t> </a:t>
+            </a:r>
+            <a:r>
+              <a:rPr lang="ko-KR" altLang="ko-KR" sz="1200" b="0" i="1" kern="1200" dirty="0" err="1">
+                <a:solidFill>
+                  <a:schemeClr val="tx1"/>
+                </a:solidFill>
+                <a:effectLst/>
+                <a:latin typeface="+mn-lt"/>
+                <a:ea typeface="+mn-ea"/>
+                <a:cs typeface="+mn-cs"/>
+              </a:rPr>
+              <a:t>difference</a:t>
+            </a:r>
+            <a:r>
+              <a:rPr lang="ko-KR" altLang="ko-KR" sz="1200" b="0" i="1" kern="1200" dirty="0">
+                <a:solidFill>
+                  <a:schemeClr val="tx1"/>
+                </a:solidFill>
+                <a:effectLst/>
+                <a:latin typeface="+mn-lt"/>
+                <a:ea typeface="+mn-ea"/>
+                <a:cs typeface="+mn-cs"/>
+              </a:rPr>
+              <a:t> </a:t>
+            </a:r>
+            <a:r>
+              <a:rPr lang="ko-KR" altLang="ko-KR" sz="1200" b="0" i="1" kern="1200" dirty="0" err="1">
+                <a:solidFill>
+                  <a:schemeClr val="tx1"/>
+                </a:solidFill>
+                <a:effectLst/>
+                <a:latin typeface="+mn-lt"/>
+                <a:ea typeface="+mn-ea"/>
+                <a:cs typeface="+mn-cs"/>
+              </a:rPr>
+              <a:t>just</a:t>
+            </a:r>
+            <a:r>
+              <a:rPr lang="ko-KR" altLang="ko-KR" sz="1200" b="0" i="1" kern="1200" dirty="0">
+                <a:solidFill>
+                  <a:schemeClr val="tx1"/>
+                </a:solidFill>
+                <a:effectLst/>
+                <a:latin typeface="+mn-lt"/>
+                <a:ea typeface="+mn-ea"/>
+                <a:cs typeface="+mn-cs"/>
+              </a:rPr>
+              <a:t> </a:t>
+            </a:r>
+            <a:r>
+              <a:rPr lang="ko-KR" altLang="ko-KR" sz="1200" b="0" i="1" kern="1200" dirty="0" err="1">
+                <a:solidFill>
+                  <a:schemeClr val="tx1"/>
+                </a:solidFill>
+                <a:effectLst/>
+                <a:latin typeface="+mn-lt"/>
+                <a:ea typeface="+mn-ea"/>
+                <a:cs typeface="+mn-cs"/>
+              </a:rPr>
+              <a:t>be</a:t>
+            </a:r>
+            <a:r>
+              <a:rPr lang="ko-KR" altLang="ko-KR" sz="1200" b="0" i="1" kern="1200" dirty="0">
+                <a:solidFill>
+                  <a:schemeClr val="tx1"/>
+                </a:solidFill>
+                <a:effectLst/>
+                <a:latin typeface="+mn-lt"/>
+                <a:ea typeface="+mn-ea"/>
+                <a:cs typeface="+mn-cs"/>
+              </a:rPr>
+              <a:t> </a:t>
+            </a:r>
+            <a:r>
+              <a:rPr lang="ko-KR" altLang="ko-KR" sz="1200" b="0" i="1" kern="1200" dirty="0" err="1">
+                <a:solidFill>
+                  <a:schemeClr val="tx1"/>
+                </a:solidFill>
+                <a:effectLst/>
+                <a:latin typeface="+mn-lt"/>
+                <a:ea typeface="+mn-ea"/>
+                <a:cs typeface="+mn-cs"/>
+              </a:rPr>
+              <a:t>a</a:t>
+            </a:r>
+            <a:r>
+              <a:rPr lang="ko-KR" altLang="ko-KR" sz="1200" b="0" i="1" kern="1200" dirty="0">
+                <a:solidFill>
+                  <a:schemeClr val="tx1"/>
+                </a:solidFill>
+                <a:effectLst/>
+                <a:latin typeface="+mn-lt"/>
+                <a:ea typeface="+mn-ea"/>
+                <a:cs typeface="+mn-cs"/>
+              </a:rPr>
+              <a:t> </a:t>
+            </a:r>
+            <a:r>
+              <a:rPr lang="ko-KR" altLang="ko-KR" sz="1200" b="0" i="1" kern="1200" dirty="0" err="1">
+                <a:solidFill>
+                  <a:schemeClr val="tx1"/>
+                </a:solidFill>
+                <a:effectLst/>
+                <a:latin typeface="+mn-lt"/>
+                <a:ea typeface="+mn-ea"/>
+                <a:cs typeface="+mn-cs"/>
+              </a:rPr>
+              <a:t>coincidence</a:t>
+            </a:r>
+            <a:r>
+              <a:rPr lang="ko-KR" altLang="ko-KR" sz="1200" b="0" i="1" kern="1200" dirty="0">
+                <a:solidFill>
+                  <a:schemeClr val="tx1"/>
+                </a:solidFill>
+                <a:effectLst/>
+                <a:latin typeface="+mn-lt"/>
+                <a:ea typeface="+mn-ea"/>
+                <a:cs typeface="+mn-cs"/>
+              </a:rPr>
+              <a:t>?"</a:t>
+            </a:r>
+            <a:endParaRPr lang="ko-KR" altLang="ko-KR" sz="1200" b="0" i="0" kern="1200" dirty="0">
+              <a:solidFill>
+                <a:schemeClr val="tx1"/>
+              </a:solidFill>
+              <a:effectLst/>
+              <a:latin typeface="+mn-lt"/>
+              <a:ea typeface="+mn-ea"/>
+              <a:cs typeface="+mn-cs"/>
+            </a:endParaRPr>
+          </a:p>
+          <a:p>
+            <a:r>
+              <a:rPr lang="ko-KR" altLang="ko-KR" sz="1200" b="0" i="0" kern="1200" dirty="0">
+                <a:solidFill>
+                  <a:schemeClr val="tx1"/>
+                </a:solidFill>
+                <a:effectLst/>
+                <a:latin typeface="+mn-lt"/>
+                <a:ea typeface="+mn-ea"/>
+                <a:cs typeface="+mn-cs"/>
+              </a:rPr>
+              <a:t>The </a:t>
+            </a:r>
+            <a:r>
+              <a:rPr lang="ko-KR" altLang="ko-KR" sz="1200" b="0" i="0" kern="1200" dirty="0" err="1">
+                <a:solidFill>
+                  <a:schemeClr val="tx1"/>
+                </a:solidFill>
+                <a:effectLst/>
+                <a:latin typeface="+mn-lt"/>
+                <a:ea typeface="+mn-ea"/>
+                <a:cs typeface="+mn-cs"/>
+              </a:rPr>
+              <a:t>Welch</a:t>
+            </a:r>
+            <a:r>
+              <a:rPr lang="ko-KR" altLang="ko-KR" sz="1200" b="0" i="0" kern="1200" dirty="0">
+                <a:solidFill>
+                  <a:schemeClr val="tx1"/>
+                </a:solidFill>
+                <a:effectLst/>
+                <a:latin typeface="+mn-lt"/>
+                <a:ea typeface="+mn-ea"/>
+                <a:cs typeface="+mn-cs"/>
+              </a:rPr>
+              <a:t> </a:t>
+            </a:r>
+            <a:r>
+              <a:rPr lang="ko-KR" altLang="ko-KR" sz="1200" b="0" i="0" kern="1200" dirty="0" err="1">
+                <a:solidFill>
+                  <a:schemeClr val="tx1"/>
+                </a:solidFill>
+                <a:effectLst/>
+                <a:latin typeface="+mn-lt"/>
+                <a:ea typeface="+mn-ea"/>
+                <a:cs typeface="+mn-cs"/>
+              </a:rPr>
+              <a:t>t-test</a:t>
+            </a:r>
+            <a:r>
+              <a:rPr lang="ko-KR" altLang="ko-KR" sz="1200" b="0" i="0" kern="1200" dirty="0">
+                <a:solidFill>
+                  <a:schemeClr val="tx1"/>
+                </a:solidFill>
+                <a:effectLst/>
+                <a:latin typeface="+mn-lt"/>
+                <a:ea typeface="+mn-ea"/>
+                <a:cs typeface="+mn-cs"/>
+              </a:rPr>
+              <a:t> </a:t>
+            </a:r>
+            <a:r>
+              <a:rPr lang="ko-KR" altLang="ko-KR" sz="1200" b="0" i="0" kern="1200" dirty="0" err="1">
+                <a:solidFill>
+                  <a:schemeClr val="tx1"/>
+                </a:solidFill>
+                <a:effectLst/>
+                <a:latin typeface="+mn-lt"/>
+                <a:ea typeface="+mn-ea"/>
+                <a:cs typeface="+mn-cs"/>
+              </a:rPr>
+              <a:t>takes</a:t>
+            </a:r>
+            <a:r>
+              <a:rPr lang="ko-KR" altLang="ko-KR" sz="1200" b="0" i="0" kern="1200" dirty="0">
+                <a:solidFill>
+                  <a:schemeClr val="tx1"/>
+                </a:solidFill>
+                <a:effectLst/>
+                <a:latin typeface="+mn-lt"/>
+                <a:ea typeface="+mn-ea"/>
+                <a:cs typeface="+mn-cs"/>
+              </a:rPr>
+              <a:t> </a:t>
+            </a:r>
+            <a:r>
+              <a:rPr lang="ko-KR" altLang="ko-KR" sz="1200" b="0" i="0" kern="1200" dirty="0" err="1">
+                <a:solidFill>
+                  <a:schemeClr val="tx1"/>
+                </a:solidFill>
+                <a:effectLst/>
+                <a:latin typeface="+mn-lt"/>
+                <a:ea typeface="+mn-ea"/>
+                <a:cs typeface="+mn-cs"/>
+              </a:rPr>
+              <a:t>the</a:t>
+            </a:r>
+            <a:r>
+              <a:rPr lang="ko-KR" altLang="ko-KR" sz="1200" b="0" i="0" kern="1200" dirty="0">
+                <a:solidFill>
+                  <a:schemeClr val="tx1"/>
+                </a:solidFill>
+                <a:effectLst/>
+                <a:latin typeface="+mn-lt"/>
+                <a:ea typeface="+mn-ea"/>
+                <a:cs typeface="+mn-cs"/>
+              </a:rPr>
+              <a:t> </a:t>
+            </a:r>
+            <a:r>
+              <a:rPr lang="ko-KR" altLang="ko-KR" sz="1200" b="0" i="0" kern="1200" dirty="0" err="1">
+                <a:solidFill>
+                  <a:schemeClr val="tx1"/>
+                </a:solidFill>
+                <a:effectLst/>
+                <a:latin typeface="+mn-lt"/>
+                <a:ea typeface="+mn-ea"/>
+                <a:cs typeface="+mn-cs"/>
+              </a:rPr>
+              <a:t>daily</a:t>
+            </a:r>
+            <a:r>
+              <a:rPr lang="ko-KR" altLang="ko-KR" sz="1200" b="0" i="0" kern="1200" dirty="0">
+                <a:solidFill>
+                  <a:schemeClr val="tx1"/>
+                </a:solidFill>
+                <a:effectLst/>
+                <a:latin typeface="+mn-lt"/>
+                <a:ea typeface="+mn-ea"/>
+                <a:cs typeface="+mn-cs"/>
+              </a:rPr>
+              <a:t> </a:t>
+            </a:r>
+            <a:r>
+              <a:rPr lang="ko-KR" altLang="ko-KR" sz="1200" b="0" i="0" kern="1200" dirty="0" err="1">
+                <a:solidFill>
+                  <a:schemeClr val="tx1"/>
+                </a:solidFill>
+                <a:effectLst/>
+                <a:latin typeface="+mn-lt"/>
+                <a:ea typeface="+mn-ea"/>
+                <a:cs typeface="+mn-cs"/>
+              </a:rPr>
+              <a:t>abnormal</a:t>
+            </a:r>
+            <a:r>
+              <a:rPr lang="ko-KR" altLang="ko-KR" sz="1200" b="0" i="0" kern="1200" dirty="0">
+                <a:solidFill>
+                  <a:schemeClr val="tx1"/>
+                </a:solidFill>
+                <a:effectLst/>
+                <a:latin typeface="+mn-lt"/>
+                <a:ea typeface="+mn-ea"/>
+                <a:cs typeface="+mn-cs"/>
+              </a:rPr>
+              <a:t> </a:t>
+            </a:r>
+            <a:r>
+              <a:rPr lang="ko-KR" altLang="ko-KR" sz="1200" b="0" i="0" kern="1200" dirty="0" err="1">
+                <a:solidFill>
+                  <a:schemeClr val="tx1"/>
+                </a:solidFill>
+                <a:effectLst/>
+                <a:latin typeface="+mn-lt"/>
+                <a:ea typeface="+mn-ea"/>
+                <a:cs typeface="+mn-cs"/>
+              </a:rPr>
+              <a:t>spread</a:t>
+            </a:r>
+            <a:r>
+              <a:rPr lang="ko-KR" altLang="ko-KR" sz="1200" b="0" i="0" kern="1200" dirty="0">
+                <a:solidFill>
+                  <a:schemeClr val="tx1"/>
+                </a:solidFill>
+                <a:effectLst/>
+                <a:latin typeface="+mn-lt"/>
+                <a:ea typeface="+mn-ea"/>
+                <a:cs typeface="+mn-cs"/>
+              </a:rPr>
+              <a:t> </a:t>
+            </a:r>
+            <a:r>
+              <a:rPr lang="ko-KR" altLang="ko-KR" sz="1200" b="0" i="0" kern="1200" dirty="0" err="1">
+                <a:solidFill>
+                  <a:schemeClr val="tx1"/>
+                </a:solidFill>
+                <a:effectLst/>
+                <a:latin typeface="+mn-lt"/>
+                <a:ea typeface="+mn-ea"/>
+                <a:cs typeface="+mn-cs"/>
+              </a:rPr>
+              <a:t>series</a:t>
+            </a:r>
+            <a:r>
+              <a:rPr lang="ko-KR" altLang="ko-KR" sz="1200" b="0" i="0" kern="1200" dirty="0">
+                <a:solidFill>
+                  <a:schemeClr val="tx1"/>
+                </a:solidFill>
+                <a:effectLst/>
+                <a:latin typeface="+mn-lt"/>
+                <a:ea typeface="+mn-ea"/>
+                <a:cs typeface="+mn-cs"/>
+              </a:rPr>
+              <a:t> </a:t>
+            </a:r>
+            <a:r>
+              <a:rPr lang="ko-KR" altLang="ko-KR" sz="1200" b="0" i="0" kern="1200" dirty="0" err="1">
+                <a:solidFill>
+                  <a:schemeClr val="tx1"/>
+                </a:solidFill>
+                <a:effectLst/>
+                <a:latin typeface="+mn-lt"/>
+                <a:ea typeface="+mn-ea"/>
+                <a:cs typeface="+mn-cs"/>
+              </a:rPr>
+              <a:t>from</a:t>
+            </a:r>
+            <a:r>
+              <a:rPr lang="ko-KR" altLang="ko-KR" sz="1200" b="0" i="0" kern="1200" dirty="0">
+                <a:solidFill>
+                  <a:schemeClr val="tx1"/>
+                </a:solidFill>
+                <a:effectLst/>
+                <a:latin typeface="+mn-lt"/>
+                <a:ea typeface="+mn-ea"/>
+                <a:cs typeface="+mn-cs"/>
+              </a:rPr>
+              <a:t> </a:t>
+            </a:r>
+            <a:r>
+              <a:rPr lang="ko-KR" altLang="ko-KR" sz="1200" b="0" i="0" kern="1200" dirty="0" err="1">
+                <a:solidFill>
+                  <a:schemeClr val="tx1"/>
+                </a:solidFill>
+                <a:effectLst/>
+                <a:latin typeface="+mn-lt"/>
+                <a:ea typeface="+mn-ea"/>
+                <a:cs typeface="+mn-cs"/>
+              </a:rPr>
+              <a:t>the</a:t>
+            </a:r>
+            <a:r>
+              <a:rPr lang="ko-KR" altLang="ko-KR" sz="1200" b="0" i="0" kern="1200" dirty="0">
+                <a:solidFill>
+                  <a:schemeClr val="tx1"/>
+                </a:solidFill>
+                <a:effectLst/>
+                <a:latin typeface="+mn-lt"/>
+                <a:ea typeface="+mn-ea"/>
+                <a:cs typeface="+mn-cs"/>
+              </a:rPr>
+              <a:t> </a:t>
+            </a:r>
+            <a:r>
+              <a:rPr lang="ko-KR" altLang="ko-KR" sz="1200" b="0" i="0" kern="1200" dirty="0" err="1">
+                <a:solidFill>
+                  <a:schemeClr val="tx1"/>
+                </a:solidFill>
+                <a:effectLst/>
+                <a:latin typeface="+mn-lt"/>
+                <a:ea typeface="+mn-ea"/>
+                <a:cs typeface="+mn-cs"/>
+              </a:rPr>
+              <a:t>low-buffer</a:t>
+            </a:r>
+            <a:r>
+              <a:rPr lang="ko-KR" altLang="ko-KR" sz="1200" b="0" i="0" kern="1200" dirty="0">
+                <a:solidFill>
+                  <a:schemeClr val="tx1"/>
+                </a:solidFill>
+                <a:effectLst/>
+                <a:latin typeface="+mn-lt"/>
+                <a:ea typeface="+mn-ea"/>
+                <a:cs typeface="+mn-cs"/>
+              </a:rPr>
+              <a:t> </a:t>
+            </a:r>
+            <a:r>
+              <a:rPr lang="ko-KR" altLang="ko-KR" sz="1200" b="0" i="0" kern="1200" dirty="0" err="1">
+                <a:solidFill>
+                  <a:schemeClr val="tx1"/>
+                </a:solidFill>
+                <a:effectLst/>
+                <a:latin typeface="+mn-lt"/>
+                <a:ea typeface="+mn-ea"/>
+                <a:cs typeface="+mn-cs"/>
+              </a:rPr>
+              <a:t>events</a:t>
+            </a:r>
+            <a:r>
+              <a:rPr lang="ko-KR" altLang="ko-KR" sz="1200" b="0" i="0" kern="1200" dirty="0">
+                <a:solidFill>
+                  <a:schemeClr val="tx1"/>
+                </a:solidFill>
+                <a:effectLst/>
+                <a:latin typeface="+mn-lt"/>
+                <a:ea typeface="+mn-ea"/>
+                <a:cs typeface="+mn-cs"/>
+              </a:rPr>
+              <a:t> and </a:t>
+            </a:r>
+            <a:r>
+              <a:rPr lang="ko-KR" altLang="ko-KR" sz="1200" b="0" i="0" kern="1200" dirty="0" err="1">
+                <a:solidFill>
+                  <a:schemeClr val="tx1"/>
+                </a:solidFill>
+                <a:effectLst/>
+                <a:latin typeface="+mn-lt"/>
+                <a:ea typeface="+mn-ea"/>
+                <a:cs typeface="+mn-cs"/>
+              </a:rPr>
+              <a:t>compares</a:t>
+            </a:r>
+            <a:r>
+              <a:rPr lang="ko-KR" altLang="ko-KR" sz="1200" b="0" i="0" kern="1200" dirty="0">
+                <a:solidFill>
+                  <a:schemeClr val="tx1"/>
+                </a:solidFill>
+                <a:effectLst/>
+                <a:latin typeface="+mn-lt"/>
+                <a:ea typeface="+mn-ea"/>
+                <a:cs typeface="+mn-cs"/>
+              </a:rPr>
+              <a:t> </a:t>
+            </a:r>
+            <a:r>
+              <a:rPr lang="ko-KR" altLang="ko-KR" sz="1200" b="0" i="0" kern="1200" dirty="0" err="1">
+                <a:solidFill>
+                  <a:schemeClr val="tx1"/>
+                </a:solidFill>
+                <a:effectLst/>
+                <a:latin typeface="+mn-lt"/>
+                <a:ea typeface="+mn-ea"/>
+                <a:cs typeface="+mn-cs"/>
+              </a:rPr>
+              <a:t>them</a:t>
+            </a:r>
+            <a:r>
+              <a:rPr lang="ko-KR" altLang="ko-KR" sz="1200" b="0" i="0" kern="1200" dirty="0">
+                <a:solidFill>
+                  <a:schemeClr val="tx1"/>
+                </a:solidFill>
+                <a:effectLst/>
+                <a:latin typeface="+mn-lt"/>
+                <a:ea typeface="+mn-ea"/>
+                <a:cs typeface="+mn-cs"/>
+              </a:rPr>
+              <a:t> </a:t>
+            </a:r>
+            <a:r>
+              <a:rPr lang="ko-KR" altLang="ko-KR" sz="1200" b="0" i="0" kern="1200" dirty="0" err="1">
+                <a:solidFill>
+                  <a:schemeClr val="tx1"/>
+                </a:solidFill>
+                <a:effectLst/>
+                <a:latin typeface="+mn-lt"/>
+                <a:ea typeface="+mn-ea"/>
+                <a:cs typeface="+mn-cs"/>
+              </a:rPr>
+              <a:t>to</a:t>
+            </a:r>
+            <a:r>
+              <a:rPr lang="ko-KR" altLang="ko-KR" sz="1200" b="0" i="0" kern="1200" dirty="0">
+                <a:solidFill>
+                  <a:schemeClr val="tx1"/>
+                </a:solidFill>
+                <a:effectLst/>
+                <a:latin typeface="+mn-lt"/>
+                <a:ea typeface="+mn-ea"/>
+                <a:cs typeface="+mn-cs"/>
+              </a:rPr>
+              <a:t> </a:t>
+            </a:r>
+            <a:r>
+              <a:rPr lang="ko-KR" altLang="ko-KR" sz="1200" b="0" i="0" kern="1200" dirty="0" err="1">
+                <a:solidFill>
+                  <a:schemeClr val="tx1"/>
+                </a:solidFill>
+                <a:effectLst/>
+                <a:latin typeface="+mn-lt"/>
+                <a:ea typeface="+mn-ea"/>
+                <a:cs typeface="+mn-cs"/>
+              </a:rPr>
+              <a:t>the</a:t>
+            </a:r>
+            <a:r>
+              <a:rPr lang="ko-KR" altLang="ko-KR" sz="1200" b="0" i="0" kern="1200" dirty="0">
+                <a:solidFill>
+                  <a:schemeClr val="tx1"/>
+                </a:solidFill>
+                <a:effectLst/>
+                <a:latin typeface="+mn-lt"/>
+                <a:ea typeface="+mn-ea"/>
+                <a:cs typeface="+mn-cs"/>
+              </a:rPr>
+              <a:t> </a:t>
+            </a:r>
+            <a:r>
+              <a:rPr lang="ko-KR" altLang="ko-KR" sz="1200" b="0" i="0" kern="1200" dirty="0" err="1">
+                <a:solidFill>
+                  <a:schemeClr val="tx1"/>
+                </a:solidFill>
+                <a:effectLst/>
+                <a:latin typeface="+mn-lt"/>
+                <a:ea typeface="+mn-ea"/>
+                <a:cs typeface="+mn-cs"/>
+              </a:rPr>
+              <a:t>high-buffer</a:t>
+            </a:r>
+            <a:r>
+              <a:rPr lang="ko-KR" altLang="ko-KR" sz="1200" b="0" i="0" kern="1200" dirty="0">
+                <a:solidFill>
+                  <a:schemeClr val="tx1"/>
+                </a:solidFill>
+                <a:effectLst/>
+                <a:latin typeface="+mn-lt"/>
+                <a:ea typeface="+mn-ea"/>
+                <a:cs typeface="+mn-cs"/>
+              </a:rPr>
+              <a:t> </a:t>
+            </a:r>
+            <a:r>
+              <a:rPr lang="ko-KR" altLang="ko-KR" sz="1200" b="0" i="0" kern="1200" dirty="0" err="1">
+                <a:solidFill>
+                  <a:schemeClr val="tx1"/>
+                </a:solidFill>
+                <a:effectLst/>
+                <a:latin typeface="+mn-lt"/>
+                <a:ea typeface="+mn-ea"/>
+                <a:cs typeface="+mn-cs"/>
+              </a:rPr>
+              <a:t>event</a:t>
+            </a:r>
+            <a:r>
+              <a:rPr lang="ko-KR" altLang="ko-KR" sz="1200" b="0" i="0" kern="1200" dirty="0">
+                <a:solidFill>
+                  <a:schemeClr val="tx1"/>
+                </a:solidFill>
+                <a:effectLst/>
+                <a:latin typeface="+mn-lt"/>
+                <a:ea typeface="+mn-ea"/>
+                <a:cs typeface="+mn-cs"/>
+              </a:rPr>
+              <a:t>. </a:t>
+            </a:r>
+            <a:r>
+              <a:rPr lang="ko-KR" altLang="ko-KR" sz="1200" b="0" i="0" kern="1200" dirty="0" err="1">
+                <a:solidFill>
+                  <a:schemeClr val="tx1"/>
+                </a:solidFill>
+                <a:effectLst/>
+                <a:latin typeface="+mn-lt"/>
+                <a:ea typeface="+mn-ea"/>
+                <a:cs typeface="+mn-cs"/>
+              </a:rPr>
+              <a:t>It</a:t>
+            </a:r>
+            <a:r>
+              <a:rPr lang="ko-KR" altLang="ko-KR" sz="1200" b="0" i="0" kern="1200" dirty="0">
+                <a:solidFill>
+                  <a:schemeClr val="tx1"/>
+                </a:solidFill>
+                <a:effectLst/>
+                <a:latin typeface="+mn-lt"/>
+                <a:ea typeface="+mn-ea"/>
+                <a:cs typeface="+mn-cs"/>
+              </a:rPr>
+              <a:t> </a:t>
+            </a:r>
+            <a:r>
+              <a:rPr lang="ko-KR" altLang="ko-KR" sz="1200" b="0" i="0" kern="1200" dirty="0" err="1">
+                <a:solidFill>
+                  <a:schemeClr val="tx1"/>
+                </a:solidFill>
+                <a:effectLst/>
+                <a:latin typeface="+mn-lt"/>
+                <a:ea typeface="+mn-ea"/>
+                <a:cs typeface="+mn-cs"/>
+              </a:rPr>
+              <a:t>calculates</a:t>
+            </a:r>
+            <a:r>
+              <a:rPr lang="ko-KR" altLang="ko-KR" sz="1200" b="0" i="0" kern="1200" dirty="0">
+                <a:solidFill>
+                  <a:schemeClr val="tx1"/>
+                </a:solidFill>
+                <a:effectLst/>
+                <a:latin typeface="+mn-lt"/>
+                <a:ea typeface="+mn-ea"/>
+                <a:cs typeface="+mn-cs"/>
+              </a:rPr>
+              <a:t>:</a:t>
+            </a:r>
+          </a:p>
+          <a:p>
+            <a:r>
+              <a:rPr lang="ko-KR" altLang="ko-KR" sz="1200" b="0" i="0" kern="1200" dirty="0" err="1">
+                <a:solidFill>
+                  <a:schemeClr val="tx1"/>
+                </a:solidFill>
+                <a:effectLst/>
+                <a:latin typeface="+mn-lt"/>
+                <a:ea typeface="+mn-ea"/>
+                <a:cs typeface="+mn-cs"/>
+              </a:rPr>
+              <a:t>How</a:t>
+            </a:r>
+            <a:r>
+              <a:rPr lang="ko-KR" altLang="ko-KR" sz="1200" b="0" i="0" kern="1200" dirty="0">
+                <a:solidFill>
+                  <a:schemeClr val="tx1"/>
+                </a:solidFill>
+                <a:effectLst/>
+                <a:latin typeface="+mn-lt"/>
+                <a:ea typeface="+mn-ea"/>
+                <a:cs typeface="+mn-cs"/>
+              </a:rPr>
+              <a:t> </a:t>
+            </a:r>
+            <a:r>
+              <a:rPr lang="ko-KR" altLang="ko-KR" sz="1200" b="0" i="0" kern="1200" dirty="0" err="1">
+                <a:solidFill>
+                  <a:schemeClr val="tx1"/>
+                </a:solidFill>
+                <a:effectLst/>
+                <a:latin typeface="+mn-lt"/>
+                <a:ea typeface="+mn-ea"/>
+                <a:cs typeface="+mn-cs"/>
+              </a:rPr>
+              <a:t>many</a:t>
+            </a:r>
+            <a:r>
+              <a:rPr lang="ko-KR" altLang="ko-KR" sz="1200" b="0" i="0" kern="1200" dirty="0">
+                <a:solidFill>
+                  <a:schemeClr val="tx1"/>
+                </a:solidFill>
+                <a:effectLst/>
+                <a:latin typeface="+mn-lt"/>
+                <a:ea typeface="+mn-ea"/>
+                <a:cs typeface="+mn-cs"/>
+              </a:rPr>
+              <a:t> </a:t>
+            </a:r>
+            <a:r>
+              <a:rPr lang="ko-KR" altLang="ko-KR" sz="1200" b="0" i="0" kern="1200" dirty="0" err="1">
+                <a:solidFill>
+                  <a:schemeClr val="tx1"/>
+                </a:solidFill>
+                <a:effectLst/>
+                <a:latin typeface="+mn-lt"/>
+                <a:ea typeface="+mn-ea"/>
+                <a:cs typeface="+mn-cs"/>
+              </a:rPr>
+              <a:t>standard</a:t>
+            </a:r>
+            <a:r>
+              <a:rPr lang="ko-KR" altLang="ko-KR" sz="1200" b="0" i="0" kern="1200" dirty="0">
+                <a:solidFill>
+                  <a:schemeClr val="tx1"/>
+                </a:solidFill>
+                <a:effectLst/>
+                <a:latin typeface="+mn-lt"/>
+                <a:ea typeface="+mn-ea"/>
+                <a:cs typeface="+mn-cs"/>
+              </a:rPr>
+              <a:t> </a:t>
+            </a:r>
+            <a:r>
+              <a:rPr lang="ko-KR" altLang="ko-KR" sz="1200" b="0" i="0" kern="1200" dirty="0" err="1">
+                <a:solidFill>
+                  <a:schemeClr val="tx1"/>
+                </a:solidFill>
+                <a:effectLst/>
+                <a:latin typeface="+mn-lt"/>
+                <a:ea typeface="+mn-ea"/>
+                <a:cs typeface="+mn-cs"/>
+              </a:rPr>
+              <a:t>deviations</a:t>
+            </a:r>
+            <a:r>
+              <a:rPr lang="ko-KR" altLang="ko-KR" sz="1200" b="0" i="0" kern="1200" dirty="0">
+                <a:solidFill>
+                  <a:schemeClr val="tx1"/>
+                </a:solidFill>
+                <a:effectLst/>
+                <a:latin typeface="+mn-lt"/>
+                <a:ea typeface="+mn-ea"/>
+                <a:cs typeface="+mn-cs"/>
+              </a:rPr>
+              <a:t> </a:t>
+            </a:r>
+            <a:r>
+              <a:rPr lang="ko-KR" altLang="ko-KR" sz="1200" b="0" i="0" kern="1200" dirty="0" err="1">
+                <a:solidFill>
+                  <a:schemeClr val="tx1"/>
+                </a:solidFill>
+                <a:effectLst/>
+                <a:latin typeface="+mn-lt"/>
+                <a:ea typeface="+mn-ea"/>
+                <a:cs typeface="+mn-cs"/>
+              </a:rPr>
+              <a:t>apart</a:t>
+            </a:r>
+            <a:r>
+              <a:rPr lang="ko-KR" altLang="ko-KR" sz="1200" b="0" i="0" kern="1200" dirty="0">
+                <a:solidFill>
+                  <a:schemeClr val="tx1"/>
+                </a:solidFill>
+                <a:effectLst/>
+                <a:latin typeface="+mn-lt"/>
+                <a:ea typeface="+mn-ea"/>
+                <a:cs typeface="+mn-cs"/>
+              </a:rPr>
+              <a:t> </a:t>
+            </a:r>
+            <a:r>
+              <a:rPr lang="ko-KR" altLang="ko-KR" sz="1200" b="0" i="0" kern="1200" dirty="0" err="1">
+                <a:solidFill>
+                  <a:schemeClr val="tx1"/>
+                </a:solidFill>
+                <a:effectLst/>
+                <a:latin typeface="+mn-lt"/>
+                <a:ea typeface="+mn-ea"/>
+                <a:cs typeface="+mn-cs"/>
+              </a:rPr>
+              <a:t>are</a:t>
+            </a:r>
+            <a:r>
+              <a:rPr lang="ko-KR" altLang="ko-KR" sz="1200" b="0" i="0" kern="1200" dirty="0">
+                <a:solidFill>
+                  <a:schemeClr val="tx1"/>
+                </a:solidFill>
+                <a:effectLst/>
+                <a:latin typeface="+mn-lt"/>
+                <a:ea typeface="+mn-ea"/>
+                <a:cs typeface="+mn-cs"/>
+              </a:rPr>
+              <a:t> </a:t>
+            </a:r>
+            <a:r>
+              <a:rPr lang="ko-KR" altLang="ko-KR" sz="1200" b="0" i="0" kern="1200" dirty="0" err="1">
+                <a:solidFill>
+                  <a:schemeClr val="tx1"/>
+                </a:solidFill>
+                <a:effectLst/>
+                <a:latin typeface="+mn-lt"/>
+                <a:ea typeface="+mn-ea"/>
+                <a:cs typeface="+mn-cs"/>
+              </a:rPr>
+              <a:t>these</a:t>
+            </a:r>
+            <a:r>
+              <a:rPr lang="ko-KR" altLang="ko-KR" sz="1200" b="0" i="0" kern="1200" dirty="0">
+                <a:solidFill>
+                  <a:schemeClr val="tx1"/>
+                </a:solidFill>
+                <a:effectLst/>
+                <a:latin typeface="+mn-lt"/>
+                <a:ea typeface="+mn-ea"/>
+                <a:cs typeface="+mn-cs"/>
+              </a:rPr>
+              <a:t> </a:t>
+            </a:r>
+            <a:r>
+              <a:rPr lang="ko-KR" altLang="ko-KR" sz="1200" b="0" i="0" kern="1200" dirty="0" err="1">
+                <a:solidFill>
+                  <a:schemeClr val="tx1"/>
+                </a:solidFill>
+                <a:effectLst/>
+                <a:latin typeface="+mn-lt"/>
+                <a:ea typeface="+mn-ea"/>
+                <a:cs typeface="+mn-cs"/>
+              </a:rPr>
+              <a:t>two</a:t>
+            </a:r>
+            <a:r>
+              <a:rPr lang="ko-KR" altLang="ko-KR" sz="1200" b="0" i="0" kern="1200" dirty="0">
+                <a:solidFill>
+                  <a:schemeClr val="tx1"/>
+                </a:solidFill>
+                <a:effectLst/>
+                <a:latin typeface="+mn-lt"/>
+                <a:ea typeface="+mn-ea"/>
+                <a:cs typeface="+mn-cs"/>
+              </a:rPr>
+              <a:t> </a:t>
+            </a:r>
+            <a:r>
+              <a:rPr lang="ko-KR" altLang="ko-KR" sz="1200" b="0" i="0" kern="1200" dirty="0" err="1">
+                <a:solidFill>
+                  <a:schemeClr val="tx1"/>
+                </a:solidFill>
+                <a:effectLst/>
+                <a:latin typeface="+mn-lt"/>
+                <a:ea typeface="+mn-ea"/>
+                <a:cs typeface="+mn-cs"/>
+              </a:rPr>
+              <a:t>groups</a:t>
+            </a:r>
+            <a:r>
+              <a:rPr lang="ko-KR" altLang="ko-KR" sz="1200" b="0" i="0" kern="1200" dirty="0">
+                <a:solidFill>
+                  <a:schemeClr val="tx1"/>
+                </a:solidFill>
+                <a:effectLst/>
+                <a:latin typeface="+mn-lt"/>
+                <a:ea typeface="+mn-ea"/>
+                <a:cs typeface="+mn-cs"/>
+              </a:rPr>
+              <a:t>?</a:t>
+            </a:r>
+          </a:p>
+          <a:p>
+            <a:r>
+              <a:rPr lang="ko-KR" altLang="ko-KR" sz="1200" b="0" i="0" kern="1200" dirty="0" err="1">
+                <a:solidFill>
+                  <a:schemeClr val="tx1"/>
+                </a:solidFill>
+                <a:effectLst/>
+                <a:latin typeface="+mn-lt"/>
+                <a:ea typeface="+mn-ea"/>
+                <a:cs typeface="+mn-cs"/>
+              </a:rPr>
+              <a:t>A</a:t>
+            </a:r>
+            <a:r>
+              <a:rPr lang="ko-KR" altLang="ko-KR" sz="1200" b="0" i="0" kern="1200" dirty="0">
+                <a:solidFill>
+                  <a:schemeClr val="tx1"/>
+                </a:solidFill>
+                <a:effectLst/>
+                <a:latin typeface="+mn-lt"/>
+                <a:ea typeface="+mn-ea"/>
+                <a:cs typeface="+mn-cs"/>
+              </a:rPr>
+              <a:t> </a:t>
+            </a:r>
+            <a:r>
+              <a:rPr lang="ko-KR" altLang="ko-KR" sz="1200" b="0" i="0" kern="1200" dirty="0" err="1">
+                <a:solidFill>
+                  <a:schemeClr val="tx1"/>
+                </a:solidFill>
+                <a:effectLst/>
+                <a:latin typeface="+mn-lt"/>
+                <a:ea typeface="+mn-ea"/>
+                <a:cs typeface="+mn-cs"/>
+              </a:rPr>
+              <a:t>t-stat</a:t>
+            </a:r>
+            <a:r>
+              <a:rPr lang="ko-KR" altLang="ko-KR" sz="1200" b="0" i="0" kern="1200" dirty="0">
+                <a:solidFill>
+                  <a:schemeClr val="tx1"/>
+                </a:solidFill>
+                <a:effectLst/>
+                <a:latin typeface="+mn-lt"/>
+                <a:ea typeface="+mn-ea"/>
+                <a:cs typeface="+mn-cs"/>
+              </a:rPr>
+              <a:t> of </a:t>
+            </a:r>
+            <a:r>
+              <a:rPr lang="ko-KR" altLang="ko-KR" sz="1200" b="1" i="0" kern="1200" dirty="0">
+                <a:solidFill>
+                  <a:schemeClr val="tx1"/>
+                </a:solidFill>
+                <a:effectLst/>
+                <a:latin typeface="+mn-lt"/>
+                <a:ea typeface="+mn-ea"/>
+                <a:cs typeface="+mn-cs"/>
+              </a:rPr>
+              <a:t>15.22</a:t>
+            </a:r>
+            <a:r>
+              <a:rPr lang="ko-KR" altLang="ko-KR" sz="1200" b="0" i="0" kern="1200" dirty="0">
+                <a:solidFill>
+                  <a:schemeClr val="tx1"/>
+                </a:solidFill>
+                <a:effectLst/>
+                <a:latin typeface="+mn-lt"/>
+                <a:ea typeface="+mn-ea"/>
+                <a:cs typeface="+mn-cs"/>
+              </a:rPr>
+              <a:t> </a:t>
+            </a:r>
+            <a:r>
+              <a:rPr lang="ko-KR" altLang="ko-KR" sz="1200" b="0" i="0" kern="1200" dirty="0" err="1">
+                <a:solidFill>
+                  <a:schemeClr val="tx1"/>
+                </a:solidFill>
+                <a:effectLst/>
+                <a:latin typeface="+mn-lt"/>
+                <a:ea typeface="+mn-ea"/>
+                <a:cs typeface="+mn-cs"/>
+              </a:rPr>
+              <a:t>means</a:t>
+            </a:r>
+            <a:r>
+              <a:rPr lang="ko-KR" altLang="ko-KR" sz="1200" b="0" i="0" kern="1200" dirty="0">
+                <a:solidFill>
+                  <a:schemeClr val="tx1"/>
+                </a:solidFill>
+                <a:effectLst/>
+                <a:latin typeface="+mn-lt"/>
+                <a:ea typeface="+mn-ea"/>
+                <a:cs typeface="+mn-cs"/>
+              </a:rPr>
+              <a:t> </a:t>
+            </a:r>
+            <a:r>
+              <a:rPr lang="ko-KR" altLang="ko-KR" sz="1200" b="0" i="0" kern="1200" dirty="0" err="1">
+                <a:solidFill>
+                  <a:schemeClr val="tx1"/>
+                </a:solidFill>
+                <a:effectLst/>
+                <a:latin typeface="+mn-lt"/>
+                <a:ea typeface="+mn-ea"/>
+                <a:cs typeface="+mn-cs"/>
+              </a:rPr>
+              <a:t>the</a:t>
+            </a:r>
+            <a:r>
+              <a:rPr lang="ko-KR" altLang="ko-KR" sz="1200" b="0" i="0" kern="1200" dirty="0">
+                <a:solidFill>
+                  <a:schemeClr val="tx1"/>
+                </a:solidFill>
+                <a:effectLst/>
+                <a:latin typeface="+mn-lt"/>
+                <a:ea typeface="+mn-ea"/>
+                <a:cs typeface="+mn-cs"/>
+              </a:rPr>
+              <a:t> </a:t>
+            </a:r>
+            <a:r>
+              <a:rPr lang="ko-KR" altLang="ko-KR" sz="1200" b="0" i="0" kern="1200" dirty="0" err="1">
+                <a:solidFill>
+                  <a:schemeClr val="tx1"/>
+                </a:solidFill>
+                <a:effectLst/>
+                <a:latin typeface="+mn-lt"/>
+                <a:ea typeface="+mn-ea"/>
+                <a:cs typeface="+mn-cs"/>
+              </a:rPr>
+              <a:t>two</a:t>
+            </a:r>
+            <a:r>
+              <a:rPr lang="ko-KR" altLang="ko-KR" sz="1200" b="0" i="0" kern="1200" dirty="0">
+                <a:solidFill>
+                  <a:schemeClr val="tx1"/>
+                </a:solidFill>
+                <a:effectLst/>
+                <a:latin typeface="+mn-lt"/>
+                <a:ea typeface="+mn-ea"/>
+                <a:cs typeface="+mn-cs"/>
+              </a:rPr>
+              <a:t> </a:t>
+            </a:r>
+            <a:r>
+              <a:rPr lang="ko-KR" altLang="ko-KR" sz="1200" b="0" i="0" kern="1200" dirty="0" err="1">
+                <a:solidFill>
+                  <a:schemeClr val="tx1"/>
+                </a:solidFill>
+                <a:effectLst/>
+                <a:latin typeface="+mn-lt"/>
+                <a:ea typeface="+mn-ea"/>
+                <a:cs typeface="+mn-cs"/>
+              </a:rPr>
+              <a:t>groups</a:t>
+            </a:r>
+            <a:r>
+              <a:rPr lang="ko-KR" altLang="ko-KR" sz="1200" b="0" i="0" kern="1200" dirty="0">
+                <a:solidFill>
+                  <a:schemeClr val="tx1"/>
+                </a:solidFill>
+                <a:effectLst/>
+                <a:latin typeface="+mn-lt"/>
+                <a:ea typeface="+mn-ea"/>
+                <a:cs typeface="+mn-cs"/>
+              </a:rPr>
+              <a:t> </a:t>
+            </a:r>
+            <a:r>
+              <a:rPr lang="ko-KR" altLang="ko-KR" sz="1200" b="0" i="0" kern="1200" dirty="0" err="1">
+                <a:solidFill>
+                  <a:schemeClr val="tx1"/>
+                </a:solidFill>
+                <a:effectLst/>
+                <a:latin typeface="+mn-lt"/>
+                <a:ea typeface="+mn-ea"/>
+                <a:cs typeface="+mn-cs"/>
+              </a:rPr>
+              <a:t>are</a:t>
+            </a:r>
+            <a:r>
+              <a:rPr lang="ko-KR" altLang="ko-KR" sz="1200" b="0" i="0" kern="1200" dirty="0">
+                <a:solidFill>
+                  <a:schemeClr val="tx1"/>
+                </a:solidFill>
+                <a:effectLst/>
+                <a:latin typeface="+mn-lt"/>
+                <a:ea typeface="+mn-ea"/>
+                <a:cs typeface="+mn-cs"/>
+              </a:rPr>
+              <a:t> 15 </a:t>
+            </a:r>
+            <a:r>
+              <a:rPr lang="ko-KR" altLang="ko-KR" sz="1200" b="0" i="0" kern="1200" dirty="0" err="1">
+                <a:solidFill>
+                  <a:schemeClr val="tx1"/>
+                </a:solidFill>
+                <a:effectLst/>
+                <a:latin typeface="+mn-lt"/>
+                <a:ea typeface="+mn-ea"/>
+                <a:cs typeface="+mn-cs"/>
+              </a:rPr>
+              <a:t>standard</a:t>
+            </a:r>
+            <a:r>
+              <a:rPr lang="ko-KR" altLang="ko-KR" sz="1200" b="0" i="0" kern="1200" dirty="0">
+                <a:solidFill>
+                  <a:schemeClr val="tx1"/>
+                </a:solidFill>
+                <a:effectLst/>
+                <a:latin typeface="+mn-lt"/>
+                <a:ea typeface="+mn-ea"/>
+                <a:cs typeface="+mn-cs"/>
+              </a:rPr>
+              <a:t> </a:t>
+            </a:r>
+            <a:r>
+              <a:rPr lang="ko-KR" altLang="ko-KR" sz="1200" b="0" i="0" kern="1200" dirty="0" err="1">
+                <a:solidFill>
+                  <a:schemeClr val="tx1"/>
+                </a:solidFill>
+                <a:effectLst/>
+                <a:latin typeface="+mn-lt"/>
+                <a:ea typeface="+mn-ea"/>
+                <a:cs typeface="+mn-cs"/>
+              </a:rPr>
+              <a:t>deviations</a:t>
+            </a:r>
+            <a:r>
+              <a:rPr lang="ko-KR" altLang="ko-KR" sz="1200" b="0" i="0" kern="1200" dirty="0">
+                <a:solidFill>
+                  <a:schemeClr val="tx1"/>
+                </a:solidFill>
+                <a:effectLst/>
+                <a:latin typeface="+mn-lt"/>
+                <a:ea typeface="+mn-ea"/>
+                <a:cs typeface="+mn-cs"/>
+              </a:rPr>
+              <a:t> </a:t>
+            </a:r>
+            <a:r>
+              <a:rPr lang="ko-KR" altLang="ko-KR" sz="1200" b="0" i="0" kern="1200" dirty="0" err="1">
+                <a:solidFill>
+                  <a:schemeClr val="tx1"/>
+                </a:solidFill>
+                <a:effectLst/>
+                <a:latin typeface="+mn-lt"/>
+                <a:ea typeface="+mn-ea"/>
+                <a:cs typeface="+mn-cs"/>
+              </a:rPr>
+              <a:t>apart</a:t>
+            </a:r>
+            <a:r>
+              <a:rPr lang="ko-KR" altLang="ko-KR" sz="1200" b="0" i="0" kern="1200" dirty="0">
+                <a:solidFill>
+                  <a:schemeClr val="tx1"/>
+                </a:solidFill>
+                <a:effectLst/>
+                <a:latin typeface="+mn-lt"/>
+                <a:ea typeface="+mn-ea"/>
+                <a:cs typeface="+mn-cs"/>
+              </a:rPr>
+              <a:t>. </a:t>
+            </a:r>
+            <a:r>
+              <a:rPr lang="ko-KR" altLang="ko-KR" sz="1200" b="0" i="0" kern="1200" dirty="0" err="1">
+                <a:solidFill>
+                  <a:schemeClr val="tx1"/>
+                </a:solidFill>
+                <a:effectLst/>
+                <a:latin typeface="+mn-lt"/>
+                <a:ea typeface="+mn-ea"/>
+                <a:cs typeface="+mn-cs"/>
+              </a:rPr>
+              <a:t>In</a:t>
+            </a:r>
+            <a:r>
+              <a:rPr lang="ko-KR" altLang="ko-KR" sz="1200" b="0" i="0" kern="1200" dirty="0">
+                <a:solidFill>
+                  <a:schemeClr val="tx1"/>
+                </a:solidFill>
+                <a:effectLst/>
+                <a:latin typeface="+mn-lt"/>
+                <a:ea typeface="+mn-ea"/>
+                <a:cs typeface="+mn-cs"/>
+              </a:rPr>
+              <a:t> </a:t>
+            </a:r>
+            <a:r>
+              <a:rPr lang="ko-KR" altLang="ko-KR" sz="1200" b="0" i="0" kern="1200" dirty="0" err="1">
+                <a:solidFill>
+                  <a:schemeClr val="tx1"/>
+                </a:solidFill>
+                <a:effectLst/>
+                <a:latin typeface="+mn-lt"/>
+                <a:ea typeface="+mn-ea"/>
+                <a:cs typeface="+mn-cs"/>
+              </a:rPr>
+              <a:t>statistics</a:t>
+            </a:r>
+            <a:r>
+              <a:rPr lang="ko-KR" altLang="ko-KR" sz="1200" b="0" i="0" kern="1200" dirty="0">
+                <a:solidFill>
+                  <a:schemeClr val="tx1"/>
+                </a:solidFill>
+                <a:effectLst/>
+                <a:latin typeface="+mn-lt"/>
+                <a:ea typeface="+mn-ea"/>
+                <a:cs typeface="+mn-cs"/>
+              </a:rPr>
+              <a:t>, </a:t>
+            </a:r>
+            <a:r>
+              <a:rPr lang="ko-KR" altLang="ko-KR" sz="1200" b="0" i="0" kern="1200" dirty="0" err="1">
+                <a:solidFill>
+                  <a:schemeClr val="tx1"/>
+                </a:solidFill>
+                <a:effectLst/>
+                <a:latin typeface="+mn-lt"/>
+                <a:ea typeface="+mn-ea"/>
+                <a:cs typeface="+mn-cs"/>
+              </a:rPr>
+              <a:t>anything</a:t>
+            </a:r>
+            <a:r>
+              <a:rPr lang="ko-KR" altLang="ko-KR" sz="1200" b="0" i="0" kern="1200" dirty="0">
+                <a:solidFill>
+                  <a:schemeClr val="tx1"/>
+                </a:solidFill>
+                <a:effectLst/>
+                <a:latin typeface="+mn-lt"/>
+                <a:ea typeface="+mn-ea"/>
+                <a:cs typeface="+mn-cs"/>
+              </a:rPr>
+              <a:t> </a:t>
+            </a:r>
+            <a:r>
+              <a:rPr lang="ko-KR" altLang="ko-KR" sz="1200" b="0" i="0" kern="1200" dirty="0" err="1">
+                <a:solidFill>
+                  <a:schemeClr val="tx1"/>
+                </a:solidFill>
+                <a:effectLst/>
+                <a:latin typeface="+mn-lt"/>
+                <a:ea typeface="+mn-ea"/>
+                <a:cs typeface="+mn-cs"/>
+              </a:rPr>
+              <a:t>above</a:t>
+            </a:r>
+            <a:r>
+              <a:rPr lang="ko-KR" altLang="ko-KR" sz="1200" b="0" i="0" kern="1200" dirty="0">
+                <a:solidFill>
+                  <a:schemeClr val="tx1"/>
+                </a:solidFill>
+                <a:effectLst/>
+                <a:latin typeface="+mn-lt"/>
+                <a:ea typeface="+mn-ea"/>
+                <a:cs typeface="+mn-cs"/>
+              </a:rPr>
+              <a:t> </a:t>
+            </a:r>
+            <a:r>
+              <a:rPr lang="ko-KR" altLang="ko-KR" sz="1200" b="0" i="0" kern="1200" dirty="0" err="1">
+                <a:solidFill>
+                  <a:schemeClr val="tx1"/>
+                </a:solidFill>
+                <a:effectLst/>
+                <a:latin typeface="+mn-lt"/>
+                <a:ea typeface="+mn-ea"/>
+                <a:cs typeface="+mn-cs"/>
+              </a:rPr>
+              <a:t>roughly</a:t>
+            </a:r>
+            <a:r>
+              <a:rPr lang="ko-KR" altLang="ko-KR" sz="1200" b="0" i="0" kern="1200" dirty="0">
+                <a:solidFill>
+                  <a:schemeClr val="tx1"/>
+                </a:solidFill>
+                <a:effectLst/>
+                <a:latin typeface="+mn-lt"/>
+                <a:ea typeface="+mn-ea"/>
+                <a:cs typeface="+mn-cs"/>
+              </a:rPr>
+              <a:t> 2 </a:t>
+            </a:r>
+            <a:r>
+              <a:rPr lang="ko-KR" altLang="ko-KR" sz="1200" b="0" i="0" kern="1200" dirty="0" err="1">
+                <a:solidFill>
+                  <a:schemeClr val="tx1"/>
+                </a:solidFill>
+                <a:effectLst/>
+                <a:latin typeface="+mn-lt"/>
+                <a:ea typeface="+mn-ea"/>
+                <a:cs typeface="+mn-cs"/>
+              </a:rPr>
+              <a:t>is</a:t>
+            </a:r>
+            <a:r>
+              <a:rPr lang="ko-KR" altLang="ko-KR" sz="1200" b="0" i="0" kern="1200" dirty="0">
+                <a:solidFill>
+                  <a:schemeClr val="tx1"/>
+                </a:solidFill>
+                <a:effectLst/>
+                <a:latin typeface="+mn-lt"/>
+                <a:ea typeface="+mn-ea"/>
+                <a:cs typeface="+mn-cs"/>
+              </a:rPr>
+              <a:t> </a:t>
+            </a:r>
+            <a:r>
+              <a:rPr lang="ko-KR" altLang="ko-KR" sz="1200" b="0" i="0" kern="1200" dirty="0" err="1">
+                <a:solidFill>
+                  <a:schemeClr val="tx1"/>
+                </a:solidFill>
+                <a:effectLst/>
+                <a:latin typeface="+mn-lt"/>
+                <a:ea typeface="+mn-ea"/>
+                <a:cs typeface="+mn-cs"/>
+              </a:rPr>
+              <a:t>considered</a:t>
+            </a:r>
+            <a:r>
+              <a:rPr lang="ko-KR" altLang="ko-KR" sz="1200" b="0" i="0" kern="1200" dirty="0">
+                <a:solidFill>
+                  <a:schemeClr val="tx1"/>
+                </a:solidFill>
+                <a:effectLst/>
+                <a:latin typeface="+mn-lt"/>
+                <a:ea typeface="+mn-ea"/>
+                <a:cs typeface="+mn-cs"/>
+              </a:rPr>
+              <a:t> </a:t>
+            </a:r>
+            <a:r>
+              <a:rPr lang="ko-KR" altLang="ko-KR" sz="1200" b="0" i="0" kern="1200" dirty="0" err="1">
+                <a:solidFill>
+                  <a:schemeClr val="tx1"/>
+                </a:solidFill>
+                <a:effectLst/>
+                <a:latin typeface="+mn-lt"/>
+                <a:ea typeface="+mn-ea"/>
+                <a:cs typeface="+mn-cs"/>
+              </a:rPr>
+              <a:t>significant</a:t>
+            </a:r>
+            <a:r>
+              <a:rPr lang="ko-KR" altLang="ko-KR" sz="1200" b="0" i="0" kern="1200" dirty="0">
+                <a:solidFill>
+                  <a:schemeClr val="tx1"/>
+                </a:solidFill>
+                <a:effectLst/>
+                <a:latin typeface="+mn-lt"/>
+                <a:ea typeface="+mn-ea"/>
+                <a:cs typeface="+mn-cs"/>
+              </a:rPr>
+              <a:t>. </a:t>
+            </a:r>
+            <a:r>
+              <a:rPr lang="ko-KR" altLang="ko-KR" sz="1200" b="0" i="0" kern="1200" dirty="0" err="1">
+                <a:solidFill>
+                  <a:schemeClr val="tx1"/>
+                </a:solidFill>
+                <a:effectLst/>
+                <a:latin typeface="+mn-lt"/>
+                <a:ea typeface="+mn-ea"/>
+                <a:cs typeface="+mn-cs"/>
+              </a:rPr>
+              <a:t>At</a:t>
+            </a:r>
+            <a:r>
+              <a:rPr lang="ko-KR" altLang="ko-KR" sz="1200" b="0" i="0" kern="1200" dirty="0">
+                <a:solidFill>
+                  <a:schemeClr val="tx1"/>
+                </a:solidFill>
+                <a:effectLst/>
+                <a:latin typeface="+mn-lt"/>
+                <a:ea typeface="+mn-ea"/>
+                <a:cs typeface="+mn-cs"/>
+              </a:rPr>
+              <a:t> 15, </a:t>
+            </a:r>
+            <a:r>
+              <a:rPr lang="ko-KR" altLang="ko-KR" sz="1200" b="0" i="0" kern="1200" dirty="0" err="1">
+                <a:solidFill>
+                  <a:schemeClr val="tx1"/>
+                </a:solidFill>
+                <a:effectLst/>
+                <a:latin typeface="+mn-lt"/>
+                <a:ea typeface="+mn-ea"/>
+                <a:cs typeface="+mn-cs"/>
+              </a:rPr>
+              <a:t>it</a:t>
+            </a:r>
+            <a:r>
+              <a:rPr lang="ko-KR" altLang="ko-KR" sz="1200" b="0" i="0" kern="1200" dirty="0">
+                <a:solidFill>
+                  <a:schemeClr val="tx1"/>
+                </a:solidFill>
+                <a:effectLst/>
+                <a:latin typeface="+mn-lt"/>
+                <a:ea typeface="+mn-ea"/>
+                <a:cs typeface="+mn-cs"/>
+              </a:rPr>
+              <a:t> </a:t>
+            </a:r>
+            <a:r>
+              <a:rPr lang="ko-KR" altLang="ko-KR" sz="1200" b="0" i="0" kern="1200" dirty="0" err="1">
+                <a:solidFill>
+                  <a:schemeClr val="tx1"/>
+                </a:solidFill>
+                <a:effectLst/>
+                <a:latin typeface="+mn-lt"/>
+                <a:ea typeface="+mn-ea"/>
+                <a:cs typeface="+mn-cs"/>
+              </a:rPr>
+              <a:t>is</a:t>
+            </a:r>
+            <a:r>
+              <a:rPr lang="ko-KR" altLang="ko-KR" sz="1200" b="0" i="0" kern="1200" dirty="0">
+                <a:solidFill>
+                  <a:schemeClr val="tx1"/>
+                </a:solidFill>
+                <a:effectLst/>
+                <a:latin typeface="+mn-lt"/>
+                <a:ea typeface="+mn-ea"/>
+                <a:cs typeface="+mn-cs"/>
+              </a:rPr>
+              <a:t> </a:t>
+            </a:r>
+            <a:r>
+              <a:rPr lang="ko-KR" altLang="ko-KR" sz="1200" b="0" i="0" kern="1200" dirty="0" err="1">
+                <a:solidFill>
+                  <a:schemeClr val="tx1"/>
+                </a:solidFill>
+                <a:effectLst/>
+                <a:latin typeface="+mn-lt"/>
+                <a:ea typeface="+mn-ea"/>
+                <a:cs typeface="+mn-cs"/>
+              </a:rPr>
+              <a:t>essentially</a:t>
+            </a:r>
+            <a:r>
+              <a:rPr lang="ko-KR" altLang="ko-KR" sz="1200" b="0" i="0" kern="1200" dirty="0">
+                <a:solidFill>
+                  <a:schemeClr val="tx1"/>
+                </a:solidFill>
+                <a:effectLst/>
+                <a:latin typeface="+mn-lt"/>
+                <a:ea typeface="+mn-ea"/>
+                <a:cs typeface="+mn-cs"/>
+              </a:rPr>
+              <a:t> </a:t>
+            </a:r>
+            <a:r>
+              <a:rPr lang="ko-KR" altLang="ko-KR" sz="1200" b="0" i="0" kern="1200" dirty="0" err="1">
+                <a:solidFill>
+                  <a:schemeClr val="tx1"/>
+                </a:solidFill>
+                <a:effectLst/>
+                <a:latin typeface="+mn-lt"/>
+                <a:ea typeface="+mn-ea"/>
+                <a:cs typeface="+mn-cs"/>
+              </a:rPr>
+              <a:t>impossible</a:t>
+            </a:r>
+            <a:r>
+              <a:rPr lang="ko-KR" altLang="ko-KR" sz="1200" b="0" i="0" kern="1200" dirty="0">
+                <a:solidFill>
+                  <a:schemeClr val="tx1"/>
+                </a:solidFill>
+                <a:effectLst/>
+                <a:latin typeface="+mn-lt"/>
+                <a:ea typeface="+mn-ea"/>
+                <a:cs typeface="+mn-cs"/>
+              </a:rPr>
+              <a:t> </a:t>
+            </a:r>
+            <a:r>
+              <a:rPr lang="ko-KR" altLang="ko-KR" sz="1200" b="0" i="0" kern="1200" dirty="0" err="1">
+                <a:solidFill>
+                  <a:schemeClr val="tx1"/>
+                </a:solidFill>
+                <a:effectLst/>
+                <a:latin typeface="+mn-lt"/>
+                <a:ea typeface="+mn-ea"/>
+                <a:cs typeface="+mn-cs"/>
+              </a:rPr>
+              <a:t>that</a:t>
+            </a:r>
+            <a:r>
+              <a:rPr lang="ko-KR" altLang="ko-KR" sz="1200" b="0" i="0" kern="1200" dirty="0">
+                <a:solidFill>
+                  <a:schemeClr val="tx1"/>
+                </a:solidFill>
+                <a:effectLst/>
+                <a:latin typeface="+mn-lt"/>
+                <a:ea typeface="+mn-ea"/>
+                <a:cs typeface="+mn-cs"/>
+              </a:rPr>
+              <a:t> </a:t>
+            </a:r>
+            <a:r>
+              <a:rPr lang="ko-KR" altLang="ko-KR" sz="1200" b="0" i="0" kern="1200" dirty="0" err="1">
+                <a:solidFill>
+                  <a:schemeClr val="tx1"/>
+                </a:solidFill>
+                <a:effectLst/>
+                <a:latin typeface="+mn-lt"/>
+                <a:ea typeface="+mn-ea"/>
+                <a:cs typeface="+mn-cs"/>
+              </a:rPr>
+              <a:t>this</a:t>
+            </a:r>
+            <a:r>
+              <a:rPr lang="ko-KR" altLang="ko-KR" sz="1200" b="0" i="0" kern="1200" dirty="0">
+                <a:solidFill>
+                  <a:schemeClr val="tx1"/>
+                </a:solidFill>
+                <a:effectLst/>
+                <a:latin typeface="+mn-lt"/>
+                <a:ea typeface="+mn-ea"/>
+                <a:cs typeface="+mn-cs"/>
+              </a:rPr>
+              <a:t> </a:t>
+            </a:r>
+            <a:r>
+              <a:rPr lang="ko-KR" altLang="ko-KR" sz="1200" b="0" i="0" kern="1200" dirty="0" err="1">
+                <a:solidFill>
+                  <a:schemeClr val="tx1"/>
+                </a:solidFill>
+                <a:effectLst/>
+                <a:latin typeface="+mn-lt"/>
+                <a:ea typeface="+mn-ea"/>
+                <a:cs typeface="+mn-cs"/>
+              </a:rPr>
+              <a:t>difference</a:t>
+            </a:r>
+            <a:r>
+              <a:rPr lang="ko-KR" altLang="ko-KR" sz="1200" b="0" i="0" kern="1200" dirty="0">
+                <a:solidFill>
+                  <a:schemeClr val="tx1"/>
+                </a:solidFill>
+                <a:effectLst/>
+                <a:latin typeface="+mn-lt"/>
+                <a:ea typeface="+mn-ea"/>
+                <a:cs typeface="+mn-cs"/>
+              </a:rPr>
+              <a:t> </a:t>
+            </a:r>
+            <a:r>
+              <a:rPr lang="ko-KR" altLang="ko-KR" sz="1200" b="0" i="0" kern="1200" dirty="0" err="1">
+                <a:solidFill>
+                  <a:schemeClr val="tx1"/>
+                </a:solidFill>
+                <a:effectLst/>
+                <a:latin typeface="+mn-lt"/>
+                <a:ea typeface="+mn-ea"/>
+                <a:cs typeface="+mn-cs"/>
+              </a:rPr>
+              <a:t>happened</a:t>
+            </a:r>
+            <a:r>
+              <a:rPr lang="ko-KR" altLang="ko-KR" sz="1200" b="0" i="0" kern="1200" dirty="0">
+                <a:solidFill>
+                  <a:schemeClr val="tx1"/>
+                </a:solidFill>
+                <a:effectLst/>
+                <a:latin typeface="+mn-lt"/>
+                <a:ea typeface="+mn-ea"/>
+                <a:cs typeface="+mn-cs"/>
+              </a:rPr>
+              <a:t> </a:t>
+            </a:r>
+            <a:r>
+              <a:rPr lang="ko-KR" altLang="ko-KR" sz="1200" b="0" i="0" kern="1200" dirty="0" err="1">
+                <a:solidFill>
+                  <a:schemeClr val="tx1"/>
+                </a:solidFill>
+                <a:effectLst/>
+                <a:latin typeface="+mn-lt"/>
+                <a:ea typeface="+mn-ea"/>
+                <a:cs typeface="+mn-cs"/>
+              </a:rPr>
+              <a:t>by</a:t>
+            </a:r>
+            <a:r>
+              <a:rPr lang="ko-KR" altLang="ko-KR" sz="1200" b="0" i="0" kern="1200" dirty="0">
+                <a:solidFill>
+                  <a:schemeClr val="tx1"/>
+                </a:solidFill>
+                <a:effectLst/>
+                <a:latin typeface="+mn-lt"/>
+                <a:ea typeface="+mn-ea"/>
+                <a:cs typeface="+mn-cs"/>
+              </a:rPr>
+              <a:t> </a:t>
+            </a:r>
+            <a:r>
+              <a:rPr lang="ko-KR" altLang="ko-KR" sz="1200" b="0" i="0" kern="1200" dirty="0" err="1">
+                <a:solidFill>
+                  <a:schemeClr val="tx1"/>
+                </a:solidFill>
+                <a:effectLst/>
+                <a:latin typeface="+mn-lt"/>
+                <a:ea typeface="+mn-ea"/>
+                <a:cs typeface="+mn-cs"/>
+              </a:rPr>
+              <a:t>chance</a:t>
+            </a:r>
+            <a:r>
+              <a:rPr lang="ko-KR" altLang="ko-KR" sz="1200" b="0" i="0" kern="1200" dirty="0">
+                <a:solidFill>
+                  <a:schemeClr val="tx1"/>
+                </a:solidFill>
+                <a:effectLst/>
+                <a:latin typeface="+mn-lt"/>
+                <a:ea typeface="+mn-ea"/>
+                <a:cs typeface="+mn-cs"/>
+              </a:rPr>
+              <a:t>.</a:t>
+            </a:r>
+          </a:p>
+          <a:p>
+            <a:r>
+              <a:rPr lang="ko-KR" altLang="ko-KR" sz="1200" b="1" i="0" kern="1200" dirty="0" err="1">
+                <a:solidFill>
+                  <a:schemeClr val="tx1"/>
+                </a:solidFill>
+                <a:effectLst/>
+                <a:latin typeface="+mn-lt"/>
+                <a:ea typeface="+mn-ea"/>
+                <a:cs typeface="+mn-cs"/>
+              </a:rPr>
+              <a:t>p</a:t>
+            </a:r>
+            <a:r>
+              <a:rPr lang="ko-KR" altLang="ko-KR" sz="1200" b="1" i="0" kern="1200" dirty="0">
+                <a:solidFill>
+                  <a:schemeClr val="tx1"/>
+                </a:solidFill>
+                <a:effectLst/>
+                <a:latin typeface="+mn-lt"/>
+                <a:ea typeface="+mn-ea"/>
+                <a:cs typeface="+mn-cs"/>
+              </a:rPr>
+              <a:t> &lt; 0.001</a:t>
+            </a:r>
+            <a:r>
+              <a:rPr lang="ko-KR" altLang="ko-KR" sz="1200" b="0" i="0" kern="1200" dirty="0">
+                <a:solidFill>
+                  <a:schemeClr val="tx1"/>
+                </a:solidFill>
+                <a:effectLst/>
+                <a:latin typeface="+mn-lt"/>
+                <a:ea typeface="+mn-ea"/>
+                <a:cs typeface="+mn-cs"/>
+              </a:rPr>
+              <a:t> </a:t>
+            </a:r>
+            <a:r>
+              <a:rPr lang="ko-KR" altLang="ko-KR" sz="1200" b="0" i="0" kern="1200" dirty="0" err="1">
+                <a:solidFill>
+                  <a:schemeClr val="tx1"/>
+                </a:solidFill>
+                <a:effectLst/>
+                <a:latin typeface="+mn-lt"/>
+                <a:ea typeface="+mn-ea"/>
+                <a:cs typeface="+mn-cs"/>
+              </a:rPr>
+              <a:t>means</a:t>
+            </a:r>
+            <a:r>
+              <a:rPr lang="ko-KR" altLang="ko-KR" sz="1200" b="0" i="0" kern="1200" dirty="0">
+                <a:solidFill>
+                  <a:schemeClr val="tx1"/>
+                </a:solidFill>
+                <a:effectLst/>
+                <a:latin typeface="+mn-lt"/>
+                <a:ea typeface="+mn-ea"/>
+                <a:cs typeface="+mn-cs"/>
+              </a:rPr>
+              <a:t>: </a:t>
+            </a:r>
+            <a:r>
+              <a:rPr lang="ko-KR" altLang="ko-KR" sz="1200" b="0" i="0" kern="1200" dirty="0" err="1">
+                <a:solidFill>
+                  <a:schemeClr val="tx1"/>
+                </a:solidFill>
+                <a:effectLst/>
+                <a:latin typeface="+mn-lt"/>
+                <a:ea typeface="+mn-ea"/>
+                <a:cs typeface="+mn-cs"/>
+              </a:rPr>
+              <a:t>if</a:t>
+            </a:r>
+            <a:r>
+              <a:rPr lang="ko-KR" altLang="ko-KR" sz="1200" b="0" i="0" kern="1200" dirty="0">
+                <a:solidFill>
+                  <a:schemeClr val="tx1"/>
+                </a:solidFill>
+                <a:effectLst/>
+                <a:latin typeface="+mn-lt"/>
+                <a:ea typeface="+mn-ea"/>
+                <a:cs typeface="+mn-cs"/>
+              </a:rPr>
+              <a:t> </a:t>
+            </a:r>
+            <a:r>
+              <a:rPr lang="ko-KR" altLang="ko-KR" sz="1200" b="0" i="0" kern="1200" dirty="0" err="1">
+                <a:solidFill>
+                  <a:schemeClr val="tx1"/>
+                </a:solidFill>
+                <a:effectLst/>
+                <a:latin typeface="+mn-lt"/>
+                <a:ea typeface="+mn-ea"/>
+                <a:cs typeface="+mn-cs"/>
+              </a:rPr>
+              <a:t>there</a:t>
+            </a:r>
+            <a:r>
+              <a:rPr lang="ko-KR" altLang="ko-KR" sz="1200" b="0" i="0" kern="1200" dirty="0">
+                <a:solidFill>
+                  <a:schemeClr val="tx1"/>
+                </a:solidFill>
+                <a:effectLst/>
+                <a:latin typeface="+mn-lt"/>
+                <a:ea typeface="+mn-ea"/>
+                <a:cs typeface="+mn-cs"/>
+              </a:rPr>
+              <a:t> </a:t>
+            </a:r>
+            <a:r>
+              <a:rPr lang="ko-KR" altLang="ko-KR" sz="1200" b="0" i="0" kern="1200" dirty="0" err="1">
+                <a:solidFill>
+                  <a:schemeClr val="tx1"/>
+                </a:solidFill>
+                <a:effectLst/>
+                <a:latin typeface="+mn-lt"/>
+                <a:ea typeface="+mn-ea"/>
+                <a:cs typeface="+mn-cs"/>
+              </a:rPr>
+              <a:t>were</a:t>
+            </a:r>
+            <a:r>
+              <a:rPr lang="ko-KR" altLang="ko-KR" sz="1200" b="0" i="0" kern="1200" dirty="0">
+                <a:solidFill>
+                  <a:schemeClr val="tx1"/>
+                </a:solidFill>
+                <a:effectLst/>
+                <a:latin typeface="+mn-lt"/>
+                <a:ea typeface="+mn-ea"/>
+                <a:cs typeface="+mn-cs"/>
+              </a:rPr>
+              <a:t> </a:t>
+            </a:r>
+            <a:r>
+              <a:rPr lang="ko-KR" altLang="ko-KR" sz="1200" b="0" i="0" kern="1200" dirty="0" err="1">
+                <a:solidFill>
+                  <a:schemeClr val="tx1"/>
+                </a:solidFill>
+                <a:effectLst/>
+                <a:latin typeface="+mn-lt"/>
+                <a:ea typeface="+mn-ea"/>
+                <a:cs typeface="+mn-cs"/>
+              </a:rPr>
+              <a:t>truly</a:t>
+            </a:r>
+            <a:r>
+              <a:rPr lang="ko-KR" altLang="ko-KR" sz="1200" b="0" i="0" kern="1200" dirty="0">
+                <a:solidFill>
+                  <a:schemeClr val="tx1"/>
+                </a:solidFill>
+                <a:effectLst/>
+                <a:latin typeface="+mn-lt"/>
+                <a:ea typeface="+mn-ea"/>
+                <a:cs typeface="+mn-cs"/>
+              </a:rPr>
+              <a:t> </a:t>
+            </a:r>
+            <a:r>
+              <a:rPr lang="ko-KR" altLang="ko-KR" sz="1200" b="0" i="0" kern="1200" dirty="0" err="1">
+                <a:solidFill>
+                  <a:schemeClr val="tx1"/>
+                </a:solidFill>
+                <a:effectLst/>
+                <a:latin typeface="+mn-lt"/>
+                <a:ea typeface="+mn-ea"/>
+                <a:cs typeface="+mn-cs"/>
+              </a:rPr>
+              <a:t>no</a:t>
+            </a:r>
+            <a:r>
+              <a:rPr lang="ko-KR" altLang="ko-KR" sz="1200" b="0" i="0" kern="1200" dirty="0">
+                <a:solidFill>
+                  <a:schemeClr val="tx1"/>
+                </a:solidFill>
+                <a:effectLst/>
+                <a:latin typeface="+mn-lt"/>
+                <a:ea typeface="+mn-ea"/>
+                <a:cs typeface="+mn-cs"/>
+              </a:rPr>
+              <a:t> </a:t>
+            </a:r>
+            <a:r>
+              <a:rPr lang="ko-KR" altLang="ko-KR" sz="1200" b="0" i="0" kern="1200" dirty="0" err="1">
+                <a:solidFill>
+                  <a:schemeClr val="tx1"/>
+                </a:solidFill>
+                <a:effectLst/>
+                <a:latin typeface="+mn-lt"/>
+                <a:ea typeface="+mn-ea"/>
+                <a:cs typeface="+mn-cs"/>
+              </a:rPr>
+              <a:t>difference</a:t>
+            </a:r>
+            <a:r>
+              <a:rPr lang="ko-KR" altLang="ko-KR" sz="1200" b="0" i="0" kern="1200" dirty="0">
+                <a:solidFill>
+                  <a:schemeClr val="tx1"/>
+                </a:solidFill>
+                <a:effectLst/>
+                <a:latin typeface="+mn-lt"/>
+                <a:ea typeface="+mn-ea"/>
+                <a:cs typeface="+mn-cs"/>
+              </a:rPr>
+              <a:t> </a:t>
+            </a:r>
+            <a:r>
+              <a:rPr lang="ko-KR" altLang="ko-KR" sz="1200" b="0" i="0" kern="1200" dirty="0" err="1">
+                <a:solidFill>
+                  <a:schemeClr val="tx1"/>
+                </a:solidFill>
+                <a:effectLst/>
+                <a:latin typeface="+mn-lt"/>
+                <a:ea typeface="+mn-ea"/>
+                <a:cs typeface="+mn-cs"/>
+              </a:rPr>
+              <a:t>between</a:t>
+            </a:r>
+            <a:r>
+              <a:rPr lang="ko-KR" altLang="ko-KR" sz="1200" b="0" i="0" kern="1200" dirty="0">
+                <a:solidFill>
+                  <a:schemeClr val="tx1"/>
+                </a:solidFill>
+                <a:effectLst/>
+                <a:latin typeface="+mn-lt"/>
+                <a:ea typeface="+mn-ea"/>
+                <a:cs typeface="+mn-cs"/>
+              </a:rPr>
+              <a:t> </a:t>
+            </a:r>
+            <a:r>
+              <a:rPr lang="ko-KR" altLang="ko-KR" sz="1200" b="0" i="0" kern="1200" dirty="0" err="1">
+                <a:solidFill>
+                  <a:schemeClr val="tx1"/>
+                </a:solidFill>
+                <a:effectLst/>
+                <a:latin typeface="+mn-lt"/>
+                <a:ea typeface="+mn-ea"/>
+                <a:cs typeface="+mn-cs"/>
+              </a:rPr>
+              <a:t>regimes</a:t>
+            </a:r>
+            <a:r>
+              <a:rPr lang="ko-KR" altLang="ko-KR" sz="1200" b="0" i="0" kern="1200" dirty="0">
+                <a:solidFill>
+                  <a:schemeClr val="tx1"/>
+                </a:solidFill>
+                <a:effectLst/>
+                <a:latin typeface="+mn-lt"/>
+                <a:ea typeface="+mn-ea"/>
+                <a:cs typeface="+mn-cs"/>
+              </a:rPr>
+              <a:t>, </a:t>
+            </a:r>
+            <a:r>
+              <a:rPr lang="ko-KR" altLang="ko-KR" sz="1200" b="0" i="0" kern="1200" dirty="0" err="1">
+                <a:solidFill>
+                  <a:schemeClr val="tx1"/>
+                </a:solidFill>
+                <a:effectLst/>
+                <a:latin typeface="+mn-lt"/>
+                <a:ea typeface="+mn-ea"/>
+                <a:cs typeface="+mn-cs"/>
+              </a:rPr>
+              <a:t>the</a:t>
+            </a:r>
+            <a:r>
+              <a:rPr lang="ko-KR" altLang="ko-KR" sz="1200" b="0" i="0" kern="1200" dirty="0">
+                <a:solidFill>
+                  <a:schemeClr val="tx1"/>
+                </a:solidFill>
+                <a:effectLst/>
+                <a:latin typeface="+mn-lt"/>
+                <a:ea typeface="+mn-ea"/>
+                <a:cs typeface="+mn-cs"/>
+              </a:rPr>
+              <a:t> </a:t>
+            </a:r>
+            <a:r>
+              <a:rPr lang="ko-KR" altLang="ko-KR" sz="1200" b="0" i="0" kern="1200" dirty="0" err="1">
+                <a:solidFill>
+                  <a:schemeClr val="tx1"/>
+                </a:solidFill>
+                <a:effectLst/>
+                <a:latin typeface="+mn-lt"/>
+                <a:ea typeface="+mn-ea"/>
+                <a:cs typeface="+mn-cs"/>
+              </a:rPr>
+              <a:t>probability</a:t>
+            </a:r>
+            <a:r>
+              <a:rPr lang="ko-KR" altLang="ko-KR" sz="1200" b="0" i="0" kern="1200" dirty="0">
+                <a:solidFill>
+                  <a:schemeClr val="tx1"/>
+                </a:solidFill>
+                <a:effectLst/>
+                <a:latin typeface="+mn-lt"/>
+                <a:ea typeface="+mn-ea"/>
+                <a:cs typeface="+mn-cs"/>
+              </a:rPr>
+              <a:t> of </a:t>
+            </a:r>
+            <a:r>
+              <a:rPr lang="ko-KR" altLang="ko-KR" sz="1200" b="0" i="0" kern="1200" dirty="0" err="1">
+                <a:solidFill>
+                  <a:schemeClr val="tx1"/>
+                </a:solidFill>
+                <a:effectLst/>
+                <a:latin typeface="+mn-lt"/>
+                <a:ea typeface="+mn-ea"/>
+                <a:cs typeface="+mn-cs"/>
+              </a:rPr>
+              <a:t>seeing</a:t>
+            </a:r>
+            <a:r>
+              <a:rPr lang="ko-KR" altLang="ko-KR" sz="1200" b="0" i="0" kern="1200" dirty="0">
+                <a:solidFill>
+                  <a:schemeClr val="tx1"/>
+                </a:solidFill>
+                <a:effectLst/>
+                <a:latin typeface="+mn-lt"/>
+                <a:ea typeface="+mn-ea"/>
+                <a:cs typeface="+mn-cs"/>
+              </a:rPr>
+              <a:t> </a:t>
+            </a:r>
+            <a:r>
+              <a:rPr lang="ko-KR" altLang="ko-KR" sz="1200" b="0" i="0" kern="1200" dirty="0" err="1">
+                <a:solidFill>
+                  <a:schemeClr val="tx1"/>
+                </a:solidFill>
+                <a:effectLst/>
+                <a:latin typeface="+mn-lt"/>
+                <a:ea typeface="+mn-ea"/>
+                <a:cs typeface="+mn-cs"/>
+              </a:rPr>
+              <a:t>a</a:t>
+            </a:r>
+            <a:r>
+              <a:rPr lang="ko-KR" altLang="ko-KR" sz="1200" b="0" i="0" kern="1200" dirty="0">
+                <a:solidFill>
+                  <a:schemeClr val="tx1"/>
+                </a:solidFill>
+                <a:effectLst/>
+                <a:latin typeface="+mn-lt"/>
+                <a:ea typeface="+mn-ea"/>
+                <a:cs typeface="+mn-cs"/>
+              </a:rPr>
+              <a:t> </a:t>
+            </a:r>
+            <a:r>
+              <a:rPr lang="ko-KR" altLang="ko-KR" sz="1200" b="0" i="0" kern="1200" dirty="0" err="1">
+                <a:solidFill>
+                  <a:schemeClr val="tx1"/>
+                </a:solidFill>
+                <a:effectLst/>
+                <a:latin typeface="+mn-lt"/>
+                <a:ea typeface="+mn-ea"/>
+                <a:cs typeface="+mn-cs"/>
+              </a:rPr>
+              <a:t>gap</a:t>
+            </a:r>
+            <a:r>
+              <a:rPr lang="ko-KR" altLang="ko-KR" sz="1200" b="0" i="0" kern="1200" dirty="0">
+                <a:solidFill>
+                  <a:schemeClr val="tx1"/>
+                </a:solidFill>
+                <a:effectLst/>
+                <a:latin typeface="+mn-lt"/>
+                <a:ea typeface="+mn-ea"/>
+                <a:cs typeface="+mn-cs"/>
+              </a:rPr>
+              <a:t> </a:t>
+            </a:r>
+            <a:r>
+              <a:rPr lang="ko-KR" altLang="ko-KR" sz="1200" b="0" i="0" kern="1200" dirty="0" err="1">
+                <a:solidFill>
+                  <a:schemeClr val="tx1"/>
+                </a:solidFill>
+                <a:effectLst/>
+                <a:latin typeface="+mn-lt"/>
+                <a:ea typeface="+mn-ea"/>
+                <a:cs typeface="+mn-cs"/>
+              </a:rPr>
+              <a:t>this</a:t>
+            </a:r>
+            <a:r>
+              <a:rPr lang="ko-KR" altLang="ko-KR" sz="1200" b="0" i="0" kern="1200" dirty="0">
+                <a:solidFill>
+                  <a:schemeClr val="tx1"/>
+                </a:solidFill>
+                <a:effectLst/>
+                <a:latin typeface="+mn-lt"/>
+                <a:ea typeface="+mn-ea"/>
+                <a:cs typeface="+mn-cs"/>
+              </a:rPr>
+              <a:t> </a:t>
+            </a:r>
+            <a:r>
+              <a:rPr lang="ko-KR" altLang="ko-KR" sz="1200" b="0" i="0" kern="1200" dirty="0" err="1">
+                <a:solidFill>
+                  <a:schemeClr val="tx1"/>
+                </a:solidFill>
+                <a:effectLst/>
+                <a:latin typeface="+mn-lt"/>
+                <a:ea typeface="+mn-ea"/>
+                <a:cs typeface="+mn-cs"/>
+              </a:rPr>
+              <a:t>large</a:t>
+            </a:r>
+            <a:r>
+              <a:rPr lang="ko-KR" altLang="ko-KR" sz="1200" b="0" i="0" kern="1200" dirty="0">
+                <a:solidFill>
+                  <a:schemeClr val="tx1"/>
+                </a:solidFill>
+                <a:effectLst/>
+                <a:latin typeface="+mn-lt"/>
+                <a:ea typeface="+mn-ea"/>
+                <a:cs typeface="+mn-cs"/>
+              </a:rPr>
+              <a:t> </a:t>
+            </a:r>
+            <a:r>
+              <a:rPr lang="ko-KR" altLang="ko-KR" sz="1200" b="0" i="0" kern="1200" dirty="0" err="1">
+                <a:solidFill>
+                  <a:schemeClr val="tx1"/>
+                </a:solidFill>
+                <a:effectLst/>
+                <a:latin typeface="+mn-lt"/>
+                <a:ea typeface="+mn-ea"/>
+                <a:cs typeface="+mn-cs"/>
+              </a:rPr>
+              <a:t>by</a:t>
+            </a:r>
+            <a:r>
+              <a:rPr lang="ko-KR" altLang="ko-KR" sz="1200" b="0" i="0" kern="1200" dirty="0">
+                <a:solidFill>
+                  <a:schemeClr val="tx1"/>
+                </a:solidFill>
+                <a:effectLst/>
+                <a:latin typeface="+mn-lt"/>
+                <a:ea typeface="+mn-ea"/>
+                <a:cs typeface="+mn-cs"/>
+              </a:rPr>
+              <a:t> </a:t>
+            </a:r>
+            <a:r>
+              <a:rPr lang="ko-KR" altLang="ko-KR" sz="1200" b="0" i="0" kern="1200" dirty="0" err="1">
+                <a:solidFill>
+                  <a:schemeClr val="tx1"/>
+                </a:solidFill>
+                <a:effectLst/>
+                <a:latin typeface="+mn-lt"/>
+                <a:ea typeface="+mn-ea"/>
+                <a:cs typeface="+mn-cs"/>
+              </a:rPr>
+              <a:t>random</a:t>
+            </a:r>
+            <a:r>
+              <a:rPr lang="ko-KR" altLang="ko-KR" sz="1200" b="0" i="0" kern="1200" dirty="0">
+                <a:solidFill>
+                  <a:schemeClr val="tx1"/>
+                </a:solidFill>
+                <a:effectLst/>
+                <a:latin typeface="+mn-lt"/>
+                <a:ea typeface="+mn-ea"/>
+                <a:cs typeface="+mn-cs"/>
+              </a:rPr>
+              <a:t> </a:t>
+            </a:r>
+            <a:r>
+              <a:rPr lang="ko-KR" altLang="ko-KR" sz="1200" b="0" i="0" kern="1200" dirty="0" err="1">
+                <a:solidFill>
+                  <a:schemeClr val="tx1"/>
+                </a:solidFill>
+                <a:effectLst/>
+                <a:latin typeface="+mn-lt"/>
+                <a:ea typeface="+mn-ea"/>
+                <a:cs typeface="+mn-cs"/>
+              </a:rPr>
+              <a:t>chance</a:t>
+            </a:r>
+            <a:r>
+              <a:rPr lang="ko-KR" altLang="ko-KR" sz="1200" b="0" i="0" kern="1200" dirty="0">
+                <a:solidFill>
+                  <a:schemeClr val="tx1"/>
+                </a:solidFill>
+                <a:effectLst/>
+                <a:latin typeface="+mn-lt"/>
+                <a:ea typeface="+mn-ea"/>
+                <a:cs typeface="+mn-cs"/>
+              </a:rPr>
+              <a:t> </a:t>
+            </a:r>
+            <a:r>
+              <a:rPr lang="ko-KR" altLang="ko-KR" sz="1200" b="0" i="0" kern="1200" dirty="0" err="1">
+                <a:solidFill>
+                  <a:schemeClr val="tx1"/>
+                </a:solidFill>
+                <a:effectLst/>
+                <a:latin typeface="+mn-lt"/>
+                <a:ea typeface="+mn-ea"/>
+                <a:cs typeface="+mn-cs"/>
+              </a:rPr>
+              <a:t>is</a:t>
+            </a:r>
+            <a:r>
+              <a:rPr lang="ko-KR" altLang="ko-KR" sz="1200" b="0" i="0" kern="1200" dirty="0">
+                <a:solidFill>
+                  <a:schemeClr val="tx1"/>
+                </a:solidFill>
+                <a:effectLst/>
+                <a:latin typeface="+mn-lt"/>
+                <a:ea typeface="+mn-ea"/>
+                <a:cs typeface="+mn-cs"/>
+              </a:rPr>
+              <a:t> </a:t>
+            </a:r>
+            <a:r>
+              <a:rPr lang="ko-KR" altLang="ko-KR" sz="1200" b="0" i="0" kern="1200" dirty="0" err="1">
+                <a:solidFill>
+                  <a:schemeClr val="tx1"/>
+                </a:solidFill>
+                <a:effectLst/>
+                <a:latin typeface="+mn-lt"/>
+                <a:ea typeface="+mn-ea"/>
+                <a:cs typeface="+mn-cs"/>
+              </a:rPr>
+              <a:t>less</a:t>
+            </a:r>
+            <a:r>
+              <a:rPr lang="ko-KR" altLang="ko-KR" sz="1200" b="0" i="0" kern="1200" dirty="0">
+                <a:solidFill>
+                  <a:schemeClr val="tx1"/>
+                </a:solidFill>
+                <a:effectLst/>
+                <a:latin typeface="+mn-lt"/>
+                <a:ea typeface="+mn-ea"/>
+                <a:cs typeface="+mn-cs"/>
+              </a:rPr>
+              <a:t> </a:t>
+            </a:r>
+            <a:r>
+              <a:rPr lang="ko-KR" altLang="ko-KR" sz="1200" b="0" i="0" kern="1200" dirty="0" err="1">
+                <a:solidFill>
+                  <a:schemeClr val="tx1"/>
+                </a:solidFill>
+                <a:effectLst/>
+                <a:latin typeface="+mn-lt"/>
+                <a:ea typeface="+mn-ea"/>
+                <a:cs typeface="+mn-cs"/>
+              </a:rPr>
+              <a:t>than</a:t>
+            </a:r>
+            <a:r>
+              <a:rPr lang="ko-KR" altLang="ko-KR" sz="1200" b="0" i="0" kern="1200" dirty="0">
+                <a:solidFill>
+                  <a:schemeClr val="tx1"/>
+                </a:solidFill>
+                <a:effectLst/>
+                <a:latin typeface="+mn-lt"/>
+                <a:ea typeface="+mn-ea"/>
+                <a:cs typeface="+mn-cs"/>
+              </a:rPr>
+              <a:t> 0.1%.</a:t>
+            </a:r>
+          </a:p>
+          <a:p>
+            <a:br>
+              <a:rPr lang="ko-KR" altLang="ko-KR" dirty="0"/>
+            </a:br>
+            <a:endParaRPr lang="ko-KR" altLang="ko-KR" dirty="0"/>
+          </a:p>
+          <a:p>
+            <a:r>
+              <a:rPr lang="ko-KR" altLang="ko-KR" sz="1200" b="1" i="0" kern="1200" dirty="0" err="1">
+                <a:solidFill>
+                  <a:schemeClr val="tx1"/>
+                </a:solidFill>
+                <a:effectLst/>
+                <a:latin typeface="+mn-lt"/>
+                <a:ea typeface="+mn-ea"/>
+                <a:cs typeface="+mn-cs"/>
+              </a:rPr>
+              <a:t>If</a:t>
+            </a:r>
+            <a:r>
+              <a:rPr lang="ko-KR" altLang="ko-KR" sz="1200" b="1" i="0" kern="1200" dirty="0">
+                <a:solidFill>
+                  <a:schemeClr val="tx1"/>
+                </a:solidFill>
+                <a:effectLst/>
+                <a:latin typeface="+mn-lt"/>
+                <a:ea typeface="+mn-ea"/>
+                <a:cs typeface="+mn-cs"/>
+              </a:rPr>
+              <a:t> </a:t>
+            </a:r>
+            <a:r>
+              <a:rPr lang="ko-KR" altLang="ko-KR" sz="1200" b="1" i="0" kern="1200" dirty="0" err="1">
+                <a:solidFill>
+                  <a:schemeClr val="tx1"/>
+                </a:solidFill>
+                <a:effectLst/>
+                <a:latin typeface="+mn-lt"/>
+                <a:ea typeface="+mn-ea"/>
+                <a:cs typeface="+mn-cs"/>
+              </a:rPr>
+              <a:t>the</a:t>
+            </a:r>
+            <a:r>
+              <a:rPr lang="ko-KR" altLang="ko-KR" sz="1200" b="1" i="0" kern="1200" dirty="0">
+                <a:solidFill>
+                  <a:schemeClr val="tx1"/>
+                </a:solidFill>
+                <a:effectLst/>
+                <a:latin typeface="+mn-lt"/>
+                <a:ea typeface="+mn-ea"/>
+                <a:cs typeface="+mn-cs"/>
+              </a:rPr>
+              <a:t> </a:t>
+            </a:r>
+            <a:r>
+              <a:rPr lang="ko-KR" altLang="ko-KR" sz="1200" b="1" i="0" kern="1200" dirty="0" err="1">
+                <a:solidFill>
+                  <a:schemeClr val="tx1"/>
+                </a:solidFill>
+                <a:effectLst/>
+                <a:latin typeface="+mn-lt"/>
+                <a:ea typeface="+mn-ea"/>
+                <a:cs typeface="+mn-cs"/>
+              </a:rPr>
+              <a:t>professor</a:t>
+            </a:r>
+            <a:r>
+              <a:rPr lang="ko-KR" altLang="ko-KR" sz="1200" b="1" i="0" kern="1200" dirty="0">
+                <a:solidFill>
+                  <a:schemeClr val="tx1"/>
+                </a:solidFill>
+                <a:effectLst/>
+                <a:latin typeface="+mn-lt"/>
+                <a:ea typeface="+mn-ea"/>
+                <a:cs typeface="+mn-cs"/>
+              </a:rPr>
+              <a:t> </a:t>
+            </a:r>
+            <a:r>
+              <a:rPr lang="ko-KR" altLang="ko-KR" sz="1200" b="1" i="0" kern="1200" dirty="0" err="1">
+                <a:solidFill>
+                  <a:schemeClr val="tx1"/>
+                </a:solidFill>
+                <a:effectLst/>
+                <a:latin typeface="+mn-lt"/>
+                <a:ea typeface="+mn-ea"/>
+                <a:cs typeface="+mn-cs"/>
+              </a:rPr>
+              <a:t>asks</a:t>
+            </a:r>
+            <a:endParaRPr lang="ko-KR" altLang="ko-KR" sz="1200" b="1" i="0" kern="1200" dirty="0">
+              <a:solidFill>
+                <a:schemeClr val="tx1"/>
+              </a:solidFill>
+              <a:effectLst/>
+              <a:latin typeface="+mn-lt"/>
+              <a:ea typeface="+mn-ea"/>
+              <a:cs typeface="+mn-cs"/>
+            </a:endParaRPr>
+          </a:p>
+          <a:p>
+            <a:r>
+              <a:rPr lang="ko-KR" altLang="ko-KR" sz="1200" b="0" i="1" kern="1200" dirty="0">
+                <a:solidFill>
+                  <a:schemeClr val="tx1"/>
+                </a:solidFill>
+                <a:effectLst/>
+                <a:latin typeface="+mn-lt"/>
+                <a:ea typeface="+mn-ea"/>
+                <a:cs typeface="+mn-cs"/>
+              </a:rPr>
+              <a:t>"</a:t>
+            </a:r>
+            <a:r>
+              <a:rPr lang="ko-KR" altLang="ko-KR" sz="1200" b="0" i="1" kern="1200" dirty="0" err="1">
+                <a:solidFill>
+                  <a:schemeClr val="tx1"/>
+                </a:solidFill>
+                <a:effectLst/>
+                <a:latin typeface="+mn-lt"/>
+                <a:ea typeface="+mn-ea"/>
+                <a:cs typeface="+mn-cs"/>
+              </a:rPr>
+              <a:t>Why</a:t>
+            </a:r>
+            <a:r>
+              <a:rPr lang="ko-KR" altLang="ko-KR" sz="1200" b="0" i="1" kern="1200" dirty="0">
+                <a:solidFill>
+                  <a:schemeClr val="tx1"/>
+                </a:solidFill>
+                <a:effectLst/>
+                <a:latin typeface="+mn-lt"/>
+                <a:ea typeface="+mn-ea"/>
+                <a:cs typeface="+mn-cs"/>
+              </a:rPr>
+              <a:t> </a:t>
+            </a:r>
+            <a:r>
+              <a:rPr lang="ko-KR" altLang="ko-KR" sz="1200" b="0" i="1" kern="1200" dirty="0" err="1">
+                <a:solidFill>
+                  <a:schemeClr val="tx1"/>
+                </a:solidFill>
+                <a:effectLst/>
+                <a:latin typeface="+mn-lt"/>
+                <a:ea typeface="+mn-ea"/>
+                <a:cs typeface="+mn-cs"/>
+              </a:rPr>
+              <a:t>do</a:t>
+            </a:r>
+            <a:r>
+              <a:rPr lang="ko-KR" altLang="ko-KR" sz="1200" b="0" i="1" kern="1200" dirty="0">
+                <a:solidFill>
+                  <a:schemeClr val="tx1"/>
+                </a:solidFill>
+                <a:effectLst/>
+                <a:latin typeface="+mn-lt"/>
+                <a:ea typeface="+mn-ea"/>
+                <a:cs typeface="+mn-cs"/>
+              </a:rPr>
+              <a:t> </a:t>
+            </a:r>
+            <a:r>
+              <a:rPr lang="ko-KR" altLang="ko-KR" sz="1200" b="0" i="1" kern="1200" dirty="0" err="1">
+                <a:solidFill>
+                  <a:schemeClr val="tx1"/>
+                </a:solidFill>
+                <a:effectLst/>
+                <a:latin typeface="+mn-lt"/>
+                <a:ea typeface="+mn-ea"/>
+                <a:cs typeface="+mn-cs"/>
+              </a:rPr>
+              <a:t>you</a:t>
+            </a:r>
+            <a:r>
+              <a:rPr lang="ko-KR" altLang="ko-KR" sz="1200" b="0" i="1" kern="1200" dirty="0">
+                <a:solidFill>
+                  <a:schemeClr val="tx1"/>
+                </a:solidFill>
+                <a:effectLst/>
+                <a:latin typeface="+mn-lt"/>
+                <a:ea typeface="+mn-ea"/>
+                <a:cs typeface="+mn-cs"/>
+              </a:rPr>
+              <a:t> </a:t>
+            </a:r>
+            <a:r>
+              <a:rPr lang="ko-KR" altLang="ko-KR" sz="1200" b="0" i="1" kern="1200" dirty="0" err="1">
+                <a:solidFill>
+                  <a:schemeClr val="tx1"/>
+                </a:solidFill>
+                <a:effectLst/>
+                <a:latin typeface="+mn-lt"/>
+                <a:ea typeface="+mn-ea"/>
+                <a:cs typeface="+mn-cs"/>
+              </a:rPr>
+              <a:t>use</a:t>
+            </a:r>
+            <a:r>
+              <a:rPr lang="ko-KR" altLang="ko-KR" sz="1200" b="0" i="1" kern="1200" dirty="0">
+                <a:solidFill>
+                  <a:schemeClr val="tx1"/>
+                </a:solidFill>
+                <a:effectLst/>
+                <a:latin typeface="+mn-lt"/>
+                <a:ea typeface="+mn-ea"/>
+                <a:cs typeface="+mn-cs"/>
+              </a:rPr>
+              <a:t> </a:t>
+            </a:r>
+            <a:r>
+              <a:rPr lang="ko-KR" altLang="ko-KR" sz="1200" b="0" i="1" kern="1200" dirty="0" err="1">
+                <a:solidFill>
+                  <a:schemeClr val="tx1"/>
+                </a:solidFill>
+                <a:effectLst/>
+                <a:latin typeface="+mn-lt"/>
+                <a:ea typeface="+mn-ea"/>
+                <a:cs typeface="+mn-cs"/>
+              </a:rPr>
+              <a:t>Welch</a:t>
+            </a:r>
+            <a:r>
+              <a:rPr lang="ko-KR" altLang="ko-KR" sz="1200" b="0" i="1" kern="1200" dirty="0">
+                <a:solidFill>
+                  <a:schemeClr val="tx1"/>
+                </a:solidFill>
+                <a:effectLst/>
+                <a:latin typeface="+mn-lt"/>
+                <a:ea typeface="+mn-ea"/>
+                <a:cs typeface="+mn-cs"/>
+              </a:rPr>
+              <a:t> </a:t>
+            </a:r>
+            <a:r>
+              <a:rPr lang="ko-KR" altLang="ko-KR" sz="1200" b="0" i="1" kern="1200" dirty="0" err="1">
+                <a:solidFill>
+                  <a:schemeClr val="tx1"/>
+                </a:solidFill>
+                <a:effectLst/>
+                <a:latin typeface="+mn-lt"/>
+                <a:ea typeface="+mn-ea"/>
+                <a:cs typeface="+mn-cs"/>
+              </a:rPr>
+              <a:t>specifically</a:t>
+            </a:r>
+            <a:r>
+              <a:rPr lang="ko-KR" altLang="ko-KR" sz="1200" b="0" i="1" kern="1200" dirty="0">
+                <a:solidFill>
+                  <a:schemeClr val="tx1"/>
+                </a:solidFill>
+                <a:effectLst/>
+                <a:latin typeface="+mn-lt"/>
+                <a:ea typeface="+mn-ea"/>
+                <a:cs typeface="+mn-cs"/>
+              </a:rPr>
+              <a:t>, </a:t>
+            </a:r>
+            <a:r>
+              <a:rPr lang="ko-KR" altLang="ko-KR" sz="1200" b="0" i="1" kern="1200" dirty="0" err="1">
+                <a:solidFill>
+                  <a:schemeClr val="tx1"/>
+                </a:solidFill>
+                <a:effectLst/>
+                <a:latin typeface="+mn-lt"/>
+                <a:ea typeface="+mn-ea"/>
+                <a:cs typeface="+mn-cs"/>
+              </a:rPr>
+              <a:t>not</a:t>
+            </a:r>
+            <a:r>
+              <a:rPr lang="ko-KR" altLang="ko-KR" sz="1200" b="0" i="1" kern="1200" dirty="0">
+                <a:solidFill>
+                  <a:schemeClr val="tx1"/>
+                </a:solidFill>
+                <a:effectLst/>
+                <a:latin typeface="+mn-lt"/>
+                <a:ea typeface="+mn-ea"/>
+                <a:cs typeface="+mn-cs"/>
+              </a:rPr>
+              <a:t> </a:t>
+            </a:r>
+            <a:r>
+              <a:rPr lang="ko-KR" altLang="ko-KR" sz="1200" b="0" i="1" kern="1200" dirty="0" err="1">
+                <a:solidFill>
+                  <a:schemeClr val="tx1"/>
+                </a:solidFill>
+                <a:effectLst/>
+                <a:latin typeface="+mn-lt"/>
+                <a:ea typeface="+mn-ea"/>
+                <a:cs typeface="+mn-cs"/>
+              </a:rPr>
+              <a:t>a</a:t>
+            </a:r>
+            <a:r>
+              <a:rPr lang="ko-KR" altLang="ko-KR" sz="1200" b="0" i="1" kern="1200" dirty="0">
+                <a:solidFill>
+                  <a:schemeClr val="tx1"/>
+                </a:solidFill>
+                <a:effectLst/>
+                <a:latin typeface="+mn-lt"/>
+                <a:ea typeface="+mn-ea"/>
+                <a:cs typeface="+mn-cs"/>
+              </a:rPr>
+              <a:t> </a:t>
+            </a:r>
+            <a:r>
+              <a:rPr lang="ko-KR" altLang="ko-KR" sz="1200" b="0" i="1" kern="1200" dirty="0" err="1">
+                <a:solidFill>
+                  <a:schemeClr val="tx1"/>
+                </a:solidFill>
+                <a:effectLst/>
+                <a:latin typeface="+mn-lt"/>
+                <a:ea typeface="+mn-ea"/>
+                <a:cs typeface="+mn-cs"/>
+              </a:rPr>
+              <a:t>regular</a:t>
+            </a:r>
+            <a:r>
+              <a:rPr lang="ko-KR" altLang="ko-KR" sz="1200" b="0" i="1" kern="1200" dirty="0">
+                <a:solidFill>
+                  <a:schemeClr val="tx1"/>
+                </a:solidFill>
+                <a:effectLst/>
+                <a:latin typeface="+mn-lt"/>
+                <a:ea typeface="+mn-ea"/>
+                <a:cs typeface="+mn-cs"/>
+              </a:rPr>
+              <a:t> </a:t>
+            </a:r>
+            <a:r>
+              <a:rPr lang="ko-KR" altLang="ko-KR" sz="1200" b="0" i="1" kern="1200" dirty="0" err="1">
+                <a:solidFill>
+                  <a:schemeClr val="tx1"/>
+                </a:solidFill>
+                <a:effectLst/>
+                <a:latin typeface="+mn-lt"/>
+                <a:ea typeface="+mn-ea"/>
+                <a:cs typeface="+mn-cs"/>
+              </a:rPr>
+              <a:t>t-test</a:t>
+            </a:r>
+            <a:r>
+              <a:rPr lang="ko-KR" altLang="ko-KR" sz="1200" b="0" i="1" kern="1200" dirty="0">
+                <a:solidFill>
+                  <a:schemeClr val="tx1"/>
+                </a:solidFill>
+                <a:effectLst/>
+                <a:latin typeface="+mn-lt"/>
+                <a:ea typeface="+mn-ea"/>
+                <a:cs typeface="+mn-cs"/>
+              </a:rPr>
+              <a:t>?"</a:t>
+            </a:r>
+            <a:endParaRPr lang="ko-KR" altLang="ko-KR" sz="1200" b="0" i="0" kern="1200" dirty="0">
+              <a:solidFill>
+                <a:schemeClr val="tx1"/>
+              </a:solidFill>
+              <a:effectLst/>
+              <a:latin typeface="+mn-lt"/>
+              <a:ea typeface="+mn-ea"/>
+              <a:cs typeface="+mn-cs"/>
+            </a:endParaRPr>
+          </a:p>
+          <a:p>
+            <a:r>
+              <a:rPr lang="ko-KR" altLang="ko-KR" sz="1200" b="0" i="0" kern="1200" dirty="0" err="1">
+                <a:solidFill>
+                  <a:schemeClr val="tx1"/>
+                </a:solidFill>
+                <a:effectLst/>
+                <a:latin typeface="+mn-lt"/>
+                <a:ea typeface="+mn-ea"/>
+                <a:cs typeface="+mn-cs"/>
+              </a:rPr>
+              <a:t>A</a:t>
+            </a:r>
+            <a:r>
+              <a:rPr lang="ko-KR" altLang="ko-KR" sz="1200" b="0" i="0" kern="1200" dirty="0">
+                <a:solidFill>
+                  <a:schemeClr val="tx1"/>
+                </a:solidFill>
+                <a:effectLst/>
+                <a:latin typeface="+mn-lt"/>
+                <a:ea typeface="+mn-ea"/>
+                <a:cs typeface="+mn-cs"/>
+              </a:rPr>
+              <a:t> </a:t>
+            </a:r>
+            <a:r>
+              <a:rPr lang="ko-KR" altLang="ko-KR" sz="1200" b="0" i="0" kern="1200" dirty="0" err="1">
+                <a:solidFill>
+                  <a:schemeClr val="tx1"/>
+                </a:solidFill>
+                <a:effectLst/>
+                <a:latin typeface="+mn-lt"/>
+                <a:ea typeface="+mn-ea"/>
+                <a:cs typeface="+mn-cs"/>
+              </a:rPr>
+              <a:t>regular</a:t>
+            </a:r>
+            <a:r>
+              <a:rPr lang="ko-KR" altLang="ko-KR" sz="1200" b="0" i="0" kern="1200" dirty="0">
+                <a:solidFill>
+                  <a:schemeClr val="tx1"/>
+                </a:solidFill>
+                <a:effectLst/>
+                <a:latin typeface="+mn-lt"/>
+                <a:ea typeface="+mn-ea"/>
+                <a:cs typeface="+mn-cs"/>
+              </a:rPr>
+              <a:t> </a:t>
+            </a:r>
+            <a:r>
+              <a:rPr lang="ko-KR" altLang="ko-KR" sz="1200" b="0" i="0" kern="1200" dirty="0" err="1">
+                <a:solidFill>
+                  <a:schemeClr val="tx1"/>
+                </a:solidFill>
+                <a:effectLst/>
+                <a:latin typeface="+mn-lt"/>
+                <a:ea typeface="+mn-ea"/>
+                <a:cs typeface="+mn-cs"/>
+              </a:rPr>
+              <a:t>t-test</a:t>
+            </a:r>
+            <a:r>
+              <a:rPr lang="ko-KR" altLang="ko-KR" sz="1200" b="0" i="0" kern="1200" dirty="0">
+                <a:solidFill>
+                  <a:schemeClr val="tx1"/>
+                </a:solidFill>
+                <a:effectLst/>
+                <a:latin typeface="+mn-lt"/>
+                <a:ea typeface="+mn-ea"/>
+                <a:cs typeface="+mn-cs"/>
+              </a:rPr>
+              <a:t> </a:t>
+            </a:r>
+            <a:r>
+              <a:rPr lang="ko-KR" altLang="ko-KR" sz="1200" b="0" i="0" kern="1200" dirty="0" err="1">
+                <a:solidFill>
+                  <a:schemeClr val="tx1"/>
+                </a:solidFill>
+                <a:effectLst/>
+                <a:latin typeface="+mn-lt"/>
+                <a:ea typeface="+mn-ea"/>
+                <a:cs typeface="+mn-cs"/>
+              </a:rPr>
+              <a:t>assumes</a:t>
+            </a:r>
+            <a:r>
+              <a:rPr lang="ko-KR" altLang="ko-KR" sz="1200" b="0" i="0" kern="1200" dirty="0">
+                <a:solidFill>
+                  <a:schemeClr val="tx1"/>
+                </a:solidFill>
+                <a:effectLst/>
+                <a:latin typeface="+mn-lt"/>
+                <a:ea typeface="+mn-ea"/>
+                <a:cs typeface="+mn-cs"/>
+              </a:rPr>
+              <a:t> </a:t>
+            </a:r>
+            <a:r>
+              <a:rPr lang="ko-KR" altLang="ko-KR" sz="1200" b="0" i="0" kern="1200" dirty="0" err="1">
+                <a:solidFill>
+                  <a:schemeClr val="tx1"/>
+                </a:solidFill>
+                <a:effectLst/>
+                <a:latin typeface="+mn-lt"/>
+                <a:ea typeface="+mn-ea"/>
+                <a:cs typeface="+mn-cs"/>
+              </a:rPr>
+              <a:t>both</a:t>
+            </a:r>
+            <a:r>
+              <a:rPr lang="ko-KR" altLang="ko-KR" sz="1200" b="0" i="0" kern="1200" dirty="0">
+                <a:solidFill>
+                  <a:schemeClr val="tx1"/>
+                </a:solidFill>
+                <a:effectLst/>
+                <a:latin typeface="+mn-lt"/>
+                <a:ea typeface="+mn-ea"/>
+                <a:cs typeface="+mn-cs"/>
+              </a:rPr>
+              <a:t> </a:t>
+            </a:r>
+            <a:r>
+              <a:rPr lang="ko-KR" altLang="ko-KR" sz="1200" b="0" i="0" kern="1200" dirty="0" err="1">
+                <a:solidFill>
+                  <a:schemeClr val="tx1"/>
+                </a:solidFill>
+                <a:effectLst/>
+                <a:latin typeface="+mn-lt"/>
+                <a:ea typeface="+mn-ea"/>
+                <a:cs typeface="+mn-cs"/>
+              </a:rPr>
+              <a:t>groups</a:t>
+            </a:r>
+            <a:r>
+              <a:rPr lang="ko-KR" altLang="ko-KR" sz="1200" b="0" i="0" kern="1200" dirty="0">
+                <a:solidFill>
+                  <a:schemeClr val="tx1"/>
+                </a:solidFill>
+                <a:effectLst/>
+                <a:latin typeface="+mn-lt"/>
+                <a:ea typeface="+mn-ea"/>
+                <a:cs typeface="+mn-cs"/>
+              </a:rPr>
+              <a:t> </a:t>
+            </a:r>
+            <a:r>
+              <a:rPr lang="ko-KR" altLang="ko-KR" sz="1200" b="0" i="0" kern="1200" dirty="0" err="1">
+                <a:solidFill>
+                  <a:schemeClr val="tx1"/>
+                </a:solidFill>
+                <a:effectLst/>
+                <a:latin typeface="+mn-lt"/>
+                <a:ea typeface="+mn-ea"/>
+                <a:cs typeface="+mn-cs"/>
+              </a:rPr>
+              <a:t>have</a:t>
+            </a:r>
+            <a:r>
+              <a:rPr lang="ko-KR" altLang="ko-KR" sz="1200" b="0" i="0" kern="1200" dirty="0">
+                <a:solidFill>
+                  <a:schemeClr val="tx1"/>
+                </a:solidFill>
+                <a:effectLst/>
+                <a:latin typeface="+mn-lt"/>
+                <a:ea typeface="+mn-ea"/>
+                <a:cs typeface="+mn-cs"/>
+              </a:rPr>
+              <a:t> </a:t>
+            </a:r>
+            <a:r>
+              <a:rPr lang="ko-KR" altLang="ko-KR" sz="1200" b="0" i="0" kern="1200" dirty="0" err="1">
+                <a:solidFill>
+                  <a:schemeClr val="tx1"/>
+                </a:solidFill>
+                <a:effectLst/>
+                <a:latin typeface="+mn-lt"/>
+                <a:ea typeface="+mn-ea"/>
+                <a:cs typeface="+mn-cs"/>
+              </a:rPr>
+              <a:t>the</a:t>
+            </a:r>
+            <a:r>
+              <a:rPr lang="ko-KR" altLang="ko-KR" sz="1200" b="0" i="0" kern="1200" dirty="0">
+                <a:solidFill>
+                  <a:schemeClr val="tx1"/>
+                </a:solidFill>
+                <a:effectLst/>
+                <a:latin typeface="+mn-lt"/>
+                <a:ea typeface="+mn-ea"/>
+                <a:cs typeface="+mn-cs"/>
+              </a:rPr>
+              <a:t> </a:t>
+            </a:r>
+            <a:r>
+              <a:rPr lang="ko-KR" altLang="ko-KR" sz="1200" b="0" i="0" kern="1200" dirty="0" err="1">
+                <a:solidFill>
+                  <a:schemeClr val="tx1"/>
+                </a:solidFill>
+                <a:effectLst/>
+                <a:latin typeface="+mn-lt"/>
+                <a:ea typeface="+mn-ea"/>
+                <a:cs typeface="+mn-cs"/>
+              </a:rPr>
+              <a:t>same</a:t>
+            </a:r>
+            <a:r>
+              <a:rPr lang="ko-KR" altLang="ko-KR" sz="1200" b="0" i="0" kern="1200" dirty="0">
+                <a:solidFill>
+                  <a:schemeClr val="tx1"/>
+                </a:solidFill>
+                <a:effectLst/>
+                <a:latin typeface="+mn-lt"/>
+                <a:ea typeface="+mn-ea"/>
+                <a:cs typeface="+mn-cs"/>
+              </a:rPr>
+              <a:t> </a:t>
+            </a:r>
+            <a:r>
+              <a:rPr lang="ko-KR" altLang="ko-KR" sz="1200" b="0" i="0" kern="1200" dirty="0" err="1">
+                <a:solidFill>
+                  <a:schemeClr val="tx1"/>
+                </a:solidFill>
+                <a:effectLst/>
+                <a:latin typeface="+mn-lt"/>
+                <a:ea typeface="+mn-ea"/>
+                <a:cs typeface="+mn-cs"/>
+              </a:rPr>
+              <a:t>variance</a:t>
+            </a:r>
+            <a:r>
+              <a:rPr lang="ko-KR" altLang="ko-KR" sz="1200" b="0" i="0" kern="1200" dirty="0">
+                <a:solidFill>
+                  <a:schemeClr val="tx1"/>
+                </a:solidFill>
+                <a:effectLst/>
+                <a:latin typeface="+mn-lt"/>
+                <a:ea typeface="+mn-ea"/>
+                <a:cs typeface="+mn-cs"/>
+              </a:rPr>
+              <a:t>. The </a:t>
+            </a:r>
+            <a:r>
+              <a:rPr lang="ko-KR" altLang="ko-KR" sz="1200" b="0" i="0" kern="1200" dirty="0" err="1">
+                <a:solidFill>
+                  <a:schemeClr val="tx1"/>
+                </a:solidFill>
+                <a:effectLst/>
+                <a:latin typeface="+mn-lt"/>
+                <a:ea typeface="+mn-ea"/>
+                <a:cs typeface="+mn-cs"/>
+              </a:rPr>
+              <a:t>Welch</a:t>
+            </a:r>
+            <a:r>
+              <a:rPr lang="ko-KR" altLang="ko-KR" sz="1200" b="0" i="0" kern="1200" dirty="0">
+                <a:solidFill>
+                  <a:schemeClr val="tx1"/>
+                </a:solidFill>
+                <a:effectLst/>
+                <a:latin typeface="+mn-lt"/>
+                <a:ea typeface="+mn-ea"/>
+                <a:cs typeface="+mn-cs"/>
+              </a:rPr>
+              <a:t> </a:t>
+            </a:r>
+            <a:r>
+              <a:rPr lang="ko-KR" altLang="ko-KR" sz="1200" b="0" i="0" kern="1200" dirty="0" err="1">
+                <a:solidFill>
+                  <a:schemeClr val="tx1"/>
+                </a:solidFill>
+                <a:effectLst/>
+                <a:latin typeface="+mn-lt"/>
+                <a:ea typeface="+mn-ea"/>
+                <a:cs typeface="+mn-cs"/>
+              </a:rPr>
+              <a:t>t-test</a:t>
+            </a:r>
+            <a:r>
+              <a:rPr lang="ko-KR" altLang="ko-KR" sz="1200" b="0" i="0" kern="1200" dirty="0">
+                <a:solidFill>
+                  <a:schemeClr val="tx1"/>
+                </a:solidFill>
+                <a:effectLst/>
+                <a:latin typeface="+mn-lt"/>
+                <a:ea typeface="+mn-ea"/>
+                <a:cs typeface="+mn-cs"/>
+              </a:rPr>
+              <a:t> </a:t>
+            </a:r>
+            <a:r>
+              <a:rPr lang="ko-KR" altLang="ko-KR" sz="1200" b="0" i="0" kern="1200" dirty="0" err="1">
+                <a:solidFill>
+                  <a:schemeClr val="tx1"/>
+                </a:solidFill>
+                <a:effectLst/>
+                <a:latin typeface="+mn-lt"/>
+                <a:ea typeface="+mn-ea"/>
+                <a:cs typeface="+mn-cs"/>
+              </a:rPr>
+              <a:t>does</a:t>
+            </a:r>
+            <a:r>
+              <a:rPr lang="ko-KR" altLang="ko-KR" sz="1200" b="0" i="0" kern="1200" dirty="0">
+                <a:solidFill>
+                  <a:schemeClr val="tx1"/>
+                </a:solidFill>
+                <a:effectLst/>
+                <a:latin typeface="+mn-lt"/>
+                <a:ea typeface="+mn-ea"/>
+                <a:cs typeface="+mn-cs"/>
+              </a:rPr>
+              <a:t> </a:t>
+            </a:r>
+            <a:r>
+              <a:rPr lang="ko-KR" altLang="ko-KR" sz="1200" b="0" i="0" kern="1200" dirty="0" err="1">
+                <a:solidFill>
+                  <a:schemeClr val="tx1"/>
+                </a:solidFill>
+                <a:effectLst/>
+                <a:latin typeface="+mn-lt"/>
+                <a:ea typeface="+mn-ea"/>
+                <a:cs typeface="+mn-cs"/>
+              </a:rPr>
+              <a:t>not</a:t>
+            </a:r>
+            <a:r>
+              <a:rPr lang="ko-KR" altLang="ko-KR" sz="1200" b="0" i="0" kern="1200" dirty="0">
+                <a:solidFill>
+                  <a:schemeClr val="tx1"/>
+                </a:solidFill>
+                <a:effectLst/>
+                <a:latin typeface="+mn-lt"/>
+                <a:ea typeface="+mn-ea"/>
+                <a:cs typeface="+mn-cs"/>
+              </a:rPr>
+              <a:t> </a:t>
+            </a:r>
+            <a:r>
+              <a:rPr lang="ko-KR" altLang="ko-KR" sz="1200" b="0" i="0" kern="1200" dirty="0" err="1">
+                <a:solidFill>
+                  <a:schemeClr val="tx1"/>
+                </a:solidFill>
+                <a:effectLst/>
+                <a:latin typeface="+mn-lt"/>
+                <a:ea typeface="+mn-ea"/>
+                <a:cs typeface="+mn-cs"/>
+              </a:rPr>
+              <a:t>make</a:t>
+            </a:r>
+            <a:r>
+              <a:rPr lang="ko-KR" altLang="ko-KR" sz="1200" b="0" i="0" kern="1200" dirty="0">
+                <a:solidFill>
+                  <a:schemeClr val="tx1"/>
+                </a:solidFill>
+                <a:effectLst/>
+                <a:latin typeface="+mn-lt"/>
+                <a:ea typeface="+mn-ea"/>
+                <a:cs typeface="+mn-cs"/>
+              </a:rPr>
+              <a:t> </a:t>
+            </a:r>
+            <a:r>
+              <a:rPr lang="ko-KR" altLang="ko-KR" sz="1200" b="0" i="0" kern="1200" dirty="0" err="1">
+                <a:solidFill>
+                  <a:schemeClr val="tx1"/>
+                </a:solidFill>
+                <a:effectLst/>
+                <a:latin typeface="+mn-lt"/>
+                <a:ea typeface="+mn-ea"/>
+                <a:cs typeface="+mn-cs"/>
+              </a:rPr>
+              <a:t>that</a:t>
+            </a:r>
+            <a:r>
+              <a:rPr lang="ko-KR" altLang="ko-KR" sz="1200" b="0" i="0" kern="1200" dirty="0">
+                <a:solidFill>
+                  <a:schemeClr val="tx1"/>
+                </a:solidFill>
+                <a:effectLst/>
+                <a:latin typeface="+mn-lt"/>
+                <a:ea typeface="+mn-ea"/>
+                <a:cs typeface="+mn-cs"/>
+              </a:rPr>
+              <a:t> </a:t>
+            </a:r>
+            <a:r>
+              <a:rPr lang="ko-KR" altLang="ko-KR" sz="1200" b="0" i="0" kern="1200" dirty="0" err="1">
+                <a:solidFill>
+                  <a:schemeClr val="tx1"/>
+                </a:solidFill>
+                <a:effectLst/>
+                <a:latin typeface="+mn-lt"/>
+                <a:ea typeface="+mn-ea"/>
+                <a:cs typeface="+mn-cs"/>
+              </a:rPr>
+              <a:t>assumption</a:t>
+            </a:r>
+            <a:r>
+              <a:rPr lang="ko-KR" altLang="ko-KR" sz="1200" b="0" i="0" kern="1200" dirty="0">
+                <a:solidFill>
+                  <a:schemeClr val="tx1"/>
+                </a:solidFill>
+                <a:effectLst/>
+                <a:latin typeface="+mn-lt"/>
+                <a:ea typeface="+mn-ea"/>
+                <a:cs typeface="+mn-cs"/>
+              </a:rPr>
+              <a:t> — and </a:t>
+            </a:r>
+            <a:r>
+              <a:rPr lang="ko-KR" altLang="ko-KR" sz="1200" b="0" i="0" kern="1200" dirty="0" err="1">
+                <a:solidFill>
+                  <a:schemeClr val="tx1"/>
+                </a:solidFill>
+                <a:effectLst/>
+                <a:latin typeface="+mn-lt"/>
+                <a:ea typeface="+mn-ea"/>
+                <a:cs typeface="+mn-cs"/>
+              </a:rPr>
+              <a:t>your</a:t>
+            </a:r>
+            <a:r>
+              <a:rPr lang="ko-KR" altLang="ko-KR" sz="1200" b="0" i="0" kern="1200" dirty="0">
+                <a:solidFill>
+                  <a:schemeClr val="tx1"/>
+                </a:solidFill>
+                <a:effectLst/>
+                <a:latin typeface="+mn-lt"/>
+                <a:ea typeface="+mn-ea"/>
+                <a:cs typeface="+mn-cs"/>
+              </a:rPr>
+              <a:t> </a:t>
+            </a:r>
+            <a:r>
+              <a:rPr lang="ko-KR" altLang="ko-KR" sz="1200" b="0" i="0" kern="1200" dirty="0" err="1">
+                <a:solidFill>
+                  <a:schemeClr val="tx1"/>
+                </a:solidFill>
+                <a:effectLst/>
+                <a:latin typeface="+mn-lt"/>
+                <a:ea typeface="+mn-ea"/>
+                <a:cs typeface="+mn-cs"/>
+              </a:rPr>
+              <a:t>two</a:t>
+            </a:r>
+            <a:r>
+              <a:rPr lang="ko-KR" altLang="ko-KR" sz="1200" b="0" i="0" kern="1200" dirty="0">
+                <a:solidFill>
+                  <a:schemeClr val="tx1"/>
+                </a:solidFill>
+                <a:effectLst/>
+                <a:latin typeface="+mn-lt"/>
+                <a:ea typeface="+mn-ea"/>
+                <a:cs typeface="+mn-cs"/>
+              </a:rPr>
+              <a:t> </a:t>
+            </a:r>
+            <a:r>
+              <a:rPr lang="ko-KR" altLang="ko-KR" sz="1200" b="0" i="0" kern="1200" dirty="0" err="1">
+                <a:solidFill>
+                  <a:schemeClr val="tx1"/>
+                </a:solidFill>
+                <a:effectLst/>
+                <a:latin typeface="+mn-lt"/>
+                <a:ea typeface="+mn-ea"/>
+                <a:cs typeface="+mn-cs"/>
+              </a:rPr>
+              <a:t>groups</a:t>
+            </a:r>
+            <a:r>
+              <a:rPr lang="ko-KR" altLang="ko-KR" sz="1200" b="0" i="0" kern="1200" dirty="0">
+                <a:solidFill>
+                  <a:schemeClr val="tx1"/>
+                </a:solidFill>
+                <a:effectLst/>
+                <a:latin typeface="+mn-lt"/>
+                <a:ea typeface="+mn-ea"/>
+                <a:cs typeface="+mn-cs"/>
+              </a:rPr>
+              <a:t> (2 </a:t>
+            </a:r>
+            <a:r>
+              <a:rPr lang="ko-KR" altLang="ko-KR" sz="1200" b="0" i="0" kern="1200" dirty="0" err="1">
+                <a:solidFill>
+                  <a:schemeClr val="tx1"/>
+                </a:solidFill>
+                <a:effectLst/>
+                <a:latin typeface="+mn-lt"/>
+                <a:ea typeface="+mn-ea"/>
+                <a:cs typeface="+mn-cs"/>
+              </a:rPr>
+              <a:t>low-buffer</a:t>
+            </a:r>
+            <a:r>
+              <a:rPr lang="ko-KR" altLang="ko-KR" sz="1200" b="0" i="0" kern="1200" dirty="0">
+                <a:solidFill>
+                  <a:schemeClr val="tx1"/>
+                </a:solidFill>
+                <a:effectLst/>
+                <a:latin typeface="+mn-lt"/>
+                <a:ea typeface="+mn-ea"/>
+                <a:cs typeface="+mn-cs"/>
+              </a:rPr>
+              <a:t> </a:t>
+            </a:r>
+            <a:r>
+              <a:rPr lang="ko-KR" altLang="ko-KR" sz="1200" b="0" i="0" kern="1200" dirty="0" err="1">
+                <a:solidFill>
+                  <a:schemeClr val="tx1"/>
+                </a:solidFill>
+                <a:effectLst/>
+                <a:latin typeface="+mn-lt"/>
+                <a:ea typeface="+mn-ea"/>
+                <a:cs typeface="+mn-cs"/>
+              </a:rPr>
+              <a:t>events</a:t>
+            </a:r>
+            <a:r>
+              <a:rPr lang="ko-KR" altLang="ko-KR" sz="1200" b="0" i="0" kern="1200" dirty="0">
+                <a:solidFill>
+                  <a:schemeClr val="tx1"/>
+                </a:solidFill>
+                <a:effectLst/>
+                <a:latin typeface="+mn-lt"/>
+                <a:ea typeface="+mn-ea"/>
+                <a:cs typeface="+mn-cs"/>
+              </a:rPr>
+              <a:t> </a:t>
+            </a:r>
+            <a:r>
+              <a:rPr lang="ko-KR" altLang="ko-KR" sz="1200" b="0" i="0" kern="1200" dirty="0" err="1">
+                <a:solidFill>
+                  <a:schemeClr val="tx1"/>
+                </a:solidFill>
+                <a:effectLst/>
+                <a:latin typeface="+mn-lt"/>
+                <a:ea typeface="+mn-ea"/>
+                <a:cs typeface="+mn-cs"/>
+              </a:rPr>
+              <a:t>vs</a:t>
+            </a:r>
+            <a:r>
+              <a:rPr lang="ko-KR" altLang="ko-KR" sz="1200" b="0" i="0" kern="1200" dirty="0">
+                <a:solidFill>
+                  <a:schemeClr val="tx1"/>
+                </a:solidFill>
+                <a:effectLst/>
+                <a:latin typeface="+mn-lt"/>
+                <a:ea typeface="+mn-ea"/>
+                <a:cs typeface="+mn-cs"/>
+              </a:rPr>
+              <a:t> 1 </a:t>
+            </a:r>
+            <a:r>
+              <a:rPr lang="ko-KR" altLang="ko-KR" sz="1200" b="0" i="0" kern="1200" dirty="0" err="1">
+                <a:solidFill>
+                  <a:schemeClr val="tx1"/>
+                </a:solidFill>
+                <a:effectLst/>
+                <a:latin typeface="+mn-lt"/>
+                <a:ea typeface="+mn-ea"/>
+                <a:cs typeface="+mn-cs"/>
+              </a:rPr>
+              <a:t>high-buffer</a:t>
+            </a:r>
+            <a:r>
+              <a:rPr lang="ko-KR" altLang="ko-KR" sz="1200" b="0" i="0" kern="1200" dirty="0">
+                <a:solidFill>
+                  <a:schemeClr val="tx1"/>
+                </a:solidFill>
+                <a:effectLst/>
+                <a:latin typeface="+mn-lt"/>
+                <a:ea typeface="+mn-ea"/>
+                <a:cs typeface="+mn-cs"/>
+              </a:rPr>
+              <a:t> </a:t>
+            </a:r>
+            <a:r>
+              <a:rPr lang="ko-KR" altLang="ko-KR" sz="1200" b="0" i="0" kern="1200" dirty="0" err="1">
+                <a:solidFill>
+                  <a:schemeClr val="tx1"/>
+                </a:solidFill>
+                <a:effectLst/>
+                <a:latin typeface="+mn-lt"/>
+                <a:ea typeface="+mn-ea"/>
+                <a:cs typeface="+mn-cs"/>
+              </a:rPr>
+              <a:t>event</a:t>
+            </a:r>
+            <a:r>
+              <a:rPr lang="ko-KR" altLang="ko-KR" sz="1200" b="0" i="0" kern="1200" dirty="0">
+                <a:solidFill>
+                  <a:schemeClr val="tx1"/>
+                </a:solidFill>
+                <a:effectLst/>
+                <a:latin typeface="+mn-lt"/>
+                <a:ea typeface="+mn-ea"/>
+                <a:cs typeface="+mn-cs"/>
+              </a:rPr>
+              <a:t>) </a:t>
+            </a:r>
+            <a:r>
+              <a:rPr lang="ko-KR" altLang="ko-KR" sz="1200" b="0" i="0" kern="1200" dirty="0" err="1">
+                <a:solidFill>
+                  <a:schemeClr val="tx1"/>
+                </a:solidFill>
+                <a:effectLst/>
+                <a:latin typeface="+mn-lt"/>
+                <a:ea typeface="+mn-ea"/>
+                <a:cs typeface="+mn-cs"/>
+              </a:rPr>
+              <a:t>almost</a:t>
+            </a:r>
+            <a:r>
+              <a:rPr lang="ko-KR" altLang="ko-KR" sz="1200" b="0" i="0" kern="1200" dirty="0">
+                <a:solidFill>
+                  <a:schemeClr val="tx1"/>
+                </a:solidFill>
+                <a:effectLst/>
+                <a:latin typeface="+mn-lt"/>
+                <a:ea typeface="+mn-ea"/>
+                <a:cs typeface="+mn-cs"/>
+              </a:rPr>
+              <a:t> </a:t>
+            </a:r>
+            <a:r>
+              <a:rPr lang="ko-KR" altLang="ko-KR" sz="1200" b="0" i="0" kern="1200" dirty="0" err="1">
+                <a:solidFill>
+                  <a:schemeClr val="tx1"/>
+                </a:solidFill>
+                <a:effectLst/>
+                <a:latin typeface="+mn-lt"/>
+                <a:ea typeface="+mn-ea"/>
+                <a:cs typeface="+mn-cs"/>
+              </a:rPr>
+              <a:t>certainly</a:t>
+            </a:r>
+            <a:r>
+              <a:rPr lang="ko-KR" altLang="ko-KR" sz="1200" b="0" i="0" kern="1200" dirty="0">
+                <a:solidFill>
+                  <a:schemeClr val="tx1"/>
+                </a:solidFill>
+                <a:effectLst/>
+                <a:latin typeface="+mn-lt"/>
+                <a:ea typeface="+mn-ea"/>
+                <a:cs typeface="+mn-cs"/>
+              </a:rPr>
+              <a:t> </a:t>
+            </a:r>
+            <a:r>
+              <a:rPr lang="ko-KR" altLang="ko-KR" sz="1200" b="0" i="0" kern="1200" dirty="0" err="1">
+                <a:solidFill>
+                  <a:schemeClr val="tx1"/>
+                </a:solidFill>
+                <a:effectLst/>
+                <a:latin typeface="+mn-lt"/>
+                <a:ea typeface="+mn-ea"/>
+                <a:cs typeface="+mn-cs"/>
+              </a:rPr>
+              <a:t>have</a:t>
+            </a:r>
+            <a:r>
+              <a:rPr lang="ko-KR" altLang="ko-KR" sz="1200" b="0" i="0" kern="1200" dirty="0">
+                <a:solidFill>
+                  <a:schemeClr val="tx1"/>
+                </a:solidFill>
+                <a:effectLst/>
+                <a:latin typeface="+mn-lt"/>
+                <a:ea typeface="+mn-ea"/>
+                <a:cs typeface="+mn-cs"/>
+              </a:rPr>
+              <a:t> </a:t>
+            </a:r>
+            <a:r>
+              <a:rPr lang="ko-KR" altLang="ko-KR" sz="1200" b="0" i="0" kern="1200" dirty="0" err="1">
+                <a:solidFill>
+                  <a:schemeClr val="tx1"/>
+                </a:solidFill>
+                <a:effectLst/>
+                <a:latin typeface="+mn-lt"/>
+                <a:ea typeface="+mn-ea"/>
+                <a:cs typeface="+mn-cs"/>
+              </a:rPr>
+              <a:t>different</a:t>
+            </a:r>
+            <a:r>
+              <a:rPr lang="ko-KR" altLang="ko-KR" sz="1200" b="0" i="0" kern="1200" dirty="0">
+                <a:solidFill>
+                  <a:schemeClr val="tx1"/>
+                </a:solidFill>
+                <a:effectLst/>
+                <a:latin typeface="+mn-lt"/>
+                <a:ea typeface="+mn-ea"/>
+                <a:cs typeface="+mn-cs"/>
+              </a:rPr>
+              <a:t> </a:t>
+            </a:r>
+            <a:r>
+              <a:rPr lang="ko-KR" altLang="ko-KR" sz="1200" b="0" i="0" kern="1200" dirty="0" err="1">
+                <a:solidFill>
+                  <a:schemeClr val="tx1"/>
+                </a:solidFill>
+                <a:effectLst/>
+                <a:latin typeface="+mn-lt"/>
+                <a:ea typeface="+mn-ea"/>
+                <a:cs typeface="+mn-cs"/>
+              </a:rPr>
+              <a:t>variances</a:t>
+            </a:r>
+            <a:r>
+              <a:rPr lang="ko-KR" altLang="ko-KR" sz="1200" b="0" i="0" kern="1200" dirty="0">
+                <a:solidFill>
+                  <a:schemeClr val="tx1"/>
+                </a:solidFill>
+                <a:effectLst/>
+                <a:latin typeface="+mn-lt"/>
+                <a:ea typeface="+mn-ea"/>
+                <a:cs typeface="+mn-cs"/>
+              </a:rPr>
+              <a:t>. </a:t>
+            </a:r>
+            <a:r>
+              <a:rPr lang="ko-KR" altLang="ko-KR" sz="1200" b="0" i="0" kern="1200" dirty="0" err="1">
+                <a:solidFill>
+                  <a:schemeClr val="tx1"/>
+                </a:solidFill>
+                <a:effectLst/>
+                <a:latin typeface="+mn-lt"/>
+                <a:ea typeface="+mn-ea"/>
+                <a:cs typeface="+mn-cs"/>
+              </a:rPr>
+              <a:t>Welch</a:t>
+            </a:r>
+            <a:r>
+              <a:rPr lang="ko-KR" altLang="ko-KR" sz="1200" b="0" i="0" kern="1200" dirty="0">
+                <a:solidFill>
+                  <a:schemeClr val="tx1"/>
+                </a:solidFill>
+                <a:effectLst/>
+                <a:latin typeface="+mn-lt"/>
+                <a:ea typeface="+mn-ea"/>
+                <a:cs typeface="+mn-cs"/>
+              </a:rPr>
+              <a:t> </a:t>
+            </a:r>
+            <a:r>
+              <a:rPr lang="ko-KR" altLang="ko-KR" sz="1200" b="0" i="0" kern="1200" dirty="0" err="1">
+                <a:solidFill>
+                  <a:schemeClr val="tx1"/>
+                </a:solidFill>
+                <a:effectLst/>
+                <a:latin typeface="+mn-lt"/>
+                <a:ea typeface="+mn-ea"/>
+                <a:cs typeface="+mn-cs"/>
+              </a:rPr>
+              <a:t>is</a:t>
+            </a:r>
+            <a:r>
+              <a:rPr lang="ko-KR" altLang="ko-KR" sz="1200" b="0" i="0" kern="1200" dirty="0">
+                <a:solidFill>
+                  <a:schemeClr val="tx1"/>
+                </a:solidFill>
+                <a:effectLst/>
+                <a:latin typeface="+mn-lt"/>
+                <a:ea typeface="+mn-ea"/>
+                <a:cs typeface="+mn-cs"/>
+              </a:rPr>
+              <a:t> </a:t>
+            </a:r>
+            <a:r>
+              <a:rPr lang="ko-KR" altLang="ko-KR" sz="1200" b="0" i="0" kern="1200" dirty="0" err="1">
+                <a:solidFill>
+                  <a:schemeClr val="tx1"/>
+                </a:solidFill>
+                <a:effectLst/>
+                <a:latin typeface="+mn-lt"/>
+                <a:ea typeface="+mn-ea"/>
+                <a:cs typeface="+mn-cs"/>
+              </a:rPr>
+              <a:t>the</a:t>
+            </a:r>
+            <a:r>
+              <a:rPr lang="ko-KR" altLang="ko-KR" sz="1200" b="0" i="0" kern="1200" dirty="0">
+                <a:solidFill>
+                  <a:schemeClr val="tx1"/>
+                </a:solidFill>
+                <a:effectLst/>
+                <a:latin typeface="+mn-lt"/>
+                <a:ea typeface="+mn-ea"/>
+                <a:cs typeface="+mn-cs"/>
+              </a:rPr>
+              <a:t> </a:t>
+            </a:r>
+            <a:r>
+              <a:rPr lang="ko-KR" altLang="ko-KR" sz="1200" b="0" i="0" kern="1200" dirty="0" err="1">
+                <a:solidFill>
+                  <a:schemeClr val="tx1"/>
+                </a:solidFill>
+                <a:effectLst/>
+                <a:latin typeface="+mn-lt"/>
+                <a:ea typeface="+mn-ea"/>
+                <a:cs typeface="+mn-cs"/>
+              </a:rPr>
+              <a:t>safer</a:t>
+            </a:r>
+            <a:r>
+              <a:rPr lang="ko-KR" altLang="ko-KR" sz="1200" b="0" i="0" kern="1200" dirty="0">
+                <a:solidFill>
+                  <a:schemeClr val="tx1"/>
+                </a:solidFill>
+                <a:effectLst/>
+                <a:latin typeface="+mn-lt"/>
+                <a:ea typeface="+mn-ea"/>
+                <a:cs typeface="+mn-cs"/>
+              </a:rPr>
+              <a:t>, </a:t>
+            </a:r>
+            <a:r>
+              <a:rPr lang="ko-KR" altLang="ko-KR" sz="1200" b="0" i="0" kern="1200" dirty="0" err="1">
+                <a:solidFill>
+                  <a:schemeClr val="tx1"/>
+                </a:solidFill>
+                <a:effectLst/>
+                <a:latin typeface="+mn-lt"/>
+                <a:ea typeface="+mn-ea"/>
+                <a:cs typeface="+mn-cs"/>
+              </a:rPr>
+              <a:t>more</a:t>
+            </a:r>
+            <a:r>
+              <a:rPr lang="ko-KR" altLang="ko-KR" sz="1200" b="0" i="0" kern="1200" dirty="0">
+                <a:solidFill>
+                  <a:schemeClr val="tx1"/>
+                </a:solidFill>
+                <a:effectLst/>
+                <a:latin typeface="+mn-lt"/>
+                <a:ea typeface="+mn-ea"/>
+                <a:cs typeface="+mn-cs"/>
+              </a:rPr>
+              <a:t> </a:t>
+            </a:r>
+            <a:r>
+              <a:rPr lang="ko-KR" altLang="ko-KR" sz="1200" b="0" i="0" kern="1200" dirty="0" err="1">
+                <a:solidFill>
+                  <a:schemeClr val="tx1"/>
+                </a:solidFill>
+                <a:effectLst/>
+                <a:latin typeface="+mn-lt"/>
+                <a:ea typeface="+mn-ea"/>
+                <a:cs typeface="+mn-cs"/>
+              </a:rPr>
+              <a:t>honest</a:t>
+            </a:r>
+            <a:r>
+              <a:rPr lang="ko-KR" altLang="ko-KR" sz="1200" b="0" i="0" kern="1200" dirty="0">
+                <a:solidFill>
+                  <a:schemeClr val="tx1"/>
+                </a:solidFill>
+                <a:effectLst/>
+                <a:latin typeface="+mn-lt"/>
+                <a:ea typeface="+mn-ea"/>
+                <a:cs typeface="+mn-cs"/>
+              </a:rPr>
+              <a:t> </a:t>
+            </a:r>
+            <a:r>
+              <a:rPr lang="ko-KR" altLang="ko-KR" sz="1200" b="0" i="0" kern="1200" dirty="0" err="1">
+                <a:solidFill>
+                  <a:schemeClr val="tx1"/>
+                </a:solidFill>
+                <a:effectLst/>
+                <a:latin typeface="+mn-lt"/>
+                <a:ea typeface="+mn-ea"/>
+                <a:cs typeface="+mn-cs"/>
+              </a:rPr>
+              <a:t>choice</a:t>
+            </a:r>
+            <a:r>
+              <a:rPr lang="ko-KR" altLang="ko-KR" sz="1200" b="0" i="0" kern="1200" dirty="0">
+                <a:solidFill>
+                  <a:schemeClr val="tx1"/>
+                </a:solidFill>
+                <a:effectLst/>
+                <a:latin typeface="+mn-lt"/>
+                <a:ea typeface="+mn-ea"/>
+                <a:cs typeface="+mn-cs"/>
+              </a:rPr>
+              <a:t>.</a:t>
+            </a:r>
+          </a:p>
+          <a:p>
+            <a:r>
+              <a:rPr lang="ko-KR" altLang="ko-KR" sz="1200" b="0" i="1" kern="1200" dirty="0">
+                <a:solidFill>
+                  <a:schemeClr val="tx1"/>
+                </a:solidFill>
+                <a:effectLst/>
+                <a:latin typeface="+mn-lt"/>
+                <a:ea typeface="+mn-ea"/>
+                <a:cs typeface="+mn-cs"/>
+              </a:rPr>
+              <a:t>"</a:t>
+            </a:r>
+            <a:r>
+              <a:rPr lang="ko-KR" altLang="ko-KR" sz="1200" b="0" i="1" kern="1200" dirty="0" err="1">
+                <a:solidFill>
+                  <a:schemeClr val="tx1"/>
+                </a:solidFill>
+                <a:effectLst/>
+                <a:latin typeface="+mn-lt"/>
+                <a:ea typeface="+mn-ea"/>
+                <a:cs typeface="+mn-cs"/>
+              </a:rPr>
+              <a:t>You</a:t>
+            </a:r>
+            <a:r>
+              <a:rPr lang="ko-KR" altLang="ko-KR" sz="1200" b="0" i="1" kern="1200" dirty="0">
+                <a:solidFill>
+                  <a:schemeClr val="tx1"/>
+                </a:solidFill>
+                <a:effectLst/>
+                <a:latin typeface="+mn-lt"/>
+                <a:ea typeface="+mn-ea"/>
+                <a:cs typeface="+mn-cs"/>
+              </a:rPr>
+              <a:t> </a:t>
+            </a:r>
+            <a:r>
+              <a:rPr lang="ko-KR" altLang="ko-KR" sz="1200" b="0" i="1" kern="1200" dirty="0" err="1">
+                <a:solidFill>
+                  <a:schemeClr val="tx1"/>
+                </a:solidFill>
+                <a:effectLst/>
+                <a:latin typeface="+mn-lt"/>
+                <a:ea typeface="+mn-ea"/>
+                <a:cs typeface="+mn-cs"/>
+              </a:rPr>
+              <a:t>only</a:t>
+            </a:r>
+            <a:r>
+              <a:rPr lang="ko-KR" altLang="ko-KR" sz="1200" b="0" i="1" kern="1200" dirty="0">
+                <a:solidFill>
+                  <a:schemeClr val="tx1"/>
+                </a:solidFill>
+                <a:effectLst/>
+                <a:latin typeface="+mn-lt"/>
+                <a:ea typeface="+mn-ea"/>
+                <a:cs typeface="+mn-cs"/>
+              </a:rPr>
+              <a:t> </a:t>
+            </a:r>
+            <a:r>
+              <a:rPr lang="ko-KR" altLang="ko-KR" sz="1200" b="0" i="1" kern="1200" dirty="0" err="1">
+                <a:solidFill>
+                  <a:schemeClr val="tx1"/>
+                </a:solidFill>
+                <a:effectLst/>
+                <a:latin typeface="+mn-lt"/>
+                <a:ea typeface="+mn-ea"/>
+                <a:cs typeface="+mn-cs"/>
+              </a:rPr>
+              <a:t>have</a:t>
+            </a:r>
+            <a:r>
+              <a:rPr lang="ko-KR" altLang="ko-KR" sz="1200" b="0" i="1" kern="1200" dirty="0">
+                <a:solidFill>
+                  <a:schemeClr val="tx1"/>
+                </a:solidFill>
+                <a:effectLst/>
+                <a:latin typeface="+mn-lt"/>
+                <a:ea typeface="+mn-ea"/>
+                <a:cs typeface="+mn-cs"/>
+              </a:rPr>
+              <a:t> 3 </a:t>
+            </a:r>
+            <a:r>
+              <a:rPr lang="ko-KR" altLang="ko-KR" sz="1200" b="0" i="1" kern="1200" dirty="0" err="1">
+                <a:solidFill>
+                  <a:schemeClr val="tx1"/>
+                </a:solidFill>
+                <a:effectLst/>
+                <a:latin typeface="+mn-lt"/>
+                <a:ea typeface="+mn-ea"/>
+                <a:cs typeface="+mn-cs"/>
+              </a:rPr>
+              <a:t>events</a:t>
+            </a:r>
+            <a:r>
+              <a:rPr lang="ko-KR" altLang="ko-KR" sz="1200" b="0" i="1" kern="1200" dirty="0">
+                <a:solidFill>
+                  <a:schemeClr val="tx1"/>
+                </a:solidFill>
+                <a:effectLst/>
+                <a:latin typeface="+mn-lt"/>
+                <a:ea typeface="+mn-ea"/>
+                <a:cs typeface="+mn-cs"/>
+              </a:rPr>
+              <a:t> — </a:t>
+            </a:r>
+            <a:r>
+              <a:rPr lang="ko-KR" altLang="ko-KR" sz="1200" b="0" i="1" kern="1200" dirty="0" err="1">
+                <a:solidFill>
+                  <a:schemeClr val="tx1"/>
+                </a:solidFill>
+                <a:effectLst/>
+                <a:latin typeface="+mn-lt"/>
+                <a:ea typeface="+mn-ea"/>
+                <a:cs typeface="+mn-cs"/>
+              </a:rPr>
+              <a:t>is</a:t>
+            </a:r>
+            <a:r>
+              <a:rPr lang="ko-KR" altLang="ko-KR" sz="1200" b="0" i="1" kern="1200" dirty="0">
+                <a:solidFill>
+                  <a:schemeClr val="tx1"/>
+                </a:solidFill>
+                <a:effectLst/>
+                <a:latin typeface="+mn-lt"/>
+                <a:ea typeface="+mn-ea"/>
+                <a:cs typeface="+mn-cs"/>
+              </a:rPr>
+              <a:t> </a:t>
+            </a:r>
+            <a:r>
+              <a:rPr lang="ko-KR" altLang="ko-KR" sz="1200" b="0" i="1" kern="1200" dirty="0" err="1">
+                <a:solidFill>
+                  <a:schemeClr val="tx1"/>
+                </a:solidFill>
+                <a:effectLst/>
+                <a:latin typeface="+mn-lt"/>
+                <a:ea typeface="+mn-ea"/>
+                <a:cs typeface="+mn-cs"/>
+              </a:rPr>
+              <a:t>this</a:t>
+            </a:r>
+            <a:r>
+              <a:rPr lang="ko-KR" altLang="ko-KR" sz="1200" b="0" i="1" kern="1200" dirty="0">
+                <a:solidFill>
+                  <a:schemeClr val="tx1"/>
+                </a:solidFill>
+                <a:effectLst/>
+                <a:latin typeface="+mn-lt"/>
+                <a:ea typeface="+mn-ea"/>
+                <a:cs typeface="+mn-cs"/>
+              </a:rPr>
+              <a:t> </a:t>
+            </a:r>
+            <a:r>
+              <a:rPr lang="ko-KR" altLang="ko-KR" sz="1200" b="0" i="1" kern="1200" dirty="0" err="1">
+                <a:solidFill>
+                  <a:schemeClr val="tx1"/>
+                </a:solidFill>
+                <a:effectLst/>
+                <a:latin typeface="+mn-lt"/>
+                <a:ea typeface="+mn-ea"/>
+                <a:cs typeface="+mn-cs"/>
+              </a:rPr>
+              <a:t>test</a:t>
+            </a:r>
+            <a:r>
+              <a:rPr lang="ko-KR" altLang="ko-KR" sz="1200" b="0" i="1" kern="1200" dirty="0">
+                <a:solidFill>
+                  <a:schemeClr val="tx1"/>
+                </a:solidFill>
+                <a:effectLst/>
+                <a:latin typeface="+mn-lt"/>
+                <a:ea typeface="+mn-ea"/>
+                <a:cs typeface="+mn-cs"/>
+              </a:rPr>
+              <a:t> </a:t>
+            </a:r>
+            <a:r>
+              <a:rPr lang="ko-KR" altLang="ko-KR" sz="1200" b="0" i="1" kern="1200" dirty="0" err="1">
+                <a:solidFill>
+                  <a:schemeClr val="tx1"/>
+                </a:solidFill>
+                <a:effectLst/>
+                <a:latin typeface="+mn-lt"/>
+                <a:ea typeface="+mn-ea"/>
+                <a:cs typeface="+mn-cs"/>
+              </a:rPr>
+              <a:t>meaningful</a:t>
+            </a:r>
+            <a:r>
+              <a:rPr lang="ko-KR" altLang="ko-KR" sz="1200" b="0" i="1" kern="1200" dirty="0">
+                <a:solidFill>
+                  <a:schemeClr val="tx1"/>
+                </a:solidFill>
+                <a:effectLst/>
+                <a:latin typeface="+mn-lt"/>
+                <a:ea typeface="+mn-ea"/>
+                <a:cs typeface="+mn-cs"/>
+              </a:rPr>
+              <a:t>?"</a:t>
+            </a:r>
+            <a:endParaRPr lang="ko-KR" altLang="ko-KR" sz="1200" b="0" i="0" kern="1200" dirty="0">
+              <a:solidFill>
+                <a:schemeClr val="tx1"/>
+              </a:solidFill>
+              <a:effectLst/>
+              <a:latin typeface="+mn-lt"/>
+              <a:ea typeface="+mn-ea"/>
+              <a:cs typeface="+mn-cs"/>
+            </a:endParaRPr>
+          </a:p>
+          <a:p>
+            <a:r>
+              <a:rPr lang="ko-KR" altLang="ko-KR" sz="1200" b="0" i="0" kern="1200" dirty="0">
+                <a:solidFill>
+                  <a:schemeClr val="tx1"/>
+                </a:solidFill>
+                <a:effectLst/>
+                <a:latin typeface="+mn-lt"/>
+                <a:ea typeface="+mn-ea"/>
+                <a:cs typeface="+mn-cs"/>
+              </a:rPr>
+              <a:t>The </a:t>
+            </a:r>
+            <a:r>
+              <a:rPr lang="ko-KR" altLang="ko-KR" sz="1200" b="0" i="0" kern="1200" dirty="0" err="1">
+                <a:solidFill>
+                  <a:schemeClr val="tx1"/>
+                </a:solidFill>
+                <a:effectLst/>
+                <a:latin typeface="+mn-lt"/>
+                <a:ea typeface="+mn-ea"/>
+                <a:cs typeface="+mn-cs"/>
+              </a:rPr>
+              <a:t>test</a:t>
+            </a:r>
+            <a:r>
+              <a:rPr lang="ko-KR" altLang="ko-KR" sz="1200" b="0" i="0" kern="1200" dirty="0">
+                <a:solidFill>
+                  <a:schemeClr val="tx1"/>
+                </a:solidFill>
+                <a:effectLst/>
+                <a:latin typeface="+mn-lt"/>
+                <a:ea typeface="+mn-ea"/>
+                <a:cs typeface="+mn-cs"/>
+              </a:rPr>
+              <a:t> </a:t>
+            </a:r>
+            <a:r>
+              <a:rPr lang="ko-KR" altLang="ko-KR" sz="1200" b="0" i="0" kern="1200" dirty="0" err="1">
+                <a:solidFill>
+                  <a:schemeClr val="tx1"/>
+                </a:solidFill>
+                <a:effectLst/>
+                <a:latin typeface="+mn-lt"/>
+                <a:ea typeface="+mn-ea"/>
+                <a:cs typeface="+mn-cs"/>
+              </a:rPr>
+              <a:t>is</a:t>
+            </a:r>
+            <a:r>
+              <a:rPr lang="ko-KR" altLang="ko-KR" sz="1200" b="0" i="0" kern="1200" dirty="0">
+                <a:solidFill>
+                  <a:schemeClr val="tx1"/>
+                </a:solidFill>
+                <a:effectLst/>
+                <a:latin typeface="+mn-lt"/>
+                <a:ea typeface="+mn-ea"/>
+                <a:cs typeface="+mn-cs"/>
+              </a:rPr>
+              <a:t> </a:t>
+            </a:r>
+            <a:r>
+              <a:rPr lang="ko-KR" altLang="ko-KR" sz="1200" b="0" i="0" kern="1200" dirty="0" err="1">
+                <a:solidFill>
+                  <a:schemeClr val="tx1"/>
+                </a:solidFill>
+                <a:effectLst/>
+                <a:latin typeface="+mn-lt"/>
+                <a:ea typeface="+mn-ea"/>
+                <a:cs typeface="+mn-cs"/>
+              </a:rPr>
+              <a:t>run</a:t>
+            </a:r>
+            <a:r>
+              <a:rPr lang="ko-KR" altLang="ko-KR" sz="1200" b="0" i="0" kern="1200" dirty="0">
+                <a:solidFill>
+                  <a:schemeClr val="tx1"/>
+                </a:solidFill>
+                <a:effectLst/>
+                <a:latin typeface="+mn-lt"/>
+                <a:ea typeface="+mn-ea"/>
+                <a:cs typeface="+mn-cs"/>
+              </a:rPr>
+              <a:t> </a:t>
+            </a:r>
+            <a:r>
+              <a:rPr lang="ko-KR" altLang="ko-KR" sz="1200" b="0" i="0" kern="1200" dirty="0" err="1">
+                <a:solidFill>
+                  <a:schemeClr val="tx1"/>
+                </a:solidFill>
+                <a:effectLst/>
+                <a:latin typeface="+mn-lt"/>
+                <a:ea typeface="+mn-ea"/>
+                <a:cs typeface="+mn-cs"/>
+              </a:rPr>
+              <a:t>on</a:t>
+            </a:r>
+            <a:r>
+              <a:rPr lang="ko-KR" altLang="ko-KR" sz="1200" b="0" i="0" kern="1200" dirty="0">
+                <a:solidFill>
+                  <a:schemeClr val="tx1"/>
+                </a:solidFill>
+                <a:effectLst/>
+                <a:latin typeface="+mn-lt"/>
+                <a:ea typeface="+mn-ea"/>
+                <a:cs typeface="+mn-cs"/>
+              </a:rPr>
+              <a:t> </a:t>
+            </a:r>
+            <a:r>
+              <a:rPr lang="ko-KR" altLang="ko-KR" sz="1200" b="0" i="0" kern="1200" dirty="0" err="1">
+                <a:solidFill>
+                  <a:schemeClr val="tx1"/>
+                </a:solidFill>
+                <a:effectLst/>
+                <a:latin typeface="+mn-lt"/>
+                <a:ea typeface="+mn-ea"/>
+                <a:cs typeface="+mn-cs"/>
+              </a:rPr>
+              <a:t>the</a:t>
+            </a:r>
+            <a:r>
+              <a:rPr lang="ko-KR" altLang="ko-KR" sz="1200" b="0" i="0" kern="1200" dirty="0">
+                <a:solidFill>
+                  <a:schemeClr val="tx1"/>
+                </a:solidFill>
+                <a:effectLst/>
+                <a:latin typeface="+mn-lt"/>
+                <a:ea typeface="+mn-ea"/>
+                <a:cs typeface="+mn-cs"/>
+              </a:rPr>
+              <a:t> </a:t>
+            </a:r>
+            <a:r>
+              <a:rPr lang="ko-KR" altLang="ko-KR" sz="1200" b="1" i="0" kern="1200" dirty="0" err="1">
+                <a:solidFill>
+                  <a:schemeClr val="tx1"/>
+                </a:solidFill>
+                <a:effectLst/>
+                <a:latin typeface="+mn-lt"/>
+                <a:ea typeface="+mn-ea"/>
+                <a:cs typeface="+mn-cs"/>
+              </a:rPr>
+              <a:t>daily</a:t>
+            </a:r>
+            <a:r>
+              <a:rPr lang="ko-KR" altLang="ko-KR" sz="1200" b="1" i="0" kern="1200" dirty="0">
+                <a:solidFill>
+                  <a:schemeClr val="tx1"/>
+                </a:solidFill>
+                <a:effectLst/>
+                <a:latin typeface="+mn-lt"/>
+                <a:ea typeface="+mn-ea"/>
+                <a:cs typeface="+mn-cs"/>
+              </a:rPr>
+              <a:t> </a:t>
+            </a:r>
+            <a:r>
+              <a:rPr lang="ko-KR" altLang="ko-KR" sz="1200" b="1" i="0" kern="1200" dirty="0" err="1">
+                <a:solidFill>
+                  <a:schemeClr val="tx1"/>
+                </a:solidFill>
+                <a:effectLst/>
+                <a:latin typeface="+mn-lt"/>
+                <a:ea typeface="+mn-ea"/>
+                <a:cs typeface="+mn-cs"/>
+              </a:rPr>
+              <a:t>abnormal</a:t>
+            </a:r>
+            <a:r>
+              <a:rPr lang="ko-KR" altLang="ko-KR" sz="1200" b="1" i="0" kern="1200" dirty="0">
+                <a:solidFill>
+                  <a:schemeClr val="tx1"/>
+                </a:solidFill>
+                <a:effectLst/>
+                <a:latin typeface="+mn-lt"/>
+                <a:ea typeface="+mn-ea"/>
+                <a:cs typeface="+mn-cs"/>
+              </a:rPr>
+              <a:t> </a:t>
+            </a:r>
+            <a:r>
+              <a:rPr lang="ko-KR" altLang="ko-KR" sz="1200" b="1" i="0" kern="1200" dirty="0" err="1">
+                <a:solidFill>
+                  <a:schemeClr val="tx1"/>
+                </a:solidFill>
+                <a:effectLst/>
+                <a:latin typeface="+mn-lt"/>
+                <a:ea typeface="+mn-ea"/>
+                <a:cs typeface="+mn-cs"/>
+              </a:rPr>
+              <a:t>spread</a:t>
+            </a:r>
+            <a:r>
+              <a:rPr lang="ko-KR" altLang="ko-KR" sz="1200" b="1" i="0" kern="1200" dirty="0">
+                <a:solidFill>
+                  <a:schemeClr val="tx1"/>
+                </a:solidFill>
+                <a:effectLst/>
+                <a:latin typeface="+mn-lt"/>
+                <a:ea typeface="+mn-ea"/>
+                <a:cs typeface="+mn-cs"/>
+              </a:rPr>
+              <a:t> </a:t>
+            </a:r>
+            <a:r>
+              <a:rPr lang="ko-KR" altLang="ko-KR" sz="1200" b="1" i="0" kern="1200" dirty="0" err="1">
+                <a:solidFill>
+                  <a:schemeClr val="tx1"/>
+                </a:solidFill>
+                <a:effectLst/>
+                <a:latin typeface="+mn-lt"/>
+                <a:ea typeface="+mn-ea"/>
+                <a:cs typeface="+mn-cs"/>
+              </a:rPr>
+              <a:t>series</a:t>
+            </a:r>
+            <a:r>
+              <a:rPr lang="ko-KR" altLang="ko-KR" sz="1200" b="0" i="0" kern="1200" dirty="0">
+                <a:solidFill>
+                  <a:schemeClr val="tx1"/>
+                </a:solidFill>
+                <a:effectLst/>
+                <a:latin typeface="+mn-lt"/>
+                <a:ea typeface="+mn-ea"/>
+                <a:cs typeface="+mn-cs"/>
+              </a:rPr>
+              <a:t>, </a:t>
+            </a:r>
+            <a:r>
+              <a:rPr lang="ko-KR" altLang="ko-KR" sz="1200" b="0" i="0" kern="1200" dirty="0" err="1">
+                <a:solidFill>
+                  <a:schemeClr val="tx1"/>
+                </a:solidFill>
+                <a:effectLst/>
+                <a:latin typeface="+mn-lt"/>
+                <a:ea typeface="+mn-ea"/>
+                <a:cs typeface="+mn-cs"/>
+              </a:rPr>
+              <a:t>not</a:t>
+            </a:r>
+            <a:r>
+              <a:rPr lang="ko-KR" altLang="ko-KR" sz="1200" b="0" i="0" kern="1200" dirty="0">
+                <a:solidFill>
+                  <a:schemeClr val="tx1"/>
+                </a:solidFill>
+                <a:effectLst/>
+                <a:latin typeface="+mn-lt"/>
+                <a:ea typeface="+mn-ea"/>
+                <a:cs typeface="+mn-cs"/>
+              </a:rPr>
+              <a:t> </a:t>
+            </a:r>
+            <a:r>
+              <a:rPr lang="ko-KR" altLang="ko-KR" sz="1200" b="0" i="0" kern="1200" dirty="0" err="1">
+                <a:solidFill>
+                  <a:schemeClr val="tx1"/>
+                </a:solidFill>
+                <a:effectLst/>
+                <a:latin typeface="+mn-lt"/>
+                <a:ea typeface="+mn-ea"/>
+                <a:cs typeface="+mn-cs"/>
+              </a:rPr>
+              <a:t>on</a:t>
+            </a:r>
+            <a:r>
+              <a:rPr lang="ko-KR" altLang="ko-KR" sz="1200" b="0" i="0" kern="1200" dirty="0">
+                <a:solidFill>
+                  <a:schemeClr val="tx1"/>
+                </a:solidFill>
+                <a:effectLst/>
+                <a:latin typeface="+mn-lt"/>
+                <a:ea typeface="+mn-ea"/>
+                <a:cs typeface="+mn-cs"/>
+              </a:rPr>
+              <a:t> </a:t>
+            </a:r>
+            <a:r>
+              <a:rPr lang="ko-KR" altLang="ko-KR" sz="1200" b="0" i="0" kern="1200" dirty="0" err="1">
+                <a:solidFill>
+                  <a:schemeClr val="tx1"/>
+                </a:solidFill>
+                <a:effectLst/>
+                <a:latin typeface="+mn-lt"/>
+                <a:ea typeface="+mn-ea"/>
+                <a:cs typeface="+mn-cs"/>
+              </a:rPr>
+              <a:t>the</a:t>
+            </a:r>
+            <a:r>
+              <a:rPr lang="ko-KR" altLang="ko-KR" sz="1200" b="0" i="0" kern="1200" dirty="0">
+                <a:solidFill>
+                  <a:schemeClr val="tx1"/>
+                </a:solidFill>
+                <a:effectLst/>
+                <a:latin typeface="+mn-lt"/>
+                <a:ea typeface="+mn-ea"/>
+                <a:cs typeface="+mn-cs"/>
+              </a:rPr>
+              <a:t> 3 </a:t>
+            </a:r>
+            <a:r>
+              <a:rPr lang="ko-KR" altLang="ko-KR" sz="1200" b="0" i="0" kern="1200" dirty="0" err="1">
+                <a:solidFill>
+                  <a:schemeClr val="tx1"/>
+                </a:solidFill>
+                <a:effectLst/>
+                <a:latin typeface="+mn-lt"/>
+                <a:ea typeface="+mn-ea"/>
+                <a:cs typeface="+mn-cs"/>
+              </a:rPr>
+              <a:t>event-level</a:t>
+            </a:r>
+            <a:r>
+              <a:rPr lang="ko-KR" altLang="ko-KR" sz="1200" b="0" i="0" kern="1200" dirty="0">
+                <a:solidFill>
+                  <a:schemeClr val="tx1"/>
+                </a:solidFill>
+                <a:effectLst/>
+                <a:latin typeface="+mn-lt"/>
+                <a:ea typeface="+mn-ea"/>
+                <a:cs typeface="+mn-cs"/>
+              </a:rPr>
+              <a:t> </a:t>
+            </a:r>
+            <a:r>
+              <a:rPr lang="ko-KR" altLang="ko-KR" sz="1200" b="0" i="0" kern="1200" dirty="0" err="1">
+                <a:solidFill>
+                  <a:schemeClr val="tx1"/>
+                </a:solidFill>
+                <a:effectLst/>
+                <a:latin typeface="+mn-lt"/>
+                <a:ea typeface="+mn-ea"/>
+                <a:cs typeface="+mn-cs"/>
+              </a:rPr>
+              <a:t>CARs</a:t>
+            </a:r>
+            <a:r>
+              <a:rPr lang="ko-KR" altLang="ko-KR" sz="1200" b="0" i="0" kern="1200" dirty="0">
+                <a:solidFill>
+                  <a:schemeClr val="tx1"/>
+                </a:solidFill>
+                <a:effectLst/>
+                <a:latin typeface="+mn-lt"/>
+                <a:ea typeface="+mn-ea"/>
+                <a:cs typeface="+mn-cs"/>
+              </a:rPr>
+              <a:t>. </a:t>
+            </a:r>
+            <a:r>
+              <a:rPr lang="ko-KR" altLang="ko-KR" sz="1200" b="0" i="0" kern="1200" dirty="0" err="1">
+                <a:solidFill>
+                  <a:schemeClr val="tx1"/>
+                </a:solidFill>
+                <a:effectLst/>
+                <a:latin typeface="+mn-lt"/>
+                <a:ea typeface="+mn-ea"/>
+                <a:cs typeface="+mn-cs"/>
+              </a:rPr>
+              <a:t>Each</a:t>
+            </a:r>
+            <a:r>
+              <a:rPr lang="ko-KR" altLang="ko-KR" sz="1200" b="0" i="0" kern="1200" dirty="0">
+                <a:solidFill>
+                  <a:schemeClr val="tx1"/>
+                </a:solidFill>
+                <a:effectLst/>
+                <a:latin typeface="+mn-lt"/>
+                <a:ea typeface="+mn-ea"/>
+                <a:cs typeface="+mn-cs"/>
+              </a:rPr>
+              <a:t> </a:t>
+            </a:r>
+            <a:r>
+              <a:rPr lang="ko-KR" altLang="ko-KR" sz="1200" b="0" i="0" kern="1200" dirty="0" err="1">
+                <a:solidFill>
+                  <a:schemeClr val="tx1"/>
+                </a:solidFill>
+                <a:effectLst/>
+                <a:latin typeface="+mn-lt"/>
+                <a:ea typeface="+mn-ea"/>
+                <a:cs typeface="+mn-cs"/>
+              </a:rPr>
+              <a:t>event</a:t>
+            </a:r>
+            <a:r>
+              <a:rPr lang="ko-KR" altLang="ko-KR" sz="1200" b="0" i="0" kern="1200" dirty="0">
+                <a:solidFill>
+                  <a:schemeClr val="tx1"/>
+                </a:solidFill>
+                <a:effectLst/>
+                <a:latin typeface="+mn-lt"/>
+                <a:ea typeface="+mn-ea"/>
+                <a:cs typeface="+mn-cs"/>
+              </a:rPr>
+              <a:t> </a:t>
+            </a:r>
+            <a:r>
+              <a:rPr lang="ko-KR" altLang="ko-KR" sz="1200" b="0" i="0" kern="1200" dirty="0" err="1">
+                <a:solidFill>
+                  <a:schemeClr val="tx1"/>
+                </a:solidFill>
+                <a:effectLst/>
+                <a:latin typeface="+mn-lt"/>
+                <a:ea typeface="+mn-ea"/>
+                <a:cs typeface="+mn-cs"/>
+              </a:rPr>
+              <a:t>has</a:t>
+            </a:r>
+            <a:r>
+              <a:rPr lang="ko-KR" altLang="ko-KR" sz="1200" b="0" i="0" kern="1200" dirty="0">
+                <a:solidFill>
+                  <a:schemeClr val="tx1"/>
+                </a:solidFill>
+                <a:effectLst/>
+                <a:latin typeface="+mn-lt"/>
+                <a:ea typeface="+mn-ea"/>
+                <a:cs typeface="+mn-cs"/>
+              </a:rPr>
+              <a:t> 26 </a:t>
+            </a:r>
+            <a:r>
+              <a:rPr lang="ko-KR" altLang="ko-KR" sz="1200" b="0" i="0" kern="1200" dirty="0" err="1">
+                <a:solidFill>
+                  <a:schemeClr val="tx1"/>
+                </a:solidFill>
+                <a:effectLst/>
+                <a:latin typeface="+mn-lt"/>
+                <a:ea typeface="+mn-ea"/>
+                <a:cs typeface="+mn-cs"/>
+              </a:rPr>
+              <a:t>trading</a:t>
+            </a:r>
+            <a:r>
+              <a:rPr lang="ko-KR" altLang="ko-KR" sz="1200" b="0" i="0" kern="1200" dirty="0">
+                <a:solidFill>
+                  <a:schemeClr val="tx1"/>
+                </a:solidFill>
+                <a:effectLst/>
+                <a:latin typeface="+mn-lt"/>
+                <a:ea typeface="+mn-ea"/>
+                <a:cs typeface="+mn-cs"/>
+              </a:rPr>
+              <a:t> </a:t>
+            </a:r>
+            <a:r>
+              <a:rPr lang="ko-KR" altLang="ko-KR" sz="1200" b="0" i="0" kern="1200" dirty="0" err="1">
+                <a:solidFill>
+                  <a:schemeClr val="tx1"/>
+                </a:solidFill>
+                <a:effectLst/>
+                <a:latin typeface="+mn-lt"/>
+                <a:ea typeface="+mn-ea"/>
+                <a:cs typeface="+mn-cs"/>
+              </a:rPr>
+              <a:t>days</a:t>
+            </a:r>
+            <a:r>
+              <a:rPr lang="ko-KR" altLang="ko-KR" sz="1200" b="0" i="0" kern="1200" dirty="0">
+                <a:solidFill>
+                  <a:schemeClr val="tx1"/>
+                </a:solidFill>
+                <a:effectLst/>
+                <a:latin typeface="+mn-lt"/>
+                <a:ea typeface="+mn-ea"/>
+                <a:cs typeface="+mn-cs"/>
+              </a:rPr>
+              <a:t> </a:t>
+            </a:r>
+            <a:r>
+              <a:rPr lang="ko-KR" altLang="ko-KR" sz="1200" b="0" i="0" kern="1200" dirty="0" err="1">
+                <a:solidFill>
+                  <a:schemeClr val="tx1"/>
+                </a:solidFill>
+                <a:effectLst/>
+                <a:latin typeface="+mn-lt"/>
+                <a:ea typeface="+mn-ea"/>
+                <a:cs typeface="+mn-cs"/>
+              </a:rPr>
+              <a:t>in</a:t>
+            </a:r>
+            <a:r>
+              <a:rPr lang="ko-KR" altLang="ko-KR" sz="1200" b="0" i="0" kern="1200" dirty="0">
+                <a:solidFill>
+                  <a:schemeClr val="tx1"/>
+                </a:solidFill>
+                <a:effectLst/>
+                <a:latin typeface="+mn-lt"/>
+                <a:ea typeface="+mn-ea"/>
+                <a:cs typeface="+mn-cs"/>
+              </a:rPr>
+              <a:t> </a:t>
+            </a:r>
+            <a:r>
+              <a:rPr lang="ko-KR" altLang="ko-KR" sz="1200" b="0" i="0" kern="1200" dirty="0" err="1">
+                <a:solidFill>
+                  <a:schemeClr val="tx1"/>
+                </a:solidFill>
+                <a:effectLst/>
+                <a:latin typeface="+mn-lt"/>
+                <a:ea typeface="+mn-ea"/>
+                <a:cs typeface="+mn-cs"/>
+              </a:rPr>
+              <a:t>the</a:t>
+            </a:r>
+            <a:r>
+              <a:rPr lang="ko-KR" altLang="ko-KR" sz="1200" b="0" i="0" kern="1200" dirty="0">
+                <a:solidFill>
+                  <a:schemeClr val="tx1"/>
+                </a:solidFill>
+                <a:effectLst/>
+                <a:latin typeface="+mn-lt"/>
+                <a:ea typeface="+mn-ea"/>
+                <a:cs typeface="+mn-cs"/>
+              </a:rPr>
+              <a:t> </a:t>
+            </a:r>
+            <a:r>
+              <a:rPr lang="ko-KR" altLang="ko-KR" sz="1200" b="0" i="0" kern="1200" dirty="0" err="1">
+                <a:solidFill>
+                  <a:schemeClr val="tx1"/>
+                </a:solidFill>
+                <a:effectLst/>
+                <a:latin typeface="+mn-lt"/>
+                <a:ea typeface="+mn-ea"/>
+                <a:cs typeface="+mn-cs"/>
+              </a:rPr>
+              <a:t>window</a:t>
+            </a:r>
+            <a:r>
+              <a:rPr lang="ko-KR" altLang="ko-KR" sz="1200" b="0" i="0" kern="1200" dirty="0">
+                <a:solidFill>
+                  <a:schemeClr val="tx1"/>
+                </a:solidFill>
+                <a:effectLst/>
+                <a:latin typeface="+mn-lt"/>
+                <a:ea typeface="+mn-ea"/>
+                <a:cs typeface="+mn-cs"/>
+              </a:rPr>
+              <a:t>, </a:t>
+            </a:r>
+            <a:r>
+              <a:rPr lang="ko-KR" altLang="ko-KR" sz="1200" b="0" i="0" kern="1200" dirty="0" err="1">
+                <a:solidFill>
+                  <a:schemeClr val="tx1"/>
+                </a:solidFill>
+                <a:effectLst/>
+                <a:latin typeface="+mn-lt"/>
+                <a:ea typeface="+mn-ea"/>
+                <a:cs typeface="+mn-cs"/>
+              </a:rPr>
+              <a:t>giving</a:t>
+            </a:r>
+            <a:r>
+              <a:rPr lang="ko-KR" altLang="ko-KR" sz="1200" b="0" i="0" kern="1200" dirty="0">
+                <a:solidFill>
+                  <a:schemeClr val="tx1"/>
+                </a:solidFill>
+                <a:effectLst/>
+                <a:latin typeface="+mn-lt"/>
+                <a:ea typeface="+mn-ea"/>
+                <a:cs typeface="+mn-cs"/>
+              </a:rPr>
+              <a:t> </a:t>
+            </a:r>
+            <a:r>
+              <a:rPr lang="ko-KR" altLang="ko-KR" sz="1200" b="0" i="0" kern="1200" dirty="0" err="1">
+                <a:solidFill>
+                  <a:schemeClr val="tx1"/>
+                </a:solidFill>
+                <a:effectLst/>
+                <a:latin typeface="+mn-lt"/>
+                <a:ea typeface="+mn-ea"/>
+                <a:cs typeface="+mn-cs"/>
+              </a:rPr>
+              <a:t>roughly</a:t>
+            </a:r>
+            <a:r>
+              <a:rPr lang="ko-KR" altLang="ko-KR" sz="1200" b="0" i="0" kern="1200" dirty="0">
+                <a:solidFill>
+                  <a:schemeClr val="tx1"/>
+                </a:solidFill>
+                <a:effectLst/>
+                <a:latin typeface="+mn-lt"/>
+                <a:ea typeface="+mn-ea"/>
+                <a:cs typeface="+mn-cs"/>
+              </a:rPr>
+              <a:t> 52 </a:t>
+            </a:r>
+            <a:r>
+              <a:rPr lang="ko-KR" altLang="ko-KR" sz="1200" b="0" i="0" kern="1200" dirty="0" err="1">
+                <a:solidFill>
+                  <a:schemeClr val="tx1"/>
+                </a:solidFill>
+                <a:effectLst/>
+                <a:latin typeface="+mn-lt"/>
+                <a:ea typeface="+mn-ea"/>
+                <a:cs typeface="+mn-cs"/>
+              </a:rPr>
+              <a:t>low-buffer</a:t>
+            </a:r>
+            <a:r>
+              <a:rPr lang="ko-KR" altLang="ko-KR" sz="1200" b="0" i="0" kern="1200" dirty="0">
+                <a:solidFill>
+                  <a:schemeClr val="tx1"/>
+                </a:solidFill>
+                <a:effectLst/>
+                <a:latin typeface="+mn-lt"/>
+                <a:ea typeface="+mn-ea"/>
+                <a:cs typeface="+mn-cs"/>
+              </a:rPr>
+              <a:t> </a:t>
+            </a:r>
+            <a:r>
+              <a:rPr lang="ko-KR" altLang="ko-KR" sz="1200" b="0" i="0" kern="1200" dirty="0" err="1">
+                <a:solidFill>
+                  <a:schemeClr val="tx1"/>
+                </a:solidFill>
+                <a:effectLst/>
+                <a:latin typeface="+mn-lt"/>
+                <a:ea typeface="+mn-ea"/>
+                <a:cs typeface="+mn-cs"/>
+              </a:rPr>
+              <a:t>observations</a:t>
+            </a:r>
+            <a:r>
+              <a:rPr lang="ko-KR" altLang="ko-KR" sz="1200" b="0" i="0" kern="1200" dirty="0">
+                <a:solidFill>
+                  <a:schemeClr val="tx1"/>
+                </a:solidFill>
+                <a:effectLst/>
+                <a:latin typeface="+mn-lt"/>
+                <a:ea typeface="+mn-ea"/>
+                <a:cs typeface="+mn-cs"/>
+              </a:rPr>
+              <a:t> and 26 </a:t>
+            </a:r>
+            <a:r>
+              <a:rPr lang="ko-KR" altLang="ko-KR" sz="1200" b="0" i="0" kern="1200" dirty="0" err="1">
+                <a:solidFill>
+                  <a:schemeClr val="tx1"/>
+                </a:solidFill>
+                <a:effectLst/>
+                <a:latin typeface="+mn-lt"/>
+                <a:ea typeface="+mn-ea"/>
+                <a:cs typeface="+mn-cs"/>
+              </a:rPr>
+              <a:t>high-buffer</a:t>
+            </a:r>
+            <a:r>
+              <a:rPr lang="ko-KR" altLang="ko-KR" sz="1200" b="0" i="0" kern="1200" dirty="0">
+                <a:solidFill>
+                  <a:schemeClr val="tx1"/>
+                </a:solidFill>
+                <a:effectLst/>
+                <a:latin typeface="+mn-lt"/>
+                <a:ea typeface="+mn-ea"/>
+                <a:cs typeface="+mn-cs"/>
+              </a:rPr>
+              <a:t> </a:t>
+            </a:r>
+            <a:r>
+              <a:rPr lang="ko-KR" altLang="ko-KR" sz="1200" b="0" i="0" kern="1200" dirty="0" err="1">
+                <a:solidFill>
+                  <a:schemeClr val="tx1"/>
+                </a:solidFill>
+                <a:effectLst/>
+                <a:latin typeface="+mn-lt"/>
+                <a:ea typeface="+mn-ea"/>
+                <a:cs typeface="+mn-cs"/>
+              </a:rPr>
+              <a:t>observations</a:t>
+            </a:r>
+            <a:r>
+              <a:rPr lang="ko-KR" altLang="ko-KR" sz="1200" b="0" i="0" kern="1200" dirty="0">
+                <a:solidFill>
+                  <a:schemeClr val="tx1"/>
+                </a:solidFill>
+                <a:effectLst/>
+                <a:latin typeface="+mn-lt"/>
+                <a:ea typeface="+mn-ea"/>
+                <a:cs typeface="+mn-cs"/>
+              </a:rPr>
+              <a:t>. </a:t>
+            </a:r>
+            <a:r>
+              <a:rPr lang="ko-KR" altLang="ko-KR" sz="1200" b="0" i="0" kern="1200" dirty="0" err="1">
+                <a:solidFill>
+                  <a:schemeClr val="tx1"/>
+                </a:solidFill>
+                <a:effectLst/>
+                <a:latin typeface="+mn-lt"/>
+                <a:ea typeface="+mn-ea"/>
+                <a:cs typeface="+mn-cs"/>
+              </a:rPr>
+              <a:t>That</a:t>
+            </a:r>
+            <a:r>
+              <a:rPr lang="ko-KR" altLang="ko-KR" sz="1200" b="0" i="0" kern="1200" dirty="0">
+                <a:solidFill>
+                  <a:schemeClr val="tx1"/>
+                </a:solidFill>
+                <a:effectLst/>
+                <a:latin typeface="+mn-lt"/>
+                <a:ea typeface="+mn-ea"/>
+                <a:cs typeface="+mn-cs"/>
+              </a:rPr>
+              <a:t> </a:t>
+            </a:r>
+            <a:r>
+              <a:rPr lang="ko-KR" altLang="ko-KR" sz="1200" b="0" i="0" kern="1200" dirty="0" err="1">
+                <a:solidFill>
+                  <a:schemeClr val="tx1"/>
+                </a:solidFill>
+                <a:effectLst/>
+                <a:latin typeface="+mn-lt"/>
+                <a:ea typeface="+mn-ea"/>
+                <a:cs typeface="+mn-cs"/>
+              </a:rPr>
+              <a:t>is</a:t>
+            </a:r>
+            <a:r>
+              <a:rPr lang="ko-KR" altLang="ko-KR" sz="1200" b="0" i="0" kern="1200" dirty="0">
+                <a:solidFill>
+                  <a:schemeClr val="tx1"/>
+                </a:solidFill>
+                <a:effectLst/>
+                <a:latin typeface="+mn-lt"/>
+                <a:ea typeface="+mn-ea"/>
+                <a:cs typeface="+mn-cs"/>
+              </a:rPr>
+              <a:t> </a:t>
+            </a:r>
+            <a:r>
+              <a:rPr lang="ko-KR" altLang="ko-KR" sz="1200" b="0" i="0" kern="1200" dirty="0" err="1">
+                <a:solidFill>
+                  <a:schemeClr val="tx1"/>
+                </a:solidFill>
+                <a:effectLst/>
+                <a:latin typeface="+mn-lt"/>
+                <a:ea typeface="+mn-ea"/>
+                <a:cs typeface="+mn-cs"/>
+              </a:rPr>
+              <a:t>enough</a:t>
+            </a:r>
+            <a:r>
+              <a:rPr lang="ko-KR" altLang="ko-KR" sz="1200" b="0" i="0" kern="1200" dirty="0">
+                <a:solidFill>
+                  <a:schemeClr val="tx1"/>
+                </a:solidFill>
+                <a:effectLst/>
+                <a:latin typeface="+mn-lt"/>
+                <a:ea typeface="+mn-ea"/>
+                <a:cs typeface="+mn-cs"/>
+              </a:rPr>
+              <a:t> </a:t>
+            </a:r>
+            <a:r>
+              <a:rPr lang="ko-KR" altLang="ko-KR" sz="1200" b="0" i="0" kern="1200" dirty="0" err="1">
+                <a:solidFill>
+                  <a:schemeClr val="tx1"/>
+                </a:solidFill>
+                <a:effectLst/>
+                <a:latin typeface="+mn-lt"/>
+                <a:ea typeface="+mn-ea"/>
+                <a:cs typeface="+mn-cs"/>
+              </a:rPr>
+              <a:t>to</a:t>
+            </a:r>
+            <a:r>
+              <a:rPr lang="ko-KR" altLang="ko-KR" sz="1200" b="0" i="0" kern="1200" dirty="0">
+                <a:solidFill>
+                  <a:schemeClr val="tx1"/>
+                </a:solidFill>
+                <a:effectLst/>
+                <a:latin typeface="+mn-lt"/>
+                <a:ea typeface="+mn-ea"/>
+                <a:cs typeface="+mn-cs"/>
+              </a:rPr>
+              <a:t> </a:t>
+            </a:r>
+            <a:r>
+              <a:rPr lang="ko-KR" altLang="ko-KR" sz="1200" b="0" i="0" kern="1200" dirty="0" err="1">
+                <a:solidFill>
+                  <a:schemeClr val="tx1"/>
+                </a:solidFill>
+                <a:effectLst/>
+                <a:latin typeface="+mn-lt"/>
+                <a:ea typeface="+mn-ea"/>
+                <a:cs typeface="+mn-cs"/>
+              </a:rPr>
+              <a:t>run</a:t>
+            </a:r>
+            <a:r>
+              <a:rPr lang="ko-KR" altLang="ko-KR" sz="1200" b="0" i="0" kern="1200" dirty="0">
+                <a:solidFill>
+                  <a:schemeClr val="tx1"/>
+                </a:solidFill>
+                <a:effectLst/>
+                <a:latin typeface="+mn-lt"/>
+                <a:ea typeface="+mn-ea"/>
+                <a:cs typeface="+mn-cs"/>
+              </a:rPr>
+              <a:t> </a:t>
+            </a:r>
+            <a:r>
+              <a:rPr lang="ko-KR" altLang="ko-KR" sz="1200" b="0" i="0" kern="1200" dirty="0" err="1">
+                <a:solidFill>
+                  <a:schemeClr val="tx1"/>
+                </a:solidFill>
+                <a:effectLst/>
+                <a:latin typeface="+mn-lt"/>
+                <a:ea typeface="+mn-ea"/>
+                <a:cs typeface="+mn-cs"/>
+              </a:rPr>
+              <a:t>the</a:t>
+            </a:r>
+            <a:r>
+              <a:rPr lang="ko-KR" altLang="ko-KR" sz="1200" b="0" i="0" kern="1200" dirty="0">
+                <a:solidFill>
+                  <a:schemeClr val="tx1"/>
+                </a:solidFill>
+                <a:effectLst/>
+                <a:latin typeface="+mn-lt"/>
+                <a:ea typeface="+mn-ea"/>
+                <a:cs typeface="+mn-cs"/>
+              </a:rPr>
+              <a:t> </a:t>
+            </a:r>
+            <a:r>
+              <a:rPr lang="ko-KR" altLang="ko-KR" sz="1200" b="0" i="0" kern="1200" dirty="0" err="1">
+                <a:solidFill>
+                  <a:schemeClr val="tx1"/>
+                </a:solidFill>
+                <a:effectLst/>
+                <a:latin typeface="+mn-lt"/>
+                <a:ea typeface="+mn-ea"/>
+                <a:cs typeface="+mn-cs"/>
+              </a:rPr>
+              <a:t>test</a:t>
+            </a:r>
+            <a:r>
+              <a:rPr lang="ko-KR" altLang="ko-KR" sz="1200" b="0" i="0" kern="1200" dirty="0">
+                <a:solidFill>
+                  <a:schemeClr val="tx1"/>
+                </a:solidFill>
+                <a:effectLst/>
+                <a:latin typeface="+mn-lt"/>
+                <a:ea typeface="+mn-ea"/>
+                <a:cs typeface="+mn-cs"/>
+              </a:rPr>
+              <a:t>.</a:t>
+            </a:r>
+          </a:p>
+          <a:p>
+            <a:endParaRPr dirty="0"/>
           </a:p>
         </p:txBody>
       </p:sp>
@@ -788,8 +8286,34 @@
           <a:lstStyle/>
           <a:p>
             <a:r>
+              <a:rPr dirty="0"/>
               <a:t>So where does that leave us? Everything on the left is completed and presented today. For next week, we are running a placebo test to validate our event study results. The idea is simple: if our methodology is sound, then running the same event study on three ordinary, uneventful days with the same buffer conditions should produce CARs near zero. We picked June 15th 2021 and October 12th 2021 as low-buffer placebos — quiet periods before LUNA with no stablecoin stress. And July 15th 2025 as a high-buffer placebo — a stable period well after the SVB recovery. Our preliminary result already shows the placebo mean absolute CAR is just 0.55 percentage points, compared to 11.92 for the actual events. That is a 21.7 times difference. This directly answers the question of whether our large CARs could just be random market noise — they cannot. They only appear on real crisis days.</a:t>
             </a:r>
+            <a:endParaRPr lang="en-US" dirty="0"/>
+          </a:p>
+          <a:p>
+            <a:endParaRPr lang="en-US" dirty="0"/>
+          </a:p>
+          <a:p>
+            <a:r>
+              <a:rPr lang="en-US" dirty="0"/>
+              <a:t>Asides from this, for the remaining days, we plan to go through our data and methodology once again. This time in the eyes of the critiques and what are some other flags that may be raised during a review. After that, we plan to finish up our paper for this semester.  </a:t>
+            </a:r>
+          </a:p>
+          <a:p>
+            <a:endParaRPr lang="en-US" dirty="0"/>
+          </a:p>
+          <a:p>
+            <a:r>
+              <a:rPr lang="en-US" dirty="0"/>
+              <a:t>Thank you, that’s all that we prepared for this week’s presentation. </a:t>
+            </a:r>
+          </a:p>
+          <a:p>
+            <a:endParaRPr lang="en-US" dirty="0"/>
+          </a:p>
+          <a:p>
+            <a:endParaRPr lang="en-US" dirty="0"/>
           </a:p>
         </p:txBody>
       </p:sp>
@@ -8166,7 +15690,7 @@
           <a:p>
             <a:pPr algn="l"/>
             <a:r>
-              <a:rPr b="1">
+              <a:rPr b="1" dirty="0">
                 <a:solidFill>
                   <a:srgbClr val="1B3A72"/>
                 </a:solidFill>
@@ -8175,7 +15699,7 @@
               </a:rPr>
               <a:t>Step 1 — Build a Normal Model</a:t>
             </a:r>
-            <a:endParaRPr b="1" i="0">
+            <a:endParaRPr b="1" i="0" dirty="0">
               <a:solidFill>
                 <a:srgbClr val="1B3A72"/>
               </a:solidFill>
@@ -8243,7 +15767,7 @@
               </a:rPr>
             </a:br>
             <a:r>
-              <a:rPr b="1">
+              <a:rPr b="1" dirty="0">
                 <a:solidFill>
                   <a:srgbClr val="1B3A72"/>
                 </a:solidFill>
@@ -8252,7 +15776,7 @@
               </a:rPr>
               <a:t>Step 2 — Compute the Abnormal Spread</a:t>
             </a:r>
-            <a:endParaRPr b="1" i="0">
+            <a:endParaRPr b="1" i="0" dirty="0">
               <a:solidFill>
                 <a:srgbClr val="1B3A72"/>
               </a:solidFill>
@@ -8262,7 +15786,7 @@
           <a:p>
             <a:pPr algn="l"/>
             <a:r>
-              <a:rPr>
+              <a:rPr dirty="0">
                 <a:solidFill>
                   <a:srgbClr val="1A1A2E"/>
                 </a:solidFill>
@@ -8272,7 +15796,7 @@
               <a:t>For each day in the event window (5 days before to 20 days after the event):</a:t>
             </a:r>
             <a:br>
-              <a:rPr>
+              <a:rPr dirty="0">
                 <a:solidFill>
                   <a:srgbClr val="1A1A2E"/>
                 </a:solidFill>
@@ -8281,7 +15805,7 @@
               </a:rPr>
             </a:br>
             <a:r>
-              <a:rPr>
+              <a:rPr dirty="0">
                 <a:solidFill>
                   <a:srgbClr val="1A1A2E"/>
                 </a:solidFill>
@@ -8291,7 +15815,7 @@
               <a:t>Abnormal Spread = Actual Spread  −  Predicted Spread</a:t>
             </a:r>
             <a:br>
-              <a:rPr>
+              <a:rPr dirty="0">
                 <a:solidFill>
                   <a:srgbClr val="1A1A2E"/>
                 </a:solidFill>
@@ -8300,7 +15824,7 @@
               </a:rPr>
             </a:br>
             <a:r>
-              <a:rPr b="1">
+              <a:rPr b="1" dirty="0">
                 <a:solidFill>
                   <a:srgbClr val="1B3A72"/>
                 </a:solidFill>
@@ -8309,7 +15833,7 @@
               </a:rPr>
               <a:t>Step 3 — Cumulate into CAR</a:t>
             </a:r>
-            <a:endParaRPr b="1" i="0">
+            <a:endParaRPr b="1" i="0" dirty="0">
               <a:solidFill>
                 <a:srgbClr val="1B3A72"/>
               </a:solidFill>
@@ -8319,39 +15843,69 @@
           <a:p>
             <a:pPr algn="l"/>
             <a:r>
-              <a:rPr>
+              <a:rPr dirty="0">
                 <a:solidFill>
                   <a:srgbClr val="1A1A2E"/>
                 </a:solidFill>
                 <a:latin typeface="Calibri"/>
                 <a:sym typeface="+mn-ea"/>
               </a:rPr>
-              <a:t>CAR on day τ = sum of all abnormal spreads from day −5 to day τ</a:t>
-            </a:r>
-            <a:br>
-              <a:rPr>
+              <a:t>CAR on day </a:t>
+            </a:r>
+            <a:r>
+              <a:rPr dirty="0" err="1">
                 <a:solidFill>
                   <a:srgbClr val="1A1A2E"/>
                 </a:solidFill>
                 <a:latin typeface="Calibri"/>
                 <a:sym typeface="+mn-ea"/>
               </a:rPr>
-            </a:br>
-            <a:r>
-              <a:rPr lang="en-US" altLang="en-US">
+              <a:t>τ</a:t>
+            </a:r>
+            <a:r>
+              <a:rPr dirty="0">
                 <a:solidFill>
                   <a:srgbClr val="1A1A2E"/>
                 </a:solidFill>
                 <a:latin typeface="Calibri"/>
                 <a:sym typeface="+mn-ea"/>
               </a:rPr>
+              <a:t> = sum of all abnormal spreads from day −5 to day </a:t>
+            </a:r>
+            <a:r>
+              <a:rPr dirty="0" err="1">
+                <a:solidFill>
+                  <a:srgbClr val="1A1A2E"/>
+                </a:solidFill>
+                <a:latin typeface="Calibri"/>
+                <a:sym typeface="+mn-ea"/>
+              </a:rPr>
+              <a:t>τ</a:t>
+            </a:r>
+            <a:br>
+              <a:rPr dirty="0">
+                <a:solidFill>
+                  <a:srgbClr val="1A1A2E"/>
+                </a:solidFill>
+                <a:latin typeface="Calibri"/>
+                <a:sym typeface="+mn-ea"/>
+              </a:rPr>
+            </a:br>
+            <a:r>
+              <a:rPr lang="en-US" altLang="en-US" dirty="0">
+                <a:solidFill>
+                  <a:srgbClr val="1A1A2E"/>
+                </a:solidFill>
+                <a:latin typeface="Calibri"/>
+                <a:sym typeface="+mn-ea"/>
+              </a:rPr>
               <a:t>X-axis: trading days relative to event (day 0 = crisis date)</a:t>
             </a:r>
           </a:p>
           <a:p>
             <a:pPr algn="l"/>
             <a:r>
-              <a:rPr>
+              <a:rPr dirty="0">
                 <a:solidFill>
                   <a:srgbClr val="1A1A2E"/>
                 </a:solidFill>
@@ -9269,6 +16823,30 @@
               </a:rPr>
               <a:t>❖  Circle disclosed: $3.3 billion of USDC reserves were held at SVB — temporarily inaccessible</a:t>
             </a:r>
+            <a:r>
+              <a:rPr lang="en-US" sz="1200" b="0" i="0" dirty="0">
+                <a:solidFill>
+                  <a:srgbClr val="1A1A2E"/>
+                </a:solidFill>
+                <a:latin typeface="Calibri"/>
+              </a:rPr>
+              <a:t> *still had 6.4B at alternativ</a:t>
+            </a:r>
+            <a:r>
+              <a:rPr lang="en-US" sz="1200" dirty="0">
+                <a:solidFill>
+                  <a:srgbClr val="1A1A2E"/>
+                </a:solidFill>
+                <a:latin typeface="Calibri"/>
+              </a:rPr>
+              <a:t>e banks</a:t>
+            </a:r>
+            <a:endParaRPr sz="1200" b="0" i="0" dirty="0">
+              <a:solidFill>
+                <a:srgbClr val="1A1A2E"/>
+              </a:solidFill>
+              <a:latin typeface="Calibri"/>
+            </a:endParaRPr>
           </a:p>
           <a:p>
             <a:pPr algn="l">

--- a/presentations/0526_Stablecoin_Exorbitant_Privilege.pptx
+++ b/presentations/0526_Stablecoin_Exorbitant_Privilege.pptx
@@ -5,17 +5,17 @@
     <p:sldMasterId id="2147483648" r:id="rId1"/>
   </p:sldMasterIdLst>
   <p:notesMasterIdLst>
-    <p:notesMasterId r:id="rId10"/>
+    <p:notesMasterId r:id="rId4"/>
   </p:notesMasterIdLst>
   <p:sldIdLst>
-    <p:sldId id="266" r:id="rId2"/>
-    <p:sldId id="257" r:id="rId3"/>
-    <p:sldId id="258" r:id="rId4"/>
-    <p:sldId id="259" r:id="rId5"/>
-    <p:sldId id="260" r:id="rId6"/>
-    <p:sldId id="263" r:id="rId7"/>
-    <p:sldId id="268" r:id="rId8"/>
-    <p:sldId id="267" r:id="rId9"/>
+    <p:sldId id="266" r:id="rId3"/>
+    <p:sldId id="257" r:id="rId5"/>
+    <p:sldId id="258" r:id="rId6"/>
+    <p:sldId id="259" r:id="rId7"/>
+    <p:sldId id="260" r:id="rId8"/>
+    <p:sldId id="263" r:id="rId9"/>
+    <p:sldId id="268" r:id="rId10"/>
+    <p:sldId id="267" r:id="rId11"/>
   </p:sldIdLst>
   <p:sldSz cx="12188825" cy="6858000"/>
   <p:notesSz cx="6858000" cy="9144000"/>
@@ -301,6 +301,7 @@
               <a:rPr dirty="0"/>
               <a:t>Good afternoon everyone. Today we want to address some methodological questions from last session and walk clearly through our three stress events.</a:t>
             </a:r>
+            <a:endParaRPr dirty="0"/>
           </a:p>
         </p:txBody>
       </p:sp>
@@ -382,6 +383,7 @@
               <a:rPr dirty="0"/>
               <a:t>And we ran a buffer-conditioned event study across three stress episodes, which produced a 27 percentage point swing between the low and high buffer regimes. This deck specifically addresses the clarification questions from last time — why we use the OIS spread, what the buffer condition actually means, and how to read the CAR graphs. </a:t>
             </a:r>
+            <a:endParaRPr dirty="0"/>
           </a:p>
         </p:txBody>
       </p:sp>
@@ -477,6 +479,7 @@
               <a:rPr dirty="0"/>
               <a:t>The practical point is this: if we had used raw yields, a Fed rate cut and a Tether buying surge would look identical in our data. The spread cleanly separates them.</a:t>
             </a:r>
+            <a:endParaRPr dirty="0"/>
           </a:p>
         </p:txBody>
       </p:sp>
@@ -581,6 +584,7 @@
               <a:rPr dirty="0"/>
               <a:t> Treasury markets from one that disrupts them.</a:t>
             </a:r>
+            <a:endParaRPr dirty="0"/>
           </a:p>
         </p:txBody>
       </p:sp>
@@ -649,27 +653,194 @@
           <a:lstStyle/>
           <a:p>
             <a:r>
-              <a:rPr dirty="0"/>
-              <a:t>CAR stands for Cumulative Abnormal Return — but in our context it measures the cumulative abnormal spread, not a stock return. Let me explain what the y-axis actually means. Before each crisis, we estimate how the OIS-Treasury spread normally behaves using data from around six months prior. We build a model that says: given today's VIX level and global equity returns, what would we expect the spread to be? The abnormal spread on any given day is the actual spread minus that prediction. CAR is the running total of those daily abnormal spreads from five days before the event onward. A positive CAR means the spread has been persistently higher than expected — T-bill selling pressure. A negative CAR means it has been persistently lower than expected — flight-to-safety buying. A flat line at zero would mean the event had no effect on Treasury markets at all. Now, the second event shown here is the USDT partial </a:t>
-            </a:r>
-            <a:r>
-              <a:rPr dirty="0" err="1"/>
-              <a:t>depeg</a:t>
-            </a:r>
-            <a:r>
-              <a:rPr dirty="0"/>
-              <a:t> on May 12th, 2022 — three days after the LUNA collapse. </a:t>
-            </a:r>
-            <a:endParaRPr lang="en-US" dirty="0"/>
-          </a:p>
-          <a:p>
-            <a:endParaRPr lang="en-US" dirty="0"/>
-          </a:p>
-          <a:p>
-            <a:r>
-              <a:rPr dirty="0"/>
-              <a:t>This was a direct bank-run on Tether itself. USDT briefly fell to 95 cents. Unlike UST, which was algorithmic with no real reserves, Tether holds actual assets. The problem was that Tether's cash was only 5 to 8 percent of its reserves — the rest was T-bills. When over 7 billion dollars of USDT was redeemed in a single day, Tether had to sell T-bills to pay out, and the spread spiked. The CAR came in at plus 8.85 percentage points — essentially identical to the LUNA event. Same buffer, same constraint, same outcome — regardless of what triggered the run.</a:t>
-            </a:r>
+              <a:rPr lang="en-US" altLang="en-US" dirty="0"/>
+              <a:t>Full 2-Minute Script</a:t>
+            </a:r>
+            <a:endParaRPr lang="en-US" altLang="en-US" dirty="0"/>
+          </a:p>
+          <a:p>
+            <a:r>
+              <a:rPr lang="en-US" altLang="en-US" dirty="0"/>
+              <a:t>[Look at the audience. Do not touch the slide yet.]</a:t>
+            </a:r>
+            <a:endParaRPr lang="en-US" altLang="en-US" dirty="0"/>
+          </a:p>
+          <a:p>
+            <a:r>
+              <a:rPr lang="en-US" altLang="en-US" dirty="0"/>
+              <a:t>"Before I show you the results, I need to explain what you are looking at — because without understanding the model, the graphs are just lines."</a:t>
+            </a:r>
+            <a:endParaRPr lang="en-US" altLang="en-US" dirty="0"/>
+          </a:p>
+          <a:p>
+            <a:br>
+              <a:rPr lang="en-US" altLang="en-US" dirty="0"/>
+            </a:br>
+            <a:r>
+              <a:rPr lang="en-US" altLang="en-US" dirty="0"/>
+              <a:t>[Point to Step 1]</a:t>
+            </a:r>
+            <a:endParaRPr lang="en-US" altLang="en-US" dirty="0"/>
+          </a:p>
+          <a:p>
+            <a:r>
+              <a:rPr lang="en-US" altLang="en-US" dirty="0"/>
+              <a:t>"Before each crisis event, we take data from 120 to 6 trading days prior to the event — roughly six months of pre-crisis data — and we run a regression. We ask: given the VIX level and global equity returns on any given day, what would we expect the OIS-Treasury spread to be? This gives us our normal model. It tells us what the spread looks like when nothing unusual is happening."</a:t>
+            </a:r>
+            <a:endParaRPr lang="en-US" altLang="en-US" dirty="0"/>
+          </a:p>
+          <a:p>
+            <a:br>
+              <a:rPr lang="en-US" altLang="en-US" dirty="0"/>
+            </a:br>
+            <a:r>
+              <a:rPr lang="en-US" altLang="en-US" dirty="0"/>
+              <a:t>[Point to Step 2]</a:t>
+            </a:r>
+            <a:endParaRPr lang="en-US" altLang="en-US" dirty="0"/>
+          </a:p>
+          <a:p>
+            <a:r>
+              <a:rPr lang="en-US" altLang="en-US" dirty="0"/>
+              <a:t>"Then during the event window — five days before to twenty days after the crisis — for each trading day, we subtract the predicted spread from the actual spread. That difference is the abnormal spread. A positive abnormal spread means something beyond normal market conditions is pushing T-bill yields above the risk-free rate. A negative abnormal spread means something is compressing them below normal."</a:t>
+            </a:r>
+            <a:endParaRPr lang="en-US" altLang="en-US" dirty="0"/>
+          </a:p>
+          <a:p>
+            <a:r>
+              <a:rPr lang="en-US" altLang="en-US" dirty="0"/>
+              <a:t>Conceptually:</a:t>
+            </a:r>
+            <a:endParaRPr lang="en-US" altLang="en-US" dirty="0"/>
+          </a:p>
+          <a:p>
+            <a:endParaRPr lang="en-US" altLang="en-US" dirty="0"/>
+          </a:p>
+          <a:p>
+            <a:r>
+              <a:rPr lang="en-US" altLang="en-US" dirty="0"/>
+              <a:t>Actual Spread_t = 3M Treasury Yield_t - SOFR/OIS Rate_t</a:t>
+            </a:r>
+            <a:endParaRPr lang="en-US" altLang="en-US" dirty="0"/>
+          </a:p>
+          <a:p>
+            <a:endParaRPr lang="en-US" altLang="en-US" dirty="0"/>
+          </a:p>
+          <a:p>
+            <a:r>
+              <a:rPr lang="en-US" altLang="en-US" dirty="0"/>
+              <a:t>Predicted Spread: This is generated from your “normal model.”</a:t>
+            </a:r>
+            <a:endParaRPr lang="en-US" altLang="en-US" dirty="0"/>
+          </a:p>
+          <a:p>
+            <a:r>
+              <a:rPr lang="en-US" altLang="en-US" dirty="0"/>
+              <a:t>You estimate: Spread_t = f(VIX_t, delta ln N_t*)</a:t>
+            </a:r>
+            <a:endParaRPr lang="en-US" altLang="en-US" dirty="0"/>
+          </a:p>
+          <a:p>
+            <a:r>
+              <a:rPr lang="en-US" altLang="en-US" dirty="0"/>
+              <a:t>Meaning:</a:t>
+            </a:r>
+            <a:endParaRPr lang="en-US" altLang="en-US" dirty="0"/>
+          </a:p>
+          <a:p>
+            <a:r>
+              <a:rPr lang="en-US" altLang="en-US" dirty="0"/>
+              <a:t>“Under normal conditions, spreads move because of general market fear and global financial conditions.”</a:t>
+            </a:r>
+            <a:endParaRPr lang="en-US" altLang="en-US" dirty="0"/>
+          </a:p>
+          <a:p>
+            <a:endParaRPr lang="en-US" altLang="en-US" dirty="0"/>
+          </a:p>
+          <a:p>
+            <a:endParaRPr lang="en-US" altLang="en-US" dirty="0"/>
+          </a:p>
+          <a:p>
+            <a:r>
+              <a:rPr lang="en-US" altLang="en-US" dirty="0"/>
+              <a:t>[Point to Step 3]</a:t>
+            </a:r>
+            <a:endParaRPr lang="en-US" altLang="en-US" dirty="0"/>
+          </a:p>
+          <a:p>
+            <a:r>
+              <a:rPr lang="en-US" altLang="en-US" dirty="0"/>
+              <a:t>"We then add up all those daily abnormal values. That running total — from day minus five to day plus twenty — is the CAR. The Y-axis shows percentage points of accumulated deviation. The X-axis shows trading days. Day zero is the crisis date itself.</a:t>
+            </a:r>
+            <a:endParaRPr lang="en-US" altLang="en-US" dirty="0"/>
+          </a:p>
+          <a:p>
+            <a:endParaRPr lang="en-US" altLang="en-US" dirty="0"/>
+          </a:p>
+          <a:p>
+            <a:r>
+              <a:rPr lang="en-US" altLang="en-US" dirty="0"/>
+              <a:t>CAR_t = sum Abnormal Spread</a:t>
+            </a:r>
+            <a:endParaRPr lang="en-US" altLang="en-US" dirty="0"/>
+          </a:p>
+          <a:p>
+            <a:endParaRPr lang="en-US" altLang="en-US" dirty="0"/>
+          </a:p>
+          <a:p>
+            <a:r>
+              <a:rPr lang="en-US" altLang="en-US" dirty="0"/>
+              <a:t>[Click — LUNA graph appears on the right]</a:t>
+            </a:r>
+            <a:endParaRPr lang="en-US" altLang="en-US" dirty="0"/>
+          </a:p>
+          <a:p>
+            <a:r>
+              <a:rPr lang="en-US" altLang="en-US" dirty="0"/>
+              <a:t>"This is Event 1. Day zero is May 9th 2022 — the LUNA collapse. UST was an algorithmic stablecoin. It had no real dollar reserves. Its one-dollar peg was maintained by minting and burning LUNA tokens. When confidence broke, the mechanism failed instantly. Forty billion dollars wiped out in 72 hours."</a:t>
+            </a:r>
+            <a:endParaRPr lang="en-US" altLang="en-US" dirty="0"/>
+          </a:p>
+          <a:p>
+            <a:r>
+              <a:rPr lang="en-US" altLang="en-US" dirty="0"/>
+              <a:t>"The panic spread to Tether — a completely different issuer, fiat-backed with real reserves. But Tether had a critical vulnerability: its liquid cash buffer was only 5 to 8 percent of outstanding supply. When investors demanded their dollars back, Tether had no choice — it had to sell T-bills immediately to raise cash."</a:t>
+            </a:r>
+            <a:endParaRPr lang="en-US" altLang="en-US" dirty="0"/>
+          </a:p>
+          <a:p>
+            <a:r>
+              <a:rPr lang="en-US" altLang="en-US" dirty="0"/>
+              <a:t>"Look at the graph. The line starts near zero before the event and rises steadily. By day plus twenty, the CAR has accumulated to plus 8.9 percentage points. That means the OIS-Treasury spread accumulated 8.9 percentage points above what normal market conditions predicted — sustained, persistent T-bill selling pressure over twenty trading days. Exactly what our theory predicts for a low-buffer issuer."</a:t>
+            </a:r>
+            <a:br>
+              <a:rPr lang="en-US" altLang="en-US" dirty="0"/>
+            </a:br>
+            <a:br>
+              <a:rPr lang="en-US" altLang="en-US" dirty="0"/>
+            </a:br>
+            <a:r>
+              <a:rPr lang="en-US" altLang="en-US" dirty="0"/>
+              <a:t>"Three days later — Event 2 — USDT itself partially depegged to 95 cents. This time the run was directly on Tether, not on an algorithmic stablecoin. Different trigger, different mechanism — but the same buffer level of 5 to 8 percent, and the same result: CAR of plus 8.85 — nearly identical. The buffer determined the outcome. Not the nature of the shock."</a:t>
+            </a:r>
+            <a:endParaRPr lang="en-US" altLang="en-US" dirty="0"/>
+          </a:p>
+          <a:p>
+            <a:r>
+              <a:rPr lang="en-US" altLang="en-US" dirty="0"/>
+              <a:t>[Hand to Mimi]</a:t>
+            </a:r>
+            <a:endParaRPr lang="en-US" altLang="en-US" dirty="0"/>
+          </a:p>
+          <a:p>
+            <a:r>
+              <a:rPr lang="en-US" altLang="en-US" dirty="0"/>
+              <a:t>"Mimi will now show you what happens when the same type of stress hits a high-buffer issuer — and why the outcome is completely different."</a:t>
+            </a:r>
+            <a:endParaRPr lang="en-US" altLang="en-US" dirty="0"/>
+          </a:p>
+          <a:p>
+            <a:endParaRPr lang="en-US" altLang="en-US" dirty="0"/>
           </a:p>
         </p:txBody>
       </p:sp>
@@ -1701,370 +1872,6 @@
               </a:rPr>
               <a:t>.</a:t>
             </a:r>
-          </a:p>
-          <a:p>
-            <a:r>
-              <a:rPr lang="ko-KR" altLang="ko-KR" sz="1200" b="0" i="0" kern="1200" dirty="0" err="1">
-                <a:solidFill>
-                  <a:schemeClr val="tx1"/>
-                </a:solidFill>
-                <a:effectLst/>
-                <a:latin typeface="+mn-lt"/>
-                <a:ea typeface="+mn-ea"/>
-                <a:cs typeface="+mn-cs"/>
-              </a:rPr>
-              <a:t>You</a:t>
-            </a:r>
-            <a:r>
-              <a:rPr lang="ko-KR" altLang="ko-KR" sz="1200" b="0" i="0" kern="1200" dirty="0">
-                <a:solidFill>
-                  <a:schemeClr val="tx1"/>
-                </a:solidFill>
-                <a:effectLst/>
-                <a:latin typeface="+mn-lt"/>
-                <a:ea typeface="+mn-ea"/>
-                <a:cs typeface="+mn-cs"/>
-              </a:rPr>
-              <a:t> </a:t>
-            </a:r>
-            <a:r>
-              <a:rPr lang="ko-KR" altLang="ko-KR" sz="1200" b="0" i="0" kern="1200" dirty="0" err="1">
-                <a:solidFill>
-                  <a:schemeClr val="tx1"/>
-                </a:solidFill>
-                <a:effectLst/>
-                <a:latin typeface="+mn-lt"/>
-                <a:ea typeface="+mn-ea"/>
-                <a:cs typeface="+mn-cs"/>
-              </a:rPr>
-              <a:t>have</a:t>
-            </a:r>
-            <a:r>
-              <a:rPr lang="ko-KR" altLang="ko-KR" sz="1200" b="0" i="0" kern="1200" dirty="0">
-                <a:solidFill>
-                  <a:schemeClr val="tx1"/>
-                </a:solidFill>
-                <a:effectLst/>
-                <a:latin typeface="+mn-lt"/>
-                <a:ea typeface="+mn-ea"/>
-                <a:cs typeface="+mn-cs"/>
-              </a:rPr>
-              <a:t> </a:t>
-            </a:r>
-            <a:r>
-              <a:rPr lang="ko-KR" altLang="ko-KR" sz="1200" b="0" i="0" kern="1200" dirty="0" err="1">
-                <a:solidFill>
-                  <a:schemeClr val="tx1"/>
-                </a:solidFill>
-                <a:effectLst/>
-                <a:latin typeface="+mn-lt"/>
-                <a:ea typeface="+mn-ea"/>
-                <a:cs typeface="+mn-cs"/>
-              </a:rPr>
-              <a:t>two</a:t>
-            </a:r>
-            <a:r>
-              <a:rPr lang="ko-KR" altLang="ko-KR" sz="1200" b="0" i="0" kern="1200" dirty="0">
-                <a:solidFill>
-                  <a:schemeClr val="tx1"/>
-                </a:solidFill>
-                <a:effectLst/>
-                <a:latin typeface="+mn-lt"/>
-                <a:ea typeface="+mn-ea"/>
-                <a:cs typeface="+mn-cs"/>
-              </a:rPr>
-              <a:t> </a:t>
-            </a:r>
-            <a:r>
-              <a:rPr lang="ko-KR" altLang="ko-KR" sz="1200" b="0" i="0" kern="1200" dirty="0" err="1">
-                <a:solidFill>
-                  <a:schemeClr val="tx1"/>
-                </a:solidFill>
-                <a:effectLst/>
-                <a:latin typeface="+mn-lt"/>
-                <a:ea typeface="+mn-ea"/>
-                <a:cs typeface="+mn-cs"/>
-              </a:rPr>
-              <a:t>groups</a:t>
-            </a:r>
-            <a:r>
-              <a:rPr lang="ko-KR" altLang="ko-KR" sz="1200" b="0" i="0" kern="1200" dirty="0">
-                <a:solidFill>
-                  <a:schemeClr val="tx1"/>
-                </a:solidFill>
-                <a:effectLst/>
-                <a:latin typeface="+mn-lt"/>
-                <a:ea typeface="+mn-ea"/>
-                <a:cs typeface="+mn-cs"/>
-              </a:rPr>
-              <a:t> of </a:t>
-            </a:r>
-            <a:r>
-              <a:rPr lang="ko-KR" altLang="ko-KR" sz="1200" b="0" i="0" kern="1200" dirty="0" err="1">
-                <a:solidFill>
-                  <a:schemeClr val="tx1"/>
-                </a:solidFill>
-                <a:effectLst/>
-                <a:latin typeface="+mn-lt"/>
-                <a:ea typeface="+mn-ea"/>
-                <a:cs typeface="+mn-cs"/>
-              </a:rPr>
-              <a:t>events</a:t>
-            </a:r>
-            <a:r>
-              <a:rPr lang="ko-KR" altLang="ko-KR" sz="1200" b="0" i="0" kern="1200" dirty="0">
-                <a:solidFill>
-                  <a:schemeClr val="tx1"/>
-                </a:solidFill>
-                <a:effectLst/>
-                <a:latin typeface="+mn-lt"/>
-                <a:ea typeface="+mn-ea"/>
-                <a:cs typeface="+mn-cs"/>
-              </a:rPr>
-              <a:t>:</a:t>
-            </a:r>
-          </a:p>
-          <a:p>
-            <a:r>
-              <a:rPr lang="ko-KR" altLang="ko-KR" sz="1200" b="1" i="0" kern="1200" dirty="0" err="1">
-                <a:solidFill>
-                  <a:schemeClr val="tx1"/>
-                </a:solidFill>
-                <a:effectLst/>
-                <a:latin typeface="+mn-lt"/>
-                <a:ea typeface="+mn-ea"/>
-                <a:cs typeface="+mn-cs"/>
-              </a:rPr>
-              <a:t>Low</a:t>
-            </a:r>
-            <a:r>
-              <a:rPr lang="ko-KR" altLang="ko-KR" sz="1200" b="1" i="0" kern="1200" dirty="0">
-                <a:solidFill>
-                  <a:schemeClr val="tx1"/>
-                </a:solidFill>
-                <a:effectLst/>
-                <a:latin typeface="+mn-lt"/>
-                <a:ea typeface="+mn-ea"/>
-                <a:cs typeface="+mn-cs"/>
-              </a:rPr>
-              <a:t> </a:t>
-            </a:r>
-            <a:r>
-              <a:rPr lang="ko-KR" altLang="ko-KR" sz="1200" b="1" i="0" kern="1200" dirty="0" err="1">
-                <a:solidFill>
-                  <a:schemeClr val="tx1"/>
-                </a:solidFill>
-                <a:effectLst/>
-                <a:latin typeface="+mn-lt"/>
-                <a:ea typeface="+mn-ea"/>
-                <a:cs typeface="+mn-cs"/>
-              </a:rPr>
-              <a:t>buffer</a:t>
-            </a:r>
-            <a:r>
-              <a:rPr lang="ko-KR" altLang="ko-KR" sz="1200" b="1" i="0" kern="1200" dirty="0">
-                <a:solidFill>
-                  <a:schemeClr val="tx1"/>
-                </a:solidFill>
-                <a:effectLst/>
-                <a:latin typeface="+mn-lt"/>
-                <a:ea typeface="+mn-ea"/>
-                <a:cs typeface="+mn-cs"/>
-              </a:rPr>
-              <a:t> </a:t>
-            </a:r>
-            <a:r>
-              <a:rPr lang="ko-KR" altLang="ko-KR" sz="1200" b="1" i="0" kern="1200" dirty="0" err="1">
-                <a:solidFill>
-                  <a:schemeClr val="tx1"/>
-                </a:solidFill>
-                <a:effectLst/>
-                <a:latin typeface="+mn-lt"/>
-                <a:ea typeface="+mn-ea"/>
-                <a:cs typeface="+mn-cs"/>
-              </a:rPr>
-              <a:t>events</a:t>
-            </a:r>
-            <a:r>
-              <a:rPr lang="ko-KR" altLang="ko-KR" sz="1200" b="0" i="0" kern="1200" dirty="0">
-                <a:solidFill>
-                  <a:schemeClr val="tx1"/>
-                </a:solidFill>
-                <a:effectLst/>
-                <a:latin typeface="+mn-lt"/>
-                <a:ea typeface="+mn-ea"/>
-                <a:cs typeface="+mn-cs"/>
-              </a:rPr>
-              <a:t> (LUNA + USDT): </a:t>
-            </a:r>
-            <a:r>
-              <a:rPr lang="ko-KR" altLang="ko-KR" sz="1200" b="0" i="0" kern="1200" dirty="0" err="1">
-                <a:solidFill>
-                  <a:schemeClr val="tx1"/>
-                </a:solidFill>
-                <a:effectLst/>
-                <a:latin typeface="+mn-lt"/>
-                <a:ea typeface="+mn-ea"/>
-                <a:cs typeface="+mn-cs"/>
-              </a:rPr>
-              <a:t>spread</a:t>
-            </a:r>
-            <a:r>
-              <a:rPr lang="ko-KR" altLang="ko-KR" sz="1200" b="0" i="0" kern="1200" dirty="0">
-                <a:solidFill>
-                  <a:schemeClr val="tx1"/>
-                </a:solidFill>
-                <a:effectLst/>
-                <a:latin typeface="+mn-lt"/>
-                <a:ea typeface="+mn-ea"/>
-                <a:cs typeface="+mn-cs"/>
-              </a:rPr>
-              <a:t> </a:t>
-            </a:r>
-            <a:r>
-              <a:rPr lang="ko-KR" altLang="ko-KR" sz="1200" b="0" i="0" kern="1200" dirty="0" err="1">
-                <a:solidFill>
-                  <a:schemeClr val="tx1"/>
-                </a:solidFill>
-                <a:effectLst/>
-                <a:latin typeface="+mn-lt"/>
-                <a:ea typeface="+mn-ea"/>
-                <a:cs typeface="+mn-cs"/>
-              </a:rPr>
-              <a:t>went</a:t>
-            </a:r>
-            <a:r>
-              <a:rPr lang="ko-KR" altLang="ko-KR" sz="1200" b="0" i="0" kern="1200" dirty="0">
-                <a:solidFill>
-                  <a:schemeClr val="tx1"/>
-                </a:solidFill>
-                <a:effectLst/>
-                <a:latin typeface="+mn-lt"/>
-                <a:ea typeface="+mn-ea"/>
-                <a:cs typeface="+mn-cs"/>
-              </a:rPr>
-              <a:t> </a:t>
-            </a:r>
-            <a:r>
-              <a:rPr lang="ko-KR" altLang="ko-KR" sz="1200" b="1" i="0" kern="1200" dirty="0">
-                <a:solidFill>
-                  <a:schemeClr val="tx1"/>
-                </a:solidFill>
-                <a:effectLst/>
-                <a:latin typeface="+mn-lt"/>
-                <a:ea typeface="+mn-ea"/>
-                <a:cs typeface="+mn-cs"/>
-              </a:rPr>
-              <a:t>+8.9 </a:t>
-            </a:r>
-            <a:r>
-              <a:rPr lang="ko-KR" altLang="ko-KR" sz="1200" b="1" i="0" kern="1200" dirty="0" err="1">
-                <a:solidFill>
-                  <a:schemeClr val="tx1"/>
-                </a:solidFill>
-                <a:effectLst/>
-                <a:latin typeface="+mn-lt"/>
-                <a:ea typeface="+mn-ea"/>
-                <a:cs typeface="+mn-cs"/>
-              </a:rPr>
-              <a:t>pp</a:t>
-            </a:r>
-            <a:r>
-              <a:rPr lang="ko-KR" altLang="ko-KR" sz="1200" b="0" i="0" kern="1200" dirty="0">
-                <a:solidFill>
-                  <a:schemeClr val="tx1"/>
-                </a:solidFill>
-                <a:effectLst/>
-                <a:latin typeface="+mn-lt"/>
-                <a:ea typeface="+mn-ea"/>
-                <a:cs typeface="+mn-cs"/>
-              </a:rPr>
-              <a:t> </a:t>
-            </a:r>
-            <a:r>
-              <a:rPr lang="ko-KR" altLang="ko-KR" sz="1200" b="0" i="0" kern="1200" dirty="0" err="1">
-                <a:solidFill>
-                  <a:schemeClr val="tx1"/>
-                </a:solidFill>
-                <a:effectLst/>
-                <a:latin typeface="+mn-lt"/>
-                <a:ea typeface="+mn-ea"/>
-                <a:cs typeface="+mn-cs"/>
-              </a:rPr>
-              <a:t>above</a:t>
-            </a:r>
-            <a:r>
-              <a:rPr lang="ko-KR" altLang="ko-KR" sz="1200" b="0" i="0" kern="1200" dirty="0">
-                <a:solidFill>
-                  <a:schemeClr val="tx1"/>
-                </a:solidFill>
-                <a:effectLst/>
-                <a:latin typeface="+mn-lt"/>
-                <a:ea typeface="+mn-ea"/>
-                <a:cs typeface="+mn-cs"/>
-              </a:rPr>
-              <a:t> </a:t>
-            </a:r>
-            <a:r>
-              <a:rPr lang="ko-KR" altLang="ko-KR" sz="1200" b="0" i="0" kern="1200" dirty="0" err="1">
-                <a:solidFill>
-                  <a:schemeClr val="tx1"/>
-                </a:solidFill>
-                <a:effectLst/>
-                <a:latin typeface="+mn-lt"/>
-                <a:ea typeface="+mn-ea"/>
-                <a:cs typeface="+mn-cs"/>
-              </a:rPr>
-              <a:t>normal</a:t>
-            </a:r>
-            <a:r>
-              <a:rPr lang="ko-KR" altLang="ko-KR" sz="1200" b="0" i="0" kern="1200" dirty="0">
-                <a:solidFill>
-                  <a:schemeClr val="tx1"/>
-                </a:solidFill>
-                <a:effectLst/>
-                <a:latin typeface="+mn-lt"/>
-                <a:ea typeface="+mn-ea"/>
-                <a:cs typeface="+mn-cs"/>
-              </a:rPr>
-              <a:t> </a:t>
-            </a:r>
-            <a:r>
-              <a:rPr lang="ko-KR" altLang="ko-KR" sz="1200" b="0" i="0" kern="1200" dirty="0" err="1">
-                <a:solidFill>
-                  <a:schemeClr val="tx1"/>
-                </a:solidFill>
-                <a:effectLst/>
-                <a:latin typeface="+mn-lt"/>
-                <a:ea typeface="+mn-ea"/>
-                <a:cs typeface="+mn-cs"/>
-              </a:rPr>
-              <a:t>on</a:t>
-            </a:r>
-            <a:r>
-              <a:rPr lang="ko-KR" altLang="ko-KR" sz="1200" b="0" i="0" kern="1200" dirty="0">
-                <a:solidFill>
-                  <a:schemeClr val="tx1"/>
-                </a:solidFill>
-                <a:effectLst/>
-                <a:latin typeface="+mn-lt"/>
-                <a:ea typeface="+mn-ea"/>
-                <a:cs typeface="+mn-cs"/>
-              </a:rPr>
-              <a:t> </a:t>
-            </a:r>
-            <a:r>
-              <a:rPr lang="ko-KR" altLang="ko-KR" sz="1200" b="0" i="0" kern="1200" dirty="0" err="1">
-                <a:solidFill>
-                  <a:schemeClr val="tx1"/>
-                </a:solidFill>
-                <a:effectLst/>
-                <a:latin typeface="+mn-lt"/>
-                <a:ea typeface="+mn-ea"/>
-                <a:cs typeface="+mn-cs"/>
-              </a:rPr>
-              <a:t>average</a:t>
-            </a:r>
             <a:endParaRPr lang="ko-KR" altLang="ko-KR" sz="1200" b="0" i="0" kern="1200" dirty="0">
               <a:solidFill>
                 <a:schemeClr val="tx1"/>
@@ -2077,78 +1884,6 @@
           </a:p>
           <a:p>
             <a:r>
-              <a:rPr lang="ko-KR" altLang="ko-KR" sz="1200" b="1" i="0" kern="1200" dirty="0" err="1">
-                <a:solidFill>
-                  <a:schemeClr val="tx1"/>
-                </a:solidFill>
-                <a:effectLst/>
-                <a:latin typeface="+mn-lt"/>
-                <a:ea typeface="+mn-ea"/>
-                <a:cs typeface="+mn-cs"/>
-              </a:rPr>
-              <a:t>High</a:t>
-            </a:r>
-            <a:r>
-              <a:rPr lang="ko-KR" altLang="ko-KR" sz="1200" b="1" i="0" kern="1200" dirty="0">
-                <a:solidFill>
-                  <a:schemeClr val="tx1"/>
-                </a:solidFill>
-                <a:effectLst/>
-                <a:latin typeface="+mn-lt"/>
-                <a:ea typeface="+mn-ea"/>
-                <a:cs typeface="+mn-cs"/>
-              </a:rPr>
-              <a:t> </a:t>
-            </a:r>
-            <a:r>
-              <a:rPr lang="ko-KR" altLang="ko-KR" sz="1200" b="1" i="0" kern="1200" dirty="0" err="1">
-                <a:solidFill>
-                  <a:schemeClr val="tx1"/>
-                </a:solidFill>
-                <a:effectLst/>
-                <a:latin typeface="+mn-lt"/>
-                <a:ea typeface="+mn-ea"/>
-                <a:cs typeface="+mn-cs"/>
-              </a:rPr>
-              <a:t>buffer</a:t>
-            </a:r>
-            <a:r>
-              <a:rPr lang="ko-KR" altLang="ko-KR" sz="1200" b="1" i="0" kern="1200" dirty="0">
-                <a:solidFill>
-                  <a:schemeClr val="tx1"/>
-                </a:solidFill>
-                <a:effectLst/>
-                <a:latin typeface="+mn-lt"/>
-                <a:ea typeface="+mn-ea"/>
-                <a:cs typeface="+mn-cs"/>
-              </a:rPr>
-              <a:t> </a:t>
-            </a:r>
-            <a:r>
-              <a:rPr lang="ko-KR" altLang="ko-KR" sz="1200" b="1" i="0" kern="1200" dirty="0" err="1">
-                <a:solidFill>
-                  <a:schemeClr val="tx1"/>
-                </a:solidFill>
-                <a:effectLst/>
-                <a:latin typeface="+mn-lt"/>
-                <a:ea typeface="+mn-ea"/>
-                <a:cs typeface="+mn-cs"/>
-              </a:rPr>
-              <a:t>event</a:t>
-            </a:r>
-            <a:r>
-              <a:rPr lang="ko-KR" altLang="ko-KR" sz="1200" b="0" i="0" kern="1200" dirty="0">
-                <a:solidFill>
-                  <a:schemeClr val="tx1"/>
-                </a:solidFill>
-                <a:effectLst/>
-                <a:latin typeface="+mn-lt"/>
-                <a:ea typeface="+mn-ea"/>
-                <a:cs typeface="+mn-cs"/>
-              </a:rPr>
-              <a:t> (SVB): </a:t>
-            </a:r>
-            <a:r>
               <a:rPr lang="ko-KR" altLang="ko-KR" sz="1200" b="0" i="0" kern="1200" dirty="0" err="1">
                 <a:solidFill>
                   <a:schemeClr val="tx1"/>
@@ -2158,7 +1893,7 @@
                 <a:ea typeface="+mn-ea"/>
                 <a:cs typeface="+mn-cs"/>
               </a:rPr>
-              <a:t>spread</a:t>
+              <a:t>You</a:t>
             </a:r>
             <a:r>
               <a:rPr lang="ko-KR" altLang="ko-KR" sz="1200" b="0" i="0" kern="1200" dirty="0">
@@ -2182,55 +1917,19 @@
                 <a:ea typeface="+mn-ea"/>
                 <a:cs typeface="+mn-cs"/>
               </a:rPr>
-              <a:t>went</a:t>
-            </a:r>
-            <a:r>
-              <a:rPr lang="ko-KR" altLang="ko-KR" sz="1200" b="0" i="0" kern="1200" dirty="0">
-                <a:solidFill>
-                  <a:schemeClr val="tx1"/>
-                </a:solidFill>
-                <a:effectLst/>
-                <a:latin typeface="+mn-lt"/>
-                <a:ea typeface="+mn-ea"/>
-                <a:cs typeface="+mn-cs"/>
-              </a:rPr>
-              <a:t> </a:t>
-            </a:r>
-            <a:r>
-              <a:rPr lang="ko-KR" altLang="ko-KR" sz="1200" b="1" i="0" kern="1200" dirty="0">
-                <a:solidFill>
-                  <a:schemeClr val="tx1"/>
-                </a:solidFill>
-                <a:effectLst/>
-                <a:latin typeface="+mn-lt"/>
-                <a:ea typeface="+mn-ea"/>
-                <a:cs typeface="+mn-cs"/>
-              </a:rPr>
-              <a:t>−18.0 </a:t>
-            </a:r>
-            <a:r>
-              <a:rPr lang="ko-KR" altLang="ko-KR" sz="1200" b="1" i="0" kern="1200" dirty="0" err="1">
-                <a:solidFill>
-                  <a:schemeClr val="tx1"/>
-                </a:solidFill>
-                <a:effectLst/>
-                <a:latin typeface="+mn-lt"/>
-                <a:ea typeface="+mn-ea"/>
-                <a:cs typeface="+mn-cs"/>
-              </a:rPr>
-              <a:t>pp</a:t>
-            </a:r>
-            <a:r>
-              <a:rPr lang="ko-KR" altLang="ko-KR" sz="1200" b="0" i="0" kern="1200" dirty="0">
-                <a:solidFill>
-                  <a:schemeClr val="tx1"/>
-                </a:solidFill>
-                <a:effectLst/>
-                <a:latin typeface="+mn-lt"/>
-                <a:ea typeface="+mn-ea"/>
-                <a:cs typeface="+mn-cs"/>
-              </a:rPr>
-              <a:t> </a:t>
+              <a:t>have</a:t>
+            </a:r>
+            <a:r>
+              <a:rPr lang="ko-KR" altLang="ko-KR" sz="1200" b="0" i="0" kern="1200" dirty="0">
+                <a:solidFill>
+                  <a:schemeClr val="tx1"/>
+                </a:solidFill>
+                <a:effectLst/>
+                <a:latin typeface="+mn-lt"/>
+                <a:ea typeface="+mn-ea"/>
+                <a:cs typeface="+mn-cs"/>
+              </a:rPr>
+              <a:t> </a:t>
             </a:r>
             <a:r>
               <a:rPr lang="ko-KR" altLang="ko-KR" sz="1200" b="0" i="0" kern="1200" dirty="0" err="1">
@@ -2242,7 +1941,7 @@
                 <a:ea typeface="+mn-ea"/>
                 <a:cs typeface="+mn-cs"/>
               </a:rPr>
-              <a:t>below</a:t>
+              <a:t>two</a:t>
             </a:r>
             <a:r>
               <a:rPr lang="ko-KR" altLang="ko-KR" sz="1200" b="0" i="0" kern="1200" dirty="0">
@@ -2266,7 +1965,43 @@
                 <a:ea typeface="+mn-ea"/>
                 <a:cs typeface="+mn-cs"/>
               </a:rPr>
-              <a:t>normal</a:t>
+              <a:t>groups</a:t>
+            </a:r>
+            <a:r>
+              <a:rPr lang="ko-KR" altLang="ko-KR" sz="1200" b="0" i="0" kern="1200" dirty="0">
+                <a:solidFill>
+                  <a:schemeClr val="tx1"/>
+                </a:solidFill>
+                <a:effectLst/>
+                <a:latin typeface="+mn-lt"/>
+                <a:ea typeface="+mn-ea"/>
+                <a:cs typeface="+mn-cs"/>
+              </a:rPr>
+              <a:t> of </a:t>
+            </a:r>
+            <a:r>
+              <a:rPr lang="ko-KR" altLang="ko-KR" sz="1200" b="0" i="0" kern="1200" dirty="0" err="1">
+                <a:solidFill>
+                  <a:schemeClr val="tx1"/>
+                </a:solidFill>
+                <a:effectLst/>
+                <a:latin typeface="+mn-lt"/>
+                <a:ea typeface="+mn-ea"/>
+                <a:cs typeface="+mn-cs"/>
+              </a:rPr>
+              <a:t>events</a:t>
+            </a:r>
+            <a:r>
+              <a:rPr lang="ko-KR" altLang="ko-KR" sz="1200" b="0" i="0" kern="1200" dirty="0">
+                <a:solidFill>
+                  <a:schemeClr val="tx1"/>
+                </a:solidFill>
+                <a:effectLst/>
+                <a:latin typeface="+mn-lt"/>
+                <a:ea typeface="+mn-ea"/>
+                <a:cs typeface="+mn-cs"/>
+              </a:rPr>
+              <a:t>:</a:t>
             </a:r>
             <a:endParaRPr lang="ko-KR" altLang="ko-KR" sz="1200" b="0" i="0" kern="1200" dirty="0">
               <a:solidFill>
@@ -2280,16 +2015,76 @@
           </a:p>
           <a:p>
             <a:r>
-              <a:rPr lang="ko-KR" altLang="ko-KR" sz="1200" b="0" i="0" kern="1200" dirty="0">
-                <a:solidFill>
-                  <a:schemeClr val="tx1"/>
-                </a:solidFill>
-                <a:effectLst/>
-                <a:latin typeface="+mn-lt"/>
-                <a:ea typeface="+mn-ea"/>
-                <a:cs typeface="+mn-cs"/>
-              </a:rPr>
-              <a:t>The </a:t>
+              <a:rPr lang="ko-KR" altLang="ko-KR" sz="1200" b="1" i="0" kern="1200" dirty="0" err="1">
+                <a:solidFill>
+                  <a:schemeClr val="tx1"/>
+                </a:solidFill>
+                <a:effectLst/>
+                <a:latin typeface="+mn-lt"/>
+                <a:ea typeface="+mn-ea"/>
+                <a:cs typeface="+mn-cs"/>
+              </a:rPr>
+              <a:t>Low</a:t>
+            </a:r>
+            <a:r>
+              <a:rPr lang="ko-KR" altLang="ko-KR" sz="1200" b="1" i="0" kern="1200" dirty="0">
+                <a:solidFill>
+                  <a:schemeClr val="tx1"/>
+                </a:solidFill>
+                <a:effectLst/>
+                <a:latin typeface="+mn-lt"/>
+                <a:ea typeface="+mn-ea"/>
+                <a:cs typeface="+mn-cs"/>
+              </a:rPr>
+              <a:t> </a:t>
+            </a:r>
+            <a:r>
+              <a:rPr lang="ko-KR" altLang="ko-KR" sz="1200" b="1" i="0" kern="1200" dirty="0" err="1">
+                <a:solidFill>
+                  <a:schemeClr val="tx1"/>
+                </a:solidFill>
+                <a:effectLst/>
+                <a:latin typeface="+mn-lt"/>
+                <a:ea typeface="+mn-ea"/>
+                <a:cs typeface="+mn-cs"/>
+              </a:rPr>
+              <a:t>buffer</a:t>
+            </a:r>
+            <a:r>
+              <a:rPr lang="ko-KR" altLang="ko-KR" sz="1200" b="1" i="0" kern="1200" dirty="0">
+                <a:solidFill>
+                  <a:schemeClr val="tx1"/>
+                </a:solidFill>
+                <a:effectLst/>
+                <a:latin typeface="+mn-lt"/>
+                <a:ea typeface="+mn-ea"/>
+                <a:cs typeface="+mn-cs"/>
+              </a:rPr>
+              <a:t> </a:t>
+            </a:r>
+            <a:r>
+              <a:rPr lang="ko-KR" altLang="ko-KR" sz="1200" b="1" i="0" kern="1200" dirty="0" err="1">
+                <a:solidFill>
+                  <a:schemeClr val="tx1"/>
+                </a:solidFill>
+                <a:effectLst/>
+                <a:latin typeface="+mn-lt"/>
+                <a:ea typeface="+mn-ea"/>
+                <a:cs typeface="+mn-cs"/>
+              </a:rPr>
+              <a:t>events</a:t>
+            </a:r>
+            <a:r>
+              <a:rPr lang="ko-KR" altLang="ko-KR" sz="1200" b="0" i="0" kern="1200" dirty="0">
+                <a:solidFill>
+                  <a:schemeClr val="tx1"/>
+                </a:solidFill>
+                <a:effectLst/>
+                <a:latin typeface="+mn-lt"/>
+                <a:ea typeface="+mn-ea"/>
+                <a:cs typeface="+mn-cs"/>
+              </a:rPr>
+              <a:t> (LUNA + USDT): </a:t>
             </a:r>
             <a:r>
               <a:rPr lang="ko-KR" altLang="ko-KR" sz="1200" b="0" i="0" kern="1200" dirty="0" err="1">
@@ -2301,7 +2096,7 @@
                 <a:ea typeface="+mn-ea"/>
                 <a:cs typeface="+mn-cs"/>
               </a:rPr>
-              <a:t>swing</a:t>
+              <a:t>spread</a:t>
             </a:r>
             <a:r>
               <a:rPr lang="ko-KR" altLang="ko-KR" sz="1200" b="0" i="0" kern="1200" dirty="0">
@@ -2325,19 +2120,55 @@
                 <a:ea typeface="+mn-ea"/>
                 <a:cs typeface="+mn-cs"/>
               </a:rPr>
-              <a:t>is</a:t>
-            </a:r>
-            <a:r>
-              <a:rPr lang="ko-KR" altLang="ko-KR" sz="1200" b="0" i="0" kern="1200" dirty="0">
-                <a:solidFill>
-                  <a:schemeClr val="tx1"/>
-                </a:solidFill>
-                <a:effectLst/>
-                <a:latin typeface="+mn-lt"/>
-                <a:ea typeface="+mn-ea"/>
-                <a:cs typeface="+mn-cs"/>
-              </a:rPr>
-              <a:t> </a:t>
+              <a:t>went</a:t>
+            </a:r>
+            <a:r>
+              <a:rPr lang="ko-KR" altLang="ko-KR" sz="1200" b="0" i="0" kern="1200" dirty="0">
+                <a:solidFill>
+                  <a:schemeClr val="tx1"/>
+                </a:solidFill>
+                <a:effectLst/>
+                <a:latin typeface="+mn-lt"/>
+                <a:ea typeface="+mn-ea"/>
+                <a:cs typeface="+mn-cs"/>
+              </a:rPr>
+              <a:t> </a:t>
+            </a:r>
+            <a:r>
+              <a:rPr lang="ko-KR" altLang="ko-KR" sz="1200" b="1" i="0" kern="1200" dirty="0">
+                <a:solidFill>
+                  <a:schemeClr val="tx1"/>
+                </a:solidFill>
+                <a:effectLst/>
+                <a:latin typeface="+mn-lt"/>
+                <a:ea typeface="+mn-ea"/>
+                <a:cs typeface="+mn-cs"/>
+              </a:rPr>
+              <a:t>+8.9 </a:t>
+            </a:r>
+            <a:r>
+              <a:rPr lang="ko-KR" altLang="ko-KR" sz="1200" b="1" i="0" kern="1200" dirty="0" err="1">
+                <a:solidFill>
+                  <a:schemeClr val="tx1"/>
+                </a:solidFill>
+                <a:effectLst/>
+                <a:latin typeface="+mn-lt"/>
+                <a:ea typeface="+mn-ea"/>
+                <a:cs typeface="+mn-cs"/>
+              </a:rPr>
+              <a:t>pp</a:t>
+            </a:r>
+            <a:r>
+              <a:rPr lang="ko-KR" altLang="ko-KR" sz="1200" b="0" i="0" kern="1200" dirty="0">
+                <a:solidFill>
+                  <a:schemeClr val="tx1"/>
+                </a:solidFill>
+                <a:effectLst/>
+                <a:latin typeface="+mn-lt"/>
+                <a:ea typeface="+mn-ea"/>
+                <a:cs typeface="+mn-cs"/>
+              </a:rPr>
+              <a:t> </a:t>
             </a:r>
             <a:r>
               <a:rPr lang="ko-KR" altLang="ko-KR" sz="1200" b="0" i="0" kern="1200" dirty="0" err="1">
@@ -2349,7 +2180,7 @@
                 <a:ea typeface="+mn-ea"/>
                 <a:cs typeface="+mn-cs"/>
               </a:rPr>
-              <a:t>the</a:t>
+              <a:t>above</a:t>
             </a:r>
             <a:r>
               <a:rPr lang="ko-KR" altLang="ko-KR" sz="1200" b="0" i="0" kern="1200" dirty="0">
@@ -2373,7 +2204,7 @@
                 <a:ea typeface="+mn-ea"/>
                 <a:cs typeface="+mn-cs"/>
               </a:rPr>
-              <a:t>gap</a:t>
+              <a:t>normal</a:t>
             </a:r>
             <a:r>
               <a:rPr lang="ko-KR" altLang="ko-KR" sz="1200" b="0" i="0" kern="1200" dirty="0">
@@ -2397,7 +2228,7 @@
                 <a:ea typeface="+mn-ea"/>
                 <a:cs typeface="+mn-cs"/>
               </a:rPr>
-              <a:t>between</a:t>
+              <a:t>on</a:t>
             </a:r>
             <a:r>
               <a:rPr lang="ko-KR" altLang="ko-KR" sz="1200" b="0" i="0" kern="1200" dirty="0">
@@ -2421,57 +2252,7 @@
                 <a:ea typeface="+mn-ea"/>
                 <a:cs typeface="+mn-cs"/>
               </a:rPr>
-              <a:t>them</a:t>
-            </a:r>
-            <a:r>
-              <a:rPr lang="ko-KR" altLang="ko-KR" sz="1200" b="0" i="0" kern="1200" dirty="0">
-                <a:solidFill>
-                  <a:schemeClr val="tx1"/>
-                </a:solidFill>
-                <a:effectLst/>
-                <a:latin typeface="+mn-lt"/>
-                <a:ea typeface="+mn-ea"/>
-                <a:cs typeface="+mn-cs"/>
-              </a:rPr>
-              <a:t>:</a:t>
-            </a:r>
-          </a:p>
-          <a:p>
-            <a:r>
-              <a:rPr lang="ko-KR" altLang="ko-KR" sz="1200" b="0" i="0" kern="1200" dirty="0">
-                <a:solidFill>
-                  <a:schemeClr val="tx1"/>
-                </a:solidFill>
-                <a:effectLst/>
-                <a:latin typeface="+mn-lt"/>
-                <a:ea typeface="+mn-ea"/>
-                <a:cs typeface="+mn-cs"/>
-              </a:rPr>
-              <a:t>8.9 − (−18.0) = </a:t>
-            </a:r>
-            <a:r>
-              <a:rPr lang="ko-KR" altLang="ko-KR" sz="1200" b="1" i="0" kern="1200" dirty="0">
-                <a:solidFill>
-                  <a:schemeClr val="tx1"/>
-                </a:solidFill>
-                <a:effectLst/>
-                <a:latin typeface="+mn-lt"/>
-                <a:ea typeface="+mn-ea"/>
-                <a:cs typeface="+mn-cs"/>
-              </a:rPr>
-              <a:t>26.9 </a:t>
-            </a:r>
-            <a:r>
-              <a:rPr lang="ko-KR" altLang="ko-KR" sz="1200" b="1" i="0" kern="1200" dirty="0" err="1">
-                <a:solidFill>
-                  <a:schemeClr val="tx1"/>
-                </a:solidFill>
-                <a:effectLst/>
-                <a:latin typeface="+mn-lt"/>
-                <a:ea typeface="+mn-ea"/>
-                <a:cs typeface="+mn-cs"/>
-              </a:rPr>
-              <a:t>pp</a:t>
+              <a:t>average</a:t>
             </a:r>
             <a:endParaRPr lang="ko-KR" altLang="ko-KR" sz="1200" b="0" i="0" kern="1200" dirty="0">
               <a:solidFill>
@@ -2485,6 +2266,78 @@
           </a:p>
           <a:p>
             <a:r>
+              <a:rPr lang="ko-KR" altLang="ko-KR" sz="1200" b="1" i="0" kern="1200" dirty="0" err="1">
+                <a:solidFill>
+                  <a:schemeClr val="tx1"/>
+                </a:solidFill>
+                <a:effectLst/>
+                <a:latin typeface="+mn-lt"/>
+                <a:ea typeface="+mn-ea"/>
+                <a:cs typeface="+mn-cs"/>
+              </a:rPr>
+              <a:t>High</a:t>
+            </a:r>
+            <a:r>
+              <a:rPr lang="ko-KR" altLang="ko-KR" sz="1200" b="1" i="0" kern="1200" dirty="0">
+                <a:solidFill>
+                  <a:schemeClr val="tx1"/>
+                </a:solidFill>
+                <a:effectLst/>
+                <a:latin typeface="+mn-lt"/>
+                <a:ea typeface="+mn-ea"/>
+                <a:cs typeface="+mn-cs"/>
+              </a:rPr>
+              <a:t> </a:t>
+            </a:r>
+            <a:r>
+              <a:rPr lang="ko-KR" altLang="ko-KR" sz="1200" b="1" i="0" kern="1200" dirty="0" err="1">
+                <a:solidFill>
+                  <a:schemeClr val="tx1"/>
+                </a:solidFill>
+                <a:effectLst/>
+                <a:latin typeface="+mn-lt"/>
+                <a:ea typeface="+mn-ea"/>
+                <a:cs typeface="+mn-cs"/>
+              </a:rPr>
+              <a:t>buffer</a:t>
+            </a:r>
+            <a:r>
+              <a:rPr lang="ko-KR" altLang="ko-KR" sz="1200" b="1" i="0" kern="1200" dirty="0">
+                <a:solidFill>
+                  <a:schemeClr val="tx1"/>
+                </a:solidFill>
+                <a:effectLst/>
+                <a:latin typeface="+mn-lt"/>
+                <a:ea typeface="+mn-ea"/>
+                <a:cs typeface="+mn-cs"/>
+              </a:rPr>
+              <a:t> </a:t>
+            </a:r>
+            <a:r>
+              <a:rPr lang="ko-KR" altLang="ko-KR" sz="1200" b="1" i="0" kern="1200" dirty="0" err="1">
+                <a:solidFill>
+                  <a:schemeClr val="tx1"/>
+                </a:solidFill>
+                <a:effectLst/>
+                <a:latin typeface="+mn-lt"/>
+                <a:ea typeface="+mn-ea"/>
+                <a:cs typeface="+mn-cs"/>
+              </a:rPr>
+              <a:t>event</a:t>
+            </a:r>
+            <a:r>
+              <a:rPr lang="ko-KR" altLang="ko-KR" sz="1200" b="0" i="0" kern="1200" dirty="0">
+                <a:solidFill>
+                  <a:schemeClr val="tx1"/>
+                </a:solidFill>
+                <a:effectLst/>
+                <a:latin typeface="+mn-lt"/>
+                <a:ea typeface="+mn-ea"/>
+                <a:cs typeface="+mn-cs"/>
+              </a:rPr>
+              <a:t> (SVB): </a:t>
+            </a:r>
+            <a:r>
               <a:rPr lang="ko-KR" altLang="ko-KR" sz="1200" b="0" i="0" kern="1200" dirty="0" err="1">
                 <a:solidFill>
                   <a:schemeClr val="tx1"/>
@@ -2494,6 +2347,351 @@
                 <a:ea typeface="+mn-ea"/>
                 <a:cs typeface="+mn-cs"/>
               </a:rPr>
+              <a:t>spread</a:t>
+            </a:r>
+            <a:r>
+              <a:rPr lang="ko-KR" altLang="ko-KR" sz="1200" b="0" i="0" kern="1200" dirty="0">
+                <a:solidFill>
+                  <a:schemeClr val="tx1"/>
+                </a:solidFill>
+                <a:effectLst/>
+                <a:latin typeface="+mn-lt"/>
+                <a:ea typeface="+mn-ea"/>
+                <a:cs typeface="+mn-cs"/>
+              </a:rPr>
+              <a:t> </a:t>
+            </a:r>
+            <a:r>
+              <a:rPr lang="ko-KR" altLang="ko-KR" sz="1200" b="0" i="0" kern="1200" dirty="0" err="1">
+                <a:solidFill>
+                  <a:schemeClr val="tx1"/>
+                </a:solidFill>
+                <a:effectLst/>
+                <a:latin typeface="+mn-lt"/>
+                <a:ea typeface="+mn-ea"/>
+                <a:cs typeface="+mn-cs"/>
+              </a:rPr>
+              <a:t>went</a:t>
+            </a:r>
+            <a:r>
+              <a:rPr lang="ko-KR" altLang="ko-KR" sz="1200" b="0" i="0" kern="1200" dirty="0">
+                <a:solidFill>
+                  <a:schemeClr val="tx1"/>
+                </a:solidFill>
+                <a:effectLst/>
+                <a:latin typeface="+mn-lt"/>
+                <a:ea typeface="+mn-ea"/>
+                <a:cs typeface="+mn-cs"/>
+              </a:rPr>
+              <a:t> </a:t>
+            </a:r>
+            <a:r>
+              <a:rPr lang="ko-KR" altLang="ko-KR" sz="1200" b="1" i="0" kern="1200" dirty="0">
+                <a:solidFill>
+                  <a:schemeClr val="tx1"/>
+                </a:solidFill>
+                <a:effectLst/>
+                <a:latin typeface="+mn-lt"/>
+                <a:ea typeface="+mn-ea"/>
+                <a:cs typeface="+mn-cs"/>
+              </a:rPr>
+              <a:t>−18.0 </a:t>
+            </a:r>
+            <a:r>
+              <a:rPr lang="ko-KR" altLang="ko-KR" sz="1200" b="1" i="0" kern="1200" dirty="0" err="1">
+                <a:solidFill>
+                  <a:schemeClr val="tx1"/>
+                </a:solidFill>
+                <a:effectLst/>
+                <a:latin typeface="+mn-lt"/>
+                <a:ea typeface="+mn-ea"/>
+                <a:cs typeface="+mn-cs"/>
+              </a:rPr>
+              <a:t>pp</a:t>
+            </a:r>
+            <a:r>
+              <a:rPr lang="ko-KR" altLang="ko-KR" sz="1200" b="0" i="0" kern="1200" dirty="0">
+                <a:solidFill>
+                  <a:schemeClr val="tx1"/>
+                </a:solidFill>
+                <a:effectLst/>
+                <a:latin typeface="+mn-lt"/>
+                <a:ea typeface="+mn-ea"/>
+                <a:cs typeface="+mn-cs"/>
+              </a:rPr>
+              <a:t> </a:t>
+            </a:r>
+            <a:r>
+              <a:rPr lang="ko-KR" altLang="ko-KR" sz="1200" b="0" i="0" kern="1200" dirty="0" err="1">
+                <a:solidFill>
+                  <a:schemeClr val="tx1"/>
+                </a:solidFill>
+                <a:effectLst/>
+                <a:latin typeface="+mn-lt"/>
+                <a:ea typeface="+mn-ea"/>
+                <a:cs typeface="+mn-cs"/>
+              </a:rPr>
+              <a:t>below</a:t>
+            </a:r>
+            <a:r>
+              <a:rPr lang="ko-KR" altLang="ko-KR" sz="1200" b="0" i="0" kern="1200" dirty="0">
+                <a:solidFill>
+                  <a:schemeClr val="tx1"/>
+                </a:solidFill>
+                <a:effectLst/>
+                <a:latin typeface="+mn-lt"/>
+                <a:ea typeface="+mn-ea"/>
+                <a:cs typeface="+mn-cs"/>
+              </a:rPr>
+              <a:t> </a:t>
+            </a:r>
+            <a:r>
+              <a:rPr lang="ko-KR" altLang="ko-KR" sz="1200" b="0" i="0" kern="1200" dirty="0" err="1">
+                <a:solidFill>
+                  <a:schemeClr val="tx1"/>
+                </a:solidFill>
+                <a:effectLst/>
+                <a:latin typeface="+mn-lt"/>
+                <a:ea typeface="+mn-ea"/>
+                <a:cs typeface="+mn-cs"/>
+              </a:rPr>
+              <a:t>normal</a:t>
+            </a:r>
+            <a:endParaRPr lang="ko-KR" altLang="ko-KR" sz="1200" b="0" i="0" kern="1200" dirty="0">
+              <a:solidFill>
+                <a:schemeClr val="tx1"/>
+              </a:solidFill>
+              <a:effectLst/>
+              <a:latin typeface="+mn-lt"/>
+              <a:ea typeface="+mn-ea"/>
+              <a:cs typeface="+mn-cs"/>
+            </a:endParaRPr>
+          </a:p>
+          <a:p>
+            <a:r>
+              <a:rPr lang="ko-KR" altLang="ko-KR" sz="1200" b="0" i="0" kern="1200" dirty="0">
+                <a:solidFill>
+                  <a:schemeClr val="tx1"/>
+                </a:solidFill>
+                <a:effectLst/>
+                <a:latin typeface="+mn-lt"/>
+                <a:ea typeface="+mn-ea"/>
+                <a:cs typeface="+mn-cs"/>
+              </a:rPr>
+              <a:t>The </a:t>
+            </a:r>
+            <a:r>
+              <a:rPr lang="ko-KR" altLang="ko-KR" sz="1200" b="0" i="0" kern="1200" dirty="0" err="1">
+                <a:solidFill>
+                  <a:schemeClr val="tx1"/>
+                </a:solidFill>
+                <a:effectLst/>
+                <a:latin typeface="+mn-lt"/>
+                <a:ea typeface="+mn-ea"/>
+                <a:cs typeface="+mn-cs"/>
+              </a:rPr>
+              <a:t>swing</a:t>
+            </a:r>
+            <a:r>
+              <a:rPr lang="ko-KR" altLang="ko-KR" sz="1200" b="0" i="0" kern="1200" dirty="0">
+                <a:solidFill>
+                  <a:schemeClr val="tx1"/>
+                </a:solidFill>
+                <a:effectLst/>
+                <a:latin typeface="+mn-lt"/>
+                <a:ea typeface="+mn-ea"/>
+                <a:cs typeface="+mn-cs"/>
+              </a:rPr>
+              <a:t> </a:t>
+            </a:r>
+            <a:r>
+              <a:rPr lang="ko-KR" altLang="ko-KR" sz="1200" b="0" i="0" kern="1200" dirty="0" err="1">
+                <a:solidFill>
+                  <a:schemeClr val="tx1"/>
+                </a:solidFill>
+                <a:effectLst/>
+                <a:latin typeface="+mn-lt"/>
+                <a:ea typeface="+mn-ea"/>
+                <a:cs typeface="+mn-cs"/>
+              </a:rPr>
+              <a:t>is</a:t>
+            </a:r>
+            <a:r>
+              <a:rPr lang="ko-KR" altLang="ko-KR" sz="1200" b="0" i="0" kern="1200" dirty="0">
+                <a:solidFill>
+                  <a:schemeClr val="tx1"/>
+                </a:solidFill>
+                <a:effectLst/>
+                <a:latin typeface="+mn-lt"/>
+                <a:ea typeface="+mn-ea"/>
+                <a:cs typeface="+mn-cs"/>
+              </a:rPr>
+              <a:t> </a:t>
+            </a:r>
+            <a:r>
+              <a:rPr lang="ko-KR" altLang="ko-KR" sz="1200" b="0" i="0" kern="1200" dirty="0" err="1">
+                <a:solidFill>
+                  <a:schemeClr val="tx1"/>
+                </a:solidFill>
+                <a:effectLst/>
+                <a:latin typeface="+mn-lt"/>
+                <a:ea typeface="+mn-ea"/>
+                <a:cs typeface="+mn-cs"/>
+              </a:rPr>
+              <a:t>the</a:t>
+            </a:r>
+            <a:r>
+              <a:rPr lang="ko-KR" altLang="ko-KR" sz="1200" b="0" i="0" kern="1200" dirty="0">
+                <a:solidFill>
+                  <a:schemeClr val="tx1"/>
+                </a:solidFill>
+                <a:effectLst/>
+                <a:latin typeface="+mn-lt"/>
+                <a:ea typeface="+mn-ea"/>
+                <a:cs typeface="+mn-cs"/>
+              </a:rPr>
+              <a:t> </a:t>
+            </a:r>
+            <a:r>
+              <a:rPr lang="ko-KR" altLang="ko-KR" sz="1200" b="0" i="0" kern="1200" dirty="0" err="1">
+                <a:solidFill>
+                  <a:schemeClr val="tx1"/>
+                </a:solidFill>
+                <a:effectLst/>
+                <a:latin typeface="+mn-lt"/>
+                <a:ea typeface="+mn-ea"/>
+                <a:cs typeface="+mn-cs"/>
+              </a:rPr>
+              <a:t>gap</a:t>
+            </a:r>
+            <a:r>
+              <a:rPr lang="ko-KR" altLang="ko-KR" sz="1200" b="0" i="0" kern="1200" dirty="0">
+                <a:solidFill>
+                  <a:schemeClr val="tx1"/>
+                </a:solidFill>
+                <a:effectLst/>
+                <a:latin typeface="+mn-lt"/>
+                <a:ea typeface="+mn-ea"/>
+                <a:cs typeface="+mn-cs"/>
+              </a:rPr>
+              <a:t> </a:t>
+            </a:r>
+            <a:r>
+              <a:rPr lang="ko-KR" altLang="ko-KR" sz="1200" b="0" i="0" kern="1200" dirty="0" err="1">
+                <a:solidFill>
+                  <a:schemeClr val="tx1"/>
+                </a:solidFill>
+                <a:effectLst/>
+                <a:latin typeface="+mn-lt"/>
+                <a:ea typeface="+mn-ea"/>
+                <a:cs typeface="+mn-cs"/>
+              </a:rPr>
+              <a:t>between</a:t>
+            </a:r>
+            <a:r>
+              <a:rPr lang="ko-KR" altLang="ko-KR" sz="1200" b="0" i="0" kern="1200" dirty="0">
+                <a:solidFill>
+                  <a:schemeClr val="tx1"/>
+                </a:solidFill>
+                <a:effectLst/>
+                <a:latin typeface="+mn-lt"/>
+                <a:ea typeface="+mn-ea"/>
+                <a:cs typeface="+mn-cs"/>
+              </a:rPr>
+              <a:t> </a:t>
+            </a:r>
+            <a:r>
+              <a:rPr lang="ko-KR" altLang="ko-KR" sz="1200" b="0" i="0" kern="1200" dirty="0" err="1">
+                <a:solidFill>
+                  <a:schemeClr val="tx1"/>
+                </a:solidFill>
+                <a:effectLst/>
+                <a:latin typeface="+mn-lt"/>
+                <a:ea typeface="+mn-ea"/>
+                <a:cs typeface="+mn-cs"/>
+              </a:rPr>
+              <a:t>them</a:t>
+            </a:r>
+            <a:r>
+              <a:rPr lang="ko-KR" altLang="ko-KR" sz="1200" b="0" i="0" kern="1200" dirty="0">
+                <a:solidFill>
+                  <a:schemeClr val="tx1"/>
+                </a:solidFill>
+                <a:effectLst/>
+                <a:latin typeface="+mn-lt"/>
+                <a:ea typeface="+mn-ea"/>
+                <a:cs typeface="+mn-cs"/>
+              </a:rPr>
+              <a:t>:</a:t>
+            </a:r>
+            <a:endParaRPr lang="ko-KR" altLang="ko-KR" sz="1200" b="0" i="0" kern="1200" dirty="0">
+              <a:solidFill>
+                <a:schemeClr val="tx1"/>
+              </a:solidFill>
+              <a:effectLst/>
+              <a:latin typeface="+mn-lt"/>
+              <a:ea typeface="+mn-ea"/>
+              <a:cs typeface="+mn-cs"/>
+            </a:endParaRPr>
+          </a:p>
+          <a:p>
+            <a:r>
+              <a:rPr lang="ko-KR" altLang="ko-KR" sz="1200" b="0" i="0" kern="1200" dirty="0">
+                <a:solidFill>
+                  <a:schemeClr val="tx1"/>
+                </a:solidFill>
+                <a:effectLst/>
+                <a:latin typeface="+mn-lt"/>
+                <a:ea typeface="+mn-ea"/>
+                <a:cs typeface="+mn-cs"/>
+              </a:rPr>
+              <a:t>8.9 − (−18.0) = </a:t>
+            </a:r>
+            <a:r>
+              <a:rPr lang="ko-KR" altLang="ko-KR" sz="1200" b="1" i="0" kern="1200" dirty="0">
+                <a:solidFill>
+                  <a:schemeClr val="tx1"/>
+                </a:solidFill>
+                <a:effectLst/>
+                <a:latin typeface="+mn-lt"/>
+                <a:ea typeface="+mn-ea"/>
+                <a:cs typeface="+mn-cs"/>
+              </a:rPr>
+              <a:t>26.9 </a:t>
+            </a:r>
+            <a:r>
+              <a:rPr lang="ko-KR" altLang="ko-KR" sz="1200" b="1" i="0" kern="1200" dirty="0" err="1">
+                <a:solidFill>
+                  <a:schemeClr val="tx1"/>
+                </a:solidFill>
+                <a:effectLst/>
+                <a:latin typeface="+mn-lt"/>
+                <a:ea typeface="+mn-ea"/>
+                <a:cs typeface="+mn-cs"/>
+              </a:rPr>
+              <a:t>pp</a:t>
+            </a:r>
+            <a:endParaRPr lang="ko-KR" altLang="ko-KR" sz="1200" b="0" i="0" kern="1200" dirty="0">
+              <a:solidFill>
+                <a:schemeClr val="tx1"/>
+              </a:solidFill>
+              <a:effectLst/>
+              <a:latin typeface="+mn-lt"/>
+              <a:ea typeface="+mn-ea"/>
+              <a:cs typeface="+mn-cs"/>
+            </a:endParaRPr>
+          </a:p>
+          <a:p>
+            <a:r>
+              <a:rPr lang="ko-KR" altLang="ko-KR" sz="1200" b="0" i="0" kern="1200" dirty="0" err="1">
+                <a:solidFill>
+                  <a:schemeClr val="tx1"/>
+                </a:solidFill>
+                <a:effectLst/>
+                <a:latin typeface="+mn-lt"/>
+                <a:ea typeface="+mn-ea"/>
+                <a:cs typeface="+mn-cs"/>
+              </a:rPr>
               <a:t>It</a:t>
             </a:r>
             <a:r>
@@ -3492,6 +3690,15 @@
               </a:rPr>
               <a:t>.</a:t>
             </a:r>
+            <a:endParaRPr lang="ko-KR" altLang="ko-KR" sz="1200" b="0" i="0" kern="1200" dirty="0">
+              <a:solidFill>
+                <a:schemeClr val="tx1"/>
+              </a:solidFill>
+              <a:effectLst/>
+              <a:latin typeface="+mn-lt"/>
+              <a:ea typeface="+mn-ea"/>
+              <a:cs typeface="+mn-cs"/>
+            </a:endParaRPr>
           </a:p>
           <a:p>
             <a:br>
@@ -4386,6 +4593,15 @@
               </a:rPr>
               <a:t>:</a:t>
             </a:r>
+            <a:endParaRPr lang="ko-KR" altLang="ko-KR" sz="1200" b="0" i="0" kern="1200" dirty="0">
+              <a:solidFill>
+                <a:schemeClr val="tx1"/>
+              </a:solidFill>
+              <a:effectLst/>
+              <a:latin typeface="+mn-lt"/>
+              <a:ea typeface="+mn-ea"/>
+              <a:cs typeface="+mn-cs"/>
+            </a:endParaRPr>
           </a:p>
           <a:p>
             <a:r>
@@ -4604,6 +4820,15 @@
               </a:rPr>
               <a:t>?</a:t>
             </a:r>
+            <a:endParaRPr lang="ko-KR" altLang="ko-KR" sz="1200" b="0" i="0" kern="1200" dirty="0">
+              <a:solidFill>
+                <a:schemeClr val="tx1"/>
+              </a:solidFill>
+              <a:effectLst/>
+              <a:latin typeface="+mn-lt"/>
+              <a:ea typeface="+mn-ea"/>
+              <a:cs typeface="+mn-cs"/>
+            </a:endParaRPr>
           </a:p>
           <a:p>
             <a:r>
@@ -5326,6 +5551,15 @@
               </a:rPr>
               <a:t>.</a:t>
             </a:r>
+            <a:endParaRPr lang="ko-KR" altLang="ko-KR" sz="1200" b="0" i="0" kern="1200" dirty="0">
+              <a:solidFill>
+                <a:schemeClr val="tx1"/>
+              </a:solidFill>
+              <a:effectLst/>
+              <a:latin typeface="+mn-lt"/>
+              <a:ea typeface="+mn-ea"/>
+              <a:cs typeface="+mn-cs"/>
+            </a:endParaRPr>
           </a:p>
           <a:p>
             <a:r>
@@ -5892,6 +6126,15 @@
               </a:rPr>
               <a:t> 0.1%.</a:t>
             </a:r>
+            <a:endParaRPr lang="ko-KR" altLang="ko-KR" sz="1200" b="0" i="0" kern="1200" dirty="0">
+              <a:solidFill>
+                <a:schemeClr val="tx1"/>
+              </a:solidFill>
+              <a:effectLst/>
+              <a:latin typeface="+mn-lt"/>
+              <a:ea typeface="+mn-ea"/>
+              <a:cs typeface="+mn-cs"/>
+            </a:endParaRPr>
           </a:p>
           <a:p>
             <a:br>
@@ -7146,212 +7389,6 @@
               </a:rPr>
               <a:t>.</a:t>
             </a:r>
-          </a:p>
-          <a:p>
-            <a:r>
-              <a:rPr lang="ko-KR" altLang="ko-KR" sz="1200" b="0" i="1" kern="1200" dirty="0">
-                <a:solidFill>
-                  <a:schemeClr val="tx1"/>
-                </a:solidFill>
-                <a:effectLst/>
-                <a:latin typeface="+mn-lt"/>
-                <a:ea typeface="+mn-ea"/>
-                <a:cs typeface="+mn-cs"/>
-              </a:rPr>
-              <a:t>"</a:t>
-            </a:r>
-            <a:r>
-              <a:rPr lang="ko-KR" altLang="ko-KR" sz="1200" b="0" i="1" kern="1200" dirty="0" err="1">
-                <a:solidFill>
-                  <a:schemeClr val="tx1"/>
-                </a:solidFill>
-                <a:effectLst/>
-                <a:latin typeface="+mn-lt"/>
-                <a:ea typeface="+mn-ea"/>
-                <a:cs typeface="+mn-cs"/>
-              </a:rPr>
-              <a:t>You</a:t>
-            </a:r>
-            <a:r>
-              <a:rPr lang="ko-KR" altLang="ko-KR" sz="1200" b="0" i="1" kern="1200" dirty="0">
-                <a:solidFill>
-                  <a:schemeClr val="tx1"/>
-                </a:solidFill>
-                <a:effectLst/>
-                <a:latin typeface="+mn-lt"/>
-                <a:ea typeface="+mn-ea"/>
-                <a:cs typeface="+mn-cs"/>
-              </a:rPr>
-              <a:t> </a:t>
-            </a:r>
-            <a:r>
-              <a:rPr lang="ko-KR" altLang="ko-KR" sz="1200" b="0" i="1" kern="1200" dirty="0" err="1">
-                <a:solidFill>
-                  <a:schemeClr val="tx1"/>
-                </a:solidFill>
-                <a:effectLst/>
-                <a:latin typeface="+mn-lt"/>
-                <a:ea typeface="+mn-ea"/>
-                <a:cs typeface="+mn-cs"/>
-              </a:rPr>
-              <a:t>only</a:t>
-            </a:r>
-            <a:r>
-              <a:rPr lang="ko-KR" altLang="ko-KR" sz="1200" b="0" i="1" kern="1200" dirty="0">
-                <a:solidFill>
-                  <a:schemeClr val="tx1"/>
-                </a:solidFill>
-                <a:effectLst/>
-                <a:latin typeface="+mn-lt"/>
-                <a:ea typeface="+mn-ea"/>
-                <a:cs typeface="+mn-cs"/>
-              </a:rPr>
-              <a:t> </a:t>
-            </a:r>
-            <a:r>
-              <a:rPr lang="ko-KR" altLang="ko-KR" sz="1200" b="0" i="1" kern="1200" dirty="0" err="1">
-                <a:solidFill>
-                  <a:schemeClr val="tx1"/>
-                </a:solidFill>
-                <a:effectLst/>
-                <a:latin typeface="+mn-lt"/>
-                <a:ea typeface="+mn-ea"/>
-                <a:cs typeface="+mn-cs"/>
-              </a:rPr>
-              <a:t>have</a:t>
-            </a:r>
-            <a:r>
-              <a:rPr lang="ko-KR" altLang="ko-KR" sz="1200" b="0" i="1" kern="1200" dirty="0">
-                <a:solidFill>
-                  <a:schemeClr val="tx1"/>
-                </a:solidFill>
-                <a:effectLst/>
-                <a:latin typeface="+mn-lt"/>
-                <a:ea typeface="+mn-ea"/>
-                <a:cs typeface="+mn-cs"/>
-              </a:rPr>
-              <a:t> 3 </a:t>
-            </a:r>
-            <a:r>
-              <a:rPr lang="ko-KR" altLang="ko-KR" sz="1200" b="0" i="1" kern="1200" dirty="0" err="1">
-                <a:solidFill>
-                  <a:schemeClr val="tx1"/>
-                </a:solidFill>
-                <a:effectLst/>
-                <a:latin typeface="+mn-lt"/>
-                <a:ea typeface="+mn-ea"/>
-                <a:cs typeface="+mn-cs"/>
-              </a:rPr>
-              <a:t>events</a:t>
-            </a:r>
-            <a:r>
-              <a:rPr lang="ko-KR" altLang="ko-KR" sz="1200" b="0" i="1" kern="1200" dirty="0">
-                <a:solidFill>
-                  <a:schemeClr val="tx1"/>
-                </a:solidFill>
-                <a:effectLst/>
-                <a:latin typeface="+mn-lt"/>
-                <a:ea typeface="+mn-ea"/>
-                <a:cs typeface="+mn-cs"/>
-              </a:rPr>
-              <a:t> — </a:t>
-            </a:r>
-            <a:r>
-              <a:rPr lang="ko-KR" altLang="ko-KR" sz="1200" b="0" i="1" kern="1200" dirty="0" err="1">
-                <a:solidFill>
-                  <a:schemeClr val="tx1"/>
-                </a:solidFill>
-                <a:effectLst/>
-                <a:latin typeface="+mn-lt"/>
-                <a:ea typeface="+mn-ea"/>
-                <a:cs typeface="+mn-cs"/>
-              </a:rPr>
-              <a:t>is</a:t>
-            </a:r>
-            <a:r>
-              <a:rPr lang="ko-KR" altLang="ko-KR" sz="1200" b="0" i="1" kern="1200" dirty="0">
-                <a:solidFill>
-                  <a:schemeClr val="tx1"/>
-                </a:solidFill>
-                <a:effectLst/>
-                <a:latin typeface="+mn-lt"/>
-                <a:ea typeface="+mn-ea"/>
-                <a:cs typeface="+mn-cs"/>
-              </a:rPr>
-              <a:t> </a:t>
-            </a:r>
-            <a:r>
-              <a:rPr lang="ko-KR" altLang="ko-KR" sz="1200" b="0" i="1" kern="1200" dirty="0" err="1">
-                <a:solidFill>
-                  <a:schemeClr val="tx1"/>
-                </a:solidFill>
-                <a:effectLst/>
-                <a:latin typeface="+mn-lt"/>
-                <a:ea typeface="+mn-ea"/>
-                <a:cs typeface="+mn-cs"/>
-              </a:rPr>
-              <a:t>this</a:t>
-            </a:r>
-            <a:r>
-              <a:rPr lang="ko-KR" altLang="ko-KR" sz="1200" b="0" i="1" kern="1200" dirty="0">
-                <a:solidFill>
-                  <a:schemeClr val="tx1"/>
-                </a:solidFill>
-                <a:effectLst/>
-                <a:latin typeface="+mn-lt"/>
-                <a:ea typeface="+mn-ea"/>
-                <a:cs typeface="+mn-cs"/>
-              </a:rPr>
-              <a:t> </a:t>
-            </a:r>
-            <a:r>
-              <a:rPr lang="ko-KR" altLang="ko-KR" sz="1200" b="0" i="1" kern="1200" dirty="0" err="1">
-                <a:solidFill>
-                  <a:schemeClr val="tx1"/>
-                </a:solidFill>
-                <a:effectLst/>
-                <a:latin typeface="+mn-lt"/>
-                <a:ea typeface="+mn-ea"/>
-                <a:cs typeface="+mn-cs"/>
-              </a:rPr>
-              <a:t>test</a:t>
-            </a:r>
-            <a:r>
-              <a:rPr lang="ko-KR" altLang="ko-KR" sz="1200" b="0" i="1" kern="1200" dirty="0">
-                <a:solidFill>
-                  <a:schemeClr val="tx1"/>
-                </a:solidFill>
-                <a:effectLst/>
-                <a:latin typeface="+mn-lt"/>
-                <a:ea typeface="+mn-ea"/>
-                <a:cs typeface="+mn-cs"/>
-              </a:rPr>
-              <a:t> </a:t>
-            </a:r>
-            <a:r>
-              <a:rPr lang="ko-KR" altLang="ko-KR" sz="1200" b="0" i="1" kern="1200" dirty="0" err="1">
-                <a:solidFill>
-                  <a:schemeClr val="tx1"/>
-                </a:solidFill>
-                <a:effectLst/>
-                <a:latin typeface="+mn-lt"/>
-                <a:ea typeface="+mn-ea"/>
-                <a:cs typeface="+mn-cs"/>
-              </a:rPr>
-              <a:t>meaningful</a:t>
-            </a:r>
-            <a:r>
-              <a:rPr lang="ko-KR" altLang="ko-KR" sz="1200" b="0" i="1" kern="1200" dirty="0">
-                <a:solidFill>
-                  <a:schemeClr val="tx1"/>
-                </a:solidFill>
-                <a:effectLst/>
-                <a:latin typeface="+mn-lt"/>
-                <a:ea typeface="+mn-ea"/>
-                <a:cs typeface="+mn-cs"/>
-              </a:rPr>
-              <a:t>?"</a:t>
-            </a:r>
             <a:endParaRPr lang="ko-KR" altLang="ko-KR" sz="1200" b="0" i="0" kern="1200" dirty="0">
               <a:solidFill>
                 <a:schemeClr val="tx1"/>
@@ -7364,6 +7401,221 @@
           </a:p>
           <a:p>
             <a:r>
+              <a:rPr lang="ko-KR" altLang="ko-KR" sz="1200" b="0" i="1" kern="1200" dirty="0">
+                <a:solidFill>
+                  <a:schemeClr val="tx1"/>
+                </a:solidFill>
+                <a:effectLst/>
+                <a:latin typeface="+mn-lt"/>
+                <a:ea typeface="+mn-ea"/>
+                <a:cs typeface="+mn-cs"/>
+              </a:rPr>
+              <a:t>"</a:t>
+            </a:r>
+            <a:r>
+              <a:rPr lang="ko-KR" altLang="ko-KR" sz="1200" b="0" i="1" kern="1200" dirty="0" err="1">
+                <a:solidFill>
+                  <a:schemeClr val="tx1"/>
+                </a:solidFill>
+                <a:effectLst/>
+                <a:latin typeface="+mn-lt"/>
+                <a:ea typeface="+mn-ea"/>
+                <a:cs typeface="+mn-cs"/>
+              </a:rPr>
+              <a:t>You</a:t>
+            </a:r>
+            <a:r>
+              <a:rPr lang="ko-KR" altLang="ko-KR" sz="1200" b="0" i="1" kern="1200" dirty="0">
+                <a:solidFill>
+                  <a:schemeClr val="tx1"/>
+                </a:solidFill>
+                <a:effectLst/>
+                <a:latin typeface="+mn-lt"/>
+                <a:ea typeface="+mn-ea"/>
+                <a:cs typeface="+mn-cs"/>
+              </a:rPr>
+              <a:t> </a:t>
+            </a:r>
+            <a:r>
+              <a:rPr lang="ko-KR" altLang="ko-KR" sz="1200" b="0" i="1" kern="1200" dirty="0" err="1">
+                <a:solidFill>
+                  <a:schemeClr val="tx1"/>
+                </a:solidFill>
+                <a:effectLst/>
+                <a:latin typeface="+mn-lt"/>
+                <a:ea typeface="+mn-ea"/>
+                <a:cs typeface="+mn-cs"/>
+              </a:rPr>
+              <a:t>only</a:t>
+            </a:r>
+            <a:r>
+              <a:rPr lang="ko-KR" altLang="ko-KR" sz="1200" b="0" i="1" kern="1200" dirty="0">
+                <a:solidFill>
+                  <a:schemeClr val="tx1"/>
+                </a:solidFill>
+                <a:effectLst/>
+                <a:latin typeface="+mn-lt"/>
+                <a:ea typeface="+mn-ea"/>
+                <a:cs typeface="+mn-cs"/>
+              </a:rPr>
+              <a:t> </a:t>
+            </a:r>
+            <a:r>
+              <a:rPr lang="ko-KR" altLang="ko-KR" sz="1200" b="0" i="1" kern="1200" dirty="0" err="1">
+                <a:solidFill>
+                  <a:schemeClr val="tx1"/>
+                </a:solidFill>
+                <a:effectLst/>
+                <a:latin typeface="+mn-lt"/>
+                <a:ea typeface="+mn-ea"/>
+                <a:cs typeface="+mn-cs"/>
+              </a:rPr>
+              <a:t>have</a:t>
+            </a:r>
+            <a:r>
+              <a:rPr lang="ko-KR" altLang="ko-KR" sz="1200" b="0" i="1" kern="1200" dirty="0">
+                <a:solidFill>
+                  <a:schemeClr val="tx1"/>
+                </a:solidFill>
+                <a:effectLst/>
+                <a:latin typeface="+mn-lt"/>
+                <a:ea typeface="+mn-ea"/>
+                <a:cs typeface="+mn-cs"/>
+              </a:rPr>
+              <a:t> 3 </a:t>
+            </a:r>
+            <a:r>
+              <a:rPr lang="ko-KR" altLang="ko-KR" sz="1200" b="0" i="1" kern="1200" dirty="0" err="1">
+                <a:solidFill>
+                  <a:schemeClr val="tx1"/>
+                </a:solidFill>
+                <a:effectLst/>
+                <a:latin typeface="+mn-lt"/>
+                <a:ea typeface="+mn-ea"/>
+                <a:cs typeface="+mn-cs"/>
+              </a:rPr>
+              <a:t>events</a:t>
+            </a:r>
+            <a:r>
+              <a:rPr lang="ko-KR" altLang="ko-KR" sz="1200" b="0" i="1" kern="1200" dirty="0">
+                <a:solidFill>
+                  <a:schemeClr val="tx1"/>
+                </a:solidFill>
+                <a:effectLst/>
+                <a:latin typeface="+mn-lt"/>
+                <a:ea typeface="+mn-ea"/>
+                <a:cs typeface="+mn-cs"/>
+              </a:rPr>
+              <a:t> — </a:t>
+            </a:r>
+            <a:r>
+              <a:rPr lang="ko-KR" altLang="ko-KR" sz="1200" b="0" i="1" kern="1200" dirty="0" err="1">
+                <a:solidFill>
+                  <a:schemeClr val="tx1"/>
+                </a:solidFill>
+                <a:effectLst/>
+                <a:latin typeface="+mn-lt"/>
+                <a:ea typeface="+mn-ea"/>
+                <a:cs typeface="+mn-cs"/>
+              </a:rPr>
+              <a:t>is</a:t>
+            </a:r>
+            <a:r>
+              <a:rPr lang="ko-KR" altLang="ko-KR" sz="1200" b="0" i="1" kern="1200" dirty="0">
+                <a:solidFill>
+                  <a:schemeClr val="tx1"/>
+                </a:solidFill>
+                <a:effectLst/>
+                <a:latin typeface="+mn-lt"/>
+                <a:ea typeface="+mn-ea"/>
+                <a:cs typeface="+mn-cs"/>
+              </a:rPr>
+              <a:t> </a:t>
+            </a:r>
+            <a:r>
+              <a:rPr lang="ko-KR" altLang="ko-KR" sz="1200" b="0" i="1" kern="1200" dirty="0" err="1">
+                <a:solidFill>
+                  <a:schemeClr val="tx1"/>
+                </a:solidFill>
+                <a:effectLst/>
+                <a:latin typeface="+mn-lt"/>
+                <a:ea typeface="+mn-ea"/>
+                <a:cs typeface="+mn-cs"/>
+              </a:rPr>
+              <a:t>this</a:t>
+            </a:r>
+            <a:r>
+              <a:rPr lang="ko-KR" altLang="ko-KR" sz="1200" b="0" i="1" kern="1200" dirty="0">
+                <a:solidFill>
+                  <a:schemeClr val="tx1"/>
+                </a:solidFill>
+                <a:effectLst/>
+                <a:latin typeface="+mn-lt"/>
+                <a:ea typeface="+mn-ea"/>
+                <a:cs typeface="+mn-cs"/>
+              </a:rPr>
+              <a:t> </a:t>
+            </a:r>
+            <a:r>
+              <a:rPr lang="ko-KR" altLang="ko-KR" sz="1200" b="0" i="1" kern="1200" dirty="0" err="1">
+                <a:solidFill>
+                  <a:schemeClr val="tx1"/>
+                </a:solidFill>
+                <a:effectLst/>
+                <a:latin typeface="+mn-lt"/>
+                <a:ea typeface="+mn-ea"/>
+                <a:cs typeface="+mn-cs"/>
+              </a:rPr>
+              <a:t>test</a:t>
+            </a:r>
+            <a:r>
+              <a:rPr lang="ko-KR" altLang="ko-KR" sz="1200" b="0" i="1" kern="1200" dirty="0">
+                <a:solidFill>
+                  <a:schemeClr val="tx1"/>
+                </a:solidFill>
+                <a:effectLst/>
+                <a:latin typeface="+mn-lt"/>
+                <a:ea typeface="+mn-ea"/>
+                <a:cs typeface="+mn-cs"/>
+              </a:rPr>
+              <a:t> </a:t>
+            </a:r>
+            <a:r>
+              <a:rPr lang="ko-KR" altLang="ko-KR" sz="1200" b="0" i="1" kern="1200" dirty="0" err="1">
+                <a:solidFill>
+                  <a:schemeClr val="tx1"/>
+                </a:solidFill>
+                <a:effectLst/>
+                <a:latin typeface="+mn-lt"/>
+                <a:ea typeface="+mn-ea"/>
+                <a:cs typeface="+mn-cs"/>
+              </a:rPr>
+              <a:t>meaningful</a:t>
+            </a:r>
+            <a:r>
+              <a:rPr lang="ko-KR" altLang="ko-KR" sz="1200" b="0" i="1" kern="1200" dirty="0">
+                <a:solidFill>
+                  <a:schemeClr val="tx1"/>
+                </a:solidFill>
+                <a:effectLst/>
+                <a:latin typeface="+mn-lt"/>
+                <a:ea typeface="+mn-ea"/>
+                <a:cs typeface="+mn-cs"/>
+              </a:rPr>
+              <a:t>?"</a:t>
+            </a:r>
+            <a:endParaRPr lang="ko-KR" altLang="ko-KR" sz="1200" b="0" i="0" kern="1200" dirty="0">
+              <a:solidFill>
+                <a:schemeClr val="tx1"/>
+              </a:solidFill>
+              <a:effectLst/>
+              <a:latin typeface="+mn-lt"/>
+              <a:ea typeface="+mn-ea"/>
+              <a:cs typeface="+mn-cs"/>
+            </a:endParaRPr>
+          </a:p>
+          <a:p>
+            <a:r>
               <a:rPr lang="ko-KR" altLang="ko-KR" sz="1200" b="0" i="0" kern="1200" dirty="0">
                 <a:solidFill>
                   <a:schemeClr val="tx1"/>
@@ -8215,6 +8467,15 @@
               </a:rPr>
               <a:t>.</a:t>
             </a:r>
+            <a:endParaRPr lang="ko-KR" altLang="ko-KR" sz="1200" b="0" i="0" kern="1200" dirty="0">
+              <a:solidFill>
+                <a:schemeClr val="tx1"/>
+              </a:solidFill>
+              <a:effectLst/>
+              <a:latin typeface="+mn-lt"/>
+              <a:ea typeface="+mn-ea"/>
+              <a:cs typeface="+mn-cs"/>
+            </a:endParaRPr>
           </a:p>
           <a:p>
             <a:endParaRPr dirty="0"/>
@@ -8299,6 +8560,7 @@
               <a:rPr lang="en-US" dirty="0"/>
               <a:t>Asides from this, for the remaining days, we plan to go through our data and methodology once again. This time in the eyes of the critiques and what are some other flags that may be raised during a review. After that, we plan to finish up our paper for this semester.  </a:t>
             </a:r>
+            <a:endParaRPr lang="en-US" dirty="0"/>
           </a:p>
           <a:p>
             <a:endParaRPr lang="en-US" dirty="0"/>
@@ -8308,6 +8570,7 @@
               <a:rPr lang="en-US" dirty="0"/>
               <a:t>Thank you, that’s all that we prepared for this week’s presentation. </a:t>
             </a:r>
+            <a:endParaRPr lang="en-US" dirty="0"/>
           </a:p>
           <a:p>
             <a:endParaRPr lang="en-US" dirty="0"/>
@@ -8448,6 +8711,7 @@
               <a:rPr lang="en-US"/>
               <a:t>Click to edit Master title style</a:t>
             </a:r>
+            <a:endParaRPr lang="en-US"/>
           </a:p>
         </p:txBody>
       </p:sp>
@@ -8566,6 +8830,7 @@
               <a:rPr lang="en-US"/>
               <a:t>Click to edit Master subtitle style</a:t>
             </a:r>
+            <a:endParaRPr lang="en-US"/>
           </a:p>
         </p:txBody>
       </p:sp>
@@ -8586,7 +8851,6 @@
           <a:p>
             <a:fld id="{5BCAD085-E8A6-8845-BD4E-CB4CCA059FC4}" type="datetimeFigureOut">
               <a:rPr lang="en-US" smtClean="0"/>
-              <a:t>5/26/26</a:t>
             </a:fld>
             <a:endParaRPr lang="en-US"/>
           </a:p>
@@ -8628,7 +8892,6 @@
           <a:p>
             <a:fld id="{C1FF6DA9-008F-8B48-92A6-B652298478BF}" type="slidenum">
               <a:rPr lang="en-US" smtClean="0"/>
-              <a:t>‹#›</a:t>
             </a:fld>
             <a:endParaRPr lang="en-US"/>
           </a:p>
@@ -8678,6 +8941,7 @@
               <a:rPr lang="en-US"/>
               <a:t>Click to edit Master title style</a:t>
             </a:r>
+            <a:endParaRPr lang="en-US"/>
           </a:p>
         </p:txBody>
       </p:sp>
@@ -8701,6 +8965,7 @@
               <a:rPr lang="en-US"/>
               <a:t>Click to edit Master text styles</a:t>
             </a:r>
+            <a:endParaRPr lang="en-US"/>
           </a:p>
           <a:p>
             <a:pPr lvl="1"/>
@@ -8708,6 +8973,7 @@
               <a:rPr lang="en-US"/>
               <a:t>Second level</a:t>
             </a:r>
+            <a:endParaRPr lang="en-US"/>
           </a:p>
           <a:p>
             <a:pPr lvl="2"/>
@@ -8715,6 +8981,7 @@
               <a:rPr lang="en-US"/>
               <a:t>Third level</a:t>
             </a:r>
+            <a:endParaRPr lang="en-US"/>
           </a:p>
           <a:p>
             <a:pPr lvl="3"/>
@@ -8722,6 +8989,7 @@
               <a:rPr lang="en-US"/>
               <a:t>Fourth level</a:t>
             </a:r>
+            <a:endParaRPr lang="en-US"/>
           </a:p>
           <a:p>
             <a:pPr lvl="4"/>
@@ -8729,6 +8997,7 @@
               <a:rPr lang="en-US"/>
               <a:t>Fifth level</a:t>
             </a:r>
+            <a:endParaRPr lang="en-US"/>
           </a:p>
         </p:txBody>
       </p:sp>
@@ -8749,7 +9018,6 @@
           <a:p>
             <a:fld id="{5BCAD085-E8A6-8845-BD4E-CB4CCA059FC4}" type="datetimeFigureOut">
               <a:rPr lang="en-US" smtClean="0"/>
-              <a:t>5/26/26</a:t>
             </a:fld>
             <a:endParaRPr lang="en-US"/>
           </a:p>
@@ -8791,7 +9059,6 @@
           <a:p>
             <a:fld id="{C1FF6DA9-008F-8B48-92A6-B652298478BF}" type="slidenum">
               <a:rPr lang="en-US" smtClean="0"/>
-              <a:t>‹#›</a:t>
             </a:fld>
             <a:endParaRPr lang="en-US"/>
           </a:p>
@@ -8846,6 +9113,7 @@
               <a:rPr lang="en-US"/>
               <a:t>Click to edit Master title style</a:t>
             </a:r>
+            <a:endParaRPr lang="en-US"/>
           </a:p>
         </p:txBody>
       </p:sp>
@@ -8874,6 +9142,7 @@
               <a:rPr lang="en-US"/>
               <a:t>Click to edit Master text styles</a:t>
             </a:r>
+            <a:endParaRPr lang="en-US"/>
           </a:p>
           <a:p>
             <a:pPr lvl="1"/>
@@ -8881,6 +9150,7 @@
               <a:rPr lang="en-US"/>
               <a:t>Second level</a:t>
             </a:r>
+            <a:endParaRPr lang="en-US"/>
           </a:p>
           <a:p>
             <a:pPr lvl="2"/>
@@ -8888,6 +9158,7 @@
               <a:rPr lang="en-US"/>
               <a:t>Third level</a:t>
             </a:r>
+            <a:endParaRPr lang="en-US"/>
           </a:p>
           <a:p>
             <a:pPr lvl="3"/>
@@ -8895,6 +9166,7 @@
               <a:rPr lang="en-US"/>
               <a:t>Fourth level</a:t>
             </a:r>
+            <a:endParaRPr lang="en-US"/>
           </a:p>
           <a:p>
             <a:pPr lvl="4"/>
@@ -8902,6 +9174,7 @@
               <a:rPr lang="en-US"/>
               <a:t>Fifth level</a:t>
             </a:r>
+            <a:endParaRPr lang="en-US"/>
           </a:p>
         </p:txBody>
       </p:sp>
@@ -8922,7 +9195,6 @@
           <a:p>
             <a:fld id="{5BCAD085-E8A6-8845-BD4E-CB4CCA059FC4}" type="datetimeFigureOut">
               <a:rPr lang="en-US" smtClean="0"/>
-              <a:t>5/26/26</a:t>
             </a:fld>
             <a:endParaRPr lang="en-US"/>
           </a:p>
@@ -8964,7 +9236,6 @@
           <a:p>
             <a:fld id="{C1FF6DA9-008F-8B48-92A6-B652298478BF}" type="slidenum">
               <a:rPr lang="en-US" smtClean="0"/>
-              <a:t>‹#›</a:t>
             </a:fld>
             <a:endParaRPr lang="en-US"/>
           </a:p>
@@ -9014,6 +9285,7 @@
               <a:rPr lang="en-US"/>
               <a:t>Click to edit Master title style</a:t>
             </a:r>
+            <a:endParaRPr lang="en-US"/>
           </a:p>
         </p:txBody>
       </p:sp>
@@ -9037,6 +9309,7 @@
               <a:rPr lang="en-US"/>
               <a:t>Click to edit Master text styles</a:t>
             </a:r>
+            <a:endParaRPr lang="en-US"/>
           </a:p>
           <a:p>
             <a:pPr lvl="1"/>
@@ -9044,6 +9317,7 @@
               <a:rPr lang="en-US"/>
               <a:t>Second level</a:t>
             </a:r>
+            <a:endParaRPr lang="en-US"/>
           </a:p>
           <a:p>
             <a:pPr lvl="2"/>
@@ -9051,6 +9325,7 @@
               <a:rPr lang="en-US"/>
               <a:t>Third level</a:t>
             </a:r>
+            <a:endParaRPr lang="en-US"/>
           </a:p>
           <a:p>
             <a:pPr lvl="3"/>
@@ -9058,6 +9333,7 @@
               <a:rPr lang="en-US"/>
               <a:t>Fourth level</a:t>
             </a:r>
+            <a:endParaRPr lang="en-US"/>
           </a:p>
           <a:p>
             <a:pPr lvl="4"/>
@@ -9065,6 +9341,7 @@
               <a:rPr lang="en-US"/>
               <a:t>Fifth level</a:t>
             </a:r>
+            <a:endParaRPr lang="en-US"/>
           </a:p>
         </p:txBody>
       </p:sp>
@@ -9085,7 +9362,6 @@
           <a:p>
             <a:fld id="{5BCAD085-E8A6-8845-BD4E-CB4CCA059FC4}" type="datetimeFigureOut">
               <a:rPr lang="en-US" smtClean="0"/>
-              <a:t>5/26/26</a:t>
             </a:fld>
             <a:endParaRPr lang="en-US"/>
           </a:p>
@@ -9127,7 +9403,6 @@
           <a:p>
             <a:fld id="{C1FF6DA9-008F-8B48-92A6-B652298478BF}" type="slidenum">
               <a:rPr lang="en-US" smtClean="0"/>
-              <a:t>‹#›</a:t>
             </a:fld>
             <a:endParaRPr lang="en-US"/>
           </a:p>
@@ -9186,6 +9461,7 @@
               <a:rPr lang="en-US"/>
               <a:t>Click to edit Master title style</a:t>
             </a:r>
+            <a:endParaRPr lang="en-US"/>
           </a:p>
         </p:txBody>
       </p:sp>
@@ -9305,6 +9581,7 @@
               <a:rPr lang="en-US"/>
               <a:t>Click to edit Master text styles</a:t>
             </a:r>
+            <a:endParaRPr lang="en-US"/>
           </a:p>
         </p:txBody>
       </p:sp>
@@ -9325,7 +9602,6 @@
           <a:p>
             <a:fld id="{5BCAD085-E8A6-8845-BD4E-CB4CCA059FC4}" type="datetimeFigureOut">
               <a:rPr lang="en-US" smtClean="0"/>
-              <a:t>5/26/26</a:t>
             </a:fld>
             <a:endParaRPr lang="en-US"/>
           </a:p>
@@ -9367,7 +9643,6 @@
           <a:p>
             <a:fld id="{C1FF6DA9-008F-8B48-92A6-B652298478BF}" type="slidenum">
               <a:rPr lang="en-US" smtClean="0"/>
-              <a:t>‹#›</a:t>
             </a:fld>
             <a:endParaRPr lang="en-US"/>
           </a:p>
@@ -9417,6 +9692,7 @@
               <a:rPr lang="en-US"/>
               <a:t>Click to edit Master title style</a:t>
             </a:r>
+            <a:endParaRPr lang="en-US"/>
           </a:p>
         </p:txBody>
       </p:sp>
@@ -9473,6 +9749,7 @@
               <a:rPr lang="en-US"/>
               <a:t>Click to edit Master text styles</a:t>
             </a:r>
+            <a:endParaRPr lang="en-US"/>
           </a:p>
           <a:p>
             <a:pPr lvl="1"/>
@@ -9480,6 +9757,7 @@
               <a:rPr lang="en-US"/>
               <a:t>Second level</a:t>
             </a:r>
+            <a:endParaRPr lang="en-US"/>
           </a:p>
           <a:p>
             <a:pPr lvl="2"/>
@@ -9487,6 +9765,7 @@
               <a:rPr lang="en-US"/>
               <a:t>Third level</a:t>
             </a:r>
+            <a:endParaRPr lang="en-US"/>
           </a:p>
           <a:p>
             <a:pPr lvl="3"/>
@@ -9494,6 +9773,7 @@
               <a:rPr lang="en-US"/>
               <a:t>Fourth level</a:t>
             </a:r>
+            <a:endParaRPr lang="en-US"/>
           </a:p>
           <a:p>
             <a:pPr lvl="4"/>
@@ -9501,6 +9781,7 @@
               <a:rPr lang="en-US"/>
               <a:t>Fifth level</a:t>
             </a:r>
+            <a:endParaRPr lang="en-US"/>
           </a:p>
         </p:txBody>
       </p:sp>
@@ -9557,6 +9838,7 @@
               <a:rPr lang="en-US"/>
               <a:t>Click to edit Master text styles</a:t>
             </a:r>
+            <a:endParaRPr lang="en-US"/>
           </a:p>
           <a:p>
             <a:pPr lvl="1"/>
@@ -9564,6 +9846,7 @@
               <a:rPr lang="en-US"/>
               <a:t>Second level</a:t>
             </a:r>
+            <a:endParaRPr lang="en-US"/>
           </a:p>
           <a:p>
             <a:pPr lvl="2"/>
@@ -9571,6 +9854,7 @@
               <a:rPr lang="en-US"/>
               <a:t>Third level</a:t>
             </a:r>
+            <a:endParaRPr lang="en-US"/>
           </a:p>
           <a:p>
             <a:pPr lvl="3"/>
@@ -9578,6 +9862,7 @@
               <a:rPr lang="en-US"/>
               <a:t>Fourth level</a:t>
             </a:r>
+            <a:endParaRPr lang="en-US"/>
           </a:p>
           <a:p>
             <a:pPr lvl="4"/>
@@ -9585,6 +9870,7 @@
               <a:rPr lang="en-US"/>
               <a:t>Fifth level</a:t>
             </a:r>
+            <a:endParaRPr lang="en-US"/>
           </a:p>
         </p:txBody>
       </p:sp>
@@ -9605,7 +9891,6 @@
           <a:p>
             <a:fld id="{5BCAD085-E8A6-8845-BD4E-CB4CCA059FC4}" type="datetimeFigureOut">
               <a:rPr lang="en-US" smtClean="0"/>
-              <a:t>5/26/26</a:t>
             </a:fld>
             <a:endParaRPr lang="en-US"/>
           </a:p>
@@ -9647,7 +9932,6 @@
           <a:p>
             <a:fld id="{C1FF6DA9-008F-8B48-92A6-B652298478BF}" type="slidenum">
               <a:rPr lang="en-US" smtClean="0"/>
-              <a:t>‹#›</a:t>
             </a:fld>
             <a:endParaRPr lang="en-US"/>
           </a:p>
@@ -9701,6 +9985,7 @@
               <a:rPr lang="en-US"/>
               <a:t>Click to edit Master title style</a:t>
             </a:r>
+            <a:endParaRPr lang="en-US"/>
           </a:p>
         </p:txBody>
       </p:sp>
@@ -9766,6 +10051,7 @@
               <a:rPr lang="en-US"/>
               <a:t>Click to edit Master text styles</a:t>
             </a:r>
+            <a:endParaRPr lang="en-US"/>
           </a:p>
         </p:txBody>
       </p:sp>
@@ -9822,6 +10108,7 @@
               <a:rPr lang="en-US"/>
               <a:t>Click to edit Master text styles</a:t>
             </a:r>
+            <a:endParaRPr lang="en-US"/>
           </a:p>
           <a:p>
             <a:pPr lvl="1"/>
@@ -9829,6 +10116,7 @@
               <a:rPr lang="en-US"/>
               <a:t>Second level</a:t>
             </a:r>
+            <a:endParaRPr lang="en-US"/>
           </a:p>
           <a:p>
             <a:pPr lvl="2"/>
@@ -9836,6 +10124,7 @@
               <a:rPr lang="en-US"/>
               <a:t>Third level</a:t>
             </a:r>
+            <a:endParaRPr lang="en-US"/>
           </a:p>
           <a:p>
             <a:pPr lvl="3"/>
@@ -9843,6 +10132,7 @@
               <a:rPr lang="en-US"/>
               <a:t>Fourth level</a:t>
             </a:r>
+            <a:endParaRPr lang="en-US"/>
           </a:p>
           <a:p>
             <a:pPr lvl="4"/>
@@ -9850,6 +10140,7 @@
               <a:rPr lang="en-US"/>
               <a:t>Fifth level</a:t>
             </a:r>
+            <a:endParaRPr lang="en-US"/>
           </a:p>
         </p:txBody>
       </p:sp>
@@ -9915,6 +10206,7 @@
               <a:rPr lang="en-US"/>
               <a:t>Click to edit Master text styles</a:t>
             </a:r>
+            <a:endParaRPr lang="en-US"/>
           </a:p>
         </p:txBody>
       </p:sp>
@@ -9971,6 +10263,7 @@
               <a:rPr lang="en-US"/>
               <a:t>Click to edit Master text styles</a:t>
             </a:r>
+            <a:endParaRPr lang="en-US"/>
           </a:p>
           <a:p>
             <a:pPr lvl="1"/>
@@ -9978,6 +10271,7 @@
               <a:rPr lang="en-US"/>
               <a:t>Second level</a:t>
             </a:r>
+            <a:endParaRPr lang="en-US"/>
           </a:p>
           <a:p>
             <a:pPr lvl="2"/>
@@ -9985,6 +10279,7 @@
               <a:rPr lang="en-US"/>
               <a:t>Third level</a:t>
             </a:r>
+            <a:endParaRPr lang="en-US"/>
           </a:p>
           <a:p>
             <a:pPr lvl="3"/>
@@ -9992,6 +10287,7 @@
               <a:rPr lang="en-US"/>
               <a:t>Fourth level</a:t>
             </a:r>
+            <a:endParaRPr lang="en-US"/>
           </a:p>
           <a:p>
             <a:pPr lvl="4"/>
@@ -9999,6 +10295,7 @@
               <a:rPr lang="en-US"/>
               <a:t>Fifth level</a:t>
             </a:r>
+            <a:endParaRPr lang="en-US"/>
           </a:p>
         </p:txBody>
       </p:sp>
@@ -10019,7 +10316,6 @@
           <a:p>
             <a:fld id="{5BCAD085-E8A6-8845-BD4E-CB4CCA059FC4}" type="datetimeFigureOut">
               <a:rPr lang="en-US" smtClean="0"/>
-              <a:t>5/26/26</a:t>
             </a:fld>
             <a:endParaRPr lang="en-US"/>
           </a:p>
@@ -10061,7 +10357,6 @@
           <a:p>
             <a:fld id="{C1FF6DA9-008F-8B48-92A6-B652298478BF}" type="slidenum">
               <a:rPr lang="en-US" smtClean="0"/>
-              <a:t>‹#›</a:t>
             </a:fld>
             <a:endParaRPr lang="en-US"/>
           </a:p>
@@ -10111,6 +10406,7 @@
               <a:rPr lang="en-US"/>
               <a:t>Click to edit Master title style</a:t>
             </a:r>
+            <a:endParaRPr lang="en-US"/>
           </a:p>
         </p:txBody>
       </p:sp>
@@ -10131,7 +10427,6 @@
           <a:p>
             <a:fld id="{5BCAD085-E8A6-8845-BD4E-CB4CCA059FC4}" type="datetimeFigureOut">
               <a:rPr lang="en-US" smtClean="0"/>
-              <a:t>5/26/26</a:t>
             </a:fld>
             <a:endParaRPr lang="en-US"/>
           </a:p>
@@ -10173,7 +10468,6 @@
           <a:p>
             <a:fld id="{C1FF6DA9-008F-8B48-92A6-B652298478BF}" type="slidenum">
               <a:rPr lang="en-US" smtClean="0"/>
-              <a:t>‹#›</a:t>
             </a:fld>
             <a:endParaRPr lang="en-US"/>
           </a:p>
@@ -10221,7 +10515,6 @@
           <a:p>
             <a:fld id="{5BCAD085-E8A6-8845-BD4E-CB4CCA059FC4}" type="datetimeFigureOut">
               <a:rPr lang="en-US" smtClean="0"/>
-              <a:t>5/26/26</a:t>
             </a:fld>
             <a:endParaRPr lang="en-US"/>
           </a:p>
@@ -10263,7 +10556,6 @@
           <a:p>
             <a:fld id="{C1FF6DA9-008F-8B48-92A6-B652298478BF}" type="slidenum">
               <a:rPr lang="en-US" smtClean="0"/>
-              <a:t>‹#›</a:t>
             </a:fld>
             <a:endParaRPr lang="en-US"/>
           </a:p>
@@ -10322,6 +10614,7 @@
               <a:rPr lang="en-US"/>
               <a:t>Click to edit Master title style</a:t>
             </a:r>
+            <a:endParaRPr lang="en-US"/>
           </a:p>
         </p:txBody>
       </p:sp>
@@ -10378,6 +10671,7 @@
               <a:rPr lang="en-US"/>
               <a:t>Click to edit Master text styles</a:t>
             </a:r>
+            <a:endParaRPr lang="en-US"/>
           </a:p>
           <a:p>
             <a:pPr lvl="1"/>
@@ -10385,6 +10679,7 @@
               <a:rPr lang="en-US"/>
               <a:t>Second level</a:t>
             </a:r>
+            <a:endParaRPr lang="en-US"/>
           </a:p>
           <a:p>
             <a:pPr lvl="2"/>
@@ -10392,6 +10687,7 @@
               <a:rPr lang="en-US"/>
               <a:t>Third level</a:t>
             </a:r>
+            <a:endParaRPr lang="en-US"/>
           </a:p>
           <a:p>
             <a:pPr lvl="3"/>
@@ -10399,6 +10695,7 @@
               <a:rPr lang="en-US"/>
               <a:t>Fourth level</a:t>
             </a:r>
+            <a:endParaRPr lang="en-US"/>
           </a:p>
           <a:p>
             <a:pPr lvl="4"/>
@@ -10406,6 +10703,7 @@
               <a:rPr lang="en-US"/>
               <a:t>Fifth level</a:t>
             </a:r>
+            <a:endParaRPr lang="en-US"/>
           </a:p>
         </p:txBody>
       </p:sp>
@@ -10471,6 +10769,7 @@
               <a:rPr lang="en-US"/>
               <a:t>Click to edit Master text styles</a:t>
             </a:r>
+            <a:endParaRPr lang="en-US"/>
           </a:p>
         </p:txBody>
       </p:sp>
@@ -10491,7 +10790,6 @@
           <a:p>
             <a:fld id="{5BCAD085-E8A6-8845-BD4E-CB4CCA059FC4}" type="datetimeFigureOut">
               <a:rPr lang="en-US" smtClean="0"/>
-              <a:t>5/26/26</a:t>
             </a:fld>
             <a:endParaRPr lang="en-US"/>
           </a:p>
@@ -10533,7 +10831,6 @@
           <a:p>
             <a:fld id="{C1FF6DA9-008F-8B48-92A6-B652298478BF}" type="slidenum">
               <a:rPr lang="en-US" smtClean="0"/>
-              <a:t>‹#›</a:t>
             </a:fld>
             <a:endParaRPr lang="en-US"/>
           </a:p>
@@ -10592,6 +10889,7 @@
               <a:rPr lang="en-US"/>
               <a:t>Click to edit Master title style</a:t>
             </a:r>
+            <a:endParaRPr lang="en-US"/>
           </a:p>
         </p:txBody>
       </p:sp>
@@ -10718,6 +11016,7 @@
               <a:rPr lang="en-US"/>
               <a:t>Click to edit Master text styles</a:t>
             </a:r>
+            <a:endParaRPr lang="en-US"/>
           </a:p>
         </p:txBody>
       </p:sp>
@@ -10738,7 +11037,6 @@
           <a:p>
             <a:fld id="{5BCAD085-E8A6-8845-BD4E-CB4CCA059FC4}" type="datetimeFigureOut">
               <a:rPr lang="en-US" smtClean="0"/>
-              <a:t>5/26/26</a:t>
             </a:fld>
             <a:endParaRPr lang="en-US"/>
           </a:p>
@@ -10780,7 +11078,6 @@
           <a:p>
             <a:fld id="{C1FF6DA9-008F-8B48-92A6-B652298478BF}" type="slidenum">
               <a:rPr lang="en-US" smtClean="0"/>
-              <a:t>‹#›</a:t>
             </a:fld>
             <a:endParaRPr lang="en-US"/>
           </a:p>
@@ -10845,6 +11142,7 @@
               <a:rPr lang="en-US"/>
               <a:t>Click to edit Master title style</a:t>
             </a:r>
+            <a:endParaRPr lang="en-US"/>
           </a:p>
         </p:txBody>
       </p:sp>
@@ -10878,6 +11176,7 @@
               <a:rPr lang="en-US"/>
               <a:t>Click to edit Master text styles</a:t>
             </a:r>
+            <a:endParaRPr lang="en-US"/>
           </a:p>
           <a:p>
             <a:pPr lvl="1"/>
@@ -10885,6 +11184,7 @@
               <a:rPr lang="en-US"/>
               <a:t>Second level</a:t>
             </a:r>
+            <a:endParaRPr lang="en-US"/>
           </a:p>
           <a:p>
             <a:pPr lvl="2"/>
@@ -10892,6 +11192,7 @@
               <a:rPr lang="en-US"/>
               <a:t>Third level</a:t>
             </a:r>
+            <a:endParaRPr lang="en-US"/>
           </a:p>
           <a:p>
             <a:pPr lvl="3"/>
@@ -10899,6 +11200,7 @@
               <a:rPr lang="en-US"/>
               <a:t>Fourth level</a:t>
             </a:r>
+            <a:endParaRPr lang="en-US"/>
           </a:p>
           <a:p>
             <a:pPr lvl="4"/>
@@ -10906,6 +11208,7 @@
               <a:rPr lang="en-US"/>
               <a:t>Fifth level</a:t>
             </a:r>
+            <a:endParaRPr lang="en-US"/>
           </a:p>
         </p:txBody>
       </p:sp>
@@ -10944,7 +11247,6 @@
           <a:p>
             <a:fld id="{5BCAD085-E8A6-8845-BD4E-CB4CCA059FC4}" type="datetimeFigureOut">
               <a:rPr lang="en-US" smtClean="0"/>
-              <a:t>5/26/26</a:t>
             </a:fld>
             <a:endParaRPr lang="en-US"/>
           </a:p>
@@ -11022,7 +11324,6 @@
           <a:p>
             <a:fld id="{C1FF6DA9-008F-8B48-92A6-B652298478BF}" type="slidenum">
               <a:rPr lang="en-US" smtClean="0"/>
-              <a:t>‹#›</a:t>
             </a:fld>
             <a:endParaRPr lang="en-US"/>
           </a:p>
@@ -11331,14 +11632,14 @@
           <p:nvPr/>
         </p:nvPicPr>
         <p:blipFill>
-          <a:blip r:embed="rId3">
+          <a:blip r:embed="rId1">
             <a:lum bright="70000" contrast="-70000"/>
             <a:extLst>
               <a:ext uri="{BEBA8EAE-BF5A-486C-A8C5-ECC9F3942E4B}">
                 <a14:imgProps xmlns:a14="http://schemas.microsoft.com/office/drawing/2010/main">
-                  <a14:imgLayer r:embed="rId4">
+                  <a14:imgLayer r:embed="rId2">
                     <a14:imgEffect>
-                      <a14:artisticPhotocopy detail="2"/>
+                      <a14:artisticPhotocopy trans="30000" detail="2"/>
                     </a14:imgEffect>
                   </a14:imgLayer>
                 </a14:imgProps>
@@ -11418,6 +11719,13 @@
               </a:rPr>
               <a:t>STABLECOINS AND THE EXORBITANT PRIVILEGE</a:t>
             </a:r>
+            <a:endParaRPr lang="en-US" altLang="ko-KR" sz="2400" dirty="0">
+              <a:solidFill>
+                <a:prstClr val="white"/>
+              </a:solidFill>
+              <a:latin typeface="Hiragino Kaku Gothic Std W8" panose="020B0800000000000000" pitchFamily="34" charset="-128"/>
+              <a:ea typeface="Hiragino Kaku Gothic Std W8" panose="020B0800000000000000" pitchFamily="34" charset="-128"/>
+            </a:endParaRPr>
           </a:p>
           <a:p>
             <a:pPr algn="ctr" defTabSz="914400" latinLnBrk="1">
@@ -11463,6 +11771,11 @@
               </a:rPr>
               <a:t>Yonsei GSIS 2026-1 </a:t>
             </a:r>
+            <a:endParaRPr lang="en-US" altLang="ko-KR" sz="1800" b="1" dirty="0">
+              <a:solidFill>
+                <a:schemeClr val="bg1"/>
+              </a:solidFill>
+            </a:endParaRPr>
           </a:p>
           <a:p>
             <a:r>
@@ -11576,7 +11889,6 @@
           <a:lstStyle/>
           <a:p>
             <a:pPr algn="ctr"/>
-            <a:endParaRPr/>
           </a:p>
         </p:txBody>
       </p:sp>
@@ -11612,6 +11924,12 @@
               </a:rPr>
               <a:t>Roadmap</a:t>
             </a:r>
+            <a:endParaRPr sz="2600" b="0" i="0" dirty="0">
+              <a:solidFill>
+                <a:srgbClr val="FFFFFF"/>
+              </a:solidFill>
+              <a:latin typeface="Calibri"/>
+            </a:endParaRPr>
           </a:p>
         </p:txBody>
       </p:sp>
@@ -11655,7 +11973,6 @@
           <a:lstStyle/>
           <a:p>
             <a:pPr algn="ctr"/>
-            <a:endParaRPr/>
           </a:p>
         </p:txBody>
       </p:sp>
@@ -11691,6 +12008,12 @@
               </a:rPr>
               <a:t>What we have done</a:t>
             </a:r>
+            <a:endParaRPr sz="1500" b="1" i="0">
+              <a:solidFill>
+                <a:srgbClr val="FFFFFF"/>
+              </a:solidFill>
+              <a:latin typeface="Calibri"/>
+            </a:endParaRPr>
           </a:p>
         </p:txBody>
       </p:sp>
@@ -11734,7 +12057,6 @@
           <a:lstStyle/>
           <a:p>
             <a:pPr algn="ctr"/>
-            <a:endParaRPr/>
           </a:p>
         </p:txBody>
       </p:sp>
@@ -11770,6 +12092,12 @@
               </a:rPr>
               <a:t>Theory</a:t>
             </a:r>
+            <a:endParaRPr sz="1100" b="1" i="0">
+              <a:solidFill>
+                <a:srgbClr val="FFFFFF"/>
+              </a:solidFill>
+              <a:latin typeface="Calibri"/>
+            </a:endParaRPr>
           </a:p>
         </p:txBody>
       </p:sp>
@@ -11813,7 +12141,6 @@
           <a:lstStyle/>
           <a:p>
             <a:pPr algn="ctr"/>
-            <a:endParaRPr/>
           </a:p>
         </p:txBody>
       </p:sp>
@@ -11867,6 +12194,12 @@
               </a:rPr>
               <a:t>, and liquid buffer L</a:t>
             </a:r>
+            <a:endParaRPr sz="1200" b="0" i="0" dirty="0">
+              <a:solidFill>
+                <a:srgbClr val="1A1A2E"/>
+              </a:solidFill>
+              <a:latin typeface="Calibri"/>
+            </a:endParaRPr>
           </a:p>
         </p:txBody>
       </p:sp>
@@ -11910,7 +12243,6 @@
           <a:lstStyle/>
           <a:p>
             <a:pPr algn="ctr"/>
-            <a:endParaRPr/>
           </a:p>
         </p:txBody>
       </p:sp>
@@ -11946,6 +12278,12 @@
               </a:rPr>
               <a:t>Regression</a:t>
             </a:r>
+            <a:endParaRPr sz="1100" b="1" i="0">
+              <a:solidFill>
+                <a:srgbClr val="FFFFFF"/>
+              </a:solidFill>
+              <a:latin typeface="Calibri"/>
+            </a:endParaRPr>
           </a:p>
         </p:txBody>
       </p:sp>
@@ -11989,7 +12327,6 @@
           <a:lstStyle/>
           <a:p>
             <a:pPr algn="ctr"/>
-            <a:endParaRPr/>
           </a:p>
         </p:txBody>
       </p:sp>
@@ -12025,6 +12362,12 @@
               </a:rPr>
               <a:t>✓  β₁ = −6.02** — stablecoin growth compresses OIS–Treasury spreads (privilege amplification)</a:t>
             </a:r>
+            <a:endParaRPr sz="1200" b="0" i="0" dirty="0">
+              <a:solidFill>
+                <a:srgbClr val="1A1A2E"/>
+              </a:solidFill>
+              <a:latin typeface="Calibri"/>
+            </a:endParaRPr>
           </a:p>
         </p:txBody>
       </p:sp>
@@ -12068,7 +12411,6 @@
           <a:lstStyle/>
           <a:p>
             <a:pPr algn="ctr"/>
-            <a:endParaRPr/>
           </a:p>
         </p:txBody>
       </p:sp>
@@ -12104,6 +12446,12 @@
               </a:rPr>
               <a:t>Threshold</a:t>
             </a:r>
+            <a:endParaRPr sz="1100" b="1" i="0">
+              <a:solidFill>
+                <a:srgbClr val="FFFFFF"/>
+              </a:solidFill>
+              <a:latin typeface="Calibri"/>
+            </a:endParaRPr>
           </a:p>
         </p:txBody>
       </p:sp>
@@ -12147,7 +12495,6 @@
           <a:lstStyle/>
           <a:p>
             <a:pPr algn="ctr"/>
-            <a:endParaRPr/>
           </a:p>
         </p:txBody>
       </p:sp>
@@ -12183,6 +12530,12 @@
               </a:rPr>
               <a:t>✓  Hansen (2000) threshold at q* = 13% liquid cash — separates safe from fragile regime</a:t>
             </a:r>
+            <a:endParaRPr sz="1200" b="0" i="0" dirty="0">
+              <a:solidFill>
+                <a:srgbClr val="1A1A2E"/>
+              </a:solidFill>
+              <a:latin typeface="Calibri"/>
+            </a:endParaRPr>
           </a:p>
         </p:txBody>
       </p:sp>
@@ -12226,7 +12579,6 @@
           <a:lstStyle/>
           <a:p>
             <a:pPr algn="ctr"/>
-            <a:endParaRPr/>
           </a:p>
         </p:txBody>
       </p:sp>
@@ -12262,6 +12614,12 @@
               </a:rPr>
               <a:t>Event Study</a:t>
             </a:r>
+            <a:endParaRPr sz="1100" b="1" i="0">
+              <a:solidFill>
+                <a:srgbClr val="FFFFFF"/>
+              </a:solidFill>
+              <a:latin typeface="Calibri"/>
+            </a:endParaRPr>
           </a:p>
         </p:txBody>
       </p:sp>
@@ -12305,7 +12663,6 @@
           <a:lstStyle/>
           <a:p>
             <a:pPr algn="ctr"/>
-            <a:endParaRPr/>
           </a:p>
         </p:txBody>
       </p:sp>
@@ -12359,6 +12716,12 @@
               </a:rPr>
               <a:t>, SVB) — 27 pp CAR swing between low/high buffer regimes</a:t>
             </a:r>
+            <a:endParaRPr sz="1200" b="0" i="0" dirty="0">
+              <a:solidFill>
+                <a:srgbClr val="1A1A2E"/>
+              </a:solidFill>
+              <a:latin typeface="Calibri"/>
+            </a:endParaRPr>
           </a:p>
         </p:txBody>
       </p:sp>
@@ -12402,7 +12765,6 @@
           <a:lstStyle/>
           <a:p>
             <a:pPr algn="ctr"/>
-            <a:endParaRPr/>
           </a:p>
         </p:txBody>
       </p:sp>
@@ -12438,6 +12800,12 @@
               </a:rPr>
               <a:t>Robustness</a:t>
             </a:r>
+            <a:endParaRPr sz="1100" b="1" i="0">
+              <a:solidFill>
+                <a:srgbClr val="FFFFFF"/>
+              </a:solidFill>
+              <a:latin typeface="Calibri"/>
+            </a:endParaRPr>
           </a:p>
         </p:txBody>
       </p:sp>
@@ -12481,7 +12849,6 @@
           <a:lstStyle/>
           <a:p>
             <a:pPr algn="ctr"/>
-            <a:endParaRPr/>
           </a:p>
         </p:txBody>
       </p:sp>
@@ -12517,6 +12884,12 @@
               </a:rPr>
               <a:t>✓  Mean-centering (VIF), Engle-Granger cointegration, first-differenced spec, post-2023 subsample</a:t>
             </a:r>
+            <a:endParaRPr sz="1200" b="0" i="0" dirty="0">
+              <a:solidFill>
+                <a:srgbClr val="1A1A2E"/>
+              </a:solidFill>
+              <a:latin typeface="Calibri"/>
+            </a:endParaRPr>
           </a:p>
         </p:txBody>
       </p:sp>
@@ -12562,7 +12935,6 @@
           <a:lstStyle/>
           <a:p>
             <a:pPr algn="ctr"/>
-            <a:endParaRPr/>
           </a:p>
         </p:txBody>
       </p:sp>
@@ -12598,6 +12970,12 @@
               </a:rPr>
               <a:t>This deck</a:t>
             </a:r>
+            <a:endParaRPr sz="1100" b="1" i="0" dirty="0">
+              <a:solidFill>
+                <a:srgbClr val="FFFFFF"/>
+              </a:solidFill>
+              <a:latin typeface="Calibri"/>
+            </a:endParaRPr>
           </a:p>
         </p:txBody>
       </p:sp>
@@ -12641,7 +13019,6 @@
           <a:lstStyle/>
           <a:p>
             <a:pPr algn="ctr"/>
-            <a:endParaRPr/>
           </a:p>
         </p:txBody>
       </p:sp>
@@ -12677,6 +13054,12 @@
               </a:rPr>
               <a:t>✓  Clarified: why OIS spread, what the buffer condition means, how to read CAR, what each event was</a:t>
             </a:r>
+            <a:endParaRPr sz="1200" b="0" i="0" dirty="0">
+              <a:solidFill>
+                <a:srgbClr val="1A1A2E"/>
+              </a:solidFill>
+              <a:latin typeface="Calibri"/>
+            </a:endParaRPr>
           </a:p>
         </p:txBody>
       </p:sp>
@@ -12786,7 +13169,6 @@
           <a:lstStyle/>
           <a:p>
             <a:pPr algn="ctr"/>
-            <a:endParaRPr/>
           </a:p>
         </p:txBody>
       </p:sp>
@@ -12830,7 +13212,6 @@
           <a:lstStyle/>
           <a:p>
             <a:pPr algn="ctr"/>
-            <a:endParaRPr/>
           </a:p>
         </p:txBody>
       </p:sp>
@@ -12866,6 +13247,12 @@
               </a:rPr>
               <a:t>Why OIS–Treasury Spread, Not Raw Yields?</a:t>
             </a:r>
+            <a:endParaRPr sz="2600" b="0" i="0">
+              <a:solidFill>
+                <a:srgbClr val="FFFFFF"/>
+              </a:solidFill>
+              <a:latin typeface="Calibri"/>
+            </a:endParaRPr>
           </a:p>
         </p:txBody>
       </p:sp>
@@ -12901,6 +13288,12 @@
               </a:rPr>
               <a:t>3</a:t>
             </a:r>
+            <a:endParaRPr sz="1300" b="0" i="0">
+              <a:solidFill>
+                <a:srgbClr val="555566"/>
+              </a:solidFill>
+              <a:latin typeface="Calibri"/>
+            </a:endParaRPr>
           </a:p>
         </p:txBody>
       </p:sp>
@@ -12944,7 +13337,6 @@
           <a:lstStyle/>
           <a:p>
             <a:pPr algn="ctr"/>
-            <a:endParaRPr/>
           </a:p>
         </p:txBody>
       </p:sp>
@@ -12980,6 +13372,12 @@
               </a:rPr>
               <a:t>A T-bill yield moves for two reasons simultaneously. We need to separate them.</a:t>
             </a:r>
+            <a:endParaRPr sz="1400" b="0" i="1">
+              <a:solidFill>
+                <a:srgbClr val="1B3A72"/>
+              </a:solidFill>
+              <a:latin typeface="Calibri"/>
+            </a:endParaRPr>
           </a:p>
         </p:txBody>
       </p:sp>
@@ -13023,7 +13421,6 @@
           <a:lstStyle/>
           <a:p>
             <a:pPr algn="ctr"/>
-            <a:endParaRPr/>
           </a:p>
         </p:txBody>
       </p:sp>
@@ -13059,6 +13456,12 @@
               </a:rPr>
               <a:t>Raw T-bill Yield</a:t>
             </a:r>
+            <a:endParaRPr sz="1300" b="1" i="0">
+              <a:solidFill>
+                <a:srgbClr val="FFFFFF"/>
+              </a:solidFill>
+              <a:latin typeface="Calibri"/>
+            </a:endParaRPr>
           </a:p>
         </p:txBody>
       </p:sp>
@@ -13094,6 +13497,12 @@
               </a:rPr>
               <a:t>(what we did NOT use)</a:t>
             </a:r>
+            <a:endParaRPr sz="1100" b="0" i="1" dirty="0">
+              <a:solidFill>
+                <a:srgbClr val="FFFFFF"/>
+              </a:solidFill>
+              <a:latin typeface="Calibri"/>
+            </a:endParaRPr>
           </a:p>
         </p:txBody>
       </p:sp>
@@ -13137,7 +13546,6 @@
           <a:lstStyle/>
           <a:p>
             <a:pPr algn="ctr"/>
-            <a:endParaRPr/>
           </a:p>
         </p:txBody>
       </p:sp>
@@ -13185,6 +13593,12 @@
               </a:rPr>
               <a:t>•  Driven by Fed rate expectations</a:t>
             </a:r>
+            <a:endParaRPr sz="1300" b="0" i="0" dirty="0">
+              <a:solidFill>
+                <a:srgbClr val="1A1A2E"/>
+              </a:solidFill>
+              <a:latin typeface="Calibri"/>
+            </a:endParaRPr>
           </a:p>
           <a:p>
             <a:pPr algn="l">
@@ -13201,6 +13615,12 @@
               </a:rPr>
               <a:t>•  Driven by inflation expectations</a:t>
             </a:r>
+            <a:endParaRPr sz="1300" b="0" i="0" dirty="0">
+              <a:solidFill>
+                <a:srgbClr val="1A1A2E"/>
+              </a:solidFill>
+              <a:latin typeface="Calibri"/>
+            </a:endParaRPr>
           </a:p>
           <a:p>
             <a:pPr algn="l">
@@ -13217,6 +13637,12 @@
               </a:rPr>
               <a:t>•  Driven by safe-asset demand</a:t>
             </a:r>
+            <a:endParaRPr sz="1300" b="0" i="0" dirty="0">
+              <a:solidFill>
+                <a:srgbClr val="1A1A2E"/>
+              </a:solidFill>
+              <a:latin typeface="Calibri"/>
+            </a:endParaRPr>
           </a:p>
           <a:p>
             <a:pPr algn="l">
@@ -13233,6 +13659,12 @@
               </a:rPr>
               <a:t>•  Cannot distinguish these three forces</a:t>
             </a:r>
+            <a:endParaRPr sz="1300" b="0" i="0" dirty="0">
+              <a:solidFill>
+                <a:srgbClr val="1A1A2E"/>
+              </a:solidFill>
+              <a:latin typeface="Calibri"/>
+            </a:endParaRPr>
           </a:p>
         </p:txBody>
       </p:sp>
@@ -13276,7 +13708,6 @@
           <a:lstStyle/>
           <a:p>
             <a:pPr algn="ctr"/>
-            <a:endParaRPr/>
           </a:p>
         </p:txBody>
       </p:sp>
@@ -13312,6 +13743,12 @@
               </a:rPr>
               <a:t>OIS Rate</a:t>
             </a:r>
+            <a:endParaRPr sz="1300" b="1" i="0">
+              <a:solidFill>
+                <a:srgbClr val="FFFFFF"/>
+              </a:solidFill>
+              <a:latin typeface="Calibri"/>
+            </a:endParaRPr>
           </a:p>
         </p:txBody>
       </p:sp>
@@ -13347,6 +13784,12 @@
               </a:rPr>
               <a:t>(the subtracted benchmark)</a:t>
             </a:r>
+            <a:endParaRPr sz="1100" b="0" i="1" dirty="0">
+              <a:solidFill>
+                <a:srgbClr val="FFFFFF"/>
+              </a:solidFill>
+              <a:latin typeface="Calibri"/>
+            </a:endParaRPr>
           </a:p>
         </p:txBody>
       </p:sp>
@@ -13390,7 +13833,6 @@
           <a:lstStyle/>
           <a:p>
             <a:pPr algn="ctr"/>
-            <a:endParaRPr/>
           </a:p>
         </p:txBody>
       </p:sp>
@@ -13438,6 +13880,12 @@
               </a:rPr>
               <a:t>•  Reflects expected Fed Funds path</a:t>
             </a:r>
+            <a:endParaRPr sz="1300" b="0" i="0" dirty="0">
+              <a:solidFill>
+                <a:srgbClr val="1A1A2E"/>
+              </a:solidFill>
+              <a:latin typeface="Calibri"/>
+            </a:endParaRPr>
           </a:p>
           <a:p>
             <a:pPr algn="l">
@@ -13454,6 +13902,12 @@
               </a:rPr>
               <a:t>•  Pure monetary policy expectations</a:t>
             </a:r>
+            <a:endParaRPr sz="1300" b="0" i="0" dirty="0">
+              <a:solidFill>
+                <a:srgbClr val="1A1A2E"/>
+              </a:solidFill>
+              <a:latin typeface="Calibri"/>
+            </a:endParaRPr>
           </a:p>
           <a:p>
             <a:pPr algn="l">
@@ -13470,6 +13924,12 @@
               </a:rPr>
               <a:t>•  No T-bill specific demand embedded</a:t>
             </a:r>
+            <a:endParaRPr sz="1300" b="0" i="0" dirty="0">
+              <a:solidFill>
+                <a:srgbClr val="1A1A2E"/>
+              </a:solidFill>
+              <a:latin typeface="Calibri"/>
+            </a:endParaRPr>
           </a:p>
           <a:p>
             <a:pPr algn="l">
@@ -13486,6 +13946,12 @@
               </a:rPr>
               <a:t>•  Moves with macro, not stablecoin flows</a:t>
             </a:r>
+            <a:endParaRPr sz="1300" b="0" i="0" dirty="0">
+              <a:solidFill>
+                <a:srgbClr val="1A1A2E"/>
+              </a:solidFill>
+              <a:latin typeface="Calibri"/>
+            </a:endParaRPr>
           </a:p>
         </p:txBody>
       </p:sp>
@@ -13529,7 +13995,6 @@
           <a:lstStyle/>
           <a:p>
             <a:pPr algn="ctr"/>
-            <a:endParaRPr/>
           </a:p>
         </p:txBody>
       </p:sp>
@@ -13565,6 +14030,12 @@
               </a:rPr>
               <a:t>OIS–Treasury Spread</a:t>
             </a:r>
+            <a:endParaRPr sz="1300" b="1" i="0">
+              <a:solidFill>
+                <a:srgbClr val="FFFFFF"/>
+              </a:solidFill>
+              <a:latin typeface="Calibri"/>
+            </a:endParaRPr>
           </a:p>
         </p:txBody>
       </p:sp>
@@ -13600,6 +14071,12 @@
               </a:rPr>
               <a:t>(our dependent variable)</a:t>
             </a:r>
+            <a:endParaRPr sz="1100" b="0" i="1" dirty="0">
+              <a:solidFill>
+                <a:srgbClr val="FFFFFF"/>
+              </a:solidFill>
+              <a:latin typeface="Calibri"/>
+            </a:endParaRPr>
           </a:p>
         </p:txBody>
       </p:sp>
@@ -13643,7 +14120,6 @@
           <a:lstStyle/>
           <a:p>
             <a:pPr algn="ctr"/>
-            <a:endParaRPr/>
           </a:p>
         </p:txBody>
       </p:sp>
@@ -13691,6 +14167,12 @@
               </a:rPr>
               <a:t>❖  = T-bill yield  −  OIS rate</a:t>
             </a:r>
+            <a:endParaRPr sz="1300" b="0" i="0" dirty="0">
+              <a:solidFill>
+                <a:srgbClr val="1A1A2E"/>
+              </a:solidFill>
+              <a:latin typeface="Calibri"/>
+            </a:endParaRPr>
           </a:p>
           <a:p>
             <a:pPr algn="l">
@@ -13707,6 +14189,12 @@
               </a:rPr>
               <a:t>❖  Cancels out monetary policy</a:t>
             </a:r>
+            <a:endParaRPr sz="1300" b="0" i="0" dirty="0">
+              <a:solidFill>
+                <a:srgbClr val="1A1A2E"/>
+              </a:solidFill>
+              <a:latin typeface="Calibri"/>
+            </a:endParaRPr>
           </a:p>
           <a:p>
             <a:pPr algn="l">
@@ -13723,6 +14211,12 @@
               </a:rPr>
               <a:t>❖  Isolates convenience / safety premium</a:t>
             </a:r>
+            <a:endParaRPr sz="1300" b="0" i="0" dirty="0">
+              <a:solidFill>
+                <a:srgbClr val="1A1A2E"/>
+              </a:solidFill>
+              <a:latin typeface="Calibri"/>
+            </a:endParaRPr>
           </a:p>
           <a:p>
             <a:pPr algn="l">
@@ -13739,6 +14233,12 @@
               </a:rPr>
               <a:t>❖  Only moves when T-bill demand shifts</a:t>
             </a:r>
+            <a:endParaRPr sz="1300" b="0" i="0" dirty="0">
+              <a:solidFill>
+                <a:srgbClr val="1A1A2E"/>
+              </a:solidFill>
+              <a:latin typeface="Calibri"/>
+            </a:endParaRPr>
           </a:p>
         </p:txBody>
       </p:sp>
@@ -13782,7 +14282,6 @@
           <a:lstStyle/>
           <a:p>
             <a:pPr algn="ctr"/>
-            <a:endParaRPr/>
           </a:p>
         </p:txBody>
       </p:sp>
@@ -13818,6 +14317,12 @@
               </a:rPr>
               <a:t>Literature precedent for using this spread as the convenience yield:</a:t>
             </a:r>
+            <a:endParaRPr sz="1300" b="1" i="0">
+              <a:solidFill>
+                <a:srgbClr val="FFFFFF"/>
+              </a:solidFill>
+              <a:latin typeface="Calibri"/>
+            </a:endParaRPr>
           </a:p>
         </p:txBody>
       </p:sp>
@@ -13861,7 +14366,6 @@
           <a:lstStyle/>
           <a:p>
             <a:pPr algn="ctr"/>
-            <a:endParaRPr/>
           </a:p>
         </p:txBody>
       </p:sp>
@@ -13898,6 +14402,12 @@
               <a:t>Krishnamurthy &amp;
 Vissing-Jorgensen (2012)</a:t>
             </a:r>
+            <a:endParaRPr sz="1200" b="1" i="0">
+              <a:solidFill>
+                <a:srgbClr val="1B3A72"/>
+              </a:solidFill>
+              <a:latin typeface="Calibri"/>
+            </a:endParaRPr>
           </a:p>
         </p:txBody>
       </p:sp>
@@ -13942,6 +14452,12 @@
               </a:rPr>
               <a:t>safety and liquidity</a:t>
             </a:r>
+            <a:endParaRPr sz="1100" b="1" i="0" dirty="0">
+              <a:solidFill>
+                <a:srgbClr val="1A1A2E"/>
+              </a:solidFill>
+              <a:latin typeface="Calibri"/>
+            </a:endParaRPr>
           </a:p>
         </p:txBody>
       </p:sp>
@@ -13985,7 +14501,6 @@
           <a:lstStyle/>
           <a:p>
             <a:pPr algn="ctr"/>
-            <a:endParaRPr/>
           </a:p>
         </p:txBody>
       </p:sp>
@@ -14021,6 +14536,12 @@
               </a:rPr>
               <a:t>Nagel (2016)</a:t>
             </a:r>
+            <a:endParaRPr sz="1200" b="1" i="0">
+              <a:solidFill>
+                <a:srgbClr val="1B3A72"/>
+              </a:solidFill>
+              <a:latin typeface="Calibri"/>
+            </a:endParaRPr>
           </a:p>
         </p:txBody>
       </p:sp>
@@ -14074,6 +14595,12 @@
               </a:rPr>
               <a:t>of near-money assets</a:t>
             </a:r>
+            <a:endParaRPr sz="1100" b="0" i="0" dirty="0">
+              <a:solidFill>
+                <a:srgbClr val="1A1A2E"/>
+              </a:solidFill>
+              <a:latin typeface="Calibri"/>
+            </a:endParaRPr>
           </a:p>
         </p:txBody>
       </p:sp>
@@ -14117,7 +14644,6 @@
           <a:lstStyle/>
           <a:p>
             <a:pPr algn="ctr"/>
-            <a:endParaRPr/>
           </a:p>
         </p:txBody>
       </p:sp>
@@ -14154,6 +14680,12 @@
               <a:t>Greenwood, Hanson
 &amp; Stein (2015)</a:t>
             </a:r>
+            <a:endParaRPr sz="1200" b="1" i="0">
+              <a:solidFill>
+                <a:srgbClr val="1B3A72"/>
+              </a:solidFill>
+              <a:latin typeface="Calibri"/>
+            </a:endParaRPr>
           </a:p>
         </p:txBody>
       </p:sp>
@@ -14198,6 +14730,12 @@
               </a:rPr>
               <a:t>insensitive to monetary policy</a:t>
             </a:r>
+            <a:endParaRPr sz="1100" b="1" i="0" dirty="0">
+              <a:solidFill>
+                <a:srgbClr val="1A1A2E"/>
+              </a:solidFill>
+              <a:latin typeface="Calibri"/>
+            </a:endParaRPr>
           </a:p>
         </p:txBody>
       </p:sp>
@@ -14241,7 +14779,6 @@
           <a:lstStyle/>
           <a:p>
             <a:pPr algn="ctr"/>
-            <a:endParaRPr/>
           </a:p>
         </p:txBody>
       </p:sp>
@@ -14277,6 +14814,12 @@
               </a:rPr>
               <a:t>When stablecoin issuers buy T-bills, T-bill yields fall but OIS does not move. Only the spread captures this demand shock. Raw yields would conflate it with Fed policy.</a:t>
             </a:r>
+            <a:endParaRPr sz="1700" b="1" i="0">
+              <a:solidFill>
+                <a:srgbClr val="FFFFFF"/>
+              </a:solidFill>
+              <a:latin typeface="Calibri"/>
+            </a:endParaRPr>
           </a:p>
         </p:txBody>
       </p:sp>
@@ -14386,7 +14929,6 @@
           <a:lstStyle/>
           <a:p>
             <a:pPr algn="ctr"/>
-            <a:endParaRPr/>
           </a:p>
         </p:txBody>
       </p:sp>
@@ -14430,7 +14972,6 @@
           <a:lstStyle/>
           <a:p>
             <a:pPr algn="ctr"/>
-            <a:endParaRPr/>
           </a:p>
         </p:txBody>
       </p:sp>
@@ -14466,6 +15007,12 @@
               </a:rPr>
               <a:t>What is the Buffer Condition?</a:t>
             </a:r>
+            <a:endParaRPr sz="2600" b="0" i="0">
+              <a:solidFill>
+                <a:srgbClr val="FFFFFF"/>
+              </a:solidFill>
+              <a:latin typeface="Calibri"/>
+            </a:endParaRPr>
           </a:p>
         </p:txBody>
       </p:sp>
@@ -14501,6 +15048,12 @@
               </a:rPr>
               <a:t>4</a:t>
             </a:r>
+            <a:endParaRPr sz="1300" b="0" i="0">
+              <a:solidFill>
+                <a:srgbClr val="555566"/>
+              </a:solidFill>
+              <a:latin typeface="Calibri"/>
+            </a:endParaRPr>
           </a:p>
         </p:txBody>
       </p:sp>
@@ -14544,7 +15097,6 @@
           <a:lstStyle/>
           <a:p>
             <a:pPr algn="ctr"/>
-            <a:endParaRPr/>
           </a:p>
         </p:txBody>
       </p:sp>
@@ -14580,6 +15132,12 @@
               </a:rPr>
               <a:t>Definition:</a:t>
             </a:r>
+            <a:endParaRPr sz="1400" b="1" i="0">
+              <a:solidFill>
+                <a:srgbClr val="AAC4E8"/>
+              </a:solidFill>
+              <a:latin typeface="Calibri"/>
+            </a:endParaRPr>
           </a:p>
         </p:txBody>
       </p:sp>
@@ -14636,6 +15194,13 @@
               </a:rPr>
               <a:t> Cash-Equivalent Reserves  ÷  Total Stablecoin Supply</a:t>
             </a:r>
+            <a:endParaRPr sz="1800" b="1" i="0" dirty="0">
+              <a:solidFill>
+                <a:srgbClr val="FFFFFF"/>
+              </a:solidFill>
+              <a:latin typeface="AppleGothic" pitchFamily="2" charset="-127"/>
+              <a:ea typeface="AppleGothic" pitchFamily="2" charset="-127"/>
+            </a:endParaRPr>
           </a:p>
         </p:txBody>
       </p:sp>
@@ -14671,6 +15236,12 @@
               </a:rPr>
               <a:t>Estimated from Hansen (2000) threshold regression:   L*  =  13%  of supply</a:t>
             </a:r>
+            <a:endParaRPr sz="1300" b="0" i="1" dirty="0">
+              <a:solidFill>
+                <a:srgbClr val="AAC4E8"/>
+              </a:solidFill>
+              <a:latin typeface="Calibri"/>
+            </a:endParaRPr>
           </a:p>
         </p:txBody>
       </p:sp>
@@ -14714,7 +15285,6 @@
           <a:lstStyle/>
           <a:p>
             <a:pPr algn="ctr"/>
-            <a:endParaRPr/>
           </a:p>
         </p:txBody>
       </p:sp>
@@ -14750,6 +15320,12 @@
               </a:rPr>
               <a:t>LOW BUFFER  (L &lt; 13%)</a:t>
             </a:r>
+            <a:endParaRPr sz="1400" b="1" i="0">
+              <a:solidFill>
+                <a:srgbClr val="FFFFFF"/>
+              </a:solidFill>
+              <a:latin typeface="Calibri"/>
+            </a:endParaRPr>
           </a:p>
         </p:txBody>
       </p:sp>
@@ -14785,6 +15361,12 @@
               </a:rPr>
               <a:t>e.g. Tether in May 2022: ~5–8% cash</a:t>
             </a:r>
+            <a:endParaRPr sz="1100" b="0" i="1" dirty="0">
+              <a:solidFill>
+                <a:srgbClr val="555566"/>
+              </a:solidFill>
+              <a:latin typeface="Calibri"/>
+            </a:endParaRPr>
           </a:p>
         </p:txBody>
       </p:sp>
@@ -14828,7 +15410,6 @@
           <a:lstStyle/>
           <a:p>
             <a:pPr algn="ctr"/>
-            <a:endParaRPr/>
           </a:p>
         </p:txBody>
       </p:sp>
@@ -14876,6 +15457,12 @@
               </a:rPr>
               <a:t>❖  Issuer holds mostly T-bills, very little cash</a:t>
             </a:r>
+            <a:endParaRPr sz="1300" b="0" i="0" dirty="0">
+              <a:solidFill>
+                <a:srgbClr val="1A1A2E"/>
+              </a:solidFill>
+              <a:latin typeface="Calibri"/>
+            </a:endParaRPr>
           </a:p>
           <a:p>
             <a:pPr algn="l">
@@ -14892,6 +15479,12 @@
               </a:rPr>
               <a:t>→  When investors redeem stablecoins for dollars...</a:t>
             </a:r>
+            <a:endParaRPr sz="1300" b="0" i="0" dirty="0">
+              <a:solidFill>
+                <a:srgbClr val="1A1A2E"/>
+              </a:solidFill>
+              <a:latin typeface="Calibri"/>
+            </a:endParaRPr>
           </a:p>
           <a:p>
             <a:pPr algn="l">
@@ -14908,6 +15501,12 @@
               </a:rPr>
               <a:t>→  Issuer MUST sell T-bills to raise the cash</a:t>
             </a:r>
+            <a:endParaRPr sz="1300" b="0" i="0" dirty="0">
+              <a:solidFill>
+                <a:srgbClr val="1A1A2E"/>
+              </a:solidFill>
+              <a:latin typeface="Calibri"/>
+            </a:endParaRPr>
           </a:p>
           <a:p>
             <a:pPr algn="l">
@@ -14924,6 +15523,12 @@
               </a:rPr>
               <a:t>→  This selling pushes T-bill yields UP</a:t>
             </a:r>
+            <a:endParaRPr sz="1300" b="0" i="0" dirty="0">
+              <a:solidFill>
+                <a:srgbClr val="1A1A2E"/>
+              </a:solidFill>
+              <a:latin typeface="Calibri"/>
+            </a:endParaRPr>
           </a:p>
           <a:p>
             <a:pPr algn="l">
@@ -14940,6 +15545,12 @@
               </a:rPr>
               <a:t>→  OIS-Treasury spread SPIKES (CAR is positive)</a:t>
             </a:r>
+            <a:endParaRPr sz="1300" b="0" i="0" dirty="0">
+              <a:solidFill>
+                <a:srgbClr val="1A1A2E"/>
+              </a:solidFill>
+              <a:latin typeface="Calibri"/>
+            </a:endParaRPr>
           </a:p>
         </p:txBody>
       </p:sp>
@@ -14983,7 +15594,6 @@
           <a:lstStyle/>
           <a:p>
             <a:pPr algn="ctr"/>
-            <a:endParaRPr/>
           </a:p>
         </p:txBody>
       </p:sp>
@@ -15019,6 +15629,12 @@
               </a:rPr>
               <a:t>The issuer becomes a forced seller into an already-stressed market.</a:t>
             </a:r>
+            <a:endParaRPr sz="1200" b="1" i="0">
+              <a:solidFill>
+                <a:srgbClr val="FFFFFF"/>
+              </a:solidFill>
+              <a:latin typeface="Calibri"/>
+            </a:endParaRPr>
           </a:p>
         </p:txBody>
       </p:sp>
@@ -15062,7 +15678,6 @@
           <a:lstStyle/>
           <a:p>
             <a:pPr algn="ctr"/>
-            <a:endParaRPr/>
           </a:p>
         </p:txBody>
       </p:sp>
@@ -15098,6 +15713,12 @@
               </a:rPr>
               <a:t>HIGH BUFFER  (L ≥ 13%)</a:t>
             </a:r>
+            <a:endParaRPr sz="1400" b="1" i="0">
+              <a:solidFill>
+                <a:srgbClr val="FFFFFF"/>
+              </a:solidFill>
+              <a:latin typeface="Calibri"/>
+            </a:endParaRPr>
           </a:p>
         </p:txBody>
       </p:sp>
@@ -15133,6 +15754,12 @@
               </a:rPr>
               <a:t>e.g. Circle in March 2023: ~18–22% cash</a:t>
             </a:r>
+            <a:endParaRPr sz="1100" b="0" i="1">
+              <a:solidFill>
+                <a:srgbClr val="555566"/>
+              </a:solidFill>
+              <a:latin typeface="Calibri"/>
+            </a:endParaRPr>
           </a:p>
         </p:txBody>
       </p:sp>
@@ -15176,7 +15803,6 @@
           <a:lstStyle/>
           <a:p>
             <a:pPr algn="ctr"/>
-            <a:endParaRPr/>
           </a:p>
         </p:txBody>
       </p:sp>
@@ -15224,6 +15850,12 @@
               </a:rPr>
               <a:t>❖  Issuer holds substantial cash reserves</a:t>
             </a:r>
+            <a:endParaRPr sz="1300" b="0" i="0" dirty="0">
+              <a:solidFill>
+                <a:srgbClr val="1A1A2E"/>
+              </a:solidFill>
+              <a:latin typeface="Calibri"/>
+            </a:endParaRPr>
           </a:p>
           <a:p>
             <a:pPr algn="l">
@@ -15240,6 +15872,12 @@
               </a:rPr>
               <a:t>→  When investors redeem stablecoins for dollars...</a:t>
             </a:r>
+            <a:endParaRPr sz="1300" b="0" i="0" dirty="0">
+              <a:solidFill>
+                <a:srgbClr val="1A1A2E"/>
+              </a:solidFill>
+              <a:latin typeface="Calibri"/>
+            </a:endParaRPr>
           </a:p>
           <a:p>
             <a:pPr algn="l">
@@ -15256,6 +15894,12 @@
               </a:rPr>
               <a:t>→  Issuer pays out from cash — T-bills untouched</a:t>
             </a:r>
+            <a:endParaRPr sz="1300" b="0" i="0" dirty="0">
+              <a:solidFill>
+                <a:srgbClr val="1A1A2E"/>
+              </a:solidFill>
+              <a:latin typeface="Calibri"/>
+            </a:endParaRPr>
           </a:p>
           <a:p>
             <a:pPr algn="l">
@@ -15272,6 +15916,12 @@
               </a:rPr>
               <a:t>→  No forced selling, no T-bill yield pressure</a:t>
             </a:r>
+            <a:endParaRPr sz="1300" b="0" i="0" dirty="0">
+              <a:solidFill>
+                <a:srgbClr val="1A1A2E"/>
+              </a:solidFill>
+              <a:latin typeface="Calibri"/>
+            </a:endParaRPr>
           </a:p>
           <a:p>
             <a:pPr algn="l">
@@ -15288,6 +15938,12 @@
               </a:rPr>
               <a:t>→  Spread does NOT spike from issuer behavior</a:t>
             </a:r>
+            <a:endParaRPr sz="1300" b="0" i="0" dirty="0">
+              <a:solidFill>
+                <a:srgbClr val="1A1A2E"/>
+              </a:solidFill>
+              <a:latin typeface="Calibri"/>
+            </a:endParaRPr>
           </a:p>
         </p:txBody>
       </p:sp>
@@ -15331,7 +15987,6 @@
           <a:lstStyle/>
           <a:p>
             <a:pPr algn="ctr"/>
-            <a:endParaRPr/>
           </a:p>
         </p:txBody>
       </p:sp>
@@ -15367,6 +16022,12 @@
               </a:rPr>
               <a:t>The cash buffer absorbs the redemption shock. T-bill market is insulated.</a:t>
             </a:r>
+            <a:endParaRPr sz="1200" b="1" i="0">
+              <a:solidFill>
+                <a:srgbClr val="FFFFFF"/>
+              </a:solidFill>
+              <a:latin typeface="Calibri"/>
+            </a:endParaRPr>
           </a:p>
         </p:txBody>
       </p:sp>
@@ -15410,7 +16071,6 @@
           <a:lstStyle/>
           <a:p>
             <a:pPr algn="ctr"/>
-            <a:endParaRPr/>
           </a:p>
         </p:txBody>
       </p:sp>
@@ -15464,6 +16124,12 @@
               </a:rPr>
               <a:t> Treasury markets from one that disrupts them.</a:t>
             </a:r>
+            <a:endParaRPr sz="1700" b="1" i="0" dirty="0">
+              <a:solidFill>
+                <a:srgbClr val="FFFFFF"/>
+              </a:solidFill>
+              <a:latin typeface="Calibri"/>
+            </a:endParaRPr>
           </a:p>
         </p:txBody>
       </p:sp>
@@ -15591,8 +16257,15 @@
                 <a:latin typeface="Calibri"/>
                 <a:sym typeface="+mn-ea"/>
               </a:rPr>
-              <a:t> and Conditioned Event Study</a:t>
-            </a:r>
+              <a:t> and Event Study</a:t>
+            </a:r>
+            <a:endParaRPr lang="en-US" sz="2400" dirty="0">
+              <a:solidFill>
+                <a:srgbClr val="FFFFFF"/>
+              </a:solidFill>
+              <a:latin typeface="Calibri"/>
+              <a:sym typeface="+mn-ea"/>
+            </a:endParaRPr>
           </a:p>
         </p:txBody>
       </p:sp>
@@ -15646,6 +16319,13 @@
               </a:rPr>
               <a:t>CAR = Cumulative Abnormal Return on the OIS–Treasury Spread</a:t>
             </a:r>
+            <a:endParaRPr b="1">
+              <a:solidFill>
+                <a:srgbClr val="FFFFFF"/>
+              </a:solidFill>
+              <a:latin typeface="Calibri"/>
+              <a:sym typeface="+mn-ea"/>
+            </a:endParaRPr>
           </a:p>
         </p:txBody>
       </p:sp>
@@ -15901,6 +16581,13 @@
               </a:rPr>
               <a:t>X-axis: trading days relative to event (day 0 = crisis date)</a:t>
             </a:r>
+            <a:endParaRPr lang="en-US" altLang="en-US" dirty="0">
+              <a:solidFill>
+                <a:srgbClr val="1A1A2E"/>
+              </a:solidFill>
+              <a:latin typeface="Calibri"/>
+              <a:sym typeface="+mn-ea"/>
+            </a:endParaRPr>
           </a:p>
           <a:p>
             <a:pPr algn="l"/>
@@ -16043,6 +16730,13 @@
               </a:rPr>
               <a:t>Cumulative Abnormal OIS–Treasury Spread</a:t>
             </a:r>
+            <a:endParaRPr b="1">
+              <a:solidFill>
+                <a:srgbClr val="FFFFFF"/>
+              </a:solidFill>
+              <a:latin typeface="Calibri"/>
+              <a:sym typeface="+mn-ea"/>
+            </a:endParaRPr>
           </a:p>
         </p:txBody>
       </p:sp>
@@ -16090,27 +16784,29 @@
               <a:rPr lang="en-US" altLang="en-US" sz="1400"/>
               <a:t>Event 2: USDT partial depeg — May 12, 2022 (3 days later) | Buffer: LOW (~5–8%) | CAR = +8.85 pp*** | Unlike UST (algorithmic, no real reserves), USDT was fiat-backed — a direct confidence run on real reserves. Same buffer. Same CAR. Different trigger. Same outcome.</a:t>
             </a:r>
+            <a:endParaRPr lang="en-US" altLang="en-US" sz="1400"/>
           </a:p>
         </p:txBody>
       </p:sp>
       <p:pic>
         <p:nvPicPr>
-          <p:cNvPr id="41" name="Picture 40"/>
+          <p:cNvPr id="4" name="Picture 3" descr="event_study_cars.png"/>
           <p:cNvPicPr>
             <a:picLocks noChangeAspect="1"/>
           </p:cNvPicPr>
           <p:nvPr/>
         </p:nvPicPr>
         <p:blipFill>
-          <a:blip r:embed="rId3"/>
+          <a:blip r:embed="rId1"/>
+          <a:srcRect t="10403" r="67422" b="1944"/>
           <a:stretch>
             <a:fillRect/>
           </a:stretch>
         </p:blipFill>
         <p:spPr>
           <a:xfrm>
-            <a:off x="6082030" y="1672590"/>
-            <a:ext cx="5603240" cy="3735705"/>
+            <a:off x="7341235" y="1680210"/>
+            <a:ext cx="2564130" cy="3741420"/>
           </a:xfrm>
           <a:prstGeom prst="rect">
             <a:avLst/>
@@ -16336,7 +17032,7 @@
                                           </p:stCondLst>
                                         </p:cTn>
                                         <p:tgtEl>
-                                          <p:spTgt spid="41"/>
+                                          <p:spTgt spid="4"/>
                                         </p:tgtEl>
                                         <p:attrNameLst>
                                           <p:attrName>style.visibility</p:attrName>
@@ -16494,7 +17190,6 @@
           <a:lstStyle/>
           <a:p>
             <a:pPr algn="ctr"/>
-            <a:endParaRPr/>
           </a:p>
         </p:txBody>
       </p:sp>
@@ -16538,7 +17233,6 @@
           <a:lstStyle/>
           <a:p>
             <a:pPr algn="ctr"/>
-            <a:endParaRPr/>
           </a:p>
         </p:txBody>
       </p:sp>
@@ -16610,6 +17304,12 @@
               </a:rPr>
               <a:t>, 2023</a:t>
             </a:r>
+            <a:endParaRPr sz="2600" b="0" i="0" dirty="0">
+              <a:solidFill>
+                <a:srgbClr val="FFFFFF"/>
+              </a:solidFill>
+              <a:latin typeface="Calibri"/>
+            </a:endParaRPr>
           </a:p>
         </p:txBody>
       </p:sp>
@@ -16653,7 +17353,6 @@
           <a:lstStyle/>
           <a:p>
             <a:pPr algn="ctr"/>
-            <a:endParaRPr/>
           </a:p>
         </p:txBody>
       </p:sp>
@@ -16689,6 +17388,12 @@
               </a:rPr>
               <a:t>Buffer Condition: HIGH   |   $3.3B (8% of reserves) frozen at SVB   |   CAR = −18.01 pp***   |   t-stat &gt; 30</a:t>
             </a:r>
+            <a:endParaRPr sz="1300" b="1" i="0">
+              <a:solidFill>
+                <a:srgbClr val="FFFFFF"/>
+              </a:solidFill>
+              <a:latin typeface="Calibri"/>
+            </a:endParaRPr>
           </a:p>
         </p:txBody>
       </p:sp>
@@ -16732,7 +17437,6 @@
           <a:lstStyle/>
           <a:p>
             <a:pPr algn="ctr"/>
-            <a:endParaRPr/>
           </a:p>
         </p:txBody>
       </p:sp>
@@ -16768,6 +17472,12 @@
               </a:rPr>
               <a:t>What happened</a:t>
             </a:r>
+            <a:endParaRPr sz="1400" b="1" i="0">
+              <a:solidFill>
+                <a:srgbClr val="1B3A72"/>
+              </a:solidFill>
+              <a:latin typeface="Calibri"/>
+            </a:endParaRPr>
           </a:p>
         </p:txBody>
       </p:sp>
@@ -16807,40 +17517,6 @@
               </a:rPr>
               <a:t>❖  SVB failed on March 10, 2023 — the second-largest US bank failure in history</a:t>
             </a:r>
-          </a:p>
-          <a:p>
-            <a:pPr algn="l">
-              <a:spcBef>
-                <a:spcPts val="600"/>
-              </a:spcBef>
-            </a:pPr>
-            <a:r>
-              <a:rPr sz="1200" b="0" i="0" dirty="0">
-                <a:solidFill>
-                  <a:srgbClr val="1A1A2E"/>
-                </a:solidFill>
-                <a:latin typeface="Calibri"/>
-              </a:rPr>
-              <a:t>❖  Circle disclosed: $3.3 billion of USDC reserves were held at SVB — temporarily inaccessible</a:t>
-            </a:r>
-            <a:r>
-              <a:rPr lang="en-US" sz="1200" b="0" i="0" dirty="0">
-                <a:solidFill>
-                  <a:srgbClr val="1A1A2E"/>
-                </a:solidFill>
-                <a:latin typeface="Calibri"/>
-              </a:rPr>
-              <a:t> *still had 6.4B at alternativ</a:t>
-            </a:r>
-            <a:r>
-              <a:rPr lang="en-US" sz="1200" dirty="0">
-                <a:solidFill>
-                  <a:srgbClr val="1A1A2E"/>
-                </a:solidFill>
-                <a:latin typeface="Calibri"/>
-              </a:rPr>
-              <a:t>e banks</a:t>
-            </a:r>
             <a:endParaRPr sz="1200" b="0" i="0" dirty="0">
               <a:solidFill>
                 <a:srgbClr val="1A1A2E"/>
@@ -16861,44 +17537,32 @@
                 </a:solidFill>
                 <a:latin typeface="Calibri"/>
               </a:rPr>
-              <a:t>❖  USDC </a:t>
-            </a:r>
-            <a:r>
-              <a:rPr sz="1200" b="0" i="0" dirty="0" err="1">
+              <a:t>❖  Circle disclosed: $3.3 billion of USDC reserves were held at SVB — temporarily inaccessible</a:t>
+            </a:r>
+            <a:r>
+              <a:rPr lang="en-US" sz="1200" b="0" i="0" dirty="0">
                 <a:solidFill>
                   <a:srgbClr val="1A1A2E"/>
                 </a:solidFill>
                 <a:latin typeface="Calibri"/>
               </a:rPr>
-              <a:t>depegged</a:t>
-            </a:r>
-            <a:r>
-              <a:rPr sz="1200" b="0" i="0" dirty="0">
+              <a:t> *still had 6.4B at alternativ</a:t>
+            </a:r>
+            <a:r>
+              <a:rPr lang="en-US" sz="1200" dirty="0">
                 <a:solidFill>
                   <a:srgbClr val="1A1A2E"/>
                 </a:solidFill>
                 <a:latin typeface="Calibri"/>
               </a:rPr>
-              <a:t> to ~$0.87 on March 11 — a larger nominal </a:t>
-            </a:r>
-            <a:r>
-              <a:rPr sz="1200" b="0" i="0" dirty="0" err="1">
-                <a:solidFill>
-                  <a:srgbClr val="1A1A2E"/>
-                </a:solidFill>
-                <a:latin typeface="Calibri"/>
-              </a:rPr>
-              <a:t>depeg</a:t>
-            </a:r>
-            <a:r>
-              <a:rPr sz="1200" b="0" i="0" dirty="0">
-                <a:solidFill>
-                  <a:srgbClr val="1A1A2E"/>
-                </a:solidFill>
-                <a:latin typeface="Calibri"/>
-              </a:rPr>
-              <a:t> than USDT in 2022</a:t>
-            </a:r>
+              <a:t>e banks</a:t>
+            </a:r>
+            <a:endParaRPr sz="1200" b="0" i="0" dirty="0">
+              <a:solidFill>
+                <a:srgbClr val="1A1A2E"/>
+              </a:solidFill>
+              <a:latin typeface="Calibri"/>
+            </a:endParaRPr>
           </a:p>
           <a:p>
             <a:pPr algn="l">
@@ -16913,8 +17577,72 @@
                 </a:solidFill>
                 <a:latin typeface="Calibri"/>
               </a:rPr>
+              <a:t>❖  USDC </a:t>
+            </a:r>
+            <a:r>
+              <a:rPr sz="1200" b="0" i="0" dirty="0" err="1">
+                <a:solidFill>
+                  <a:srgbClr val="1A1A2E"/>
+                </a:solidFill>
+                <a:latin typeface="Calibri"/>
+              </a:rPr>
+              <a:t>depegged</a:t>
+            </a:r>
+            <a:r>
+              <a:rPr sz="1200" b="0" i="0" dirty="0">
+                <a:solidFill>
+                  <a:srgbClr val="1A1A2E"/>
+                </a:solidFill>
+                <a:latin typeface="Calibri"/>
+              </a:rPr>
+              <a:t> to ~$0.87 on March 11 — a larger nominal </a:t>
+            </a:r>
+            <a:r>
+              <a:rPr sz="1200" b="0" i="0" dirty="0" err="1">
+                <a:solidFill>
+                  <a:srgbClr val="1A1A2E"/>
+                </a:solidFill>
+                <a:latin typeface="Calibri"/>
+              </a:rPr>
+              <a:t>depeg</a:t>
+            </a:r>
+            <a:r>
+              <a:rPr sz="1200" b="0" i="0" dirty="0">
+                <a:solidFill>
+                  <a:srgbClr val="1A1A2E"/>
+                </a:solidFill>
+                <a:latin typeface="Calibri"/>
+              </a:rPr>
+              <a:t> than USDT in 2022</a:t>
+            </a:r>
+            <a:endParaRPr sz="1200" b="0" i="0" dirty="0">
+              <a:solidFill>
+                <a:srgbClr val="1A1A2E"/>
+              </a:solidFill>
+              <a:latin typeface="Calibri"/>
+            </a:endParaRPr>
+          </a:p>
+          <a:p>
+            <a:pPr algn="l">
+              <a:spcBef>
+                <a:spcPts val="600"/>
+              </a:spcBef>
+            </a:pPr>
+            <a:r>
+              <a:rPr sz="1200" b="0" i="0" dirty="0">
+                <a:solidFill>
+                  <a:srgbClr val="1A1A2E"/>
+                </a:solidFill>
+                <a:latin typeface="Calibri"/>
+              </a:rPr>
               <a:t>❖  But by March 13, after the US government guaranteed SVB deposits, USDC returned to $1.00</a:t>
             </a:r>
+            <a:endParaRPr sz="1200" b="0" i="0" dirty="0">
+              <a:solidFill>
+                <a:srgbClr val="1A1A2E"/>
+              </a:solidFill>
+              <a:latin typeface="Calibri"/>
+            </a:endParaRPr>
           </a:p>
         </p:txBody>
       </p:sp>
@@ -16995,6 +17723,13 @@
               </a:rPr>
               <a:t>Circle did NOT need to sell T-bills — government backstop resolved the crisis before forced liquidation.</a:t>
             </a:r>
+            <a:endParaRPr sz="1000">
+              <a:solidFill>
+                <a:srgbClr val="1A1A2E"/>
+              </a:solidFill>
+              <a:latin typeface="Calibri"/>
+              <a:sym typeface="+mn-ea"/>
+            </a:endParaRPr>
           </a:p>
         </p:txBody>
       </p:sp>
@@ -17332,7 +18067,7 @@
           <p:nvPr/>
         </p:nvPicPr>
         <p:blipFill>
-          <a:blip r:embed="rId3"/>
+          <a:blip r:embed="rId1"/>
           <a:srcRect l="65880" t="8036" r="816"/>
           <a:stretch>
             <a:fillRect/>
@@ -17414,7 +18149,7 @@
               </a:rPr>
             </a:br>
             <a:r>
-              <a:rPr lang="en-US" dirty="0">
+              <a:rPr lang="en-US" sz="1600" dirty="0">
                 <a:solidFill>
                   <a:schemeClr val="bg1"/>
                 </a:solidFill>
@@ -17424,7 +18159,7 @@
               <a:t>2022  Low buffer (LUNA + USDT avg)  →  CAR = +8.9 pp   →  Forced T-bill selling pushed the spread UP</a:t>
             </a:r>
             <a:br>
-              <a:rPr lang="en-US" b="1" dirty="0">
+              <a:rPr lang="en-US" sz="1600" b="1" dirty="0">
                 <a:solidFill>
                   <a:schemeClr val="bg1"/>
                 </a:solidFill>
@@ -17433,17 +18168,17 @@
               </a:rPr>
             </a:br>
             <a:r>
-              <a:rPr lang="en-US" dirty="0">
+              <a:rPr lang="en-US" sz="1600" dirty="0">
                 <a:solidFill>
                   <a:schemeClr val="bg1"/>
                 </a:solidFill>
                 <a:latin typeface="Calibri"/>
                 <a:sym typeface="+mn-ea"/>
               </a:rPr>
-              <a:t>2023  High buffer (SVB)               →  CAR = −18.0 pp  →  No forced selling + flight-to-safety buying pushed the spread DOWN</a:t>
+              <a:t>2023  High buffer (SVB) →  CAR = −18.0 pp  →  No forced selling + flight-to-safety buying pushed the spread DOWN</a:t>
             </a:r>
             <a:br>
-              <a:rPr lang="en-US" b="1" dirty="0">
+              <a:rPr lang="en-US" sz="1600" b="1" dirty="0">
                 <a:solidFill>
                   <a:schemeClr val="bg1"/>
                 </a:solidFill>
@@ -17452,7 +18187,7 @@
               </a:rPr>
             </a:br>
             <a:r>
-              <a:rPr lang="en-US" dirty="0">
+              <a:rPr lang="en-US" sz="1600" dirty="0">
                 <a:solidFill>
                   <a:schemeClr val="bg1"/>
                 </a:solidFill>
@@ -17462,7 +18197,7 @@
               <a:t>Swing: +8.9 − (−18.0) = 26.9 pp  →  The buffer regime alone flipped both the direction and size of the Treasury market impact</a:t>
             </a:r>
             <a:br>
-              <a:rPr lang="en-US" b="1" dirty="0">
+              <a:rPr lang="en-US" sz="1600" b="1" dirty="0">
                 <a:solidFill>
                   <a:schemeClr val="bg1"/>
                 </a:solidFill>
@@ -17471,7 +18206,7 @@
               </a:rPr>
             </a:br>
             <a:r>
-              <a:rPr lang="en-US" dirty="0">
+              <a:rPr lang="en-US" sz="1600" dirty="0">
                 <a:solidFill>
                   <a:schemeClr val="bg1"/>
                 </a:solidFill>
@@ -17480,6 +18215,13 @@
               </a:rPr>
               <a:t>Welch t = 15.22***  |  p &lt; 0.001  →  The probability this difference is random is essentially zero</a:t>
             </a:r>
+            <a:endParaRPr lang="en-US" sz="1600" dirty="0">
+              <a:solidFill>
+                <a:schemeClr val="bg1"/>
+              </a:solidFill>
+              <a:latin typeface="Calibri"/>
+              <a:sym typeface="+mn-ea"/>
+            </a:endParaRPr>
           </a:p>
         </p:txBody>
       </p:sp>
@@ -17548,7 +18290,6 @@
           <a:lstStyle/>
           <a:p>
             <a:pPr algn="ctr"/>
-            <a:endParaRPr/>
           </a:p>
         </p:txBody>
       </p:sp>
@@ -17592,7 +18333,6 @@
           <a:lstStyle/>
           <a:p>
             <a:pPr algn="ctr"/>
-            <a:endParaRPr/>
           </a:p>
         </p:txBody>
       </p:sp>
@@ -17628,6 +18368,12 @@
               </a:rPr>
               <a:t>Roadmap</a:t>
             </a:r>
+            <a:endParaRPr sz="2600" b="0" i="0" dirty="0">
+              <a:solidFill>
+                <a:srgbClr val="FFFFFF"/>
+              </a:solidFill>
+              <a:latin typeface="Calibri"/>
+            </a:endParaRPr>
           </a:p>
         </p:txBody>
       </p:sp>
@@ -17671,7 +18417,6 @@
           <a:lstStyle/>
           <a:p>
             <a:pPr algn="ctr"/>
-            <a:endParaRPr/>
           </a:p>
         </p:txBody>
       </p:sp>
@@ -17707,6 +18452,12 @@
               </a:rPr>
               <a:t>What we have done</a:t>
             </a:r>
+            <a:endParaRPr sz="1500" b="1" i="0">
+              <a:solidFill>
+                <a:srgbClr val="FFFFFF"/>
+              </a:solidFill>
+              <a:latin typeface="Calibri"/>
+            </a:endParaRPr>
           </a:p>
         </p:txBody>
       </p:sp>
@@ -17750,7 +18501,6 @@
           <a:lstStyle/>
           <a:p>
             <a:pPr algn="ctr"/>
-            <a:endParaRPr/>
           </a:p>
         </p:txBody>
       </p:sp>
@@ -17786,6 +18536,12 @@
               </a:rPr>
               <a:t>Theory</a:t>
             </a:r>
+            <a:endParaRPr sz="1100" b="1" i="0">
+              <a:solidFill>
+                <a:srgbClr val="FFFFFF"/>
+              </a:solidFill>
+              <a:latin typeface="Calibri"/>
+            </a:endParaRPr>
           </a:p>
         </p:txBody>
       </p:sp>
@@ -17829,7 +18585,6 @@
           <a:lstStyle/>
           <a:p>
             <a:pPr algn="ctr"/>
-            <a:endParaRPr/>
           </a:p>
         </p:txBody>
       </p:sp>
@@ -17883,6 +18638,12 @@
               </a:rPr>
               <a:t>, and liquid buffer L</a:t>
             </a:r>
+            <a:endParaRPr sz="1200" b="0" i="0" dirty="0">
+              <a:solidFill>
+                <a:srgbClr val="1A1A2E"/>
+              </a:solidFill>
+              <a:latin typeface="Calibri"/>
+            </a:endParaRPr>
           </a:p>
         </p:txBody>
       </p:sp>
@@ -17926,7 +18687,6 @@
           <a:lstStyle/>
           <a:p>
             <a:pPr algn="ctr"/>
-            <a:endParaRPr/>
           </a:p>
         </p:txBody>
       </p:sp>
@@ -17962,6 +18722,12 @@
               </a:rPr>
               <a:t>Regression</a:t>
             </a:r>
+            <a:endParaRPr sz="1100" b="1" i="0">
+              <a:solidFill>
+                <a:srgbClr val="FFFFFF"/>
+              </a:solidFill>
+              <a:latin typeface="Calibri"/>
+            </a:endParaRPr>
           </a:p>
         </p:txBody>
       </p:sp>
@@ -18005,7 +18771,6 @@
           <a:lstStyle/>
           <a:p>
             <a:pPr algn="ctr"/>
-            <a:endParaRPr/>
           </a:p>
         </p:txBody>
       </p:sp>
@@ -18041,6 +18806,12 @@
               </a:rPr>
               <a:t>✓  β₁ = −6.02** — stablecoin growth compresses OIS–Treasury spreads (privilege amplification)</a:t>
             </a:r>
+            <a:endParaRPr sz="1200" b="0" i="0" dirty="0">
+              <a:solidFill>
+                <a:srgbClr val="1A1A2E"/>
+              </a:solidFill>
+              <a:latin typeface="Calibri"/>
+            </a:endParaRPr>
           </a:p>
         </p:txBody>
       </p:sp>
@@ -18084,7 +18855,6 @@
           <a:lstStyle/>
           <a:p>
             <a:pPr algn="ctr"/>
-            <a:endParaRPr/>
           </a:p>
         </p:txBody>
       </p:sp>
@@ -18120,6 +18890,12 @@
               </a:rPr>
               <a:t>Threshold</a:t>
             </a:r>
+            <a:endParaRPr sz="1100" b="1" i="0">
+              <a:solidFill>
+                <a:srgbClr val="FFFFFF"/>
+              </a:solidFill>
+              <a:latin typeface="Calibri"/>
+            </a:endParaRPr>
           </a:p>
         </p:txBody>
       </p:sp>
@@ -18163,7 +18939,6 @@
           <a:lstStyle/>
           <a:p>
             <a:pPr algn="ctr"/>
-            <a:endParaRPr/>
           </a:p>
         </p:txBody>
       </p:sp>
@@ -18199,6 +18974,12 @@
               </a:rPr>
               <a:t>✓  Hansen (2000) threshold at q* = 13% liquid cash — separates safe from fragile regime</a:t>
             </a:r>
+            <a:endParaRPr sz="1200" b="0" i="0" dirty="0">
+              <a:solidFill>
+                <a:srgbClr val="1A1A2E"/>
+              </a:solidFill>
+              <a:latin typeface="Calibri"/>
+            </a:endParaRPr>
           </a:p>
         </p:txBody>
       </p:sp>
@@ -18242,7 +19023,6 @@
           <a:lstStyle/>
           <a:p>
             <a:pPr algn="ctr"/>
-            <a:endParaRPr/>
           </a:p>
         </p:txBody>
       </p:sp>
@@ -18278,6 +19058,12 @@
               </a:rPr>
               <a:t>Event Study</a:t>
             </a:r>
+            <a:endParaRPr sz="1100" b="1" i="0">
+              <a:solidFill>
+                <a:srgbClr val="FFFFFF"/>
+              </a:solidFill>
+              <a:latin typeface="Calibri"/>
+            </a:endParaRPr>
           </a:p>
         </p:txBody>
       </p:sp>
@@ -18321,7 +19107,6 @@
           <a:lstStyle/>
           <a:p>
             <a:pPr algn="ctr"/>
-            <a:endParaRPr/>
           </a:p>
         </p:txBody>
       </p:sp>
@@ -18375,6 +19160,12 @@
               </a:rPr>
               <a:t>, SVB) — 27 pp CAR swing between low/high buffer regimes</a:t>
             </a:r>
+            <a:endParaRPr sz="1200" b="0" i="0" dirty="0">
+              <a:solidFill>
+                <a:srgbClr val="1A1A2E"/>
+              </a:solidFill>
+              <a:latin typeface="Calibri"/>
+            </a:endParaRPr>
           </a:p>
         </p:txBody>
       </p:sp>
@@ -18418,7 +19209,6 @@
           <a:lstStyle/>
           <a:p>
             <a:pPr algn="ctr"/>
-            <a:endParaRPr/>
           </a:p>
         </p:txBody>
       </p:sp>
@@ -18454,6 +19244,12 @@
               </a:rPr>
               <a:t>Robustness</a:t>
             </a:r>
+            <a:endParaRPr sz="1100" b="1" i="0">
+              <a:solidFill>
+                <a:srgbClr val="FFFFFF"/>
+              </a:solidFill>
+              <a:latin typeface="Calibri"/>
+            </a:endParaRPr>
           </a:p>
         </p:txBody>
       </p:sp>
@@ -18497,7 +19293,6 @@
           <a:lstStyle/>
           <a:p>
             <a:pPr algn="ctr"/>
-            <a:endParaRPr/>
           </a:p>
         </p:txBody>
       </p:sp>
@@ -18533,6 +19328,12 @@
               </a:rPr>
               <a:t>✓  Mean-centering (VIF), Engle-Granger cointegration, first-differenced spec, post-2023 subsample</a:t>
             </a:r>
+            <a:endParaRPr sz="1200" b="0" i="0">
+              <a:solidFill>
+                <a:srgbClr val="1A1A2E"/>
+              </a:solidFill>
+              <a:latin typeface="Calibri"/>
+            </a:endParaRPr>
           </a:p>
         </p:txBody>
       </p:sp>
@@ -18576,7 +19377,6 @@
           <a:lstStyle/>
           <a:p>
             <a:pPr algn="ctr"/>
-            <a:endParaRPr/>
           </a:p>
         </p:txBody>
       </p:sp>
@@ -18612,6 +19412,12 @@
               </a:rPr>
               <a:t>This deck</a:t>
             </a:r>
+            <a:endParaRPr sz="1100" b="1" i="0">
+              <a:solidFill>
+                <a:srgbClr val="FFFFFF"/>
+              </a:solidFill>
+              <a:latin typeface="Calibri"/>
+            </a:endParaRPr>
           </a:p>
         </p:txBody>
       </p:sp>
@@ -18655,7 +19461,6 @@
           <a:lstStyle/>
           <a:p>
             <a:pPr algn="ctr"/>
-            <a:endParaRPr/>
           </a:p>
         </p:txBody>
       </p:sp>
@@ -18691,6 +19496,12 @@
               </a:rPr>
               <a:t>✓  Clarified: why OIS spread, what the buffer condition means, how to read CAR, what each event was</a:t>
             </a:r>
+            <a:endParaRPr sz="1200" b="0" i="0">
+              <a:solidFill>
+                <a:srgbClr val="1A1A2E"/>
+              </a:solidFill>
+              <a:latin typeface="Calibri"/>
+            </a:endParaRPr>
           </a:p>
         </p:txBody>
       </p:sp>
@@ -18734,7 +19545,6 @@
           <a:lstStyle/>
           <a:p>
             <a:pPr algn="ctr"/>
-            <a:endParaRPr/>
           </a:p>
         </p:txBody>
       </p:sp>
@@ -18770,6 +19580,12 @@
               </a:rPr>
               <a:t>Planned for next week</a:t>
             </a:r>
+            <a:endParaRPr sz="1500" b="1" i="0" dirty="0">
+              <a:solidFill>
+                <a:srgbClr val="FFFFFF"/>
+              </a:solidFill>
+              <a:latin typeface="Calibri"/>
+            </a:endParaRPr>
           </a:p>
         </p:txBody>
       </p:sp>
@@ -18813,7 +19629,6 @@
           <a:lstStyle/>
           <a:p>
             <a:pPr algn="ctr"/>
-            <a:endParaRPr/>
           </a:p>
         </p:txBody>
       </p:sp>
@@ -18861,6 +19676,12 @@
               </a:rPr>
               <a:t>Placebo Test</a:t>
             </a:r>
+            <a:endParaRPr sz="1600" b="1" i="0" dirty="0">
+              <a:solidFill>
+                <a:srgbClr val="D4632A"/>
+              </a:solidFill>
+              <a:latin typeface="Calibri"/>
+            </a:endParaRPr>
           </a:p>
           <a:p>
             <a:pPr algn="l">
@@ -18877,6 +19698,12 @@
               </a:rPr>
               <a:t>Run the same event study methodology on 3 ordinary days with no known stablecoin stress event:</a:t>
             </a:r>
+            <a:endParaRPr sz="1300" b="0" i="0" dirty="0">
+              <a:solidFill>
+                <a:srgbClr val="1A1A2E"/>
+              </a:solidFill>
+              <a:latin typeface="Calibri"/>
+            </a:endParaRPr>
           </a:p>
           <a:p>
             <a:pPr algn="l">
@@ -18893,6 +19720,12 @@
               </a:rPr>
               <a:t>❖  Jun 15, 2021  (Low buffer)  —  Quiet summer — no redemption pressure</a:t>
             </a:r>
+            <a:endParaRPr sz="1200" b="0" i="0" dirty="0">
+              <a:solidFill>
+                <a:srgbClr val="1A1A2E"/>
+              </a:solidFill>
+              <a:latin typeface="Calibri"/>
+            </a:endParaRPr>
           </a:p>
           <a:p>
             <a:pPr algn="l">
@@ -18909,6 +19742,12 @@
               </a:rPr>
               <a:t>❖  Oct 12, 2021  (Low buffer)  —  Pre-LUNA, no crypto-specific stress</a:t>
             </a:r>
+            <a:endParaRPr sz="1200" b="0" i="0" dirty="0">
+              <a:solidFill>
+                <a:srgbClr val="1A1A2E"/>
+              </a:solidFill>
+              <a:latin typeface="Calibri"/>
+            </a:endParaRPr>
           </a:p>
           <a:p>
             <a:pPr algn="l">
@@ -18925,6 +19764,12 @@
               </a:rPr>
               <a:t>❖  Jul 15, 2025  (High buffer)  —  Post-SVB recovery, stable spread period</a:t>
             </a:r>
+            <a:endParaRPr sz="1200" b="0" i="0" dirty="0">
+              <a:solidFill>
+                <a:srgbClr val="1A1A2E"/>
+              </a:solidFill>
+              <a:latin typeface="Calibri"/>
+            </a:endParaRPr>
           </a:p>
           <a:p>
             <a:pPr algn="l">
@@ -18941,6 +19786,12 @@
               </a:rPr>
               <a:t> </a:t>
             </a:r>
+            <a:endParaRPr sz="600" b="0" i="0" dirty="0">
+              <a:solidFill>
+                <a:srgbClr val="1A1A2E"/>
+              </a:solidFill>
+              <a:latin typeface="Calibri"/>
+            </a:endParaRPr>
           </a:p>
           <a:p>
             <a:pPr algn="l">
@@ -18957,6 +19808,12 @@
               </a:rPr>
               <a:t>What we expect to show:</a:t>
             </a:r>
+            <a:endParaRPr sz="1400" b="1" i="0" dirty="0">
+              <a:solidFill>
+                <a:srgbClr val="1B3A72"/>
+              </a:solidFill>
+              <a:latin typeface="Calibri"/>
+            </a:endParaRPr>
           </a:p>
           <a:p>
             <a:pPr algn="l">
@@ -18973,6 +19830,12 @@
               </a:rPr>
               <a:t>CARs on placebo days should be near 0 pp — confirming that the 9–18 pp swings in actual events are caused by the crisis itself, not by random market drift.</a:t>
             </a:r>
+            <a:endParaRPr sz="1300" b="0" i="0" dirty="0">
+              <a:solidFill>
+                <a:srgbClr val="1A1A2E"/>
+              </a:solidFill>
+              <a:latin typeface="Calibri"/>
+            </a:endParaRPr>
           </a:p>
           <a:p>
             <a:pPr algn="l">
@@ -18989,6 +19852,12 @@
               </a:rPr>
               <a:t> </a:t>
             </a:r>
+            <a:endParaRPr sz="600" b="0" i="0" dirty="0">
+              <a:solidFill>
+                <a:srgbClr val="1A1A2E"/>
+              </a:solidFill>
+              <a:latin typeface="Calibri"/>
+            </a:endParaRPr>
           </a:p>
           <a:p>
             <a:pPr algn="l">
@@ -19005,6 +19874,12 @@
               </a:rPr>
               <a:t>Preliminary result: placebo mean |CAR| = 0.55 pp vs. actual mean |CAR| = 11.92 pp  →  21.7× difference</a:t>
             </a:r>
+            <a:endParaRPr sz="1200" b="1" i="1" dirty="0">
+              <a:solidFill>
+                <a:srgbClr val="D4632A"/>
+              </a:solidFill>
+              <a:latin typeface="Calibri"/>
+            </a:endParaRPr>
           </a:p>
         </p:txBody>
       </p:sp>
@@ -19091,14 +19966,14 @@
           <p:nvPr/>
         </p:nvPicPr>
         <p:blipFill>
-          <a:blip r:embed="rId3">
+          <a:blip r:embed="rId1">
             <a:lum bright="70000" contrast="-70000"/>
             <a:extLst>
               <a:ext uri="{BEBA8EAE-BF5A-486C-A8C5-ECC9F3942E4B}">
                 <a14:imgProps xmlns:a14="http://schemas.microsoft.com/office/drawing/2010/main">
-                  <a14:imgLayer r:embed="rId4">
+                  <a14:imgLayer r:embed="rId2">
                     <a14:imgEffect>
-                      <a14:artisticPhotocopy detail="2"/>
+                      <a14:artisticPhotocopy trans="30000" detail="2"/>
                     </a14:imgEffect>
                   </a14:imgLayer>
                 </a14:imgProps>
@@ -19178,6 +20053,13 @@
               </a:rPr>
               <a:t>Thank You</a:t>
             </a:r>
+            <a:endParaRPr lang="en-US" altLang="ko-KR" sz="2400" dirty="0">
+              <a:solidFill>
+                <a:prstClr val="white"/>
+              </a:solidFill>
+              <a:latin typeface="Hiragino Kaku Gothic Std W8" panose="020B0800000000000000" pitchFamily="34" charset="-128"/>
+              <a:ea typeface="Hiragino Kaku Gothic Std W8" panose="020B0800000000000000" pitchFamily="34" charset="-128"/>
+            </a:endParaRPr>
           </a:p>
           <a:p>
             <a:pPr algn="ctr" defTabSz="914400" latinLnBrk="1">
@@ -19223,6 +20105,11 @@
               </a:rPr>
               <a:t>Yonsei GSIS 2026-1 </a:t>
             </a:r>
+            <a:endParaRPr lang="en-US" altLang="ko-KR" sz="1800" b="1" dirty="0">
+              <a:solidFill>
+                <a:schemeClr val="bg1"/>
+              </a:solidFill>
+            </a:endParaRPr>
           </a:p>
           <a:p>
             <a:r>
@@ -19595,7 +20482,6 @@
       </a:style>
     </a:lnDef>
   </a:objectDefaults>
-  <a:extraClrSchemeLst/>
   <a:extLst>
     <a:ext uri="{05A4C25C-085E-4340-85A3-A5531E510DB2}">
       <thm15:themeFamily xmlns:thm15="http://schemas.microsoft.com/office/thememl/2012/main" name="Office Theme" id="{62F939B6-93AF-4DB8-9C6B-D6C7DFDC589F}" vid="{4A3C46E8-61CC-4603-A589-7422A47A8E4A}"/>
@@ -19876,7 +20762,6 @@
       </a:style>
     </a:lnDef>
   </a:objectDefaults>
-  <a:extraClrSchemeLst/>
   <a:extLst>
     <a:ext uri="{05A4C25C-085E-4340-85A3-A5531E510DB2}">
       <thm15:themeFamily xmlns:thm15="http://schemas.microsoft.com/office/thememl/2012/main" name="Office Theme" id="{62F939B6-93AF-4DB8-9C6B-D6C7DFDC589F}" vid="{4A3C46E8-61CC-4603-A589-7422A47A8E4A}"/>

--- a/presentations/0526_Stablecoin_Exorbitant_Privilege.pptx
+++ b/presentations/0526_Stablecoin_Exorbitant_Privilege.pptx
@@ -16782,7 +16782,7 @@
             <a:pPr algn="ctr"/>
             <a:r>
               <a:rPr lang="en-US" altLang="en-US" sz="1400"/>
-              <a:t>Event 2: USDT partial depeg — May 12, 2022 (3 days later) | Buffer: LOW (~5–8%) | CAR = +8.85 pp*** | Unlike UST (algorithmic, no real reserves), USDT was fiat-backed — a direct confidence run on real reserves. Same buffer. Same CAR. Different trigger. Same outcome.</a:t>
+              <a:t>Event 2: USDT partial depeg — May 12, 2022 (3 days later) | Buffer: LOW (~5–8%) | CAR = +8.85 pp*** | Unlike UST (algorithmic, no real reserves), USDT was fiat-backed — a direct confidence run on real reserves. With buffer. Same CAR. Different trigger. Same outcome.</a:t>
             </a:r>
             <a:endParaRPr lang="en-US" altLang="en-US" sz="1400"/>
           </a:p>

--- a/presentations/0526_Stablecoin_Exorbitant_Privilege.pptx
+++ b/presentations/0526_Stablecoin_Exorbitant_Privilege.pptx
@@ -16748,8 +16748,8 @@
         </p:nvSpPr>
         <p:spPr>
           <a:xfrm>
-            <a:off x="6186170" y="5503545"/>
-            <a:ext cx="5382895" cy="1253490"/>
+            <a:off x="6303010" y="5407660"/>
+            <a:ext cx="5382895" cy="1349375"/>
           </a:xfrm>
           <a:prstGeom prst="rect">
             <a:avLst/>
@@ -16798,15 +16798,15 @@
         </p:nvPicPr>
         <p:blipFill>
           <a:blip r:embed="rId1"/>
-          <a:srcRect t="10403" r="67422" b="1944"/>
+          <a:srcRect l="-1978" t="8917" r="33930" b="-618"/>
           <a:stretch>
             <a:fillRect/>
           </a:stretch>
         </p:blipFill>
         <p:spPr>
           <a:xfrm>
-            <a:off x="7341235" y="1680210"/>
-            <a:ext cx="2564130" cy="3741420"/>
+            <a:off x="6270625" y="1823720"/>
+            <a:ext cx="5289550" cy="3583940"/>
           </a:xfrm>
           <a:prstGeom prst="rect">
             <a:avLst/>
@@ -17126,7 +17126,7 @@
       <p:bldP spid="10" grpId="1" animBg="1"/>
       <p:bldP spid="38" grpId="0" animBg="1"/>
       <p:bldP spid="38" grpId="1" animBg="1"/>
-      <p:bldP spid="39" grpId="0" animBg="1"/>
+      <p:bldP spid="39" grpId="0" bldLvl="0" animBg="1"/>
       <p:bldP spid="39" grpId="1" animBg="1"/>
     </p:bldLst>
   </p:timing>
